--- a/docs/res/media/sources images iAccess.pptx
+++ b/docs/res/media/sources images iAccess.pptx
@@ -262,17 +262,17 @@
           <a:effectLst/>
           <a:extLst>
             <a:ext uri="{FAA26D3D-D897-4be2-8F04-BA451C77F1D7}">
-              <ma14:placeholderFlag xmlns:ma14="http://schemas.microsoft.com/office/mac/drawingml/2011/main" xmlns="" val="1"/>
+              <ma14:placeholderFlag xmlns="" xmlns:ma14="http://schemas.microsoft.com/office/mac/drawingml/2011/main" val="1"/>
             </a:ext>
             <a:ext uri="{909E8E84-426E-40dd-AFC4-6F175D3DCCD1}">
-              <a14:hiddenFill xmlns:a14="http://schemas.microsoft.com/office/drawing/2010/main" xmlns="">
+              <a14:hiddenFill xmlns="" xmlns:a14="http://schemas.microsoft.com/office/drawing/2010/main">
                 <a:solidFill>
                   <a:srgbClr val="FFFFFF"/>
                 </a:solidFill>
               </a14:hiddenFill>
             </a:ext>
             <a:ext uri="{91240B29-F687-4f45-9708-019B960494DF}">
-              <a14:hiddenLine xmlns:a14="http://schemas.microsoft.com/office/drawing/2010/main" xmlns="" w="9525" cap="flat">
+              <a14:hiddenLine xmlns="" xmlns:a14="http://schemas.microsoft.com/office/drawing/2010/main" w="9525" cap="flat">
                 <a:solidFill>
                   <a:srgbClr val="000000"/>
                 </a:solidFill>
@@ -282,7 +282,7 @@
               </a14:hiddenLine>
             </a:ext>
             <a:ext uri="{AF507438-7753-43e0-B8FC-AC1667EBCBE1}">
-              <a14:hiddenEffects xmlns:a14="http://schemas.microsoft.com/office/drawing/2010/main" xmlns="">
+              <a14:hiddenEffects xmlns="" xmlns:a14="http://schemas.microsoft.com/office/drawing/2010/main">
                 <a:effectLst>
                   <a:outerShdw blurRad="63500" dist="38099" dir="2700000" algn="ctr" rotWithShape="0">
                     <a:schemeClr val="bg2">
@@ -320,17 +320,17 @@
           <a:effectLst/>
           <a:extLst>
             <a:ext uri="{FAA26D3D-D897-4be2-8F04-BA451C77F1D7}">
-              <ma14:placeholderFlag xmlns:ma14="http://schemas.microsoft.com/office/mac/drawingml/2011/main" xmlns="" val="1"/>
+              <ma14:placeholderFlag xmlns="" xmlns:ma14="http://schemas.microsoft.com/office/mac/drawingml/2011/main" val="1"/>
             </a:ext>
             <a:ext uri="{909E8E84-426E-40dd-AFC4-6F175D3DCCD1}">
-              <a14:hiddenFill xmlns:a14="http://schemas.microsoft.com/office/drawing/2010/main" xmlns="">
+              <a14:hiddenFill xmlns="" xmlns:a14="http://schemas.microsoft.com/office/drawing/2010/main">
                 <a:solidFill>
                   <a:srgbClr val="FFFFFF"/>
                 </a:solidFill>
               </a14:hiddenFill>
             </a:ext>
             <a:ext uri="{91240B29-F687-4f45-9708-019B960494DF}">
-              <a14:hiddenLine xmlns:a14="http://schemas.microsoft.com/office/drawing/2010/main" xmlns="" w="9525" cap="flat">
+              <a14:hiddenLine xmlns="" xmlns:a14="http://schemas.microsoft.com/office/drawing/2010/main" w="9525" cap="flat">
                 <a:solidFill>
                   <a:srgbClr val="000000"/>
                 </a:solidFill>
@@ -340,7 +340,7 @@
               </a14:hiddenLine>
             </a:ext>
             <a:ext uri="{AF507438-7753-43e0-B8FC-AC1667EBCBE1}">
-              <a14:hiddenEffects xmlns:a14="http://schemas.microsoft.com/office/drawing/2010/main" xmlns="">
+              <a14:hiddenEffects xmlns="" xmlns:a14="http://schemas.microsoft.com/office/drawing/2010/main">
                 <a:effectLst>
                   <a:outerShdw blurRad="63500" dist="38099" dir="2700000" algn="ctr" rotWithShape="0">
                     <a:schemeClr val="bg2">
@@ -390,17 +390,17 @@
           <a:effectLst/>
           <a:extLst>
             <a:ext uri="{FAA26D3D-D897-4be2-8F04-BA451C77F1D7}">
-              <ma14:placeholderFlag xmlns:ma14="http://schemas.microsoft.com/office/mac/drawingml/2011/main" xmlns="" val="1"/>
+              <ma14:placeholderFlag xmlns="" xmlns:ma14="http://schemas.microsoft.com/office/mac/drawingml/2011/main" val="1"/>
             </a:ext>
             <a:ext uri="{909E8E84-426E-40dd-AFC4-6F175D3DCCD1}">
-              <a14:hiddenFill xmlns:a14="http://schemas.microsoft.com/office/drawing/2010/main" xmlns="">
+              <a14:hiddenFill xmlns="" xmlns:a14="http://schemas.microsoft.com/office/drawing/2010/main">
                 <a:solidFill>
                   <a:srgbClr val="FFFFFF"/>
                 </a:solidFill>
               </a14:hiddenFill>
             </a:ext>
             <a:ext uri="{91240B29-F687-4f45-9708-019B960494DF}">
-              <a14:hiddenLine xmlns:a14="http://schemas.microsoft.com/office/drawing/2010/main" xmlns="" w="9525" cap="flat">
+              <a14:hiddenLine xmlns="" xmlns:a14="http://schemas.microsoft.com/office/drawing/2010/main" w="9525" cap="flat">
                 <a:solidFill>
                   <a:srgbClr val="000000"/>
                 </a:solidFill>
@@ -410,7 +410,7 @@
               </a14:hiddenLine>
             </a:ext>
             <a:ext uri="{AF507438-7753-43e0-B8FC-AC1667EBCBE1}">
-              <a14:hiddenEffects xmlns:a14="http://schemas.microsoft.com/office/drawing/2010/main" xmlns="">
+              <a14:hiddenEffects xmlns="" xmlns:a14="http://schemas.microsoft.com/office/drawing/2010/main">
                 <a:effectLst>
                   <a:outerShdw blurRad="63500" dist="38099" dir="2700000" algn="ctr" rotWithShape="0">
                     <a:schemeClr val="bg2">
@@ -481,17 +481,17 @@
           <a:effectLst/>
           <a:extLst>
             <a:ext uri="{FAA26D3D-D897-4be2-8F04-BA451C77F1D7}">
-              <ma14:placeholderFlag xmlns:ma14="http://schemas.microsoft.com/office/mac/drawingml/2011/main" xmlns="" val="1"/>
+              <ma14:placeholderFlag xmlns="" xmlns:ma14="http://schemas.microsoft.com/office/mac/drawingml/2011/main" val="1"/>
             </a:ext>
             <a:ext uri="{909E8E84-426E-40dd-AFC4-6F175D3DCCD1}">
-              <a14:hiddenFill xmlns:a14="http://schemas.microsoft.com/office/drawing/2010/main" xmlns="">
+              <a14:hiddenFill xmlns="" xmlns:a14="http://schemas.microsoft.com/office/drawing/2010/main">
                 <a:solidFill>
                   <a:srgbClr val="FFFFFF"/>
                 </a:solidFill>
               </a14:hiddenFill>
             </a:ext>
             <a:ext uri="{91240B29-F687-4f45-9708-019B960494DF}">
-              <a14:hiddenLine xmlns:a14="http://schemas.microsoft.com/office/drawing/2010/main" xmlns="" w="9525" cap="flat">
+              <a14:hiddenLine xmlns="" xmlns:a14="http://schemas.microsoft.com/office/drawing/2010/main" w="9525" cap="flat">
                 <a:solidFill>
                   <a:srgbClr val="000000"/>
                 </a:solidFill>
@@ -501,7 +501,7 @@
               </a14:hiddenLine>
             </a:ext>
             <a:ext uri="{AF507438-7753-43e0-B8FC-AC1667EBCBE1}">
-              <a14:hiddenEffects xmlns:a14="http://schemas.microsoft.com/office/drawing/2010/main" xmlns="">
+              <a14:hiddenEffects xmlns="" xmlns:a14="http://schemas.microsoft.com/office/drawing/2010/main">
                 <a:effectLst>
                   <a:outerShdw blurRad="63500" dist="38099" dir="2700000" algn="ctr" rotWithShape="0">
                     <a:schemeClr val="bg2">
@@ -572,17 +572,17 @@
           <a:effectLst/>
           <a:extLst>
             <a:ext uri="{FAA26D3D-D897-4be2-8F04-BA451C77F1D7}">
-              <ma14:placeholderFlag xmlns:ma14="http://schemas.microsoft.com/office/mac/drawingml/2011/main" xmlns="" val="1"/>
+              <ma14:placeholderFlag xmlns="" xmlns:ma14="http://schemas.microsoft.com/office/mac/drawingml/2011/main" val="1"/>
             </a:ext>
             <a:ext uri="{909E8E84-426E-40dd-AFC4-6F175D3DCCD1}">
-              <a14:hiddenFill xmlns:a14="http://schemas.microsoft.com/office/drawing/2010/main" xmlns="">
+              <a14:hiddenFill xmlns="" xmlns:a14="http://schemas.microsoft.com/office/drawing/2010/main">
                 <a:solidFill>
                   <a:srgbClr val="FFFFFF"/>
                 </a:solidFill>
               </a14:hiddenFill>
             </a:ext>
             <a:ext uri="{91240B29-F687-4f45-9708-019B960494DF}">
-              <a14:hiddenLine xmlns:a14="http://schemas.microsoft.com/office/drawing/2010/main" xmlns="" w="9525" cap="flat">
+              <a14:hiddenLine xmlns="" xmlns:a14="http://schemas.microsoft.com/office/drawing/2010/main" w="9525" cap="flat">
                 <a:solidFill>
                   <a:srgbClr val="000000"/>
                 </a:solidFill>
@@ -592,7 +592,7 @@
               </a14:hiddenLine>
             </a:ext>
             <a:ext uri="{AF507438-7753-43e0-B8FC-AC1667EBCBE1}">
-              <a14:hiddenEffects xmlns:a14="http://schemas.microsoft.com/office/drawing/2010/main" xmlns="">
+              <a14:hiddenEffects xmlns="" xmlns:a14="http://schemas.microsoft.com/office/drawing/2010/main">
                 <a:effectLst>
                   <a:outerShdw blurRad="63500" dist="38099" dir="2700000" algn="ctr" rotWithShape="0">
                     <a:schemeClr val="bg2">
@@ -663,17 +663,17 @@
           <a:effectLst/>
           <a:extLst>
             <a:ext uri="{FAA26D3D-D897-4be2-8F04-BA451C77F1D7}">
-              <ma14:placeholderFlag xmlns:ma14="http://schemas.microsoft.com/office/mac/drawingml/2011/main" xmlns="" val="1"/>
+              <ma14:placeholderFlag xmlns="" xmlns:ma14="http://schemas.microsoft.com/office/mac/drawingml/2011/main" val="1"/>
             </a:ext>
             <a:ext uri="{909E8E84-426E-40dd-AFC4-6F175D3DCCD1}">
-              <a14:hiddenFill xmlns:a14="http://schemas.microsoft.com/office/drawing/2010/main" xmlns="">
+              <a14:hiddenFill xmlns="" xmlns:a14="http://schemas.microsoft.com/office/drawing/2010/main">
                 <a:solidFill>
                   <a:srgbClr val="FFFFFF"/>
                 </a:solidFill>
               </a14:hiddenFill>
             </a:ext>
             <a:ext uri="{91240B29-F687-4f45-9708-019B960494DF}">
-              <a14:hiddenLine xmlns:a14="http://schemas.microsoft.com/office/drawing/2010/main" xmlns="" w="9525" cap="flat">
+              <a14:hiddenLine xmlns="" xmlns:a14="http://schemas.microsoft.com/office/drawing/2010/main" w="9525" cap="flat">
                 <a:solidFill>
                   <a:srgbClr val="000000"/>
                 </a:solidFill>
@@ -683,7 +683,7 @@
               </a14:hiddenLine>
             </a:ext>
             <a:ext uri="{AF507438-7753-43e0-B8FC-AC1667EBCBE1}">
-              <a14:hiddenEffects xmlns:a14="http://schemas.microsoft.com/office/drawing/2010/main" xmlns="">
+              <a14:hiddenEffects xmlns="" xmlns:a14="http://schemas.microsoft.com/office/drawing/2010/main">
                 <a:effectLst>
                   <a:outerShdw blurRad="63500" dist="38099" dir="2700000" algn="ctr" rotWithShape="0">
                     <a:schemeClr val="bg2">
@@ -974,7 +974,7 @@
           </a:ln>
           <a:extLst>
             <a:ext uri="{AF507438-7753-43e0-B8FC-AC1667EBCBE1}">
-              <a14:hiddenEffects xmlns:a14="http://schemas.microsoft.com/office/drawing/2010/main" xmlns="">
+              <a14:hiddenEffects xmlns="" xmlns:a14="http://schemas.microsoft.com/office/drawing/2010/main">
                 <a:effectLst>
                   <a:outerShdw blurRad="63500" dist="38099" dir="2700000" algn="ctr" rotWithShape="0">
                     <a:srgbClr val="000000">
@@ -1009,14 +1009,14 @@
           <a:ln/>
           <a:extLst>
             <a:ext uri="{909E8E84-426E-40dd-AFC4-6F175D3DCCD1}">
-              <a14:hiddenFill xmlns:a14="http://schemas.microsoft.com/office/drawing/2010/main" xmlns="">
+              <a14:hiddenFill xmlns="" xmlns:a14="http://schemas.microsoft.com/office/drawing/2010/main">
                 <a:solidFill>
                   <a:srgbClr val="FFFFFF"/>
                 </a:solidFill>
               </a14:hiddenFill>
             </a:ext>
             <a:ext uri="{91240B29-F687-4f45-9708-019B960494DF}">
-              <a14:hiddenLine xmlns:a14="http://schemas.microsoft.com/office/drawing/2010/main" xmlns="" w="9525" cap="flat">
+              <a14:hiddenLine xmlns="" xmlns:a14="http://schemas.microsoft.com/office/drawing/2010/main" w="9525" cap="flat">
                 <a:solidFill>
                   <a:srgbClr val="000000"/>
                 </a:solidFill>
@@ -1026,7 +1026,7 @@
               </a14:hiddenLine>
             </a:ext>
             <a:ext uri="{AF507438-7753-43e0-B8FC-AC1667EBCBE1}">
-              <a14:hiddenEffects xmlns:a14="http://schemas.microsoft.com/office/drawing/2010/main" xmlns="">
+              <a14:hiddenEffects xmlns="" xmlns:a14="http://schemas.microsoft.com/office/drawing/2010/main">
                 <a:effectLst>
                   <a:outerShdw blurRad="63500" dist="38099" dir="2700000" algn="ctr" rotWithShape="0">
                     <a:srgbClr val="000000">
@@ -1136,7 +1136,7 @@
           </a:ln>
           <a:extLst>
             <a:ext uri="{AF507438-7753-43e0-B8FC-AC1667EBCBE1}">
-              <a14:hiddenEffects xmlns:a14="http://schemas.microsoft.com/office/drawing/2010/main" xmlns="">
+              <a14:hiddenEffects xmlns="" xmlns:a14="http://schemas.microsoft.com/office/drawing/2010/main">
                 <a:effectLst>
                   <a:outerShdw blurRad="63500" dist="38099" dir="2700000" algn="ctr" rotWithShape="0">
                     <a:srgbClr val="000000">
@@ -1171,14 +1171,14 @@
           <a:ln/>
           <a:extLst>
             <a:ext uri="{909E8E84-426E-40dd-AFC4-6F175D3DCCD1}">
-              <a14:hiddenFill xmlns:a14="http://schemas.microsoft.com/office/drawing/2010/main" xmlns="">
+              <a14:hiddenFill xmlns="" xmlns:a14="http://schemas.microsoft.com/office/drawing/2010/main">
                 <a:solidFill>
                   <a:srgbClr val="FFFFFF"/>
                 </a:solidFill>
               </a14:hiddenFill>
             </a:ext>
             <a:ext uri="{91240B29-F687-4f45-9708-019B960494DF}">
-              <a14:hiddenLine xmlns:a14="http://schemas.microsoft.com/office/drawing/2010/main" xmlns="" w="9525" cap="flat">
+              <a14:hiddenLine xmlns="" xmlns:a14="http://schemas.microsoft.com/office/drawing/2010/main" w="9525" cap="flat">
                 <a:solidFill>
                   <a:srgbClr val="000000"/>
                 </a:solidFill>
@@ -1188,7 +1188,7 @@
               </a14:hiddenLine>
             </a:ext>
             <a:ext uri="{AF507438-7753-43e0-B8FC-AC1667EBCBE1}">
-              <a14:hiddenEffects xmlns:a14="http://schemas.microsoft.com/office/drawing/2010/main" xmlns="">
+              <a14:hiddenEffects xmlns="" xmlns:a14="http://schemas.microsoft.com/office/drawing/2010/main">
                 <a:effectLst>
                   <a:outerShdw blurRad="63500" dist="38099" dir="2700000" algn="ctr" rotWithShape="0">
                     <a:srgbClr val="000000">
@@ -1298,7 +1298,7 @@
           </a:ln>
           <a:extLst>
             <a:ext uri="{AF507438-7753-43e0-B8FC-AC1667EBCBE1}">
-              <a14:hiddenEffects xmlns:a14="http://schemas.microsoft.com/office/drawing/2010/main" xmlns="">
+              <a14:hiddenEffects xmlns="" xmlns:a14="http://schemas.microsoft.com/office/drawing/2010/main">
                 <a:effectLst>
                   <a:outerShdw blurRad="63500" dist="38099" dir="2700000" algn="ctr" rotWithShape="0">
                     <a:srgbClr val="000000">
@@ -1333,14 +1333,14 @@
           <a:ln/>
           <a:extLst>
             <a:ext uri="{909E8E84-426E-40dd-AFC4-6F175D3DCCD1}">
-              <a14:hiddenFill xmlns:a14="http://schemas.microsoft.com/office/drawing/2010/main" xmlns="">
+              <a14:hiddenFill xmlns="" xmlns:a14="http://schemas.microsoft.com/office/drawing/2010/main">
                 <a:solidFill>
                   <a:srgbClr val="FFFFFF"/>
                 </a:solidFill>
               </a14:hiddenFill>
             </a:ext>
             <a:ext uri="{91240B29-F687-4f45-9708-019B960494DF}">
-              <a14:hiddenLine xmlns:a14="http://schemas.microsoft.com/office/drawing/2010/main" xmlns="" w="9525" cap="flat">
+              <a14:hiddenLine xmlns="" xmlns:a14="http://schemas.microsoft.com/office/drawing/2010/main" w="9525" cap="flat">
                 <a:solidFill>
                   <a:srgbClr val="000000"/>
                 </a:solidFill>
@@ -1350,7 +1350,7 @@
               </a14:hiddenLine>
             </a:ext>
             <a:ext uri="{AF507438-7753-43e0-B8FC-AC1667EBCBE1}">
-              <a14:hiddenEffects xmlns:a14="http://schemas.microsoft.com/office/drawing/2010/main" xmlns="">
+              <a14:hiddenEffects xmlns="" xmlns:a14="http://schemas.microsoft.com/office/drawing/2010/main">
                 <a:effectLst>
                   <a:outerShdw blurRad="63500" dist="38099" dir="2700000" algn="ctr" rotWithShape="0">
                     <a:srgbClr val="000000">
@@ -4015,17 +4015,17 @@
           <a:effectLst/>
           <a:extLst>
             <a:ext uri="{FAA26D3D-D897-4be2-8F04-BA451C77F1D7}">
-              <ma14:placeholderFlag xmlns:ma14="http://schemas.microsoft.com/office/mac/drawingml/2011/main" xmlns="" val="1"/>
+              <ma14:placeholderFlag xmlns="" xmlns:ma14="http://schemas.microsoft.com/office/mac/drawingml/2011/main" val="1"/>
             </a:ext>
             <a:ext uri="{909E8E84-426E-40dd-AFC4-6F175D3DCCD1}">
-              <a14:hiddenFill xmlns:a14="http://schemas.microsoft.com/office/drawing/2010/main" xmlns="">
+              <a14:hiddenFill xmlns="" xmlns:a14="http://schemas.microsoft.com/office/drawing/2010/main">
                 <a:solidFill>
                   <a:srgbClr val="FFFFFF"/>
                 </a:solidFill>
               </a14:hiddenFill>
             </a:ext>
             <a:ext uri="{91240B29-F687-4f45-9708-019B960494DF}">
-              <a14:hiddenLine xmlns:a14="http://schemas.microsoft.com/office/drawing/2010/main" xmlns="" w="9525" cap="flat">
+              <a14:hiddenLine xmlns="" xmlns:a14="http://schemas.microsoft.com/office/drawing/2010/main" w="9525" cap="flat">
                 <a:solidFill>
                   <a:srgbClr val="000000"/>
                 </a:solidFill>
@@ -4035,7 +4035,7 @@
               </a14:hiddenLine>
             </a:ext>
             <a:ext uri="{AF507438-7753-43e0-B8FC-AC1667EBCBE1}">
-              <a14:hiddenEffects xmlns:a14="http://schemas.microsoft.com/office/drawing/2010/main" xmlns="">
+              <a14:hiddenEffects xmlns="" xmlns:a14="http://schemas.microsoft.com/office/drawing/2010/main">
                 <a:effectLst>
                   <a:outerShdw blurRad="63500" dist="38099" dir="2700000" algn="ctr" rotWithShape="0">
                     <a:schemeClr val="bg2">
@@ -4088,17 +4088,17 @@
           <a:effectLst/>
           <a:extLst>
             <a:ext uri="{FAA26D3D-D897-4be2-8F04-BA451C77F1D7}">
-              <ma14:placeholderFlag xmlns:ma14="http://schemas.microsoft.com/office/mac/drawingml/2011/main" xmlns="" val="1"/>
+              <ma14:placeholderFlag xmlns="" xmlns:ma14="http://schemas.microsoft.com/office/mac/drawingml/2011/main" val="1"/>
             </a:ext>
             <a:ext uri="{909E8E84-426E-40dd-AFC4-6F175D3DCCD1}">
-              <a14:hiddenFill xmlns:a14="http://schemas.microsoft.com/office/drawing/2010/main" xmlns="">
+              <a14:hiddenFill xmlns="" xmlns:a14="http://schemas.microsoft.com/office/drawing/2010/main">
                 <a:solidFill>
                   <a:srgbClr val="FFFFFF"/>
                 </a:solidFill>
               </a14:hiddenFill>
             </a:ext>
             <a:ext uri="{91240B29-F687-4f45-9708-019B960494DF}">
-              <a14:hiddenLine xmlns:a14="http://schemas.microsoft.com/office/drawing/2010/main" xmlns="" w="9525" cap="flat">
+              <a14:hiddenLine xmlns="" xmlns:a14="http://schemas.microsoft.com/office/drawing/2010/main" w="9525" cap="flat">
                 <a:solidFill>
                   <a:srgbClr val="000000"/>
                 </a:solidFill>
@@ -4108,7 +4108,7 @@
               </a14:hiddenLine>
             </a:ext>
             <a:ext uri="{AF507438-7753-43e0-B8FC-AC1667EBCBE1}">
-              <a14:hiddenEffects xmlns:a14="http://schemas.microsoft.com/office/drawing/2010/main" xmlns="">
+              <a14:hiddenEffects xmlns="" xmlns:a14="http://schemas.microsoft.com/office/drawing/2010/main">
                 <a:effectLst>
                   <a:outerShdw blurRad="63500" dist="38099" dir="2700000" algn="ctr" rotWithShape="0">
                     <a:schemeClr val="bg2">
@@ -4203,17 +4203,17 @@
           <a:effectLst/>
           <a:extLst>
             <a:ext uri="{FAA26D3D-D897-4be2-8F04-BA451C77F1D7}">
-              <ma14:placeholderFlag xmlns:ma14="http://schemas.microsoft.com/office/mac/drawingml/2011/main" xmlns="" val="1"/>
+              <ma14:placeholderFlag xmlns="" xmlns:ma14="http://schemas.microsoft.com/office/mac/drawingml/2011/main" val="1"/>
             </a:ext>
             <a:ext uri="{909E8E84-426E-40dd-AFC4-6F175D3DCCD1}">
-              <a14:hiddenFill xmlns:a14="http://schemas.microsoft.com/office/drawing/2010/main" xmlns="">
+              <a14:hiddenFill xmlns="" xmlns:a14="http://schemas.microsoft.com/office/drawing/2010/main">
                 <a:solidFill>
                   <a:srgbClr val="FFFFFF"/>
                 </a:solidFill>
               </a14:hiddenFill>
             </a:ext>
             <a:ext uri="{91240B29-F687-4f45-9708-019B960494DF}">
-              <a14:hiddenLine xmlns:a14="http://schemas.microsoft.com/office/drawing/2010/main" xmlns="" w="9525" cap="flat">
+              <a14:hiddenLine xmlns="" xmlns:a14="http://schemas.microsoft.com/office/drawing/2010/main" w="9525" cap="flat">
                 <a:solidFill>
                   <a:srgbClr val="000000"/>
                 </a:solidFill>
@@ -4223,7 +4223,7 @@
               </a14:hiddenLine>
             </a:ext>
             <a:ext uri="{AF507438-7753-43e0-B8FC-AC1667EBCBE1}">
-              <a14:hiddenEffects xmlns:a14="http://schemas.microsoft.com/office/drawing/2010/main" xmlns="">
+              <a14:hiddenEffects xmlns="" xmlns:a14="http://schemas.microsoft.com/office/drawing/2010/main">
                 <a:effectLst>
                   <a:outerShdw blurRad="63500" dist="38099" dir="2700000" algn="ctr" rotWithShape="0">
                     <a:schemeClr val="bg2">
@@ -4292,17 +4292,17 @@
           <a:effectLst/>
           <a:extLst>
             <a:ext uri="{FAA26D3D-D897-4be2-8F04-BA451C77F1D7}">
-              <ma14:placeholderFlag xmlns:ma14="http://schemas.microsoft.com/office/mac/drawingml/2011/main" xmlns="" val="1"/>
+              <ma14:placeholderFlag xmlns="" xmlns:ma14="http://schemas.microsoft.com/office/mac/drawingml/2011/main" val="1"/>
             </a:ext>
             <a:ext uri="{909E8E84-426E-40dd-AFC4-6F175D3DCCD1}">
-              <a14:hiddenFill xmlns:a14="http://schemas.microsoft.com/office/drawing/2010/main" xmlns="">
+              <a14:hiddenFill xmlns="" xmlns:a14="http://schemas.microsoft.com/office/drawing/2010/main">
                 <a:solidFill>
                   <a:srgbClr val="FFFFFF"/>
                 </a:solidFill>
               </a14:hiddenFill>
             </a:ext>
             <a:ext uri="{91240B29-F687-4f45-9708-019B960494DF}">
-              <a14:hiddenLine xmlns:a14="http://schemas.microsoft.com/office/drawing/2010/main" xmlns="" w="9525" cap="flat">
+              <a14:hiddenLine xmlns="" xmlns:a14="http://schemas.microsoft.com/office/drawing/2010/main" w="9525" cap="flat">
                 <a:solidFill>
                   <a:srgbClr val="000000"/>
                 </a:solidFill>
@@ -4312,7 +4312,7 @@
               </a14:hiddenLine>
             </a:ext>
             <a:ext uri="{AF507438-7753-43e0-B8FC-AC1667EBCBE1}">
-              <a14:hiddenEffects xmlns:a14="http://schemas.microsoft.com/office/drawing/2010/main" xmlns="">
+              <a14:hiddenEffects xmlns="" xmlns:a14="http://schemas.microsoft.com/office/drawing/2010/main">
                 <a:effectLst>
                   <a:outerShdw blurRad="63500" dist="38099" dir="2700000" algn="ctr" rotWithShape="0">
                     <a:schemeClr val="bg2">
@@ -4383,17 +4383,17 @@
           <a:effectLst/>
           <a:extLst>
             <a:ext uri="{FAA26D3D-D897-4be2-8F04-BA451C77F1D7}">
-              <ma14:placeholderFlag xmlns:ma14="http://schemas.microsoft.com/office/mac/drawingml/2011/main" xmlns="" val="1"/>
+              <ma14:placeholderFlag xmlns="" xmlns:ma14="http://schemas.microsoft.com/office/mac/drawingml/2011/main" val="1"/>
             </a:ext>
             <a:ext uri="{909E8E84-426E-40dd-AFC4-6F175D3DCCD1}">
-              <a14:hiddenFill xmlns:a14="http://schemas.microsoft.com/office/drawing/2010/main" xmlns="">
+              <a14:hiddenFill xmlns="" xmlns:a14="http://schemas.microsoft.com/office/drawing/2010/main">
                 <a:solidFill>
                   <a:srgbClr val="FFFFFF"/>
                 </a:solidFill>
               </a14:hiddenFill>
             </a:ext>
             <a:ext uri="{91240B29-F687-4f45-9708-019B960494DF}">
-              <a14:hiddenLine xmlns:a14="http://schemas.microsoft.com/office/drawing/2010/main" xmlns="" w="9525" cap="flat">
+              <a14:hiddenLine xmlns="" xmlns:a14="http://schemas.microsoft.com/office/drawing/2010/main" w="9525" cap="flat">
                 <a:solidFill>
                   <a:srgbClr val="000000"/>
                 </a:solidFill>
@@ -4403,7 +4403,7 @@
               </a14:hiddenLine>
             </a:ext>
             <a:ext uri="{AF507438-7753-43e0-B8FC-AC1667EBCBE1}">
-              <a14:hiddenEffects xmlns:a14="http://schemas.microsoft.com/office/drawing/2010/main" xmlns="">
+              <a14:hiddenEffects xmlns="" xmlns:a14="http://schemas.microsoft.com/office/drawing/2010/main">
                 <a:effectLst>
                   <a:outerShdw blurRad="63500" dist="38099" dir="2700000" algn="ctr" rotWithShape="0">
                     <a:schemeClr val="bg2">
@@ -5054,7 +5054,7 @@
           <a:effectLst/>
           <a:extLst>
             <a:ext uri="{AF507438-7753-43e0-B8FC-AC1667EBCBE1}">
-              <a14:hiddenEffects xmlns:a14="http://schemas.microsoft.com/office/drawing/2010/main" xmlns="">
+              <a14:hiddenEffects xmlns="" xmlns:a14="http://schemas.microsoft.com/office/drawing/2010/main">
                 <a:effectLst>
                   <a:outerShdw blurRad="63500" dist="38099" dir="2700000" algn="ctr" rotWithShape="0">
                     <a:srgbClr val="000000">
@@ -5106,7 +5106,7 @@
           <a:effectLst/>
           <a:extLst>
             <a:ext uri="{AF507438-7753-43e0-B8FC-AC1667EBCBE1}">
-              <a14:hiddenEffects xmlns:a14="http://schemas.microsoft.com/office/drawing/2010/main" xmlns="">
+              <a14:hiddenEffects xmlns="" xmlns:a14="http://schemas.microsoft.com/office/drawing/2010/main">
                 <a:effectLst>
                   <a:outerShdw blurRad="63500" dist="38099" dir="2700000" algn="ctr" rotWithShape="0">
                     <a:srgbClr val="000000">
@@ -5158,7 +5158,7 @@
           <a:effectLst/>
           <a:extLst>
             <a:ext uri="{AF507438-7753-43e0-B8FC-AC1667EBCBE1}">
-              <a14:hiddenEffects xmlns:a14="http://schemas.microsoft.com/office/drawing/2010/main" xmlns="">
+              <a14:hiddenEffects xmlns="" xmlns:a14="http://schemas.microsoft.com/office/drawing/2010/main">
                 <a:effectLst>
                   <a:outerShdw blurRad="63500" dist="38099" dir="2700000" algn="ctr" rotWithShape="0">
                     <a:srgbClr val="000000">
@@ -5210,7 +5210,7 @@
           <a:effectLst/>
           <a:extLst>
             <a:ext uri="{AF507438-7753-43e0-B8FC-AC1667EBCBE1}">
-              <a14:hiddenEffects xmlns:a14="http://schemas.microsoft.com/office/drawing/2010/main" xmlns="">
+              <a14:hiddenEffects xmlns="" xmlns:a14="http://schemas.microsoft.com/office/drawing/2010/main">
                 <a:effectLst>
                   <a:outerShdw blurRad="63500" dist="38099" dir="2700000" algn="ctr" rotWithShape="0">
                     <a:srgbClr val="000000">
@@ -5260,7 +5260,7 @@
           <a:effectLst/>
           <a:extLst>
             <a:ext uri="{AF507438-7753-43e0-B8FC-AC1667EBCBE1}">
-              <a14:hiddenEffects xmlns:a14="http://schemas.microsoft.com/office/drawing/2010/main" xmlns="">
+              <a14:hiddenEffects xmlns="" xmlns:a14="http://schemas.microsoft.com/office/drawing/2010/main">
                 <a:effectLst>
                   <a:outerShdw blurRad="63500" dist="38099" dir="2700000" algn="ctr" rotWithShape="0">
                     <a:srgbClr val="000000">
@@ -5312,7 +5312,7 @@
           <a:effectLst/>
           <a:extLst>
             <a:ext uri="{AF507438-7753-43e0-B8FC-AC1667EBCBE1}">
-              <a14:hiddenEffects xmlns:a14="http://schemas.microsoft.com/office/drawing/2010/main" xmlns="">
+              <a14:hiddenEffects xmlns="" xmlns:a14="http://schemas.microsoft.com/office/drawing/2010/main">
                 <a:effectLst>
                   <a:outerShdw blurRad="63500" dist="38099" dir="2700000" algn="ctr" rotWithShape="0">
                     <a:srgbClr val="000000">
@@ -5364,7 +5364,7 @@
           <a:effectLst/>
           <a:extLst>
             <a:ext uri="{AF507438-7753-43e0-B8FC-AC1667EBCBE1}">
-              <a14:hiddenEffects xmlns:a14="http://schemas.microsoft.com/office/drawing/2010/main" xmlns="">
+              <a14:hiddenEffects xmlns="" xmlns:a14="http://schemas.microsoft.com/office/drawing/2010/main">
                 <a:effectLst>
                   <a:outerShdw blurRad="63500" dist="38099" dir="2700000" algn="ctr" rotWithShape="0">
                     <a:srgbClr val="000000">
@@ -5416,7 +5416,7 @@
           <a:effectLst/>
           <a:extLst>
             <a:ext uri="{AF507438-7753-43e0-B8FC-AC1667EBCBE1}">
-              <a14:hiddenEffects xmlns:a14="http://schemas.microsoft.com/office/drawing/2010/main" xmlns="">
+              <a14:hiddenEffects xmlns="" xmlns:a14="http://schemas.microsoft.com/office/drawing/2010/main">
                 <a:effectLst>
                   <a:outerShdw blurRad="63500" dist="38099" dir="2700000" algn="ctr" rotWithShape="0">
                     <a:srgbClr val="000000">
@@ -5468,7 +5468,7 @@
           <a:effectLst/>
           <a:extLst>
             <a:ext uri="{AF507438-7753-43e0-B8FC-AC1667EBCBE1}">
-              <a14:hiddenEffects xmlns:a14="http://schemas.microsoft.com/office/drawing/2010/main" xmlns="">
+              <a14:hiddenEffects xmlns="" xmlns:a14="http://schemas.microsoft.com/office/drawing/2010/main">
                 <a:effectLst>
                   <a:outerShdw blurRad="63500" dist="38099" dir="2700000" algn="ctr" rotWithShape="0">
                     <a:srgbClr val="000000">
@@ -5520,7 +5520,7 @@
           <a:effectLst/>
           <a:extLst>
             <a:ext uri="{AF507438-7753-43e0-B8FC-AC1667EBCBE1}">
-              <a14:hiddenEffects xmlns:a14="http://schemas.microsoft.com/office/drawing/2010/main" xmlns="">
+              <a14:hiddenEffects xmlns="" xmlns:a14="http://schemas.microsoft.com/office/drawing/2010/main">
                 <a:effectLst>
                   <a:outerShdw blurRad="63500" dist="38099" dir="2700000" algn="ctr" rotWithShape="0">
                     <a:srgbClr val="000000">
@@ -5573,7 +5573,7 @@
           <a:effectLst/>
           <a:extLst>
             <a:ext uri="{AF507438-7753-43e0-B8FC-AC1667EBCBE1}">
-              <a14:hiddenEffects xmlns:a14="http://schemas.microsoft.com/office/drawing/2010/main" xmlns="">
+              <a14:hiddenEffects xmlns="" xmlns:a14="http://schemas.microsoft.com/office/drawing/2010/main">
                 <a:effectLst>
                   <a:outerShdw blurRad="63500" dist="38099" dir="2700000" algn="ctr" rotWithShape="0">
                     <a:srgbClr val="000000">
@@ -5623,7 +5623,7 @@
           <a:effectLst/>
           <a:extLst>
             <a:ext uri="{AF507438-7753-43e0-B8FC-AC1667EBCBE1}">
-              <a14:hiddenEffects xmlns:a14="http://schemas.microsoft.com/office/drawing/2010/main" xmlns="">
+              <a14:hiddenEffects xmlns="" xmlns:a14="http://schemas.microsoft.com/office/drawing/2010/main">
                 <a:effectLst>
                   <a:outerShdw blurRad="63500" dist="38099" dir="2700000" algn="ctr" rotWithShape="0">
                     <a:srgbClr val="000000">
@@ -5673,7 +5673,7 @@
           <a:effectLst/>
           <a:extLst>
             <a:ext uri="{AF507438-7753-43e0-B8FC-AC1667EBCBE1}">
-              <a14:hiddenEffects xmlns:a14="http://schemas.microsoft.com/office/drawing/2010/main" xmlns="">
+              <a14:hiddenEffects xmlns="" xmlns:a14="http://schemas.microsoft.com/office/drawing/2010/main">
                 <a:effectLst>
                   <a:outerShdw blurRad="63500" dist="38099" dir="2700000" algn="ctr" rotWithShape="0">
                     <a:srgbClr val="000000">
@@ -5723,157 +5723,7 @@
           <a:effectLst/>
           <a:extLst>
             <a:ext uri="{AF507438-7753-43e0-B8FC-AC1667EBCBE1}">
-              <a14:hiddenEffects xmlns:a14="http://schemas.microsoft.com/office/drawing/2010/main" xmlns="">
-                <a:effectLst>
-                  <a:outerShdw blurRad="63500" dist="38099" dir="2700000" algn="ctr" rotWithShape="0">
-                    <a:srgbClr val="000000">
-                      <a:alpha val="74998"/>
-                    </a:srgbClr>
-                  </a:outerShdw>
-                </a:effectLst>
-              </a14:hiddenEffects>
-            </a:ext>
-          </a:extLst>
-        </p:spPr>
-        <p:txBody>
-          <a:bodyPr wrap="none" anchor="ctr"/>
-          <a:lstStyle/>
-          <a:p>
-            <a:endParaRPr lang="fr-FR"/>
-          </a:p>
-        </p:txBody>
-      </p:sp>
-      <p:sp>
-        <p:nvSpPr>
-          <p:cNvPr id="3089" name="AutoShape 17"/>
-          <p:cNvSpPr>
-            <a:spLocks noChangeArrowheads="1"/>
-          </p:cNvSpPr>
-          <p:nvPr/>
-        </p:nvSpPr>
-        <p:spPr bwMode="auto">
-          <a:xfrm>
-            <a:off x="6392863" y="4060825"/>
-            <a:ext cx="139700" cy="147638"/>
-          </a:xfrm>
-          <a:prstGeom prst="diamond">
-            <a:avLst/>
-          </a:prstGeom>
-          <a:solidFill>
-            <a:srgbClr val="FFFFFF"/>
-          </a:solidFill>
-          <a:ln w="18000" cap="flat">
-            <a:solidFill>
-              <a:srgbClr val="B2B2B2"/>
-            </a:solidFill>
-            <a:round/>
-            <a:headEnd/>
-            <a:tailEnd/>
-          </a:ln>
-          <a:effectLst/>
-          <a:extLst>
-            <a:ext uri="{AF507438-7753-43e0-B8FC-AC1667EBCBE1}">
-              <a14:hiddenEffects xmlns:a14="http://schemas.microsoft.com/office/drawing/2010/main" xmlns="">
-                <a:effectLst>
-                  <a:outerShdw blurRad="63500" dist="38099" dir="2700000" algn="ctr" rotWithShape="0">
-                    <a:srgbClr val="000000">
-                      <a:alpha val="74998"/>
-                    </a:srgbClr>
-                  </a:outerShdw>
-                </a:effectLst>
-              </a14:hiddenEffects>
-            </a:ext>
-          </a:extLst>
-        </p:spPr>
-        <p:txBody>
-          <a:bodyPr wrap="none" anchor="ctr"/>
-          <a:lstStyle/>
-          <a:p>
-            <a:endParaRPr lang="fr-FR"/>
-          </a:p>
-        </p:txBody>
-      </p:sp>
-      <p:sp>
-        <p:nvSpPr>
-          <p:cNvPr id="3090" name="AutoShape 18"/>
-          <p:cNvSpPr>
-            <a:spLocks noChangeArrowheads="1"/>
-          </p:cNvSpPr>
-          <p:nvPr/>
-        </p:nvSpPr>
-        <p:spPr bwMode="auto">
-          <a:xfrm>
-            <a:off x="4348163" y="4441825"/>
-            <a:ext cx="139700" cy="147638"/>
-          </a:xfrm>
-          <a:prstGeom prst="diamond">
-            <a:avLst/>
-          </a:prstGeom>
-          <a:solidFill>
-            <a:srgbClr val="FFFFFF"/>
-          </a:solidFill>
-          <a:ln w="18000" cap="flat">
-            <a:solidFill>
-              <a:srgbClr val="B2B2B2"/>
-            </a:solidFill>
-            <a:round/>
-            <a:headEnd/>
-            <a:tailEnd/>
-          </a:ln>
-          <a:effectLst/>
-          <a:extLst>
-            <a:ext uri="{AF507438-7753-43e0-B8FC-AC1667EBCBE1}">
-              <a14:hiddenEffects xmlns:a14="http://schemas.microsoft.com/office/drawing/2010/main" xmlns="">
-                <a:effectLst>
-                  <a:outerShdw blurRad="63500" dist="38099" dir="2700000" algn="ctr" rotWithShape="0">
-                    <a:srgbClr val="000000">
-                      <a:alpha val="74998"/>
-                    </a:srgbClr>
-                  </a:outerShdw>
-                </a:effectLst>
-              </a14:hiddenEffects>
-            </a:ext>
-          </a:extLst>
-        </p:spPr>
-        <p:txBody>
-          <a:bodyPr wrap="none" anchor="ctr"/>
-          <a:lstStyle/>
-          <a:p>
-            <a:endParaRPr lang="fr-FR"/>
-          </a:p>
-        </p:txBody>
-      </p:sp>
-      <p:sp>
-        <p:nvSpPr>
-          <p:cNvPr id="3091" name="AutoShape 19"/>
-          <p:cNvSpPr>
-            <a:spLocks noChangeArrowheads="1"/>
-          </p:cNvSpPr>
-          <p:nvPr/>
-        </p:nvSpPr>
-        <p:spPr bwMode="auto">
-          <a:xfrm>
-            <a:off x="4359275" y="1716088"/>
-            <a:ext cx="139700" cy="147637"/>
-          </a:xfrm>
-          <a:prstGeom prst="diamond">
-            <a:avLst/>
-          </a:prstGeom>
-          <a:solidFill>
-            <a:srgbClr val="FFFFFF"/>
-          </a:solidFill>
-          <a:ln w="18000" cap="flat">
-            <a:solidFill>
-              <a:srgbClr val="B2B2B2"/>
-            </a:solidFill>
-            <a:round/>
-            <a:headEnd/>
-            <a:tailEnd/>
-          </a:ln>
-          <a:effectLst/>
-          <a:extLst>
-            <a:ext uri="{AF507438-7753-43e0-B8FC-AC1667EBCBE1}">
-              <a14:hiddenEffects xmlns:a14="http://schemas.microsoft.com/office/drawing/2010/main" xmlns="">
+              <a14:hiddenEffects xmlns="" xmlns:a14="http://schemas.microsoft.com/office/drawing/2010/main">
                 <a:effectLst>
                   <a:outerShdw blurRad="63500" dist="38099" dir="2700000" algn="ctr" rotWithShape="0">
                     <a:srgbClr val="000000">
@@ -5921,12 +5771,12 @@
           <a:effectLst/>
           <a:extLst>
             <a:ext uri="{909E8E84-426E-40dd-AFC4-6F175D3DCCD1}">
-              <a14:hiddenFill xmlns:a14="http://schemas.microsoft.com/office/drawing/2010/main" xmlns="">
+              <a14:hiddenFill xmlns="" xmlns:a14="http://schemas.microsoft.com/office/drawing/2010/main">
                 <a:noFill/>
               </a14:hiddenFill>
             </a:ext>
             <a:ext uri="{AF507438-7753-43e0-B8FC-AC1667EBCBE1}">
-              <a14:hiddenEffects xmlns:a14="http://schemas.microsoft.com/office/drawing/2010/main" xmlns="">
+              <a14:hiddenEffects xmlns="" xmlns:a14="http://schemas.microsoft.com/office/drawing/2010/main">
                 <a:effectLst>
                   <a:outerShdw blurRad="63500" dist="38099" dir="2700000" algn="ctr" rotWithShape="0">
                     <a:srgbClr val="000000">
@@ -5974,12 +5824,12 @@
           <a:effectLst/>
           <a:extLst>
             <a:ext uri="{909E8E84-426E-40dd-AFC4-6F175D3DCCD1}">
-              <a14:hiddenFill xmlns:a14="http://schemas.microsoft.com/office/drawing/2010/main" xmlns="">
+              <a14:hiddenFill xmlns="" xmlns:a14="http://schemas.microsoft.com/office/drawing/2010/main">
                 <a:noFill/>
               </a14:hiddenFill>
             </a:ext>
             <a:ext uri="{AF507438-7753-43e0-B8FC-AC1667EBCBE1}">
-              <a14:hiddenEffects xmlns:a14="http://schemas.microsoft.com/office/drawing/2010/main" xmlns="">
+              <a14:hiddenEffects xmlns="" xmlns:a14="http://schemas.microsoft.com/office/drawing/2010/main">
                 <a:effectLst>
                   <a:outerShdw blurRad="63500" dist="38099" dir="2700000" algn="ctr" rotWithShape="0">
                     <a:srgbClr val="000000">
@@ -6027,12 +5877,12 @@
           <a:effectLst/>
           <a:extLst>
             <a:ext uri="{909E8E84-426E-40dd-AFC4-6F175D3DCCD1}">
-              <a14:hiddenFill xmlns:a14="http://schemas.microsoft.com/office/drawing/2010/main" xmlns="">
+              <a14:hiddenFill xmlns="" xmlns:a14="http://schemas.microsoft.com/office/drawing/2010/main">
                 <a:noFill/>
               </a14:hiddenFill>
             </a:ext>
             <a:ext uri="{AF507438-7753-43e0-B8FC-AC1667EBCBE1}">
-              <a14:hiddenEffects xmlns:a14="http://schemas.microsoft.com/office/drawing/2010/main" xmlns="">
+              <a14:hiddenEffects xmlns="" xmlns:a14="http://schemas.microsoft.com/office/drawing/2010/main">
                 <a:effectLst>
                   <a:outerShdw blurRad="63500" dist="38099" dir="2700000" algn="ctr" rotWithShape="0">
                     <a:srgbClr val="000000">
@@ -6080,12 +5930,12 @@
           <a:effectLst/>
           <a:extLst>
             <a:ext uri="{909E8E84-426E-40dd-AFC4-6F175D3DCCD1}">
-              <a14:hiddenFill xmlns:a14="http://schemas.microsoft.com/office/drawing/2010/main" xmlns="">
+              <a14:hiddenFill xmlns="" xmlns:a14="http://schemas.microsoft.com/office/drawing/2010/main">
                 <a:noFill/>
               </a14:hiddenFill>
             </a:ext>
             <a:ext uri="{AF507438-7753-43e0-B8FC-AC1667EBCBE1}">
-              <a14:hiddenEffects xmlns:a14="http://schemas.microsoft.com/office/drawing/2010/main" xmlns="">
+              <a14:hiddenEffects xmlns="" xmlns:a14="http://schemas.microsoft.com/office/drawing/2010/main">
                 <a:effectLst>
                   <a:outerShdw blurRad="63500" dist="38099" dir="2700000" algn="ctr" rotWithShape="0">
                     <a:srgbClr val="000000">
@@ -6133,12 +5983,12 @@
           <a:effectLst/>
           <a:extLst>
             <a:ext uri="{909E8E84-426E-40dd-AFC4-6F175D3DCCD1}">
-              <a14:hiddenFill xmlns:a14="http://schemas.microsoft.com/office/drawing/2010/main" xmlns="">
+              <a14:hiddenFill xmlns="" xmlns:a14="http://schemas.microsoft.com/office/drawing/2010/main">
                 <a:noFill/>
               </a14:hiddenFill>
             </a:ext>
             <a:ext uri="{AF507438-7753-43e0-B8FC-AC1667EBCBE1}">
-              <a14:hiddenEffects xmlns:a14="http://schemas.microsoft.com/office/drawing/2010/main" xmlns="">
+              <a14:hiddenEffects xmlns="" xmlns:a14="http://schemas.microsoft.com/office/drawing/2010/main">
                 <a:effectLst>
                   <a:outerShdw blurRad="63500" dist="38099" dir="2700000" algn="ctr" rotWithShape="0">
                     <a:srgbClr val="000000">
@@ -6188,7 +6038,7 @@
           <a:effectLst/>
           <a:extLst>
             <a:ext uri="{AF507438-7753-43e0-B8FC-AC1667EBCBE1}">
-              <a14:hiddenEffects xmlns:a14="http://schemas.microsoft.com/office/drawing/2010/main" xmlns="">
+              <a14:hiddenEffects xmlns="" xmlns:a14="http://schemas.microsoft.com/office/drawing/2010/main">
                 <a:effectLst>
                   <a:outerShdw blurRad="63500" dist="38099" dir="2700000" algn="ctr" rotWithShape="0">
                     <a:srgbClr val="000000">
@@ -6238,7 +6088,7 @@
           <a:effectLst/>
           <a:extLst>
             <a:ext uri="{AF507438-7753-43e0-B8FC-AC1667EBCBE1}">
-              <a14:hiddenEffects xmlns:a14="http://schemas.microsoft.com/office/drawing/2010/main" xmlns="">
+              <a14:hiddenEffects xmlns="" xmlns:a14="http://schemas.microsoft.com/office/drawing/2010/main">
                 <a:effectLst>
                   <a:outerShdw blurRad="63500" dist="38099" dir="2700000" algn="ctr" rotWithShape="0">
                     <a:srgbClr val="000000">
@@ -6286,12 +6136,12 @@
           <a:effectLst/>
           <a:extLst>
             <a:ext uri="{909E8E84-426E-40dd-AFC4-6F175D3DCCD1}">
-              <a14:hiddenFill xmlns:a14="http://schemas.microsoft.com/office/drawing/2010/main" xmlns="">
+              <a14:hiddenFill xmlns="" xmlns:a14="http://schemas.microsoft.com/office/drawing/2010/main">
                 <a:noFill/>
               </a14:hiddenFill>
             </a:ext>
             <a:ext uri="{AF507438-7753-43e0-B8FC-AC1667EBCBE1}">
-              <a14:hiddenEffects xmlns:a14="http://schemas.microsoft.com/office/drawing/2010/main" xmlns="">
+              <a14:hiddenEffects xmlns="" xmlns:a14="http://schemas.microsoft.com/office/drawing/2010/main">
                 <a:effectLst>
                   <a:outerShdw blurRad="63500" dist="38099" dir="2700000" algn="ctr" rotWithShape="0">
                     <a:srgbClr val="000000">
@@ -6339,12 +6189,12 @@
           <a:effectLst/>
           <a:extLst>
             <a:ext uri="{909E8E84-426E-40dd-AFC4-6F175D3DCCD1}">
-              <a14:hiddenFill xmlns:a14="http://schemas.microsoft.com/office/drawing/2010/main" xmlns="">
+              <a14:hiddenFill xmlns="" xmlns:a14="http://schemas.microsoft.com/office/drawing/2010/main">
                 <a:noFill/>
               </a14:hiddenFill>
             </a:ext>
             <a:ext uri="{AF507438-7753-43e0-B8FC-AC1667EBCBE1}">
-              <a14:hiddenEffects xmlns:a14="http://schemas.microsoft.com/office/drawing/2010/main" xmlns="">
+              <a14:hiddenEffects xmlns="" xmlns:a14="http://schemas.microsoft.com/office/drawing/2010/main">
                 <a:effectLst>
                   <a:outerShdw blurRad="63500" dist="38099" dir="2700000" algn="ctr" rotWithShape="0">
                     <a:srgbClr val="000000">
@@ -6392,12 +6242,12 @@
           <a:effectLst/>
           <a:extLst>
             <a:ext uri="{909E8E84-426E-40dd-AFC4-6F175D3DCCD1}">
-              <a14:hiddenFill xmlns:a14="http://schemas.microsoft.com/office/drawing/2010/main" xmlns="">
+              <a14:hiddenFill xmlns="" xmlns:a14="http://schemas.microsoft.com/office/drawing/2010/main">
                 <a:noFill/>
               </a14:hiddenFill>
             </a:ext>
             <a:ext uri="{AF507438-7753-43e0-B8FC-AC1667EBCBE1}">
-              <a14:hiddenEffects xmlns:a14="http://schemas.microsoft.com/office/drawing/2010/main" xmlns="">
+              <a14:hiddenEffects xmlns="" xmlns:a14="http://schemas.microsoft.com/office/drawing/2010/main">
                 <a:effectLst>
                   <a:outerShdw blurRad="63500" dist="38099" dir="2700000" algn="ctr" rotWithShape="0">
                     <a:srgbClr val="000000">
@@ -6449,207 +6299,7 @@
           <a:effectLst/>
           <a:extLst>
             <a:ext uri="{AF507438-7753-43e0-B8FC-AC1667EBCBE1}">
-              <a14:hiddenEffects xmlns:a14="http://schemas.microsoft.com/office/drawing/2010/main" xmlns="">
-                <a:effectLst>
-                  <a:outerShdw blurRad="63500" dist="38099" dir="2700000" algn="ctr" rotWithShape="0">
-                    <a:srgbClr val="000000">
-                      <a:alpha val="74998"/>
-                    </a:srgbClr>
-                  </a:outerShdw>
-                </a:effectLst>
-              </a14:hiddenEffects>
-            </a:ext>
-          </a:extLst>
-        </p:spPr>
-        <p:txBody>
-          <a:bodyPr wrap="none" anchor="ctr"/>
-          <a:lstStyle/>
-          <a:p>
-            <a:endParaRPr lang="fr-FR"/>
-          </a:p>
-        </p:txBody>
-      </p:sp>
-      <p:sp>
-        <p:nvSpPr>
-          <p:cNvPr id="3110" name="AutoShape 38"/>
-          <p:cNvSpPr>
-            <a:spLocks noChangeArrowheads="1"/>
-          </p:cNvSpPr>
-          <p:nvPr/>
-        </p:nvSpPr>
-        <p:spPr bwMode="auto">
-          <a:xfrm>
-            <a:off x="5224463" y="2146300"/>
-            <a:ext cx="139700" cy="147638"/>
-          </a:xfrm>
-          <a:prstGeom prst="diamond">
-            <a:avLst/>
-          </a:prstGeom>
-          <a:solidFill>
-            <a:srgbClr val="FFFFFF"/>
-          </a:solidFill>
-          <a:ln w="18000" cap="flat">
-            <a:solidFill>
-              <a:srgbClr val="B2B2B2"/>
-            </a:solidFill>
-            <a:round/>
-            <a:headEnd/>
-            <a:tailEnd/>
-          </a:ln>
-          <a:effectLst/>
-          <a:extLst>
-            <a:ext uri="{AF507438-7753-43e0-B8FC-AC1667EBCBE1}">
-              <a14:hiddenEffects xmlns:a14="http://schemas.microsoft.com/office/drawing/2010/main" xmlns="">
-                <a:effectLst>
-                  <a:outerShdw blurRad="63500" dist="38099" dir="2700000" algn="ctr" rotWithShape="0">
-                    <a:srgbClr val="000000">
-                      <a:alpha val="74998"/>
-                    </a:srgbClr>
-                  </a:outerShdw>
-                </a:effectLst>
-              </a14:hiddenEffects>
-            </a:ext>
-          </a:extLst>
-        </p:spPr>
-        <p:txBody>
-          <a:bodyPr wrap="none" anchor="ctr"/>
-          <a:lstStyle/>
-          <a:p>
-            <a:endParaRPr lang="fr-FR"/>
-          </a:p>
-        </p:txBody>
-      </p:sp>
-      <p:sp>
-        <p:nvSpPr>
-          <p:cNvPr id="3111" name="AutoShape 39"/>
-          <p:cNvSpPr>
-            <a:spLocks noChangeArrowheads="1"/>
-          </p:cNvSpPr>
-          <p:nvPr/>
-        </p:nvSpPr>
-        <p:spPr bwMode="auto">
-          <a:xfrm>
-            <a:off x="5710238" y="2836863"/>
-            <a:ext cx="139700" cy="147637"/>
-          </a:xfrm>
-          <a:prstGeom prst="diamond">
-            <a:avLst/>
-          </a:prstGeom>
-          <a:solidFill>
-            <a:srgbClr val="FFFFFF"/>
-          </a:solidFill>
-          <a:ln w="18000" cap="flat">
-            <a:solidFill>
-              <a:srgbClr val="B2B2B2"/>
-            </a:solidFill>
-            <a:round/>
-            <a:headEnd/>
-            <a:tailEnd/>
-          </a:ln>
-          <a:effectLst/>
-          <a:extLst>
-            <a:ext uri="{AF507438-7753-43e0-B8FC-AC1667EBCBE1}">
-              <a14:hiddenEffects xmlns:a14="http://schemas.microsoft.com/office/drawing/2010/main" xmlns="">
-                <a:effectLst>
-                  <a:outerShdw blurRad="63500" dist="38099" dir="2700000" algn="ctr" rotWithShape="0">
-                    <a:srgbClr val="000000">
-                      <a:alpha val="74998"/>
-                    </a:srgbClr>
-                  </a:outerShdw>
-                </a:effectLst>
-              </a14:hiddenEffects>
-            </a:ext>
-          </a:extLst>
-        </p:spPr>
-        <p:txBody>
-          <a:bodyPr wrap="none" anchor="ctr"/>
-          <a:lstStyle/>
-          <a:p>
-            <a:endParaRPr lang="fr-FR"/>
-          </a:p>
-        </p:txBody>
-      </p:sp>
-      <p:sp>
-        <p:nvSpPr>
-          <p:cNvPr id="3112" name="AutoShape 40"/>
-          <p:cNvSpPr>
-            <a:spLocks noChangeArrowheads="1"/>
-          </p:cNvSpPr>
-          <p:nvPr/>
-        </p:nvSpPr>
-        <p:spPr bwMode="auto">
-          <a:xfrm>
-            <a:off x="6645275" y="2620963"/>
-            <a:ext cx="139700" cy="147637"/>
-          </a:xfrm>
-          <a:prstGeom prst="diamond">
-            <a:avLst/>
-          </a:prstGeom>
-          <a:solidFill>
-            <a:srgbClr val="FFFFFF"/>
-          </a:solidFill>
-          <a:ln w="18000" cap="flat">
-            <a:solidFill>
-              <a:srgbClr val="B2B2B2"/>
-            </a:solidFill>
-            <a:round/>
-            <a:headEnd/>
-            <a:tailEnd/>
-          </a:ln>
-          <a:effectLst/>
-          <a:extLst>
-            <a:ext uri="{AF507438-7753-43e0-B8FC-AC1667EBCBE1}">
-              <a14:hiddenEffects xmlns:a14="http://schemas.microsoft.com/office/drawing/2010/main" xmlns="">
-                <a:effectLst>
-                  <a:outerShdw blurRad="63500" dist="38099" dir="2700000" algn="ctr" rotWithShape="0">
-                    <a:srgbClr val="000000">
-                      <a:alpha val="74998"/>
-                    </a:srgbClr>
-                  </a:outerShdw>
-                </a:effectLst>
-              </a14:hiddenEffects>
-            </a:ext>
-          </a:extLst>
-        </p:spPr>
-        <p:txBody>
-          <a:bodyPr wrap="none" anchor="ctr"/>
-          <a:lstStyle/>
-          <a:p>
-            <a:endParaRPr lang="fr-FR"/>
-          </a:p>
-        </p:txBody>
-      </p:sp>
-      <p:sp>
-        <p:nvSpPr>
-          <p:cNvPr id="3113" name="AutoShape 41"/>
-          <p:cNvSpPr>
-            <a:spLocks noChangeArrowheads="1"/>
-          </p:cNvSpPr>
-          <p:nvPr/>
-        </p:nvSpPr>
-        <p:spPr bwMode="auto">
-          <a:xfrm>
-            <a:off x="6465888" y="2152650"/>
-            <a:ext cx="139700" cy="147638"/>
-          </a:xfrm>
-          <a:prstGeom prst="diamond">
-            <a:avLst/>
-          </a:prstGeom>
-          <a:solidFill>
-            <a:srgbClr val="FFFFFF"/>
-          </a:solidFill>
-          <a:ln w="18000" cap="flat">
-            <a:solidFill>
-              <a:srgbClr val="B2B2B2"/>
-            </a:solidFill>
-            <a:round/>
-            <a:headEnd/>
-            <a:tailEnd/>
-          </a:ln>
-          <a:effectLst/>
-          <a:extLst>
-            <a:ext uri="{AF507438-7753-43e0-B8FC-AC1667EBCBE1}">
-              <a14:hiddenEffects xmlns:a14="http://schemas.microsoft.com/office/drawing/2010/main" xmlns="">
+              <a14:hiddenEffects xmlns="" xmlns:a14="http://schemas.microsoft.com/office/drawing/2010/main">
                 <a:effectLst>
                   <a:outerShdw blurRad="63500" dist="38099" dir="2700000" algn="ctr" rotWithShape="0">
                     <a:srgbClr val="000000">
@@ -6699,7 +6349,7 @@
           <a:effectLst/>
           <a:extLst>
             <a:ext uri="{AF507438-7753-43e0-B8FC-AC1667EBCBE1}">
-              <a14:hiddenEffects xmlns:a14="http://schemas.microsoft.com/office/drawing/2010/main" xmlns="">
+              <a14:hiddenEffects xmlns="" xmlns:a14="http://schemas.microsoft.com/office/drawing/2010/main">
                 <a:effectLst>
                   <a:outerShdw blurRad="63500" dist="38099" dir="2700000" algn="ctr" rotWithShape="0">
                     <a:srgbClr val="000000">
@@ -6751,7 +6401,7 @@
           <a:effectLst/>
           <a:extLst>
             <a:ext uri="{AF507438-7753-43e0-B8FC-AC1667EBCBE1}">
-              <a14:hiddenEffects xmlns:a14="http://schemas.microsoft.com/office/drawing/2010/main" xmlns="">
+              <a14:hiddenEffects xmlns="" xmlns:a14="http://schemas.microsoft.com/office/drawing/2010/main">
                 <a:effectLst>
                   <a:outerShdw blurRad="63500" dist="38099" dir="2700000" algn="ctr" rotWithShape="0">
                     <a:srgbClr val="000000">
@@ -6794,14 +6444,14 @@
           <a:effectLst/>
           <a:extLst>
             <a:ext uri="{909E8E84-426E-40dd-AFC4-6F175D3DCCD1}">
-              <a14:hiddenFill xmlns:a14="http://schemas.microsoft.com/office/drawing/2010/main" xmlns="">
+              <a14:hiddenFill xmlns="" xmlns:a14="http://schemas.microsoft.com/office/drawing/2010/main">
                 <a:solidFill>
                   <a:srgbClr val="FFFFFF"/>
                 </a:solidFill>
               </a14:hiddenFill>
             </a:ext>
             <a:ext uri="{91240B29-F687-4f45-9708-019B960494DF}">
-              <a14:hiddenLine xmlns:a14="http://schemas.microsoft.com/office/drawing/2010/main" xmlns="" w="9525" cap="flat">
+              <a14:hiddenLine xmlns="" xmlns:a14="http://schemas.microsoft.com/office/drawing/2010/main" w="9525" cap="flat">
                 <a:solidFill>
                   <a:srgbClr val="000000"/>
                 </a:solidFill>
@@ -6811,7 +6461,7 @@
               </a14:hiddenLine>
             </a:ext>
             <a:ext uri="{AF507438-7753-43e0-B8FC-AC1667EBCBE1}">
-              <a14:hiddenEffects xmlns:a14="http://schemas.microsoft.com/office/drawing/2010/main" xmlns="">
+              <a14:hiddenEffects xmlns="" xmlns:a14="http://schemas.microsoft.com/office/drawing/2010/main">
                 <a:effectLst>
                   <a:outerShdw blurRad="63500" dist="38099" dir="2700000" algn="ctr" rotWithShape="0">
                     <a:srgbClr val="000000">
@@ -7045,12 +6695,12 @@
           <a:effectLst/>
           <a:extLst>
             <a:ext uri="{909E8E84-426E-40dd-AFC4-6F175D3DCCD1}">
-              <a14:hiddenFill xmlns:a14="http://schemas.microsoft.com/office/drawing/2010/main" xmlns="">
+              <a14:hiddenFill xmlns="" xmlns:a14="http://schemas.microsoft.com/office/drawing/2010/main">
                 <a:noFill/>
               </a14:hiddenFill>
             </a:ext>
             <a:ext uri="{AF507438-7753-43e0-B8FC-AC1667EBCBE1}">
-              <a14:hiddenEffects xmlns:a14="http://schemas.microsoft.com/office/drawing/2010/main" xmlns="">
+              <a14:hiddenEffects xmlns="" xmlns:a14="http://schemas.microsoft.com/office/drawing/2010/main">
                 <a:effectLst>
                   <a:outerShdw blurRad="63500" dist="38099" dir="2700000" algn="ctr" rotWithShape="0">
                     <a:srgbClr val="000000">
@@ -7098,12 +6748,12 @@
           <a:effectLst/>
           <a:extLst>
             <a:ext uri="{909E8E84-426E-40dd-AFC4-6F175D3DCCD1}">
-              <a14:hiddenFill xmlns:a14="http://schemas.microsoft.com/office/drawing/2010/main" xmlns="">
+              <a14:hiddenFill xmlns="" xmlns:a14="http://schemas.microsoft.com/office/drawing/2010/main">
                 <a:noFill/>
               </a14:hiddenFill>
             </a:ext>
             <a:ext uri="{AF507438-7753-43e0-B8FC-AC1667EBCBE1}">
-              <a14:hiddenEffects xmlns:a14="http://schemas.microsoft.com/office/drawing/2010/main" xmlns="">
+              <a14:hiddenEffects xmlns="" xmlns:a14="http://schemas.microsoft.com/office/drawing/2010/main">
                 <a:effectLst>
                   <a:outerShdw blurRad="63500" dist="38099" dir="2700000" algn="ctr" rotWithShape="0">
                     <a:srgbClr val="000000">
@@ -7146,14 +6796,14 @@
           <a:effectLst/>
           <a:extLst>
             <a:ext uri="{909E8E84-426E-40dd-AFC4-6F175D3DCCD1}">
-              <a14:hiddenFill xmlns:a14="http://schemas.microsoft.com/office/drawing/2010/main" xmlns="">
+              <a14:hiddenFill xmlns="" xmlns:a14="http://schemas.microsoft.com/office/drawing/2010/main">
                 <a:solidFill>
                   <a:srgbClr val="FFFFFF"/>
                 </a:solidFill>
               </a14:hiddenFill>
             </a:ext>
             <a:ext uri="{91240B29-F687-4f45-9708-019B960494DF}">
-              <a14:hiddenLine xmlns:a14="http://schemas.microsoft.com/office/drawing/2010/main" xmlns="" w="9525" cap="flat">
+              <a14:hiddenLine xmlns="" xmlns:a14="http://schemas.microsoft.com/office/drawing/2010/main" w="9525" cap="flat">
                 <a:solidFill>
                   <a:srgbClr val="000000"/>
                 </a:solidFill>
@@ -7163,7 +6813,7 @@
               </a14:hiddenLine>
             </a:ext>
             <a:ext uri="{AF507438-7753-43e0-B8FC-AC1667EBCBE1}">
-              <a14:hiddenEffects xmlns:a14="http://schemas.microsoft.com/office/drawing/2010/main" xmlns="">
+              <a14:hiddenEffects xmlns="" xmlns:a14="http://schemas.microsoft.com/office/drawing/2010/main">
                 <a:effectLst>
                   <a:outerShdw blurRad="63500" dist="38099" dir="2700000" algn="ctr" rotWithShape="0">
                     <a:srgbClr val="000000">
@@ -7401,14 +7051,14 @@
           <a:effectLst/>
           <a:extLst>
             <a:ext uri="{909E8E84-426E-40dd-AFC4-6F175D3DCCD1}">
-              <a14:hiddenFill xmlns:a14="http://schemas.microsoft.com/office/drawing/2010/main" xmlns="">
+              <a14:hiddenFill xmlns="" xmlns:a14="http://schemas.microsoft.com/office/drawing/2010/main">
                 <a:solidFill>
                   <a:srgbClr val="FFFFFF"/>
                 </a:solidFill>
               </a14:hiddenFill>
             </a:ext>
             <a:ext uri="{91240B29-F687-4f45-9708-019B960494DF}">
-              <a14:hiddenLine xmlns:a14="http://schemas.microsoft.com/office/drawing/2010/main" xmlns="" w="9525" cap="flat">
+              <a14:hiddenLine xmlns="" xmlns:a14="http://schemas.microsoft.com/office/drawing/2010/main" w="9525" cap="flat">
                 <a:solidFill>
                   <a:srgbClr val="000000"/>
                 </a:solidFill>
@@ -7418,7 +7068,7 @@
               </a14:hiddenLine>
             </a:ext>
             <a:ext uri="{AF507438-7753-43e0-B8FC-AC1667EBCBE1}">
-              <a14:hiddenEffects xmlns:a14="http://schemas.microsoft.com/office/drawing/2010/main" xmlns="">
+              <a14:hiddenEffects xmlns="" xmlns:a14="http://schemas.microsoft.com/office/drawing/2010/main">
                 <a:effectLst>
                   <a:outerShdw blurRad="63500" dist="38099" dir="2700000" algn="ctr" rotWithShape="0">
                     <a:srgbClr val="000000">
@@ -7609,7 +7259,7 @@
           </a:lstStyle>
           <a:p>
             <a:r>
-              <a:rPr lang="fr-FR" sz="1200"/>
+              <a:rPr lang="fr-FR" sz="1200" dirty="0"/>
               <a:t>Europa</a:t>
             </a:r>
           </a:p>
@@ -7638,14 +7288,14 @@
           <a:effectLst/>
           <a:extLst>
             <a:ext uri="{909E8E84-426E-40dd-AFC4-6F175D3DCCD1}">
-              <a14:hiddenFill xmlns:a14="http://schemas.microsoft.com/office/drawing/2010/main" xmlns="">
+              <a14:hiddenFill xmlns="" xmlns:a14="http://schemas.microsoft.com/office/drawing/2010/main">
                 <a:solidFill>
                   <a:srgbClr val="FFFFFF"/>
                 </a:solidFill>
               </a14:hiddenFill>
             </a:ext>
             <a:ext uri="{91240B29-F687-4f45-9708-019B960494DF}">
-              <a14:hiddenLine xmlns:a14="http://schemas.microsoft.com/office/drawing/2010/main" xmlns="" w="9525" cap="flat">
+              <a14:hiddenLine xmlns="" xmlns:a14="http://schemas.microsoft.com/office/drawing/2010/main" w="9525" cap="flat">
                 <a:solidFill>
                   <a:srgbClr val="000000"/>
                 </a:solidFill>
@@ -7655,7 +7305,7 @@
               </a14:hiddenLine>
             </a:ext>
             <a:ext uri="{AF507438-7753-43e0-B8FC-AC1667EBCBE1}">
-              <a14:hiddenEffects xmlns:a14="http://schemas.microsoft.com/office/drawing/2010/main" xmlns="">
+              <a14:hiddenEffects xmlns="" xmlns:a14="http://schemas.microsoft.com/office/drawing/2010/main">
                 <a:effectLst>
                   <a:outerShdw blurRad="63500" dist="38099" dir="2700000" algn="ctr" rotWithShape="0">
                     <a:srgbClr val="000000">
@@ -7884,14 +7534,14 @@
           <a:effectLst/>
           <a:extLst>
             <a:ext uri="{909E8E84-426E-40dd-AFC4-6F175D3DCCD1}">
-              <a14:hiddenFill xmlns:a14="http://schemas.microsoft.com/office/drawing/2010/main" xmlns="">
+              <a14:hiddenFill xmlns="" xmlns:a14="http://schemas.microsoft.com/office/drawing/2010/main">
                 <a:solidFill>
                   <a:srgbClr val="FFFFFF"/>
                 </a:solidFill>
               </a14:hiddenFill>
             </a:ext>
             <a:ext uri="{91240B29-F687-4f45-9708-019B960494DF}">
-              <a14:hiddenLine xmlns:a14="http://schemas.microsoft.com/office/drawing/2010/main" xmlns="" w="9525" cap="flat">
+              <a14:hiddenLine xmlns="" xmlns:a14="http://schemas.microsoft.com/office/drawing/2010/main" w="9525" cap="flat">
                 <a:solidFill>
                   <a:srgbClr val="000000"/>
                 </a:solidFill>
@@ -7901,7 +7551,7 @@
               </a14:hiddenLine>
             </a:ext>
             <a:ext uri="{AF507438-7753-43e0-B8FC-AC1667EBCBE1}">
-              <a14:hiddenEffects xmlns:a14="http://schemas.microsoft.com/office/drawing/2010/main" xmlns="">
+              <a14:hiddenEffects xmlns="" xmlns:a14="http://schemas.microsoft.com/office/drawing/2010/main">
                 <a:effectLst>
                   <a:outerShdw blurRad="63500" dist="38099" dir="2700000" algn="ctr" rotWithShape="0">
                     <a:srgbClr val="000000">
@@ -8130,14 +7780,14 @@
           <a:effectLst/>
           <a:extLst>
             <a:ext uri="{909E8E84-426E-40dd-AFC4-6F175D3DCCD1}">
-              <a14:hiddenFill xmlns:a14="http://schemas.microsoft.com/office/drawing/2010/main" xmlns="">
+              <a14:hiddenFill xmlns="" xmlns:a14="http://schemas.microsoft.com/office/drawing/2010/main">
                 <a:solidFill>
                   <a:srgbClr val="FFFFFF"/>
                 </a:solidFill>
               </a14:hiddenFill>
             </a:ext>
             <a:ext uri="{91240B29-F687-4f45-9708-019B960494DF}">
-              <a14:hiddenLine xmlns:a14="http://schemas.microsoft.com/office/drawing/2010/main" xmlns="" w="9525" cap="flat">
+              <a14:hiddenLine xmlns="" xmlns:a14="http://schemas.microsoft.com/office/drawing/2010/main" w="9525" cap="flat">
                 <a:solidFill>
                   <a:srgbClr val="000000"/>
                 </a:solidFill>
@@ -8147,7 +7797,7 @@
               </a14:hiddenLine>
             </a:ext>
             <a:ext uri="{AF507438-7753-43e0-B8FC-AC1667EBCBE1}">
-              <a14:hiddenEffects xmlns:a14="http://schemas.microsoft.com/office/drawing/2010/main" xmlns="">
+              <a14:hiddenEffects xmlns="" xmlns:a14="http://schemas.microsoft.com/office/drawing/2010/main">
                 <a:effectLst>
                   <a:outerShdw blurRad="63500" dist="38099" dir="2700000" algn="ctr" rotWithShape="0">
                     <a:srgbClr val="000000">
@@ -8373,14 +8023,14 @@
           <a:effectLst/>
           <a:extLst>
             <a:ext uri="{909E8E84-426E-40dd-AFC4-6F175D3DCCD1}">
-              <a14:hiddenFill xmlns:a14="http://schemas.microsoft.com/office/drawing/2010/main" xmlns="">
+              <a14:hiddenFill xmlns="" xmlns:a14="http://schemas.microsoft.com/office/drawing/2010/main">
                 <a:solidFill>
                   <a:srgbClr val="FFFFFF"/>
                 </a:solidFill>
               </a14:hiddenFill>
             </a:ext>
             <a:ext uri="{91240B29-F687-4f45-9708-019B960494DF}">
-              <a14:hiddenLine xmlns:a14="http://schemas.microsoft.com/office/drawing/2010/main" xmlns="" w="9525" cap="flat">
+              <a14:hiddenLine xmlns="" xmlns:a14="http://schemas.microsoft.com/office/drawing/2010/main" w="9525" cap="flat">
                 <a:solidFill>
                   <a:srgbClr val="000000"/>
                 </a:solidFill>
@@ -8390,7 +8040,7 @@
               </a14:hiddenLine>
             </a:ext>
             <a:ext uri="{AF507438-7753-43e0-B8FC-AC1667EBCBE1}">
-              <a14:hiddenEffects xmlns:a14="http://schemas.microsoft.com/office/drawing/2010/main" xmlns="">
+              <a14:hiddenEffects xmlns="" xmlns:a14="http://schemas.microsoft.com/office/drawing/2010/main">
                 <a:effectLst>
                   <a:outerShdw blurRad="63500" dist="38099" dir="2700000" algn="ctr" rotWithShape="0">
                     <a:srgbClr val="000000">
@@ -8617,14 +8267,14 @@
           <a:effectLst/>
           <a:extLst>
             <a:ext uri="{909E8E84-426E-40dd-AFC4-6F175D3DCCD1}">
-              <a14:hiddenFill xmlns:a14="http://schemas.microsoft.com/office/drawing/2010/main" xmlns="">
+              <a14:hiddenFill xmlns="" xmlns:a14="http://schemas.microsoft.com/office/drawing/2010/main">
                 <a:solidFill>
                   <a:srgbClr val="FFFFFF"/>
                 </a:solidFill>
               </a14:hiddenFill>
             </a:ext>
             <a:ext uri="{91240B29-F687-4f45-9708-019B960494DF}">
-              <a14:hiddenLine xmlns:a14="http://schemas.microsoft.com/office/drawing/2010/main" xmlns="" w="9525" cap="flat">
+              <a14:hiddenLine xmlns="" xmlns:a14="http://schemas.microsoft.com/office/drawing/2010/main" w="9525" cap="flat">
                 <a:solidFill>
                   <a:srgbClr val="000000"/>
                 </a:solidFill>
@@ -8634,7 +8284,7 @@
               </a14:hiddenLine>
             </a:ext>
             <a:ext uri="{AF507438-7753-43e0-B8FC-AC1667EBCBE1}">
-              <a14:hiddenEffects xmlns:a14="http://schemas.microsoft.com/office/drawing/2010/main" xmlns="">
+              <a14:hiddenEffects xmlns="" xmlns:a14="http://schemas.microsoft.com/office/drawing/2010/main">
                 <a:effectLst>
                   <a:outerShdw blurRad="63500" dist="38099" dir="2700000" algn="ctr" rotWithShape="0">
                     <a:srgbClr val="000000">
@@ -8863,14 +8513,14 @@
           <a:effectLst/>
           <a:extLst>
             <a:ext uri="{909E8E84-426E-40dd-AFC4-6F175D3DCCD1}">
-              <a14:hiddenFill xmlns:a14="http://schemas.microsoft.com/office/drawing/2010/main" xmlns="">
+              <a14:hiddenFill xmlns="" xmlns:a14="http://schemas.microsoft.com/office/drawing/2010/main">
                 <a:solidFill>
                   <a:srgbClr val="FFFFFF"/>
                 </a:solidFill>
               </a14:hiddenFill>
             </a:ext>
             <a:ext uri="{91240B29-F687-4f45-9708-019B960494DF}">
-              <a14:hiddenLine xmlns:a14="http://schemas.microsoft.com/office/drawing/2010/main" xmlns="" w="9525" cap="flat">
+              <a14:hiddenLine xmlns="" xmlns:a14="http://schemas.microsoft.com/office/drawing/2010/main" w="9525" cap="flat">
                 <a:solidFill>
                   <a:srgbClr val="000000"/>
                 </a:solidFill>
@@ -8880,7 +8530,7 @@
               </a14:hiddenLine>
             </a:ext>
             <a:ext uri="{AF507438-7753-43e0-B8FC-AC1667EBCBE1}">
-              <a14:hiddenEffects xmlns:a14="http://schemas.microsoft.com/office/drawing/2010/main" xmlns="">
+              <a14:hiddenEffects xmlns="" xmlns:a14="http://schemas.microsoft.com/office/drawing/2010/main">
                 <a:effectLst>
                   <a:outerShdw blurRad="63500" dist="38099" dir="2700000" algn="ctr" rotWithShape="0">
                     <a:srgbClr val="000000">
@@ -9118,7 +8768,7 @@
           <a:effectLst/>
           <a:extLst>
             <a:ext uri="{AF507438-7753-43e0-B8FC-AC1667EBCBE1}">
-              <a14:hiddenEffects xmlns:a14="http://schemas.microsoft.com/office/drawing/2010/main" xmlns="">
+              <a14:hiddenEffects xmlns="" xmlns:a14="http://schemas.microsoft.com/office/drawing/2010/main">
                 <a:effectLst>
                   <a:outerShdw blurRad="63500" dist="38099" dir="2700000" algn="ctr" rotWithShape="0">
                     <a:srgbClr val="000000">
@@ -9168,7 +8818,7 @@
           <a:effectLst/>
           <a:extLst>
             <a:ext uri="{AF507438-7753-43e0-B8FC-AC1667EBCBE1}">
-              <a14:hiddenEffects xmlns:a14="http://schemas.microsoft.com/office/drawing/2010/main" xmlns="">
+              <a14:hiddenEffects xmlns="" xmlns:a14="http://schemas.microsoft.com/office/drawing/2010/main">
                 <a:effectLst>
                   <a:outerShdw blurRad="63500" dist="38099" dir="2700000" algn="ctr" rotWithShape="0">
                     <a:srgbClr val="000000">
@@ -9211,14 +8861,14 @@
           <a:effectLst/>
           <a:extLst>
             <a:ext uri="{909E8E84-426E-40dd-AFC4-6F175D3DCCD1}">
-              <a14:hiddenFill xmlns:a14="http://schemas.microsoft.com/office/drawing/2010/main" xmlns="">
+              <a14:hiddenFill xmlns="" xmlns:a14="http://schemas.microsoft.com/office/drawing/2010/main">
                 <a:solidFill>
                   <a:srgbClr val="FFFFFF"/>
                 </a:solidFill>
               </a14:hiddenFill>
             </a:ext>
             <a:ext uri="{91240B29-F687-4f45-9708-019B960494DF}">
-              <a14:hiddenLine xmlns:a14="http://schemas.microsoft.com/office/drawing/2010/main" xmlns="" w="9525" cap="flat">
+              <a14:hiddenLine xmlns="" xmlns:a14="http://schemas.microsoft.com/office/drawing/2010/main" w="9525" cap="flat">
                 <a:solidFill>
                   <a:srgbClr val="000000"/>
                 </a:solidFill>
@@ -9228,7 +8878,7 @@
               </a14:hiddenLine>
             </a:ext>
             <a:ext uri="{AF507438-7753-43e0-B8FC-AC1667EBCBE1}">
-              <a14:hiddenEffects xmlns:a14="http://schemas.microsoft.com/office/drawing/2010/main" xmlns="">
+              <a14:hiddenEffects xmlns="" xmlns:a14="http://schemas.microsoft.com/office/drawing/2010/main">
                 <a:effectLst>
                   <a:outerShdw blurRad="63500" dist="38099" dir="2700000" algn="ctr" rotWithShape="0">
                     <a:srgbClr val="000000">
@@ -9464,7 +9114,7 @@
           <a:effectLst/>
           <a:extLst>
             <a:ext uri="{AF507438-7753-43e0-B8FC-AC1667EBCBE1}">
-              <a14:hiddenEffects xmlns:a14="http://schemas.microsoft.com/office/drawing/2010/main" xmlns="">
+              <a14:hiddenEffects xmlns="" xmlns:a14="http://schemas.microsoft.com/office/drawing/2010/main">
                 <a:effectLst>
                   <a:outerShdw blurRad="63500" dist="38099" dir="2700000" algn="ctr" rotWithShape="0">
                     <a:srgbClr val="000000">
@@ -9514,7 +9164,7 @@
           <a:effectLst/>
           <a:extLst>
             <a:ext uri="{AF507438-7753-43e0-B8FC-AC1667EBCBE1}">
-              <a14:hiddenEffects xmlns:a14="http://schemas.microsoft.com/office/drawing/2010/main" xmlns="">
+              <a14:hiddenEffects xmlns="" xmlns:a14="http://schemas.microsoft.com/office/drawing/2010/main">
                 <a:effectLst>
                   <a:outerShdw blurRad="63500" dist="38099" dir="2700000" algn="ctr" rotWithShape="0">
                     <a:srgbClr val="000000">
@@ -9564,7 +9214,7 @@
           <a:effectLst/>
           <a:extLst>
             <a:ext uri="{AF507438-7753-43e0-B8FC-AC1667EBCBE1}">
-              <a14:hiddenEffects xmlns:a14="http://schemas.microsoft.com/office/drawing/2010/main" xmlns="">
+              <a14:hiddenEffects xmlns="" xmlns:a14="http://schemas.microsoft.com/office/drawing/2010/main">
                 <a:effectLst>
                   <a:outerShdw blurRad="63500" dist="38099" dir="2700000" algn="ctr" rotWithShape="0">
                     <a:srgbClr val="000000">
@@ -9614,7 +9264,7 @@
           <a:effectLst/>
           <a:extLst>
             <a:ext uri="{AF507438-7753-43e0-B8FC-AC1667EBCBE1}">
-              <a14:hiddenEffects xmlns:a14="http://schemas.microsoft.com/office/drawing/2010/main" xmlns="">
+              <a14:hiddenEffects xmlns="" xmlns:a14="http://schemas.microsoft.com/office/drawing/2010/main">
                 <a:effectLst>
                   <a:outerShdw blurRad="63500" dist="38099" dir="2700000" algn="ctr" rotWithShape="0">
                     <a:srgbClr val="000000">
@@ -9664,7 +9314,7 @@
           <a:effectLst/>
           <a:extLst>
             <a:ext uri="{AF507438-7753-43e0-B8FC-AC1667EBCBE1}">
-              <a14:hiddenEffects xmlns:a14="http://schemas.microsoft.com/office/drawing/2010/main" xmlns="">
+              <a14:hiddenEffects xmlns="" xmlns:a14="http://schemas.microsoft.com/office/drawing/2010/main">
                 <a:effectLst>
                   <a:outerShdw blurRad="63500" dist="38099" dir="2700000" algn="ctr" rotWithShape="0">
                     <a:srgbClr val="000000">
@@ -9714,7 +9364,7 @@
           <a:effectLst/>
           <a:extLst>
             <a:ext uri="{AF507438-7753-43e0-B8FC-AC1667EBCBE1}">
-              <a14:hiddenEffects xmlns:a14="http://schemas.microsoft.com/office/drawing/2010/main" xmlns="">
+              <a14:hiddenEffects xmlns="" xmlns:a14="http://schemas.microsoft.com/office/drawing/2010/main">
                 <a:effectLst>
                   <a:outerShdw blurRad="63500" dist="38099" dir="2700000" algn="ctr" rotWithShape="0">
                     <a:srgbClr val="000000">
@@ -9764,7 +9414,7 @@
           <a:effectLst/>
           <a:extLst>
             <a:ext uri="{AF507438-7753-43e0-B8FC-AC1667EBCBE1}">
-              <a14:hiddenEffects xmlns:a14="http://schemas.microsoft.com/office/drawing/2010/main" xmlns="">
+              <a14:hiddenEffects xmlns="" xmlns:a14="http://schemas.microsoft.com/office/drawing/2010/main">
                 <a:effectLst>
                   <a:outerShdw blurRad="63500" dist="38099" dir="2700000" algn="ctr" rotWithShape="0">
                     <a:srgbClr val="000000">
@@ -9814,7 +9464,7 @@
           <a:effectLst/>
           <a:extLst>
             <a:ext uri="{AF507438-7753-43e0-B8FC-AC1667EBCBE1}">
-              <a14:hiddenEffects xmlns:a14="http://schemas.microsoft.com/office/drawing/2010/main" xmlns="">
+              <a14:hiddenEffects xmlns="" xmlns:a14="http://schemas.microsoft.com/office/drawing/2010/main">
                 <a:effectLst>
                   <a:outerShdw blurRad="63500" dist="38099" dir="2700000" algn="ctr" rotWithShape="0">
                     <a:srgbClr val="000000">
@@ -9864,7 +9514,7 @@
           <a:effectLst/>
           <a:extLst>
             <a:ext uri="{AF507438-7753-43e0-B8FC-AC1667EBCBE1}">
-              <a14:hiddenEffects xmlns:a14="http://schemas.microsoft.com/office/drawing/2010/main" xmlns="">
+              <a14:hiddenEffects xmlns="" xmlns:a14="http://schemas.microsoft.com/office/drawing/2010/main">
                 <a:effectLst>
                   <a:outerShdw blurRad="63500" dist="38099" dir="2700000" algn="ctr" rotWithShape="0">
                     <a:srgbClr val="000000">
@@ -9914,7 +9564,7 @@
           <a:effectLst/>
           <a:extLst>
             <a:ext uri="{AF507438-7753-43e0-B8FC-AC1667EBCBE1}">
-              <a14:hiddenEffects xmlns:a14="http://schemas.microsoft.com/office/drawing/2010/main" xmlns="">
+              <a14:hiddenEffects xmlns="" xmlns:a14="http://schemas.microsoft.com/office/drawing/2010/main">
                 <a:effectLst>
                   <a:outerShdw blurRad="63500" dist="38099" dir="2700000" algn="ctr" rotWithShape="0">
                     <a:srgbClr val="000000">
@@ -9964,7 +9614,7 @@
           <a:effectLst/>
           <a:extLst>
             <a:ext uri="{AF507438-7753-43e0-B8FC-AC1667EBCBE1}">
-              <a14:hiddenEffects xmlns:a14="http://schemas.microsoft.com/office/drawing/2010/main" xmlns="">
+              <a14:hiddenEffects xmlns="" xmlns:a14="http://schemas.microsoft.com/office/drawing/2010/main">
                 <a:effectLst>
                   <a:outerShdw blurRad="63500" dist="38099" dir="2700000" algn="ctr" rotWithShape="0">
                     <a:srgbClr val="000000">
@@ -10012,12 +9662,12 @@
           <a:effectLst/>
           <a:extLst>
             <a:ext uri="{909E8E84-426E-40dd-AFC4-6F175D3DCCD1}">
-              <a14:hiddenFill xmlns:a14="http://schemas.microsoft.com/office/drawing/2010/main" xmlns="">
+              <a14:hiddenFill xmlns="" xmlns:a14="http://schemas.microsoft.com/office/drawing/2010/main">
                 <a:noFill/>
               </a14:hiddenFill>
             </a:ext>
             <a:ext uri="{AF507438-7753-43e0-B8FC-AC1667EBCBE1}">
-              <a14:hiddenEffects xmlns:a14="http://schemas.microsoft.com/office/drawing/2010/main" xmlns="">
+              <a14:hiddenEffects xmlns="" xmlns:a14="http://schemas.microsoft.com/office/drawing/2010/main">
                 <a:effectLst>
                   <a:outerShdw blurRad="63500" dist="38099" dir="2700000" algn="ctr" rotWithShape="0">
                     <a:srgbClr val="000000">
@@ -10060,14 +9710,14 @@
           <a:effectLst/>
           <a:extLst>
             <a:ext uri="{909E8E84-426E-40dd-AFC4-6F175D3DCCD1}">
-              <a14:hiddenFill xmlns:a14="http://schemas.microsoft.com/office/drawing/2010/main" xmlns="">
+              <a14:hiddenFill xmlns="" xmlns:a14="http://schemas.microsoft.com/office/drawing/2010/main">
                 <a:solidFill>
                   <a:srgbClr val="FFFFFF"/>
                 </a:solidFill>
               </a14:hiddenFill>
             </a:ext>
             <a:ext uri="{91240B29-F687-4f45-9708-019B960494DF}">
-              <a14:hiddenLine xmlns:a14="http://schemas.microsoft.com/office/drawing/2010/main" xmlns="" w="9525" cap="flat">
+              <a14:hiddenLine xmlns="" xmlns:a14="http://schemas.microsoft.com/office/drawing/2010/main" w="9525" cap="flat">
                 <a:solidFill>
                   <a:srgbClr val="000000"/>
                 </a:solidFill>
@@ -10077,7 +9727,7 @@
               </a14:hiddenLine>
             </a:ext>
             <a:ext uri="{AF507438-7753-43e0-B8FC-AC1667EBCBE1}">
-              <a14:hiddenEffects xmlns:a14="http://schemas.microsoft.com/office/drawing/2010/main" xmlns="">
+              <a14:hiddenEffects xmlns="" xmlns:a14="http://schemas.microsoft.com/office/drawing/2010/main">
                 <a:effectLst>
                   <a:outerShdw blurRad="63500" dist="38099" dir="2700000" algn="ctr" rotWithShape="0">
                     <a:srgbClr val="000000">
@@ -10311,12 +9961,12 @@
           <a:effectLst/>
           <a:extLst>
             <a:ext uri="{909E8E84-426E-40dd-AFC4-6F175D3DCCD1}">
-              <a14:hiddenFill xmlns:a14="http://schemas.microsoft.com/office/drawing/2010/main" xmlns="">
+              <a14:hiddenFill xmlns="" xmlns:a14="http://schemas.microsoft.com/office/drawing/2010/main">
                 <a:noFill/>
               </a14:hiddenFill>
             </a:ext>
             <a:ext uri="{AF507438-7753-43e0-B8FC-AC1667EBCBE1}">
-              <a14:hiddenEffects xmlns:a14="http://schemas.microsoft.com/office/drawing/2010/main" xmlns="">
+              <a14:hiddenEffects xmlns="" xmlns:a14="http://schemas.microsoft.com/office/drawing/2010/main">
                 <a:effectLst>
                   <a:outerShdw blurRad="63500" dist="38099" dir="2700000" algn="ctr" rotWithShape="0">
                     <a:srgbClr val="000000">
@@ -10364,12 +10014,12 @@
           <a:effectLst/>
           <a:extLst>
             <a:ext uri="{909E8E84-426E-40dd-AFC4-6F175D3DCCD1}">
-              <a14:hiddenFill xmlns:a14="http://schemas.microsoft.com/office/drawing/2010/main" xmlns="">
+              <a14:hiddenFill xmlns="" xmlns:a14="http://schemas.microsoft.com/office/drawing/2010/main">
                 <a:noFill/>
               </a14:hiddenFill>
             </a:ext>
             <a:ext uri="{AF507438-7753-43e0-B8FC-AC1667EBCBE1}">
-              <a14:hiddenEffects xmlns:a14="http://schemas.microsoft.com/office/drawing/2010/main" xmlns="">
+              <a14:hiddenEffects xmlns="" xmlns:a14="http://schemas.microsoft.com/office/drawing/2010/main">
                 <a:effectLst>
                   <a:outerShdw blurRad="63500" dist="38099" dir="2700000" algn="ctr" rotWithShape="0">
                     <a:srgbClr val="000000">
@@ -10412,14 +10062,14 @@
           <a:effectLst/>
           <a:extLst>
             <a:ext uri="{909E8E84-426E-40dd-AFC4-6F175D3DCCD1}">
-              <a14:hiddenFill xmlns:a14="http://schemas.microsoft.com/office/drawing/2010/main" xmlns="">
+              <a14:hiddenFill xmlns="" xmlns:a14="http://schemas.microsoft.com/office/drawing/2010/main">
                 <a:solidFill>
                   <a:srgbClr val="FFFFFF"/>
                 </a:solidFill>
               </a14:hiddenFill>
             </a:ext>
             <a:ext uri="{91240B29-F687-4f45-9708-019B960494DF}">
-              <a14:hiddenLine xmlns:a14="http://schemas.microsoft.com/office/drawing/2010/main" xmlns="" w="9525" cap="flat">
+              <a14:hiddenLine xmlns="" xmlns:a14="http://schemas.microsoft.com/office/drawing/2010/main" w="9525" cap="flat">
                 <a:solidFill>
                   <a:srgbClr val="000000"/>
                 </a:solidFill>
@@ -10429,7 +10079,7 @@
               </a14:hiddenLine>
             </a:ext>
             <a:ext uri="{AF507438-7753-43e0-B8FC-AC1667EBCBE1}">
-              <a14:hiddenEffects xmlns:a14="http://schemas.microsoft.com/office/drawing/2010/main" xmlns="">
+              <a14:hiddenEffects xmlns="" xmlns:a14="http://schemas.microsoft.com/office/drawing/2010/main">
                 <a:effectLst>
                   <a:outerShdw blurRad="63500" dist="38099" dir="2700000" algn="ctr" rotWithShape="0">
                     <a:srgbClr val="000000">
@@ -10667,14 +10317,14 @@
           <a:effectLst/>
           <a:extLst>
             <a:ext uri="{909E8E84-426E-40dd-AFC4-6F175D3DCCD1}">
-              <a14:hiddenFill xmlns:a14="http://schemas.microsoft.com/office/drawing/2010/main" xmlns="">
+              <a14:hiddenFill xmlns="" xmlns:a14="http://schemas.microsoft.com/office/drawing/2010/main">
                 <a:solidFill>
                   <a:srgbClr val="FFFFFF"/>
                 </a:solidFill>
               </a14:hiddenFill>
             </a:ext>
             <a:ext uri="{91240B29-F687-4f45-9708-019B960494DF}">
-              <a14:hiddenLine xmlns:a14="http://schemas.microsoft.com/office/drawing/2010/main" xmlns="" w="9525" cap="flat">
+              <a14:hiddenLine xmlns="" xmlns:a14="http://schemas.microsoft.com/office/drawing/2010/main" w="9525" cap="flat">
                 <a:solidFill>
                   <a:srgbClr val="000000"/>
                 </a:solidFill>
@@ -10684,7 +10334,7 @@
               </a14:hiddenLine>
             </a:ext>
             <a:ext uri="{AF507438-7753-43e0-B8FC-AC1667EBCBE1}">
-              <a14:hiddenEffects xmlns:a14="http://schemas.microsoft.com/office/drawing/2010/main" xmlns="">
+              <a14:hiddenEffects xmlns="" xmlns:a14="http://schemas.microsoft.com/office/drawing/2010/main">
                 <a:effectLst>
                   <a:outerShdw blurRad="63500" dist="38099" dir="2700000" algn="ctr" rotWithShape="0">
                     <a:srgbClr val="000000">
@@ -10916,14 +10566,14 @@
           <a:effectLst/>
           <a:extLst>
             <a:ext uri="{909E8E84-426E-40dd-AFC4-6F175D3DCCD1}">
-              <a14:hiddenFill xmlns:a14="http://schemas.microsoft.com/office/drawing/2010/main" xmlns="">
+              <a14:hiddenFill xmlns="" xmlns:a14="http://schemas.microsoft.com/office/drawing/2010/main">
                 <a:solidFill>
                   <a:srgbClr val="FFFFFF"/>
                 </a:solidFill>
               </a14:hiddenFill>
             </a:ext>
             <a:ext uri="{91240B29-F687-4f45-9708-019B960494DF}">
-              <a14:hiddenLine xmlns:a14="http://schemas.microsoft.com/office/drawing/2010/main" xmlns="" w="9525" cap="flat">
+              <a14:hiddenLine xmlns="" xmlns:a14="http://schemas.microsoft.com/office/drawing/2010/main" w="9525" cap="flat">
                 <a:solidFill>
                   <a:srgbClr val="000000"/>
                 </a:solidFill>
@@ -10933,7 +10583,7 @@
               </a14:hiddenLine>
             </a:ext>
             <a:ext uri="{AF507438-7753-43e0-B8FC-AC1667EBCBE1}">
-              <a14:hiddenEffects xmlns:a14="http://schemas.microsoft.com/office/drawing/2010/main" xmlns="">
+              <a14:hiddenEffects xmlns="" xmlns:a14="http://schemas.microsoft.com/office/drawing/2010/main">
                 <a:effectLst>
                   <a:outerShdw blurRad="63500" dist="38099" dir="2700000" algn="ctr" rotWithShape="0">
                     <a:srgbClr val="000000">
@@ -11158,12 +10808,12 @@
           <a:effectLst/>
           <a:extLst>
             <a:ext uri="{909E8E84-426E-40dd-AFC4-6F175D3DCCD1}">
-              <a14:hiddenFill xmlns:a14="http://schemas.microsoft.com/office/drawing/2010/main" xmlns="">
+              <a14:hiddenFill xmlns="" xmlns:a14="http://schemas.microsoft.com/office/drawing/2010/main">
                 <a:noFill/>
               </a14:hiddenFill>
             </a:ext>
             <a:ext uri="{AF507438-7753-43e0-B8FC-AC1667EBCBE1}">
-              <a14:hiddenEffects xmlns:a14="http://schemas.microsoft.com/office/drawing/2010/main" xmlns="">
+              <a14:hiddenEffects xmlns="" xmlns:a14="http://schemas.microsoft.com/office/drawing/2010/main">
                 <a:effectLst>
                   <a:outerShdw blurRad="63500" dist="38099" dir="2700000" algn="ctr" rotWithShape="0">
                     <a:srgbClr val="000000">
@@ -11206,14 +10856,14 @@
           <a:effectLst/>
           <a:extLst>
             <a:ext uri="{909E8E84-426E-40dd-AFC4-6F175D3DCCD1}">
-              <a14:hiddenFill xmlns:a14="http://schemas.microsoft.com/office/drawing/2010/main" xmlns="">
+              <a14:hiddenFill xmlns="" xmlns:a14="http://schemas.microsoft.com/office/drawing/2010/main">
                 <a:solidFill>
                   <a:srgbClr val="FFFFFF"/>
                 </a:solidFill>
               </a14:hiddenFill>
             </a:ext>
             <a:ext uri="{91240B29-F687-4f45-9708-019B960494DF}">
-              <a14:hiddenLine xmlns:a14="http://schemas.microsoft.com/office/drawing/2010/main" xmlns="" w="9525" cap="flat">
+              <a14:hiddenLine xmlns="" xmlns:a14="http://schemas.microsoft.com/office/drawing/2010/main" w="9525" cap="flat">
                 <a:solidFill>
                   <a:srgbClr val="000000"/>
                 </a:solidFill>
@@ -11223,7 +10873,7 @@
               </a14:hiddenLine>
             </a:ext>
             <a:ext uri="{AF507438-7753-43e0-B8FC-AC1667EBCBE1}">
-              <a14:hiddenEffects xmlns:a14="http://schemas.microsoft.com/office/drawing/2010/main" xmlns="">
+              <a14:hiddenEffects xmlns="" xmlns:a14="http://schemas.microsoft.com/office/drawing/2010/main">
                 <a:effectLst>
                   <a:outerShdw blurRad="63500" dist="38099" dir="2700000" algn="ctr" rotWithShape="0">
                     <a:srgbClr val="000000">
@@ -11273,14 +10923,14 @@
           <a:effectLst/>
           <a:extLst>
             <a:ext uri="{909E8E84-426E-40dd-AFC4-6F175D3DCCD1}">
-              <a14:hiddenFill xmlns:a14="http://schemas.microsoft.com/office/drawing/2010/main" xmlns="">
+              <a14:hiddenFill xmlns="" xmlns:a14="http://schemas.microsoft.com/office/drawing/2010/main">
                 <a:solidFill>
                   <a:srgbClr val="FFFFFF"/>
                 </a:solidFill>
               </a14:hiddenFill>
             </a:ext>
             <a:ext uri="{91240B29-F687-4f45-9708-019B960494DF}">
-              <a14:hiddenLine xmlns:a14="http://schemas.microsoft.com/office/drawing/2010/main" xmlns="" w="9525" cap="flat">
+              <a14:hiddenLine xmlns="" xmlns:a14="http://schemas.microsoft.com/office/drawing/2010/main" w="9525" cap="flat">
                 <a:solidFill>
                   <a:srgbClr val="000000"/>
                 </a:solidFill>
@@ -11290,7 +10940,7 @@
               </a14:hiddenLine>
             </a:ext>
             <a:ext uri="{AF507438-7753-43e0-B8FC-AC1667EBCBE1}">
-              <a14:hiddenEffects xmlns:a14="http://schemas.microsoft.com/office/drawing/2010/main" xmlns="">
+              <a14:hiddenEffects xmlns="" xmlns:a14="http://schemas.microsoft.com/office/drawing/2010/main">
                 <a:effectLst>
                   <a:outerShdw blurRad="63500" dist="38099" dir="2700000" algn="ctr" rotWithShape="0">
                     <a:srgbClr val="000000">
@@ -11510,14 +11160,14 @@
           <a:effectLst/>
           <a:extLst>
             <a:ext uri="{909E8E84-426E-40dd-AFC4-6F175D3DCCD1}">
-              <a14:hiddenFill xmlns:a14="http://schemas.microsoft.com/office/drawing/2010/main" xmlns="">
+              <a14:hiddenFill xmlns="" xmlns:a14="http://schemas.microsoft.com/office/drawing/2010/main">
                 <a:solidFill>
                   <a:srgbClr val="FFFFFF"/>
                 </a:solidFill>
               </a14:hiddenFill>
             </a:ext>
             <a:ext uri="{91240B29-F687-4f45-9708-019B960494DF}">
-              <a14:hiddenLine xmlns:a14="http://schemas.microsoft.com/office/drawing/2010/main" xmlns="" w="9525" cap="flat">
+              <a14:hiddenLine xmlns="" xmlns:a14="http://schemas.microsoft.com/office/drawing/2010/main" w="9525" cap="flat">
                 <a:solidFill>
                   <a:srgbClr val="000000"/>
                 </a:solidFill>
@@ -11527,7 +11177,7 @@
               </a14:hiddenLine>
             </a:ext>
             <a:ext uri="{AF507438-7753-43e0-B8FC-AC1667EBCBE1}">
-              <a14:hiddenEffects xmlns:a14="http://schemas.microsoft.com/office/drawing/2010/main" xmlns="">
+              <a14:hiddenEffects xmlns="" xmlns:a14="http://schemas.microsoft.com/office/drawing/2010/main">
                 <a:effectLst>
                   <a:outerShdw blurRad="63500" dist="38099" dir="2700000" algn="ctr" rotWithShape="0">
                     <a:srgbClr val="000000">
@@ -11747,14 +11397,14 @@
           <a:effectLst/>
           <a:extLst>
             <a:ext uri="{909E8E84-426E-40dd-AFC4-6F175D3DCCD1}">
-              <a14:hiddenFill xmlns:a14="http://schemas.microsoft.com/office/drawing/2010/main" xmlns="">
+              <a14:hiddenFill xmlns="" xmlns:a14="http://schemas.microsoft.com/office/drawing/2010/main">
                 <a:solidFill>
                   <a:srgbClr val="FFFFFF"/>
                 </a:solidFill>
               </a14:hiddenFill>
             </a:ext>
             <a:ext uri="{91240B29-F687-4f45-9708-019B960494DF}">
-              <a14:hiddenLine xmlns:a14="http://schemas.microsoft.com/office/drawing/2010/main" xmlns="" w="9525" cap="flat">
+              <a14:hiddenLine xmlns="" xmlns:a14="http://schemas.microsoft.com/office/drawing/2010/main" w="9525" cap="flat">
                 <a:solidFill>
                   <a:srgbClr val="000000"/>
                 </a:solidFill>
@@ -11764,7 +11414,7 @@
               </a14:hiddenLine>
             </a:ext>
             <a:ext uri="{AF507438-7753-43e0-B8FC-AC1667EBCBE1}">
-              <a14:hiddenEffects xmlns:a14="http://schemas.microsoft.com/office/drawing/2010/main" xmlns="">
+              <a14:hiddenEffects xmlns="" xmlns:a14="http://schemas.microsoft.com/office/drawing/2010/main">
                 <a:effectLst>
                   <a:outerShdw blurRad="63500" dist="38099" dir="2700000" algn="ctr" rotWithShape="0">
                     <a:srgbClr val="000000">
@@ -11814,14 +11464,14 @@
           <a:effectLst/>
           <a:extLst>
             <a:ext uri="{909E8E84-426E-40dd-AFC4-6F175D3DCCD1}">
-              <a14:hiddenFill xmlns:a14="http://schemas.microsoft.com/office/drawing/2010/main" xmlns="">
+              <a14:hiddenFill xmlns="" xmlns:a14="http://schemas.microsoft.com/office/drawing/2010/main">
                 <a:solidFill>
                   <a:srgbClr val="FFFFFF"/>
                 </a:solidFill>
               </a14:hiddenFill>
             </a:ext>
             <a:ext uri="{91240B29-F687-4f45-9708-019B960494DF}">
-              <a14:hiddenLine xmlns:a14="http://schemas.microsoft.com/office/drawing/2010/main" xmlns="" w="9525" cap="flat">
+              <a14:hiddenLine xmlns="" xmlns:a14="http://schemas.microsoft.com/office/drawing/2010/main" w="9525" cap="flat">
                 <a:solidFill>
                   <a:srgbClr val="000000"/>
                 </a:solidFill>
@@ -11831,7 +11481,7 @@
               </a14:hiddenLine>
             </a:ext>
             <a:ext uri="{AF507438-7753-43e0-B8FC-AC1667EBCBE1}">
-              <a14:hiddenEffects xmlns:a14="http://schemas.microsoft.com/office/drawing/2010/main" xmlns="">
+              <a14:hiddenEffects xmlns="" xmlns:a14="http://schemas.microsoft.com/office/drawing/2010/main">
                 <a:effectLst>
                   <a:outerShdw blurRad="63500" dist="38099" dir="2700000" algn="ctr" rotWithShape="0">
                     <a:srgbClr val="000000">
@@ -11868,7 +11518,7 @@
         </p:nvSpPr>
         <p:spPr bwMode="auto">
           <a:xfrm>
-            <a:off x="3486150" y="2095500"/>
+            <a:off x="3440112" y="2085360"/>
             <a:ext cx="436563" cy="204788"/>
           </a:xfrm>
           <a:prstGeom prst="rect">
@@ -11881,14 +11531,14 @@
           <a:effectLst/>
           <a:extLst>
             <a:ext uri="{909E8E84-426E-40dd-AFC4-6F175D3DCCD1}">
-              <a14:hiddenFill xmlns:a14="http://schemas.microsoft.com/office/drawing/2010/main" xmlns="">
+              <a14:hiddenFill xmlns="" xmlns:a14="http://schemas.microsoft.com/office/drawing/2010/main">
                 <a:solidFill>
                   <a:srgbClr val="FFFFFF"/>
                 </a:solidFill>
               </a14:hiddenFill>
             </a:ext>
             <a:ext uri="{91240B29-F687-4f45-9708-019B960494DF}">
-              <a14:hiddenLine xmlns:a14="http://schemas.microsoft.com/office/drawing/2010/main" xmlns="" w="9525" cap="flat">
+              <a14:hiddenLine xmlns="" xmlns:a14="http://schemas.microsoft.com/office/drawing/2010/main" w="9525" cap="flat">
                 <a:solidFill>
                   <a:srgbClr val="000000"/>
                 </a:solidFill>
@@ -11898,7 +11548,7 @@
               </a14:hiddenLine>
             </a:ext>
             <a:ext uri="{AF507438-7753-43e0-B8FC-AC1667EBCBE1}">
-              <a14:hiddenEffects xmlns:a14="http://schemas.microsoft.com/office/drawing/2010/main" xmlns="">
+              <a14:hiddenEffects xmlns="" xmlns:a14="http://schemas.microsoft.com/office/drawing/2010/main">
                 <a:effectLst>
                   <a:outerShdw blurRad="63500" dist="38099" dir="2700000" algn="ctr" rotWithShape="0">
                     <a:srgbClr val="000000">
@@ -11915,12 +11565,12 @@
           <a:lstStyle/>
           <a:p>
             <a:r>
-              <a:rPr lang="fr-FR" sz="800">
+              <a:rPr lang="fr-FR" sz="800" dirty="0">
                 <a:solidFill>
                   <a:srgbClr val="000000"/>
                 </a:solidFill>
               </a:rPr>
-              <a:t>Pekin</a:t>
+              <a:t>Paris</a:t>
             </a:r>
           </a:p>
         </p:txBody>
@@ -11948,14 +11598,14 @@
           <a:effectLst/>
           <a:extLst>
             <a:ext uri="{909E8E84-426E-40dd-AFC4-6F175D3DCCD1}">
-              <a14:hiddenFill xmlns:a14="http://schemas.microsoft.com/office/drawing/2010/main" xmlns="">
+              <a14:hiddenFill xmlns="" xmlns:a14="http://schemas.microsoft.com/office/drawing/2010/main">
                 <a:solidFill>
                   <a:srgbClr val="FFFFFF"/>
                 </a:solidFill>
               </a14:hiddenFill>
             </a:ext>
             <a:ext uri="{91240B29-F687-4f45-9708-019B960494DF}">
-              <a14:hiddenLine xmlns:a14="http://schemas.microsoft.com/office/drawing/2010/main" xmlns="" w="9525" cap="flat">
+              <a14:hiddenLine xmlns="" xmlns:a14="http://schemas.microsoft.com/office/drawing/2010/main" w="9525" cap="flat">
                 <a:solidFill>
                   <a:srgbClr val="000000"/>
                 </a:solidFill>
@@ -11965,7 +11615,7 @@
               </a14:hiddenLine>
             </a:ext>
             <a:ext uri="{AF507438-7753-43e0-B8FC-AC1667EBCBE1}">
-              <a14:hiddenEffects xmlns:a14="http://schemas.microsoft.com/office/drawing/2010/main" xmlns="">
+              <a14:hiddenEffects xmlns="" xmlns:a14="http://schemas.microsoft.com/office/drawing/2010/main">
                 <a:effectLst>
                   <a:outerShdw blurRad="63500" dist="38099" dir="2700000" algn="ctr" rotWithShape="0">
                     <a:srgbClr val="000000">
@@ -12015,14 +11665,14 @@
           <a:effectLst/>
           <a:extLst>
             <a:ext uri="{909E8E84-426E-40dd-AFC4-6F175D3DCCD1}">
-              <a14:hiddenFill xmlns:a14="http://schemas.microsoft.com/office/drawing/2010/main" xmlns="">
+              <a14:hiddenFill xmlns="" xmlns:a14="http://schemas.microsoft.com/office/drawing/2010/main">
                 <a:solidFill>
                   <a:srgbClr val="FFFFFF"/>
                 </a:solidFill>
               </a14:hiddenFill>
             </a:ext>
             <a:ext uri="{91240B29-F687-4f45-9708-019B960494DF}">
-              <a14:hiddenLine xmlns:a14="http://schemas.microsoft.com/office/drawing/2010/main" xmlns="" w="9525" cap="flat">
+              <a14:hiddenLine xmlns="" xmlns:a14="http://schemas.microsoft.com/office/drawing/2010/main" w="9525" cap="flat">
                 <a:solidFill>
                   <a:srgbClr val="000000"/>
                 </a:solidFill>
@@ -12032,7 +11682,7 @@
               </a14:hiddenLine>
             </a:ext>
             <a:ext uri="{AF507438-7753-43e0-B8FC-AC1667EBCBE1}">
-              <a14:hiddenEffects xmlns:a14="http://schemas.microsoft.com/office/drawing/2010/main" xmlns="">
+              <a14:hiddenEffects xmlns="" xmlns:a14="http://schemas.microsoft.com/office/drawing/2010/main">
                 <a:effectLst>
                   <a:outerShdw blurRad="63500" dist="38099" dir="2700000" algn="ctr" rotWithShape="0">
                     <a:srgbClr val="000000">
@@ -12252,14 +11902,14 @@
           <a:effectLst/>
           <a:extLst>
             <a:ext uri="{909E8E84-426E-40dd-AFC4-6F175D3DCCD1}">
-              <a14:hiddenFill xmlns:a14="http://schemas.microsoft.com/office/drawing/2010/main" xmlns="">
+              <a14:hiddenFill xmlns="" xmlns:a14="http://schemas.microsoft.com/office/drawing/2010/main">
                 <a:solidFill>
                   <a:srgbClr val="FFFFFF"/>
                 </a:solidFill>
               </a14:hiddenFill>
             </a:ext>
             <a:ext uri="{91240B29-F687-4f45-9708-019B960494DF}">
-              <a14:hiddenLine xmlns:a14="http://schemas.microsoft.com/office/drawing/2010/main" xmlns="" w="9525" cap="flat">
+              <a14:hiddenLine xmlns="" xmlns:a14="http://schemas.microsoft.com/office/drawing/2010/main" w="9525" cap="flat">
                 <a:solidFill>
                   <a:srgbClr val="000000"/>
                 </a:solidFill>
@@ -12269,7 +11919,7 @@
               </a14:hiddenLine>
             </a:ext>
             <a:ext uri="{AF507438-7753-43e0-B8FC-AC1667EBCBE1}">
-              <a14:hiddenEffects xmlns:a14="http://schemas.microsoft.com/office/drawing/2010/main" xmlns="">
+              <a14:hiddenEffects xmlns="" xmlns:a14="http://schemas.microsoft.com/office/drawing/2010/main">
                 <a:effectLst>
                   <a:outerShdw blurRad="63500" dist="38099" dir="2700000" algn="ctr" rotWithShape="0">
                     <a:srgbClr val="000000">
@@ -12319,14 +11969,14 @@
           <a:effectLst/>
           <a:extLst>
             <a:ext uri="{909E8E84-426E-40dd-AFC4-6F175D3DCCD1}">
-              <a14:hiddenFill xmlns:a14="http://schemas.microsoft.com/office/drawing/2010/main" xmlns="">
+              <a14:hiddenFill xmlns="" xmlns:a14="http://schemas.microsoft.com/office/drawing/2010/main">
                 <a:solidFill>
                   <a:srgbClr val="FFFFFF"/>
                 </a:solidFill>
               </a14:hiddenFill>
             </a:ext>
             <a:ext uri="{91240B29-F687-4f45-9708-019B960494DF}">
-              <a14:hiddenLine xmlns:a14="http://schemas.microsoft.com/office/drawing/2010/main" xmlns="" w="9525" cap="flat">
+              <a14:hiddenLine xmlns="" xmlns:a14="http://schemas.microsoft.com/office/drawing/2010/main" w="9525" cap="flat">
                 <a:solidFill>
                   <a:srgbClr val="000000"/>
                 </a:solidFill>
@@ -12336,7 +11986,7 @@
               </a14:hiddenLine>
             </a:ext>
             <a:ext uri="{AF507438-7753-43e0-B8FC-AC1667EBCBE1}">
-              <a14:hiddenEffects xmlns:a14="http://schemas.microsoft.com/office/drawing/2010/main" xmlns="">
+              <a14:hiddenEffects xmlns="" xmlns:a14="http://schemas.microsoft.com/office/drawing/2010/main">
                 <a:effectLst>
                   <a:outerShdw blurRad="63500" dist="38099" dir="2700000" algn="ctr" rotWithShape="0">
                     <a:srgbClr val="000000">
@@ -12556,14 +12206,14 @@
           <a:effectLst/>
           <a:extLst>
             <a:ext uri="{909E8E84-426E-40dd-AFC4-6F175D3DCCD1}">
-              <a14:hiddenFill xmlns:a14="http://schemas.microsoft.com/office/drawing/2010/main" xmlns="">
+              <a14:hiddenFill xmlns="" xmlns:a14="http://schemas.microsoft.com/office/drawing/2010/main">
                 <a:solidFill>
                   <a:srgbClr val="FFFFFF"/>
                 </a:solidFill>
               </a14:hiddenFill>
             </a:ext>
             <a:ext uri="{91240B29-F687-4f45-9708-019B960494DF}">
-              <a14:hiddenLine xmlns:a14="http://schemas.microsoft.com/office/drawing/2010/main" xmlns="" w="9525" cap="flat">
+              <a14:hiddenLine xmlns="" xmlns:a14="http://schemas.microsoft.com/office/drawing/2010/main" w="9525" cap="flat">
                 <a:solidFill>
                   <a:srgbClr val="000000"/>
                 </a:solidFill>
@@ -12573,7 +12223,7 @@
               </a14:hiddenLine>
             </a:ext>
             <a:ext uri="{AF507438-7753-43e0-B8FC-AC1667EBCBE1}">
-              <a14:hiddenEffects xmlns:a14="http://schemas.microsoft.com/office/drawing/2010/main" xmlns="">
+              <a14:hiddenEffects xmlns="" xmlns:a14="http://schemas.microsoft.com/office/drawing/2010/main">
                 <a:effectLst>
                   <a:outerShdw blurRad="63500" dist="38099" dir="2700000" algn="ctr" rotWithShape="0">
                     <a:srgbClr val="000000">
@@ -12793,14 +12443,14 @@
           <a:effectLst/>
           <a:extLst>
             <a:ext uri="{909E8E84-426E-40dd-AFC4-6F175D3DCCD1}">
-              <a14:hiddenFill xmlns:a14="http://schemas.microsoft.com/office/drawing/2010/main" xmlns="">
+              <a14:hiddenFill xmlns="" xmlns:a14="http://schemas.microsoft.com/office/drawing/2010/main">
                 <a:solidFill>
                   <a:srgbClr val="FFFFFF"/>
                 </a:solidFill>
               </a14:hiddenFill>
             </a:ext>
             <a:ext uri="{91240B29-F687-4f45-9708-019B960494DF}">
-              <a14:hiddenLine xmlns:a14="http://schemas.microsoft.com/office/drawing/2010/main" xmlns="" w="9525" cap="flat">
+              <a14:hiddenLine xmlns="" xmlns:a14="http://schemas.microsoft.com/office/drawing/2010/main" w="9525" cap="flat">
                 <a:solidFill>
                   <a:srgbClr val="000000"/>
                 </a:solidFill>
@@ -12810,7 +12460,7 @@
               </a14:hiddenLine>
             </a:ext>
             <a:ext uri="{AF507438-7753-43e0-B8FC-AC1667EBCBE1}">
-              <a14:hiddenEffects xmlns:a14="http://schemas.microsoft.com/office/drawing/2010/main" xmlns="">
+              <a14:hiddenEffects xmlns="" xmlns:a14="http://schemas.microsoft.com/office/drawing/2010/main">
                 <a:effectLst>
                   <a:outerShdw blurRad="63500" dist="38099" dir="2700000" algn="ctr" rotWithShape="0">
                     <a:srgbClr val="000000">
@@ -13030,14 +12680,14 @@
           <a:effectLst/>
           <a:extLst>
             <a:ext uri="{909E8E84-426E-40dd-AFC4-6F175D3DCCD1}">
-              <a14:hiddenFill xmlns:a14="http://schemas.microsoft.com/office/drawing/2010/main" xmlns="">
+              <a14:hiddenFill xmlns="" xmlns:a14="http://schemas.microsoft.com/office/drawing/2010/main">
                 <a:solidFill>
                   <a:srgbClr val="FFFFFF"/>
                 </a:solidFill>
               </a14:hiddenFill>
             </a:ext>
             <a:ext uri="{91240B29-F687-4f45-9708-019B960494DF}">
-              <a14:hiddenLine xmlns:a14="http://schemas.microsoft.com/office/drawing/2010/main" xmlns="" w="9525" cap="flat">
+              <a14:hiddenLine xmlns="" xmlns:a14="http://schemas.microsoft.com/office/drawing/2010/main" w="9525" cap="flat">
                 <a:solidFill>
                   <a:srgbClr val="000000"/>
                 </a:solidFill>
@@ -13047,7 +12697,7 @@
               </a14:hiddenLine>
             </a:ext>
             <a:ext uri="{AF507438-7753-43e0-B8FC-AC1667EBCBE1}">
-              <a14:hiddenEffects xmlns:a14="http://schemas.microsoft.com/office/drawing/2010/main" xmlns="">
+              <a14:hiddenEffects xmlns="" xmlns:a14="http://schemas.microsoft.com/office/drawing/2010/main">
                 <a:effectLst>
                   <a:outerShdw blurRad="63500" dist="38099" dir="2700000" algn="ctr" rotWithShape="0">
                     <a:srgbClr val="000000">
@@ -13267,14 +12917,14 @@
           <a:effectLst/>
           <a:extLst>
             <a:ext uri="{909E8E84-426E-40dd-AFC4-6F175D3DCCD1}">
-              <a14:hiddenFill xmlns:a14="http://schemas.microsoft.com/office/drawing/2010/main" xmlns="">
+              <a14:hiddenFill xmlns="" xmlns:a14="http://schemas.microsoft.com/office/drawing/2010/main">
                 <a:solidFill>
                   <a:srgbClr val="FFFFFF"/>
                 </a:solidFill>
               </a14:hiddenFill>
             </a:ext>
             <a:ext uri="{91240B29-F687-4f45-9708-019B960494DF}">
-              <a14:hiddenLine xmlns:a14="http://schemas.microsoft.com/office/drawing/2010/main" xmlns="" w="9525" cap="flat">
+              <a14:hiddenLine xmlns="" xmlns:a14="http://schemas.microsoft.com/office/drawing/2010/main" w="9525" cap="flat">
                 <a:solidFill>
                   <a:srgbClr val="000000"/>
                 </a:solidFill>
@@ -13284,7 +12934,7 @@
               </a14:hiddenLine>
             </a:ext>
             <a:ext uri="{AF507438-7753-43e0-B8FC-AC1667EBCBE1}">
-              <a14:hiddenEffects xmlns:a14="http://schemas.microsoft.com/office/drawing/2010/main" xmlns="">
+              <a14:hiddenEffects xmlns="" xmlns:a14="http://schemas.microsoft.com/office/drawing/2010/main">
                 <a:effectLst>
                   <a:outerShdw blurRad="63500" dist="38099" dir="2700000" algn="ctr" rotWithShape="0">
                     <a:srgbClr val="000000">
@@ -13504,14 +13154,14 @@
           <a:effectLst/>
           <a:extLst>
             <a:ext uri="{909E8E84-426E-40dd-AFC4-6F175D3DCCD1}">
-              <a14:hiddenFill xmlns:a14="http://schemas.microsoft.com/office/drawing/2010/main" xmlns="">
+              <a14:hiddenFill xmlns="" xmlns:a14="http://schemas.microsoft.com/office/drawing/2010/main">
                 <a:solidFill>
                   <a:srgbClr val="FFFFFF"/>
                 </a:solidFill>
               </a14:hiddenFill>
             </a:ext>
             <a:ext uri="{91240B29-F687-4f45-9708-019B960494DF}">
-              <a14:hiddenLine xmlns:a14="http://schemas.microsoft.com/office/drawing/2010/main" xmlns="" w="9525" cap="flat">
+              <a14:hiddenLine xmlns="" xmlns:a14="http://schemas.microsoft.com/office/drawing/2010/main" w="9525" cap="flat">
                 <a:solidFill>
                   <a:srgbClr val="000000"/>
                 </a:solidFill>
@@ -13521,7 +13171,7 @@
               </a14:hiddenLine>
             </a:ext>
             <a:ext uri="{AF507438-7753-43e0-B8FC-AC1667EBCBE1}">
-              <a14:hiddenEffects xmlns:a14="http://schemas.microsoft.com/office/drawing/2010/main" xmlns="">
+              <a14:hiddenEffects xmlns="" xmlns:a14="http://schemas.microsoft.com/office/drawing/2010/main">
                 <a:effectLst>
                   <a:outerShdw blurRad="63500" dist="38099" dir="2700000" algn="ctr" rotWithShape="0">
                     <a:srgbClr val="000000">
@@ -13571,14 +13221,14 @@
           <a:effectLst/>
           <a:extLst>
             <a:ext uri="{909E8E84-426E-40dd-AFC4-6F175D3DCCD1}">
-              <a14:hiddenFill xmlns:a14="http://schemas.microsoft.com/office/drawing/2010/main" xmlns="">
+              <a14:hiddenFill xmlns="" xmlns:a14="http://schemas.microsoft.com/office/drawing/2010/main">
                 <a:solidFill>
                   <a:srgbClr val="FFFFFF"/>
                 </a:solidFill>
               </a14:hiddenFill>
             </a:ext>
             <a:ext uri="{91240B29-F687-4f45-9708-019B960494DF}">
-              <a14:hiddenLine xmlns:a14="http://schemas.microsoft.com/office/drawing/2010/main" xmlns="" w="9525" cap="flat">
+              <a14:hiddenLine xmlns="" xmlns:a14="http://schemas.microsoft.com/office/drawing/2010/main" w="9525" cap="flat">
                 <a:solidFill>
                   <a:srgbClr val="000000"/>
                 </a:solidFill>
@@ -13588,7 +13238,7 @@
               </a14:hiddenLine>
             </a:ext>
             <a:ext uri="{AF507438-7753-43e0-B8FC-AC1667EBCBE1}">
-              <a14:hiddenEffects xmlns:a14="http://schemas.microsoft.com/office/drawing/2010/main" xmlns="">
+              <a14:hiddenEffects xmlns="" xmlns:a14="http://schemas.microsoft.com/office/drawing/2010/main">
                 <a:effectLst>
                   <a:outerShdw blurRad="63500" dist="38099" dir="2700000" algn="ctr" rotWithShape="0">
                     <a:srgbClr val="000000">
@@ -13625,7 +13275,7 @@
         </p:nvSpPr>
         <p:spPr bwMode="auto">
           <a:xfrm>
-            <a:off x="5199063" y="2874963"/>
+            <a:off x="5126683" y="2902046"/>
             <a:ext cx="593725" cy="204787"/>
           </a:xfrm>
           <a:prstGeom prst="rect">
@@ -13638,14 +13288,14 @@
           <a:effectLst/>
           <a:extLst>
             <a:ext uri="{909E8E84-426E-40dd-AFC4-6F175D3DCCD1}">
-              <a14:hiddenFill xmlns:a14="http://schemas.microsoft.com/office/drawing/2010/main" xmlns="">
+              <a14:hiddenFill xmlns="" xmlns:a14="http://schemas.microsoft.com/office/drawing/2010/main">
                 <a:solidFill>
                   <a:srgbClr val="FFFFFF"/>
                 </a:solidFill>
               </a14:hiddenFill>
             </a:ext>
             <a:ext uri="{91240B29-F687-4f45-9708-019B960494DF}">
-              <a14:hiddenLine xmlns:a14="http://schemas.microsoft.com/office/drawing/2010/main" xmlns="" w="9525" cap="flat">
+              <a14:hiddenLine xmlns="" xmlns:a14="http://schemas.microsoft.com/office/drawing/2010/main" w="9525" cap="flat">
                 <a:solidFill>
                   <a:srgbClr val="000000"/>
                 </a:solidFill>
@@ -13655,7 +13305,7 @@
               </a14:hiddenLine>
             </a:ext>
             <a:ext uri="{AF507438-7753-43e0-B8FC-AC1667EBCBE1}">
-              <a14:hiddenEffects xmlns:a14="http://schemas.microsoft.com/office/drawing/2010/main" xmlns="">
+              <a14:hiddenEffects xmlns="" xmlns:a14="http://schemas.microsoft.com/office/drawing/2010/main">
                 <a:effectLst>
                   <a:outerShdw blurRad="63500" dist="38099" dir="2700000" algn="ctr" rotWithShape="0">
                     <a:srgbClr val="000000">
@@ -13846,7 +13496,7 @@
           </a:lstStyle>
           <a:p>
             <a:r>
-              <a:rPr lang="fr-FR" sz="800"/>
+              <a:rPr lang="fr-FR" sz="800" dirty="0"/>
               <a:t>Lisbonne</a:t>
             </a:r>
           </a:p>
@@ -13875,14 +13525,14 @@
           <a:effectLst/>
           <a:extLst>
             <a:ext uri="{909E8E84-426E-40dd-AFC4-6F175D3DCCD1}">
-              <a14:hiddenFill xmlns:a14="http://schemas.microsoft.com/office/drawing/2010/main" xmlns="">
+              <a14:hiddenFill xmlns="" xmlns:a14="http://schemas.microsoft.com/office/drawing/2010/main">
                 <a:solidFill>
                   <a:srgbClr val="FFFFFF"/>
                 </a:solidFill>
               </a14:hiddenFill>
             </a:ext>
             <a:ext uri="{91240B29-F687-4f45-9708-019B960494DF}">
-              <a14:hiddenLine xmlns:a14="http://schemas.microsoft.com/office/drawing/2010/main" xmlns="" w="9525" cap="flat">
+              <a14:hiddenLine xmlns="" xmlns:a14="http://schemas.microsoft.com/office/drawing/2010/main" w="9525" cap="flat">
                 <a:solidFill>
                   <a:srgbClr val="000000"/>
                 </a:solidFill>
@@ -13892,7 +13542,7 @@
               </a14:hiddenLine>
             </a:ext>
             <a:ext uri="{AF507438-7753-43e0-B8FC-AC1667EBCBE1}">
-              <a14:hiddenEffects xmlns:a14="http://schemas.microsoft.com/office/drawing/2010/main" xmlns="">
+              <a14:hiddenEffects xmlns="" xmlns:a14="http://schemas.microsoft.com/office/drawing/2010/main">
                 <a:effectLst>
                   <a:outerShdw blurRad="63500" dist="38099" dir="2700000" algn="ctr" rotWithShape="0">
                     <a:srgbClr val="000000">
@@ -13942,14 +13592,14 @@
           <a:effectLst/>
           <a:extLst>
             <a:ext uri="{909E8E84-426E-40dd-AFC4-6F175D3DCCD1}">
-              <a14:hiddenFill xmlns:a14="http://schemas.microsoft.com/office/drawing/2010/main" xmlns="">
+              <a14:hiddenFill xmlns="" xmlns:a14="http://schemas.microsoft.com/office/drawing/2010/main">
                 <a:solidFill>
                   <a:srgbClr val="FFFFFF"/>
                 </a:solidFill>
               </a14:hiddenFill>
             </a:ext>
             <a:ext uri="{91240B29-F687-4f45-9708-019B960494DF}">
-              <a14:hiddenLine xmlns:a14="http://schemas.microsoft.com/office/drawing/2010/main" xmlns="" w="9525" cap="flat">
+              <a14:hiddenLine xmlns="" xmlns:a14="http://schemas.microsoft.com/office/drawing/2010/main" w="9525" cap="flat">
                 <a:solidFill>
                   <a:srgbClr val="000000"/>
                 </a:solidFill>
@@ -13959,7 +13609,7 @@
               </a14:hiddenLine>
             </a:ext>
             <a:ext uri="{AF507438-7753-43e0-B8FC-AC1667EBCBE1}">
-              <a14:hiddenEffects xmlns:a14="http://schemas.microsoft.com/office/drawing/2010/main" xmlns="">
+              <a14:hiddenEffects xmlns="" xmlns:a14="http://schemas.microsoft.com/office/drawing/2010/main">
                 <a:effectLst>
                   <a:outerShdw blurRad="63500" dist="38099" dir="2700000" algn="ctr" rotWithShape="0">
                     <a:srgbClr val="000000">
@@ -14179,14 +13829,14 @@
           <a:effectLst/>
           <a:extLst>
             <a:ext uri="{909E8E84-426E-40dd-AFC4-6F175D3DCCD1}">
-              <a14:hiddenFill xmlns:a14="http://schemas.microsoft.com/office/drawing/2010/main" xmlns="">
+              <a14:hiddenFill xmlns="" xmlns:a14="http://schemas.microsoft.com/office/drawing/2010/main">
                 <a:solidFill>
                   <a:srgbClr val="FFFFFF"/>
                 </a:solidFill>
               </a14:hiddenFill>
             </a:ext>
             <a:ext uri="{91240B29-F687-4f45-9708-019B960494DF}">
-              <a14:hiddenLine xmlns:a14="http://schemas.microsoft.com/office/drawing/2010/main" xmlns="" w="9525" cap="flat">
+              <a14:hiddenLine xmlns="" xmlns:a14="http://schemas.microsoft.com/office/drawing/2010/main" w="9525" cap="flat">
                 <a:solidFill>
                   <a:srgbClr val="000000"/>
                 </a:solidFill>
@@ -14196,7 +13846,7 @@
               </a14:hiddenLine>
             </a:ext>
             <a:ext uri="{AF507438-7753-43e0-B8FC-AC1667EBCBE1}">
-              <a14:hiddenEffects xmlns:a14="http://schemas.microsoft.com/office/drawing/2010/main" xmlns="">
+              <a14:hiddenEffects xmlns="" xmlns:a14="http://schemas.microsoft.com/office/drawing/2010/main">
                 <a:effectLst>
                   <a:outerShdw blurRad="63500" dist="38099" dir="2700000" algn="ctr" rotWithShape="0">
                     <a:srgbClr val="000000">
@@ -14416,14 +14066,14 @@
           <a:effectLst/>
           <a:extLst>
             <a:ext uri="{909E8E84-426E-40dd-AFC4-6F175D3DCCD1}">
-              <a14:hiddenFill xmlns:a14="http://schemas.microsoft.com/office/drawing/2010/main" xmlns="">
+              <a14:hiddenFill xmlns="" xmlns:a14="http://schemas.microsoft.com/office/drawing/2010/main">
                 <a:solidFill>
                   <a:srgbClr val="FFFFFF"/>
                 </a:solidFill>
               </a14:hiddenFill>
             </a:ext>
             <a:ext uri="{91240B29-F687-4f45-9708-019B960494DF}">
-              <a14:hiddenLine xmlns:a14="http://schemas.microsoft.com/office/drawing/2010/main" xmlns="" w="9525" cap="flat">
+              <a14:hiddenLine xmlns="" xmlns:a14="http://schemas.microsoft.com/office/drawing/2010/main" w="9525" cap="flat">
                 <a:solidFill>
                   <a:srgbClr val="000000"/>
                 </a:solidFill>
@@ -14433,7 +14083,7 @@
               </a14:hiddenLine>
             </a:ext>
             <a:ext uri="{AF507438-7753-43e0-B8FC-AC1667EBCBE1}">
-              <a14:hiddenEffects xmlns:a14="http://schemas.microsoft.com/office/drawing/2010/main" xmlns="">
+              <a14:hiddenEffects xmlns="" xmlns:a14="http://schemas.microsoft.com/office/drawing/2010/main">
                 <a:effectLst>
                   <a:outerShdw blurRad="63500" dist="38099" dir="2700000" algn="ctr" rotWithShape="0">
                     <a:srgbClr val="000000">
@@ -14653,14 +14303,14 @@
           <a:effectLst/>
           <a:extLst>
             <a:ext uri="{909E8E84-426E-40dd-AFC4-6F175D3DCCD1}">
-              <a14:hiddenFill xmlns:a14="http://schemas.microsoft.com/office/drawing/2010/main" xmlns="">
+              <a14:hiddenFill xmlns="" xmlns:a14="http://schemas.microsoft.com/office/drawing/2010/main">
                 <a:solidFill>
                   <a:srgbClr val="FFFFFF"/>
                 </a:solidFill>
               </a14:hiddenFill>
             </a:ext>
             <a:ext uri="{91240B29-F687-4f45-9708-019B960494DF}">
-              <a14:hiddenLine xmlns:a14="http://schemas.microsoft.com/office/drawing/2010/main" xmlns="" w="9525" cap="flat">
+              <a14:hiddenLine xmlns="" xmlns:a14="http://schemas.microsoft.com/office/drawing/2010/main" w="9525" cap="flat">
                 <a:solidFill>
                   <a:srgbClr val="000000"/>
                 </a:solidFill>
@@ -14670,7 +14320,7 @@
               </a14:hiddenLine>
             </a:ext>
             <a:ext uri="{AF507438-7753-43e0-B8FC-AC1667EBCBE1}">
-              <a14:hiddenEffects xmlns:a14="http://schemas.microsoft.com/office/drawing/2010/main" xmlns="">
+              <a14:hiddenEffects xmlns="" xmlns:a14="http://schemas.microsoft.com/office/drawing/2010/main">
                 <a:effectLst>
                   <a:outerShdw blurRad="63500" dist="38099" dir="2700000" algn="ctr" rotWithShape="0">
                     <a:srgbClr val="000000">
@@ -14890,14 +14540,14 @@
           <a:effectLst/>
           <a:extLst>
             <a:ext uri="{909E8E84-426E-40dd-AFC4-6F175D3DCCD1}">
-              <a14:hiddenFill xmlns:a14="http://schemas.microsoft.com/office/drawing/2010/main" xmlns="">
+              <a14:hiddenFill xmlns="" xmlns:a14="http://schemas.microsoft.com/office/drawing/2010/main">
                 <a:solidFill>
                   <a:srgbClr val="FFFFFF"/>
                 </a:solidFill>
               </a14:hiddenFill>
             </a:ext>
             <a:ext uri="{91240B29-F687-4f45-9708-019B960494DF}">
-              <a14:hiddenLine xmlns:a14="http://schemas.microsoft.com/office/drawing/2010/main" xmlns="" w="9525" cap="flat">
+              <a14:hiddenLine xmlns="" xmlns:a14="http://schemas.microsoft.com/office/drawing/2010/main" w="9525" cap="flat">
                 <a:solidFill>
                   <a:srgbClr val="000000"/>
                 </a:solidFill>
@@ -14907,7 +14557,7 @@
               </a14:hiddenLine>
             </a:ext>
             <a:ext uri="{AF507438-7753-43e0-B8FC-AC1667EBCBE1}">
-              <a14:hiddenEffects xmlns:a14="http://schemas.microsoft.com/office/drawing/2010/main" xmlns="">
+              <a14:hiddenEffects xmlns="" xmlns:a14="http://schemas.microsoft.com/office/drawing/2010/main">
                 <a:effectLst>
                   <a:outerShdw blurRad="63500" dist="38099" dir="2700000" algn="ctr" rotWithShape="0">
                     <a:srgbClr val="000000">
@@ -14957,14 +14607,14 @@
           <a:effectLst/>
           <a:extLst>
             <a:ext uri="{909E8E84-426E-40dd-AFC4-6F175D3DCCD1}">
-              <a14:hiddenFill xmlns:a14="http://schemas.microsoft.com/office/drawing/2010/main" xmlns="">
+              <a14:hiddenFill xmlns="" xmlns:a14="http://schemas.microsoft.com/office/drawing/2010/main">
                 <a:solidFill>
                   <a:srgbClr val="FFFFFF"/>
                 </a:solidFill>
               </a14:hiddenFill>
             </a:ext>
             <a:ext uri="{91240B29-F687-4f45-9708-019B960494DF}">
-              <a14:hiddenLine xmlns:a14="http://schemas.microsoft.com/office/drawing/2010/main" xmlns="" w="9525" cap="flat">
+              <a14:hiddenLine xmlns="" xmlns:a14="http://schemas.microsoft.com/office/drawing/2010/main" w="9525" cap="flat">
                 <a:solidFill>
                   <a:srgbClr val="000000"/>
                 </a:solidFill>
@@ -14974,7 +14624,7 @@
               </a14:hiddenLine>
             </a:ext>
             <a:ext uri="{AF507438-7753-43e0-B8FC-AC1667EBCBE1}">
-              <a14:hiddenEffects xmlns:a14="http://schemas.microsoft.com/office/drawing/2010/main" xmlns="">
+              <a14:hiddenEffects xmlns="" xmlns:a14="http://schemas.microsoft.com/office/drawing/2010/main">
                 <a:effectLst>
                   <a:outerShdw blurRad="63500" dist="38099" dir="2700000" algn="ctr" rotWithShape="0">
                     <a:srgbClr val="000000">
@@ -15024,14 +14674,14 @@
           <a:effectLst/>
           <a:extLst>
             <a:ext uri="{909E8E84-426E-40dd-AFC4-6F175D3DCCD1}">
-              <a14:hiddenFill xmlns:a14="http://schemas.microsoft.com/office/drawing/2010/main" xmlns="">
+              <a14:hiddenFill xmlns="" xmlns:a14="http://schemas.microsoft.com/office/drawing/2010/main">
                 <a:solidFill>
                   <a:srgbClr val="FFFFFF"/>
                 </a:solidFill>
               </a14:hiddenFill>
             </a:ext>
             <a:ext uri="{91240B29-F687-4f45-9708-019B960494DF}">
-              <a14:hiddenLine xmlns:a14="http://schemas.microsoft.com/office/drawing/2010/main" xmlns="" w="9525" cap="flat">
+              <a14:hiddenLine xmlns="" xmlns:a14="http://schemas.microsoft.com/office/drawing/2010/main" w="9525" cap="flat">
                 <a:solidFill>
                   <a:srgbClr val="000000"/>
                 </a:solidFill>
@@ -15041,7 +14691,7 @@
               </a14:hiddenLine>
             </a:ext>
             <a:ext uri="{AF507438-7753-43e0-B8FC-AC1667EBCBE1}">
-              <a14:hiddenEffects xmlns:a14="http://schemas.microsoft.com/office/drawing/2010/main" xmlns="">
+              <a14:hiddenEffects xmlns="" xmlns:a14="http://schemas.microsoft.com/office/drawing/2010/main">
                 <a:effectLst>
                   <a:outerShdw blurRad="63500" dist="38099" dir="2700000" algn="ctr" rotWithShape="0">
                     <a:srgbClr val="000000">
@@ -15091,14 +14741,14 @@
           <a:effectLst/>
           <a:extLst>
             <a:ext uri="{909E8E84-426E-40dd-AFC4-6F175D3DCCD1}">
-              <a14:hiddenFill xmlns:a14="http://schemas.microsoft.com/office/drawing/2010/main" xmlns="">
+              <a14:hiddenFill xmlns="" xmlns:a14="http://schemas.microsoft.com/office/drawing/2010/main">
                 <a:solidFill>
                   <a:srgbClr val="FFFFFF"/>
                 </a:solidFill>
               </a14:hiddenFill>
             </a:ext>
             <a:ext uri="{91240B29-F687-4f45-9708-019B960494DF}">
-              <a14:hiddenLine xmlns:a14="http://schemas.microsoft.com/office/drawing/2010/main" xmlns="" w="9525" cap="flat">
+              <a14:hiddenLine xmlns="" xmlns:a14="http://schemas.microsoft.com/office/drawing/2010/main" w="9525" cap="flat">
                 <a:solidFill>
                   <a:srgbClr val="000000"/>
                 </a:solidFill>
@@ -15108,7 +14758,7 @@
               </a14:hiddenLine>
             </a:ext>
             <a:ext uri="{AF507438-7753-43e0-B8FC-AC1667EBCBE1}">
-              <a14:hiddenEffects xmlns:a14="http://schemas.microsoft.com/office/drawing/2010/main" xmlns="">
+              <a14:hiddenEffects xmlns="" xmlns:a14="http://schemas.microsoft.com/office/drawing/2010/main">
                 <a:effectLst>
                   <a:outerShdw blurRad="63500" dist="38099" dir="2700000" algn="ctr" rotWithShape="0">
                     <a:srgbClr val="000000">
@@ -15158,14 +14808,14 @@
           <a:effectLst/>
           <a:extLst>
             <a:ext uri="{909E8E84-426E-40dd-AFC4-6F175D3DCCD1}">
-              <a14:hiddenFill xmlns:a14="http://schemas.microsoft.com/office/drawing/2010/main" xmlns="">
+              <a14:hiddenFill xmlns="" xmlns:a14="http://schemas.microsoft.com/office/drawing/2010/main">
                 <a:solidFill>
                   <a:srgbClr val="FFFFFF"/>
                 </a:solidFill>
               </a14:hiddenFill>
             </a:ext>
             <a:ext uri="{91240B29-F687-4f45-9708-019B960494DF}">
-              <a14:hiddenLine xmlns:a14="http://schemas.microsoft.com/office/drawing/2010/main" xmlns="" w="9525" cap="flat">
+              <a14:hiddenLine xmlns="" xmlns:a14="http://schemas.microsoft.com/office/drawing/2010/main" w="9525" cap="flat">
                 <a:solidFill>
                   <a:srgbClr val="000000"/>
                 </a:solidFill>
@@ -15175,7 +14825,7 @@
               </a14:hiddenLine>
             </a:ext>
             <a:ext uri="{AF507438-7753-43e0-B8FC-AC1667EBCBE1}">
-              <a14:hiddenEffects xmlns:a14="http://schemas.microsoft.com/office/drawing/2010/main" xmlns="">
+              <a14:hiddenEffects xmlns="" xmlns:a14="http://schemas.microsoft.com/office/drawing/2010/main">
                 <a:effectLst>
                   <a:outerShdw blurRad="63500" dist="38099" dir="2700000" algn="ctr" rotWithShape="0">
                     <a:srgbClr val="000000">
@@ -15225,14 +14875,14 @@
           <a:effectLst/>
           <a:extLst>
             <a:ext uri="{909E8E84-426E-40dd-AFC4-6F175D3DCCD1}">
-              <a14:hiddenFill xmlns:a14="http://schemas.microsoft.com/office/drawing/2010/main" xmlns="">
+              <a14:hiddenFill xmlns="" xmlns:a14="http://schemas.microsoft.com/office/drawing/2010/main">
                 <a:solidFill>
                   <a:srgbClr val="FFFFFF"/>
                 </a:solidFill>
               </a14:hiddenFill>
             </a:ext>
             <a:ext uri="{91240B29-F687-4f45-9708-019B960494DF}">
-              <a14:hiddenLine xmlns:a14="http://schemas.microsoft.com/office/drawing/2010/main" xmlns="" w="9525" cap="flat">
+              <a14:hiddenLine xmlns="" xmlns:a14="http://schemas.microsoft.com/office/drawing/2010/main" w="9525" cap="flat">
                 <a:solidFill>
                   <a:srgbClr val="000000"/>
                 </a:solidFill>
@@ -15242,7 +14892,7 @@
               </a14:hiddenLine>
             </a:ext>
             <a:ext uri="{AF507438-7753-43e0-B8FC-AC1667EBCBE1}">
-              <a14:hiddenEffects xmlns:a14="http://schemas.microsoft.com/office/drawing/2010/main" xmlns="">
+              <a14:hiddenEffects xmlns="" xmlns:a14="http://schemas.microsoft.com/office/drawing/2010/main">
                 <a:effectLst>
                   <a:outerShdw blurRad="63500" dist="38099" dir="2700000" algn="ctr" rotWithShape="0">
                     <a:srgbClr val="000000">
@@ -15292,14 +14942,14 @@
           <a:effectLst/>
           <a:extLst>
             <a:ext uri="{909E8E84-426E-40dd-AFC4-6F175D3DCCD1}">
-              <a14:hiddenFill xmlns:a14="http://schemas.microsoft.com/office/drawing/2010/main" xmlns="">
+              <a14:hiddenFill xmlns="" xmlns:a14="http://schemas.microsoft.com/office/drawing/2010/main">
                 <a:solidFill>
                   <a:srgbClr val="FFFFFF"/>
                 </a:solidFill>
               </a14:hiddenFill>
             </a:ext>
             <a:ext uri="{91240B29-F687-4f45-9708-019B960494DF}">
-              <a14:hiddenLine xmlns:a14="http://schemas.microsoft.com/office/drawing/2010/main" xmlns="" w="9525" cap="flat">
+              <a14:hiddenLine xmlns="" xmlns:a14="http://schemas.microsoft.com/office/drawing/2010/main" w="9525" cap="flat">
                 <a:solidFill>
                   <a:srgbClr val="000000"/>
                 </a:solidFill>
@@ -15309,7 +14959,7 @@
               </a14:hiddenLine>
             </a:ext>
             <a:ext uri="{AF507438-7753-43e0-B8FC-AC1667EBCBE1}">
-              <a14:hiddenEffects xmlns:a14="http://schemas.microsoft.com/office/drawing/2010/main" xmlns="">
+              <a14:hiddenEffects xmlns="" xmlns:a14="http://schemas.microsoft.com/office/drawing/2010/main">
                 <a:effectLst>
                   <a:outerShdw blurRad="63500" dist="38099" dir="2700000" algn="ctr" rotWithShape="0">
                     <a:srgbClr val="000000">
@@ -15359,14 +15009,14 @@
           <a:effectLst/>
           <a:extLst>
             <a:ext uri="{909E8E84-426E-40dd-AFC4-6F175D3DCCD1}">
-              <a14:hiddenFill xmlns:a14="http://schemas.microsoft.com/office/drawing/2010/main" xmlns="">
+              <a14:hiddenFill xmlns="" xmlns:a14="http://schemas.microsoft.com/office/drawing/2010/main">
                 <a:solidFill>
                   <a:srgbClr val="FFFFFF"/>
                 </a:solidFill>
               </a14:hiddenFill>
             </a:ext>
             <a:ext uri="{91240B29-F687-4f45-9708-019B960494DF}">
-              <a14:hiddenLine xmlns:a14="http://schemas.microsoft.com/office/drawing/2010/main" xmlns="" w="9525" cap="flat">
+              <a14:hiddenLine xmlns="" xmlns:a14="http://schemas.microsoft.com/office/drawing/2010/main" w="9525" cap="flat">
                 <a:solidFill>
                   <a:srgbClr val="000000"/>
                 </a:solidFill>
@@ -15376,7 +15026,7 @@
               </a14:hiddenLine>
             </a:ext>
             <a:ext uri="{AF507438-7753-43e0-B8FC-AC1667EBCBE1}">
-              <a14:hiddenEffects xmlns:a14="http://schemas.microsoft.com/office/drawing/2010/main" xmlns="">
+              <a14:hiddenEffects xmlns="" xmlns:a14="http://schemas.microsoft.com/office/drawing/2010/main">
                 <a:effectLst>
                   <a:outerShdw blurRad="63500" dist="38099" dir="2700000" algn="ctr" rotWithShape="0">
                     <a:srgbClr val="000000">
@@ -15426,14 +15076,14 @@
           <a:effectLst/>
           <a:extLst>
             <a:ext uri="{909E8E84-426E-40dd-AFC4-6F175D3DCCD1}">
-              <a14:hiddenFill xmlns:a14="http://schemas.microsoft.com/office/drawing/2010/main" xmlns="">
+              <a14:hiddenFill xmlns="" xmlns:a14="http://schemas.microsoft.com/office/drawing/2010/main">
                 <a:solidFill>
                   <a:srgbClr val="FFFFFF"/>
                 </a:solidFill>
               </a14:hiddenFill>
             </a:ext>
             <a:ext uri="{91240B29-F687-4f45-9708-019B960494DF}">
-              <a14:hiddenLine xmlns:a14="http://schemas.microsoft.com/office/drawing/2010/main" xmlns="" w="9525" cap="flat">
+              <a14:hiddenLine xmlns="" xmlns:a14="http://schemas.microsoft.com/office/drawing/2010/main" w="9525" cap="flat">
                 <a:solidFill>
                   <a:srgbClr val="000000"/>
                 </a:solidFill>
@@ -15443,7 +15093,7 @@
               </a14:hiddenLine>
             </a:ext>
             <a:ext uri="{AF507438-7753-43e0-B8FC-AC1667EBCBE1}">
-              <a14:hiddenEffects xmlns:a14="http://schemas.microsoft.com/office/drawing/2010/main" xmlns="">
+              <a14:hiddenEffects xmlns="" xmlns:a14="http://schemas.microsoft.com/office/drawing/2010/main">
                 <a:effectLst>
                   <a:outerShdw blurRad="63500" dist="38099" dir="2700000" algn="ctr" rotWithShape="0">
                     <a:srgbClr val="000000">
@@ -15500,7 +15150,7 @@
           <a:effectLst/>
           <a:extLst>
             <a:ext uri="{AF507438-7753-43e0-B8FC-AC1667EBCBE1}">
-              <a14:hiddenEffects xmlns:a14="http://schemas.microsoft.com/office/drawing/2010/main" xmlns="">
+              <a14:hiddenEffects xmlns="" xmlns:a14="http://schemas.microsoft.com/office/drawing/2010/main">
                 <a:effectLst>
                   <a:outerShdw blurRad="63500" dist="38099" dir="2700000" algn="ctr" rotWithShape="0">
                     <a:srgbClr val="000000">
@@ -15543,14 +15193,14 @@
           <a:effectLst/>
           <a:extLst>
             <a:ext uri="{909E8E84-426E-40dd-AFC4-6F175D3DCCD1}">
-              <a14:hiddenFill xmlns:a14="http://schemas.microsoft.com/office/drawing/2010/main" xmlns="">
+              <a14:hiddenFill xmlns="" xmlns:a14="http://schemas.microsoft.com/office/drawing/2010/main">
                 <a:solidFill>
                   <a:srgbClr val="FFFFFF"/>
                 </a:solidFill>
               </a14:hiddenFill>
             </a:ext>
             <a:ext uri="{91240B29-F687-4f45-9708-019B960494DF}">
-              <a14:hiddenLine xmlns:a14="http://schemas.microsoft.com/office/drawing/2010/main" xmlns="" w="9525" cap="flat">
+              <a14:hiddenLine xmlns="" xmlns:a14="http://schemas.microsoft.com/office/drawing/2010/main" w="9525" cap="flat">
                 <a:solidFill>
                   <a:srgbClr val="000000"/>
                 </a:solidFill>
@@ -15560,7 +15210,7 @@
               </a14:hiddenLine>
             </a:ext>
             <a:ext uri="{AF507438-7753-43e0-B8FC-AC1667EBCBE1}">
-              <a14:hiddenEffects xmlns:a14="http://schemas.microsoft.com/office/drawing/2010/main" xmlns="">
+              <a14:hiddenEffects xmlns="" xmlns:a14="http://schemas.microsoft.com/office/drawing/2010/main">
                 <a:effectLst>
                   <a:outerShdw blurRad="63500" dist="38099" dir="2700000" algn="ctr" rotWithShape="0">
                     <a:srgbClr val="000000">
@@ -15617,7 +15267,7 @@
           <a:effectLst/>
           <a:extLst>
             <a:ext uri="{AF507438-7753-43e0-B8FC-AC1667EBCBE1}">
-              <a14:hiddenEffects xmlns:a14="http://schemas.microsoft.com/office/drawing/2010/main" xmlns="">
+              <a14:hiddenEffects xmlns="" xmlns:a14="http://schemas.microsoft.com/office/drawing/2010/main">
                 <a:effectLst>
                   <a:outerShdw blurRad="63500" dist="38099" dir="2700000" algn="ctr" rotWithShape="0">
                     <a:srgbClr val="000000">
@@ -15660,14 +15310,14 @@
           <a:effectLst/>
           <a:extLst>
             <a:ext uri="{909E8E84-426E-40dd-AFC4-6F175D3DCCD1}">
-              <a14:hiddenFill xmlns:a14="http://schemas.microsoft.com/office/drawing/2010/main" xmlns="">
+              <a14:hiddenFill xmlns="" xmlns:a14="http://schemas.microsoft.com/office/drawing/2010/main">
                 <a:solidFill>
                   <a:srgbClr val="FFFFFF"/>
                 </a:solidFill>
               </a14:hiddenFill>
             </a:ext>
             <a:ext uri="{91240B29-F687-4f45-9708-019B960494DF}">
-              <a14:hiddenLine xmlns:a14="http://schemas.microsoft.com/office/drawing/2010/main" xmlns="" w="9525" cap="flat">
+              <a14:hiddenLine xmlns="" xmlns:a14="http://schemas.microsoft.com/office/drawing/2010/main" w="9525" cap="flat">
                 <a:solidFill>
                   <a:srgbClr val="000000"/>
                 </a:solidFill>
@@ -15677,7 +15327,7 @@
               </a14:hiddenLine>
             </a:ext>
             <a:ext uri="{AF507438-7753-43e0-B8FC-AC1667EBCBE1}">
-              <a14:hiddenEffects xmlns:a14="http://schemas.microsoft.com/office/drawing/2010/main" xmlns="">
+              <a14:hiddenEffects xmlns="" xmlns:a14="http://schemas.microsoft.com/office/drawing/2010/main">
                 <a:effectLst>
                   <a:outerShdw blurRad="63500" dist="38099" dir="2700000" algn="ctr" rotWithShape="0">
                     <a:srgbClr val="000000">
@@ -15727,14 +15377,14 @@
           <a:effectLst/>
           <a:extLst>
             <a:ext uri="{909E8E84-426E-40dd-AFC4-6F175D3DCCD1}">
-              <a14:hiddenFill xmlns:a14="http://schemas.microsoft.com/office/drawing/2010/main" xmlns="">
+              <a14:hiddenFill xmlns="" xmlns:a14="http://schemas.microsoft.com/office/drawing/2010/main">
                 <a:solidFill>
                   <a:srgbClr val="FFFFFF"/>
                 </a:solidFill>
               </a14:hiddenFill>
             </a:ext>
             <a:ext uri="{91240B29-F687-4f45-9708-019B960494DF}">
-              <a14:hiddenLine xmlns:a14="http://schemas.microsoft.com/office/drawing/2010/main" xmlns="" w="9525" cap="flat">
+              <a14:hiddenLine xmlns="" xmlns:a14="http://schemas.microsoft.com/office/drawing/2010/main" w="9525" cap="flat">
                 <a:solidFill>
                   <a:srgbClr val="000000"/>
                 </a:solidFill>
@@ -15744,7 +15394,7 @@
               </a14:hiddenLine>
             </a:ext>
             <a:ext uri="{AF507438-7753-43e0-B8FC-AC1667EBCBE1}">
-              <a14:hiddenEffects xmlns:a14="http://schemas.microsoft.com/office/drawing/2010/main" xmlns="">
+              <a14:hiddenEffects xmlns="" xmlns:a14="http://schemas.microsoft.com/office/drawing/2010/main">
                 <a:effectLst>
                   <a:outerShdw blurRad="63500" dist="38099" dir="2700000" algn="ctr" rotWithShape="0">
                     <a:srgbClr val="000000">
@@ -15964,14 +15614,14 @@
           <a:effectLst/>
           <a:extLst>
             <a:ext uri="{909E8E84-426E-40dd-AFC4-6F175D3DCCD1}">
-              <a14:hiddenFill xmlns:a14="http://schemas.microsoft.com/office/drawing/2010/main" xmlns="">
+              <a14:hiddenFill xmlns="" xmlns:a14="http://schemas.microsoft.com/office/drawing/2010/main">
                 <a:solidFill>
                   <a:srgbClr val="FFFFFF"/>
                 </a:solidFill>
               </a14:hiddenFill>
             </a:ext>
             <a:ext uri="{91240B29-F687-4f45-9708-019B960494DF}">
-              <a14:hiddenLine xmlns:a14="http://schemas.microsoft.com/office/drawing/2010/main" xmlns="" w="9525" cap="flat">
+              <a14:hiddenLine xmlns="" xmlns:a14="http://schemas.microsoft.com/office/drawing/2010/main" w="9525" cap="flat">
                 <a:solidFill>
                   <a:srgbClr val="000000"/>
                 </a:solidFill>
@@ -15981,7 +15631,7 @@
               </a14:hiddenLine>
             </a:ext>
             <a:ext uri="{AF507438-7753-43e0-B8FC-AC1667EBCBE1}">
-              <a14:hiddenEffects xmlns:a14="http://schemas.microsoft.com/office/drawing/2010/main" xmlns="">
+              <a14:hiddenEffects xmlns="" xmlns:a14="http://schemas.microsoft.com/office/drawing/2010/main">
                 <a:effectLst>
                   <a:outerShdw blurRad="63500" dist="38099" dir="2700000" algn="ctr" rotWithShape="0">
                     <a:srgbClr val="000000">
@@ -16031,14 +15681,14 @@
           <a:effectLst/>
           <a:extLst>
             <a:ext uri="{909E8E84-426E-40dd-AFC4-6F175D3DCCD1}">
-              <a14:hiddenFill xmlns:a14="http://schemas.microsoft.com/office/drawing/2010/main" xmlns="">
+              <a14:hiddenFill xmlns="" xmlns:a14="http://schemas.microsoft.com/office/drawing/2010/main">
                 <a:solidFill>
                   <a:srgbClr val="FFFFFF"/>
                 </a:solidFill>
               </a14:hiddenFill>
             </a:ext>
             <a:ext uri="{91240B29-F687-4f45-9708-019B960494DF}">
-              <a14:hiddenLine xmlns:a14="http://schemas.microsoft.com/office/drawing/2010/main" xmlns="" w="9525" cap="flat">
+              <a14:hiddenLine xmlns="" xmlns:a14="http://schemas.microsoft.com/office/drawing/2010/main" w="9525" cap="flat">
                 <a:solidFill>
                   <a:srgbClr val="000000"/>
                 </a:solidFill>
@@ -16048,7 +15698,7 @@
               </a14:hiddenLine>
             </a:ext>
             <a:ext uri="{AF507438-7753-43e0-B8FC-AC1667EBCBE1}">
-              <a14:hiddenEffects xmlns:a14="http://schemas.microsoft.com/office/drawing/2010/main" xmlns="">
+              <a14:hiddenEffects xmlns="" xmlns:a14="http://schemas.microsoft.com/office/drawing/2010/main">
                 <a:effectLst>
                   <a:outerShdw blurRad="63500" dist="38099" dir="2700000" algn="ctr" rotWithShape="0">
                     <a:srgbClr val="000000">
@@ -16098,14 +15748,14 @@
           <a:effectLst/>
           <a:extLst>
             <a:ext uri="{909E8E84-426E-40dd-AFC4-6F175D3DCCD1}">
-              <a14:hiddenFill xmlns:a14="http://schemas.microsoft.com/office/drawing/2010/main" xmlns="">
+              <a14:hiddenFill xmlns="" xmlns:a14="http://schemas.microsoft.com/office/drawing/2010/main">
                 <a:solidFill>
                   <a:srgbClr val="FFFFFF"/>
                 </a:solidFill>
               </a14:hiddenFill>
             </a:ext>
             <a:ext uri="{91240B29-F687-4f45-9708-019B960494DF}">
-              <a14:hiddenLine xmlns:a14="http://schemas.microsoft.com/office/drawing/2010/main" xmlns="" w="9525" cap="flat">
+              <a14:hiddenLine xmlns="" xmlns:a14="http://schemas.microsoft.com/office/drawing/2010/main" w="9525" cap="flat">
                 <a:solidFill>
                   <a:srgbClr val="000000"/>
                 </a:solidFill>
@@ -16115,7 +15765,7 @@
               </a14:hiddenLine>
             </a:ext>
             <a:ext uri="{AF507438-7753-43e0-B8FC-AC1667EBCBE1}">
-              <a14:hiddenEffects xmlns:a14="http://schemas.microsoft.com/office/drawing/2010/main" xmlns="">
+              <a14:hiddenEffects xmlns="" xmlns:a14="http://schemas.microsoft.com/office/drawing/2010/main">
                 <a:effectLst>
                   <a:outerShdw blurRad="63500" dist="38099" dir="2700000" algn="ctr" rotWithShape="0">
                     <a:srgbClr val="000000">
@@ -16335,14 +15985,14 @@
           <a:effectLst/>
           <a:extLst>
             <a:ext uri="{909E8E84-426E-40dd-AFC4-6F175D3DCCD1}">
-              <a14:hiddenFill xmlns:a14="http://schemas.microsoft.com/office/drawing/2010/main" xmlns="">
+              <a14:hiddenFill xmlns="" xmlns:a14="http://schemas.microsoft.com/office/drawing/2010/main">
                 <a:solidFill>
                   <a:srgbClr val="FFFFFF"/>
                 </a:solidFill>
               </a14:hiddenFill>
             </a:ext>
             <a:ext uri="{91240B29-F687-4f45-9708-019B960494DF}">
-              <a14:hiddenLine xmlns:a14="http://schemas.microsoft.com/office/drawing/2010/main" xmlns="" w="9525" cap="flat">
+              <a14:hiddenLine xmlns="" xmlns:a14="http://schemas.microsoft.com/office/drawing/2010/main" w="9525" cap="flat">
                 <a:solidFill>
                   <a:srgbClr val="000000"/>
                 </a:solidFill>
@@ -16352,7 +16002,7 @@
               </a14:hiddenLine>
             </a:ext>
             <a:ext uri="{AF507438-7753-43e0-B8FC-AC1667EBCBE1}">
-              <a14:hiddenEffects xmlns:a14="http://schemas.microsoft.com/office/drawing/2010/main" xmlns="">
+              <a14:hiddenEffects xmlns="" xmlns:a14="http://schemas.microsoft.com/office/drawing/2010/main">
                 <a:effectLst>
                   <a:outerShdw blurRad="63500" dist="38099" dir="2700000" algn="ctr" rotWithShape="0">
                     <a:srgbClr val="000000">
@@ -16572,14 +16222,14 @@
           <a:effectLst/>
           <a:extLst>
             <a:ext uri="{909E8E84-426E-40dd-AFC4-6F175D3DCCD1}">
-              <a14:hiddenFill xmlns:a14="http://schemas.microsoft.com/office/drawing/2010/main" xmlns="">
+              <a14:hiddenFill xmlns="" xmlns:a14="http://schemas.microsoft.com/office/drawing/2010/main">
                 <a:solidFill>
                   <a:srgbClr val="FFFFFF"/>
                 </a:solidFill>
               </a14:hiddenFill>
             </a:ext>
             <a:ext uri="{91240B29-F687-4f45-9708-019B960494DF}">
-              <a14:hiddenLine xmlns:a14="http://schemas.microsoft.com/office/drawing/2010/main" xmlns="" w="9525" cap="flat">
+              <a14:hiddenLine xmlns="" xmlns:a14="http://schemas.microsoft.com/office/drawing/2010/main" w="9525" cap="flat">
                 <a:solidFill>
                   <a:srgbClr val="000000"/>
                 </a:solidFill>
@@ -16589,7 +16239,7 @@
               </a14:hiddenLine>
             </a:ext>
             <a:ext uri="{AF507438-7753-43e0-B8FC-AC1667EBCBE1}">
-              <a14:hiddenEffects xmlns:a14="http://schemas.microsoft.com/office/drawing/2010/main" xmlns="">
+              <a14:hiddenEffects xmlns="" xmlns:a14="http://schemas.microsoft.com/office/drawing/2010/main">
                 <a:effectLst>
                   <a:outerShdw blurRad="63500" dist="38099" dir="2700000" algn="ctr" rotWithShape="0">
                     <a:srgbClr val="000000">
@@ -16809,14 +16459,14 @@
           <a:effectLst/>
           <a:extLst>
             <a:ext uri="{909E8E84-426E-40dd-AFC4-6F175D3DCCD1}">
-              <a14:hiddenFill xmlns:a14="http://schemas.microsoft.com/office/drawing/2010/main" xmlns="">
+              <a14:hiddenFill xmlns="" xmlns:a14="http://schemas.microsoft.com/office/drawing/2010/main">
                 <a:solidFill>
                   <a:srgbClr val="FFFFFF"/>
                 </a:solidFill>
               </a14:hiddenFill>
             </a:ext>
             <a:ext uri="{91240B29-F687-4f45-9708-019B960494DF}">
-              <a14:hiddenLine xmlns:a14="http://schemas.microsoft.com/office/drawing/2010/main" xmlns="" w="9525" cap="flat">
+              <a14:hiddenLine xmlns="" xmlns:a14="http://schemas.microsoft.com/office/drawing/2010/main" w="9525" cap="flat">
                 <a:solidFill>
                   <a:srgbClr val="000000"/>
                 </a:solidFill>
@@ -16826,7 +16476,7 @@
               </a14:hiddenLine>
             </a:ext>
             <a:ext uri="{AF507438-7753-43e0-B8FC-AC1667EBCBE1}">
-              <a14:hiddenEffects xmlns:a14="http://schemas.microsoft.com/office/drawing/2010/main" xmlns="">
+              <a14:hiddenEffects xmlns="" xmlns:a14="http://schemas.microsoft.com/office/drawing/2010/main">
                 <a:effectLst>
                   <a:outerShdw blurRad="63500" dist="38099" dir="2700000" algn="ctr" rotWithShape="0">
                     <a:srgbClr val="000000">
@@ -17046,14 +16696,14 @@
           <a:effectLst/>
           <a:extLst>
             <a:ext uri="{909E8E84-426E-40dd-AFC4-6F175D3DCCD1}">
-              <a14:hiddenFill xmlns:a14="http://schemas.microsoft.com/office/drawing/2010/main" xmlns="">
+              <a14:hiddenFill xmlns="" xmlns:a14="http://schemas.microsoft.com/office/drawing/2010/main">
                 <a:solidFill>
                   <a:srgbClr val="FFFFFF"/>
                 </a:solidFill>
               </a14:hiddenFill>
             </a:ext>
             <a:ext uri="{91240B29-F687-4f45-9708-019B960494DF}">
-              <a14:hiddenLine xmlns:a14="http://schemas.microsoft.com/office/drawing/2010/main" xmlns="" w="9525" cap="flat">
+              <a14:hiddenLine xmlns="" xmlns:a14="http://schemas.microsoft.com/office/drawing/2010/main" w="9525" cap="flat">
                 <a:solidFill>
                   <a:srgbClr val="000000"/>
                 </a:solidFill>
@@ -17063,7 +16713,7 @@
               </a14:hiddenLine>
             </a:ext>
             <a:ext uri="{AF507438-7753-43e0-B8FC-AC1667EBCBE1}">
-              <a14:hiddenEffects xmlns:a14="http://schemas.microsoft.com/office/drawing/2010/main" xmlns="">
+              <a14:hiddenEffects xmlns="" xmlns:a14="http://schemas.microsoft.com/office/drawing/2010/main">
                 <a:effectLst>
                   <a:outerShdw blurRad="63500" dist="38099" dir="2700000" algn="ctr" rotWithShape="0">
                     <a:srgbClr val="000000">
@@ -17290,7 +16940,7 @@
           <a:effectLst/>
           <a:extLst>
             <a:ext uri="{AF507438-7753-43e0-B8FC-AC1667EBCBE1}">
-              <a14:hiddenEffects xmlns:a14="http://schemas.microsoft.com/office/drawing/2010/main" xmlns="">
+              <a14:hiddenEffects xmlns="" xmlns:a14="http://schemas.microsoft.com/office/drawing/2010/main">
                 <a:effectLst>
                   <a:outerShdw blurRad="63500" dist="38099" dir="2700000" algn="ctr" rotWithShape="0">
                     <a:srgbClr val="000000">
@@ -17333,14 +16983,14 @@
           <a:effectLst/>
           <a:extLst>
             <a:ext uri="{909E8E84-426E-40dd-AFC4-6F175D3DCCD1}">
-              <a14:hiddenFill xmlns:a14="http://schemas.microsoft.com/office/drawing/2010/main" xmlns="">
+              <a14:hiddenFill xmlns="" xmlns:a14="http://schemas.microsoft.com/office/drawing/2010/main">
                 <a:solidFill>
                   <a:srgbClr val="FFFFFF"/>
                 </a:solidFill>
               </a14:hiddenFill>
             </a:ext>
             <a:ext uri="{91240B29-F687-4f45-9708-019B960494DF}">
-              <a14:hiddenLine xmlns:a14="http://schemas.microsoft.com/office/drawing/2010/main" xmlns="" w="9525" cap="flat">
+              <a14:hiddenLine xmlns="" xmlns:a14="http://schemas.microsoft.com/office/drawing/2010/main" w="9525" cap="flat">
                 <a:solidFill>
                   <a:srgbClr val="000000"/>
                 </a:solidFill>
@@ -17350,7 +17000,7 @@
               </a14:hiddenLine>
             </a:ext>
             <a:ext uri="{AF507438-7753-43e0-B8FC-AC1667EBCBE1}">
-              <a14:hiddenEffects xmlns:a14="http://schemas.microsoft.com/office/drawing/2010/main" xmlns="">
+              <a14:hiddenEffects xmlns="" xmlns:a14="http://schemas.microsoft.com/office/drawing/2010/main">
                 <a:effectLst>
                   <a:outerShdw blurRad="63500" dist="38099" dir="2700000" algn="ctr" rotWithShape="0">
                     <a:srgbClr val="000000">
@@ -17405,12 +17055,12 @@
           <a:effectLst/>
           <a:extLst>
             <a:ext uri="{909E8E84-426E-40dd-AFC4-6F175D3DCCD1}">
-              <a14:hiddenFill xmlns:a14="http://schemas.microsoft.com/office/drawing/2010/main" xmlns="">
+              <a14:hiddenFill xmlns="" xmlns:a14="http://schemas.microsoft.com/office/drawing/2010/main">
                 <a:noFill/>
               </a14:hiddenFill>
             </a:ext>
             <a:ext uri="{AF507438-7753-43e0-B8FC-AC1667EBCBE1}">
-              <a14:hiddenEffects xmlns:a14="http://schemas.microsoft.com/office/drawing/2010/main" xmlns="">
+              <a14:hiddenEffects xmlns="" xmlns:a14="http://schemas.microsoft.com/office/drawing/2010/main">
                 <a:effectLst>
                   <a:outerShdw blurRad="63500" dist="38099" dir="2700000" algn="ctr" rotWithShape="0">
                     <a:srgbClr val="000000">
@@ -17458,12 +17108,12 @@
           <a:effectLst/>
           <a:extLst>
             <a:ext uri="{909E8E84-426E-40dd-AFC4-6F175D3DCCD1}">
-              <a14:hiddenFill xmlns:a14="http://schemas.microsoft.com/office/drawing/2010/main" xmlns="">
+              <a14:hiddenFill xmlns="" xmlns:a14="http://schemas.microsoft.com/office/drawing/2010/main">
                 <a:noFill/>
               </a14:hiddenFill>
             </a:ext>
             <a:ext uri="{AF507438-7753-43e0-B8FC-AC1667EBCBE1}">
-              <a14:hiddenEffects xmlns:a14="http://schemas.microsoft.com/office/drawing/2010/main" xmlns="">
+              <a14:hiddenEffects xmlns="" xmlns:a14="http://schemas.microsoft.com/office/drawing/2010/main">
                 <a:effectLst>
                   <a:outerShdw blurRad="63500" dist="38099" dir="2700000" algn="ctr" rotWithShape="0">
                     <a:srgbClr val="000000">
@@ -17516,7 +17166,7 @@
           <a:effectLst/>
           <a:extLst>
             <a:ext uri="{AF507438-7753-43e0-B8FC-AC1667EBCBE1}">
-              <a14:hiddenEffects xmlns:a14="http://schemas.microsoft.com/office/drawing/2010/main" xmlns="">
+              <a14:hiddenEffects xmlns="" xmlns:a14="http://schemas.microsoft.com/office/drawing/2010/main">
                 <a:effectLst>
                   <a:outerShdw blurRad="63500" dist="38099" dir="2700000" algn="ctr" rotWithShape="0">
                     <a:srgbClr val="000000">
@@ -17559,14 +17209,14 @@
           <a:effectLst/>
           <a:extLst>
             <a:ext uri="{909E8E84-426E-40dd-AFC4-6F175D3DCCD1}">
-              <a14:hiddenFill xmlns:a14="http://schemas.microsoft.com/office/drawing/2010/main" xmlns="">
+              <a14:hiddenFill xmlns="" xmlns:a14="http://schemas.microsoft.com/office/drawing/2010/main">
                 <a:solidFill>
                   <a:srgbClr val="FFFFFF"/>
                 </a:solidFill>
               </a14:hiddenFill>
             </a:ext>
             <a:ext uri="{91240B29-F687-4f45-9708-019B960494DF}">
-              <a14:hiddenLine xmlns:a14="http://schemas.microsoft.com/office/drawing/2010/main" xmlns="" w="9525" cap="flat">
+              <a14:hiddenLine xmlns="" xmlns:a14="http://schemas.microsoft.com/office/drawing/2010/main" w="9525" cap="flat">
                 <a:solidFill>
                   <a:srgbClr val="000000"/>
                 </a:solidFill>
@@ -17576,7 +17226,7 @@
               </a14:hiddenLine>
             </a:ext>
             <a:ext uri="{AF507438-7753-43e0-B8FC-AC1667EBCBE1}">
-              <a14:hiddenEffects xmlns:a14="http://schemas.microsoft.com/office/drawing/2010/main" xmlns="">
+              <a14:hiddenEffects xmlns="" xmlns:a14="http://schemas.microsoft.com/office/drawing/2010/main">
                 <a:effectLst>
                   <a:outerShdw blurRad="63500" dist="38099" dir="2700000" algn="ctr" rotWithShape="0">
                     <a:srgbClr val="000000">
@@ -17833,7 +17483,7 @@
           <a:effectLst/>
           <a:extLst>
             <a:ext uri="{AF507438-7753-43e0-B8FC-AC1667EBCBE1}">
-              <a14:hiddenEffects xmlns:a14="http://schemas.microsoft.com/office/drawing/2010/main" xmlns="">
+              <a14:hiddenEffects xmlns="" xmlns:a14="http://schemas.microsoft.com/office/drawing/2010/main">
                 <a:effectLst>
                   <a:outerShdw blurRad="63500" dist="38099" dir="2700000" algn="ctr" rotWithShape="0">
                     <a:srgbClr val="000000">
@@ -17876,14 +17526,14 @@
           <a:effectLst/>
           <a:extLst>
             <a:ext uri="{909E8E84-426E-40dd-AFC4-6F175D3DCCD1}">
-              <a14:hiddenFill xmlns:a14="http://schemas.microsoft.com/office/drawing/2010/main" xmlns="">
+              <a14:hiddenFill xmlns="" xmlns:a14="http://schemas.microsoft.com/office/drawing/2010/main">
                 <a:solidFill>
                   <a:srgbClr val="FFFFFF"/>
                 </a:solidFill>
               </a14:hiddenFill>
             </a:ext>
             <a:ext uri="{91240B29-F687-4f45-9708-019B960494DF}">
-              <a14:hiddenLine xmlns:a14="http://schemas.microsoft.com/office/drawing/2010/main" xmlns="" w="9525" cap="flat">
+              <a14:hiddenLine xmlns="" xmlns:a14="http://schemas.microsoft.com/office/drawing/2010/main" w="9525" cap="flat">
                 <a:solidFill>
                   <a:srgbClr val="000000"/>
                 </a:solidFill>
@@ -17893,7 +17543,7 @@
               </a14:hiddenLine>
             </a:ext>
             <a:ext uri="{AF507438-7753-43e0-B8FC-AC1667EBCBE1}">
-              <a14:hiddenEffects xmlns:a14="http://schemas.microsoft.com/office/drawing/2010/main" xmlns="">
+              <a14:hiddenEffects xmlns="" xmlns:a14="http://schemas.microsoft.com/office/drawing/2010/main">
                 <a:effectLst>
                   <a:outerShdw blurRad="63500" dist="38099" dir="2700000" algn="ctr" rotWithShape="0">
                     <a:srgbClr val="000000">
@@ -18136,12 +17786,12 @@
           <a:effectLst/>
           <a:extLst>
             <a:ext uri="{909E8E84-426E-40dd-AFC4-6F175D3DCCD1}">
-              <a14:hiddenFill xmlns:a14="http://schemas.microsoft.com/office/drawing/2010/main" xmlns="">
+              <a14:hiddenFill xmlns="" xmlns:a14="http://schemas.microsoft.com/office/drawing/2010/main">
                 <a:noFill/>
               </a14:hiddenFill>
             </a:ext>
             <a:ext uri="{AF507438-7753-43e0-B8FC-AC1667EBCBE1}">
-              <a14:hiddenEffects xmlns:a14="http://schemas.microsoft.com/office/drawing/2010/main" xmlns="">
+              <a14:hiddenEffects xmlns="" xmlns:a14="http://schemas.microsoft.com/office/drawing/2010/main">
                 <a:effectLst>
                   <a:outerShdw blurRad="63500" dist="38099" dir="2700000" algn="ctr" rotWithShape="0">
                     <a:srgbClr val="000000">
@@ -18184,14 +17834,14 @@
           <a:effectLst/>
           <a:extLst>
             <a:ext uri="{909E8E84-426E-40dd-AFC4-6F175D3DCCD1}">
-              <a14:hiddenFill xmlns:a14="http://schemas.microsoft.com/office/drawing/2010/main" xmlns="">
+              <a14:hiddenFill xmlns="" xmlns:a14="http://schemas.microsoft.com/office/drawing/2010/main">
                 <a:solidFill>
                   <a:srgbClr val="FFFFFF"/>
                 </a:solidFill>
               </a14:hiddenFill>
             </a:ext>
             <a:ext uri="{91240B29-F687-4f45-9708-019B960494DF}">
-              <a14:hiddenLine xmlns:a14="http://schemas.microsoft.com/office/drawing/2010/main" xmlns="" w="9525" cap="flat">
+              <a14:hiddenLine xmlns="" xmlns:a14="http://schemas.microsoft.com/office/drawing/2010/main" w="9525" cap="flat">
                 <a:solidFill>
                   <a:srgbClr val="000000"/>
                 </a:solidFill>
@@ -18201,7 +17851,7 @@
               </a14:hiddenLine>
             </a:ext>
             <a:ext uri="{AF507438-7753-43e0-B8FC-AC1667EBCBE1}">
-              <a14:hiddenEffects xmlns:a14="http://schemas.microsoft.com/office/drawing/2010/main" xmlns="">
+              <a14:hiddenEffects xmlns="" xmlns:a14="http://schemas.microsoft.com/office/drawing/2010/main">
                 <a:effectLst>
                   <a:outerShdw blurRad="63500" dist="38099" dir="2700000" algn="ctr" rotWithShape="0">
                     <a:srgbClr val="000000">
@@ -18421,14 +18071,14 @@
           <a:effectLst/>
           <a:extLst>
             <a:ext uri="{909E8E84-426E-40dd-AFC4-6F175D3DCCD1}">
-              <a14:hiddenFill xmlns:a14="http://schemas.microsoft.com/office/drawing/2010/main" xmlns="">
+              <a14:hiddenFill xmlns="" xmlns:a14="http://schemas.microsoft.com/office/drawing/2010/main">
                 <a:solidFill>
                   <a:srgbClr val="FFFFFF"/>
                 </a:solidFill>
               </a14:hiddenFill>
             </a:ext>
             <a:ext uri="{91240B29-F687-4f45-9708-019B960494DF}">
-              <a14:hiddenLine xmlns:a14="http://schemas.microsoft.com/office/drawing/2010/main" xmlns="" w="9525" cap="flat">
+              <a14:hiddenLine xmlns="" xmlns:a14="http://schemas.microsoft.com/office/drawing/2010/main" w="9525" cap="flat">
                 <a:solidFill>
                   <a:srgbClr val="000000"/>
                 </a:solidFill>
@@ -18438,7 +18088,7 @@
               </a14:hiddenLine>
             </a:ext>
             <a:ext uri="{AF507438-7753-43e0-B8FC-AC1667EBCBE1}">
-              <a14:hiddenEffects xmlns:a14="http://schemas.microsoft.com/office/drawing/2010/main" xmlns="">
+              <a14:hiddenEffects xmlns="" xmlns:a14="http://schemas.microsoft.com/office/drawing/2010/main">
                 <a:effectLst>
                   <a:outerShdw blurRad="63500" dist="38099" dir="2700000" algn="ctr" rotWithShape="0">
                     <a:srgbClr val="000000">
@@ -18665,7 +18315,7 @@
           <a:effectLst/>
           <a:extLst>
             <a:ext uri="{AF507438-7753-43e0-B8FC-AC1667EBCBE1}">
-              <a14:hiddenEffects xmlns:a14="http://schemas.microsoft.com/office/drawing/2010/main" xmlns="">
+              <a14:hiddenEffects xmlns="" xmlns:a14="http://schemas.microsoft.com/office/drawing/2010/main">
                 <a:effectLst>
                   <a:outerShdw blurRad="63500" dist="38099" dir="2700000" algn="ctr" rotWithShape="0">
                     <a:srgbClr val="000000">
@@ -18708,14 +18358,14 @@
           <a:effectLst/>
           <a:extLst>
             <a:ext uri="{909E8E84-426E-40dd-AFC4-6F175D3DCCD1}">
-              <a14:hiddenFill xmlns:a14="http://schemas.microsoft.com/office/drawing/2010/main" xmlns="">
+              <a14:hiddenFill xmlns="" xmlns:a14="http://schemas.microsoft.com/office/drawing/2010/main">
                 <a:solidFill>
                   <a:srgbClr val="FFFFFF"/>
                 </a:solidFill>
               </a14:hiddenFill>
             </a:ext>
             <a:ext uri="{91240B29-F687-4f45-9708-019B960494DF}">
-              <a14:hiddenLine xmlns:a14="http://schemas.microsoft.com/office/drawing/2010/main" xmlns="" w="9525" cap="flat">
+              <a14:hiddenLine xmlns="" xmlns:a14="http://schemas.microsoft.com/office/drawing/2010/main" w="9525" cap="flat">
                 <a:solidFill>
                   <a:srgbClr val="000000"/>
                 </a:solidFill>
@@ -18725,7 +18375,7 @@
               </a14:hiddenLine>
             </a:ext>
             <a:ext uri="{AF507438-7753-43e0-B8FC-AC1667EBCBE1}">
-              <a14:hiddenEffects xmlns:a14="http://schemas.microsoft.com/office/drawing/2010/main" xmlns="">
+              <a14:hiddenEffects xmlns="" xmlns:a14="http://schemas.microsoft.com/office/drawing/2010/main">
                 <a:effectLst>
                   <a:outerShdw blurRad="63500" dist="38099" dir="2700000" algn="ctr" rotWithShape="0">
                     <a:srgbClr val="000000">
@@ -18952,7 +18602,7 @@
           <a:effectLst/>
           <a:extLst>
             <a:ext uri="{AF507438-7753-43e0-B8FC-AC1667EBCBE1}">
-              <a14:hiddenEffects xmlns:a14="http://schemas.microsoft.com/office/drawing/2010/main" xmlns="">
+              <a14:hiddenEffects xmlns="" xmlns:a14="http://schemas.microsoft.com/office/drawing/2010/main">
                 <a:effectLst>
                   <a:outerShdw blurRad="63500" dist="38099" dir="2700000" algn="ctr" rotWithShape="0">
                     <a:srgbClr val="000000">
@@ -18995,14 +18645,14 @@
           <a:effectLst/>
           <a:extLst>
             <a:ext uri="{909E8E84-426E-40dd-AFC4-6F175D3DCCD1}">
-              <a14:hiddenFill xmlns:a14="http://schemas.microsoft.com/office/drawing/2010/main" xmlns="">
+              <a14:hiddenFill xmlns="" xmlns:a14="http://schemas.microsoft.com/office/drawing/2010/main">
                 <a:solidFill>
                   <a:srgbClr val="FFFFFF"/>
                 </a:solidFill>
               </a14:hiddenFill>
             </a:ext>
             <a:ext uri="{91240B29-F687-4f45-9708-019B960494DF}">
-              <a14:hiddenLine xmlns:a14="http://schemas.microsoft.com/office/drawing/2010/main" xmlns="" w="9525" cap="flat">
+              <a14:hiddenLine xmlns="" xmlns:a14="http://schemas.microsoft.com/office/drawing/2010/main" w="9525" cap="flat">
                 <a:solidFill>
                   <a:srgbClr val="000000"/>
                 </a:solidFill>
@@ -19012,7 +18662,7 @@
               </a14:hiddenLine>
             </a:ext>
             <a:ext uri="{AF507438-7753-43e0-B8FC-AC1667EBCBE1}">
-              <a14:hiddenEffects xmlns:a14="http://schemas.microsoft.com/office/drawing/2010/main" xmlns="">
+              <a14:hiddenEffects xmlns="" xmlns:a14="http://schemas.microsoft.com/office/drawing/2010/main">
                 <a:effectLst>
                   <a:outerShdw blurRad="63500" dist="38099" dir="2700000" algn="ctr" rotWithShape="0">
                     <a:srgbClr val="000000">
@@ -19239,7 +18889,7 @@
           <a:effectLst/>
           <a:extLst>
             <a:ext uri="{AF507438-7753-43e0-B8FC-AC1667EBCBE1}">
-              <a14:hiddenEffects xmlns:a14="http://schemas.microsoft.com/office/drawing/2010/main" xmlns="">
+              <a14:hiddenEffects xmlns="" xmlns:a14="http://schemas.microsoft.com/office/drawing/2010/main">
                 <a:effectLst>
                   <a:outerShdw blurRad="63500" dist="38099" dir="2700000" algn="ctr" rotWithShape="0">
                     <a:srgbClr val="000000">
@@ -19282,14 +18932,14 @@
           <a:effectLst/>
           <a:extLst>
             <a:ext uri="{909E8E84-426E-40dd-AFC4-6F175D3DCCD1}">
-              <a14:hiddenFill xmlns:a14="http://schemas.microsoft.com/office/drawing/2010/main" xmlns="">
+              <a14:hiddenFill xmlns="" xmlns:a14="http://schemas.microsoft.com/office/drawing/2010/main">
                 <a:solidFill>
                   <a:srgbClr val="FFFFFF"/>
                 </a:solidFill>
               </a14:hiddenFill>
             </a:ext>
             <a:ext uri="{91240B29-F687-4f45-9708-019B960494DF}">
-              <a14:hiddenLine xmlns:a14="http://schemas.microsoft.com/office/drawing/2010/main" xmlns="" w="9525" cap="flat">
+              <a14:hiddenLine xmlns="" xmlns:a14="http://schemas.microsoft.com/office/drawing/2010/main" w="9525" cap="flat">
                 <a:solidFill>
                   <a:srgbClr val="000000"/>
                 </a:solidFill>
@@ -19299,7 +18949,7 @@
               </a14:hiddenLine>
             </a:ext>
             <a:ext uri="{AF507438-7753-43e0-B8FC-AC1667EBCBE1}">
-              <a14:hiddenEffects xmlns:a14="http://schemas.microsoft.com/office/drawing/2010/main" xmlns="">
+              <a14:hiddenEffects xmlns="" xmlns:a14="http://schemas.microsoft.com/office/drawing/2010/main">
                 <a:effectLst>
                   <a:outerShdw blurRad="63500" dist="38099" dir="2700000" algn="ctr" rotWithShape="0">
                     <a:srgbClr val="000000">
@@ -19526,7 +19176,7 @@
           <a:effectLst/>
           <a:extLst>
             <a:ext uri="{AF507438-7753-43e0-B8FC-AC1667EBCBE1}">
-              <a14:hiddenEffects xmlns:a14="http://schemas.microsoft.com/office/drawing/2010/main" xmlns="">
+              <a14:hiddenEffects xmlns="" xmlns:a14="http://schemas.microsoft.com/office/drawing/2010/main">
                 <a:effectLst>
                   <a:outerShdw blurRad="63500" dist="38099" dir="2700000" algn="ctr" rotWithShape="0">
                     <a:srgbClr val="000000">
@@ -19569,14 +19219,14 @@
           <a:effectLst/>
           <a:extLst>
             <a:ext uri="{909E8E84-426E-40dd-AFC4-6F175D3DCCD1}">
-              <a14:hiddenFill xmlns:a14="http://schemas.microsoft.com/office/drawing/2010/main" xmlns="">
+              <a14:hiddenFill xmlns="" xmlns:a14="http://schemas.microsoft.com/office/drawing/2010/main">
                 <a:solidFill>
                   <a:srgbClr val="FFFFFF"/>
                 </a:solidFill>
               </a14:hiddenFill>
             </a:ext>
             <a:ext uri="{91240B29-F687-4f45-9708-019B960494DF}">
-              <a14:hiddenLine xmlns:a14="http://schemas.microsoft.com/office/drawing/2010/main" xmlns="" w="9525" cap="flat">
+              <a14:hiddenLine xmlns="" xmlns:a14="http://schemas.microsoft.com/office/drawing/2010/main" w="9525" cap="flat">
                 <a:solidFill>
                   <a:srgbClr val="000000"/>
                 </a:solidFill>
@@ -19586,7 +19236,7 @@
               </a14:hiddenLine>
             </a:ext>
             <a:ext uri="{AF507438-7753-43e0-B8FC-AC1667EBCBE1}">
-              <a14:hiddenEffects xmlns:a14="http://schemas.microsoft.com/office/drawing/2010/main" xmlns="">
+              <a14:hiddenEffects xmlns="" xmlns:a14="http://schemas.microsoft.com/office/drawing/2010/main">
                 <a:effectLst>
                   <a:outerShdw blurRad="63500" dist="38099" dir="2700000" algn="ctr" rotWithShape="0">
                     <a:srgbClr val="000000">
@@ -19813,7 +19463,7 @@
           <a:effectLst/>
           <a:extLst>
             <a:ext uri="{AF507438-7753-43e0-B8FC-AC1667EBCBE1}">
-              <a14:hiddenEffects xmlns:a14="http://schemas.microsoft.com/office/drawing/2010/main" xmlns="">
+              <a14:hiddenEffects xmlns="" xmlns:a14="http://schemas.microsoft.com/office/drawing/2010/main">
                 <a:effectLst>
                   <a:outerShdw blurRad="63500" dist="38099" dir="2700000" algn="ctr" rotWithShape="0">
                     <a:srgbClr val="000000">
@@ -19856,14 +19506,14 @@
           <a:effectLst/>
           <a:extLst>
             <a:ext uri="{909E8E84-426E-40dd-AFC4-6F175D3DCCD1}">
-              <a14:hiddenFill xmlns:a14="http://schemas.microsoft.com/office/drawing/2010/main" xmlns="">
+              <a14:hiddenFill xmlns="" xmlns:a14="http://schemas.microsoft.com/office/drawing/2010/main">
                 <a:solidFill>
                   <a:srgbClr val="FFFFFF"/>
                 </a:solidFill>
               </a14:hiddenFill>
             </a:ext>
             <a:ext uri="{91240B29-F687-4f45-9708-019B960494DF}">
-              <a14:hiddenLine xmlns:a14="http://schemas.microsoft.com/office/drawing/2010/main" xmlns="" w="9525" cap="flat">
+              <a14:hiddenLine xmlns="" xmlns:a14="http://schemas.microsoft.com/office/drawing/2010/main" w="9525" cap="flat">
                 <a:solidFill>
                   <a:srgbClr val="000000"/>
                 </a:solidFill>
@@ -19873,7 +19523,7 @@
               </a14:hiddenLine>
             </a:ext>
             <a:ext uri="{AF507438-7753-43e0-B8FC-AC1667EBCBE1}">
-              <a14:hiddenEffects xmlns:a14="http://schemas.microsoft.com/office/drawing/2010/main" xmlns="">
+              <a14:hiddenEffects xmlns="" xmlns:a14="http://schemas.microsoft.com/office/drawing/2010/main">
                 <a:effectLst>
                   <a:outerShdw blurRad="63500" dist="38099" dir="2700000" algn="ctr" rotWithShape="0">
                     <a:srgbClr val="000000">
@@ -20100,7 +19750,7 @@
           <a:effectLst/>
           <a:extLst>
             <a:ext uri="{AF507438-7753-43e0-B8FC-AC1667EBCBE1}">
-              <a14:hiddenEffects xmlns:a14="http://schemas.microsoft.com/office/drawing/2010/main" xmlns="">
+              <a14:hiddenEffects xmlns="" xmlns:a14="http://schemas.microsoft.com/office/drawing/2010/main">
                 <a:effectLst>
                   <a:outerShdw blurRad="63500" dist="38099" dir="2700000" algn="ctr" rotWithShape="0">
                     <a:srgbClr val="000000">
@@ -20143,14 +19793,14 @@
           <a:effectLst/>
           <a:extLst>
             <a:ext uri="{909E8E84-426E-40dd-AFC4-6F175D3DCCD1}">
-              <a14:hiddenFill xmlns:a14="http://schemas.microsoft.com/office/drawing/2010/main" xmlns="">
+              <a14:hiddenFill xmlns="" xmlns:a14="http://schemas.microsoft.com/office/drawing/2010/main">
                 <a:solidFill>
                   <a:srgbClr val="FFFFFF"/>
                 </a:solidFill>
               </a14:hiddenFill>
             </a:ext>
             <a:ext uri="{91240B29-F687-4f45-9708-019B960494DF}">
-              <a14:hiddenLine xmlns:a14="http://schemas.microsoft.com/office/drawing/2010/main" xmlns="" w="9525" cap="flat">
+              <a14:hiddenLine xmlns="" xmlns:a14="http://schemas.microsoft.com/office/drawing/2010/main" w="9525" cap="flat">
                 <a:solidFill>
                   <a:srgbClr val="000000"/>
                 </a:solidFill>
@@ -20160,7 +19810,7 @@
               </a14:hiddenLine>
             </a:ext>
             <a:ext uri="{AF507438-7753-43e0-B8FC-AC1667EBCBE1}">
-              <a14:hiddenEffects xmlns:a14="http://schemas.microsoft.com/office/drawing/2010/main" xmlns="">
+              <a14:hiddenEffects xmlns="" xmlns:a14="http://schemas.microsoft.com/office/drawing/2010/main">
                 <a:effectLst>
                   <a:outerShdw blurRad="63500" dist="38099" dir="2700000" algn="ctr" rotWithShape="0">
                     <a:srgbClr val="000000">
@@ -20367,7 +20017,7 @@
         </p:nvSpPr>
         <p:spPr bwMode="auto">
           <a:xfrm>
-            <a:off x="5068888" y="4808711"/>
+            <a:off x="4356100" y="4442619"/>
             <a:ext cx="139700" cy="147637"/>
           </a:xfrm>
           <a:prstGeom prst="diamond">
@@ -20387,294 +20037,7 @@
           <a:effectLst/>
           <a:extLst>
             <a:ext uri="{AF507438-7753-43e0-B8FC-AC1667EBCBE1}">
-              <a14:hiddenEffects xmlns:a14="http://schemas.microsoft.com/office/drawing/2010/main" xmlns="">
-                <a:effectLst>
-                  <a:outerShdw blurRad="63500" dist="38099" dir="2700000" algn="ctr" rotWithShape="0">
-                    <a:srgbClr val="000000">
-                      <a:alpha val="74998"/>
-                    </a:srgbClr>
-                  </a:outerShdw>
-                </a:effectLst>
-              </a14:hiddenEffects>
-            </a:ext>
-          </a:extLst>
-        </p:spPr>
-        <p:txBody>
-          <a:bodyPr wrap="none" anchor="ctr"/>
-          <a:lstStyle/>
-          <a:p>
-            <a:endParaRPr lang="fr-FR"/>
-          </a:p>
-        </p:txBody>
-      </p:sp>
-      <p:sp>
-        <p:nvSpPr>
-          <p:cNvPr id="3223" name="Text Box 151"/>
-          <p:cNvSpPr txBox="1">
-            <a:spLocks noChangeArrowheads="1"/>
-          </p:cNvSpPr>
-          <p:nvPr/>
-        </p:nvSpPr>
-        <p:spPr bwMode="auto">
-          <a:xfrm>
-            <a:off x="5178425" y="4799186"/>
-            <a:ext cx="876300" cy="204787"/>
-          </a:xfrm>
-          <a:prstGeom prst="rect">
-            <a:avLst/>
-          </a:prstGeom>
-          <a:noFill/>
-          <a:ln>
-            <a:noFill/>
-          </a:ln>
-          <a:effectLst/>
-          <a:extLst>
-            <a:ext uri="{909E8E84-426E-40dd-AFC4-6F175D3DCCD1}">
-              <a14:hiddenFill xmlns:a14="http://schemas.microsoft.com/office/drawing/2010/main" xmlns="">
-                <a:solidFill>
-                  <a:srgbClr val="FFFFFF"/>
-                </a:solidFill>
-              </a14:hiddenFill>
-            </a:ext>
-            <a:ext uri="{91240B29-F687-4f45-9708-019B960494DF}">
-              <a14:hiddenLine xmlns:a14="http://schemas.microsoft.com/office/drawing/2010/main" xmlns="" w="9525" cap="flat">
-                <a:solidFill>
-                  <a:srgbClr val="000000"/>
-                </a:solidFill>
-                <a:round/>
-                <a:headEnd/>
-                <a:tailEnd/>
-              </a14:hiddenLine>
-            </a:ext>
-            <a:ext uri="{AF507438-7753-43e0-B8FC-AC1667EBCBE1}">
-              <a14:hiddenEffects xmlns:a14="http://schemas.microsoft.com/office/drawing/2010/main" xmlns="">
-                <a:effectLst>
-                  <a:outerShdw blurRad="63500" dist="38099" dir="2700000" algn="ctr" rotWithShape="0">
-                    <a:srgbClr val="000000">
-                      <a:alpha val="74998"/>
-                    </a:srgbClr>
-                  </a:outerShdw>
-                </a:effectLst>
-              </a14:hiddenEffects>
-            </a:ext>
-          </a:extLst>
-        </p:spPr>
-        <p:txBody>
-          <a:bodyPr wrap="none" lIns="90000" tIns="52056" rIns="90000" bIns="45000"/>
-          <a:lstStyle>
-            <a:lvl1pPr>
-              <a:tabLst>
-                <a:tab pos="449263" algn="l"/>
-              </a:tabLst>
-              <a:defRPr>
-                <a:solidFill>
-                  <a:srgbClr val="000000"/>
-                </a:solidFill>
-                <a:latin typeface="Arial" charset="0"/>
-                <a:ea typeface="ＭＳ Ｐゴシック" charset="0"/>
-                <a:cs typeface="Microsoft YaHei" charset="0"/>
-              </a:defRPr>
-            </a:lvl1pPr>
-            <a:lvl2pPr>
-              <a:tabLst>
-                <a:tab pos="449263" algn="l"/>
-              </a:tabLst>
-              <a:defRPr>
-                <a:solidFill>
-                  <a:srgbClr val="000000"/>
-                </a:solidFill>
-                <a:latin typeface="Arial" charset="0"/>
-                <a:ea typeface="ＭＳ Ｐゴシック" charset="0"/>
-                <a:cs typeface="Microsoft YaHei" charset="0"/>
-              </a:defRPr>
-            </a:lvl2pPr>
-            <a:lvl3pPr>
-              <a:tabLst>
-                <a:tab pos="449263" algn="l"/>
-              </a:tabLst>
-              <a:defRPr>
-                <a:solidFill>
-                  <a:srgbClr val="000000"/>
-                </a:solidFill>
-                <a:latin typeface="Arial" charset="0"/>
-                <a:ea typeface="ＭＳ Ｐゴシック" charset="0"/>
-                <a:cs typeface="Microsoft YaHei" charset="0"/>
-              </a:defRPr>
-            </a:lvl3pPr>
-            <a:lvl4pPr>
-              <a:tabLst>
-                <a:tab pos="449263" algn="l"/>
-              </a:tabLst>
-              <a:defRPr>
-                <a:solidFill>
-                  <a:srgbClr val="000000"/>
-                </a:solidFill>
-                <a:latin typeface="Arial" charset="0"/>
-                <a:ea typeface="ＭＳ Ｐゴシック" charset="0"/>
-                <a:cs typeface="Microsoft YaHei" charset="0"/>
-              </a:defRPr>
-            </a:lvl4pPr>
-            <a:lvl5pPr>
-              <a:tabLst>
-                <a:tab pos="449263" algn="l"/>
-              </a:tabLst>
-              <a:defRPr>
-                <a:solidFill>
-                  <a:srgbClr val="000000"/>
-                </a:solidFill>
-                <a:latin typeface="Arial" charset="0"/>
-                <a:ea typeface="ＭＳ Ｐゴシック" charset="0"/>
-                <a:cs typeface="Microsoft YaHei" charset="0"/>
-              </a:defRPr>
-            </a:lvl5pPr>
-            <a:lvl6pPr marL="2514600" indent="-228600" defTabSz="449263" fontAlgn="base" hangingPunct="0">
-              <a:lnSpc>
-                <a:spcPct val="93000"/>
-              </a:lnSpc>
-              <a:spcBef>
-                <a:spcPct val="0"/>
-              </a:spcBef>
-              <a:spcAft>
-                <a:spcPct val="0"/>
-              </a:spcAft>
-              <a:buClr>
-                <a:srgbClr val="000000"/>
-              </a:buClr>
-              <a:buSzPct val="100000"/>
-              <a:buFont typeface="Times New Roman" charset="0"/>
-              <a:tabLst>
-                <a:tab pos="449263" algn="l"/>
-              </a:tabLst>
-              <a:defRPr>
-                <a:solidFill>
-                  <a:srgbClr val="000000"/>
-                </a:solidFill>
-                <a:latin typeface="Arial" charset="0"/>
-                <a:ea typeface="ＭＳ Ｐゴシック" charset="0"/>
-                <a:cs typeface="Microsoft YaHei" charset="0"/>
-              </a:defRPr>
-            </a:lvl6pPr>
-            <a:lvl7pPr marL="2971800" indent="-228600" defTabSz="449263" fontAlgn="base" hangingPunct="0">
-              <a:lnSpc>
-                <a:spcPct val="93000"/>
-              </a:lnSpc>
-              <a:spcBef>
-                <a:spcPct val="0"/>
-              </a:spcBef>
-              <a:spcAft>
-                <a:spcPct val="0"/>
-              </a:spcAft>
-              <a:buClr>
-                <a:srgbClr val="000000"/>
-              </a:buClr>
-              <a:buSzPct val="100000"/>
-              <a:buFont typeface="Times New Roman" charset="0"/>
-              <a:tabLst>
-                <a:tab pos="449263" algn="l"/>
-              </a:tabLst>
-              <a:defRPr>
-                <a:solidFill>
-                  <a:srgbClr val="000000"/>
-                </a:solidFill>
-                <a:latin typeface="Arial" charset="0"/>
-                <a:ea typeface="ＭＳ Ｐゴシック" charset="0"/>
-                <a:cs typeface="Microsoft YaHei" charset="0"/>
-              </a:defRPr>
-            </a:lvl7pPr>
-            <a:lvl8pPr marL="3429000" indent="-228600" defTabSz="449263" fontAlgn="base" hangingPunct="0">
-              <a:lnSpc>
-                <a:spcPct val="93000"/>
-              </a:lnSpc>
-              <a:spcBef>
-                <a:spcPct val="0"/>
-              </a:spcBef>
-              <a:spcAft>
-                <a:spcPct val="0"/>
-              </a:spcAft>
-              <a:buClr>
-                <a:srgbClr val="000000"/>
-              </a:buClr>
-              <a:buSzPct val="100000"/>
-              <a:buFont typeface="Times New Roman" charset="0"/>
-              <a:tabLst>
-                <a:tab pos="449263" algn="l"/>
-              </a:tabLst>
-              <a:defRPr>
-                <a:solidFill>
-                  <a:srgbClr val="000000"/>
-                </a:solidFill>
-                <a:latin typeface="Arial" charset="0"/>
-                <a:ea typeface="ＭＳ Ｐゴシック" charset="0"/>
-                <a:cs typeface="Microsoft YaHei" charset="0"/>
-              </a:defRPr>
-            </a:lvl8pPr>
-            <a:lvl9pPr marL="3886200" indent="-228600" defTabSz="449263" fontAlgn="base" hangingPunct="0">
-              <a:lnSpc>
-                <a:spcPct val="93000"/>
-              </a:lnSpc>
-              <a:spcBef>
-                <a:spcPct val="0"/>
-              </a:spcBef>
-              <a:spcAft>
-                <a:spcPct val="0"/>
-              </a:spcAft>
-              <a:buClr>
-                <a:srgbClr val="000000"/>
-              </a:buClr>
-              <a:buSzPct val="100000"/>
-              <a:buFont typeface="Times New Roman" charset="0"/>
-              <a:tabLst>
-                <a:tab pos="449263" algn="l"/>
-              </a:tabLst>
-              <a:defRPr>
-                <a:solidFill>
-                  <a:srgbClr val="000000"/>
-                </a:solidFill>
-                <a:latin typeface="Arial" charset="0"/>
-                <a:ea typeface="ＭＳ Ｐゴシック" charset="0"/>
-                <a:cs typeface="Microsoft YaHei" charset="0"/>
-              </a:defRPr>
-            </a:lvl9pPr>
-          </a:lstStyle>
-          <a:p>
-            <a:r>
-              <a:rPr lang="fr-FR" sz="800" dirty="0"/>
-              <a:t>19 bissas Astra</a:t>
-            </a:r>
-          </a:p>
-        </p:txBody>
-      </p:sp>
-      <p:sp>
-        <p:nvSpPr>
-          <p:cNvPr id="3226" name="AutoShape 154"/>
-          <p:cNvSpPr>
-            <a:spLocks noChangeArrowheads="1"/>
-          </p:cNvSpPr>
-          <p:nvPr/>
-        </p:nvSpPr>
-        <p:spPr bwMode="auto">
-          <a:xfrm>
-            <a:off x="5068888" y="4622800"/>
-            <a:ext cx="139700" cy="147638"/>
-          </a:xfrm>
-          <a:prstGeom prst="diamond">
-            <a:avLst/>
-          </a:prstGeom>
-          <a:solidFill>
-            <a:srgbClr val="FFFFFF"/>
-          </a:solidFill>
-          <a:ln w="18000" cap="flat">
-            <a:solidFill>
-              <a:srgbClr val="999999"/>
-            </a:solidFill>
-            <a:round/>
-            <a:headEnd/>
-            <a:tailEnd/>
-          </a:ln>
-          <a:effectLst/>
-          <a:extLst>
-            <a:ext uri="{AF507438-7753-43e0-B8FC-AC1667EBCBE1}">
-              <a14:hiddenEffects xmlns:a14="http://schemas.microsoft.com/office/drawing/2010/main" xmlns="">
+              <a14:hiddenEffects xmlns="" xmlns:a14="http://schemas.microsoft.com/office/drawing/2010/main">
                 <a:effectLst>
                   <a:outerShdw blurRad="63500" dist="38099" dir="2700000" algn="ctr" rotWithShape="0">
                     <a:srgbClr val="000000">
@@ -20717,14 +20080,14 @@
           <a:effectLst/>
           <a:extLst>
             <a:ext uri="{909E8E84-426E-40dd-AFC4-6F175D3DCCD1}">
-              <a14:hiddenFill xmlns:a14="http://schemas.microsoft.com/office/drawing/2010/main" xmlns="">
+              <a14:hiddenFill xmlns="" xmlns:a14="http://schemas.microsoft.com/office/drawing/2010/main">
                 <a:solidFill>
                   <a:srgbClr val="FFFFFF"/>
                 </a:solidFill>
               </a14:hiddenFill>
             </a:ext>
             <a:ext uri="{91240B29-F687-4f45-9708-019B960494DF}">
-              <a14:hiddenLine xmlns:a14="http://schemas.microsoft.com/office/drawing/2010/main" xmlns="" w="9525" cap="flat">
+              <a14:hiddenLine xmlns="" xmlns:a14="http://schemas.microsoft.com/office/drawing/2010/main" w="9525" cap="flat">
                 <a:solidFill>
                   <a:srgbClr val="000000"/>
                 </a:solidFill>
@@ -20734,7 +20097,7 @@
               </a14:hiddenLine>
             </a:ext>
             <a:ext uri="{AF507438-7753-43e0-B8FC-AC1667EBCBE1}">
-              <a14:hiddenEffects xmlns:a14="http://schemas.microsoft.com/office/drawing/2010/main" xmlns="">
+              <a14:hiddenEffects xmlns="" xmlns:a14="http://schemas.microsoft.com/office/drawing/2010/main">
                 <a:effectLst>
                   <a:outerShdw blurRad="63500" dist="38099" dir="2700000" algn="ctr" rotWithShape="0">
                     <a:srgbClr val="000000">
@@ -20926,7 +20289,7 @@
           <a:p>
             <a:r>
               <a:rPr lang="fr-FR" sz="800" dirty="0"/>
-              <a:t>11 bissas Astra</a:t>
+              <a:t>30 bissas Astra</a:t>
             </a:r>
           </a:p>
         </p:txBody>
@@ -20961,7 +20324,7 @@
           <a:effectLst/>
           <a:extLst>
             <a:ext uri="{AF507438-7753-43e0-B8FC-AC1667EBCBE1}">
-              <a14:hiddenEffects xmlns:a14="http://schemas.microsoft.com/office/drawing/2010/main" xmlns="">
+              <a14:hiddenEffects xmlns="" xmlns:a14="http://schemas.microsoft.com/office/drawing/2010/main">
                 <a:effectLst>
                   <a:outerShdw blurRad="63500" dist="38099" dir="2700000" algn="ctr" rotWithShape="0">
                     <a:srgbClr val="000000">
@@ -21004,14 +20367,14 @@
           <a:effectLst/>
           <a:extLst>
             <a:ext uri="{909E8E84-426E-40dd-AFC4-6F175D3DCCD1}">
-              <a14:hiddenFill xmlns:a14="http://schemas.microsoft.com/office/drawing/2010/main" xmlns="">
+              <a14:hiddenFill xmlns="" xmlns:a14="http://schemas.microsoft.com/office/drawing/2010/main">
                 <a:solidFill>
                   <a:srgbClr val="FFFFFF"/>
                 </a:solidFill>
               </a14:hiddenFill>
             </a:ext>
             <a:ext uri="{91240B29-F687-4f45-9708-019B960494DF}">
-              <a14:hiddenLine xmlns:a14="http://schemas.microsoft.com/office/drawing/2010/main" xmlns="" w="9525" cap="flat">
+              <a14:hiddenLine xmlns="" xmlns:a14="http://schemas.microsoft.com/office/drawing/2010/main" w="9525" cap="flat">
                 <a:solidFill>
                   <a:srgbClr val="000000"/>
                 </a:solidFill>
@@ -21021,7 +20384,7 @@
               </a14:hiddenLine>
             </a:ext>
             <a:ext uri="{AF507438-7753-43e0-B8FC-AC1667EBCBE1}">
-              <a14:hiddenEffects xmlns:a14="http://schemas.microsoft.com/office/drawing/2010/main" xmlns="">
+              <a14:hiddenEffects xmlns="" xmlns:a14="http://schemas.microsoft.com/office/drawing/2010/main">
                 <a:effectLst>
                   <a:outerShdw blurRad="63500" dist="38099" dir="2700000" algn="ctr" rotWithShape="0">
                     <a:srgbClr val="000000">
@@ -21246,12 +20609,12 @@
           <a:effectLst/>
           <a:extLst>
             <a:ext uri="{909E8E84-426E-40dd-AFC4-6F175D3DCCD1}">
-              <a14:hiddenFill xmlns:a14="http://schemas.microsoft.com/office/drawing/2010/main" xmlns="">
+              <a14:hiddenFill xmlns="" xmlns:a14="http://schemas.microsoft.com/office/drawing/2010/main">
                 <a:noFill/>
               </a14:hiddenFill>
             </a:ext>
             <a:ext uri="{AF507438-7753-43e0-B8FC-AC1667EBCBE1}">
-              <a14:hiddenEffects xmlns:a14="http://schemas.microsoft.com/office/drawing/2010/main" xmlns="">
+              <a14:hiddenEffects xmlns="" xmlns:a14="http://schemas.microsoft.com/office/drawing/2010/main">
                 <a:effectLst>
                   <a:outerShdw blurRad="63500" dist="38099" dir="2700000" algn="ctr" rotWithShape="0">
                     <a:srgbClr val="000000">
@@ -21265,56 +20628,6 @@
         </p:spPr>
         <p:txBody>
           <a:bodyPr/>
-          <a:lstStyle/>
-          <a:p>
-            <a:endParaRPr lang="fr-FR"/>
-          </a:p>
-        </p:txBody>
-      </p:sp>
-      <p:sp>
-        <p:nvSpPr>
-          <p:cNvPr id="3231" name="AutoShape 159"/>
-          <p:cNvSpPr>
-            <a:spLocks noChangeArrowheads="1"/>
-          </p:cNvSpPr>
-          <p:nvPr/>
-        </p:nvSpPr>
-        <p:spPr bwMode="auto">
-          <a:xfrm>
-            <a:off x="2836863" y="3435350"/>
-            <a:ext cx="139700" cy="147638"/>
-          </a:xfrm>
-          <a:prstGeom prst="diamond">
-            <a:avLst/>
-          </a:prstGeom>
-          <a:solidFill>
-            <a:srgbClr val="FFFFFF"/>
-          </a:solidFill>
-          <a:ln w="18000" cap="flat">
-            <a:solidFill>
-              <a:srgbClr val="999999"/>
-            </a:solidFill>
-            <a:round/>
-            <a:headEnd/>
-            <a:tailEnd/>
-          </a:ln>
-          <a:effectLst/>
-          <a:extLst>
-            <a:ext uri="{AF507438-7753-43e0-B8FC-AC1667EBCBE1}">
-              <a14:hiddenEffects xmlns:a14="http://schemas.microsoft.com/office/drawing/2010/main" xmlns="">
-                <a:effectLst>
-                  <a:outerShdw blurRad="63500" dist="38099" dir="2700000" algn="ctr" rotWithShape="0">
-                    <a:srgbClr val="000000">
-                      <a:alpha val="74998"/>
-                    </a:srgbClr>
-                  </a:outerShdw>
-                </a:effectLst>
-              </a14:hiddenEffects>
-            </a:ext>
-          </a:extLst>
-        </p:spPr>
-        <p:txBody>
-          <a:bodyPr wrap="none" anchor="ctr"/>
           <a:lstStyle/>
           <a:p>
             <a:endParaRPr lang="fr-FR"/>
@@ -21344,14 +20657,14 @@
           <a:effectLst/>
           <a:extLst>
             <a:ext uri="{909E8E84-426E-40dd-AFC4-6F175D3DCCD1}">
-              <a14:hiddenFill xmlns:a14="http://schemas.microsoft.com/office/drawing/2010/main" xmlns="">
+              <a14:hiddenFill xmlns="" xmlns:a14="http://schemas.microsoft.com/office/drawing/2010/main">
                 <a:solidFill>
                   <a:srgbClr val="FFFFFF"/>
                 </a:solidFill>
               </a14:hiddenFill>
             </a:ext>
             <a:ext uri="{91240B29-F687-4f45-9708-019B960494DF}">
-              <a14:hiddenLine xmlns:a14="http://schemas.microsoft.com/office/drawing/2010/main" xmlns="" w="9525" cap="flat">
+              <a14:hiddenLine xmlns="" xmlns:a14="http://schemas.microsoft.com/office/drawing/2010/main" w="9525" cap="flat">
                 <a:solidFill>
                   <a:srgbClr val="000000"/>
                 </a:solidFill>
@@ -21361,7 +20674,7 @@
               </a14:hiddenLine>
             </a:ext>
             <a:ext uri="{AF507438-7753-43e0-B8FC-AC1667EBCBE1}">
-              <a14:hiddenEffects xmlns:a14="http://schemas.microsoft.com/office/drawing/2010/main" xmlns="">
+              <a14:hiddenEffects xmlns="" xmlns:a14="http://schemas.microsoft.com/office/drawing/2010/main">
                 <a:effectLst>
                   <a:outerShdw blurRad="63500" dist="38099" dir="2700000" algn="ctr" rotWithShape="0">
                     <a:srgbClr val="000000">
@@ -21411,14 +20724,14 @@
           <a:effectLst/>
           <a:extLst>
             <a:ext uri="{909E8E84-426E-40dd-AFC4-6F175D3DCCD1}">
-              <a14:hiddenFill xmlns:a14="http://schemas.microsoft.com/office/drawing/2010/main" xmlns="">
+              <a14:hiddenFill xmlns="" xmlns:a14="http://schemas.microsoft.com/office/drawing/2010/main">
                 <a:solidFill>
                   <a:srgbClr val="FFFFFF"/>
                 </a:solidFill>
               </a14:hiddenFill>
             </a:ext>
             <a:ext uri="{91240B29-F687-4f45-9708-019B960494DF}">
-              <a14:hiddenLine xmlns:a14="http://schemas.microsoft.com/office/drawing/2010/main" xmlns="" w="9525" cap="flat">
+              <a14:hiddenLine xmlns="" xmlns:a14="http://schemas.microsoft.com/office/drawing/2010/main" w="9525" cap="flat">
                 <a:solidFill>
                   <a:srgbClr val="000000"/>
                 </a:solidFill>
@@ -21428,7 +20741,7 @@
               </a14:hiddenLine>
             </a:ext>
             <a:ext uri="{AF507438-7753-43e0-B8FC-AC1667EBCBE1}">
-              <a14:hiddenEffects xmlns:a14="http://schemas.microsoft.com/office/drawing/2010/main" xmlns="">
+              <a14:hiddenEffects xmlns="" xmlns:a14="http://schemas.microsoft.com/office/drawing/2010/main">
                 <a:effectLst>
                   <a:outerShdw blurRad="63500" dist="38099" dir="2700000" algn="ctr" rotWithShape="0">
                     <a:srgbClr val="000000">
@@ -21652,14 +20965,14 @@
           <a:effectLst/>
           <a:extLst>
             <a:ext uri="{909E8E84-426E-40dd-AFC4-6F175D3DCCD1}">
-              <a14:hiddenFill xmlns:a14="http://schemas.microsoft.com/office/drawing/2010/main" xmlns="">
+              <a14:hiddenFill xmlns="" xmlns:a14="http://schemas.microsoft.com/office/drawing/2010/main">
                 <a:solidFill>
                   <a:srgbClr val="FFFFFF"/>
                 </a:solidFill>
               </a14:hiddenFill>
             </a:ext>
             <a:ext uri="{91240B29-F687-4f45-9708-019B960494DF}">
-              <a14:hiddenLine xmlns:a14="http://schemas.microsoft.com/office/drawing/2010/main" xmlns="" w="9525" cap="flat">
+              <a14:hiddenLine xmlns="" xmlns:a14="http://schemas.microsoft.com/office/drawing/2010/main" w="9525" cap="flat">
                 <a:solidFill>
                   <a:srgbClr val="000000"/>
                 </a:solidFill>
@@ -21669,7 +20982,7 @@
               </a14:hiddenLine>
             </a:ext>
             <a:ext uri="{AF507438-7753-43e0-B8FC-AC1667EBCBE1}">
-              <a14:hiddenEffects xmlns:a14="http://schemas.microsoft.com/office/drawing/2010/main" xmlns="">
+              <a14:hiddenEffects xmlns="" xmlns:a14="http://schemas.microsoft.com/office/drawing/2010/main">
                 <a:effectLst>
                   <a:outerShdw blurRad="63500" dist="38099" dir="2700000" algn="ctr" rotWithShape="0">
                     <a:srgbClr val="000000">
@@ -21719,14 +21032,14 @@
           <a:effectLst/>
           <a:extLst>
             <a:ext uri="{909E8E84-426E-40dd-AFC4-6F175D3DCCD1}">
-              <a14:hiddenFill xmlns:a14="http://schemas.microsoft.com/office/drawing/2010/main" xmlns="">
+              <a14:hiddenFill xmlns="" xmlns:a14="http://schemas.microsoft.com/office/drawing/2010/main">
                 <a:solidFill>
                   <a:srgbClr val="FFFFFF"/>
                 </a:solidFill>
               </a14:hiddenFill>
             </a:ext>
             <a:ext uri="{91240B29-F687-4f45-9708-019B960494DF}">
-              <a14:hiddenLine xmlns:a14="http://schemas.microsoft.com/office/drawing/2010/main" xmlns="" w="9525" cap="flat">
+              <a14:hiddenLine xmlns="" xmlns:a14="http://schemas.microsoft.com/office/drawing/2010/main" w="9525" cap="flat">
                 <a:solidFill>
                   <a:srgbClr val="000000"/>
                 </a:solidFill>
@@ -21736,7 +21049,7 @@
               </a14:hiddenLine>
             </a:ext>
             <a:ext uri="{AF507438-7753-43e0-B8FC-AC1667EBCBE1}">
-              <a14:hiddenEffects xmlns:a14="http://schemas.microsoft.com/office/drawing/2010/main" xmlns="">
+              <a14:hiddenEffects xmlns="" xmlns:a14="http://schemas.microsoft.com/office/drawing/2010/main">
                 <a:effectLst>
                   <a:outerShdw blurRad="63500" dist="38099" dir="2700000" algn="ctr" rotWithShape="0">
                     <a:srgbClr val="000000">
@@ -21786,14 +21099,14 @@
           <a:effectLst/>
           <a:extLst>
             <a:ext uri="{909E8E84-426E-40dd-AFC4-6F175D3DCCD1}">
-              <a14:hiddenFill xmlns:a14="http://schemas.microsoft.com/office/drawing/2010/main" xmlns="">
+              <a14:hiddenFill xmlns="" xmlns:a14="http://schemas.microsoft.com/office/drawing/2010/main">
                 <a:solidFill>
                   <a:srgbClr val="FFFFFF"/>
                 </a:solidFill>
               </a14:hiddenFill>
             </a:ext>
             <a:ext uri="{91240B29-F687-4f45-9708-019B960494DF}">
-              <a14:hiddenLine xmlns:a14="http://schemas.microsoft.com/office/drawing/2010/main" xmlns="" w="9525" cap="flat">
+              <a14:hiddenLine xmlns="" xmlns:a14="http://schemas.microsoft.com/office/drawing/2010/main" w="9525" cap="flat">
                 <a:solidFill>
                   <a:srgbClr val="000000"/>
                 </a:solidFill>
@@ -21803,7 +21116,7 @@
               </a14:hiddenLine>
             </a:ext>
             <a:ext uri="{AF507438-7753-43e0-B8FC-AC1667EBCBE1}">
-              <a14:hiddenEffects xmlns:a14="http://schemas.microsoft.com/office/drawing/2010/main" xmlns="">
+              <a14:hiddenEffects xmlns="" xmlns:a14="http://schemas.microsoft.com/office/drawing/2010/main">
                 <a:effectLst>
                   <a:outerShdw blurRad="63500" dist="38099" dir="2700000" algn="ctr" rotWithShape="0">
                     <a:srgbClr val="000000">
@@ -21853,14 +21166,14 @@
           <a:effectLst/>
           <a:extLst>
             <a:ext uri="{909E8E84-426E-40dd-AFC4-6F175D3DCCD1}">
-              <a14:hiddenFill xmlns:a14="http://schemas.microsoft.com/office/drawing/2010/main" xmlns="">
+              <a14:hiddenFill xmlns="" xmlns:a14="http://schemas.microsoft.com/office/drawing/2010/main">
                 <a:solidFill>
                   <a:srgbClr val="FFFFFF"/>
                 </a:solidFill>
               </a14:hiddenFill>
             </a:ext>
             <a:ext uri="{91240B29-F687-4f45-9708-019B960494DF}">
-              <a14:hiddenLine xmlns:a14="http://schemas.microsoft.com/office/drawing/2010/main" xmlns="" w="9525" cap="flat">
+              <a14:hiddenLine xmlns="" xmlns:a14="http://schemas.microsoft.com/office/drawing/2010/main" w="9525" cap="flat">
                 <a:solidFill>
                   <a:srgbClr val="000000"/>
                 </a:solidFill>
@@ -21870,7 +21183,7 @@
               </a14:hiddenLine>
             </a:ext>
             <a:ext uri="{AF507438-7753-43e0-B8FC-AC1667EBCBE1}">
-              <a14:hiddenEffects xmlns:a14="http://schemas.microsoft.com/office/drawing/2010/main" xmlns="">
+              <a14:hiddenEffects xmlns="" xmlns:a14="http://schemas.microsoft.com/office/drawing/2010/main">
                 <a:effectLst>
                   <a:outerShdw blurRad="63500" dist="38099" dir="2700000" algn="ctr" rotWithShape="0">
                     <a:srgbClr val="000000">
@@ -21920,14 +21233,14 @@
           <a:effectLst/>
           <a:extLst>
             <a:ext uri="{909E8E84-426E-40dd-AFC4-6F175D3DCCD1}">
-              <a14:hiddenFill xmlns:a14="http://schemas.microsoft.com/office/drawing/2010/main" xmlns="">
+              <a14:hiddenFill xmlns="" xmlns:a14="http://schemas.microsoft.com/office/drawing/2010/main">
                 <a:solidFill>
                   <a:srgbClr val="FFFFFF"/>
                 </a:solidFill>
               </a14:hiddenFill>
             </a:ext>
             <a:ext uri="{91240B29-F687-4f45-9708-019B960494DF}">
-              <a14:hiddenLine xmlns:a14="http://schemas.microsoft.com/office/drawing/2010/main" xmlns="" w="9525" cap="flat">
+              <a14:hiddenLine xmlns="" xmlns:a14="http://schemas.microsoft.com/office/drawing/2010/main" w="9525" cap="flat">
                 <a:solidFill>
                   <a:srgbClr val="000000"/>
                 </a:solidFill>
@@ -21937,7 +21250,7 @@
               </a14:hiddenLine>
             </a:ext>
             <a:ext uri="{AF507438-7753-43e0-B8FC-AC1667EBCBE1}">
-              <a14:hiddenEffects xmlns:a14="http://schemas.microsoft.com/office/drawing/2010/main" xmlns="">
+              <a14:hiddenEffects xmlns="" xmlns:a14="http://schemas.microsoft.com/office/drawing/2010/main">
                 <a:effectLst>
                   <a:outerShdw blurRad="63500" dist="38099" dir="2700000" algn="ctr" rotWithShape="0">
                     <a:srgbClr val="000000">
@@ -21974,7 +21287,7 @@
         </p:nvSpPr>
         <p:spPr bwMode="auto">
           <a:xfrm>
-            <a:off x="2674938" y="1465263"/>
+            <a:off x="2619693" y="1456531"/>
             <a:ext cx="360362" cy="204787"/>
           </a:xfrm>
           <a:prstGeom prst="rect">
@@ -21987,14 +21300,14 @@
           <a:effectLst/>
           <a:extLst>
             <a:ext uri="{909E8E84-426E-40dd-AFC4-6F175D3DCCD1}">
-              <a14:hiddenFill xmlns:a14="http://schemas.microsoft.com/office/drawing/2010/main" xmlns="">
+              <a14:hiddenFill xmlns="" xmlns:a14="http://schemas.microsoft.com/office/drawing/2010/main">
                 <a:solidFill>
                   <a:srgbClr val="FFFFFF"/>
                 </a:solidFill>
               </a14:hiddenFill>
             </a:ext>
             <a:ext uri="{91240B29-F687-4f45-9708-019B960494DF}">
-              <a14:hiddenLine xmlns:a14="http://schemas.microsoft.com/office/drawing/2010/main" xmlns="" w="9525" cap="flat">
+              <a14:hiddenLine xmlns="" xmlns:a14="http://schemas.microsoft.com/office/drawing/2010/main" w="9525" cap="flat">
                 <a:solidFill>
                   <a:srgbClr val="000000"/>
                 </a:solidFill>
@@ -22004,7 +21317,7 @@
               </a14:hiddenLine>
             </a:ext>
             <a:ext uri="{AF507438-7753-43e0-B8FC-AC1667EBCBE1}">
-              <a14:hiddenEffects xmlns:a14="http://schemas.microsoft.com/office/drawing/2010/main" xmlns="">
+              <a14:hiddenEffects xmlns="" xmlns:a14="http://schemas.microsoft.com/office/drawing/2010/main">
                 <a:effectLst>
                   <a:outerShdw blurRad="63500" dist="38099" dir="2700000" algn="ctr" rotWithShape="0">
                     <a:srgbClr val="000000">
@@ -22021,7 +21334,7 @@
           <a:lstStyle/>
           <a:p>
             <a:r>
-              <a:rPr lang="fr-FR" sz="800">
+              <a:rPr lang="fr-FR" sz="800" dirty="0">
                 <a:solidFill>
                   <a:srgbClr val="CC0000"/>
                 </a:solidFill>
@@ -22054,14 +21367,14 @@
           <a:effectLst/>
           <a:extLst>
             <a:ext uri="{909E8E84-426E-40dd-AFC4-6F175D3DCCD1}">
-              <a14:hiddenFill xmlns:a14="http://schemas.microsoft.com/office/drawing/2010/main" xmlns="">
+              <a14:hiddenFill xmlns="" xmlns:a14="http://schemas.microsoft.com/office/drawing/2010/main">
                 <a:solidFill>
                   <a:srgbClr val="FFFFFF"/>
                 </a:solidFill>
               </a14:hiddenFill>
             </a:ext>
             <a:ext uri="{91240B29-F687-4f45-9708-019B960494DF}">
-              <a14:hiddenLine xmlns:a14="http://schemas.microsoft.com/office/drawing/2010/main" xmlns="" w="9525" cap="flat">
+              <a14:hiddenLine xmlns="" xmlns:a14="http://schemas.microsoft.com/office/drawing/2010/main" w="9525" cap="flat">
                 <a:solidFill>
                   <a:srgbClr val="000000"/>
                 </a:solidFill>
@@ -22071,7 +21384,7 @@
               </a14:hiddenLine>
             </a:ext>
             <a:ext uri="{AF507438-7753-43e0-B8FC-AC1667EBCBE1}">
-              <a14:hiddenEffects xmlns:a14="http://schemas.microsoft.com/office/drawing/2010/main" xmlns="">
+              <a14:hiddenEffects xmlns="" xmlns:a14="http://schemas.microsoft.com/office/drawing/2010/main">
                 <a:effectLst>
                   <a:outerShdw blurRad="63500" dist="38099" dir="2700000" algn="ctr" rotWithShape="0">
                     <a:srgbClr val="000000">
@@ -22121,14 +21434,14 @@
           <a:effectLst/>
           <a:extLst>
             <a:ext uri="{909E8E84-426E-40dd-AFC4-6F175D3DCCD1}">
-              <a14:hiddenFill xmlns:a14="http://schemas.microsoft.com/office/drawing/2010/main" xmlns="">
+              <a14:hiddenFill xmlns="" xmlns:a14="http://schemas.microsoft.com/office/drawing/2010/main">
                 <a:solidFill>
                   <a:srgbClr val="FFFFFF"/>
                 </a:solidFill>
               </a14:hiddenFill>
             </a:ext>
             <a:ext uri="{91240B29-F687-4f45-9708-019B960494DF}">
-              <a14:hiddenLine xmlns:a14="http://schemas.microsoft.com/office/drawing/2010/main" xmlns="" w="9525" cap="flat">
+              <a14:hiddenLine xmlns="" xmlns:a14="http://schemas.microsoft.com/office/drawing/2010/main" w="9525" cap="flat">
                 <a:solidFill>
                   <a:srgbClr val="000000"/>
                 </a:solidFill>
@@ -22138,7 +21451,7 @@
               </a14:hiddenLine>
             </a:ext>
             <a:ext uri="{AF507438-7753-43e0-B8FC-AC1667EBCBE1}">
-              <a14:hiddenEffects xmlns:a14="http://schemas.microsoft.com/office/drawing/2010/main" xmlns="">
+              <a14:hiddenEffects xmlns="" xmlns:a14="http://schemas.microsoft.com/office/drawing/2010/main">
                 <a:effectLst>
                   <a:outerShdw blurRad="63500" dist="38099" dir="2700000" algn="ctr" rotWithShape="0">
                     <a:srgbClr val="000000">
@@ -22188,14 +21501,14 @@
           <a:effectLst/>
           <a:extLst>
             <a:ext uri="{909E8E84-426E-40dd-AFC4-6F175D3DCCD1}">
-              <a14:hiddenFill xmlns:a14="http://schemas.microsoft.com/office/drawing/2010/main" xmlns="">
+              <a14:hiddenFill xmlns="" xmlns:a14="http://schemas.microsoft.com/office/drawing/2010/main">
                 <a:solidFill>
                   <a:srgbClr val="FFFFFF"/>
                 </a:solidFill>
               </a14:hiddenFill>
             </a:ext>
             <a:ext uri="{91240B29-F687-4f45-9708-019B960494DF}">
-              <a14:hiddenLine xmlns:a14="http://schemas.microsoft.com/office/drawing/2010/main" xmlns="" w="9525" cap="flat">
+              <a14:hiddenLine xmlns="" xmlns:a14="http://schemas.microsoft.com/office/drawing/2010/main" w="9525" cap="flat">
                 <a:solidFill>
                   <a:srgbClr val="000000"/>
                 </a:solidFill>
@@ -22205,7 +21518,7 @@
               </a14:hiddenLine>
             </a:ext>
             <a:ext uri="{AF507438-7753-43e0-B8FC-AC1667EBCBE1}">
-              <a14:hiddenEffects xmlns:a14="http://schemas.microsoft.com/office/drawing/2010/main" xmlns="">
+              <a14:hiddenEffects xmlns="" xmlns:a14="http://schemas.microsoft.com/office/drawing/2010/main">
                 <a:effectLst>
                   <a:outerShdw blurRad="63500" dist="38099" dir="2700000" algn="ctr" rotWithShape="0">
                     <a:srgbClr val="000000">
@@ -22255,14 +21568,14 @@
           <a:effectLst/>
           <a:extLst>
             <a:ext uri="{909E8E84-426E-40dd-AFC4-6F175D3DCCD1}">
-              <a14:hiddenFill xmlns:a14="http://schemas.microsoft.com/office/drawing/2010/main" xmlns="">
+              <a14:hiddenFill xmlns="" xmlns:a14="http://schemas.microsoft.com/office/drawing/2010/main">
                 <a:solidFill>
                   <a:srgbClr val="FFFFFF"/>
                 </a:solidFill>
               </a14:hiddenFill>
             </a:ext>
             <a:ext uri="{91240B29-F687-4f45-9708-019B960494DF}">
-              <a14:hiddenLine xmlns:a14="http://schemas.microsoft.com/office/drawing/2010/main" xmlns="" w="9525" cap="flat">
+              <a14:hiddenLine xmlns="" xmlns:a14="http://schemas.microsoft.com/office/drawing/2010/main" w="9525" cap="flat">
                 <a:solidFill>
                   <a:srgbClr val="000000"/>
                 </a:solidFill>
@@ -22272,7 +21585,7 @@
               </a14:hiddenLine>
             </a:ext>
             <a:ext uri="{AF507438-7753-43e0-B8FC-AC1667EBCBE1}">
-              <a14:hiddenEffects xmlns:a14="http://schemas.microsoft.com/office/drawing/2010/main" xmlns="">
+              <a14:hiddenEffects xmlns="" xmlns:a14="http://schemas.microsoft.com/office/drawing/2010/main">
                 <a:effectLst>
                   <a:outerShdw blurRad="63500" dist="38099" dir="2700000" algn="ctr" rotWithShape="0">
                     <a:srgbClr val="000000">
@@ -22309,8 +21622,8 @@
         </p:nvSpPr>
         <p:spPr bwMode="auto">
           <a:xfrm>
-            <a:off x="5448300" y="4238625"/>
-            <a:ext cx="419100" cy="204788"/>
+            <a:off x="5448300" y="3856038"/>
+            <a:ext cx="419100" cy="193633"/>
           </a:xfrm>
           <a:prstGeom prst="rect">
             <a:avLst/>
@@ -22322,14 +21635,14 @@
           <a:effectLst/>
           <a:extLst>
             <a:ext uri="{909E8E84-426E-40dd-AFC4-6F175D3DCCD1}">
-              <a14:hiddenFill xmlns:a14="http://schemas.microsoft.com/office/drawing/2010/main" xmlns="">
+              <a14:hiddenFill xmlns="" xmlns:a14="http://schemas.microsoft.com/office/drawing/2010/main">
                 <a:solidFill>
                   <a:srgbClr val="FFFFFF"/>
                 </a:solidFill>
               </a14:hiddenFill>
             </a:ext>
             <a:ext uri="{91240B29-F687-4f45-9708-019B960494DF}">
-              <a14:hiddenLine xmlns:a14="http://schemas.microsoft.com/office/drawing/2010/main" xmlns="" w="9525" cap="flat">
+              <a14:hiddenLine xmlns="" xmlns:a14="http://schemas.microsoft.com/office/drawing/2010/main" w="9525" cap="flat">
                 <a:solidFill>
                   <a:srgbClr val="000000"/>
                 </a:solidFill>
@@ -22339,7 +21652,7 @@
               </a14:hiddenLine>
             </a:ext>
             <a:ext uri="{AF507438-7753-43e0-B8FC-AC1667EBCBE1}">
-              <a14:hiddenEffects xmlns:a14="http://schemas.microsoft.com/office/drawing/2010/main" xmlns="">
+              <a14:hiddenEffects xmlns="" xmlns:a14="http://schemas.microsoft.com/office/drawing/2010/main">
                 <a:effectLst>
                   <a:outerShdw blurRad="63500" dist="38099" dir="2700000" algn="ctr" rotWithShape="0">
                     <a:srgbClr val="000000">
@@ -22356,7 +21669,7 @@
           <a:lstStyle/>
           <a:p>
             <a:r>
-              <a:rPr lang="fr-FR" sz="800">
+              <a:rPr lang="fr-FR" sz="800" dirty="0">
                 <a:solidFill>
                   <a:srgbClr val="CC0000"/>
                 </a:solidFill>
@@ -22389,14 +21702,14 @@
           <a:effectLst/>
           <a:extLst>
             <a:ext uri="{909E8E84-426E-40dd-AFC4-6F175D3DCCD1}">
-              <a14:hiddenFill xmlns:a14="http://schemas.microsoft.com/office/drawing/2010/main" xmlns="">
+              <a14:hiddenFill xmlns="" xmlns:a14="http://schemas.microsoft.com/office/drawing/2010/main">
                 <a:solidFill>
                   <a:srgbClr val="FFFFFF"/>
                 </a:solidFill>
               </a14:hiddenFill>
             </a:ext>
             <a:ext uri="{91240B29-F687-4f45-9708-019B960494DF}">
-              <a14:hiddenLine xmlns:a14="http://schemas.microsoft.com/office/drawing/2010/main" xmlns="" w="9525" cap="flat">
+              <a14:hiddenLine xmlns="" xmlns:a14="http://schemas.microsoft.com/office/drawing/2010/main" w="9525" cap="flat">
                 <a:solidFill>
                   <a:srgbClr val="000000"/>
                 </a:solidFill>
@@ -22406,7 +21719,7 @@
               </a14:hiddenLine>
             </a:ext>
             <a:ext uri="{AF507438-7753-43e0-B8FC-AC1667EBCBE1}">
-              <a14:hiddenEffects xmlns:a14="http://schemas.microsoft.com/office/drawing/2010/main" xmlns="">
+              <a14:hiddenEffects xmlns="" xmlns:a14="http://schemas.microsoft.com/office/drawing/2010/main">
                 <a:effectLst>
                   <a:outerShdw blurRad="63500" dist="38099" dir="2700000" algn="ctr" rotWithShape="0">
                     <a:srgbClr val="000000">
@@ -22456,14 +21769,14 @@
           <a:effectLst/>
           <a:extLst>
             <a:ext uri="{909E8E84-426E-40dd-AFC4-6F175D3DCCD1}">
-              <a14:hiddenFill xmlns:a14="http://schemas.microsoft.com/office/drawing/2010/main" xmlns="">
+              <a14:hiddenFill xmlns="" xmlns:a14="http://schemas.microsoft.com/office/drawing/2010/main">
                 <a:solidFill>
                   <a:srgbClr val="FFFFFF"/>
                 </a:solidFill>
               </a14:hiddenFill>
             </a:ext>
             <a:ext uri="{91240B29-F687-4f45-9708-019B960494DF}">
-              <a14:hiddenLine xmlns:a14="http://schemas.microsoft.com/office/drawing/2010/main" xmlns="" w="9525" cap="flat">
+              <a14:hiddenLine xmlns="" xmlns:a14="http://schemas.microsoft.com/office/drawing/2010/main" w="9525" cap="flat">
                 <a:solidFill>
                   <a:srgbClr val="000000"/>
                 </a:solidFill>
@@ -22473,7 +21786,7 @@
               </a14:hiddenLine>
             </a:ext>
             <a:ext uri="{AF507438-7753-43e0-B8FC-AC1667EBCBE1}">
-              <a14:hiddenEffects xmlns:a14="http://schemas.microsoft.com/office/drawing/2010/main" xmlns="">
+              <a14:hiddenEffects xmlns="" xmlns:a14="http://schemas.microsoft.com/office/drawing/2010/main">
                 <a:effectLst>
                   <a:outerShdw blurRad="63500" dist="38099" dir="2700000" algn="ctr" rotWithShape="0">
                     <a:srgbClr val="000000">
@@ -22523,14 +21836,14 @@
           <a:effectLst/>
           <a:extLst>
             <a:ext uri="{909E8E84-426E-40dd-AFC4-6F175D3DCCD1}">
-              <a14:hiddenFill xmlns:a14="http://schemas.microsoft.com/office/drawing/2010/main" xmlns="">
+              <a14:hiddenFill xmlns="" xmlns:a14="http://schemas.microsoft.com/office/drawing/2010/main">
                 <a:solidFill>
                   <a:srgbClr val="FFFFFF"/>
                 </a:solidFill>
               </a14:hiddenFill>
             </a:ext>
             <a:ext uri="{91240B29-F687-4f45-9708-019B960494DF}">
-              <a14:hiddenLine xmlns:a14="http://schemas.microsoft.com/office/drawing/2010/main" xmlns="" w="9525" cap="flat">
+              <a14:hiddenLine xmlns="" xmlns:a14="http://schemas.microsoft.com/office/drawing/2010/main" w="9525" cap="flat">
                 <a:solidFill>
                   <a:srgbClr val="000000"/>
                 </a:solidFill>
@@ -22540,7 +21853,7 @@
               </a14:hiddenLine>
             </a:ext>
             <a:ext uri="{AF507438-7753-43e0-B8FC-AC1667EBCBE1}">
-              <a14:hiddenEffects xmlns:a14="http://schemas.microsoft.com/office/drawing/2010/main" xmlns="">
+              <a14:hiddenEffects xmlns="" xmlns:a14="http://schemas.microsoft.com/office/drawing/2010/main">
                 <a:effectLst>
                   <a:outerShdw blurRad="63500" dist="38099" dir="2700000" algn="ctr" rotWithShape="0">
                     <a:srgbClr val="000000">
@@ -22590,14 +21903,14 @@
           <a:effectLst/>
           <a:extLst>
             <a:ext uri="{909E8E84-426E-40dd-AFC4-6F175D3DCCD1}">
-              <a14:hiddenFill xmlns:a14="http://schemas.microsoft.com/office/drawing/2010/main" xmlns="">
+              <a14:hiddenFill xmlns="" xmlns:a14="http://schemas.microsoft.com/office/drawing/2010/main">
                 <a:solidFill>
                   <a:srgbClr val="FFFFFF"/>
                 </a:solidFill>
               </a14:hiddenFill>
             </a:ext>
             <a:ext uri="{91240B29-F687-4f45-9708-019B960494DF}">
-              <a14:hiddenLine xmlns:a14="http://schemas.microsoft.com/office/drawing/2010/main" xmlns="" w="9525" cap="flat">
+              <a14:hiddenLine xmlns="" xmlns:a14="http://schemas.microsoft.com/office/drawing/2010/main" w="9525" cap="flat">
                 <a:solidFill>
                   <a:srgbClr val="000000"/>
                 </a:solidFill>
@@ -22607,7 +21920,7 @@
               </a14:hiddenLine>
             </a:ext>
             <a:ext uri="{AF507438-7753-43e0-B8FC-AC1667EBCBE1}">
-              <a14:hiddenEffects xmlns:a14="http://schemas.microsoft.com/office/drawing/2010/main" xmlns="">
+              <a14:hiddenEffects xmlns="" xmlns:a14="http://schemas.microsoft.com/office/drawing/2010/main">
                 <a:effectLst>
                   <a:outerShdw blurRad="63500" dist="38099" dir="2700000" algn="ctr" rotWithShape="0">
                     <a:srgbClr val="000000">
@@ -22657,14 +21970,14 @@
           <a:effectLst/>
           <a:extLst>
             <a:ext uri="{909E8E84-426E-40dd-AFC4-6F175D3DCCD1}">
-              <a14:hiddenFill xmlns:a14="http://schemas.microsoft.com/office/drawing/2010/main" xmlns="">
+              <a14:hiddenFill xmlns="" xmlns:a14="http://schemas.microsoft.com/office/drawing/2010/main">
                 <a:solidFill>
                   <a:srgbClr val="FFFFFF"/>
                 </a:solidFill>
               </a14:hiddenFill>
             </a:ext>
             <a:ext uri="{91240B29-F687-4f45-9708-019B960494DF}">
-              <a14:hiddenLine xmlns:a14="http://schemas.microsoft.com/office/drawing/2010/main" xmlns="" w="9525" cap="flat">
+              <a14:hiddenLine xmlns="" xmlns:a14="http://schemas.microsoft.com/office/drawing/2010/main" w="9525" cap="flat">
                 <a:solidFill>
                   <a:srgbClr val="000000"/>
                 </a:solidFill>
@@ -22674,7 +21987,7 @@
               </a14:hiddenLine>
             </a:ext>
             <a:ext uri="{AF507438-7753-43e0-B8FC-AC1667EBCBE1}">
-              <a14:hiddenEffects xmlns:a14="http://schemas.microsoft.com/office/drawing/2010/main" xmlns="">
+              <a14:hiddenEffects xmlns="" xmlns:a14="http://schemas.microsoft.com/office/drawing/2010/main">
                 <a:effectLst>
                   <a:outerShdw blurRad="63500" dist="38099" dir="2700000" algn="ctr" rotWithShape="0">
                     <a:srgbClr val="000000">
@@ -22724,14 +22037,14 @@
           <a:effectLst/>
           <a:extLst>
             <a:ext uri="{909E8E84-426E-40dd-AFC4-6F175D3DCCD1}">
-              <a14:hiddenFill xmlns:a14="http://schemas.microsoft.com/office/drawing/2010/main" xmlns="">
+              <a14:hiddenFill xmlns="" xmlns:a14="http://schemas.microsoft.com/office/drawing/2010/main">
                 <a:solidFill>
                   <a:srgbClr val="FFFFFF"/>
                 </a:solidFill>
               </a14:hiddenFill>
             </a:ext>
             <a:ext uri="{91240B29-F687-4f45-9708-019B960494DF}">
-              <a14:hiddenLine xmlns:a14="http://schemas.microsoft.com/office/drawing/2010/main" xmlns="" w="9525" cap="flat">
+              <a14:hiddenLine xmlns="" xmlns:a14="http://schemas.microsoft.com/office/drawing/2010/main" w="9525" cap="flat">
                 <a:solidFill>
                   <a:srgbClr val="000000"/>
                 </a:solidFill>
@@ -22741,7 +22054,7 @@
               </a14:hiddenLine>
             </a:ext>
             <a:ext uri="{AF507438-7753-43e0-B8FC-AC1667EBCBE1}">
-              <a14:hiddenEffects xmlns:a14="http://schemas.microsoft.com/office/drawing/2010/main" xmlns="">
+              <a14:hiddenEffects xmlns="" xmlns:a14="http://schemas.microsoft.com/office/drawing/2010/main">
                 <a:effectLst>
                   <a:outerShdw blurRad="63500" dist="38099" dir="2700000" algn="ctr" rotWithShape="0">
                     <a:srgbClr val="000000">
@@ -22791,14 +22104,14 @@
           <a:effectLst/>
           <a:extLst>
             <a:ext uri="{909E8E84-426E-40dd-AFC4-6F175D3DCCD1}">
-              <a14:hiddenFill xmlns:a14="http://schemas.microsoft.com/office/drawing/2010/main" xmlns="">
+              <a14:hiddenFill xmlns="" xmlns:a14="http://schemas.microsoft.com/office/drawing/2010/main">
                 <a:solidFill>
                   <a:srgbClr val="FFFFFF"/>
                 </a:solidFill>
               </a14:hiddenFill>
             </a:ext>
             <a:ext uri="{91240B29-F687-4f45-9708-019B960494DF}">
-              <a14:hiddenLine xmlns:a14="http://schemas.microsoft.com/office/drawing/2010/main" xmlns="" w="9525" cap="flat">
+              <a14:hiddenLine xmlns="" xmlns:a14="http://schemas.microsoft.com/office/drawing/2010/main" w="9525" cap="flat">
                 <a:solidFill>
                   <a:srgbClr val="000000"/>
                 </a:solidFill>
@@ -22808,7 +22121,7 @@
               </a14:hiddenLine>
             </a:ext>
             <a:ext uri="{AF507438-7753-43e0-B8FC-AC1667EBCBE1}">
-              <a14:hiddenEffects xmlns:a14="http://schemas.microsoft.com/office/drawing/2010/main" xmlns="">
+              <a14:hiddenEffects xmlns="" xmlns:a14="http://schemas.microsoft.com/office/drawing/2010/main">
                 <a:effectLst>
                   <a:outerShdw blurRad="63500" dist="38099" dir="2700000" algn="ctr" rotWithShape="0">
                     <a:srgbClr val="000000">
@@ -23053,607 +22366,7 @@
           <a:effectLst/>
           <a:extLst>
             <a:ext uri="{AF507438-7753-43e0-B8FC-AC1667EBCBE1}">
-              <a14:hiddenEffects xmlns:a14="http://schemas.microsoft.com/office/drawing/2010/main" xmlns="">
-                <a:effectLst>
-                  <a:outerShdw blurRad="63500" dist="38099" dir="2700000" algn="ctr" rotWithShape="0">
-                    <a:srgbClr val="000000">
-                      <a:alpha val="74998"/>
-                    </a:srgbClr>
-                  </a:outerShdw>
-                </a:effectLst>
-              </a14:hiddenEffects>
-            </a:ext>
-          </a:extLst>
-        </p:spPr>
-        <p:txBody>
-          <a:bodyPr wrap="none" anchor="ctr"/>
-          <a:lstStyle/>
-          <a:p>
-            <a:endParaRPr lang="fr-FR"/>
-          </a:p>
-        </p:txBody>
-      </p:sp>
-      <p:sp>
-        <p:nvSpPr>
-          <p:cNvPr id="182" name="AutoShape 154"/>
-          <p:cNvSpPr>
-            <a:spLocks noChangeArrowheads="1"/>
-          </p:cNvSpPr>
-          <p:nvPr/>
-        </p:nvSpPr>
-        <p:spPr bwMode="auto">
-          <a:xfrm>
-            <a:off x="4320232" y="2627709"/>
-            <a:ext cx="139700" cy="147638"/>
-          </a:xfrm>
-          <a:prstGeom prst="diamond">
-            <a:avLst/>
-          </a:prstGeom>
-          <a:solidFill>
-            <a:srgbClr val="FFFFFF"/>
-          </a:solidFill>
-          <a:ln w="18000" cap="flat">
-            <a:solidFill>
-              <a:srgbClr val="999999"/>
-            </a:solidFill>
-            <a:round/>
-            <a:headEnd/>
-            <a:tailEnd/>
-          </a:ln>
-          <a:effectLst/>
-          <a:extLst>
-            <a:ext uri="{AF507438-7753-43e0-B8FC-AC1667EBCBE1}">
-              <a14:hiddenEffects xmlns:a14="http://schemas.microsoft.com/office/drawing/2010/main" xmlns="">
-                <a:effectLst>
-                  <a:outerShdw blurRad="63500" dist="38099" dir="2700000" algn="ctr" rotWithShape="0">
-                    <a:srgbClr val="000000">
-                      <a:alpha val="74998"/>
-                    </a:srgbClr>
-                  </a:outerShdw>
-                </a:effectLst>
-              </a14:hiddenEffects>
-            </a:ext>
-          </a:extLst>
-        </p:spPr>
-        <p:txBody>
-          <a:bodyPr wrap="none" anchor="ctr"/>
-          <a:lstStyle/>
-          <a:p>
-            <a:endParaRPr lang="fr-FR"/>
-          </a:p>
-        </p:txBody>
-      </p:sp>
-      <p:sp>
-        <p:nvSpPr>
-          <p:cNvPr id="183" name="AutoShape 154"/>
-          <p:cNvSpPr>
-            <a:spLocks noChangeArrowheads="1"/>
-          </p:cNvSpPr>
-          <p:nvPr/>
-        </p:nvSpPr>
-        <p:spPr bwMode="auto">
-          <a:xfrm>
-            <a:off x="4680272" y="2483693"/>
-            <a:ext cx="139700" cy="147638"/>
-          </a:xfrm>
-          <a:prstGeom prst="diamond">
-            <a:avLst/>
-          </a:prstGeom>
-          <a:solidFill>
-            <a:srgbClr val="FFFFFF"/>
-          </a:solidFill>
-          <a:ln w="18000" cap="flat">
-            <a:solidFill>
-              <a:srgbClr val="999999"/>
-            </a:solidFill>
-            <a:round/>
-            <a:headEnd/>
-            <a:tailEnd/>
-          </a:ln>
-          <a:effectLst/>
-          <a:extLst>
-            <a:ext uri="{AF507438-7753-43e0-B8FC-AC1667EBCBE1}">
-              <a14:hiddenEffects xmlns:a14="http://schemas.microsoft.com/office/drawing/2010/main" xmlns="">
-                <a:effectLst>
-                  <a:outerShdw blurRad="63500" dist="38099" dir="2700000" algn="ctr" rotWithShape="0">
-                    <a:srgbClr val="000000">
-                      <a:alpha val="74998"/>
-                    </a:srgbClr>
-                  </a:outerShdw>
-                </a:effectLst>
-              </a14:hiddenEffects>
-            </a:ext>
-          </a:extLst>
-        </p:spPr>
-        <p:txBody>
-          <a:bodyPr wrap="none" anchor="ctr"/>
-          <a:lstStyle/>
-          <a:p>
-            <a:endParaRPr lang="fr-FR"/>
-          </a:p>
-        </p:txBody>
-      </p:sp>
-      <p:sp>
-        <p:nvSpPr>
-          <p:cNvPr id="184" name="AutoShape 154"/>
-          <p:cNvSpPr>
-            <a:spLocks noChangeArrowheads="1"/>
-          </p:cNvSpPr>
-          <p:nvPr/>
-        </p:nvSpPr>
-        <p:spPr bwMode="auto">
-          <a:xfrm>
-            <a:off x="4032200" y="2915741"/>
-            <a:ext cx="139700" cy="147638"/>
-          </a:xfrm>
-          <a:prstGeom prst="diamond">
-            <a:avLst/>
-          </a:prstGeom>
-          <a:solidFill>
-            <a:srgbClr val="FFFFFF"/>
-          </a:solidFill>
-          <a:ln w="18000" cap="flat">
-            <a:solidFill>
-              <a:srgbClr val="999999"/>
-            </a:solidFill>
-            <a:round/>
-            <a:headEnd/>
-            <a:tailEnd/>
-          </a:ln>
-          <a:effectLst/>
-          <a:extLst>
-            <a:ext uri="{AF507438-7753-43e0-B8FC-AC1667EBCBE1}">
-              <a14:hiddenEffects xmlns:a14="http://schemas.microsoft.com/office/drawing/2010/main" xmlns="">
-                <a:effectLst>
-                  <a:outerShdw blurRad="63500" dist="38099" dir="2700000" algn="ctr" rotWithShape="0">
-                    <a:srgbClr val="000000">
-                      <a:alpha val="74998"/>
-                    </a:srgbClr>
-                  </a:outerShdw>
-                </a:effectLst>
-              </a14:hiddenEffects>
-            </a:ext>
-          </a:extLst>
-        </p:spPr>
-        <p:txBody>
-          <a:bodyPr wrap="none" anchor="ctr"/>
-          <a:lstStyle/>
-          <a:p>
-            <a:endParaRPr lang="fr-FR"/>
-          </a:p>
-        </p:txBody>
-      </p:sp>
-      <p:sp>
-        <p:nvSpPr>
-          <p:cNvPr id="185" name="AutoShape 154"/>
-          <p:cNvSpPr>
-            <a:spLocks noChangeArrowheads="1"/>
-          </p:cNvSpPr>
-          <p:nvPr/>
-        </p:nvSpPr>
-        <p:spPr bwMode="auto">
-          <a:xfrm>
-            <a:off x="3744168" y="3419797"/>
-            <a:ext cx="139700" cy="147638"/>
-          </a:xfrm>
-          <a:prstGeom prst="diamond">
-            <a:avLst/>
-          </a:prstGeom>
-          <a:solidFill>
-            <a:srgbClr val="FFFFFF"/>
-          </a:solidFill>
-          <a:ln w="18000" cap="flat">
-            <a:solidFill>
-              <a:srgbClr val="999999"/>
-            </a:solidFill>
-            <a:round/>
-            <a:headEnd/>
-            <a:tailEnd/>
-          </a:ln>
-          <a:effectLst/>
-          <a:extLst>
-            <a:ext uri="{AF507438-7753-43e0-B8FC-AC1667EBCBE1}">
-              <a14:hiddenEffects xmlns:a14="http://schemas.microsoft.com/office/drawing/2010/main" xmlns="">
-                <a:effectLst>
-                  <a:outerShdw blurRad="63500" dist="38099" dir="2700000" algn="ctr" rotWithShape="0">
-                    <a:srgbClr val="000000">
-                      <a:alpha val="74998"/>
-                    </a:srgbClr>
-                  </a:outerShdw>
-                </a:effectLst>
-              </a14:hiddenEffects>
-            </a:ext>
-          </a:extLst>
-        </p:spPr>
-        <p:txBody>
-          <a:bodyPr wrap="none" anchor="ctr"/>
-          <a:lstStyle/>
-          <a:p>
-            <a:endParaRPr lang="fr-FR"/>
-          </a:p>
-        </p:txBody>
-      </p:sp>
-      <p:sp>
-        <p:nvSpPr>
-          <p:cNvPr id="186" name="AutoShape 154"/>
-          <p:cNvSpPr>
-            <a:spLocks noChangeArrowheads="1"/>
-          </p:cNvSpPr>
-          <p:nvPr/>
-        </p:nvSpPr>
-        <p:spPr bwMode="auto">
-          <a:xfrm>
-            <a:off x="7776616" y="2051645"/>
-            <a:ext cx="139700" cy="147638"/>
-          </a:xfrm>
-          <a:prstGeom prst="diamond">
-            <a:avLst/>
-          </a:prstGeom>
-          <a:solidFill>
-            <a:srgbClr val="FFFFFF"/>
-          </a:solidFill>
-          <a:ln w="18000" cap="flat">
-            <a:solidFill>
-              <a:srgbClr val="999999"/>
-            </a:solidFill>
-            <a:round/>
-            <a:headEnd/>
-            <a:tailEnd/>
-          </a:ln>
-          <a:effectLst/>
-          <a:extLst>
-            <a:ext uri="{AF507438-7753-43e0-B8FC-AC1667EBCBE1}">
-              <a14:hiddenEffects xmlns:a14="http://schemas.microsoft.com/office/drawing/2010/main" xmlns="">
-                <a:effectLst>
-                  <a:outerShdw blurRad="63500" dist="38099" dir="2700000" algn="ctr" rotWithShape="0">
-                    <a:srgbClr val="000000">
-                      <a:alpha val="74998"/>
-                    </a:srgbClr>
-                  </a:outerShdw>
-                </a:effectLst>
-              </a14:hiddenEffects>
-            </a:ext>
-          </a:extLst>
-        </p:spPr>
-        <p:txBody>
-          <a:bodyPr wrap="none" anchor="ctr"/>
-          <a:lstStyle/>
-          <a:p>
-            <a:endParaRPr lang="fr-FR"/>
-          </a:p>
-        </p:txBody>
-      </p:sp>
-      <p:sp>
-        <p:nvSpPr>
-          <p:cNvPr id="187" name="AutoShape 154"/>
-          <p:cNvSpPr>
-            <a:spLocks noChangeArrowheads="1"/>
-          </p:cNvSpPr>
-          <p:nvPr/>
-        </p:nvSpPr>
-        <p:spPr bwMode="auto">
-          <a:xfrm>
-            <a:off x="2880072" y="467469"/>
-            <a:ext cx="139700" cy="147638"/>
-          </a:xfrm>
-          <a:prstGeom prst="diamond">
-            <a:avLst/>
-          </a:prstGeom>
-          <a:solidFill>
-            <a:srgbClr val="FFFFFF"/>
-          </a:solidFill>
-          <a:ln w="18000" cap="flat">
-            <a:solidFill>
-              <a:srgbClr val="999999"/>
-            </a:solidFill>
-            <a:round/>
-            <a:headEnd/>
-            <a:tailEnd/>
-          </a:ln>
-          <a:effectLst/>
-          <a:extLst>
-            <a:ext uri="{AF507438-7753-43e0-B8FC-AC1667EBCBE1}">
-              <a14:hiddenEffects xmlns:a14="http://schemas.microsoft.com/office/drawing/2010/main" xmlns="">
-                <a:effectLst>
-                  <a:outerShdw blurRad="63500" dist="38099" dir="2700000" algn="ctr" rotWithShape="0">
-                    <a:srgbClr val="000000">
-                      <a:alpha val="74998"/>
-                    </a:srgbClr>
-                  </a:outerShdw>
-                </a:effectLst>
-              </a14:hiddenEffects>
-            </a:ext>
-          </a:extLst>
-        </p:spPr>
-        <p:txBody>
-          <a:bodyPr wrap="none" anchor="ctr"/>
-          <a:lstStyle/>
-          <a:p>
-            <a:endParaRPr lang="fr-FR"/>
-          </a:p>
-        </p:txBody>
-      </p:sp>
-      <p:sp>
-        <p:nvSpPr>
-          <p:cNvPr id="188" name="AutoShape 154"/>
-          <p:cNvSpPr>
-            <a:spLocks noChangeArrowheads="1"/>
-          </p:cNvSpPr>
-          <p:nvPr/>
-        </p:nvSpPr>
-        <p:spPr bwMode="auto">
-          <a:xfrm>
-            <a:off x="2880072" y="899517"/>
-            <a:ext cx="139700" cy="147638"/>
-          </a:xfrm>
-          <a:prstGeom prst="diamond">
-            <a:avLst/>
-          </a:prstGeom>
-          <a:solidFill>
-            <a:srgbClr val="FFFFFF"/>
-          </a:solidFill>
-          <a:ln w="18000" cap="flat">
-            <a:solidFill>
-              <a:srgbClr val="999999"/>
-            </a:solidFill>
-            <a:round/>
-            <a:headEnd/>
-            <a:tailEnd/>
-          </a:ln>
-          <a:effectLst/>
-          <a:extLst>
-            <a:ext uri="{AF507438-7753-43e0-B8FC-AC1667EBCBE1}">
-              <a14:hiddenEffects xmlns:a14="http://schemas.microsoft.com/office/drawing/2010/main" xmlns="">
-                <a:effectLst>
-                  <a:outerShdw blurRad="63500" dist="38099" dir="2700000" algn="ctr" rotWithShape="0">
-                    <a:srgbClr val="000000">
-                      <a:alpha val="74998"/>
-                    </a:srgbClr>
-                  </a:outerShdw>
-                </a:effectLst>
-              </a14:hiddenEffects>
-            </a:ext>
-          </a:extLst>
-        </p:spPr>
-        <p:txBody>
-          <a:bodyPr wrap="none" anchor="ctr"/>
-          <a:lstStyle/>
-          <a:p>
-            <a:endParaRPr lang="fr-FR"/>
-          </a:p>
-        </p:txBody>
-      </p:sp>
-      <p:sp>
-        <p:nvSpPr>
-          <p:cNvPr id="189" name="AutoShape 154"/>
-          <p:cNvSpPr>
-            <a:spLocks noChangeArrowheads="1"/>
-          </p:cNvSpPr>
-          <p:nvPr/>
-        </p:nvSpPr>
-        <p:spPr bwMode="auto">
-          <a:xfrm>
-            <a:off x="3384128" y="2123653"/>
-            <a:ext cx="139700" cy="147638"/>
-          </a:xfrm>
-          <a:prstGeom prst="diamond">
-            <a:avLst/>
-          </a:prstGeom>
-          <a:solidFill>
-            <a:srgbClr val="FFFFFF"/>
-          </a:solidFill>
-          <a:ln w="18000" cap="flat">
-            <a:solidFill>
-              <a:srgbClr val="999999"/>
-            </a:solidFill>
-            <a:round/>
-            <a:headEnd/>
-            <a:tailEnd/>
-          </a:ln>
-          <a:effectLst/>
-          <a:extLst>
-            <a:ext uri="{AF507438-7753-43e0-B8FC-AC1667EBCBE1}">
-              <a14:hiddenEffects xmlns:a14="http://schemas.microsoft.com/office/drawing/2010/main" xmlns="">
-                <a:effectLst>
-                  <a:outerShdw blurRad="63500" dist="38099" dir="2700000" algn="ctr" rotWithShape="0">
-                    <a:srgbClr val="000000">
-                      <a:alpha val="74998"/>
-                    </a:srgbClr>
-                  </a:outerShdw>
-                </a:effectLst>
-              </a14:hiddenEffects>
-            </a:ext>
-          </a:extLst>
-        </p:spPr>
-        <p:txBody>
-          <a:bodyPr wrap="none" anchor="ctr"/>
-          <a:lstStyle/>
-          <a:p>
-            <a:endParaRPr lang="fr-FR"/>
-          </a:p>
-        </p:txBody>
-      </p:sp>
-      <p:sp>
-        <p:nvSpPr>
-          <p:cNvPr id="190" name="AutoShape 154"/>
-          <p:cNvSpPr>
-            <a:spLocks noChangeArrowheads="1"/>
-          </p:cNvSpPr>
-          <p:nvPr/>
-        </p:nvSpPr>
-        <p:spPr bwMode="auto">
-          <a:xfrm>
-            <a:off x="2880072" y="1475581"/>
-            <a:ext cx="139700" cy="147638"/>
-          </a:xfrm>
-          <a:prstGeom prst="diamond">
-            <a:avLst/>
-          </a:prstGeom>
-          <a:solidFill>
-            <a:srgbClr val="FFFFFF"/>
-          </a:solidFill>
-          <a:ln w="18000" cap="flat">
-            <a:solidFill>
-              <a:srgbClr val="999999"/>
-            </a:solidFill>
-            <a:round/>
-            <a:headEnd/>
-            <a:tailEnd/>
-          </a:ln>
-          <a:effectLst/>
-          <a:extLst>
-            <a:ext uri="{AF507438-7753-43e0-B8FC-AC1667EBCBE1}">
-              <a14:hiddenEffects xmlns:a14="http://schemas.microsoft.com/office/drawing/2010/main" xmlns="">
-                <a:effectLst>
-                  <a:outerShdw blurRad="63500" dist="38099" dir="2700000" algn="ctr" rotWithShape="0">
-                    <a:srgbClr val="000000">
-                      <a:alpha val="74998"/>
-                    </a:srgbClr>
-                  </a:outerShdw>
-                </a:effectLst>
-              </a14:hiddenEffects>
-            </a:ext>
-          </a:extLst>
-        </p:spPr>
-        <p:txBody>
-          <a:bodyPr wrap="none" anchor="ctr"/>
-          <a:lstStyle/>
-          <a:p>
-            <a:endParaRPr lang="fr-FR"/>
-          </a:p>
-        </p:txBody>
-      </p:sp>
-      <p:sp>
-        <p:nvSpPr>
-          <p:cNvPr id="191" name="AutoShape 154"/>
-          <p:cNvSpPr>
-            <a:spLocks noChangeArrowheads="1"/>
-          </p:cNvSpPr>
-          <p:nvPr/>
-        </p:nvSpPr>
-        <p:spPr bwMode="auto">
-          <a:xfrm>
-            <a:off x="2376016" y="971525"/>
-            <a:ext cx="139700" cy="147638"/>
-          </a:xfrm>
-          <a:prstGeom prst="diamond">
-            <a:avLst/>
-          </a:prstGeom>
-          <a:solidFill>
-            <a:srgbClr val="FFFFFF"/>
-          </a:solidFill>
-          <a:ln w="18000" cap="flat">
-            <a:solidFill>
-              <a:srgbClr val="999999"/>
-            </a:solidFill>
-            <a:round/>
-            <a:headEnd/>
-            <a:tailEnd/>
-          </a:ln>
-          <a:effectLst/>
-          <a:extLst>
-            <a:ext uri="{AF507438-7753-43e0-B8FC-AC1667EBCBE1}">
-              <a14:hiddenEffects xmlns:a14="http://schemas.microsoft.com/office/drawing/2010/main" xmlns="">
-                <a:effectLst>
-                  <a:outerShdw blurRad="63500" dist="38099" dir="2700000" algn="ctr" rotWithShape="0">
-                    <a:srgbClr val="000000">
-                      <a:alpha val="74998"/>
-                    </a:srgbClr>
-                  </a:outerShdw>
-                </a:effectLst>
-              </a14:hiddenEffects>
-            </a:ext>
-          </a:extLst>
-        </p:spPr>
-        <p:txBody>
-          <a:bodyPr wrap="none" anchor="ctr"/>
-          <a:lstStyle/>
-          <a:p>
-            <a:endParaRPr lang="fr-FR"/>
-          </a:p>
-        </p:txBody>
-      </p:sp>
-      <p:sp>
-        <p:nvSpPr>
-          <p:cNvPr id="192" name="AutoShape 154"/>
-          <p:cNvSpPr>
-            <a:spLocks noChangeArrowheads="1"/>
-          </p:cNvSpPr>
-          <p:nvPr/>
-        </p:nvSpPr>
-        <p:spPr bwMode="auto">
-          <a:xfrm>
-            <a:off x="1871960" y="4211885"/>
-            <a:ext cx="139700" cy="147638"/>
-          </a:xfrm>
-          <a:prstGeom prst="diamond">
-            <a:avLst/>
-          </a:prstGeom>
-          <a:solidFill>
-            <a:srgbClr val="FFFFFF"/>
-          </a:solidFill>
-          <a:ln w="18000" cap="flat">
-            <a:solidFill>
-              <a:srgbClr val="999999"/>
-            </a:solidFill>
-            <a:round/>
-            <a:headEnd/>
-            <a:tailEnd/>
-          </a:ln>
-          <a:effectLst/>
-          <a:extLst>
-            <a:ext uri="{AF507438-7753-43e0-B8FC-AC1667EBCBE1}">
-              <a14:hiddenEffects xmlns:a14="http://schemas.microsoft.com/office/drawing/2010/main" xmlns="">
-                <a:effectLst>
-                  <a:outerShdw blurRad="63500" dist="38099" dir="2700000" algn="ctr" rotWithShape="0">
-                    <a:srgbClr val="000000">
-                      <a:alpha val="74998"/>
-                    </a:srgbClr>
-                  </a:outerShdw>
-                </a:effectLst>
-              </a14:hiddenEffects>
-            </a:ext>
-          </a:extLst>
-        </p:spPr>
-        <p:txBody>
-          <a:bodyPr wrap="none" anchor="ctr"/>
-          <a:lstStyle/>
-          <a:p>
-            <a:endParaRPr lang="fr-FR"/>
-          </a:p>
-        </p:txBody>
-      </p:sp>
-      <p:sp>
-        <p:nvSpPr>
-          <p:cNvPr id="193" name="AutoShape 154"/>
-          <p:cNvSpPr>
-            <a:spLocks noChangeArrowheads="1"/>
-          </p:cNvSpPr>
-          <p:nvPr/>
-        </p:nvSpPr>
-        <p:spPr bwMode="auto">
-          <a:xfrm>
-            <a:off x="4896296" y="4427909"/>
-            <a:ext cx="139700" cy="147638"/>
-          </a:xfrm>
-          <a:prstGeom prst="diamond">
-            <a:avLst/>
-          </a:prstGeom>
-          <a:solidFill>
-            <a:srgbClr val="FFFFFF"/>
-          </a:solidFill>
-          <a:ln w="18000" cap="flat">
-            <a:solidFill>
-              <a:srgbClr val="999999"/>
-            </a:solidFill>
-            <a:round/>
-            <a:headEnd/>
-            <a:tailEnd/>
-          </a:ln>
-          <a:effectLst/>
-          <a:extLst>
-            <a:ext uri="{AF507438-7753-43e0-B8FC-AC1667EBCBE1}">
-              <a14:hiddenEffects xmlns:a14="http://schemas.microsoft.com/office/drawing/2010/main" xmlns="">
+              <a14:hiddenEffects xmlns="" xmlns:a14="http://schemas.microsoft.com/office/drawing/2010/main">
                 <a:effectLst>
                   <a:outerShdw blurRad="63500" dist="38099" dir="2700000" algn="ctr" rotWithShape="0">
                     <a:srgbClr val="000000">
@@ -23681,8 +22394,8 @@
         </p:nvSpPr>
         <p:spPr>
           <a:xfrm>
-            <a:off x="4350608" y="5877840"/>
-            <a:ext cx="2237699" cy="610783"/>
+            <a:off x="4158845" y="5877840"/>
+            <a:ext cx="2621230" cy="349968"/>
           </a:xfrm>
           <a:prstGeom prst="rect">
             <a:avLst/>
@@ -23698,23 +22411,1072 @@
             <a:pPr algn="ctr"/>
             <a:r>
               <a:rPr lang="fr-FR" dirty="0"/>
-              <a:t>Stade </a:t>
+              <a:t>Stade national de Pékin</a:t>
             </a:r>
-            <a:r>
-              <a:rPr lang="fr-FR" dirty="0" err="1"/>
-              <a:t>Nilton</a:t>
-            </a:r>
-            <a:r>
-              <a:rPr lang="fr-FR" dirty="0"/>
-              <a:t>-Santos</a:t>
-            </a:r>
-            <a:br>
-              <a:rPr lang="fr-FR" dirty="0"/>
-            </a:br>
-            <a:r>
-              <a:rPr lang="fr-FR" dirty="0"/>
-              <a:t>Rio de Janeiro</a:t>
-            </a:r>
+          </a:p>
+        </p:txBody>
+      </p:sp>
+      <p:sp>
+        <p:nvSpPr>
+          <p:cNvPr id="7" name="AutoShape 150">
+            <a:extLst>
+              <a:ext uri="{FF2B5EF4-FFF2-40B4-BE49-F238E27FC236}">
+                <a16:creationId xmlns:a16="http://schemas.microsoft.com/office/drawing/2014/main" id="{1803D4F1-8BA2-A1C4-0544-C9D1FD2CCCB5}"/>
+              </a:ext>
+            </a:extLst>
+          </p:cNvPr>
+          <p:cNvSpPr>
+            <a:spLocks noChangeArrowheads="1"/>
+          </p:cNvSpPr>
+          <p:nvPr/>
+        </p:nvSpPr>
+        <p:spPr bwMode="auto">
+          <a:xfrm>
+            <a:off x="5001836" y="4440238"/>
+            <a:ext cx="139700" cy="147637"/>
+          </a:xfrm>
+          <a:prstGeom prst="diamond">
+            <a:avLst/>
+          </a:prstGeom>
+          <a:solidFill>
+            <a:srgbClr val="FFFFFF"/>
+          </a:solidFill>
+          <a:ln w="18000" cap="flat">
+            <a:solidFill>
+              <a:srgbClr val="000000"/>
+            </a:solidFill>
+            <a:round/>
+            <a:headEnd/>
+            <a:tailEnd/>
+          </a:ln>
+          <a:effectLst/>
+          <a:extLst>
+            <a:ext uri="{AF507438-7753-43e0-B8FC-AC1667EBCBE1}">
+              <a14:hiddenEffects xmlns="" xmlns:a14="http://schemas.microsoft.com/office/drawing/2010/main">
+                <a:effectLst>
+                  <a:outerShdw blurRad="63500" dist="38099" dir="2700000" algn="ctr" rotWithShape="0">
+                    <a:srgbClr val="000000">
+                      <a:alpha val="74998"/>
+                    </a:srgbClr>
+                  </a:outerShdw>
+                </a:effectLst>
+              </a14:hiddenEffects>
+            </a:ext>
+          </a:extLst>
+        </p:spPr>
+        <p:txBody>
+          <a:bodyPr wrap="none" anchor="ctr"/>
+          <a:lstStyle/>
+          <a:p>
+            <a:endParaRPr lang="fr-FR"/>
+          </a:p>
+        </p:txBody>
+      </p:sp>
+      <p:sp>
+        <p:nvSpPr>
+          <p:cNvPr id="8" name="AutoShape 150">
+            <a:extLst>
+              <a:ext uri="{FF2B5EF4-FFF2-40B4-BE49-F238E27FC236}">
+                <a16:creationId xmlns:a16="http://schemas.microsoft.com/office/drawing/2014/main" id="{D7F24293-7925-6727-1ADB-02D779D387E7}"/>
+              </a:ext>
+            </a:extLst>
+          </p:cNvPr>
+          <p:cNvSpPr>
+            <a:spLocks noChangeArrowheads="1"/>
+          </p:cNvSpPr>
+          <p:nvPr/>
+        </p:nvSpPr>
+        <p:spPr bwMode="auto">
+          <a:xfrm>
+            <a:off x="5067554" y="4645025"/>
+            <a:ext cx="139700" cy="147637"/>
+          </a:xfrm>
+          <a:prstGeom prst="diamond">
+            <a:avLst/>
+          </a:prstGeom>
+          <a:solidFill>
+            <a:srgbClr val="FFFFFF"/>
+          </a:solidFill>
+          <a:ln w="18000" cap="flat">
+            <a:solidFill>
+              <a:srgbClr val="000000"/>
+            </a:solidFill>
+            <a:round/>
+            <a:headEnd/>
+            <a:tailEnd/>
+          </a:ln>
+          <a:effectLst/>
+          <a:extLst>
+            <a:ext uri="{AF507438-7753-43e0-B8FC-AC1667EBCBE1}">
+              <a14:hiddenEffects xmlns="" xmlns:a14="http://schemas.microsoft.com/office/drawing/2010/main">
+                <a:effectLst>
+                  <a:outerShdw blurRad="63500" dist="38099" dir="2700000" algn="ctr" rotWithShape="0">
+                    <a:srgbClr val="000000">
+                      <a:alpha val="74998"/>
+                    </a:srgbClr>
+                  </a:outerShdw>
+                </a:effectLst>
+              </a14:hiddenEffects>
+            </a:ext>
+          </a:extLst>
+        </p:spPr>
+        <p:txBody>
+          <a:bodyPr wrap="none" anchor="ctr"/>
+          <a:lstStyle/>
+          <a:p>
+            <a:endParaRPr lang="fr-FR"/>
+          </a:p>
+        </p:txBody>
+      </p:sp>
+      <p:sp>
+        <p:nvSpPr>
+          <p:cNvPr id="9" name="AutoShape 150">
+            <a:extLst>
+              <a:ext uri="{FF2B5EF4-FFF2-40B4-BE49-F238E27FC236}">
+                <a16:creationId xmlns:a16="http://schemas.microsoft.com/office/drawing/2014/main" id="{8B094F90-3315-00F0-7A93-80F03157CE6B}"/>
+              </a:ext>
+            </a:extLst>
+          </p:cNvPr>
+          <p:cNvSpPr>
+            <a:spLocks noChangeArrowheads="1"/>
+          </p:cNvSpPr>
+          <p:nvPr/>
+        </p:nvSpPr>
+        <p:spPr bwMode="auto">
+          <a:xfrm>
+            <a:off x="5699706" y="2925763"/>
+            <a:ext cx="139700" cy="147637"/>
+          </a:xfrm>
+          <a:prstGeom prst="diamond">
+            <a:avLst/>
+          </a:prstGeom>
+          <a:solidFill>
+            <a:srgbClr val="FFFFFF"/>
+          </a:solidFill>
+          <a:ln w="18000" cap="flat">
+            <a:solidFill>
+              <a:srgbClr val="000000"/>
+            </a:solidFill>
+            <a:round/>
+            <a:headEnd/>
+            <a:tailEnd/>
+          </a:ln>
+          <a:effectLst/>
+          <a:extLst>
+            <a:ext uri="{AF507438-7753-43e0-B8FC-AC1667EBCBE1}">
+              <a14:hiddenEffects xmlns="" xmlns:a14="http://schemas.microsoft.com/office/drawing/2010/main">
+                <a:effectLst>
+                  <a:outerShdw blurRad="63500" dist="38099" dir="2700000" algn="ctr" rotWithShape="0">
+                    <a:srgbClr val="000000">
+                      <a:alpha val="74998"/>
+                    </a:srgbClr>
+                  </a:outerShdw>
+                </a:effectLst>
+              </a14:hiddenEffects>
+            </a:ext>
+          </a:extLst>
+        </p:spPr>
+        <p:txBody>
+          <a:bodyPr wrap="none" anchor="ctr"/>
+          <a:lstStyle/>
+          <a:p>
+            <a:endParaRPr lang="fr-FR"/>
+          </a:p>
+        </p:txBody>
+      </p:sp>
+      <p:sp>
+        <p:nvSpPr>
+          <p:cNvPr id="10" name="AutoShape 150">
+            <a:extLst>
+              <a:ext uri="{FF2B5EF4-FFF2-40B4-BE49-F238E27FC236}">
+                <a16:creationId xmlns:a16="http://schemas.microsoft.com/office/drawing/2014/main" id="{121D8548-2D40-9F83-17C8-E9F5C4A70622}"/>
+              </a:ext>
+            </a:extLst>
+          </p:cNvPr>
+          <p:cNvSpPr>
+            <a:spLocks noChangeArrowheads="1"/>
+          </p:cNvSpPr>
+          <p:nvPr/>
+        </p:nvSpPr>
+        <p:spPr bwMode="auto">
+          <a:xfrm>
+            <a:off x="4710113" y="2538236"/>
+            <a:ext cx="139700" cy="147637"/>
+          </a:xfrm>
+          <a:prstGeom prst="diamond">
+            <a:avLst/>
+          </a:prstGeom>
+          <a:solidFill>
+            <a:srgbClr val="FFFFFF"/>
+          </a:solidFill>
+          <a:ln w="18000" cap="flat">
+            <a:solidFill>
+              <a:srgbClr val="000000"/>
+            </a:solidFill>
+            <a:round/>
+            <a:headEnd/>
+            <a:tailEnd/>
+          </a:ln>
+          <a:effectLst/>
+          <a:extLst>
+            <a:ext uri="{AF507438-7753-43e0-B8FC-AC1667EBCBE1}">
+              <a14:hiddenEffects xmlns="" xmlns:a14="http://schemas.microsoft.com/office/drawing/2010/main">
+                <a:effectLst>
+                  <a:outerShdw blurRad="63500" dist="38099" dir="2700000" algn="ctr" rotWithShape="0">
+                    <a:srgbClr val="000000">
+                      <a:alpha val="74998"/>
+                    </a:srgbClr>
+                  </a:outerShdw>
+                </a:effectLst>
+              </a14:hiddenEffects>
+            </a:ext>
+          </a:extLst>
+        </p:spPr>
+        <p:txBody>
+          <a:bodyPr wrap="none" anchor="ctr"/>
+          <a:lstStyle/>
+          <a:p>
+            <a:endParaRPr lang="fr-FR"/>
+          </a:p>
+        </p:txBody>
+      </p:sp>
+      <p:sp>
+        <p:nvSpPr>
+          <p:cNvPr id="11" name="AutoShape 150">
+            <a:extLst>
+              <a:ext uri="{FF2B5EF4-FFF2-40B4-BE49-F238E27FC236}">
+                <a16:creationId xmlns:a16="http://schemas.microsoft.com/office/drawing/2014/main" id="{922F640C-9F8E-840D-7DC9-EB19DC33202C}"/>
+              </a:ext>
+            </a:extLst>
+          </p:cNvPr>
+          <p:cNvSpPr>
+            <a:spLocks noChangeArrowheads="1"/>
+          </p:cNvSpPr>
+          <p:nvPr/>
+        </p:nvSpPr>
+        <p:spPr bwMode="auto">
+          <a:xfrm>
+            <a:off x="5182395" y="2141982"/>
+            <a:ext cx="139700" cy="147637"/>
+          </a:xfrm>
+          <a:prstGeom prst="diamond">
+            <a:avLst/>
+          </a:prstGeom>
+          <a:solidFill>
+            <a:srgbClr val="FFFFFF"/>
+          </a:solidFill>
+          <a:ln w="18000" cap="flat">
+            <a:solidFill>
+              <a:srgbClr val="000000"/>
+            </a:solidFill>
+            <a:round/>
+            <a:headEnd/>
+            <a:tailEnd/>
+          </a:ln>
+          <a:effectLst/>
+          <a:extLst>
+            <a:ext uri="{AF507438-7753-43e0-B8FC-AC1667EBCBE1}">
+              <a14:hiddenEffects xmlns="" xmlns:a14="http://schemas.microsoft.com/office/drawing/2010/main">
+                <a:effectLst>
+                  <a:outerShdw blurRad="63500" dist="38099" dir="2700000" algn="ctr" rotWithShape="0">
+                    <a:srgbClr val="000000">
+                      <a:alpha val="74998"/>
+                    </a:srgbClr>
+                  </a:outerShdw>
+                </a:effectLst>
+              </a14:hiddenEffects>
+            </a:ext>
+          </a:extLst>
+        </p:spPr>
+        <p:txBody>
+          <a:bodyPr wrap="none" anchor="ctr"/>
+          <a:lstStyle/>
+          <a:p>
+            <a:endParaRPr lang="fr-FR"/>
+          </a:p>
+        </p:txBody>
+      </p:sp>
+      <p:sp>
+        <p:nvSpPr>
+          <p:cNvPr id="12" name="AutoShape 150">
+            <a:extLst>
+              <a:ext uri="{FF2B5EF4-FFF2-40B4-BE49-F238E27FC236}">
+                <a16:creationId xmlns:a16="http://schemas.microsoft.com/office/drawing/2014/main" id="{D21AFE59-419C-024E-D1C6-B29D94F409AB}"/>
+              </a:ext>
+            </a:extLst>
+          </p:cNvPr>
+          <p:cNvSpPr>
+            <a:spLocks noChangeArrowheads="1"/>
+          </p:cNvSpPr>
+          <p:nvPr/>
+        </p:nvSpPr>
+        <p:spPr bwMode="auto">
+          <a:xfrm>
+            <a:off x="4383882" y="1676783"/>
+            <a:ext cx="139700" cy="147637"/>
+          </a:xfrm>
+          <a:prstGeom prst="diamond">
+            <a:avLst/>
+          </a:prstGeom>
+          <a:solidFill>
+            <a:srgbClr val="FFFFFF"/>
+          </a:solidFill>
+          <a:ln w="18000" cap="flat">
+            <a:solidFill>
+              <a:srgbClr val="000000"/>
+            </a:solidFill>
+            <a:round/>
+            <a:headEnd/>
+            <a:tailEnd/>
+          </a:ln>
+          <a:effectLst/>
+          <a:extLst>
+            <a:ext uri="{AF507438-7753-43e0-B8FC-AC1667EBCBE1}">
+              <a14:hiddenEffects xmlns="" xmlns:a14="http://schemas.microsoft.com/office/drawing/2010/main">
+                <a:effectLst>
+                  <a:outerShdw blurRad="63500" dist="38099" dir="2700000" algn="ctr" rotWithShape="0">
+                    <a:srgbClr val="000000">
+                      <a:alpha val="74998"/>
+                    </a:srgbClr>
+                  </a:outerShdw>
+                </a:effectLst>
+              </a14:hiddenEffects>
+            </a:ext>
+          </a:extLst>
+        </p:spPr>
+        <p:txBody>
+          <a:bodyPr wrap="none" anchor="ctr"/>
+          <a:lstStyle/>
+          <a:p>
+            <a:endParaRPr lang="fr-FR"/>
+          </a:p>
+        </p:txBody>
+      </p:sp>
+      <p:sp>
+        <p:nvSpPr>
+          <p:cNvPr id="13" name="AutoShape 150">
+            <a:extLst>
+              <a:ext uri="{FF2B5EF4-FFF2-40B4-BE49-F238E27FC236}">
+                <a16:creationId xmlns:a16="http://schemas.microsoft.com/office/drawing/2014/main" id="{880B8447-5C9F-FD48-FFA8-86F99B8F141A}"/>
+              </a:ext>
+            </a:extLst>
+          </p:cNvPr>
+          <p:cNvSpPr>
+            <a:spLocks noChangeArrowheads="1"/>
+          </p:cNvSpPr>
+          <p:nvPr/>
+        </p:nvSpPr>
+        <p:spPr bwMode="auto">
+          <a:xfrm>
+            <a:off x="7793029" y="2068163"/>
+            <a:ext cx="139700" cy="147637"/>
+          </a:xfrm>
+          <a:prstGeom prst="diamond">
+            <a:avLst/>
+          </a:prstGeom>
+          <a:solidFill>
+            <a:srgbClr val="FFFFFF"/>
+          </a:solidFill>
+          <a:ln w="18000" cap="flat">
+            <a:solidFill>
+              <a:srgbClr val="000000"/>
+            </a:solidFill>
+            <a:round/>
+            <a:headEnd/>
+            <a:tailEnd/>
+          </a:ln>
+          <a:effectLst/>
+          <a:extLst>
+            <a:ext uri="{AF507438-7753-43e0-B8FC-AC1667EBCBE1}">
+              <a14:hiddenEffects xmlns="" xmlns:a14="http://schemas.microsoft.com/office/drawing/2010/main">
+                <a:effectLst>
+                  <a:outerShdw blurRad="63500" dist="38099" dir="2700000" algn="ctr" rotWithShape="0">
+                    <a:srgbClr val="000000">
+                      <a:alpha val="74998"/>
+                    </a:srgbClr>
+                  </a:outerShdw>
+                </a:effectLst>
+              </a14:hiddenEffects>
+            </a:ext>
+          </a:extLst>
+        </p:spPr>
+        <p:txBody>
+          <a:bodyPr wrap="none" anchor="ctr"/>
+          <a:lstStyle/>
+          <a:p>
+            <a:endParaRPr lang="fr-FR"/>
+          </a:p>
+        </p:txBody>
+      </p:sp>
+      <p:sp>
+        <p:nvSpPr>
+          <p:cNvPr id="14" name="AutoShape 150">
+            <a:extLst>
+              <a:ext uri="{FF2B5EF4-FFF2-40B4-BE49-F238E27FC236}">
+                <a16:creationId xmlns:a16="http://schemas.microsoft.com/office/drawing/2014/main" id="{40FF1EBA-8B90-2931-824F-ABA118CC0618}"/>
+              </a:ext>
+            </a:extLst>
+          </p:cNvPr>
+          <p:cNvSpPr>
+            <a:spLocks noChangeArrowheads="1"/>
+          </p:cNvSpPr>
+          <p:nvPr/>
+        </p:nvSpPr>
+        <p:spPr bwMode="auto">
+          <a:xfrm>
+            <a:off x="6364287" y="4056856"/>
+            <a:ext cx="139700" cy="147637"/>
+          </a:xfrm>
+          <a:prstGeom prst="diamond">
+            <a:avLst/>
+          </a:prstGeom>
+          <a:solidFill>
+            <a:srgbClr val="FFFFFF"/>
+          </a:solidFill>
+          <a:ln w="18000" cap="flat">
+            <a:solidFill>
+              <a:srgbClr val="000000"/>
+            </a:solidFill>
+            <a:round/>
+            <a:headEnd/>
+            <a:tailEnd/>
+          </a:ln>
+          <a:effectLst/>
+          <a:extLst>
+            <a:ext uri="{AF507438-7753-43e0-B8FC-AC1667EBCBE1}">
+              <a14:hiddenEffects xmlns="" xmlns:a14="http://schemas.microsoft.com/office/drawing/2010/main">
+                <a:effectLst>
+                  <a:outerShdw blurRad="63500" dist="38099" dir="2700000" algn="ctr" rotWithShape="0">
+                    <a:srgbClr val="000000">
+                      <a:alpha val="74998"/>
+                    </a:srgbClr>
+                  </a:outerShdw>
+                </a:effectLst>
+              </a14:hiddenEffects>
+            </a:ext>
+          </a:extLst>
+        </p:spPr>
+        <p:txBody>
+          <a:bodyPr wrap="none" anchor="ctr"/>
+          <a:lstStyle/>
+          <a:p>
+            <a:endParaRPr lang="fr-FR"/>
+          </a:p>
+        </p:txBody>
+      </p:sp>
+      <p:sp>
+        <p:nvSpPr>
+          <p:cNvPr id="15" name="AutoShape 150">
+            <a:extLst>
+              <a:ext uri="{FF2B5EF4-FFF2-40B4-BE49-F238E27FC236}">
+                <a16:creationId xmlns:a16="http://schemas.microsoft.com/office/drawing/2014/main" id="{9C0833B6-3EA6-A2FA-32F7-BEC5ADE64E37}"/>
+              </a:ext>
+            </a:extLst>
+          </p:cNvPr>
+          <p:cNvSpPr>
+            <a:spLocks noChangeArrowheads="1"/>
+          </p:cNvSpPr>
+          <p:nvPr/>
+        </p:nvSpPr>
+        <p:spPr bwMode="auto">
+          <a:xfrm>
+            <a:off x="6469857" y="2149873"/>
+            <a:ext cx="139700" cy="147637"/>
+          </a:xfrm>
+          <a:prstGeom prst="diamond">
+            <a:avLst/>
+          </a:prstGeom>
+          <a:solidFill>
+            <a:srgbClr val="FFFFFF"/>
+          </a:solidFill>
+          <a:ln w="18000" cap="flat">
+            <a:solidFill>
+              <a:srgbClr val="000000"/>
+            </a:solidFill>
+            <a:round/>
+            <a:headEnd/>
+            <a:tailEnd/>
+          </a:ln>
+          <a:effectLst/>
+          <a:extLst>
+            <a:ext uri="{AF507438-7753-43e0-B8FC-AC1667EBCBE1}">
+              <a14:hiddenEffects xmlns="" xmlns:a14="http://schemas.microsoft.com/office/drawing/2010/main">
+                <a:effectLst>
+                  <a:outerShdw blurRad="63500" dist="38099" dir="2700000" algn="ctr" rotWithShape="0">
+                    <a:srgbClr val="000000">
+                      <a:alpha val="74998"/>
+                    </a:srgbClr>
+                  </a:outerShdw>
+                </a:effectLst>
+              </a14:hiddenEffects>
+            </a:ext>
+          </a:extLst>
+        </p:spPr>
+        <p:txBody>
+          <a:bodyPr wrap="none" anchor="ctr"/>
+          <a:lstStyle/>
+          <a:p>
+            <a:endParaRPr lang="fr-FR"/>
+          </a:p>
+        </p:txBody>
+      </p:sp>
+      <p:sp>
+        <p:nvSpPr>
+          <p:cNvPr id="16" name="AutoShape 150">
+            <a:extLst>
+              <a:ext uri="{FF2B5EF4-FFF2-40B4-BE49-F238E27FC236}">
+                <a16:creationId xmlns:a16="http://schemas.microsoft.com/office/drawing/2014/main" id="{90AD9680-3367-E97A-1A5A-089D5318E340}"/>
+              </a:ext>
+            </a:extLst>
+          </p:cNvPr>
+          <p:cNvSpPr>
+            <a:spLocks noChangeArrowheads="1"/>
+          </p:cNvSpPr>
+          <p:nvPr/>
+        </p:nvSpPr>
+        <p:spPr bwMode="auto">
+          <a:xfrm>
+            <a:off x="6624058" y="2643435"/>
+            <a:ext cx="139700" cy="147637"/>
+          </a:xfrm>
+          <a:prstGeom prst="diamond">
+            <a:avLst/>
+          </a:prstGeom>
+          <a:solidFill>
+            <a:srgbClr val="FFFFFF"/>
+          </a:solidFill>
+          <a:ln w="18000" cap="flat">
+            <a:solidFill>
+              <a:srgbClr val="000000"/>
+            </a:solidFill>
+            <a:round/>
+            <a:headEnd/>
+            <a:tailEnd/>
+          </a:ln>
+          <a:effectLst/>
+          <a:extLst>
+            <a:ext uri="{AF507438-7753-43e0-B8FC-AC1667EBCBE1}">
+              <a14:hiddenEffects xmlns="" xmlns:a14="http://schemas.microsoft.com/office/drawing/2010/main">
+                <a:effectLst>
+                  <a:outerShdw blurRad="63500" dist="38099" dir="2700000" algn="ctr" rotWithShape="0">
+                    <a:srgbClr val="000000">
+                      <a:alpha val="74998"/>
+                    </a:srgbClr>
+                  </a:outerShdw>
+                </a:effectLst>
+              </a14:hiddenEffects>
+            </a:ext>
+          </a:extLst>
+        </p:spPr>
+        <p:txBody>
+          <a:bodyPr wrap="none" anchor="ctr"/>
+          <a:lstStyle/>
+          <a:p>
+            <a:endParaRPr lang="fr-FR"/>
+          </a:p>
+        </p:txBody>
+      </p:sp>
+      <p:sp>
+        <p:nvSpPr>
+          <p:cNvPr id="17" name="AutoShape 150">
+            <a:extLst>
+              <a:ext uri="{FF2B5EF4-FFF2-40B4-BE49-F238E27FC236}">
+                <a16:creationId xmlns:a16="http://schemas.microsoft.com/office/drawing/2014/main" id="{B74EF668-7F9C-BBC7-D3E3-57634430A10A}"/>
+              </a:ext>
+            </a:extLst>
+          </p:cNvPr>
+          <p:cNvSpPr>
+            <a:spLocks noChangeArrowheads="1"/>
+          </p:cNvSpPr>
+          <p:nvPr/>
+        </p:nvSpPr>
+        <p:spPr bwMode="auto">
+          <a:xfrm>
+            <a:off x="4341813" y="2620963"/>
+            <a:ext cx="139700" cy="147637"/>
+          </a:xfrm>
+          <a:prstGeom prst="diamond">
+            <a:avLst/>
+          </a:prstGeom>
+          <a:solidFill>
+            <a:srgbClr val="FFFFFF"/>
+          </a:solidFill>
+          <a:ln w="18000" cap="flat">
+            <a:solidFill>
+              <a:srgbClr val="000000"/>
+            </a:solidFill>
+            <a:round/>
+            <a:headEnd/>
+            <a:tailEnd/>
+          </a:ln>
+          <a:effectLst/>
+          <a:extLst>
+            <a:ext uri="{AF507438-7753-43e0-B8FC-AC1667EBCBE1}">
+              <a14:hiddenEffects xmlns="" xmlns:a14="http://schemas.microsoft.com/office/drawing/2010/main">
+                <a:effectLst>
+                  <a:outerShdw blurRad="63500" dist="38099" dir="2700000" algn="ctr" rotWithShape="0">
+                    <a:srgbClr val="000000">
+                      <a:alpha val="74998"/>
+                    </a:srgbClr>
+                  </a:outerShdw>
+                </a:effectLst>
+              </a14:hiddenEffects>
+            </a:ext>
+          </a:extLst>
+        </p:spPr>
+        <p:txBody>
+          <a:bodyPr wrap="none" anchor="ctr"/>
+          <a:lstStyle/>
+          <a:p>
+            <a:endParaRPr lang="fr-FR"/>
+          </a:p>
+        </p:txBody>
+      </p:sp>
+      <p:sp>
+        <p:nvSpPr>
+          <p:cNvPr id="18" name="AutoShape 150">
+            <a:extLst>
+              <a:ext uri="{FF2B5EF4-FFF2-40B4-BE49-F238E27FC236}">
+                <a16:creationId xmlns:a16="http://schemas.microsoft.com/office/drawing/2014/main" id="{84B04804-C741-2FD2-6F4D-B9E581D0AA24}"/>
+              </a:ext>
+            </a:extLst>
+          </p:cNvPr>
+          <p:cNvSpPr>
+            <a:spLocks noChangeArrowheads="1"/>
+          </p:cNvSpPr>
+          <p:nvPr/>
+        </p:nvSpPr>
+        <p:spPr bwMode="auto">
+          <a:xfrm>
+            <a:off x="4037013" y="2855913"/>
+            <a:ext cx="139700" cy="147637"/>
+          </a:xfrm>
+          <a:prstGeom prst="diamond">
+            <a:avLst/>
+          </a:prstGeom>
+          <a:solidFill>
+            <a:srgbClr val="FFFFFF"/>
+          </a:solidFill>
+          <a:ln w="18000" cap="flat">
+            <a:solidFill>
+              <a:srgbClr val="000000"/>
+            </a:solidFill>
+            <a:round/>
+            <a:headEnd/>
+            <a:tailEnd/>
+          </a:ln>
+          <a:effectLst/>
+          <a:extLst>
+            <a:ext uri="{AF507438-7753-43e0-B8FC-AC1667EBCBE1}">
+              <a14:hiddenEffects xmlns="" xmlns:a14="http://schemas.microsoft.com/office/drawing/2010/main">
+                <a:effectLst>
+                  <a:outerShdw blurRad="63500" dist="38099" dir="2700000" algn="ctr" rotWithShape="0">
+                    <a:srgbClr val="000000">
+                      <a:alpha val="74998"/>
+                    </a:srgbClr>
+                  </a:outerShdw>
+                </a:effectLst>
+              </a14:hiddenEffects>
+            </a:ext>
+          </a:extLst>
+        </p:spPr>
+        <p:txBody>
+          <a:bodyPr wrap="none" anchor="ctr"/>
+          <a:lstStyle/>
+          <a:p>
+            <a:endParaRPr lang="fr-FR"/>
+          </a:p>
+        </p:txBody>
+      </p:sp>
+      <p:sp>
+        <p:nvSpPr>
+          <p:cNvPr id="19" name="AutoShape 150">
+            <a:extLst>
+              <a:ext uri="{FF2B5EF4-FFF2-40B4-BE49-F238E27FC236}">
+                <a16:creationId xmlns:a16="http://schemas.microsoft.com/office/drawing/2014/main" id="{14D5CB03-784C-7034-3F88-062DD188CA2D}"/>
+              </a:ext>
+            </a:extLst>
+          </p:cNvPr>
+          <p:cNvSpPr>
+            <a:spLocks noChangeArrowheads="1"/>
+          </p:cNvSpPr>
+          <p:nvPr/>
+        </p:nvSpPr>
+        <p:spPr bwMode="auto">
+          <a:xfrm>
+            <a:off x="3384947" y="2130001"/>
+            <a:ext cx="139700" cy="147637"/>
+          </a:xfrm>
+          <a:prstGeom prst="diamond">
+            <a:avLst/>
+          </a:prstGeom>
+          <a:solidFill>
+            <a:srgbClr val="FFFFFF"/>
+          </a:solidFill>
+          <a:ln w="18000" cap="flat">
+            <a:solidFill>
+              <a:srgbClr val="000000"/>
+            </a:solidFill>
+            <a:round/>
+            <a:headEnd/>
+            <a:tailEnd/>
+          </a:ln>
+          <a:effectLst/>
+          <a:extLst>
+            <a:ext uri="{AF507438-7753-43e0-B8FC-AC1667EBCBE1}">
+              <a14:hiddenEffects xmlns="" xmlns:a14="http://schemas.microsoft.com/office/drawing/2010/main">
+                <a:effectLst>
+                  <a:outerShdw blurRad="63500" dist="38099" dir="2700000" algn="ctr" rotWithShape="0">
+                    <a:srgbClr val="000000">
+                      <a:alpha val="74998"/>
+                    </a:srgbClr>
+                  </a:outerShdw>
+                </a:effectLst>
+              </a14:hiddenEffects>
+            </a:ext>
+          </a:extLst>
+        </p:spPr>
+        <p:txBody>
+          <a:bodyPr wrap="none" anchor="ctr"/>
+          <a:lstStyle/>
+          <a:p>
+            <a:endParaRPr lang="fr-FR"/>
+          </a:p>
+        </p:txBody>
+      </p:sp>
+      <p:sp>
+        <p:nvSpPr>
+          <p:cNvPr id="20" name="AutoShape 150">
+            <a:extLst>
+              <a:ext uri="{FF2B5EF4-FFF2-40B4-BE49-F238E27FC236}">
+                <a16:creationId xmlns:a16="http://schemas.microsoft.com/office/drawing/2014/main" id="{2B2C91E0-77B8-804F-A5A3-7E7D95F6D534}"/>
+              </a:ext>
+            </a:extLst>
+          </p:cNvPr>
+          <p:cNvSpPr>
+            <a:spLocks noChangeArrowheads="1"/>
+          </p:cNvSpPr>
+          <p:nvPr/>
+        </p:nvSpPr>
+        <p:spPr bwMode="auto">
+          <a:xfrm>
+            <a:off x="2888942" y="1485900"/>
+            <a:ext cx="139700" cy="147637"/>
+          </a:xfrm>
+          <a:prstGeom prst="diamond">
+            <a:avLst/>
+          </a:prstGeom>
+          <a:solidFill>
+            <a:srgbClr val="FFFFFF"/>
+          </a:solidFill>
+          <a:ln w="18000" cap="flat">
+            <a:solidFill>
+              <a:srgbClr val="000000"/>
+            </a:solidFill>
+            <a:round/>
+            <a:headEnd/>
+            <a:tailEnd/>
+          </a:ln>
+          <a:effectLst/>
+          <a:extLst>
+            <a:ext uri="{AF507438-7753-43e0-B8FC-AC1667EBCBE1}">
+              <a14:hiddenEffects xmlns="" xmlns:a14="http://schemas.microsoft.com/office/drawing/2010/main">
+                <a:effectLst>
+                  <a:outerShdw blurRad="63500" dist="38099" dir="2700000" algn="ctr" rotWithShape="0">
+                    <a:srgbClr val="000000">
+                      <a:alpha val="74998"/>
+                    </a:srgbClr>
+                  </a:outerShdw>
+                </a:effectLst>
+              </a14:hiddenEffects>
+            </a:ext>
+          </a:extLst>
+        </p:spPr>
+        <p:txBody>
+          <a:bodyPr wrap="none" anchor="ctr"/>
+          <a:lstStyle/>
+          <a:p>
+            <a:endParaRPr lang="fr-FR"/>
+          </a:p>
+        </p:txBody>
+      </p:sp>
+      <p:sp>
+        <p:nvSpPr>
+          <p:cNvPr id="21" name="AutoShape 150">
+            <a:extLst>
+              <a:ext uri="{FF2B5EF4-FFF2-40B4-BE49-F238E27FC236}">
+                <a16:creationId xmlns:a16="http://schemas.microsoft.com/office/drawing/2014/main" id="{0AB5DFA6-093E-1EA4-4794-FC4C94447EC8}"/>
+              </a:ext>
+            </a:extLst>
+          </p:cNvPr>
+          <p:cNvSpPr>
+            <a:spLocks noChangeArrowheads="1"/>
+          </p:cNvSpPr>
+          <p:nvPr/>
+        </p:nvSpPr>
+        <p:spPr bwMode="auto">
+          <a:xfrm>
+            <a:off x="3125787" y="501651"/>
+            <a:ext cx="139700" cy="147637"/>
+          </a:xfrm>
+          <a:prstGeom prst="diamond">
+            <a:avLst/>
+          </a:prstGeom>
+          <a:solidFill>
+            <a:srgbClr val="FFFFFF"/>
+          </a:solidFill>
+          <a:ln w="18000" cap="flat">
+            <a:solidFill>
+              <a:srgbClr val="000000"/>
+            </a:solidFill>
+            <a:round/>
+            <a:headEnd/>
+            <a:tailEnd/>
+          </a:ln>
+          <a:effectLst/>
+          <a:extLst>
+            <a:ext uri="{AF507438-7753-43e0-B8FC-AC1667EBCBE1}">
+              <a14:hiddenEffects xmlns="" xmlns:a14="http://schemas.microsoft.com/office/drawing/2010/main">
+                <a:effectLst>
+                  <a:outerShdw blurRad="63500" dist="38099" dir="2700000" algn="ctr" rotWithShape="0">
+                    <a:srgbClr val="000000">
+                      <a:alpha val="74998"/>
+                    </a:srgbClr>
+                  </a:outerShdw>
+                </a:effectLst>
+              </a14:hiddenEffects>
+            </a:ext>
+          </a:extLst>
+        </p:spPr>
+        <p:txBody>
+          <a:bodyPr wrap="none" anchor="ctr"/>
+          <a:lstStyle/>
+          <a:p>
+            <a:endParaRPr lang="fr-FR"/>
+          </a:p>
+        </p:txBody>
+      </p:sp>
+      <p:sp>
+        <p:nvSpPr>
+          <p:cNvPr id="22" name="AutoShape 150">
+            <a:extLst>
+              <a:ext uri="{FF2B5EF4-FFF2-40B4-BE49-F238E27FC236}">
+                <a16:creationId xmlns:a16="http://schemas.microsoft.com/office/drawing/2014/main" id="{56AB4D75-0337-8309-4255-D02A037EB751}"/>
+              </a:ext>
+            </a:extLst>
+          </p:cNvPr>
+          <p:cNvSpPr>
+            <a:spLocks noChangeArrowheads="1"/>
+          </p:cNvSpPr>
+          <p:nvPr/>
+        </p:nvSpPr>
+        <p:spPr bwMode="auto">
+          <a:xfrm>
+            <a:off x="2910205" y="935038"/>
+            <a:ext cx="139700" cy="147637"/>
+          </a:xfrm>
+          <a:prstGeom prst="diamond">
+            <a:avLst/>
+          </a:prstGeom>
+          <a:solidFill>
+            <a:srgbClr val="FFFFFF"/>
+          </a:solidFill>
+          <a:ln w="18000" cap="flat">
+            <a:solidFill>
+              <a:srgbClr val="000000"/>
+            </a:solidFill>
+            <a:round/>
+            <a:headEnd/>
+            <a:tailEnd/>
+          </a:ln>
+          <a:effectLst/>
+          <a:extLst>
+            <a:ext uri="{AF507438-7753-43e0-B8FC-AC1667EBCBE1}">
+              <a14:hiddenEffects xmlns="" xmlns:a14="http://schemas.microsoft.com/office/drawing/2010/main">
+                <a:effectLst>
+                  <a:outerShdw blurRad="63500" dist="38099" dir="2700000" algn="ctr" rotWithShape="0">
+                    <a:srgbClr val="000000">
+                      <a:alpha val="74998"/>
+                    </a:srgbClr>
+                  </a:outerShdw>
+                </a:effectLst>
+              </a14:hiddenEffects>
+            </a:ext>
+          </a:extLst>
+        </p:spPr>
+        <p:txBody>
+          <a:bodyPr wrap="none" anchor="ctr"/>
+          <a:lstStyle/>
+          <a:p>
+            <a:endParaRPr lang="fr-FR"/>
+          </a:p>
+        </p:txBody>
+      </p:sp>
+      <p:sp>
+        <p:nvSpPr>
+          <p:cNvPr id="23" name="AutoShape 150">
+            <a:extLst>
+              <a:ext uri="{FF2B5EF4-FFF2-40B4-BE49-F238E27FC236}">
+                <a16:creationId xmlns:a16="http://schemas.microsoft.com/office/drawing/2014/main" id="{85E438FF-D6D6-6721-E2D4-F01F7F4020B9}"/>
+              </a:ext>
+            </a:extLst>
+          </p:cNvPr>
+          <p:cNvSpPr>
+            <a:spLocks noChangeArrowheads="1"/>
+          </p:cNvSpPr>
+          <p:nvPr/>
+        </p:nvSpPr>
+        <p:spPr bwMode="auto">
+          <a:xfrm>
+            <a:off x="2259013" y="1280716"/>
+            <a:ext cx="139700" cy="147637"/>
+          </a:xfrm>
+          <a:prstGeom prst="diamond">
+            <a:avLst/>
+          </a:prstGeom>
+          <a:solidFill>
+            <a:srgbClr val="FFFFFF"/>
+          </a:solidFill>
+          <a:ln w="18000" cap="flat">
+            <a:solidFill>
+              <a:srgbClr val="000000"/>
+            </a:solidFill>
+            <a:round/>
+            <a:headEnd/>
+            <a:tailEnd/>
+          </a:ln>
+          <a:effectLst/>
+          <a:extLst>
+            <a:ext uri="{AF507438-7753-43e0-B8FC-AC1667EBCBE1}">
+              <a14:hiddenEffects xmlns="" xmlns:a14="http://schemas.microsoft.com/office/drawing/2010/main">
+                <a:effectLst>
+                  <a:outerShdw blurRad="63500" dist="38099" dir="2700000" algn="ctr" rotWithShape="0">
+                    <a:srgbClr val="000000">
+                      <a:alpha val="74998"/>
+                    </a:srgbClr>
+                  </a:outerShdw>
+                </a:effectLst>
+              </a14:hiddenEffects>
+            </a:ext>
+          </a:extLst>
+        </p:spPr>
+        <p:txBody>
+          <a:bodyPr wrap="none" anchor="ctr"/>
+          <a:lstStyle/>
+          <a:p>
+            <a:endParaRPr lang="fr-FR"/>
+          </a:p>
+        </p:txBody>
+      </p:sp>
+      <p:sp>
+        <p:nvSpPr>
+          <p:cNvPr id="24" name="AutoShape 150">
+            <a:extLst>
+              <a:ext uri="{FF2B5EF4-FFF2-40B4-BE49-F238E27FC236}">
+                <a16:creationId xmlns:a16="http://schemas.microsoft.com/office/drawing/2014/main" id="{621B486E-AFBB-9150-BB97-200740C47010}"/>
+              </a:ext>
+            </a:extLst>
+          </p:cNvPr>
+          <p:cNvSpPr>
+            <a:spLocks noChangeArrowheads="1"/>
+          </p:cNvSpPr>
+          <p:nvPr/>
+        </p:nvSpPr>
+        <p:spPr bwMode="auto">
+          <a:xfrm>
+            <a:off x="1842833" y="4195763"/>
+            <a:ext cx="139700" cy="147637"/>
+          </a:xfrm>
+          <a:prstGeom prst="diamond">
+            <a:avLst/>
+          </a:prstGeom>
+          <a:solidFill>
+            <a:srgbClr val="FFFFFF"/>
+          </a:solidFill>
+          <a:ln w="18000" cap="flat">
+            <a:solidFill>
+              <a:srgbClr val="000000"/>
+            </a:solidFill>
+            <a:round/>
+            <a:headEnd/>
+            <a:tailEnd/>
+          </a:ln>
+          <a:effectLst/>
+          <a:extLst>
+            <a:ext uri="{AF507438-7753-43e0-B8FC-AC1667EBCBE1}">
+              <a14:hiddenEffects xmlns="" xmlns:a14="http://schemas.microsoft.com/office/drawing/2010/main">
+                <a:effectLst>
+                  <a:outerShdw blurRad="63500" dist="38099" dir="2700000" algn="ctr" rotWithShape="0">
+                    <a:srgbClr val="000000">
+                      <a:alpha val="74998"/>
+                    </a:srgbClr>
+                  </a:outerShdw>
+                </a:effectLst>
+              </a14:hiddenEffects>
+            </a:ext>
+          </a:extLst>
+        </p:spPr>
+        <p:txBody>
+          <a:bodyPr wrap="none" anchor="ctr"/>
+          <a:lstStyle/>
+          <a:p>
+            <a:endParaRPr lang="fr-FR"/>
+          </a:p>
+        </p:txBody>
+      </p:sp>
+      <p:sp>
+        <p:nvSpPr>
+          <p:cNvPr id="25" name="AutoShape 150">
+            <a:extLst>
+              <a:ext uri="{FF2B5EF4-FFF2-40B4-BE49-F238E27FC236}">
+                <a16:creationId xmlns:a16="http://schemas.microsoft.com/office/drawing/2014/main" id="{E1022308-E986-D8A6-D8CB-BBA812A8BA8F}"/>
+              </a:ext>
+            </a:extLst>
+          </p:cNvPr>
+          <p:cNvSpPr>
+            <a:spLocks noChangeArrowheads="1"/>
+          </p:cNvSpPr>
+          <p:nvPr/>
+        </p:nvSpPr>
+        <p:spPr bwMode="auto">
+          <a:xfrm>
+            <a:off x="3717830" y="3432176"/>
+            <a:ext cx="139700" cy="147637"/>
+          </a:xfrm>
+          <a:prstGeom prst="diamond">
+            <a:avLst/>
+          </a:prstGeom>
+          <a:solidFill>
+            <a:srgbClr val="FFFFFF"/>
+          </a:solidFill>
+          <a:ln w="18000" cap="flat">
+            <a:solidFill>
+              <a:srgbClr val="000000"/>
+            </a:solidFill>
+            <a:round/>
+            <a:headEnd/>
+            <a:tailEnd/>
+          </a:ln>
+          <a:effectLst/>
+          <a:extLst>
+            <a:ext uri="{AF507438-7753-43e0-B8FC-AC1667EBCBE1}">
+              <a14:hiddenEffects xmlns="" xmlns:a14="http://schemas.microsoft.com/office/drawing/2010/main">
+                <a:effectLst>
+                  <a:outerShdw blurRad="63500" dist="38099" dir="2700000" algn="ctr" rotWithShape="0">
+                    <a:srgbClr val="000000">
+                      <a:alpha val="74998"/>
+                    </a:srgbClr>
+                  </a:outerShdw>
+                </a:effectLst>
+              </a14:hiddenEffects>
+            </a:ext>
+          </a:extLst>
+        </p:spPr>
+        <p:txBody>
+          <a:bodyPr wrap="none" anchor="ctr"/>
+          <a:lstStyle/>
+          <a:p>
+            <a:endParaRPr lang="fr-FR"/>
           </a:p>
         </p:txBody>
       </p:sp>
@@ -23794,14 +23556,14 @@
           <a:effectLst/>
           <a:extLst>
             <a:ext uri="{909E8E84-426E-40dd-AFC4-6F175D3DCCD1}">
-              <a14:hiddenFill xmlns:a14="http://schemas.microsoft.com/office/drawing/2010/main" xmlns="">
+              <a14:hiddenFill xmlns="" xmlns:a14="http://schemas.microsoft.com/office/drawing/2010/main">
                 <a:solidFill>
                   <a:srgbClr val="FFFFFF"/>
                 </a:solidFill>
               </a14:hiddenFill>
             </a:ext>
             <a:ext uri="{91240B29-F687-4f45-9708-019B960494DF}">
-              <a14:hiddenLine xmlns:a14="http://schemas.microsoft.com/office/drawing/2010/main" xmlns="" w="9525" cap="flat">
+              <a14:hiddenLine xmlns="" xmlns:a14="http://schemas.microsoft.com/office/drawing/2010/main" w="9525" cap="flat">
                 <a:solidFill>
                   <a:srgbClr val="000000"/>
                 </a:solidFill>
@@ -23811,7 +23573,7 @@
               </a14:hiddenLine>
             </a:ext>
             <a:ext uri="{AF507438-7753-43e0-B8FC-AC1667EBCBE1}">
-              <a14:hiddenEffects xmlns:a14="http://schemas.microsoft.com/office/drawing/2010/main" xmlns="">
+              <a14:hiddenEffects xmlns="" xmlns:a14="http://schemas.microsoft.com/office/drawing/2010/main">
                 <a:effectLst>
                   <a:outerShdw blurRad="63500" dist="38099" dir="2700000" algn="ctr" rotWithShape="0">
                     <a:srgbClr val="000000">
@@ -24040,14 +23802,14 @@
           <a:effectLst/>
           <a:extLst>
             <a:ext uri="{909E8E84-426E-40dd-AFC4-6F175D3DCCD1}">
-              <a14:hiddenFill xmlns:a14="http://schemas.microsoft.com/office/drawing/2010/main" xmlns="">
+              <a14:hiddenFill xmlns="" xmlns:a14="http://schemas.microsoft.com/office/drawing/2010/main">
                 <a:solidFill>
                   <a:srgbClr val="FFFFFF"/>
                 </a:solidFill>
               </a14:hiddenFill>
             </a:ext>
             <a:ext uri="{91240B29-F687-4f45-9708-019B960494DF}">
-              <a14:hiddenLine xmlns:a14="http://schemas.microsoft.com/office/drawing/2010/main" xmlns="" w="9525" cap="flat">
+              <a14:hiddenLine xmlns="" xmlns:a14="http://schemas.microsoft.com/office/drawing/2010/main" w="9525" cap="flat">
                 <a:solidFill>
                   <a:srgbClr val="000000"/>
                 </a:solidFill>
@@ -24057,7 +23819,7 @@
               </a14:hiddenLine>
             </a:ext>
             <a:ext uri="{AF507438-7753-43e0-B8FC-AC1667EBCBE1}">
-              <a14:hiddenEffects xmlns:a14="http://schemas.microsoft.com/office/drawing/2010/main" xmlns="">
+              <a14:hiddenEffects xmlns="" xmlns:a14="http://schemas.microsoft.com/office/drawing/2010/main">
                 <a:effectLst>
                   <a:outerShdw blurRad="63500" dist="38099" dir="2700000" algn="ctr" rotWithShape="0">
                     <a:srgbClr val="000000">
@@ -24107,14 +23869,14 @@
           <a:effectLst/>
           <a:extLst>
             <a:ext uri="{909E8E84-426E-40dd-AFC4-6F175D3DCCD1}">
-              <a14:hiddenFill xmlns:a14="http://schemas.microsoft.com/office/drawing/2010/main" xmlns="">
+              <a14:hiddenFill xmlns="" xmlns:a14="http://schemas.microsoft.com/office/drawing/2010/main">
                 <a:solidFill>
                   <a:srgbClr val="FFFFFF"/>
                 </a:solidFill>
               </a14:hiddenFill>
             </a:ext>
             <a:ext uri="{91240B29-F687-4f45-9708-019B960494DF}">
-              <a14:hiddenLine xmlns:a14="http://schemas.microsoft.com/office/drawing/2010/main" xmlns="" w="9525" cap="flat">
+              <a14:hiddenLine xmlns="" xmlns:a14="http://schemas.microsoft.com/office/drawing/2010/main" w="9525" cap="flat">
                 <a:solidFill>
                   <a:srgbClr val="000000"/>
                 </a:solidFill>
@@ -24124,7 +23886,7 @@
               </a14:hiddenLine>
             </a:ext>
             <a:ext uri="{AF507438-7753-43e0-B8FC-AC1667EBCBE1}">
-              <a14:hiddenEffects xmlns:a14="http://schemas.microsoft.com/office/drawing/2010/main" xmlns="">
+              <a14:hiddenEffects xmlns="" xmlns:a14="http://schemas.microsoft.com/office/drawing/2010/main">
                 <a:effectLst>
                   <a:outerShdw blurRad="63500" dist="38099" dir="2700000" algn="ctr" rotWithShape="0">
                     <a:srgbClr val="000000">
@@ -24181,7 +23943,7 @@
           <a:effectLst/>
           <a:extLst>
             <a:ext uri="{AF507438-7753-43e0-B8FC-AC1667EBCBE1}">
-              <a14:hiddenEffects xmlns:a14="http://schemas.microsoft.com/office/drawing/2010/main" xmlns="">
+              <a14:hiddenEffects xmlns="" xmlns:a14="http://schemas.microsoft.com/office/drawing/2010/main">
                 <a:effectLst>
                   <a:outerShdw blurRad="63500" dist="38099" dir="2700000" algn="ctr" rotWithShape="0">
                     <a:srgbClr val="000000">
@@ -24231,7 +23993,7 @@
           <a:effectLst/>
           <a:extLst>
             <a:ext uri="{AF507438-7753-43e0-B8FC-AC1667EBCBE1}">
-              <a14:hiddenEffects xmlns:a14="http://schemas.microsoft.com/office/drawing/2010/main" xmlns="">
+              <a14:hiddenEffects xmlns="" xmlns:a14="http://schemas.microsoft.com/office/drawing/2010/main">
                 <a:effectLst>
                   <a:outerShdw blurRad="63500" dist="38099" dir="2700000" algn="ctr" rotWithShape="0">
                     <a:srgbClr val="000000">
@@ -24274,14 +24036,14 @@
           <a:effectLst/>
           <a:extLst>
             <a:ext uri="{909E8E84-426E-40dd-AFC4-6F175D3DCCD1}">
-              <a14:hiddenFill xmlns:a14="http://schemas.microsoft.com/office/drawing/2010/main" xmlns="">
+              <a14:hiddenFill xmlns="" xmlns:a14="http://schemas.microsoft.com/office/drawing/2010/main">
                 <a:solidFill>
                   <a:srgbClr val="FFFFFF"/>
                 </a:solidFill>
               </a14:hiddenFill>
             </a:ext>
             <a:ext uri="{91240B29-F687-4f45-9708-019B960494DF}">
-              <a14:hiddenLine xmlns:a14="http://schemas.microsoft.com/office/drawing/2010/main" xmlns="" w="9525" cap="flat">
+              <a14:hiddenLine xmlns="" xmlns:a14="http://schemas.microsoft.com/office/drawing/2010/main" w="9525" cap="flat">
                 <a:solidFill>
                   <a:srgbClr val="000000"/>
                 </a:solidFill>
@@ -24291,7 +24053,7 @@
               </a14:hiddenLine>
             </a:ext>
             <a:ext uri="{AF507438-7753-43e0-B8FC-AC1667EBCBE1}">
-              <a14:hiddenEffects xmlns:a14="http://schemas.microsoft.com/office/drawing/2010/main" xmlns="">
+              <a14:hiddenEffects xmlns="" xmlns:a14="http://schemas.microsoft.com/office/drawing/2010/main">
                 <a:effectLst>
                   <a:outerShdw blurRad="63500" dist="38099" dir="2700000" algn="ctr" rotWithShape="0">
                     <a:srgbClr val="000000">
@@ -24348,7 +24110,7 @@
           <a:effectLst/>
           <a:extLst>
             <a:ext uri="{AF507438-7753-43e0-B8FC-AC1667EBCBE1}">
-              <a14:hiddenEffects xmlns:a14="http://schemas.microsoft.com/office/drawing/2010/main" xmlns="">
+              <a14:hiddenEffects xmlns="" xmlns:a14="http://schemas.microsoft.com/office/drawing/2010/main">
                 <a:effectLst>
                   <a:outerShdw blurRad="63500" dist="38099" dir="2700000" algn="ctr" rotWithShape="0">
                     <a:srgbClr val="000000">
@@ -24391,14 +24153,14 @@
           <a:effectLst/>
           <a:extLst>
             <a:ext uri="{909E8E84-426E-40dd-AFC4-6F175D3DCCD1}">
-              <a14:hiddenFill xmlns:a14="http://schemas.microsoft.com/office/drawing/2010/main" xmlns="">
+              <a14:hiddenFill xmlns="" xmlns:a14="http://schemas.microsoft.com/office/drawing/2010/main">
                 <a:solidFill>
                   <a:srgbClr val="FFFFFF"/>
                 </a:solidFill>
               </a14:hiddenFill>
             </a:ext>
             <a:ext uri="{91240B29-F687-4f45-9708-019B960494DF}">
-              <a14:hiddenLine xmlns:a14="http://schemas.microsoft.com/office/drawing/2010/main" xmlns="" w="9525" cap="flat">
+              <a14:hiddenLine xmlns="" xmlns:a14="http://schemas.microsoft.com/office/drawing/2010/main" w="9525" cap="flat">
                 <a:solidFill>
                   <a:srgbClr val="000000"/>
                 </a:solidFill>
@@ -24408,7 +24170,7 @@
               </a14:hiddenLine>
             </a:ext>
             <a:ext uri="{AF507438-7753-43e0-B8FC-AC1667EBCBE1}">
-              <a14:hiddenEffects xmlns:a14="http://schemas.microsoft.com/office/drawing/2010/main" xmlns="">
+              <a14:hiddenEffects xmlns="" xmlns:a14="http://schemas.microsoft.com/office/drawing/2010/main">
                 <a:effectLst>
                   <a:outerShdw blurRad="63500" dist="38099" dir="2700000" algn="ctr" rotWithShape="0">
                     <a:srgbClr val="000000">
@@ -24467,7 +24229,7 @@
           <a:effectLst/>
           <a:extLst>
             <a:ext uri="{AF507438-7753-43e0-B8FC-AC1667EBCBE1}">
-              <a14:hiddenEffects xmlns:a14="http://schemas.microsoft.com/office/drawing/2010/main" xmlns="">
+              <a14:hiddenEffects xmlns="" xmlns:a14="http://schemas.microsoft.com/office/drawing/2010/main">
                 <a:effectLst>
                   <a:outerShdw blurRad="63500" dist="38099" dir="2700000" algn="ctr" rotWithShape="0">
                     <a:srgbClr val="000000">
@@ -24519,7 +24281,7 @@
           <a:effectLst/>
           <a:extLst>
             <a:ext uri="{AF507438-7753-43e0-B8FC-AC1667EBCBE1}">
-              <a14:hiddenEffects xmlns:a14="http://schemas.microsoft.com/office/drawing/2010/main" xmlns="">
+              <a14:hiddenEffects xmlns="" xmlns:a14="http://schemas.microsoft.com/office/drawing/2010/main">
                 <a:effectLst>
                   <a:outerShdw blurRad="63500" dist="38099" dir="2700000" algn="ctr" rotWithShape="0">
                     <a:srgbClr val="000000">
@@ -24569,14 +24331,14 @@
           <a:effectLst/>
           <a:extLst>
             <a:ext uri="{909E8E84-426E-40dd-AFC4-6F175D3DCCD1}">
-              <a14:hiddenFill xmlns:a14="http://schemas.microsoft.com/office/drawing/2010/main" xmlns="">
+              <a14:hiddenFill xmlns="" xmlns:a14="http://schemas.microsoft.com/office/drawing/2010/main">
                 <a:solidFill>
                   <a:srgbClr val="FFFFFF"/>
                 </a:solidFill>
               </a14:hiddenFill>
             </a:ext>
             <a:ext uri="{AF507438-7753-43e0-B8FC-AC1667EBCBE1}">
-              <a14:hiddenEffects xmlns:a14="http://schemas.microsoft.com/office/drawing/2010/main" xmlns="">
+              <a14:hiddenEffects xmlns="" xmlns:a14="http://schemas.microsoft.com/office/drawing/2010/main">
                 <a:effectLst>
                   <a:outerShdw blurRad="63500" dist="38099" dir="2700000" algn="ctr" rotWithShape="0">
                     <a:srgbClr val="000000">
@@ -24628,7 +24390,7 @@
           <a:effectLst/>
           <a:extLst>
             <a:ext uri="{AF507438-7753-43e0-B8FC-AC1667EBCBE1}">
-              <a14:hiddenEffects xmlns:a14="http://schemas.microsoft.com/office/drawing/2010/main" xmlns="">
+              <a14:hiddenEffects xmlns="" xmlns:a14="http://schemas.microsoft.com/office/drawing/2010/main">
                 <a:effectLst>
                   <a:outerShdw blurRad="63500" dist="38099" dir="2700000" algn="ctr" rotWithShape="0">
                     <a:srgbClr val="000000">
@@ -24671,14 +24433,14 @@
           <a:effectLst/>
           <a:extLst>
             <a:ext uri="{909E8E84-426E-40dd-AFC4-6F175D3DCCD1}">
-              <a14:hiddenFill xmlns:a14="http://schemas.microsoft.com/office/drawing/2010/main" xmlns="">
+              <a14:hiddenFill xmlns="" xmlns:a14="http://schemas.microsoft.com/office/drawing/2010/main">
                 <a:solidFill>
                   <a:srgbClr val="FFFFFF"/>
                 </a:solidFill>
               </a14:hiddenFill>
             </a:ext>
             <a:ext uri="{91240B29-F687-4f45-9708-019B960494DF}">
-              <a14:hiddenLine xmlns:a14="http://schemas.microsoft.com/office/drawing/2010/main" xmlns="" w="9525" cap="flat">
+              <a14:hiddenLine xmlns="" xmlns:a14="http://schemas.microsoft.com/office/drawing/2010/main" w="9525" cap="flat">
                 <a:solidFill>
                   <a:srgbClr val="000000"/>
                 </a:solidFill>
@@ -24688,7 +24450,7 @@
               </a14:hiddenLine>
             </a:ext>
             <a:ext uri="{AF507438-7753-43e0-B8FC-AC1667EBCBE1}">
-              <a14:hiddenEffects xmlns:a14="http://schemas.microsoft.com/office/drawing/2010/main" xmlns="">
+              <a14:hiddenEffects xmlns="" xmlns:a14="http://schemas.microsoft.com/office/drawing/2010/main">
                 <a:effectLst>
                   <a:outerShdw blurRad="63500" dist="38099" dir="2700000" algn="ctr" rotWithShape="0">
                     <a:srgbClr val="000000">
@@ -24917,7 +24679,7 @@
           <a:effectLst/>
           <a:extLst>
             <a:ext uri="{AF507438-7753-43e0-B8FC-AC1667EBCBE1}">
-              <a14:hiddenEffects xmlns:a14="http://schemas.microsoft.com/office/drawing/2010/main" xmlns="">
+              <a14:hiddenEffects xmlns="" xmlns:a14="http://schemas.microsoft.com/office/drawing/2010/main">
                 <a:effectLst>
                   <a:outerShdw blurRad="63500" dist="38099" dir="2700000" algn="ctr" rotWithShape="0">
                     <a:srgbClr val="000000">
@@ -24960,14 +24722,14 @@
           <a:effectLst/>
           <a:extLst>
             <a:ext uri="{909E8E84-426E-40dd-AFC4-6F175D3DCCD1}">
-              <a14:hiddenFill xmlns:a14="http://schemas.microsoft.com/office/drawing/2010/main" xmlns="">
+              <a14:hiddenFill xmlns="" xmlns:a14="http://schemas.microsoft.com/office/drawing/2010/main">
                 <a:solidFill>
                   <a:srgbClr val="FFFFFF"/>
                 </a:solidFill>
               </a14:hiddenFill>
             </a:ext>
             <a:ext uri="{91240B29-F687-4f45-9708-019B960494DF}">
-              <a14:hiddenLine xmlns:a14="http://schemas.microsoft.com/office/drawing/2010/main" xmlns="" w="9525" cap="flat">
+              <a14:hiddenLine xmlns="" xmlns:a14="http://schemas.microsoft.com/office/drawing/2010/main" w="9525" cap="flat">
                 <a:solidFill>
                   <a:srgbClr val="000000"/>
                 </a:solidFill>
@@ -24977,7 +24739,7 @@
               </a14:hiddenLine>
             </a:ext>
             <a:ext uri="{AF507438-7753-43e0-B8FC-AC1667EBCBE1}">
-              <a14:hiddenEffects xmlns:a14="http://schemas.microsoft.com/office/drawing/2010/main" xmlns="">
+              <a14:hiddenEffects xmlns="" xmlns:a14="http://schemas.microsoft.com/office/drawing/2010/main">
                 <a:effectLst>
                   <a:outerShdw blurRad="63500" dist="38099" dir="2700000" algn="ctr" rotWithShape="0">
                     <a:srgbClr val="000000">
@@ -25211,12 +24973,12 @@
           <a:effectLst/>
           <a:extLst>
             <a:ext uri="{909E8E84-426E-40dd-AFC4-6F175D3DCCD1}">
-              <a14:hiddenFill xmlns:a14="http://schemas.microsoft.com/office/drawing/2010/main" xmlns="">
+              <a14:hiddenFill xmlns="" xmlns:a14="http://schemas.microsoft.com/office/drawing/2010/main">
                 <a:noFill/>
               </a14:hiddenFill>
             </a:ext>
             <a:ext uri="{AF507438-7753-43e0-B8FC-AC1667EBCBE1}">
-              <a14:hiddenEffects xmlns:a14="http://schemas.microsoft.com/office/drawing/2010/main" xmlns="">
+              <a14:hiddenEffects xmlns="" xmlns:a14="http://schemas.microsoft.com/office/drawing/2010/main">
                 <a:effectLst>
                   <a:outerShdw blurRad="63500" dist="38099" dir="2700000" algn="ctr" rotWithShape="0">
                     <a:srgbClr val="000000">
@@ -25259,14 +25021,14 @@
           <a:effectLst/>
           <a:extLst>
             <a:ext uri="{909E8E84-426E-40dd-AFC4-6F175D3DCCD1}">
-              <a14:hiddenFill xmlns:a14="http://schemas.microsoft.com/office/drawing/2010/main" xmlns="">
+              <a14:hiddenFill xmlns="" xmlns:a14="http://schemas.microsoft.com/office/drawing/2010/main">
                 <a:solidFill>
                   <a:srgbClr val="FFFFFF"/>
                 </a:solidFill>
               </a14:hiddenFill>
             </a:ext>
             <a:ext uri="{91240B29-F687-4f45-9708-019B960494DF}">
-              <a14:hiddenLine xmlns:a14="http://schemas.microsoft.com/office/drawing/2010/main" xmlns="" w="9525" cap="flat">
+              <a14:hiddenLine xmlns="" xmlns:a14="http://schemas.microsoft.com/office/drawing/2010/main" w="9525" cap="flat">
                 <a:solidFill>
                   <a:srgbClr val="000000"/>
                 </a:solidFill>
@@ -25276,7 +25038,7 @@
               </a14:hiddenLine>
             </a:ext>
             <a:ext uri="{AF507438-7753-43e0-B8FC-AC1667EBCBE1}">
-              <a14:hiddenEffects xmlns:a14="http://schemas.microsoft.com/office/drawing/2010/main" xmlns="">
+              <a14:hiddenEffects xmlns="" xmlns:a14="http://schemas.microsoft.com/office/drawing/2010/main">
                 <a:effectLst>
                   <a:outerShdw blurRad="63500" dist="38099" dir="2700000" algn="ctr" rotWithShape="0">
                     <a:srgbClr val="000000">
@@ -25503,7 +25265,7 @@
           <a:effectLst/>
           <a:extLst>
             <a:ext uri="{AF507438-7753-43e0-B8FC-AC1667EBCBE1}">
-              <a14:hiddenEffects xmlns:a14="http://schemas.microsoft.com/office/drawing/2010/main" xmlns="">
+              <a14:hiddenEffects xmlns="" xmlns:a14="http://schemas.microsoft.com/office/drawing/2010/main">
                 <a:effectLst>
                   <a:outerShdw blurRad="63500" dist="38099" dir="2700000" algn="ctr" rotWithShape="0">
                     <a:srgbClr val="000000">
@@ -25555,7 +25317,7 @@
           <a:effectLst/>
           <a:extLst>
             <a:ext uri="{AF507438-7753-43e0-B8FC-AC1667EBCBE1}">
-              <a14:hiddenEffects xmlns:a14="http://schemas.microsoft.com/office/drawing/2010/main" xmlns="">
+              <a14:hiddenEffects xmlns="" xmlns:a14="http://schemas.microsoft.com/office/drawing/2010/main">
                 <a:effectLst>
                   <a:outerShdw blurRad="63500" dist="38099" dir="2700000" algn="ctr" rotWithShape="0">
                     <a:srgbClr val="000000">
@@ -25607,7 +25369,7 @@
           <a:effectLst/>
           <a:extLst>
             <a:ext uri="{AF507438-7753-43e0-B8FC-AC1667EBCBE1}">
-              <a14:hiddenEffects xmlns:a14="http://schemas.microsoft.com/office/drawing/2010/main" xmlns="">
+              <a14:hiddenEffects xmlns="" xmlns:a14="http://schemas.microsoft.com/office/drawing/2010/main">
                 <a:effectLst>
                   <a:outerShdw blurRad="63500" dist="38099" dir="2700000" algn="ctr" rotWithShape="0">
                     <a:srgbClr val="000000">
@@ -25650,14 +25412,14 @@
           <a:effectLst/>
           <a:extLst>
             <a:ext uri="{909E8E84-426E-40dd-AFC4-6F175D3DCCD1}">
-              <a14:hiddenFill xmlns:a14="http://schemas.microsoft.com/office/drawing/2010/main" xmlns="">
+              <a14:hiddenFill xmlns="" xmlns:a14="http://schemas.microsoft.com/office/drawing/2010/main">
                 <a:solidFill>
                   <a:srgbClr val="FFFFFF"/>
                 </a:solidFill>
               </a14:hiddenFill>
             </a:ext>
             <a:ext uri="{91240B29-F687-4f45-9708-019B960494DF}">
-              <a14:hiddenLine xmlns:a14="http://schemas.microsoft.com/office/drawing/2010/main" xmlns="" w="9525" cap="flat">
+              <a14:hiddenLine xmlns="" xmlns:a14="http://schemas.microsoft.com/office/drawing/2010/main" w="9525" cap="flat">
                 <a:solidFill>
                   <a:srgbClr val="000000"/>
                 </a:solidFill>
@@ -25667,7 +25429,7 @@
               </a14:hiddenLine>
             </a:ext>
             <a:ext uri="{AF507438-7753-43e0-B8FC-AC1667EBCBE1}">
-              <a14:hiddenEffects xmlns:a14="http://schemas.microsoft.com/office/drawing/2010/main" xmlns="">
+              <a14:hiddenEffects xmlns="" xmlns:a14="http://schemas.microsoft.com/office/drawing/2010/main">
                 <a:effectLst>
                   <a:outerShdw blurRad="63500" dist="38099" dir="2700000" algn="ctr" rotWithShape="0">
                     <a:srgbClr val="000000">
@@ -25717,14 +25479,14 @@
           <a:effectLst/>
           <a:extLst>
             <a:ext uri="{909E8E84-426E-40dd-AFC4-6F175D3DCCD1}">
-              <a14:hiddenFill xmlns:a14="http://schemas.microsoft.com/office/drawing/2010/main" xmlns="">
+              <a14:hiddenFill xmlns="" xmlns:a14="http://schemas.microsoft.com/office/drawing/2010/main">
                 <a:solidFill>
                   <a:srgbClr val="FFFFFF"/>
                 </a:solidFill>
               </a14:hiddenFill>
             </a:ext>
             <a:ext uri="{91240B29-F687-4f45-9708-019B960494DF}">
-              <a14:hiddenLine xmlns:a14="http://schemas.microsoft.com/office/drawing/2010/main" xmlns="" w="9525" cap="flat">
+              <a14:hiddenLine xmlns="" xmlns:a14="http://schemas.microsoft.com/office/drawing/2010/main" w="9525" cap="flat">
                 <a:solidFill>
                   <a:srgbClr val="000000"/>
                 </a:solidFill>
@@ -25734,7 +25496,7 @@
               </a14:hiddenLine>
             </a:ext>
             <a:ext uri="{AF507438-7753-43e0-B8FC-AC1667EBCBE1}">
-              <a14:hiddenEffects xmlns:a14="http://schemas.microsoft.com/office/drawing/2010/main" xmlns="">
+              <a14:hiddenEffects xmlns="" xmlns:a14="http://schemas.microsoft.com/office/drawing/2010/main">
                 <a:effectLst>
                   <a:outerShdw blurRad="63500" dist="38099" dir="2700000" algn="ctr" rotWithShape="0">
                     <a:srgbClr val="000000">
@@ -25789,12 +25551,12 @@
           <a:effectLst/>
           <a:extLst>
             <a:ext uri="{909E8E84-426E-40dd-AFC4-6F175D3DCCD1}">
-              <a14:hiddenFill xmlns:a14="http://schemas.microsoft.com/office/drawing/2010/main" xmlns="">
+              <a14:hiddenFill xmlns="" xmlns:a14="http://schemas.microsoft.com/office/drawing/2010/main">
                 <a:noFill/>
               </a14:hiddenFill>
             </a:ext>
             <a:ext uri="{AF507438-7753-43e0-B8FC-AC1667EBCBE1}">
-              <a14:hiddenEffects xmlns:a14="http://schemas.microsoft.com/office/drawing/2010/main" xmlns="">
+              <a14:hiddenEffects xmlns="" xmlns:a14="http://schemas.microsoft.com/office/drawing/2010/main">
                 <a:effectLst>
                   <a:outerShdw blurRad="63500" dist="38099" dir="2700000" algn="ctr" rotWithShape="0">
                     <a:srgbClr val="000000">
@@ -25837,14 +25599,14 @@
           <a:effectLst/>
           <a:extLst>
             <a:ext uri="{909E8E84-426E-40dd-AFC4-6F175D3DCCD1}">
-              <a14:hiddenFill xmlns:a14="http://schemas.microsoft.com/office/drawing/2010/main" xmlns="">
+              <a14:hiddenFill xmlns="" xmlns:a14="http://schemas.microsoft.com/office/drawing/2010/main">
                 <a:solidFill>
                   <a:srgbClr val="FFFFFF"/>
                 </a:solidFill>
               </a14:hiddenFill>
             </a:ext>
             <a:ext uri="{91240B29-F687-4f45-9708-019B960494DF}">
-              <a14:hiddenLine xmlns:a14="http://schemas.microsoft.com/office/drawing/2010/main" xmlns="" w="9525" cap="flat">
+              <a14:hiddenLine xmlns="" xmlns:a14="http://schemas.microsoft.com/office/drawing/2010/main" w="9525" cap="flat">
                 <a:solidFill>
                   <a:srgbClr val="000000"/>
                 </a:solidFill>
@@ -25854,7 +25616,7 @@
               </a14:hiddenLine>
             </a:ext>
             <a:ext uri="{AF507438-7753-43e0-B8FC-AC1667EBCBE1}">
-              <a14:hiddenEffects xmlns:a14="http://schemas.microsoft.com/office/drawing/2010/main" xmlns="">
+              <a14:hiddenEffects xmlns="" xmlns:a14="http://schemas.microsoft.com/office/drawing/2010/main">
                 <a:effectLst>
                   <a:outerShdw blurRad="63500" dist="38099" dir="2700000" algn="ctr" rotWithShape="0">
                     <a:srgbClr val="000000">
@@ -25913,7 +25675,7 @@
           <a:effectLst/>
           <a:extLst>
             <a:ext uri="{AF507438-7753-43e0-B8FC-AC1667EBCBE1}">
-              <a14:hiddenEffects xmlns:a14="http://schemas.microsoft.com/office/drawing/2010/main" xmlns="">
+              <a14:hiddenEffects xmlns="" xmlns:a14="http://schemas.microsoft.com/office/drawing/2010/main">
                 <a:effectLst>
                   <a:outerShdw blurRad="63500" dist="38099" dir="2700000" algn="ctr" rotWithShape="0">
                     <a:srgbClr val="000000">
@@ -25956,14 +25718,14 @@
           <a:effectLst/>
           <a:extLst>
             <a:ext uri="{909E8E84-426E-40dd-AFC4-6F175D3DCCD1}">
-              <a14:hiddenFill xmlns:a14="http://schemas.microsoft.com/office/drawing/2010/main" xmlns="">
+              <a14:hiddenFill xmlns="" xmlns:a14="http://schemas.microsoft.com/office/drawing/2010/main">
                 <a:solidFill>
                   <a:srgbClr val="FFFFFF"/>
                 </a:solidFill>
               </a14:hiddenFill>
             </a:ext>
             <a:ext uri="{91240B29-F687-4f45-9708-019B960494DF}">
-              <a14:hiddenLine xmlns:a14="http://schemas.microsoft.com/office/drawing/2010/main" xmlns="" w="9525" cap="flat">
+              <a14:hiddenLine xmlns="" xmlns:a14="http://schemas.microsoft.com/office/drawing/2010/main" w="9525" cap="flat">
                 <a:solidFill>
                   <a:srgbClr val="000000"/>
                 </a:solidFill>
@@ -25973,7 +25735,7 @@
               </a14:hiddenLine>
             </a:ext>
             <a:ext uri="{AF507438-7753-43e0-B8FC-AC1667EBCBE1}">
-              <a14:hiddenEffects xmlns:a14="http://schemas.microsoft.com/office/drawing/2010/main" xmlns="">
+              <a14:hiddenEffects xmlns="" xmlns:a14="http://schemas.microsoft.com/office/drawing/2010/main">
                 <a:effectLst>
                   <a:outerShdw blurRad="63500" dist="38099" dir="2700000" algn="ctr" rotWithShape="0">
                     <a:srgbClr val="000000">
@@ -26209,7 +25971,7 @@
           <a:effectLst/>
           <a:extLst>
             <a:ext uri="{AF507438-7753-43e0-B8FC-AC1667EBCBE1}">
-              <a14:hiddenEffects xmlns:a14="http://schemas.microsoft.com/office/drawing/2010/main" xmlns="">
+              <a14:hiddenEffects xmlns="" xmlns:a14="http://schemas.microsoft.com/office/drawing/2010/main">
                 <a:effectLst>
                   <a:outerShdw blurRad="63500" dist="38099" dir="2700000" algn="ctr" rotWithShape="0">
                     <a:srgbClr val="000000">
@@ -26257,12 +26019,12 @@
           <a:effectLst/>
           <a:extLst>
             <a:ext uri="{909E8E84-426E-40dd-AFC4-6F175D3DCCD1}">
-              <a14:hiddenFill xmlns:a14="http://schemas.microsoft.com/office/drawing/2010/main" xmlns="">
+              <a14:hiddenFill xmlns="" xmlns:a14="http://schemas.microsoft.com/office/drawing/2010/main">
                 <a:noFill/>
               </a14:hiddenFill>
             </a:ext>
             <a:ext uri="{AF507438-7753-43e0-B8FC-AC1667EBCBE1}">
-              <a14:hiddenEffects xmlns:a14="http://schemas.microsoft.com/office/drawing/2010/main" xmlns="">
+              <a14:hiddenEffects xmlns="" xmlns:a14="http://schemas.microsoft.com/office/drawing/2010/main">
                 <a:effectLst>
                   <a:outerShdw blurRad="63500" dist="38099" dir="2700000" algn="ctr" rotWithShape="0">
                     <a:srgbClr val="000000">
@@ -26314,7 +26076,7 @@
           <a:effectLst/>
           <a:extLst>
             <a:ext uri="{AF507438-7753-43e0-B8FC-AC1667EBCBE1}">
-              <a14:hiddenEffects xmlns:a14="http://schemas.microsoft.com/office/drawing/2010/main" xmlns="">
+              <a14:hiddenEffects xmlns="" xmlns:a14="http://schemas.microsoft.com/office/drawing/2010/main">
                 <a:effectLst>
                   <a:outerShdw blurRad="63500" dist="38099" dir="2700000" algn="ctr" rotWithShape="0">
                     <a:srgbClr val="000000">
@@ -26366,7 +26128,7 @@
           <a:effectLst/>
           <a:extLst>
             <a:ext uri="{AF507438-7753-43e0-B8FC-AC1667EBCBE1}">
-              <a14:hiddenEffects xmlns:a14="http://schemas.microsoft.com/office/drawing/2010/main" xmlns="">
+              <a14:hiddenEffects xmlns="" xmlns:a14="http://schemas.microsoft.com/office/drawing/2010/main">
                 <a:effectLst>
                   <a:outerShdw blurRad="63500" dist="38099" dir="2700000" algn="ctr" rotWithShape="0">
                     <a:srgbClr val="000000">
@@ -26414,12 +26176,12 @@
           <a:effectLst/>
           <a:extLst>
             <a:ext uri="{909E8E84-426E-40dd-AFC4-6F175D3DCCD1}">
-              <a14:hiddenFill xmlns:a14="http://schemas.microsoft.com/office/drawing/2010/main" xmlns="">
+              <a14:hiddenFill xmlns="" xmlns:a14="http://schemas.microsoft.com/office/drawing/2010/main">
                 <a:noFill/>
               </a14:hiddenFill>
             </a:ext>
             <a:ext uri="{AF507438-7753-43e0-B8FC-AC1667EBCBE1}">
-              <a14:hiddenEffects xmlns:a14="http://schemas.microsoft.com/office/drawing/2010/main" xmlns="">
+              <a14:hiddenEffects xmlns="" xmlns:a14="http://schemas.microsoft.com/office/drawing/2010/main">
                 <a:effectLst>
                   <a:outerShdw blurRad="63500" dist="38099" dir="2700000" algn="ctr" rotWithShape="0">
                     <a:srgbClr val="000000">
@@ -26469,7 +26231,7 @@
           <a:effectLst/>
           <a:extLst>
             <a:ext uri="{AF507438-7753-43e0-B8FC-AC1667EBCBE1}">
-              <a14:hiddenEffects xmlns:a14="http://schemas.microsoft.com/office/drawing/2010/main" xmlns="">
+              <a14:hiddenEffects xmlns="" xmlns:a14="http://schemas.microsoft.com/office/drawing/2010/main">
                 <a:effectLst>
                   <a:outerShdw blurRad="63500" dist="38099" dir="2700000" algn="ctr" rotWithShape="0">
                     <a:srgbClr val="000000">
@@ -26519,7 +26281,7 @@
           <a:effectLst/>
           <a:extLst>
             <a:ext uri="{AF507438-7753-43e0-B8FC-AC1667EBCBE1}">
-              <a14:hiddenEffects xmlns:a14="http://schemas.microsoft.com/office/drawing/2010/main" xmlns="">
+              <a14:hiddenEffects xmlns="" xmlns:a14="http://schemas.microsoft.com/office/drawing/2010/main">
                 <a:effectLst>
                   <a:outerShdw blurRad="63500" dist="38099" dir="2700000" algn="ctr" rotWithShape="0">
                     <a:srgbClr val="000000">
@@ -26562,14 +26324,14 @@
           <a:effectLst/>
           <a:extLst>
             <a:ext uri="{909E8E84-426E-40dd-AFC4-6F175D3DCCD1}">
-              <a14:hiddenFill xmlns:a14="http://schemas.microsoft.com/office/drawing/2010/main" xmlns="">
+              <a14:hiddenFill xmlns="" xmlns:a14="http://schemas.microsoft.com/office/drawing/2010/main">
                 <a:solidFill>
                   <a:srgbClr val="FFFFFF"/>
                 </a:solidFill>
               </a14:hiddenFill>
             </a:ext>
             <a:ext uri="{91240B29-F687-4f45-9708-019B960494DF}">
-              <a14:hiddenLine xmlns:a14="http://schemas.microsoft.com/office/drawing/2010/main" xmlns="" w="9525" cap="flat">
+              <a14:hiddenLine xmlns="" xmlns:a14="http://schemas.microsoft.com/office/drawing/2010/main" w="9525" cap="flat">
                 <a:solidFill>
                   <a:srgbClr val="000000"/>
                 </a:solidFill>
@@ -26579,7 +26341,7 @@
               </a14:hiddenLine>
             </a:ext>
             <a:ext uri="{AF507438-7753-43e0-B8FC-AC1667EBCBE1}">
-              <a14:hiddenEffects xmlns:a14="http://schemas.microsoft.com/office/drawing/2010/main" xmlns="">
+              <a14:hiddenEffects xmlns="" xmlns:a14="http://schemas.microsoft.com/office/drawing/2010/main">
                 <a:effectLst>
                   <a:outerShdw blurRad="63500" dist="38099" dir="2700000" algn="ctr" rotWithShape="0">
                     <a:srgbClr val="000000">
@@ -26629,14 +26391,14 @@
           <a:effectLst/>
           <a:extLst>
             <a:ext uri="{909E8E84-426E-40dd-AFC4-6F175D3DCCD1}">
-              <a14:hiddenFill xmlns:a14="http://schemas.microsoft.com/office/drawing/2010/main" xmlns="">
+              <a14:hiddenFill xmlns="" xmlns:a14="http://schemas.microsoft.com/office/drawing/2010/main">
                 <a:solidFill>
                   <a:srgbClr val="FFFFFF"/>
                 </a:solidFill>
               </a14:hiddenFill>
             </a:ext>
             <a:ext uri="{91240B29-F687-4f45-9708-019B960494DF}">
-              <a14:hiddenLine xmlns:a14="http://schemas.microsoft.com/office/drawing/2010/main" xmlns="" w="9525" cap="flat">
+              <a14:hiddenLine xmlns="" xmlns:a14="http://schemas.microsoft.com/office/drawing/2010/main" w="9525" cap="flat">
                 <a:solidFill>
                   <a:srgbClr val="000000"/>
                 </a:solidFill>
@@ -26646,7 +26408,7 @@
               </a14:hiddenLine>
             </a:ext>
             <a:ext uri="{AF507438-7753-43e0-B8FC-AC1667EBCBE1}">
-              <a14:hiddenEffects xmlns:a14="http://schemas.microsoft.com/office/drawing/2010/main" xmlns="">
+              <a14:hiddenEffects xmlns="" xmlns:a14="http://schemas.microsoft.com/office/drawing/2010/main">
                 <a:effectLst>
                   <a:outerShdw blurRad="63500" dist="38099" dir="2700000" algn="ctr" rotWithShape="0">
                     <a:srgbClr val="000000">
@@ -26696,14 +26458,14 @@
           <a:effectLst/>
           <a:extLst>
             <a:ext uri="{909E8E84-426E-40dd-AFC4-6F175D3DCCD1}">
-              <a14:hiddenFill xmlns:a14="http://schemas.microsoft.com/office/drawing/2010/main" xmlns="">
+              <a14:hiddenFill xmlns="" xmlns:a14="http://schemas.microsoft.com/office/drawing/2010/main">
                 <a:solidFill>
                   <a:srgbClr val="FFFFFF"/>
                 </a:solidFill>
               </a14:hiddenFill>
             </a:ext>
             <a:ext uri="{91240B29-F687-4f45-9708-019B960494DF}">
-              <a14:hiddenLine xmlns:a14="http://schemas.microsoft.com/office/drawing/2010/main" xmlns="" w="9525" cap="flat">
+              <a14:hiddenLine xmlns="" xmlns:a14="http://schemas.microsoft.com/office/drawing/2010/main" w="9525" cap="flat">
                 <a:solidFill>
                   <a:srgbClr val="000000"/>
                 </a:solidFill>
@@ -26713,7 +26475,7 @@
               </a14:hiddenLine>
             </a:ext>
             <a:ext uri="{AF507438-7753-43e0-B8FC-AC1667EBCBE1}">
-              <a14:hiddenEffects xmlns:a14="http://schemas.microsoft.com/office/drawing/2010/main" xmlns="">
+              <a14:hiddenEffects xmlns="" xmlns:a14="http://schemas.microsoft.com/office/drawing/2010/main">
                 <a:effectLst>
                   <a:outerShdw blurRad="63500" dist="38099" dir="2700000" algn="ctr" rotWithShape="0">
                     <a:srgbClr val="000000">
@@ -26763,14 +26525,14 @@
           <a:effectLst/>
           <a:extLst>
             <a:ext uri="{909E8E84-426E-40dd-AFC4-6F175D3DCCD1}">
-              <a14:hiddenFill xmlns:a14="http://schemas.microsoft.com/office/drawing/2010/main" xmlns="">
+              <a14:hiddenFill xmlns="" xmlns:a14="http://schemas.microsoft.com/office/drawing/2010/main">
                 <a:solidFill>
                   <a:srgbClr val="FFFFFF"/>
                 </a:solidFill>
               </a14:hiddenFill>
             </a:ext>
             <a:ext uri="{91240B29-F687-4f45-9708-019B960494DF}">
-              <a14:hiddenLine xmlns:a14="http://schemas.microsoft.com/office/drawing/2010/main" xmlns="" w="9525" cap="flat">
+              <a14:hiddenLine xmlns="" xmlns:a14="http://schemas.microsoft.com/office/drawing/2010/main" w="9525" cap="flat">
                 <a:solidFill>
                   <a:srgbClr val="000000"/>
                 </a:solidFill>
@@ -26780,7 +26542,7 @@
               </a14:hiddenLine>
             </a:ext>
             <a:ext uri="{AF507438-7753-43e0-B8FC-AC1667EBCBE1}">
-              <a14:hiddenEffects xmlns:a14="http://schemas.microsoft.com/office/drawing/2010/main" xmlns="">
+              <a14:hiddenEffects xmlns="" xmlns:a14="http://schemas.microsoft.com/office/drawing/2010/main">
                 <a:effectLst>
                   <a:outerShdw blurRad="63500" dist="38099" dir="2700000" algn="ctr" rotWithShape="0">
                     <a:srgbClr val="000000">
@@ -26830,14 +26592,14 @@
           <a:effectLst/>
           <a:extLst>
             <a:ext uri="{909E8E84-426E-40dd-AFC4-6F175D3DCCD1}">
-              <a14:hiddenFill xmlns:a14="http://schemas.microsoft.com/office/drawing/2010/main" xmlns="">
+              <a14:hiddenFill xmlns="" xmlns:a14="http://schemas.microsoft.com/office/drawing/2010/main">
                 <a:solidFill>
                   <a:srgbClr val="FFFFFF"/>
                 </a:solidFill>
               </a14:hiddenFill>
             </a:ext>
             <a:ext uri="{91240B29-F687-4f45-9708-019B960494DF}">
-              <a14:hiddenLine xmlns:a14="http://schemas.microsoft.com/office/drawing/2010/main" xmlns="" w="9525" cap="flat">
+              <a14:hiddenLine xmlns="" xmlns:a14="http://schemas.microsoft.com/office/drawing/2010/main" w="9525" cap="flat">
                 <a:solidFill>
                   <a:srgbClr val="000000"/>
                 </a:solidFill>
@@ -26847,7 +26609,7 @@
               </a14:hiddenLine>
             </a:ext>
             <a:ext uri="{AF507438-7753-43e0-B8FC-AC1667EBCBE1}">
-              <a14:hiddenEffects xmlns:a14="http://schemas.microsoft.com/office/drawing/2010/main" xmlns="">
+              <a14:hiddenEffects xmlns="" xmlns:a14="http://schemas.microsoft.com/office/drawing/2010/main">
                 <a:effectLst>
                   <a:outerShdw blurRad="63500" dist="38099" dir="2700000" algn="ctr" rotWithShape="0">
                     <a:srgbClr val="000000">
@@ -26897,14 +26659,14 @@
           <a:effectLst/>
           <a:extLst>
             <a:ext uri="{909E8E84-426E-40dd-AFC4-6F175D3DCCD1}">
-              <a14:hiddenFill xmlns:a14="http://schemas.microsoft.com/office/drawing/2010/main" xmlns="">
+              <a14:hiddenFill xmlns="" xmlns:a14="http://schemas.microsoft.com/office/drawing/2010/main">
                 <a:solidFill>
                   <a:srgbClr val="FFFFFF"/>
                 </a:solidFill>
               </a14:hiddenFill>
             </a:ext>
             <a:ext uri="{91240B29-F687-4f45-9708-019B960494DF}">
-              <a14:hiddenLine xmlns:a14="http://schemas.microsoft.com/office/drawing/2010/main" xmlns="" w="9525" cap="flat">
+              <a14:hiddenLine xmlns="" xmlns:a14="http://schemas.microsoft.com/office/drawing/2010/main" w="9525" cap="flat">
                 <a:solidFill>
                   <a:srgbClr val="000000"/>
                 </a:solidFill>
@@ -26914,7 +26676,7 @@
               </a14:hiddenLine>
             </a:ext>
             <a:ext uri="{AF507438-7753-43e0-B8FC-AC1667EBCBE1}">
-              <a14:hiddenEffects xmlns:a14="http://schemas.microsoft.com/office/drawing/2010/main" xmlns="">
+              <a14:hiddenEffects xmlns="" xmlns:a14="http://schemas.microsoft.com/office/drawing/2010/main">
                 <a:effectLst>
                   <a:outerShdw blurRad="63500" dist="38099" dir="2700000" algn="ctr" rotWithShape="0">
                     <a:srgbClr val="000000">
@@ -26964,14 +26726,14 @@
           <a:effectLst/>
           <a:extLst>
             <a:ext uri="{909E8E84-426E-40dd-AFC4-6F175D3DCCD1}">
-              <a14:hiddenFill xmlns:a14="http://schemas.microsoft.com/office/drawing/2010/main" xmlns="">
+              <a14:hiddenFill xmlns="" xmlns:a14="http://schemas.microsoft.com/office/drawing/2010/main">
                 <a:solidFill>
                   <a:srgbClr val="FFFFFF"/>
                 </a:solidFill>
               </a14:hiddenFill>
             </a:ext>
             <a:ext uri="{91240B29-F687-4f45-9708-019B960494DF}">
-              <a14:hiddenLine xmlns:a14="http://schemas.microsoft.com/office/drawing/2010/main" xmlns="" w="9525" cap="flat">
+              <a14:hiddenLine xmlns="" xmlns:a14="http://schemas.microsoft.com/office/drawing/2010/main" w="9525" cap="flat">
                 <a:solidFill>
                   <a:srgbClr val="000000"/>
                 </a:solidFill>
@@ -26981,7 +26743,7 @@
               </a14:hiddenLine>
             </a:ext>
             <a:ext uri="{AF507438-7753-43e0-B8FC-AC1667EBCBE1}">
-              <a14:hiddenEffects xmlns:a14="http://schemas.microsoft.com/office/drawing/2010/main" xmlns="">
+              <a14:hiddenEffects xmlns="" xmlns:a14="http://schemas.microsoft.com/office/drawing/2010/main">
                 <a:effectLst>
                   <a:outerShdw blurRad="63500" dist="38099" dir="2700000" algn="ctr" rotWithShape="0">
                     <a:srgbClr val="000000">
@@ -27031,14 +26793,14 @@
           <a:effectLst/>
           <a:extLst>
             <a:ext uri="{909E8E84-426E-40dd-AFC4-6F175D3DCCD1}">
-              <a14:hiddenFill xmlns:a14="http://schemas.microsoft.com/office/drawing/2010/main" xmlns="">
+              <a14:hiddenFill xmlns="" xmlns:a14="http://schemas.microsoft.com/office/drawing/2010/main">
                 <a:solidFill>
                   <a:srgbClr val="FFFFFF"/>
                 </a:solidFill>
               </a14:hiddenFill>
             </a:ext>
             <a:ext uri="{91240B29-F687-4f45-9708-019B960494DF}">
-              <a14:hiddenLine xmlns:a14="http://schemas.microsoft.com/office/drawing/2010/main" xmlns="" w="9525" cap="flat">
+              <a14:hiddenLine xmlns="" xmlns:a14="http://schemas.microsoft.com/office/drawing/2010/main" w="9525" cap="flat">
                 <a:solidFill>
                   <a:srgbClr val="000000"/>
                 </a:solidFill>
@@ -27048,7 +26810,7 @@
               </a14:hiddenLine>
             </a:ext>
             <a:ext uri="{AF507438-7753-43e0-B8FC-AC1667EBCBE1}">
-              <a14:hiddenEffects xmlns:a14="http://schemas.microsoft.com/office/drawing/2010/main" xmlns="">
+              <a14:hiddenEffects xmlns="" xmlns:a14="http://schemas.microsoft.com/office/drawing/2010/main">
                 <a:effectLst>
                   <a:outerShdw blurRad="63500" dist="38099" dir="2700000" algn="ctr" rotWithShape="0">
                     <a:srgbClr val="000000">
@@ -27105,7 +26867,7 @@
           <a:effectLst/>
           <a:extLst>
             <a:ext uri="{AF507438-7753-43e0-B8FC-AC1667EBCBE1}">
-              <a14:hiddenEffects xmlns:a14="http://schemas.microsoft.com/office/drawing/2010/main" xmlns="">
+              <a14:hiddenEffects xmlns="" xmlns:a14="http://schemas.microsoft.com/office/drawing/2010/main">
                 <a:effectLst>
                   <a:outerShdw blurRad="63500" dist="38099" dir="2700000" algn="ctr" rotWithShape="0">
                     <a:srgbClr val="000000">
@@ -27148,14 +26910,14 @@
           <a:effectLst/>
           <a:extLst>
             <a:ext uri="{909E8E84-426E-40dd-AFC4-6F175D3DCCD1}">
-              <a14:hiddenFill xmlns:a14="http://schemas.microsoft.com/office/drawing/2010/main" xmlns="">
+              <a14:hiddenFill xmlns="" xmlns:a14="http://schemas.microsoft.com/office/drawing/2010/main">
                 <a:solidFill>
                   <a:srgbClr val="FFFFFF"/>
                 </a:solidFill>
               </a14:hiddenFill>
             </a:ext>
             <a:ext uri="{91240B29-F687-4f45-9708-019B960494DF}">
-              <a14:hiddenLine xmlns:a14="http://schemas.microsoft.com/office/drawing/2010/main" xmlns="" w="9525" cap="flat">
+              <a14:hiddenLine xmlns="" xmlns:a14="http://schemas.microsoft.com/office/drawing/2010/main" w="9525" cap="flat">
                 <a:solidFill>
                   <a:srgbClr val="000000"/>
                 </a:solidFill>
@@ -27165,7 +26927,7 @@
               </a14:hiddenLine>
             </a:ext>
             <a:ext uri="{AF507438-7753-43e0-B8FC-AC1667EBCBE1}">
-              <a14:hiddenEffects xmlns:a14="http://schemas.microsoft.com/office/drawing/2010/main" xmlns="">
+              <a14:hiddenEffects xmlns="" xmlns:a14="http://schemas.microsoft.com/office/drawing/2010/main">
                 <a:effectLst>
                   <a:outerShdw blurRad="63500" dist="38099" dir="2700000" algn="ctr" rotWithShape="0">
                     <a:srgbClr val="000000">
@@ -27222,7 +26984,7 @@
           <a:effectLst/>
           <a:extLst>
             <a:ext uri="{AF507438-7753-43e0-B8FC-AC1667EBCBE1}">
-              <a14:hiddenEffects xmlns:a14="http://schemas.microsoft.com/office/drawing/2010/main" xmlns="">
+              <a14:hiddenEffects xmlns="" xmlns:a14="http://schemas.microsoft.com/office/drawing/2010/main">
                 <a:effectLst>
                   <a:outerShdw blurRad="63500" dist="38099" dir="2700000" algn="ctr" rotWithShape="0">
                     <a:srgbClr val="000000">
@@ -27272,7 +27034,7 @@
           <a:effectLst/>
           <a:extLst>
             <a:ext uri="{AF507438-7753-43e0-B8FC-AC1667EBCBE1}">
-              <a14:hiddenEffects xmlns:a14="http://schemas.microsoft.com/office/drawing/2010/main" xmlns="">
+              <a14:hiddenEffects xmlns="" xmlns:a14="http://schemas.microsoft.com/office/drawing/2010/main">
                 <a:effectLst>
                   <a:outerShdw blurRad="63500" dist="38099" dir="2700000" algn="ctr" rotWithShape="0">
                     <a:srgbClr val="000000">
@@ -27315,14 +27077,14 @@
           <a:effectLst/>
           <a:extLst>
             <a:ext uri="{909E8E84-426E-40dd-AFC4-6F175D3DCCD1}">
-              <a14:hiddenFill xmlns:a14="http://schemas.microsoft.com/office/drawing/2010/main" xmlns="">
+              <a14:hiddenFill xmlns="" xmlns:a14="http://schemas.microsoft.com/office/drawing/2010/main">
                 <a:solidFill>
                   <a:srgbClr val="FFFFFF"/>
                 </a:solidFill>
               </a14:hiddenFill>
             </a:ext>
             <a:ext uri="{91240B29-F687-4f45-9708-019B960494DF}">
-              <a14:hiddenLine xmlns:a14="http://schemas.microsoft.com/office/drawing/2010/main" xmlns="" w="9525" cap="flat">
+              <a14:hiddenLine xmlns="" xmlns:a14="http://schemas.microsoft.com/office/drawing/2010/main" w="9525" cap="flat">
                 <a:solidFill>
                   <a:srgbClr val="000000"/>
                 </a:solidFill>
@@ -27332,7 +27094,7 @@
               </a14:hiddenLine>
             </a:ext>
             <a:ext uri="{AF507438-7753-43e0-B8FC-AC1667EBCBE1}">
-              <a14:hiddenEffects xmlns:a14="http://schemas.microsoft.com/office/drawing/2010/main" xmlns="">
+              <a14:hiddenEffects xmlns="" xmlns:a14="http://schemas.microsoft.com/office/drawing/2010/main">
                 <a:effectLst>
                   <a:outerShdw blurRad="63500" dist="38099" dir="2700000" algn="ctr" rotWithShape="0">
                     <a:srgbClr val="000000">
@@ -27389,7 +27151,7 @@
           <a:effectLst/>
           <a:extLst>
             <a:ext uri="{AF507438-7753-43e0-B8FC-AC1667EBCBE1}">
-              <a14:hiddenEffects xmlns:a14="http://schemas.microsoft.com/office/drawing/2010/main" xmlns="">
+              <a14:hiddenEffects xmlns="" xmlns:a14="http://schemas.microsoft.com/office/drawing/2010/main">
                 <a:effectLst>
                   <a:outerShdw blurRad="63500" dist="38099" dir="2700000" algn="ctr" rotWithShape="0">
                     <a:srgbClr val="000000">
@@ -27439,7 +27201,7 @@
           <a:effectLst/>
           <a:extLst>
             <a:ext uri="{AF507438-7753-43e0-B8FC-AC1667EBCBE1}">
-              <a14:hiddenEffects xmlns:a14="http://schemas.microsoft.com/office/drawing/2010/main" xmlns="">
+              <a14:hiddenEffects xmlns="" xmlns:a14="http://schemas.microsoft.com/office/drawing/2010/main">
                 <a:effectLst>
                   <a:outerShdw blurRad="63500" dist="38099" dir="2700000" algn="ctr" rotWithShape="0">
                     <a:srgbClr val="000000">
@@ -27482,14 +27244,14 @@
           <a:effectLst/>
           <a:extLst>
             <a:ext uri="{909E8E84-426E-40dd-AFC4-6F175D3DCCD1}">
-              <a14:hiddenFill xmlns:a14="http://schemas.microsoft.com/office/drawing/2010/main" xmlns="">
+              <a14:hiddenFill xmlns="" xmlns:a14="http://schemas.microsoft.com/office/drawing/2010/main">
                 <a:solidFill>
                   <a:srgbClr val="FFFFFF"/>
                 </a:solidFill>
               </a14:hiddenFill>
             </a:ext>
             <a:ext uri="{91240B29-F687-4f45-9708-019B960494DF}">
-              <a14:hiddenLine xmlns:a14="http://schemas.microsoft.com/office/drawing/2010/main" xmlns="" w="9525" cap="flat">
+              <a14:hiddenLine xmlns="" xmlns:a14="http://schemas.microsoft.com/office/drawing/2010/main" w="9525" cap="flat">
                 <a:solidFill>
                   <a:srgbClr val="000000"/>
                 </a:solidFill>
@@ -27499,7 +27261,7 @@
               </a14:hiddenLine>
             </a:ext>
             <a:ext uri="{AF507438-7753-43e0-B8FC-AC1667EBCBE1}">
-              <a14:hiddenEffects xmlns:a14="http://schemas.microsoft.com/office/drawing/2010/main" xmlns="">
+              <a14:hiddenEffects xmlns="" xmlns:a14="http://schemas.microsoft.com/office/drawing/2010/main">
                 <a:effectLst>
                   <a:outerShdw blurRad="63500" dist="38099" dir="2700000" algn="ctr" rotWithShape="0">
                     <a:srgbClr val="000000">
@@ -27556,7 +27318,7 @@
           <a:effectLst/>
           <a:extLst>
             <a:ext uri="{AF507438-7753-43e0-B8FC-AC1667EBCBE1}">
-              <a14:hiddenEffects xmlns:a14="http://schemas.microsoft.com/office/drawing/2010/main" xmlns="">
+              <a14:hiddenEffects xmlns="" xmlns:a14="http://schemas.microsoft.com/office/drawing/2010/main">
                 <a:effectLst>
                   <a:outerShdw blurRad="63500" dist="38099" dir="2700000" algn="ctr" rotWithShape="0">
                     <a:srgbClr val="000000">
@@ -27599,14 +27361,14 @@
           <a:effectLst/>
           <a:extLst>
             <a:ext uri="{909E8E84-426E-40dd-AFC4-6F175D3DCCD1}">
-              <a14:hiddenFill xmlns:a14="http://schemas.microsoft.com/office/drawing/2010/main" xmlns="">
+              <a14:hiddenFill xmlns="" xmlns:a14="http://schemas.microsoft.com/office/drawing/2010/main">
                 <a:solidFill>
                   <a:srgbClr val="FFFFFF"/>
                 </a:solidFill>
               </a14:hiddenFill>
             </a:ext>
             <a:ext uri="{91240B29-F687-4f45-9708-019B960494DF}">
-              <a14:hiddenLine xmlns:a14="http://schemas.microsoft.com/office/drawing/2010/main" xmlns="" w="9525" cap="flat">
+              <a14:hiddenLine xmlns="" xmlns:a14="http://schemas.microsoft.com/office/drawing/2010/main" w="9525" cap="flat">
                 <a:solidFill>
                   <a:srgbClr val="000000"/>
                 </a:solidFill>
@@ -27616,7 +27378,7 @@
               </a14:hiddenLine>
             </a:ext>
             <a:ext uri="{AF507438-7753-43e0-B8FC-AC1667EBCBE1}">
-              <a14:hiddenEffects xmlns:a14="http://schemas.microsoft.com/office/drawing/2010/main" xmlns="">
+              <a14:hiddenEffects xmlns="" xmlns:a14="http://schemas.microsoft.com/office/drawing/2010/main">
                 <a:effectLst>
                   <a:outerShdw blurRad="63500" dist="38099" dir="2700000" algn="ctr" rotWithShape="0">
                     <a:srgbClr val="000000">
@@ -27836,14 +27598,14 @@
           <a:effectLst/>
           <a:extLst>
             <a:ext uri="{909E8E84-426E-40dd-AFC4-6F175D3DCCD1}">
-              <a14:hiddenFill xmlns:a14="http://schemas.microsoft.com/office/drawing/2010/main" xmlns="">
+              <a14:hiddenFill xmlns="" xmlns:a14="http://schemas.microsoft.com/office/drawing/2010/main">
                 <a:solidFill>
                   <a:srgbClr val="FFFFFF"/>
                 </a:solidFill>
               </a14:hiddenFill>
             </a:ext>
             <a:ext uri="{91240B29-F687-4f45-9708-019B960494DF}">
-              <a14:hiddenLine xmlns:a14="http://schemas.microsoft.com/office/drawing/2010/main" xmlns="" w="9525" cap="flat">
+              <a14:hiddenLine xmlns="" xmlns:a14="http://schemas.microsoft.com/office/drawing/2010/main" w="9525" cap="flat">
                 <a:solidFill>
                   <a:srgbClr val="000000"/>
                 </a:solidFill>
@@ -27853,7 +27615,7 @@
               </a14:hiddenLine>
             </a:ext>
             <a:ext uri="{AF507438-7753-43e0-B8FC-AC1667EBCBE1}">
-              <a14:hiddenEffects xmlns:a14="http://schemas.microsoft.com/office/drawing/2010/main" xmlns="">
+              <a14:hiddenEffects xmlns="" xmlns:a14="http://schemas.microsoft.com/office/drawing/2010/main">
                 <a:effectLst>
                   <a:outerShdw blurRad="63500" dist="38099" dir="2700000" algn="ctr" rotWithShape="0">
                     <a:srgbClr val="000000">
@@ -28091,14 +27853,14 @@
           <a:effectLst/>
           <a:extLst>
             <a:ext uri="{909E8E84-426E-40dd-AFC4-6F175D3DCCD1}">
-              <a14:hiddenFill xmlns:a14="http://schemas.microsoft.com/office/drawing/2010/main" xmlns="">
+              <a14:hiddenFill xmlns="" xmlns:a14="http://schemas.microsoft.com/office/drawing/2010/main">
                 <a:solidFill>
                   <a:srgbClr val="FFFFFF"/>
                 </a:solidFill>
               </a14:hiddenFill>
             </a:ext>
             <a:ext uri="{91240B29-F687-4f45-9708-019B960494DF}">
-              <a14:hiddenLine xmlns:a14="http://schemas.microsoft.com/office/drawing/2010/main" xmlns="" w="9525" cap="flat">
+              <a14:hiddenLine xmlns="" xmlns:a14="http://schemas.microsoft.com/office/drawing/2010/main" w="9525" cap="flat">
                 <a:solidFill>
                   <a:srgbClr val="808080"/>
                 </a:solidFill>
@@ -28108,7 +27870,7 @@
               </a14:hiddenLine>
             </a:ext>
             <a:ext uri="{AF507438-7753-43e0-B8FC-AC1667EBCBE1}">
-              <a14:hiddenEffects xmlns:a14="http://schemas.microsoft.com/office/drawing/2010/main" xmlns="">
+              <a14:hiddenEffects xmlns="" xmlns:a14="http://schemas.microsoft.com/office/drawing/2010/main">
                 <a:effectLst>
                   <a:outerShdw blurRad="63500" dist="38099" dir="2700000" algn="ctr" rotWithShape="0">
                     <a:srgbClr val="000000">
@@ -28345,7 +28107,7 @@
           <a:effectLst/>
           <a:extLst>
             <a:ext uri="{AF507438-7753-43e0-B8FC-AC1667EBCBE1}">
-              <a14:hiddenEffects xmlns:a14="http://schemas.microsoft.com/office/drawing/2010/main" xmlns="">
+              <a14:hiddenEffects xmlns="" xmlns:a14="http://schemas.microsoft.com/office/drawing/2010/main">
                 <a:effectLst>
                   <a:outerShdw blurRad="63500" dist="38099" dir="2700000" algn="ctr" rotWithShape="0">
                     <a:srgbClr val="000000">
@@ -28388,14 +28150,14 @@
           <a:effectLst/>
           <a:extLst>
             <a:ext uri="{909E8E84-426E-40dd-AFC4-6F175D3DCCD1}">
-              <a14:hiddenFill xmlns:a14="http://schemas.microsoft.com/office/drawing/2010/main" xmlns="">
+              <a14:hiddenFill xmlns="" xmlns:a14="http://schemas.microsoft.com/office/drawing/2010/main">
                 <a:solidFill>
                   <a:srgbClr val="FFFFFF"/>
                 </a:solidFill>
               </a14:hiddenFill>
             </a:ext>
             <a:ext uri="{91240B29-F687-4f45-9708-019B960494DF}">
-              <a14:hiddenLine xmlns:a14="http://schemas.microsoft.com/office/drawing/2010/main" xmlns="" w="9525" cap="flat">
+              <a14:hiddenLine xmlns="" xmlns:a14="http://schemas.microsoft.com/office/drawing/2010/main" w="9525" cap="flat">
                 <a:solidFill>
                   <a:srgbClr val="000000"/>
                 </a:solidFill>
@@ -28405,7 +28167,7 @@
               </a14:hiddenLine>
             </a:ext>
             <a:ext uri="{AF507438-7753-43e0-B8FC-AC1667EBCBE1}">
-              <a14:hiddenEffects xmlns:a14="http://schemas.microsoft.com/office/drawing/2010/main" xmlns="">
+              <a14:hiddenEffects xmlns="" xmlns:a14="http://schemas.microsoft.com/office/drawing/2010/main">
                 <a:effectLst>
                   <a:outerShdw blurRad="63500" dist="38099" dir="2700000" algn="ctr" rotWithShape="0">
                     <a:srgbClr val="000000">
@@ -28455,14 +28217,14 @@
           <a:effectLst/>
           <a:extLst>
             <a:ext uri="{909E8E84-426E-40dd-AFC4-6F175D3DCCD1}">
-              <a14:hiddenFill xmlns:a14="http://schemas.microsoft.com/office/drawing/2010/main" xmlns="">
+              <a14:hiddenFill xmlns="" xmlns:a14="http://schemas.microsoft.com/office/drawing/2010/main">
                 <a:solidFill>
                   <a:srgbClr val="FFFFFF"/>
                 </a:solidFill>
               </a14:hiddenFill>
             </a:ext>
             <a:ext uri="{91240B29-F687-4f45-9708-019B960494DF}">
-              <a14:hiddenLine xmlns:a14="http://schemas.microsoft.com/office/drawing/2010/main" xmlns="" w="9525" cap="flat">
+              <a14:hiddenLine xmlns="" xmlns:a14="http://schemas.microsoft.com/office/drawing/2010/main" w="9525" cap="flat">
                 <a:solidFill>
                   <a:srgbClr val="000000"/>
                 </a:solidFill>
@@ -28472,7 +28234,7 @@
               </a14:hiddenLine>
             </a:ext>
             <a:ext uri="{AF507438-7753-43e0-B8FC-AC1667EBCBE1}">
-              <a14:hiddenEffects xmlns:a14="http://schemas.microsoft.com/office/drawing/2010/main" xmlns="">
+              <a14:hiddenEffects xmlns="" xmlns:a14="http://schemas.microsoft.com/office/drawing/2010/main">
                 <a:effectLst>
                   <a:outerShdw blurRad="63500" dist="38099" dir="2700000" algn="ctr" rotWithShape="0">
                     <a:srgbClr val="000000">
@@ -28522,14 +28284,14 @@
           <a:effectLst/>
           <a:extLst>
             <a:ext uri="{909E8E84-426E-40dd-AFC4-6F175D3DCCD1}">
-              <a14:hiddenFill xmlns:a14="http://schemas.microsoft.com/office/drawing/2010/main" xmlns="">
+              <a14:hiddenFill xmlns="" xmlns:a14="http://schemas.microsoft.com/office/drawing/2010/main">
                 <a:solidFill>
                   <a:srgbClr val="FFFFFF"/>
                 </a:solidFill>
               </a14:hiddenFill>
             </a:ext>
             <a:ext uri="{91240B29-F687-4f45-9708-019B960494DF}">
-              <a14:hiddenLine xmlns:a14="http://schemas.microsoft.com/office/drawing/2010/main" xmlns="" w="9525" cap="flat">
+              <a14:hiddenLine xmlns="" xmlns:a14="http://schemas.microsoft.com/office/drawing/2010/main" w="9525" cap="flat">
                 <a:solidFill>
                   <a:srgbClr val="000000"/>
                 </a:solidFill>
@@ -28539,7 +28301,7 @@
               </a14:hiddenLine>
             </a:ext>
             <a:ext uri="{AF507438-7753-43e0-B8FC-AC1667EBCBE1}">
-              <a14:hiddenEffects xmlns:a14="http://schemas.microsoft.com/office/drawing/2010/main" xmlns="">
+              <a14:hiddenEffects xmlns="" xmlns:a14="http://schemas.microsoft.com/office/drawing/2010/main">
                 <a:effectLst>
                   <a:outerShdw blurRad="63500" dist="38099" dir="2700000" algn="ctr" rotWithShape="0">
                     <a:srgbClr val="000000">
@@ -28589,14 +28351,14 @@
           <a:effectLst/>
           <a:extLst>
             <a:ext uri="{909E8E84-426E-40dd-AFC4-6F175D3DCCD1}">
-              <a14:hiddenFill xmlns:a14="http://schemas.microsoft.com/office/drawing/2010/main" xmlns="">
+              <a14:hiddenFill xmlns="" xmlns:a14="http://schemas.microsoft.com/office/drawing/2010/main">
                 <a:solidFill>
                   <a:srgbClr val="FFFFFF"/>
                 </a:solidFill>
               </a14:hiddenFill>
             </a:ext>
             <a:ext uri="{91240B29-F687-4f45-9708-019B960494DF}">
-              <a14:hiddenLine xmlns:a14="http://schemas.microsoft.com/office/drawing/2010/main" xmlns="" w="9525" cap="flat">
+              <a14:hiddenLine xmlns="" xmlns:a14="http://schemas.microsoft.com/office/drawing/2010/main" w="9525" cap="flat">
                 <a:solidFill>
                   <a:srgbClr val="000000"/>
                 </a:solidFill>
@@ -28606,7 +28368,7 @@
               </a14:hiddenLine>
             </a:ext>
             <a:ext uri="{AF507438-7753-43e0-B8FC-AC1667EBCBE1}">
-              <a14:hiddenEffects xmlns:a14="http://schemas.microsoft.com/office/drawing/2010/main" xmlns="">
+              <a14:hiddenEffects xmlns="" xmlns:a14="http://schemas.microsoft.com/office/drawing/2010/main">
                 <a:effectLst>
                   <a:outerShdw blurRad="63500" dist="38099" dir="2700000" algn="ctr" rotWithShape="0">
                     <a:srgbClr val="000000">
@@ -28656,14 +28418,14 @@
           <a:effectLst/>
           <a:extLst>
             <a:ext uri="{909E8E84-426E-40dd-AFC4-6F175D3DCCD1}">
-              <a14:hiddenFill xmlns:a14="http://schemas.microsoft.com/office/drawing/2010/main" xmlns="">
+              <a14:hiddenFill xmlns="" xmlns:a14="http://schemas.microsoft.com/office/drawing/2010/main">
                 <a:solidFill>
                   <a:srgbClr val="FFFFFF"/>
                 </a:solidFill>
               </a14:hiddenFill>
             </a:ext>
             <a:ext uri="{91240B29-F687-4f45-9708-019B960494DF}">
-              <a14:hiddenLine xmlns:a14="http://schemas.microsoft.com/office/drawing/2010/main" xmlns="" w="9525" cap="flat">
+              <a14:hiddenLine xmlns="" xmlns:a14="http://schemas.microsoft.com/office/drawing/2010/main" w="9525" cap="flat">
                 <a:solidFill>
                   <a:srgbClr val="000000"/>
                 </a:solidFill>
@@ -28673,7 +28435,7 @@
               </a14:hiddenLine>
             </a:ext>
             <a:ext uri="{AF507438-7753-43e0-B8FC-AC1667EBCBE1}">
-              <a14:hiddenEffects xmlns:a14="http://schemas.microsoft.com/office/drawing/2010/main" xmlns="">
+              <a14:hiddenEffects xmlns="" xmlns:a14="http://schemas.microsoft.com/office/drawing/2010/main">
                 <a:effectLst>
                   <a:outerShdw blurRad="63500" dist="38099" dir="2700000" algn="ctr" rotWithShape="0">
                     <a:srgbClr val="000000">
@@ -28723,14 +28485,14 @@
           <a:effectLst/>
           <a:extLst>
             <a:ext uri="{909E8E84-426E-40dd-AFC4-6F175D3DCCD1}">
-              <a14:hiddenFill xmlns:a14="http://schemas.microsoft.com/office/drawing/2010/main" xmlns="">
+              <a14:hiddenFill xmlns="" xmlns:a14="http://schemas.microsoft.com/office/drawing/2010/main">
                 <a:solidFill>
                   <a:srgbClr val="FFFFFF"/>
                 </a:solidFill>
               </a14:hiddenFill>
             </a:ext>
             <a:ext uri="{91240B29-F687-4f45-9708-019B960494DF}">
-              <a14:hiddenLine xmlns:a14="http://schemas.microsoft.com/office/drawing/2010/main" xmlns="" w="9525" cap="flat">
+              <a14:hiddenLine xmlns="" xmlns:a14="http://schemas.microsoft.com/office/drawing/2010/main" w="9525" cap="flat">
                 <a:solidFill>
                   <a:srgbClr val="000000"/>
                 </a:solidFill>
@@ -28740,7 +28502,7 @@
               </a14:hiddenLine>
             </a:ext>
             <a:ext uri="{AF507438-7753-43e0-B8FC-AC1667EBCBE1}">
-              <a14:hiddenEffects xmlns:a14="http://schemas.microsoft.com/office/drawing/2010/main" xmlns="">
+              <a14:hiddenEffects xmlns="" xmlns:a14="http://schemas.microsoft.com/office/drawing/2010/main">
                 <a:effectLst>
                   <a:outerShdw blurRad="63500" dist="38099" dir="2700000" algn="ctr" rotWithShape="0">
                     <a:srgbClr val="000000">
@@ -28960,14 +28722,14 @@
           <a:effectLst/>
           <a:extLst>
             <a:ext uri="{909E8E84-426E-40dd-AFC4-6F175D3DCCD1}">
-              <a14:hiddenFill xmlns:a14="http://schemas.microsoft.com/office/drawing/2010/main" xmlns="">
+              <a14:hiddenFill xmlns="" xmlns:a14="http://schemas.microsoft.com/office/drawing/2010/main">
                 <a:solidFill>
                   <a:srgbClr val="FFFFFF"/>
                 </a:solidFill>
               </a14:hiddenFill>
             </a:ext>
             <a:ext uri="{91240B29-F687-4f45-9708-019B960494DF}">
-              <a14:hiddenLine xmlns:a14="http://schemas.microsoft.com/office/drawing/2010/main" xmlns="" w="9525" cap="flat">
+              <a14:hiddenLine xmlns="" xmlns:a14="http://schemas.microsoft.com/office/drawing/2010/main" w="9525" cap="flat">
                 <a:solidFill>
                   <a:srgbClr val="000000"/>
                 </a:solidFill>
@@ -28977,7 +28739,7 @@
               </a14:hiddenLine>
             </a:ext>
             <a:ext uri="{AF507438-7753-43e0-B8FC-AC1667EBCBE1}">
-              <a14:hiddenEffects xmlns:a14="http://schemas.microsoft.com/office/drawing/2010/main" xmlns="">
+              <a14:hiddenEffects xmlns="" xmlns:a14="http://schemas.microsoft.com/office/drawing/2010/main">
                 <a:effectLst>
                   <a:outerShdw blurRad="63500" dist="38099" dir="2700000" algn="ctr" rotWithShape="0">
                     <a:srgbClr val="000000">
@@ -29027,14 +28789,14 @@
           <a:effectLst/>
           <a:extLst>
             <a:ext uri="{909E8E84-426E-40dd-AFC4-6F175D3DCCD1}">
-              <a14:hiddenFill xmlns:a14="http://schemas.microsoft.com/office/drawing/2010/main" xmlns="">
+              <a14:hiddenFill xmlns="" xmlns:a14="http://schemas.microsoft.com/office/drawing/2010/main">
                 <a:solidFill>
                   <a:srgbClr val="FFFFFF"/>
                 </a:solidFill>
               </a14:hiddenFill>
             </a:ext>
             <a:ext uri="{91240B29-F687-4f45-9708-019B960494DF}">
-              <a14:hiddenLine xmlns:a14="http://schemas.microsoft.com/office/drawing/2010/main" xmlns="" w="9525" cap="flat">
+              <a14:hiddenLine xmlns="" xmlns:a14="http://schemas.microsoft.com/office/drawing/2010/main" w="9525" cap="flat">
                 <a:solidFill>
                   <a:srgbClr val="000000"/>
                 </a:solidFill>
@@ -29044,7 +28806,7 @@
               </a14:hiddenLine>
             </a:ext>
             <a:ext uri="{AF507438-7753-43e0-B8FC-AC1667EBCBE1}">
-              <a14:hiddenEffects xmlns:a14="http://schemas.microsoft.com/office/drawing/2010/main" xmlns="">
+              <a14:hiddenEffects xmlns="" xmlns:a14="http://schemas.microsoft.com/office/drawing/2010/main">
                 <a:effectLst>
                   <a:outerShdw blurRad="63500" dist="38099" dir="2700000" algn="ctr" rotWithShape="0">
                     <a:srgbClr val="000000">
@@ -29094,14 +28856,14 @@
           <a:effectLst/>
           <a:extLst>
             <a:ext uri="{909E8E84-426E-40dd-AFC4-6F175D3DCCD1}">
-              <a14:hiddenFill xmlns:a14="http://schemas.microsoft.com/office/drawing/2010/main" xmlns="">
+              <a14:hiddenFill xmlns="" xmlns:a14="http://schemas.microsoft.com/office/drawing/2010/main">
                 <a:solidFill>
                   <a:srgbClr val="FFFFFF"/>
                 </a:solidFill>
               </a14:hiddenFill>
             </a:ext>
             <a:ext uri="{91240B29-F687-4f45-9708-019B960494DF}">
-              <a14:hiddenLine xmlns:a14="http://schemas.microsoft.com/office/drawing/2010/main" xmlns="" w="9525" cap="flat">
+              <a14:hiddenLine xmlns="" xmlns:a14="http://schemas.microsoft.com/office/drawing/2010/main" w="9525" cap="flat">
                 <a:solidFill>
                   <a:srgbClr val="000000"/>
                 </a:solidFill>
@@ -29111,7 +28873,7 @@
               </a14:hiddenLine>
             </a:ext>
             <a:ext uri="{AF507438-7753-43e0-B8FC-AC1667EBCBE1}">
-              <a14:hiddenEffects xmlns:a14="http://schemas.microsoft.com/office/drawing/2010/main" xmlns="">
+              <a14:hiddenEffects xmlns="" xmlns:a14="http://schemas.microsoft.com/office/drawing/2010/main">
                 <a:effectLst>
                   <a:outerShdw blurRad="63500" dist="38099" dir="2700000" algn="ctr" rotWithShape="0">
                     <a:srgbClr val="000000">
@@ -29161,14 +28923,14 @@
           <a:effectLst/>
           <a:extLst>
             <a:ext uri="{909E8E84-426E-40dd-AFC4-6F175D3DCCD1}">
-              <a14:hiddenFill xmlns:a14="http://schemas.microsoft.com/office/drawing/2010/main" xmlns="">
+              <a14:hiddenFill xmlns="" xmlns:a14="http://schemas.microsoft.com/office/drawing/2010/main">
                 <a:solidFill>
                   <a:srgbClr val="FFFFFF"/>
                 </a:solidFill>
               </a14:hiddenFill>
             </a:ext>
             <a:ext uri="{91240B29-F687-4f45-9708-019B960494DF}">
-              <a14:hiddenLine xmlns:a14="http://schemas.microsoft.com/office/drawing/2010/main" xmlns="" w="9525" cap="flat">
+              <a14:hiddenLine xmlns="" xmlns:a14="http://schemas.microsoft.com/office/drawing/2010/main" w="9525" cap="flat">
                 <a:solidFill>
                   <a:srgbClr val="000000"/>
                 </a:solidFill>
@@ -29178,7 +28940,7 @@
               </a14:hiddenLine>
             </a:ext>
             <a:ext uri="{AF507438-7753-43e0-B8FC-AC1667EBCBE1}">
-              <a14:hiddenEffects xmlns:a14="http://schemas.microsoft.com/office/drawing/2010/main" xmlns="">
+              <a14:hiddenEffects xmlns="" xmlns:a14="http://schemas.microsoft.com/office/drawing/2010/main">
                 <a:effectLst>
                   <a:outerShdw blurRad="63500" dist="38099" dir="2700000" algn="ctr" rotWithShape="0">
                     <a:srgbClr val="000000">
@@ -29228,14 +28990,14 @@
           <a:effectLst/>
           <a:extLst>
             <a:ext uri="{909E8E84-426E-40dd-AFC4-6F175D3DCCD1}">
-              <a14:hiddenFill xmlns:a14="http://schemas.microsoft.com/office/drawing/2010/main" xmlns="">
+              <a14:hiddenFill xmlns="" xmlns:a14="http://schemas.microsoft.com/office/drawing/2010/main">
                 <a:solidFill>
                   <a:srgbClr val="FFFFFF"/>
                 </a:solidFill>
               </a14:hiddenFill>
             </a:ext>
             <a:ext uri="{91240B29-F687-4f45-9708-019B960494DF}">
-              <a14:hiddenLine xmlns:a14="http://schemas.microsoft.com/office/drawing/2010/main" xmlns="" w="9525" cap="flat">
+              <a14:hiddenLine xmlns="" xmlns:a14="http://schemas.microsoft.com/office/drawing/2010/main" w="9525" cap="flat">
                 <a:solidFill>
                   <a:srgbClr val="FF6600"/>
                 </a:solidFill>
@@ -29245,7 +29007,7 @@
               </a14:hiddenLine>
             </a:ext>
             <a:ext uri="{AF507438-7753-43e0-B8FC-AC1667EBCBE1}">
-              <a14:hiddenEffects xmlns:a14="http://schemas.microsoft.com/office/drawing/2010/main" xmlns="">
+              <a14:hiddenEffects xmlns="" xmlns:a14="http://schemas.microsoft.com/office/drawing/2010/main">
                 <a:effectLst>
                   <a:outerShdw blurRad="63500" dist="38099" dir="2700000" algn="ctr" rotWithShape="0">
                     <a:srgbClr val="000000">
@@ -29295,14 +29057,14 @@
           <a:effectLst/>
           <a:extLst>
             <a:ext uri="{909E8E84-426E-40dd-AFC4-6F175D3DCCD1}">
-              <a14:hiddenFill xmlns:a14="http://schemas.microsoft.com/office/drawing/2010/main" xmlns="">
+              <a14:hiddenFill xmlns="" xmlns:a14="http://schemas.microsoft.com/office/drawing/2010/main">
                 <a:solidFill>
                   <a:srgbClr val="FFFFFF"/>
                 </a:solidFill>
               </a14:hiddenFill>
             </a:ext>
             <a:ext uri="{91240B29-F687-4f45-9708-019B960494DF}">
-              <a14:hiddenLine xmlns:a14="http://schemas.microsoft.com/office/drawing/2010/main" xmlns="" w="9525" cap="flat">
+              <a14:hiddenLine xmlns="" xmlns:a14="http://schemas.microsoft.com/office/drawing/2010/main" w="9525" cap="flat">
                 <a:solidFill>
                   <a:srgbClr val="FF6600"/>
                 </a:solidFill>
@@ -29312,7 +29074,7 @@
               </a14:hiddenLine>
             </a:ext>
             <a:ext uri="{AF507438-7753-43e0-B8FC-AC1667EBCBE1}">
-              <a14:hiddenEffects xmlns:a14="http://schemas.microsoft.com/office/drawing/2010/main" xmlns="">
+              <a14:hiddenEffects xmlns="" xmlns:a14="http://schemas.microsoft.com/office/drawing/2010/main">
                 <a:effectLst>
                   <a:outerShdw blurRad="63500" dist="38099" dir="2700000" algn="ctr" rotWithShape="0">
                     <a:srgbClr val="000000">
@@ -29362,14 +29124,14 @@
           <a:effectLst/>
           <a:extLst>
             <a:ext uri="{909E8E84-426E-40dd-AFC4-6F175D3DCCD1}">
-              <a14:hiddenFill xmlns:a14="http://schemas.microsoft.com/office/drawing/2010/main" xmlns="">
+              <a14:hiddenFill xmlns="" xmlns:a14="http://schemas.microsoft.com/office/drawing/2010/main">
                 <a:solidFill>
                   <a:srgbClr val="FFFFFF"/>
                 </a:solidFill>
               </a14:hiddenFill>
             </a:ext>
             <a:ext uri="{91240B29-F687-4f45-9708-019B960494DF}">
-              <a14:hiddenLine xmlns:a14="http://schemas.microsoft.com/office/drawing/2010/main" xmlns="" w="9525" cap="flat">
+              <a14:hiddenLine xmlns="" xmlns:a14="http://schemas.microsoft.com/office/drawing/2010/main" w="9525" cap="flat">
                 <a:solidFill>
                   <a:srgbClr val="FF6600"/>
                 </a:solidFill>
@@ -29379,7 +29141,7 @@
               </a14:hiddenLine>
             </a:ext>
             <a:ext uri="{AF507438-7753-43e0-B8FC-AC1667EBCBE1}">
-              <a14:hiddenEffects xmlns:a14="http://schemas.microsoft.com/office/drawing/2010/main" xmlns="">
+              <a14:hiddenEffects xmlns="" xmlns:a14="http://schemas.microsoft.com/office/drawing/2010/main">
                 <a:effectLst>
                   <a:outerShdw blurRad="63500" dist="38099" dir="2700000" algn="ctr" rotWithShape="0">
                     <a:srgbClr val="000000">
@@ -29429,14 +29191,14 @@
           <a:effectLst/>
           <a:extLst>
             <a:ext uri="{909E8E84-426E-40dd-AFC4-6F175D3DCCD1}">
-              <a14:hiddenFill xmlns:a14="http://schemas.microsoft.com/office/drawing/2010/main" xmlns="">
+              <a14:hiddenFill xmlns="" xmlns:a14="http://schemas.microsoft.com/office/drawing/2010/main">
                 <a:solidFill>
                   <a:srgbClr val="FFFFFF"/>
                 </a:solidFill>
               </a14:hiddenFill>
             </a:ext>
             <a:ext uri="{91240B29-F687-4f45-9708-019B960494DF}">
-              <a14:hiddenLine xmlns:a14="http://schemas.microsoft.com/office/drawing/2010/main" xmlns="" w="9525" cap="flat">
+              <a14:hiddenLine xmlns="" xmlns:a14="http://schemas.microsoft.com/office/drawing/2010/main" w="9525" cap="flat">
                 <a:solidFill>
                   <a:srgbClr val="FF6600"/>
                 </a:solidFill>
@@ -29446,7 +29208,7 @@
               </a14:hiddenLine>
             </a:ext>
             <a:ext uri="{AF507438-7753-43e0-B8FC-AC1667EBCBE1}">
-              <a14:hiddenEffects xmlns:a14="http://schemas.microsoft.com/office/drawing/2010/main" xmlns="">
+              <a14:hiddenEffects xmlns="" xmlns:a14="http://schemas.microsoft.com/office/drawing/2010/main">
                 <a:effectLst>
                   <a:outerShdw blurRad="63500" dist="38099" dir="2700000" algn="ctr" rotWithShape="0">
                     <a:srgbClr val="000000">
@@ -29496,14 +29258,14 @@
           <a:effectLst/>
           <a:extLst>
             <a:ext uri="{909E8E84-426E-40dd-AFC4-6F175D3DCCD1}">
-              <a14:hiddenFill xmlns:a14="http://schemas.microsoft.com/office/drawing/2010/main" xmlns="">
+              <a14:hiddenFill xmlns="" xmlns:a14="http://schemas.microsoft.com/office/drawing/2010/main">
                 <a:solidFill>
                   <a:srgbClr val="FFFFFF"/>
                 </a:solidFill>
               </a14:hiddenFill>
             </a:ext>
             <a:ext uri="{91240B29-F687-4f45-9708-019B960494DF}">
-              <a14:hiddenLine xmlns:a14="http://schemas.microsoft.com/office/drawing/2010/main" xmlns="" w="9525" cap="flat">
+              <a14:hiddenLine xmlns="" xmlns:a14="http://schemas.microsoft.com/office/drawing/2010/main" w="9525" cap="flat">
                 <a:solidFill>
                   <a:srgbClr val="000000"/>
                 </a:solidFill>
@@ -29513,7 +29275,7 @@
               </a14:hiddenLine>
             </a:ext>
             <a:ext uri="{AF507438-7753-43e0-B8FC-AC1667EBCBE1}">
-              <a14:hiddenEffects xmlns:a14="http://schemas.microsoft.com/office/drawing/2010/main" xmlns="">
+              <a14:hiddenEffects xmlns="" xmlns:a14="http://schemas.microsoft.com/office/drawing/2010/main">
                 <a:effectLst>
                   <a:outerShdw blurRad="63500" dist="38099" dir="2700000" algn="ctr" rotWithShape="0">
                     <a:srgbClr val="000000">
@@ -29776,7 +29538,7 @@
           <a:effectLst/>
           <a:extLst>
             <a:ext uri="{AF507438-7753-43e0-B8FC-AC1667EBCBE1}">
-              <a14:hiddenEffects xmlns:a14="http://schemas.microsoft.com/office/drawing/2010/main" xmlns="">
+              <a14:hiddenEffects xmlns="" xmlns:a14="http://schemas.microsoft.com/office/drawing/2010/main">
                 <a:effectLst>
                   <a:outerShdw blurRad="63500" dist="38099" dir="2700000" algn="ctr" rotWithShape="0">
                     <a:srgbClr val="000000">
@@ -29832,7 +29594,7 @@
           <a:effectLst/>
           <a:extLst>
             <a:ext uri="{AF507438-7753-43e0-B8FC-AC1667EBCBE1}">
-              <a14:hiddenEffects xmlns:a14="http://schemas.microsoft.com/office/drawing/2010/main" xmlns="">
+              <a14:hiddenEffects xmlns="" xmlns:a14="http://schemas.microsoft.com/office/drawing/2010/main">
                 <a:effectLst>
                   <a:outerShdw blurRad="63500" dist="38099" dir="2700000" algn="ctr" rotWithShape="0">
                     <a:srgbClr val="000000">
@@ -29888,7 +29650,7 @@
           <a:effectLst/>
           <a:extLst>
             <a:ext uri="{AF507438-7753-43e0-B8FC-AC1667EBCBE1}">
-              <a14:hiddenEffects xmlns:a14="http://schemas.microsoft.com/office/drawing/2010/main" xmlns="">
+              <a14:hiddenEffects xmlns="" xmlns:a14="http://schemas.microsoft.com/office/drawing/2010/main">
                 <a:effectLst>
                   <a:outerShdw blurRad="63500" dist="38099" dir="2700000" algn="ctr" rotWithShape="0">
                     <a:srgbClr val="000000">
@@ -29944,7 +29706,7 @@
           <a:effectLst/>
           <a:extLst>
             <a:ext uri="{AF507438-7753-43e0-B8FC-AC1667EBCBE1}">
-              <a14:hiddenEffects xmlns:a14="http://schemas.microsoft.com/office/drawing/2010/main" xmlns="">
+              <a14:hiddenEffects xmlns="" xmlns:a14="http://schemas.microsoft.com/office/drawing/2010/main">
                 <a:effectLst>
                   <a:outerShdw blurRad="63500" dist="38099" dir="2700000" algn="ctr" rotWithShape="0">
                     <a:srgbClr val="000000">
@@ -30000,7 +29762,7 @@
           <a:effectLst/>
           <a:extLst>
             <a:ext uri="{AF507438-7753-43e0-B8FC-AC1667EBCBE1}">
-              <a14:hiddenEffects xmlns:a14="http://schemas.microsoft.com/office/drawing/2010/main" xmlns="">
+              <a14:hiddenEffects xmlns="" xmlns:a14="http://schemas.microsoft.com/office/drawing/2010/main">
                 <a:effectLst>
                   <a:outerShdw blurRad="63500" dist="38099" dir="2700000" algn="ctr" rotWithShape="0">
                     <a:srgbClr val="000000">
@@ -30048,12 +29810,12 @@
           <a:effectLst/>
           <a:extLst>
             <a:ext uri="{909E8E84-426E-40dd-AFC4-6F175D3DCCD1}">
-              <a14:hiddenFill xmlns:a14="http://schemas.microsoft.com/office/drawing/2010/main" xmlns="">
+              <a14:hiddenFill xmlns="" xmlns:a14="http://schemas.microsoft.com/office/drawing/2010/main">
                 <a:noFill/>
               </a14:hiddenFill>
             </a:ext>
             <a:ext uri="{AF507438-7753-43e0-B8FC-AC1667EBCBE1}">
-              <a14:hiddenEffects xmlns:a14="http://schemas.microsoft.com/office/drawing/2010/main" xmlns="">
+              <a14:hiddenEffects xmlns="" xmlns:a14="http://schemas.microsoft.com/office/drawing/2010/main">
                 <a:effectLst>
                   <a:outerShdw blurRad="63500" dist="38099" dir="2700000" algn="ctr" rotWithShape="0">
                     <a:srgbClr val="000000">
@@ -30102,14 +29864,14 @@
           <a:effectLst/>
           <a:extLst>
             <a:ext uri="{909E8E84-426E-40dd-AFC4-6F175D3DCCD1}">
-              <a14:hiddenFill xmlns:a14="http://schemas.microsoft.com/office/drawing/2010/main" xmlns="">
+              <a14:hiddenFill xmlns="" xmlns:a14="http://schemas.microsoft.com/office/drawing/2010/main">
                 <a:solidFill>
                   <a:srgbClr val="FFFFFF"/>
                 </a:solidFill>
               </a14:hiddenFill>
             </a:ext>
             <a:ext uri="{91240B29-F687-4f45-9708-019B960494DF}">
-              <a14:hiddenLine xmlns:a14="http://schemas.microsoft.com/office/drawing/2010/main" xmlns="" w="9525" cap="flat">
+              <a14:hiddenLine xmlns="" xmlns:a14="http://schemas.microsoft.com/office/drawing/2010/main" w="9525" cap="flat">
                 <a:solidFill>
                   <a:srgbClr val="000000"/>
                 </a:solidFill>
@@ -30119,7 +29881,7 @@
               </a14:hiddenLine>
             </a:ext>
             <a:ext uri="{AF507438-7753-43e0-B8FC-AC1667EBCBE1}">
-              <a14:hiddenEffects xmlns:a14="http://schemas.microsoft.com/office/drawing/2010/main" xmlns="">
+              <a14:hiddenEffects xmlns="" xmlns:a14="http://schemas.microsoft.com/office/drawing/2010/main">
                 <a:effectLst>
                   <a:outerShdw blurRad="63500" dist="38099" dir="2700000" algn="ctr" rotWithShape="0">
                     <a:srgbClr val="000000">
@@ -30222,14 +29984,14 @@
           <a:effectLst/>
           <a:extLst>
             <a:ext uri="{909E8E84-426E-40dd-AFC4-6F175D3DCCD1}">
-              <a14:hiddenFill xmlns:a14="http://schemas.microsoft.com/office/drawing/2010/main" xmlns="">
+              <a14:hiddenFill xmlns="" xmlns:a14="http://schemas.microsoft.com/office/drawing/2010/main">
                 <a:solidFill>
                   <a:srgbClr val="FFFFFF"/>
                 </a:solidFill>
               </a14:hiddenFill>
             </a:ext>
             <a:ext uri="{91240B29-F687-4f45-9708-019B960494DF}">
-              <a14:hiddenLine xmlns:a14="http://schemas.microsoft.com/office/drawing/2010/main" xmlns="" w="9525" cap="flat">
+              <a14:hiddenLine xmlns="" xmlns:a14="http://schemas.microsoft.com/office/drawing/2010/main" w="9525" cap="flat">
                 <a:solidFill>
                   <a:srgbClr val="000000"/>
                 </a:solidFill>
@@ -30239,7 +30001,7 @@
               </a14:hiddenLine>
             </a:ext>
             <a:ext uri="{AF507438-7753-43e0-B8FC-AC1667EBCBE1}">
-              <a14:hiddenEffects xmlns:a14="http://schemas.microsoft.com/office/drawing/2010/main" xmlns="">
+              <a14:hiddenEffects xmlns="" xmlns:a14="http://schemas.microsoft.com/office/drawing/2010/main">
                 <a:effectLst>
                   <a:outerShdw blurRad="63500" dist="38099" dir="2700000" algn="ctr" rotWithShape="0">
                     <a:srgbClr val="000000">
@@ -30513,7 +30275,7 @@
             <a:effectLst/>
             <a:extLst>
               <a:ext uri="{909E8E84-426E-40dd-AFC4-6F175D3DCCD1}">
-                <a14:hiddenFill xmlns:a14="http://schemas.microsoft.com/office/drawing/2010/main" xmlns="">
+                <a14:hiddenFill xmlns="" xmlns:a14="http://schemas.microsoft.com/office/drawing/2010/main">
                   <a:blipFill dpi="0" rotWithShape="0">
                     <a:blip/>
                     <a:srcRect/>
@@ -30524,7 +30286,7 @@
                 </a14:hiddenFill>
               </a:ext>
               <a:ext uri="{91240B29-F687-4f45-9708-019B960494DF}">
-                <a14:hiddenLine xmlns:a14="http://schemas.microsoft.com/office/drawing/2010/main" xmlns="" w="9525" cap="flat">
+                <a14:hiddenLine xmlns="" xmlns:a14="http://schemas.microsoft.com/office/drawing/2010/main" w="9525" cap="flat">
                   <a:solidFill>
                     <a:srgbClr val="808080"/>
                   </a:solidFill>
@@ -30534,7 +30296,7 @@
                 </a14:hiddenLine>
               </a:ext>
               <a:ext uri="{AF507438-7753-43e0-B8FC-AC1667EBCBE1}">
-                <a14:hiddenEffects xmlns:a14="http://schemas.microsoft.com/office/drawing/2010/main" xmlns="">
+                <a14:hiddenEffects xmlns="" xmlns:a14="http://schemas.microsoft.com/office/drawing/2010/main">
                   <a:effectLst>
                     <a:outerShdw blurRad="63500" dist="38099" dir="2700000" algn="ctr" rotWithShape="0">
                       <a:srgbClr val="000000">
@@ -30583,7 +30345,7 @@
             <a:effectLst/>
             <a:extLst>
               <a:ext uri="{909E8E84-426E-40dd-AFC4-6F175D3DCCD1}">
-                <a14:hiddenFill xmlns:a14="http://schemas.microsoft.com/office/drawing/2010/main" xmlns="">
+                <a14:hiddenFill xmlns="" xmlns:a14="http://schemas.microsoft.com/office/drawing/2010/main">
                   <a:blipFill dpi="0" rotWithShape="0">
                     <a:blip/>
                     <a:srcRect/>
@@ -30594,7 +30356,7 @@
                 </a14:hiddenFill>
               </a:ext>
               <a:ext uri="{91240B29-F687-4f45-9708-019B960494DF}">
-                <a14:hiddenLine xmlns:a14="http://schemas.microsoft.com/office/drawing/2010/main" xmlns="" w="9525" cap="flat">
+                <a14:hiddenLine xmlns="" xmlns:a14="http://schemas.microsoft.com/office/drawing/2010/main" w="9525" cap="flat">
                   <a:solidFill>
                     <a:srgbClr val="808080"/>
                   </a:solidFill>
@@ -30604,7 +30366,7 @@
                 </a14:hiddenLine>
               </a:ext>
               <a:ext uri="{AF507438-7753-43e0-B8FC-AC1667EBCBE1}">
-                <a14:hiddenEffects xmlns:a14="http://schemas.microsoft.com/office/drawing/2010/main" xmlns="">
+                <a14:hiddenEffects xmlns="" xmlns:a14="http://schemas.microsoft.com/office/drawing/2010/main">
                   <a:effectLst>
                     <a:outerShdw blurRad="63500" dist="38099" dir="2700000" algn="ctr" rotWithShape="0">
                       <a:srgbClr val="000000">
@@ -30628,7 +30390,7 @@
           <p:spPr bwMode="auto">
             <a:xfrm>
               <a:off x="131763" y="261938"/>
-              <a:ext cx="1508125" cy="709588"/>
+              <a:ext cx="1508125" cy="868362"/>
             </a:xfrm>
             <a:prstGeom prst="rect">
               <a:avLst/>
@@ -30640,14 +30402,14 @@
             <a:effectLst/>
             <a:extLst>
               <a:ext uri="{909E8E84-426E-40dd-AFC4-6F175D3DCCD1}">
-                <a14:hiddenFill xmlns:a14="http://schemas.microsoft.com/office/drawing/2010/main" xmlns="">
+                <a14:hiddenFill xmlns="" xmlns:a14="http://schemas.microsoft.com/office/drawing/2010/main">
                   <a:solidFill>
                     <a:srgbClr val="FFFFFF"/>
                   </a:solidFill>
                 </a14:hiddenFill>
               </a:ext>
               <a:ext uri="{91240B29-F687-4f45-9708-019B960494DF}">
-                <a14:hiddenLine xmlns:a14="http://schemas.microsoft.com/office/drawing/2010/main" xmlns="" w="9525" cap="flat">
+                <a14:hiddenLine xmlns="" xmlns:a14="http://schemas.microsoft.com/office/drawing/2010/main" w="9525" cap="flat">
                   <a:solidFill>
                     <a:srgbClr val="000000"/>
                   </a:solidFill>
@@ -30657,7 +30419,7 @@
                 </a14:hiddenLine>
               </a:ext>
               <a:ext uri="{AF507438-7753-43e0-B8FC-AC1667EBCBE1}">
-                <a14:hiddenEffects xmlns:a14="http://schemas.microsoft.com/office/drawing/2010/main" xmlns="">
+                <a14:hiddenEffects xmlns="" xmlns:a14="http://schemas.microsoft.com/office/drawing/2010/main">
                   <a:effectLst>
                     <a:outerShdw blurRad="63500" dist="38099" dir="2700000" algn="ctr" rotWithShape="0">
                       <a:srgbClr val="000000">
@@ -30877,7 +30639,7 @@
                   </a:solidFill>
                   <a:latin typeface="Meiryo UI" charset="0"/>
                 </a:rPr>
-                <a:t>Tokyo</a:t>
+                <a:t>Beijin</a:t>
               </a:r>
               <a:br>
                 <a:rPr lang="fr-FR" sz="2800" b="1" i="1" dirty="0">
@@ -30894,7 +30656,7 @@
                   </a:solidFill>
                   <a:latin typeface="Meiryo UI" charset="0"/>
                 </a:rPr>
-                <a:t> 2020</a:t>
+                <a:t> 2027</a:t>
               </a:r>
             </a:p>
           </p:txBody>
@@ -30924,7 +30686,7 @@
             <a:effectLst/>
             <a:extLst>
               <a:ext uri="{91240B29-F687-4f45-9708-019B960494DF}">
-                <a14:hiddenLine xmlns:a14="http://schemas.microsoft.com/office/drawing/2010/main" xmlns="" w="9525" cap="flat">
+                <a14:hiddenLine xmlns="" xmlns:a14="http://schemas.microsoft.com/office/drawing/2010/main" w="9525" cap="flat">
                   <a:solidFill>
                     <a:srgbClr val="FFFFFF"/>
                   </a:solidFill>
@@ -30934,7 +30696,7 @@
                 </a14:hiddenLine>
               </a:ext>
               <a:ext uri="{AF507438-7753-43e0-B8FC-AC1667EBCBE1}">
-                <a14:hiddenEffects xmlns:a14="http://schemas.microsoft.com/office/drawing/2010/main" xmlns="">
+                <a14:hiddenEffects xmlns="" xmlns:a14="http://schemas.microsoft.com/office/drawing/2010/main">
                   <a:effectLst>
                     <a:outerShdw blurRad="63500" dist="38099" dir="2700000" algn="ctr" rotWithShape="0">
                       <a:srgbClr val="000000">
@@ -31165,7 +30927,7 @@
             <a:p>
               <a:r>
                 <a:rPr lang="fr-FR" sz="800" dirty="0"/>
-                <a:t>2020-07-30 ---11:00-18:00-----------------------</a:t>
+                <a:t>2027-09-12---11:00-18:00-----------------------</a:t>
               </a:r>
             </a:p>
             <a:p>
@@ -31200,14 +30962,14 @@
           <a:effectLst/>
           <a:extLst>
             <a:ext uri="{909E8E84-426E-40dd-AFC4-6F175D3DCCD1}">
-              <a14:hiddenFill xmlns:a14="http://schemas.microsoft.com/office/drawing/2010/main" xmlns="">
+              <a14:hiddenFill xmlns="" xmlns:a14="http://schemas.microsoft.com/office/drawing/2010/main">
                 <a:solidFill>
                   <a:srgbClr val="FFFFFF"/>
                 </a:solidFill>
               </a14:hiddenFill>
             </a:ext>
             <a:ext uri="{91240B29-F687-4f45-9708-019B960494DF}">
-              <a14:hiddenLine xmlns:a14="http://schemas.microsoft.com/office/drawing/2010/main" xmlns="" w="9525" cap="flat">
+              <a14:hiddenLine xmlns="" xmlns:a14="http://schemas.microsoft.com/office/drawing/2010/main" w="9525" cap="flat">
                 <a:solidFill>
                   <a:srgbClr val="808080"/>
                 </a:solidFill>
@@ -31217,7 +30979,7 @@
               </a14:hiddenLine>
             </a:ext>
             <a:ext uri="{AF507438-7753-43e0-B8FC-AC1667EBCBE1}">
-              <a14:hiddenEffects xmlns:a14="http://schemas.microsoft.com/office/drawing/2010/main" xmlns="">
+              <a14:hiddenEffects xmlns="" xmlns:a14="http://schemas.microsoft.com/office/drawing/2010/main">
                 <a:effectLst>
                   <a:outerShdw blurRad="63500" dist="38099" dir="2700000" algn="ctr" rotWithShape="0">
                     <a:srgbClr val="000000">
@@ -31455,14 +31217,14 @@
           <a:effectLst/>
           <a:extLst>
             <a:ext uri="{909E8E84-426E-40dd-AFC4-6F175D3DCCD1}">
-              <a14:hiddenFill xmlns:a14="http://schemas.microsoft.com/office/drawing/2010/main" xmlns="">
+              <a14:hiddenFill xmlns="" xmlns:a14="http://schemas.microsoft.com/office/drawing/2010/main">
                 <a:solidFill>
                   <a:srgbClr val="FFFFFF"/>
                 </a:solidFill>
               </a14:hiddenFill>
             </a:ext>
             <a:ext uri="{91240B29-F687-4f45-9708-019B960494DF}">
-              <a14:hiddenLine xmlns:a14="http://schemas.microsoft.com/office/drawing/2010/main" xmlns="" w="9525" cap="flat">
+              <a14:hiddenLine xmlns="" xmlns:a14="http://schemas.microsoft.com/office/drawing/2010/main" w="9525" cap="flat">
                 <a:solidFill>
                   <a:srgbClr val="000000"/>
                 </a:solidFill>
@@ -31472,7 +31234,7 @@
               </a14:hiddenLine>
             </a:ext>
             <a:ext uri="{AF507438-7753-43e0-B8FC-AC1667EBCBE1}">
-              <a14:hiddenEffects xmlns:a14="http://schemas.microsoft.com/office/drawing/2010/main" xmlns="">
+              <a14:hiddenEffects xmlns="" xmlns:a14="http://schemas.microsoft.com/office/drawing/2010/main">
                 <a:effectLst>
                   <a:outerShdw blurRad="63500" dist="38099" dir="2700000" algn="ctr" rotWithShape="0">
                     <a:srgbClr val="000000">
@@ -31736,7 +31498,7 @@
           <a:p>
             <a:r>
               <a:rPr lang="fr-FR" sz="800" dirty="0"/>
-              <a:t>&lt;sales transaction="8JH8HHDNKHJA7887787"  items="145" date="20141226"&gt;</a:t>
+              <a:t>&lt;sales transaction="8JH8HHDNKHJA7887787"  items="145" date="20270912"&gt;</a:t>
             </a:r>
           </a:p>
           <a:p>
@@ -31850,7 +31612,15 @@
             </a:r>
             <a:r>
               <a:rPr lang="fr-FR" sz="800" dirty="0"/>
-              <a:t>&gt;Hockey B12&lt;/</a:t>
+              <a:t>&gt;</a:t>
+            </a:r>
+            <a:r>
+              <a:rPr lang="fr-FR" sz="800" dirty="0" err="1"/>
+              <a:t>TripleJump</a:t>
+            </a:r>
+            <a:r>
+              <a:rPr lang="fr-FR" sz="800" dirty="0"/>
+              <a:t> B12&lt;/</a:t>
             </a:r>
             <a:r>
               <a:rPr lang="fr-FR" sz="800" dirty="0" err="1"/>
@@ -31872,15 +31642,7 @@
             </a:r>
             <a:r>
               <a:rPr lang="fr-FR" sz="800" dirty="0"/>
-              <a:t> </a:t>
-            </a:r>
-            <a:r>
-              <a:rPr lang="fr-FR" sz="800" dirty="0" err="1"/>
-              <a:t>start</a:t>
-            </a:r>
-            <a:r>
-              <a:rPr lang="fr-FR" sz="800" dirty="0"/>
-              <a:t>='20150116T1100-0430' end='20150116T1800-0430/&gt;</a:t>
+              <a:t> start=‘20270812T1100-0430' end='20270812T1800-0430/&gt;</a:t>
             </a:r>
           </a:p>
           <a:p>
@@ -31923,8 +31685,12 @@
               <a:t>amount</a:t>
             </a:r>
             <a:r>
+              <a:rPr lang="fr-FR" sz="800"/>
+              <a:t>= »88</a:t>
+            </a:r>
+            <a:r>
               <a:rPr lang="fr-FR" sz="800" dirty="0"/>
-              <a:t>="28" money="EUR"/&gt;</a:t>
+              <a:t>" money="EUR"/&gt;</a:t>
             </a:r>
           </a:p>
           <a:p>
@@ -31999,7 +31765,7 @@
           <a:effectLst/>
           <a:extLst>
             <a:ext uri="{909E8E84-426E-40dd-AFC4-6F175D3DCCD1}">
-              <a14:hiddenFill xmlns:a14="http://schemas.microsoft.com/office/drawing/2010/main" xmlns="">
+              <a14:hiddenFill xmlns="" xmlns:a14="http://schemas.microsoft.com/office/drawing/2010/main">
                 <a:blipFill dpi="0" rotWithShape="0">
                   <a:blip/>
                   <a:srcRect/>
@@ -32010,7 +31776,7 @@
               </a14:hiddenFill>
             </a:ext>
             <a:ext uri="{91240B29-F687-4f45-9708-019B960494DF}">
-              <a14:hiddenLine xmlns:a14="http://schemas.microsoft.com/office/drawing/2010/main" xmlns="" w="9525" cap="flat">
+              <a14:hiddenLine xmlns="" xmlns:a14="http://schemas.microsoft.com/office/drawing/2010/main" w="9525" cap="flat">
                 <a:solidFill>
                   <a:srgbClr val="808080"/>
                 </a:solidFill>
@@ -32020,7 +31786,7 @@
               </a14:hiddenLine>
             </a:ext>
             <a:ext uri="{AF507438-7753-43e0-B8FC-AC1667EBCBE1}">
-              <a14:hiddenEffects xmlns:a14="http://schemas.microsoft.com/office/drawing/2010/main" xmlns="">
+              <a14:hiddenEffects xmlns="" xmlns:a14="http://schemas.microsoft.com/office/drawing/2010/main">
                 <a:effectLst>
                   <a:outerShdw blurRad="63500" dist="38099" dir="2700000" algn="ctr" rotWithShape="0">
                     <a:srgbClr val="000000">
@@ -32056,14 +31822,14 @@
           <a:effectLst/>
           <a:extLst>
             <a:ext uri="{909E8E84-426E-40dd-AFC4-6F175D3DCCD1}">
-              <a14:hiddenFill xmlns:a14="http://schemas.microsoft.com/office/drawing/2010/main" xmlns="">
+              <a14:hiddenFill xmlns="" xmlns:a14="http://schemas.microsoft.com/office/drawing/2010/main">
                 <a:solidFill>
                   <a:srgbClr val="FFFFFF"/>
                 </a:solidFill>
               </a14:hiddenFill>
             </a:ext>
             <a:ext uri="{91240B29-F687-4f45-9708-019B960494DF}">
-              <a14:hiddenLine xmlns:a14="http://schemas.microsoft.com/office/drawing/2010/main" xmlns="" w="9525" cap="flat">
+              <a14:hiddenLine xmlns="" xmlns:a14="http://schemas.microsoft.com/office/drawing/2010/main" w="9525" cap="flat">
                 <a:solidFill>
                   <a:srgbClr val="808080"/>
                 </a:solidFill>
@@ -32073,7 +31839,7 @@
               </a14:hiddenLine>
             </a:ext>
             <a:ext uri="{AF507438-7753-43e0-B8FC-AC1667EBCBE1}">
-              <a14:hiddenEffects xmlns:a14="http://schemas.microsoft.com/office/drawing/2010/main" xmlns="">
+              <a14:hiddenEffects xmlns="" xmlns:a14="http://schemas.microsoft.com/office/drawing/2010/main">
                 <a:effectLst>
                   <a:outerShdw blurRad="63500" dist="38099" dir="2700000" algn="ctr" rotWithShape="0">
                     <a:srgbClr val="000000">
@@ -32429,7 +32195,7 @@
           <a:effectLst/>
           <a:extLst>
             <a:ext uri="{909E8E84-426E-40dd-AFC4-6F175D3DCCD1}">
-              <a14:hiddenFill xmlns:a14="http://schemas.microsoft.com/office/drawing/2010/main" xmlns="">
+              <a14:hiddenFill xmlns="" xmlns:a14="http://schemas.microsoft.com/office/drawing/2010/main">
                 <a:blipFill dpi="0" rotWithShape="0">
                   <a:blip/>
                   <a:srcRect l="14014" t="4515" r="7593" b="32079"/>
@@ -32440,7 +32206,7 @@
               </a14:hiddenFill>
             </a:ext>
             <a:ext uri="{91240B29-F687-4f45-9708-019B960494DF}">
-              <a14:hiddenLine xmlns:a14="http://schemas.microsoft.com/office/drawing/2010/main" xmlns="" w="9525" cap="flat">
+              <a14:hiddenLine xmlns="" xmlns:a14="http://schemas.microsoft.com/office/drawing/2010/main" w="9525" cap="flat">
                 <a:solidFill>
                   <a:srgbClr val="808080"/>
                 </a:solidFill>
@@ -32450,7 +32216,7 @@
               </a14:hiddenLine>
             </a:ext>
             <a:ext uri="{AF507438-7753-43e0-B8FC-AC1667EBCBE1}">
-              <a14:hiddenEffects xmlns:a14="http://schemas.microsoft.com/office/drawing/2010/main" xmlns="">
+              <a14:hiddenEffects xmlns="" xmlns:a14="http://schemas.microsoft.com/office/drawing/2010/main">
                 <a:effectLst>
                   <a:outerShdw blurRad="63500" dist="38099" dir="2700000" algn="ctr" rotWithShape="0">
                     <a:srgbClr val="000000">
@@ -32486,14 +32252,14 @@
           <a:effectLst/>
           <a:extLst>
             <a:ext uri="{909E8E84-426E-40dd-AFC4-6F175D3DCCD1}">
-              <a14:hiddenFill xmlns:a14="http://schemas.microsoft.com/office/drawing/2010/main" xmlns="">
+              <a14:hiddenFill xmlns="" xmlns:a14="http://schemas.microsoft.com/office/drawing/2010/main">
                 <a:solidFill>
                   <a:srgbClr val="FFFFFF"/>
                 </a:solidFill>
               </a14:hiddenFill>
             </a:ext>
             <a:ext uri="{91240B29-F687-4f45-9708-019B960494DF}">
-              <a14:hiddenLine xmlns:a14="http://schemas.microsoft.com/office/drawing/2010/main" xmlns="" w="9525" cap="flat">
+              <a14:hiddenLine xmlns="" xmlns:a14="http://schemas.microsoft.com/office/drawing/2010/main" w="9525" cap="flat">
                 <a:solidFill>
                   <a:srgbClr val="808080"/>
                 </a:solidFill>
@@ -32503,7 +32269,7 @@
               </a14:hiddenLine>
             </a:ext>
             <a:ext uri="{AF507438-7753-43e0-B8FC-AC1667EBCBE1}">
-              <a14:hiddenEffects xmlns:a14="http://schemas.microsoft.com/office/drawing/2010/main" xmlns="">
+              <a14:hiddenEffects xmlns="" xmlns:a14="http://schemas.microsoft.com/office/drawing/2010/main">
                 <a:effectLst>
                   <a:outerShdw blurRad="63500" dist="38099" dir="2700000" algn="ctr" rotWithShape="0">
                     <a:srgbClr val="000000">
@@ -33108,7 +32874,7 @@
         <a:effectLst/>
         <a:extLst>
           <a:ext uri="{AF507438-7753-43e0-B8FC-AC1667EBCBE1}">
-            <a14:hiddenEffects xmlns:a14="http://schemas.microsoft.com/office/drawing/2010/main" xmlns="">
+            <a14:hiddenEffects xmlns="" xmlns:a14="http://schemas.microsoft.com/office/drawing/2010/main">
               <a:effectLst>
                 <a:outerShdw blurRad="63500" dist="38099" dir="2700000" algn="ctr" rotWithShape="0">
                   <a:schemeClr val="bg2">
@@ -33184,7 +32950,7 @@
         <a:effectLst/>
         <a:extLst>
           <a:ext uri="{AF507438-7753-43e0-B8FC-AC1667EBCBE1}">
-            <a14:hiddenEffects xmlns:a14="http://schemas.microsoft.com/office/drawing/2010/main" xmlns="">
+            <a14:hiddenEffects xmlns="" xmlns:a14="http://schemas.microsoft.com/office/drawing/2010/main">
               <a:effectLst>
                 <a:outerShdw blurRad="63500" dist="38099" dir="2700000" algn="ctr" rotWithShape="0">
                   <a:schemeClr val="bg2">

--- a/docs/res/media/sources images iAccess.pptx
+++ b/docs/res/media/sources images iAccess.pptx
@@ -31685,12 +31685,8 @@
               <a:t>amount</a:t>
             </a:r>
             <a:r>
-              <a:rPr lang="fr-FR" sz="800"/>
-              <a:t>= »88</a:t>
-            </a:r>
-            <a:r>
               <a:rPr lang="fr-FR" sz="800" dirty="0"/>
-              <a:t>" money="EUR"/&gt;</a:t>
+              <a:t>= »88" money="EUR"/&gt;</a:t>
             </a:r>
           </a:p>
           <a:p>

--- a/docs/res/media/sources images iAccess.pptx
+++ b/docs/res/media/sources images iAccess.pptx
@@ -262,17 +262,17 @@
           <a:effectLst/>
           <a:extLst>
             <a:ext uri="{FAA26D3D-D897-4be2-8F04-BA451C77F1D7}">
-              <ma14:placeholderFlag xmlns="" xmlns:ma14="http://schemas.microsoft.com/office/mac/drawingml/2011/main" val="1"/>
+              <ma14:placeholderFlag xmlns:ma14="http://schemas.microsoft.com/office/mac/drawingml/2011/main" xmlns="" val="1"/>
             </a:ext>
             <a:ext uri="{909E8E84-426E-40dd-AFC4-6F175D3DCCD1}">
-              <a14:hiddenFill xmlns="" xmlns:a14="http://schemas.microsoft.com/office/drawing/2010/main">
+              <a14:hiddenFill xmlns:a14="http://schemas.microsoft.com/office/drawing/2010/main" xmlns="">
                 <a:solidFill>
                   <a:srgbClr val="FFFFFF"/>
                 </a:solidFill>
               </a14:hiddenFill>
             </a:ext>
             <a:ext uri="{91240B29-F687-4f45-9708-019B960494DF}">
-              <a14:hiddenLine xmlns="" xmlns:a14="http://schemas.microsoft.com/office/drawing/2010/main" w="9525" cap="flat">
+              <a14:hiddenLine xmlns:a14="http://schemas.microsoft.com/office/drawing/2010/main" xmlns="" w="9525" cap="flat">
                 <a:solidFill>
                   <a:srgbClr val="000000"/>
                 </a:solidFill>
@@ -282,7 +282,7 @@
               </a14:hiddenLine>
             </a:ext>
             <a:ext uri="{AF507438-7753-43e0-B8FC-AC1667EBCBE1}">
-              <a14:hiddenEffects xmlns="" xmlns:a14="http://schemas.microsoft.com/office/drawing/2010/main">
+              <a14:hiddenEffects xmlns:a14="http://schemas.microsoft.com/office/drawing/2010/main" xmlns="">
                 <a:effectLst>
                   <a:outerShdw blurRad="63500" dist="38099" dir="2700000" algn="ctr" rotWithShape="0">
                     <a:schemeClr val="bg2">
@@ -320,17 +320,17 @@
           <a:effectLst/>
           <a:extLst>
             <a:ext uri="{FAA26D3D-D897-4be2-8F04-BA451C77F1D7}">
-              <ma14:placeholderFlag xmlns="" xmlns:ma14="http://schemas.microsoft.com/office/mac/drawingml/2011/main" val="1"/>
+              <ma14:placeholderFlag xmlns:ma14="http://schemas.microsoft.com/office/mac/drawingml/2011/main" xmlns="" val="1"/>
             </a:ext>
             <a:ext uri="{909E8E84-426E-40dd-AFC4-6F175D3DCCD1}">
-              <a14:hiddenFill xmlns="" xmlns:a14="http://schemas.microsoft.com/office/drawing/2010/main">
+              <a14:hiddenFill xmlns:a14="http://schemas.microsoft.com/office/drawing/2010/main" xmlns="">
                 <a:solidFill>
                   <a:srgbClr val="FFFFFF"/>
                 </a:solidFill>
               </a14:hiddenFill>
             </a:ext>
             <a:ext uri="{91240B29-F687-4f45-9708-019B960494DF}">
-              <a14:hiddenLine xmlns="" xmlns:a14="http://schemas.microsoft.com/office/drawing/2010/main" w="9525" cap="flat">
+              <a14:hiddenLine xmlns:a14="http://schemas.microsoft.com/office/drawing/2010/main" xmlns="" w="9525" cap="flat">
                 <a:solidFill>
                   <a:srgbClr val="000000"/>
                 </a:solidFill>
@@ -340,7 +340,7 @@
               </a14:hiddenLine>
             </a:ext>
             <a:ext uri="{AF507438-7753-43e0-B8FC-AC1667EBCBE1}">
-              <a14:hiddenEffects xmlns="" xmlns:a14="http://schemas.microsoft.com/office/drawing/2010/main">
+              <a14:hiddenEffects xmlns:a14="http://schemas.microsoft.com/office/drawing/2010/main" xmlns="">
                 <a:effectLst>
                   <a:outerShdw blurRad="63500" dist="38099" dir="2700000" algn="ctr" rotWithShape="0">
                     <a:schemeClr val="bg2">
@@ -390,17 +390,17 @@
           <a:effectLst/>
           <a:extLst>
             <a:ext uri="{FAA26D3D-D897-4be2-8F04-BA451C77F1D7}">
-              <ma14:placeholderFlag xmlns="" xmlns:ma14="http://schemas.microsoft.com/office/mac/drawingml/2011/main" val="1"/>
+              <ma14:placeholderFlag xmlns:ma14="http://schemas.microsoft.com/office/mac/drawingml/2011/main" xmlns="" val="1"/>
             </a:ext>
             <a:ext uri="{909E8E84-426E-40dd-AFC4-6F175D3DCCD1}">
-              <a14:hiddenFill xmlns="" xmlns:a14="http://schemas.microsoft.com/office/drawing/2010/main">
+              <a14:hiddenFill xmlns:a14="http://schemas.microsoft.com/office/drawing/2010/main" xmlns="">
                 <a:solidFill>
                   <a:srgbClr val="FFFFFF"/>
                 </a:solidFill>
               </a14:hiddenFill>
             </a:ext>
             <a:ext uri="{91240B29-F687-4f45-9708-019B960494DF}">
-              <a14:hiddenLine xmlns="" xmlns:a14="http://schemas.microsoft.com/office/drawing/2010/main" w="9525" cap="flat">
+              <a14:hiddenLine xmlns:a14="http://schemas.microsoft.com/office/drawing/2010/main" xmlns="" w="9525" cap="flat">
                 <a:solidFill>
                   <a:srgbClr val="000000"/>
                 </a:solidFill>
@@ -410,7 +410,7 @@
               </a14:hiddenLine>
             </a:ext>
             <a:ext uri="{AF507438-7753-43e0-B8FC-AC1667EBCBE1}">
-              <a14:hiddenEffects xmlns="" xmlns:a14="http://schemas.microsoft.com/office/drawing/2010/main">
+              <a14:hiddenEffects xmlns:a14="http://schemas.microsoft.com/office/drawing/2010/main" xmlns="">
                 <a:effectLst>
                   <a:outerShdw blurRad="63500" dist="38099" dir="2700000" algn="ctr" rotWithShape="0">
                     <a:schemeClr val="bg2">
@@ -481,17 +481,17 @@
           <a:effectLst/>
           <a:extLst>
             <a:ext uri="{FAA26D3D-D897-4be2-8F04-BA451C77F1D7}">
-              <ma14:placeholderFlag xmlns="" xmlns:ma14="http://schemas.microsoft.com/office/mac/drawingml/2011/main" val="1"/>
+              <ma14:placeholderFlag xmlns:ma14="http://schemas.microsoft.com/office/mac/drawingml/2011/main" xmlns="" val="1"/>
             </a:ext>
             <a:ext uri="{909E8E84-426E-40dd-AFC4-6F175D3DCCD1}">
-              <a14:hiddenFill xmlns="" xmlns:a14="http://schemas.microsoft.com/office/drawing/2010/main">
+              <a14:hiddenFill xmlns:a14="http://schemas.microsoft.com/office/drawing/2010/main" xmlns="">
                 <a:solidFill>
                   <a:srgbClr val="FFFFFF"/>
                 </a:solidFill>
               </a14:hiddenFill>
             </a:ext>
             <a:ext uri="{91240B29-F687-4f45-9708-019B960494DF}">
-              <a14:hiddenLine xmlns="" xmlns:a14="http://schemas.microsoft.com/office/drawing/2010/main" w="9525" cap="flat">
+              <a14:hiddenLine xmlns:a14="http://schemas.microsoft.com/office/drawing/2010/main" xmlns="" w="9525" cap="flat">
                 <a:solidFill>
                   <a:srgbClr val="000000"/>
                 </a:solidFill>
@@ -501,7 +501,7 @@
               </a14:hiddenLine>
             </a:ext>
             <a:ext uri="{AF507438-7753-43e0-B8FC-AC1667EBCBE1}">
-              <a14:hiddenEffects xmlns="" xmlns:a14="http://schemas.microsoft.com/office/drawing/2010/main">
+              <a14:hiddenEffects xmlns:a14="http://schemas.microsoft.com/office/drawing/2010/main" xmlns="">
                 <a:effectLst>
                   <a:outerShdw blurRad="63500" dist="38099" dir="2700000" algn="ctr" rotWithShape="0">
                     <a:schemeClr val="bg2">
@@ -572,17 +572,17 @@
           <a:effectLst/>
           <a:extLst>
             <a:ext uri="{FAA26D3D-D897-4be2-8F04-BA451C77F1D7}">
-              <ma14:placeholderFlag xmlns="" xmlns:ma14="http://schemas.microsoft.com/office/mac/drawingml/2011/main" val="1"/>
+              <ma14:placeholderFlag xmlns:ma14="http://schemas.microsoft.com/office/mac/drawingml/2011/main" xmlns="" val="1"/>
             </a:ext>
             <a:ext uri="{909E8E84-426E-40dd-AFC4-6F175D3DCCD1}">
-              <a14:hiddenFill xmlns="" xmlns:a14="http://schemas.microsoft.com/office/drawing/2010/main">
+              <a14:hiddenFill xmlns:a14="http://schemas.microsoft.com/office/drawing/2010/main" xmlns="">
                 <a:solidFill>
                   <a:srgbClr val="FFFFFF"/>
                 </a:solidFill>
               </a14:hiddenFill>
             </a:ext>
             <a:ext uri="{91240B29-F687-4f45-9708-019B960494DF}">
-              <a14:hiddenLine xmlns="" xmlns:a14="http://schemas.microsoft.com/office/drawing/2010/main" w="9525" cap="flat">
+              <a14:hiddenLine xmlns:a14="http://schemas.microsoft.com/office/drawing/2010/main" xmlns="" w="9525" cap="flat">
                 <a:solidFill>
                   <a:srgbClr val="000000"/>
                 </a:solidFill>
@@ -592,7 +592,7 @@
               </a14:hiddenLine>
             </a:ext>
             <a:ext uri="{AF507438-7753-43e0-B8FC-AC1667EBCBE1}">
-              <a14:hiddenEffects xmlns="" xmlns:a14="http://schemas.microsoft.com/office/drawing/2010/main">
+              <a14:hiddenEffects xmlns:a14="http://schemas.microsoft.com/office/drawing/2010/main" xmlns="">
                 <a:effectLst>
                   <a:outerShdw blurRad="63500" dist="38099" dir="2700000" algn="ctr" rotWithShape="0">
                     <a:schemeClr val="bg2">
@@ -663,17 +663,17 @@
           <a:effectLst/>
           <a:extLst>
             <a:ext uri="{FAA26D3D-D897-4be2-8F04-BA451C77F1D7}">
-              <ma14:placeholderFlag xmlns="" xmlns:ma14="http://schemas.microsoft.com/office/mac/drawingml/2011/main" val="1"/>
+              <ma14:placeholderFlag xmlns:ma14="http://schemas.microsoft.com/office/mac/drawingml/2011/main" xmlns="" val="1"/>
             </a:ext>
             <a:ext uri="{909E8E84-426E-40dd-AFC4-6F175D3DCCD1}">
-              <a14:hiddenFill xmlns="" xmlns:a14="http://schemas.microsoft.com/office/drawing/2010/main">
+              <a14:hiddenFill xmlns:a14="http://schemas.microsoft.com/office/drawing/2010/main" xmlns="">
                 <a:solidFill>
                   <a:srgbClr val="FFFFFF"/>
                 </a:solidFill>
               </a14:hiddenFill>
             </a:ext>
             <a:ext uri="{91240B29-F687-4f45-9708-019B960494DF}">
-              <a14:hiddenLine xmlns="" xmlns:a14="http://schemas.microsoft.com/office/drawing/2010/main" w="9525" cap="flat">
+              <a14:hiddenLine xmlns:a14="http://schemas.microsoft.com/office/drawing/2010/main" xmlns="" w="9525" cap="flat">
                 <a:solidFill>
                   <a:srgbClr val="000000"/>
                 </a:solidFill>
@@ -683,7 +683,7 @@
               </a14:hiddenLine>
             </a:ext>
             <a:ext uri="{AF507438-7753-43e0-B8FC-AC1667EBCBE1}">
-              <a14:hiddenEffects xmlns="" xmlns:a14="http://schemas.microsoft.com/office/drawing/2010/main">
+              <a14:hiddenEffects xmlns:a14="http://schemas.microsoft.com/office/drawing/2010/main" xmlns="">
                 <a:effectLst>
                   <a:outerShdw blurRad="63500" dist="38099" dir="2700000" algn="ctr" rotWithShape="0">
                     <a:schemeClr val="bg2">
@@ -974,7 +974,7 @@
           </a:ln>
           <a:extLst>
             <a:ext uri="{AF507438-7753-43e0-B8FC-AC1667EBCBE1}">
-              <a14:hiddenEffects xmlns="" xmlns:a14="http://schemas.microsoft.com/office/drawing/2010/main">
+              <a14:hiddenEffects xmlns:a14="http://schemas.microsoft.com/office/drawing/2010/main" xmlns="">
                 <a:effectLst>
                   <a:outerShdw blurRad="63500" dist="38099" dir="2700000" algn="ctr" rotWithShape="0">
                     <a:srgbClr val="000000">
@@ -1009,14 +1009,14 @@
           <a:ln/>
           <a:extLst>
             <a:ext uri="{909E8E84-426E-40dd-AFC4-6F175D3DCCD1}">
-              <a14:hiddenFill xmlns="" xmlns:a14="http://schemas.microsoft.com/office/drawing/2010/main">
+              <a14:hiddenFill xmlns:a14="http://schemas.microsoft.com/office/drawing/2010/main" xmlns="">
                 <a:solidFill>
                   <a:srgbClr val="FFFFFF"/>
                 </a:solidFill>
               </a14:hiddenFill>
             </a:ext>
             <a:ext uri="{91240B29-F687-4f45-9708-019B960494DF}">
-              <a14:hiddenLine xmlns="" xmlns:a14="http://schemas.microsoft.com/office/drawing/2010/main" w="9525" cap="flat">
+              <a14:hiddenLine xmlns:a14="http://schemas.microsoft.com/office/drawing/2010/main" xmlns="" w="9525" cap="flat">
                 <a:solidFill>
                   <a:srgbClr val="000000"/>
                 </a:solidFill>
@@ -1026,7 +1026,7 @@
               </a14:hiddenLine>
             </a:ext>
             <a:ext uri="{AF507438-7753-43e0-B8FC-AC1667EBCBE1}">
-              <a14:hiddenEffects xmlns="" xmlns:a14="http://schemas.microsoft.com/office/drawing/2010/main">
+              <a14:hiddenEffects xmlns:a14="http://schemas.microsoft.com/office/drawing/2010/main" xmlns="">
                 <a:effectLst>
                   <a:outerShdw blurRad="63500" dist="38099" dir="2700000" algn="ctr" rotWithShape="0">
                     <a:srgbClr val="000000">
@@ -1136,7 +1136,7 @@
           </a:ln>
           <a:extLst>
             <a:ext uri="{AF507438-7753-43e0-B8FC-AC1667EBCBE1}">
-              <a14:hiddenEffects xmlns="" xmlns:a14="http://schemas.microsoft.com/office/drawing/2010/main">
+              <a14:hiddenEffects xmlns:a14="http://schemas.microsoft.com/office/drawing/2010/main" xmlns="">
                 <a:effectLst>
                   <a:outerShdw blurRad="63500" dist="38099" dir="2700000" algn="ctr" rotWithShape="0">
                     <a:srgbClr val="000000">
@@ -1171,14 +1171,14 @@
           <a:ln/>
           <a:extLst>
             <a:ext uri="{909E8E84-426E-40dd-AFC4-6F175D3DCCD1}">
-              <a14:hiddenFill xmlns="" xmlns:a14="http://schemas.microsoft.com/office/drawing/2010/main">
+              <a14:hiddenFill xmlns:a14="http://schemas.microsoft.com/office/drawing/2010/main" xmlns="">
                 <a:solidFill>
                   <a:srgbClr val="FFFFFF"/>
                 </a:solidFill>
               </a14:hiddenFill>
             </a:ext>
             <a:ext uri="{91240B29-F687-4f45-9708-019B960494DF}">
-              <a14:hiddenLine xmlns="" xmlns:a14="http://schemas.microsoft.com/office/drawing/2010/main" w="9525" cap="flat">
+              <a14:hiddenLine xmlns:a14="http://schemas.microsoft.com/office/drawing/2010/main" xmlns="" w="9525" cap="flat">
                 <a:solidFill>
                   <a:srgbClr val="000000"/>
                 </a:solidFill>
@@ -1188,7 +1188,7 @@
               </a14:hiddenLine>
             </a:ext>
             <a:ext uri="{AF507438-7753-43e0-B8FC-AC1667EBCBE1}">
-              <a14:hiddenEffects xmlns="" xmlns:a14="http://schemas.microsoft.com/office/drawing/2010/main">
+              <a14:hiddenEffects xmlns:a14="http://schemas.microsoft.com/office/drawing/2010/main" xmlns="">
                 <a:effectLst>
                   <a:outerShdw blurRad="63500" dist="38099" dir="2700000" algn="ctr" rotWithShape="0">
                     <a:srgbClr val="000000">
@@ -1298,7 +1298,7 @@
           </a:ln>
           <a:extLst>
             <a:ext uri="{AF507438-7753-43e0-B8FC-AC1667EBCBE1}">
-              <a14:hiddenEffects xmlns="" xmlns:a14="http://schemas.microsoft.com/office/drawing/2010/main">
+              <a14:hiddenEffects xmlns:a14="http://schemas.microsoft.com/office/drawing/2010/main" xmlns="">
                 <a:effectLst>
                   <a:outerShdw blurRad="63500" dist="38099" dir="2700000" algn="ctr" rotWithShape="0">
                     <a:srgbClr val="000000">
@@ -1333,14 +1333,14 @@
           <a:ln/>
           <a:extLst>
             <a:ext uri="{909E8E84-426E-40dd-AFC4-6F175D3DCCD1}">
-              <a14:hiddenFill xmlns="" xmlns:a14="http://schemas.microsoft.com/office/drawing/2010/main">
+              <a14:hiddenFill xmlns:a14="http://schemas.microsoft.com/office/drawing/2010/main" xmlns="">
                 <a:solidFill>
                   <a:srgbClr val="FFFFFF"/>
                 </a:solidFill>
               </a14:hiddenFill>
             </a:ext>
             <a:ext uri="{91240B29-F687-4f45-9708-019B960494DF}">
-              <a14:hiddenLine xmlns="" xmlns:a14="http://schemas.microsoft.com/office/drawing/2010/main" w="9525" cap="flat">
+              <a14:hiddenLine xmlns:a14="http://schemas.microsoft.com/office/drawing/2010/main" xmlns="" w="9525" cap="flat">
                 <a:solidFill>
                   <a:srgbClr val="000000"/>
                 </a:solidFill>
@@ -1350,7 +1350,7 @@
               </a14:hiddenLine>
             </a:ext>
             <a:ext uri="{AF507438-7753-43e0-B8FC-AC1667EBCBE1}">
-              <a14:hiddenEffects xmlns="" xmlns:a14="http://schemas.microsoft.com/office/drawing/2010/main">
+              <a14:hiddenEffects xmlns:a14="http://schemas.microsoft.com/office/drawing/2010/main" xmlns="">
                 <a:effectLst>
                   <a:outerShdw blurRad="63500" dist="38099" dir="2700000" algn="ctr" rotWithShape="0">
                     <a:srgbClr val="000000">
@@ -4015,17 +4015,17 @@
           <a:effectLst/>
           <a:extLst>
             <a:ext uri="{FAA26D3D-D897-4be2-8F04-BA451C77F1D7}">
-              <ma14:placeholderFlag xmlns="" xmlns:ma14="http://schemas.microsoft.com/office/mac/drawingml/2011/main" val="1"/>
+              <ma14:placeholderFlag xmlns:ma14="http://schemas.microsoft.com/office/mac/drawingml/2011/main" xmlns="" val="1"/>
             </a:ext>
             <a:ext uri="{909E8E84-426E-40dd-AFC4-6F175D3DCCD1}">
-              <a14:hiddenFill xmlns="" xmlns:a14="http://schemas.microsoft.com/office/drawing/2010/main">
+              <a14:hiddenFill xmlns:a14="http://schemas.microsoft.com/office/drawing/2010/main" xmlns="">
                 <a:solidFill>
                   <a:srgbClr val="FFFFFF"/>
                 </a:solidFill>
               </a14:hiddenFill>
             </a:ext>
             <a:ext uri="{91240B29-F687-4f45-9708-019B960494DF}">
-              <a14:hiddenLine xmlns="" xmlns:a14="http://schemas.microsoft.com/office/drawing/2010/main" w="9525" cap="flat">
+              <a14:hiddenLine xmlns:a14="http://schemas.microsoft.com/office/drawing/2010/main" xmlns="" w="9525" cap="flat">
                 <a:solidFill>
                   <a:srgbClr val="000000"/>
                 </a:solidFill>
@@ -4035,7 +4035,7 @@
               </a14:hiddenLine>
             </a:ext>
             <a:ext uri="{AF507438-7753-43e0-B8FC-AC1667EBCBE1}">
-              <a14:hiddenEffects xmlns="" xmlns:a14="http://schemas.microsoft.com/office/drawing/2010/main">
+              <a14:hiddenEffects xmlns:a14="http://schemas.microsoft.com/office/drawing/2010/main" xmlns="">
                 <a:effectLst>
                   <a:outerShdw blurRad="63500" dist="38099" dir="2700000" algn="ctr" rotWithShape="0">
                     <a:schemeClr val="bg2">
@@ -4088,17 +4088,17 @@
           <a:effectLst/>
           <a:extLst>
             <a:ext uri="{FAA26D3D-D897-4be2-8F04-BA451C77F1D7}">
-              <ma14:placeholderFlag xmlns="" xmlns:ma14="http://schemas.microsoft.com/office/mac/drawingml/2011/main" val="1"/>
+              <ma14:placeholderFlag xmlns:ma14="http://schemas.microsoft.com/office/mac/drawingml/2011/main" xmlns="" val="1"/>
             </a:ext>
             <a:ext uri="{909E8E84-426E-40dd-AFC4-6F175D3DCCD1}">
-              <a14:hiddenFill xmlns="" xmlns:a14="http://schemas.microsoft.com/office/drawing/2010/main">
+              <a14:hiddenFill xmlns:a14="http://schemas.microsoft.com/office/drawing/2010/main" xmlns="">
                 <a:solidFill>
                   <a:srgbClr val="FFFFFF"/>
                 </a:solidFill>
               </a14:hiddenFill>
             </a:ext>
             <a:ext uri="{91240B29-F687-4f45-9708-019B960494DF}">
-              <a14:hiddenLine xmlns="" xmlns:a14="http://schemas.microsoft.com/office/drawing/2010/main" w="9525" cap="flat">
+              <a14:hiddenLine xmlns:a14="http://schemas.microsoft.com/office/drawing/2010/main" xmlns="" w="9525" cap="flat">
                 <a:solidFill>
                   <a:srgbClr val="000000"/>
                 </a:solidFill>
@@ -4108,7 +4108,7 @@
               </a14:hiddenLine>
             </a:ext>
             <a:ext uri="{AF507438-7753-43e0-B8FC-AC1667EBCBE1}">
-              <a14:hiddenEffects xmlns="" xmlns:a14="http://schemas.microsoft.com/office/drawing/2010/main">
+              <a14:hiddenEffects xmlns:a14="http://schemas.microsoft.com/office/drawing/2010/main" xmlns="">
                 <a:effectLst>
                   <a:outerShdw blurRad="63500" dist="38099" dir="2700000" algn="ctr" rotWithShape="0">
                     <a:schemeClr val="bg2">
@@ -4203,17 +4203,17 @@
           <a:effectLst/>
           <a:extLst>
             <a:ext uri="{FAA26D3D-D897-4be2-8F04-BA451C77F1D7}">
-              <ma14:placeholderFlag xmlns="" xmlns:ma14="http://schemas.microsoft.com/office/mac/drawingml/2011/main" val="1"/>
+              <ma14:placeholderFlag xmlns:ma14="http://schemas.microsoft.com/office/mac/drawingml/2011/main" xmlns="" val="1"/>
             </a:ext>
             <a:ext uri="{909E8E84-426E-40dd-AFC4-6F175D3DCCD1}">
-              <a14:hiddenFill xmlns="" xmlns:a14="http://schemas.microsoft.com/office/drawing/2010/main">
+              <a14:hiddenFill xmlns:a14="http://schemas.microsoft.com/office/drawing/2010/main" xmlns="">
                 <a:solidFill>
                   <a:srgbClr val="FFFFFF"/>
                 </a:solidFill>
               </a14:hiddenFill>
             </a:ext>
             <a:ext uri="{91240B29-F687-4f45-9708-019B960494DF}">
-              <a14:hiddenLine xmlns="" xmlns:a14="http://schemas.microsoft.com/office/drawing/2010/main" w="9525" cap="flat">
+              <a14:hiddenLine xmlns:a14="http://schemas.microsoft.com/office/drawing/2010/main" xmlns="" w="9525" cap="flat">
                 <a:solidFill>
                   <a:srgbClr val="000000"/>
                 </a:solidFill>
@@ -4223,7 +4223,7 @@
               </a14:hiddenLine>
             </a:ext>
             <a:ext uri="{AF507438-7753-43e0-B8FC-AC1667EBCBE1}">
-              <a14:hiddenEffects xmlns="" xmlns:a14="http://schemas.microsoft.com/office/drawing/2010/main">
+              <a14:hiddenEffects xmlns:a14="http://schemas.microsoft.com/office/drawing/2010/main" xmlns="">
                 <a:effectLst>
                   <a:outerShdw blurRad="63500" dist="38099" dir="2700000" algn="ctr" rotWithShape="0">
                     <a:schemeClr val="bg2">
@@ -4292,17 +4292,17 @@
           <a:effectLst/>
           <a:extLst>
             <a:ext uri="{FAA26D3D-D897-4be2-8F04-BA451C77F1D7}">
-              <ma14:placeholderFlag xmlns="" xmlns:ma14="http://schemas.microsoft.com/office/mac/drawingml/2011/main" val="1"/>
+              <ma14:placeholderFlag xmlns:ma14="http://schemas.microsoft.com/office/mac/drawingml/2011/main" xmlns="" val="1"/>
             </a:ext>
             <a:ext uri="{909E8E84-426E-40dd-AFC4-6F175D3DCCD1}">
-              <a14:hiddenFill xmlns="" xmlns:a14="http://schemas.microsoft.com/office/drawing/2010/main">
+              <a14:hiddenFill xmlns:a14="http://schemas.microsoft.com/office/drawing/2010/main" xmlns="">
                 <a:solidFill>
                   <a:srgbClr val="FFFFFF"/>
                 </a:solidFill>
               </a14:hiddenFill>
             </a:ext>
             <a:ext uri="{91240B29-F687-4f45-9708-019B960494DF}">
-              <a14:hiddenLine xmlns="" xmlns:a14="http://schemas.microsoft.com/office/drawing/2010/main" w="9525" cap="flat">
+              <a14:hiddenLine xmlns:a14="http://schemas.microsoft.com/office/drawing/2010/main" xmlns="" w="9525" cap="flat">
                 <a:solidFill>
                   <a:srgbClr val="000000"/>
                 </a:solidFill>
@@ -4312,7 +4312,7 @@
               </a14:hiddenLine>
             </a:ext>
             <a:ext uri="{AF507438-7753-43e0-B8FC-AC1667EBCBE1}">
-              <a14:hiddenEffects xmlns="" xmlns:a14="http://schemas.microsoft.com/office/drawing/2010/main">
+              <a14:hiddenEffects xmlns:a14="http://schemas.microsoft.com/office/drawing/2010/main" xmlns="">
                 <a:effectLst>
                   <a:outerShdw blurRad="63500" dist="38099" dir="2700000" algn="ctr" rotWithShape="0">
                     <a:schemeClr val="bg2">
@@ -4383,17 +4383,17 @@
           <a:effectLst/>
           <a:extLst>
             <a:ext uri="{FAA26D3D-D897-4be2-8F04-BA451C77F1D7}">
-              <ma14:placeholderFlag xmlns="" xmlns:ma14="http://schemas.microsoft.com/office/mac/drawingml/2011/main" val="1"/>
+              <ma14:placeholderFlag xmlns:ma14="http://schemas.microsoft.com/office/mac/drawingml/2011/main" xmlns="" val="1"/>
             </a:ext>
             <a:ext uri="{909E8E84-426E-40dd-AFC4-6F175D3DCCD1}">
-              <a14:hiddenFill xmlns="" xmlns:a14="http://schemas.microsoft.com/office/drawing/2010/main">
+              <a14:hiddenFill xmlns:a14="http://schemas.microsoft.com/office/drawing/2010/main" xmlns="">
                 <a:solidFill>
                   <a:srgbClr val="FFFFFF"/>
                 </a:solidFill>
               </a14:hiddenFill>
             </a:ext>
             <a:ext uri="{91240B29-F687-4f45-9708-019B960494DF}">
-              <a14:hiddenLine xmlns="" xmlns:a14="http://schemas.microsoft.com/office/drawing/2010/main" w="9525" cap="flat">
+              <a14:hiddenLine xmlns:a14="http://schemas.microsoft.com/office/drawing/2010/main" xmlns="" w="9525" cap="flat">
                 <a:solidFill>
                   <a:srgbClr val="000000"/>
                 </a:solidFill>
@@ -4403,7 +4403,7 @@
               </a14:hiddenLine>
             </a:ext>
             <a:ext uri="{AF507438-7753-43e0-B8FC-AC1667EBCBE1}">
-              <a14:hiddenEffects xmlns="" xmlns:a14="http://schemas.microsoft.com/office/drawing/2010/main">
+              <a14:hiddenEffects xmlns:a14="http://schemas.microsoft.com/office/drawing/2010/main" xmlns="">
                 <a:effectLst>
                   <a:outerShdw blurRad="63500" dist="38099" dir="2700000" algn="ctr" rotWithShape="0">
                     <a:schemeClr val="bg2">
@@ -5054,7 +5054,7 @@
           <a:effectLst/>
           <a:extLst>
             <a:ext uri="{AF507438-7753-43e0-B8FC-AC1667EBCBE1}">
-              <a14:hiddenEffects xmlns="" xmlns:a14="http://schemas.microsoft.com/office/drawing/2010/main">
+              <a14:hiddenEffects xmlns:a14="http://schemas.microsoft.com/office/drawing/2010/main" xmlns="">
                 <a:effectLst>
                   <a:outerShdw blurRad="63500" dist="38099" dir="2700000" algn="ctr" rotWithShape="0">
                     <a:srgbClr val="000000">
@@ -5106,7 +5106,7 @@
           <a:effectLst/>
           <a:extLst>
             <a:ext uri="{AF507438-7753-43e0-B8FC-AC1667EBCBE1}">
-              <a14:hiddenEffects xmlns="" xmlns:a14="http://schemas.microsoft.com/office/drawing/2010/main">
+              <a14:hiddenEffects xmlns:a14="http://schemas.microsoft.com/office/drawing/2010/main" xmlns="">
                 <a:effectLst>
                   <a:outerShdw blurRad="63500" dist="38099" dir="2700000" algn="ctr" rotWithShape="0">
                     <a:srgbClr val="000000">
@@ -5158,7 +5158,7 @@
           <a:effectLst/>
           <a:extLst>
             <a:ext uri="{AF507438-7753-43e0-B8FC-AC1667EBCBE1}">
-              <a14:hiddenEffects xmlns="" xmlns:a14="http://schemas.microsoft.com/office/drawing/2010/main">
+              <a14:hiddenEffects xmlns:a14="http://schemas.microsoft.com/office/drawing/2010/main" xmlns="">
                 <a:effectLst>
                   <a:outerShdw blurRad="63500" dist="38099" dir="2700000" algn="ctr" rotWithShape="0">
                     <a:srgbClr val="000000">
@@ -5210,7 +5210,7 @@
           <a:effectLst/>
           <a:extLst>
             <a:ext uri="{AF507438-7753-43e0-B8FC-AC1667EBCBE1}">
-              <a14:hiddenEffects xmlns="" xmlns:a14="http://schemas.microsoft.com/office/drawing/2010/main">
+              <a14:hiddenEffects xmlns:a14="http://schemas.microsoft.com/office/drawing/2010/main" xmlns="">
                 <a:effectLst>
                   <a:outerShdw blurRad="63500" dist="38099" dir="2700000" algn="ctr" rotWithShape="0">
                     <a:srgbClr val="000000">
@@ -5260,7 +5260,7 @@
           <a:effectLst/>
           <a:extLst>
             <a:ext uri="{AF507438-7753-43e0-B8FC-AC1667EBCBE1}">
-              <a14:hiddenEffects xmlns="" xmlns:a14="http://schemas.microsoft.com/office/drawing/2010/main">
+              <a14:hiddenEffects xmlns:a14="http://schemas.microsoft.com/office/drawing/2010/main" xmlns="">
                 <a:effectLst>
                   <a:outerShdw blurRad="63500" dist="38099" dir="2700000" algn="ctr" rotWithShape="0">
                     <a:srgbClr val="000000">
@@ -5312,7 +5312,7 @@
           <a:effectLst/>
           <a:extLst>
             <a:ext uri="{AF507438-7753-43e0-B8FC-AC1667EBCBE1}">
-              <a14:hiddenEffects xmlns="" xmlns:a14="http://schemas.microsoft.com/office/drawing/2010/main">
+              <a14:hiddenEffects xmlns:a14="http://schemas.microsoft.com/office/drawing/2010/main" xmlns="">
                 <a:effectLst>
                   <a:outerShdw blurRad="63500" dist="38099" dir="2700000" algn="ctr" rotWithShape="0">
                     <a:srgbClr val="000000">
@@ -5364,7 +5364,7 @@
           <a:effectLst/>
           <a:extLst>
             <a:ext uri="{AF507438-7753-43e0-B8FC-AC1667EBCBE1}">
-              <a14:hiddenEffects xmlns="" xmlns:a14="http://schemas.microsoft.com/office/drawing/2010/main">
+              <a14:hiddenEffects xmlns:a14="http://schemas.microsoft.com/office/drawing/2010/main" xmlns="">
                 <a:effectLst>
                   <a:outerShdw blurRad="63500" dist="38099" dir="2700000" algn="ctr" rotWithShape="0">
                     <a:srgbClr val="000000">
@@ -5416,7 +5416,7 @@
           <a:effectLst/>
           <a:extLst>
             <a:ext uri="{AF507438-7753-43e0-B8FC-AC1667EBCBE1}">
-              <a14:hiddenEffects xmlns="" xmlns:a14="http://schemas.microsoft.com/office/drawing/2010/main">
+              <a14:hiddenEffects xmlns:a14="http://schemas.microsoft.com/office/drawing/2010/main" xmlns="">
                 <a:effectLst>
                   <a:outerShdw blurRad="63500" dist="38099" dir="2700000" algn="ctr" rotWithShape="0">
                     <a:srgbClr val="000000">
@@ -5468,7 +5468,7 @@
           <a:effectLst/>
           <a:extLst>
             <a:ext uri="{AF507438-7753-43e0-B8FC-AC1667EBCBE1}">
-              <a14:hiddenEffects xmlns="" xmlns:a14="http://schemas.microsoft.com/office/drawing/2010/main">
+              <a14:hiddenEffects xmlns:a14="http://schemas.microsoft.com/office/drawing/2010/main" xmlns="">
                 <a:effectLst>
                   <a:outerShdw blurRad="63500" dist="38099" dir="2700000" algn="ctr" rotWithShape="0">
                     <a:srgbClr val="000000">
@@ -5520,7 +5520,7 @@
           <a:effectLst/>
           <a:extLst>
             <a:ext uri="{AF507438-7753-43e0-B8FC-AC1667EBCBE1}">
-              <a14:hiddenEffects xmlns="" xmlns:a14="http://schemas.microsoft.com/office/drawing/2010/main">
+              <a14:hiddenEffects xmlns:a14="http://schemas.microsoft.com/office/drawing/2010/main" xmlns="">
                 <a:effectLst>
                   <a:outerShdw blurRad="63500" dist="38099" dir="2700000" algn="ctr" rotWithShape="0">
                     <a:srgbClr val="000000">
@@ -5573,7 +5573,7 @@
           <a:effectLst/>
           <a:extLst>
             <a:ext uri="{AF507438-7753-43e0-B8FC-AC1667EBCBE1}">
-              <a14:hiddenEffects xmlns="" xmlns:a14="http://schemas.microsoft.com/office/drawing/2010/main">
+              <a14:hiddenEffects xmlns:a14="http://schemas.microsoft.com/office/drawing/2010/main" xmlns="">
                 <a:effectLst>
                   <a:outerShdw blurRad="63500" dist="38099" dir="2700000" algn="ctr" rotWithShape="0">
                     <a:srgbClr val="000000">
@@ -5623,7 +5623,7 @@
           <a:effectLst/>
           <a:extLst>
             <a:ext uri="{AF507438-7753-43e0-B8FC-AC1667EBCBE1}">
-              <a14:hiddenEffects xmlns="" xmlns:a14="http://schemas.microsoft.com/office/drawing/2010/main">
+              <a14:hiddenEffects xmlns:a14="http://schemas.microsoft.com/office/drawing/2010/main" xmlns="">
                 <a:effectLst>
                   <a:outerShdw blurRad="63500" dist="38099" dir="2700000" algn="ctr" rotWithShape="0">
                     <a:srgbClr val="000000">
@@ -5673,7 +5673,7 @@
           <a:effectLst/>
           <a:extLst>
             <a:ext uri="{AF507438-7753-43e0-B8FC-AC1667EBCBE1}">
-              <a14:hiddenEffects xmlns="" xmlns:a14="http://schemas.microsoft.com/office/drawing/2010/main">
+              <a14:hiddenEffects xmlns:a14="http://schemas.microsoft.com/office/drawing/2010/main" xmlns="">
                 <a:effectLst>
                   <a:outerShdw blurRad="63500" dist="38099" dir="2700000" algn="ctr" rotWithShape="0">
                     <a:srgbClr val="000000">
@@ -5723,7 +5723,7 @@
           <a:effectLst/>
           <a:extLst>
             <a:ext uri="{AF507438-7753-43e0-B8FC-AC1667EBCBE1}">
-              <a14:hiddenEffects xmlns="" xmlns:a14="http://schemas.microsoft.com/office/drawing/2010/main">
+              <a14:hiddenEffects xmlns:a14="http://schemas.microsoft.com/office/drawing/2010/main" xmlns="">
                 <a:effectLst>
                   <a:outerShdw blurRad="63500" dist="38099" dir="2700000" algn="ctr" rotWithShape="0">
                     <a:srgbClr val="000000">
@@ -5771,12 +5771,12 @@
           <a:effectLst/>
           <a:extLst>
             <a:ext uri="{909E8E84-426E-40dd-AFC4-6F175D3DCCD1}">
-              <a14:hiddenFill xmlns="" xmlns:a14="http://schemas.microsoft.com/office/drawing/2010/main">
+              <a14:hiddenFill xmlns:a14="http://schemas.microsoft.com/office/drawing/2010/main" xmlns="">
                 <a:noFill/>
               </a14:hiddenFill>
             </a:ext>
             <a:ext uri="{AF507438-7753-43e0-B8FC-AC1667EBCBE1}">
-              <a14:hiddenEffects xmlns="" xmlns:a14="http://schemas.microsoft.com/office/drawing/2010/main">
+              <a14:hiddenEffects xmlns:a14="http://schemas.microsoft.com/office/drawing/2010/main" xmlns="">
                 <a:effectLst>
                   <a:outerShdw blurRad="63500" dist="38099" dir="2700000" algn="ctr" rotWithShape="0">
                     <a:srgbClr val="000000">
@@ -5824,12 +5824,12 @@
           <a:effectLst/>
           <a:extLst>
             <a:ext uri="{909E8E84-426E-40dd-AFC4-6F175D3DCCD1}">
-              <a14:hiddenFill xmlns="" xmlns:a14="http://schemas.microsoft.com/office/drawing/2010/main">
+              <a14:hiddenFill xmlns:a14="http://schemas.microsoft.com/office/drawing/2010/main" xmlns="">
                 <a:noFill/>
               </a14:hiddenFill>
             </a:ext>
             <a:ext uri="{AF507438-7753-43e0-B8FC-AC1667EBCBE1}">
-              <a14:hiddenEffects xmlns="" xmlns:a14="http://schemas.microsoft.com/office/drawing/2010/main">
+              <a14:hiddenEffects xmlns:a14="http://schemas.microsoft.com/office/drawing/2010/main" xmlns="">
                 <a:effectLst>
                   <a:outerShdw blurRad="63500" dist="38099" dir="2700000" algn="ctr" rotWithShape="0">
                     <a:srgbClr val="000000">
@@ -5877,12 +5877,12 @@
           <a:effectLst/>
           <a:extLst>
             <a:ext uri="{909E8E84-426E-40dd-AFC4-6F175D3DCCD1}">
-              <a14:hiddenFill xmlns="" xmlns:a14="http://schemas.microsoft.com/office/drawing/2010/main">
+              <a14:hiddenFill xmlns:a14="http://schemas.microsoft.com/office/drawing/2010/main" xmlns="">
                 <a:noFill/>
               </a14:hiddenFill>
             </a:ext>
             <a:ext uri="{AF507438-7753-43e0-B8FC-AC1667EBCBE1}">
-              <a14:hiddenEffects xmlns="" xmlns:a14="http://schemas.microsoft.com/office/drawing/2010/main">
+              <a14:hiddenEffects xmlns:a14="http://schemas.microsoft.com/office/drawing/2010/main" xmlns="">
                 <a:effectLst>
                   <a:outerShdw blurRad="63500" dist="38099" dir="2700000" algn="ctr" rotWithShape="0">
                     <a:srgbClr val="000000">
@@ -5930,12 +5930,12 @@
           <a:effectLst/>
           <a:extLst>
             <a:ext uri="{909E8E84-426E-40dd-AFC4-6F175D3DCCD1}">
-              <a14:hiddenFill xmlns="" xmlns:a14="http://schemas.microsoft.com/office/drawing/2010/main">
+              <a14:hiddenFill xmlns:a14="http://schemas.microsoft.com/office/drawing/2010/main" xmlns="">
                 <a:noFill/>
               </a14:hiddenFill>
             </a:ext>
             <a:ext uri="{AF507438-7753-43e0-B8FC-AC1667EBCBE1}">
-              <a14:hiddenEffects xmlns="" xmlns:a14="http://schemas.microsoft.com/office/drawing/2010/main">
+              <a14:hiddenEffects xmlns:a14="http://schemas.microsoft.com/office/drawing/2010/main" xmlns="">
                 <a:effectLst>
                   <a:outerShdw blurRad="63500" dist="38099" dir="2700000" algn="ctr" rotWithShape="0">
                     <a:srgbClr val="000000">
@@ -5983,12 +5983,12 @@
           <a:effectLst/>
           <a:extLst>
             <a:ext uri="{909E8E84-426E-40dd-AFC4-6F175D3DCCD1}">
-              <a14:hiddenFill xmlns="" xmlns:a14="http://schemas.microsoft.com/office/drawing/2010/main">
+              <a14:hiddenFill xmlns:a14="http://schemas.microsoft.com/office/drawing/2010/main" xmlns="">
                 <a:noFill/>
               </a14:hiddenFill>
             </a:ext>
             <a:ext uri="{AF507438-7753-43e0-B8FC-AC1667EBCBE1}">
-              <a14:hiddenEffects xmlns="" xmlns:a14="http://schemas.microsoft.com/office/drawing/2010/main">
+              <a14:hiddenEffects xmlns:a14="http://schemas.microsoft.com/office/drawing/2010/main" xmlns="">
                 <a:effectLst>
                   <a:outerShdw blurRad="63500" dist="38099" dir="2700000" algn="ctr" rotWithShape="0">
                     <a:srgbClr val="000000">
@@ -6038,7 +6038,7 @@
           <a:effectLst/>
           <a:extLst>
             <a:ext uri="{AF507438-7753-43e0-B8FC-AC1667EBCBE1}">
-              <a14:hiddenEffects xmlns="" xmlns:a14="http://schemas.microsoft.com/office/drawing/2010/main">
+              <a14:hiddenEffects xmlns:a14="http://schemas.microsoft.com/office/drawing/2010/main" xmlns="">
                 <a:effectLst>
                   <a:outerShdw blurRad="63500" dist="38099" dir="2700000" algn="ctr" rotWithShape="0">
                     <a:srgbClr val="000000">
@@ -6088,7 +6088,7 @@
           <a:effectLst/>
           <a:extLst>
             <a:ext uri="{AF507438-7753-43e0-B8FC-AC1667EBCBE1}">
-              <a14:hiddenEffects xmlns="" xmlns:a14="http://schemas.microsoft.com/office/drawing/2010/main">
+              <a14:hiddenEffects xmlns:a14="http://schemas.microsoft.com/office/drawing/2010/main" xmlns="">
                 <a:effectLst>
                   <a:outerShdw blurRad="63500" dist="38099" dir="2700000" algn="ctr" rotWithShape="0">
                     <a:srgbClr val="000000">
@@ -6136,12 +6136,12 @@
           <a:effectLst/>
           <a:extLst>
             <a:ext uri="{909E8E84-426E-40dd-AFC4-6F175D3DCCD1}">
-              <a14:hiddenFill xmlns="" xmlns:a14="http://schemas.microsoft.com/office/drawing/2010/main">
+              <a14:hiddenFill xmlns:a14="http://schemas.microsoft.com/office/drawing/2010/main" xmlns="">
                 <a:noFill/>
               </a14:hiddenFill>
             </a:ext>
             <a:ext uri="{AF507438-7753-43e0-B8FC-AC1667EBCBE1}">
-              <a14:hiddenEffects xmlns="" xmlns:a14="http://schemas.microsoft.com/office/drawing/2010/main">
+              <a14:hiddenEffects xmlns:a14="http://schemas.microsoft.com/office/drawing/2010/main" xmlns="">
                 <a:effectLst>
                   <a:outerShdw blurRad="63500" dist="38099" dir="2700000" algn="ctr" rotWithShape="0">
                     <a:srgbClr val="000000">
@@ -6189,12 +6189,12 @@
           <a:effectLst/>
           <a:extLst>
             <a:ext uri="{909E8E84-426E-40dd-AFC4-6F175D3DCCD1}">
-              <a14:hiddenFill xmlns="" xmlns:a14="http://schemas.microsoft.com/office/drawing/2010/main">
+              <a14:hiddenFill xmlns:a14="http://schemas.microsoft.com/office/drawing/2010/main" xmlns="">
                 <a:noFill/>
               </a14:hiddenFill>
             </a:ext>
             <a:ext uri="{AF507438-7753-43e0-B8FC-AC1667EBCBE1}">
-              <a14:hiddenEffects xmlns="" xmlns:a14="http://schemas.microsoft.com/office/drawing/2010/main">
+              <a14:hiddenEffects xmlns:a14="http://schemas.microsoft.com/office/drawing/2010/main" xmlns="">
                 <a:effectLst>
                   <a:outerShdw blurRad="63500" dist="38099" dir="2700000" algn="ctr" rotWithShape="0">
                     <a:srgbClr val="000000">
@@ -6242,12 +6242,12 @@
           <a:effectLst/>
           <a:extLst>
             <a:ext uri="{909E8E84-426E-40dd-AFC4-6F175D3DCCD1}">
-              <a14:hiddenFill xmlns="" xmlns:a14="http://schemas.microsoft.com/office/drawing/2010/main">
+              <a14:hiddenFill xmlns:a14="http://schemas.microsoft.com/office/drawing/2010/main" xmlns="">
                 <a:noFill/>
               </a14:hiddenFill>
             </a:ext>
             <a:ext uri="{AF507438-7753-43e0-B8FC-AC1667EBCBE1}">
-              <a14:hiddenEffects xmlns="" xmlns:a14="http://schemas.microsoft.com/office/drawing/2010/main">
+              <a14:hiddenEffects xmlns:a14="http://schemas.microsoft.com/office/drawing/2010/main" xmlns="">
                 <a:effectLst>
                   <a:outerShdw blurRad="63500" dist="38099" dir="2700000" algn="ctr" rotWithShape="0">
                     <a:srgbClr val="000000">
@@ -6299,7 +6299,7 @@
           <a:effectLst/>
           <a:extLst>
             <a:ext uri="{AF507438-7753-43e0-B8FC-AC1667EBCBE1}">
-              <a14:hiddenEffects xmlns="" xmlns:a14="http://schemas.microsoft.com/office/drawing/2010/main">
+              <a14:hiddenEffects xmlns:a14="http://schemas.microsoft.com/office/drawing/2010/main" xmlns="">
                 <a:effectLst>
                   <a:outerShdw blurRad="63500" dist="38099" dir="2700000" algn="ctr" rotWithShape="0">
                     <a:srgbClr val="000000">
@@ -6349,7 +6349,7 @@
           <a:effectLst/>
           <a:extLst>
             <a:ext uri="{AF507438-7753-43e0-B8FC-AC1667EBCBE1}">
-              <a14:hiddenEffects xmlns="" xmlns:a14="http://schemas.microsoft.com/office/drawing/2010/main">
+              <a14:hiddenEffects xmlns:a14="http://schemas.microsoft.com/office/drawing/2010/main" xmlns="">
                 <a:effectLst>
                   <a:outerShdw blurRad="63500" dist="38099" dir="2700000" algn="ctr" rotWithShape="0">
                     <a:srgbClr val="000000">
@@ -6401,7 +6401,7 @@
           <a:effectLst/>
           <a:extLst>
             <a:ext uri="{AF507438-7753-43e0-B8FC-AC1667EBCBE1}">
-              <a14:hiddenEffects xmlns="" xmlns:a14="http://schemas.microsoft.com/office/drawing/2010/main">
+              <a14:hiddenEffects xmlns:a14="http://schemas.microsoft.com/office/drawing/2010/main" xmlns="">
                 <a:effectLst>
                   <a:outerShdw blurRad="63500" dist="38099" dir="2700000" algn="ctr" rotWithShape="0">
                     <a:srgbClr val="000000">
@@ -6444,14 +6444,14 @@
           <a:effectLst/>
           <a:extLst>
             <a:ext uri="{909E8E84-426E-40dd-AFC4-6F175D3DCCD1}">
-              <a14:hiddenFill xmlns="" xmlns:a14="http://schemas.microsoft.com/office/drawing/2010/main">
+              <a14:hiddenFill xmlns:a14="http://schemas.microsoft.com/office/drawing/2010/main" xmlns="">
                 <a:solidFill>
                   <a:srgbClr val="FFFFFF"/>
                 </a:solidFill>
               </a14:hiddenFill>
             </a:ext>
             <a:ext uri="{91240B29-F687-4f45-9708-019B960494DF}">
-              <a14:hiddenLine xmlns="" xmlns:a14="http://schemas.microsoft.com/office/drawing/2010/main" w="9525" cap="flat">
+              <a14:hiddenLine xmlns:a14="http://schemas.microsoft.com/office/drawing/2010/main" xmlns="" w="9525" cap="flat">
                 <a:solidFill>
                   <a:srgbClr val="000000"/>
                 </a:solidFill>
@@ -6461,7 +6461,7 @@
               </a14:hiddenLine>
             </a:ext>
             <a:ext uri="{AF507438-7753-43e0-B8FC-AC1667EBCBE1}">
-              <a14:hiddenEffects xmlns="" xmlns:a14="http://schemas.microsoft.com/office/drawing/2010/main">
+              <a14:hiddenEffects xmlns:a14="http://schemas.microsoft.com/office/drawing/2010/main" xmlns="">
                 <a:effectLst>
                   <a:outerShdw blurRad="63500" dist="38099" dir="2700000" algn="ctr" rotWithShape="0">
                     <a:srgbClr val="000000">
@@ -6695,12 +6695,12 @@
           <a:effectLst/>
           <a:extLst>
             <a:ext uri="{909E8E84-426E-40dd-AFC4-6F175D3DCCD1}">
-              <a14:hiddenFill xmlns="" xmlns:a14="http://schemas.microsoft.com/office/drawing/2010/main">
+              <a14:hiddenFill xmlns:a14="http://schemas.microsoft.com/office/drawing/2010/main" xmlns="">
                 <a:noFill/>
               </a14:hiddenFill>
             </a:ext>
             <a:ext uri="{AF507438-7753-43e0-B8FC-AC1667EBCBE1}">
-              <a14:hiddenEffects xmlns="" xmlns:a14="http://schemas.microsoft.com/office/drawing/2010/main">
+              <a14:hiddenEffects xmlns:a14="http://schemas.microsoft.com/office/drawing/2010/main" xmlns="">
                 <a:effectLst>
                   <a:outerShdw blurRad="63500" dist="38099" dir="2700000" algn="ctr" rotWithShape="0">
                     <a:srgbClr val="000000">
@@ -6748,12 +6748,12 @@
           <a:effectLst/>
           <a:extLst>
             <a:ext uri="{909E8E84-426E-40dd-AFC4-6F175D3DCCD1}">
-              <a14:hiddenFill xmlns="" xmlns:a14="http://schemas.microsoft.com/office/drawing/2010/main">
+              <a14:hiddenFill xmlns:a14="http://schemas.microsoft.com/office/drawing/2010/main" xmlns="">
                 <a:noFill/>
               </a14:hiddenFill>
             </a:ext>
             <a:ext uri="{AF507438-7753-43e0-B8FC-AC1667EBCBE1}">
-              <a14:hiddenEffects xmlns="" xmlns:a14="http://schemas.microsoft.com/office/drawing/2010/main">
+              <a14:hiddenEffects xmlns:a14="http://schemas.microsoft.com/office/drawing/2010/main" xmlns="">
                 <a:effectLst>
                   <a:outerShdw blurRad="63500" dist="38099" dir="2700000" algn="ctr" rotWithShape="0">
                     <a:srgbClr val="000000">
@@ -6796,14 +6796,14 @@
           <a:effectLst/>
           <a:extLst>
             <a:ext uri="{909E8E84-426E-40dd-AFC4-6F175D3DCCD1}">
-              <a14:hiddenFill xmlns="" xmlns:a14="http://schemas.microsoft.com/office/drawing/2010/main">
+              <a14:hiddenFill xmlns:a14="http://schemas.microsoft.com/office/drawing/2010/main" xmlns="">
                 <a:solidFill>
                   <a:srgbClr val="FFFFFF"/>
                 </a:solidFill>
               </a14:hiddenFill>
             </a:ext>
             <a:ext uri="{91240B29-F687-4f45-9708-019B960494DF}">
-              <a14:hiddenLine xmlns="" xmlns:a14="http://schemas.microsoft.com/office/drawing/2010/main" w="9525" cap="flat">
+              <a14:hiddenLine xmlns:a14="http://schemas.microsoft.com/office/drawing/2010/main" xmlns="" w="9525" cap="flat">
                 <a:solidFill>
                   <a:srgbClr val="000000"/>
                 </a:solidFill>
@@ -6813,7 +6813,7 @@
               </a14:hiddenLine>
             </a:ext>
             <a:ext uri="{AF507438-7753-43e0-B8FC-AC1667EBCBE1}">
-              <a14:hiddenEffects xmlns="" xmlns:a14="http://schemas.microsoft.com/office/drawing/2010/main">
+              <a14:hiddenEffects xmlns:a14="http://schemas.microsoft.com/office/drawing/2010/main" xmlns="">
                 <a:effectLst>
                   <a:outerShdw blurRad="63500" dist="38099" dir="2700000" algn="ctr" rotWithShape="0">
                     <a:srgbClr val="000000">
@@ -7051,14 +7051,14 @@
           <a:effectLst/>
           <a:extLst>
             <a:ext uri="{909E8E84-426E-40dd-AFC4-6F175D3DCCD1}">
-              <a14:hiddenFill xmlns="" xmlns:a14="http://schemas.microsoft.com/office/drawing/2010/main">
+              <a14:hiddenFill xmlns:a14="http://schemas.microsoft.com/office/drawing/2010/main" xmlns="">
                 <a:solidFill>
                   <a:srgbClr val="FFFFFF"/>
                 </a:solidFill>
               </a14:hiddenFill>
             </a:ext>
             <a:ext uri="{91240B29-F687-4f45-9708-019B960494DF}">
-              <a14:hiddenLine xmlns="" xmlns:a14="http://schemas.microsoft.com/office/drawing/2010/main" w="9525" cap="flat">
+              <a14:hiddenLine xmlns:a14="http://schemas.microsoft.com/office/drawing/2010/main" xmlns="" w="9525" cap="flat">
                 <a:solidFill>
                   <a:srgbClr val="000000"/>
                 </a:solidFill>
@@ -7068,7 +7068,7 @@
               </a14:hiddenLine>
             </a:ext>
             <a:ext uri="{AF507438-7753-43e0-B8FC-AC1667EBCBE1}">
-              <a14:hiddenEffects xmlns="" xmlns:a14="http://schemas.microsoft.com/office/drawing/2010/main">
+              <a14:hiddenEffects xmlns:a14="http://schemas.microsoft.com/office/drawing/2010/main" xmlns="">
                 <a:effectLst>
                   <a:outerShdw blurRad="63500" dist="38099" dir="2700000" algn="ctr" rotWithShape="0">
                     <a:srgbClr val="000000">
@@ -7288,14 +7288,14 @@
           <a:effectLst/>
           <a:extLst>
             <a:ext uri="{909E8E84-426E-40dd-AFC4-6F175D3DCCD1}">
-              <a14:hiddenFill xmlns="" xmlns:a14="http://schemas.microsoft.com/office/drawing/2010/main">
+              <a14:hiddenFill xmlns:a14="http://schemas.microsoft.com/office/drawing/2010/main" xmlns="">
                 <a:solidFill>
                   <a:srgbClr val="FFFFFF"/>
                 </a:solidFill>
               </a14:hiddenFill>
             </a:ext>
             <a:ext uri="{91240B29-F687-4f45-9708-019B960494DF}">
-              <a14:hiddenLine xmlns="" xmlns:a14="http://schemas.microsoft.com/office/drawing/2010/main" w="9525" cap="flat">
+              <a14:hiddenLine xmlns:a14="http://schemas.microsoft.com/office/drawing/2010/main" xmlns="" w="9525" cap="flat">
                 <a:solidFill>
                   <a:srgbClr val="000000"/>
                 </a:solidFill>
@@ -7305,7 +7305,7 @@
               </a14:hiddenLine>
             </a:ext>
             <a:ext uri="{AF507438-7753-43e0-B8FC-AC1667EBCBE1}">
-              <a14:hiddenEffects xmlns="" xmlns:a14="http://schemas.microsoft.com/office/drawing/2010/main">
+              <a14:hiddenEffects xmlns:a14="http://schemas.microsoft.com/office/drawing/2010/main" xmlns="">
                 <a:effectLst>
                   <a:outerShdw blurRad="63500" dist="38099" dir="2700000" algn="ctr" rotWithShape="0">
                     <a:srgbClr val="000000">
@@ -7534,14 +7534,14 @@
           <a:effectLst/>
           <a:extLst>
             <a:ext uri="{909E8E84-426E-40dd-AFC4-6F175D3DCCD1}">
-              <a14:hiddenFill xmlns="" xmlns:a14="http://schemas.microsoft.com/office/drawing/2010/main">
+              <a14:hiddenFill xmlns:a14="http://schemas.microsoft.com/office/drawing/2010/main" xmlns="">
                 <a:solidFill>
                   <a:srgbClr val="FFFFFF"/>
                 </a:solidFill>
               </a14:hiddenFill>
             </a:ext>
             <a:ext uri="{91240B29-F687-4f45-9708-019B960494DF}">
-              <a14:hiddenLine xmlns="" xmlns:a14="http://schemas.microsoft.com/office/drawing/2010/main" w="9525" cap="flat">
+              <a14:hiddenLine xmlns:a14="http://schemas.microsoft.com/office/drawing/2010/main" xmlns="" w="9525" cap="flat">
                 <a:solidFill>
                   <a:srgbClr val="000000"/>
                 </a:solidFill>
@@ -7551,7 +7551,7 @@
               </a14:hiddenLine>
             </a:ext>
             <a:ext uri="{AF507438-7753-43e0-B8FC-AC1667EBCBE1}">
-              <a14:hiddenEffects xmlns="" xmlns:a14="http://schemas.microsoft.com/office/drawing/2010/main">
+              <a14:hiddenEffects xmlns:a14="http://schemas.microsoft.com/office/drawing/2010/main" xmlns="">
                 <a:effectLst>
                   <a:outerShdw blurRad="63500" dist="38099" dir="2700000" algn="ctr" rotWithShape="0">
                     <a:srgbClr val="000000">
@@ -7780,14 +7780,14 @@
           <a:effectLst/>
           <a:extLst>
             <a:ext uri="{909E8E84-426E-40dd-AFC4-6F175D3DCCD1}">
-              <a14:hiddenFill xmlns="" xmlns:a14="http://schemas.microsoft.com/office/drawing/2010/main">
+              <a14:hiddenFill xmlns:a14="http://schemas.microsoft.com/office/drawing/2010/main" xmlns="">
                 <a:solidFill>
                   <a:srgbClr val="FFFFFF"/>
                 </a:solidFill>
               </a14:hiddenFill>
             </a:ext>
             <a:ext uri="{91240B29-F687-4f45-9708-019B960494DF}">
-              <a14:hiddenLine xmlns="" xmlns:a14="http://schemas.microsoft.com/office/drawing/2010/main" w="9525" cap="flat">
+              <a14:hiddenLine xmlns:a14="http://schemas.microsoft.com/office/drawing/2010/main" xmlns="" w="9525" cap="flat">
                 <a:solidFill>
                   <a:srgbClr val="000000"/>
                 </a:solidFill>
@@ -7797,7 +7797,7 @@
               </a14:hiddenLine>
             </a:ext>
             <a:ext uri="{AF507438-7753-43e0-B8FC-AC1667EBCBE1}">
-              <a14:hiddenEffects xmlns="" xmlns:a14="http://schemas.microsoft.com/office/drawing/2010/main">
+              <a14:hiddenEffects xmlns:a14="http://schemas.microsoft.com/office/drawing/2010/main" xmlns="">
                 <a:effectLst>
                   <a:outerShdw blurRad="63500" dist="38099" dir="2700000" algn="ctr" rotWithShape="0">
                     <a:srgbClr val="000000">
@@ -8023,14 +8023,14 @@
           <a:effectLst/>
           <a:extLst>
             <a:ext uri="{909E8E84-426E-40dd-AFC4-6F175D3DCCD1}">
-              <a14:hiddenFill xmlns="" xmlns:a14="http://schemas.microsoft.com/office/drawing/2010/main">
+              <a14:hiddenFill xmlns:a14="http://schemas.microsoft.com/office/drawing/2010/main" xmlns="">
                 <a:solidFill>
                   <a:srgbClr val="FFFFFF"/>
                 </a:solidFill>
               </a14:hiddenFill>
             </a:ext>
             <a:ext uri="{91240B29-F687-4f45-9708-019B960494DF}">
-              <a14:hiddenLine xmlns="" xmlns:a14="http://schemas.microsoft.com/office/drawing/2010/main" w="9525" cap="flat">
+              <a14:hiddenLine xmlns:a14="http://schemas.microsoft.com/office/drawing/2010/main" xmlns="" w="9525" cap="flat">
                 <a:solidFill>
                   <a:srgbClr val="000000"/>
                 </a:solidFill>
@@ -8040,7 +8040,7 @@
               </a14:hiddenLine>
             </a:ext>
             <a:ext uri="{AF507438-7753-43e0-B8FC-AC1667EBCBE1}">
-              <a14:hiddenEffects xmlns="" xmlns:a14="http://schemas.microsoft.com/office/drawing/2010/main">
+              <a14:hiddenEffects xmlns:a14="http://schemas.microsoft.com/office/drawing/2010/main" xmlns="">
                 <a:effectLst>
                   <a:outerShdw blurRad="63500" dist="38099" dir="2700000" algn="ctr" rotWithShape="0">
                     <a:srgbClr val="000000">
@@ -8267,14 +8267,14 @@
           <a:effectLst/>
           <a:extLst>
             <a:ext uri="{909E8E84-426E-40dd-AFC4-6F175D3DCCD1}">
-              <a14:hiddenFill xmlns="" xmlns:a14="http://schemas.microsoft.com/office/drawing/2010/main">
+              <a14:hiddenFill xmlns:a14="http://schemas.microsoft.com/office/drawing/2010/main" xmlns="">
                 <a:solidFill>
                   <a:srgbClr val="FFFFFF"/>
                 </a:solidFill>
               </a14:hiddenFill>
             </a:ext>
             <a:ext uri="{91240B29-F687-4f45-9708-019B960494DF}">
-              <a14:hiddenLine xmlns="" xmlns:a14="http://schemas.microsoft.com/office/drawing/2010/main" w="9525" cap="flat">
+              <a14:hiddenLine xmlns:a14="http://schemas.microsoft.com/office/drawing/2010/main" xmlns="" w="9525" cap="flat">
                 <a:solidFill>
                   <a:srgbClr val="000000"/>
                 </a:solidFill>
@@ -8284,7 +8284,7 @@
               </a14:hiddenLine>
             </a:ext>
             <a:ext uri="{AF507438-7753-43e0-B8FC-AC1667EBCBE1}">
-              <a14:hiddenEffects xmlns="" xmlns:a14="http://schemas.microsoft.com/office/drawing/2010/main">
+              <a14:hiddenEffects xmlns:a14="http://schemas.microsoft.com/office/drawing/2010/main" xmlns="">
                 <a:effectLst>
                   <a:outerShdw blurRad="63500" dist="38099" dir="2700000" algn="ctr" rotWithShape="0">
                     <a:srgbClr val="000000">
@@ -8513,14 +8513,14 @@
           <a:effectLst/>
           <a:extLst>
             <a:ext uri="{909E8E84-426E-40dd-AFC4-6F175D3DCCD1}">
-              <a14:hiddenFill xmlns="" xmlns:a14="http://schemas.microsoft.com/office/drawing/2010/main">
+              <a14:hiddenFill xmlns:a14="http://schemas.microsoft.com/office/drawing/2010/main" xmlns="">
                 <a:solidFill>
                   <a:srgbClr val="FFFFFF"/>
                 </a:solidFill>
               </a14:hiddenFill>
             </a:ext>
             <a:ext uri="{91240B29-F687-4f45-9708-019B960494DF}">
-              <a14:hiddenLine xmlns="" xmlns:a14="http://schemas.microsoft.com/office/drawing/2010/main" w="9525" cap="flat">
+              <a14:hiddenLine xmlns:a14="http://schemas.microsoft.com/office/drawing/2010/main" xmlns="" w="9525" cap="flat">
                 <a:solidFill>
                   <a:srgbClr val="000000"/>
                 </a:solidFill>
@@ -8530,7 +8530,7 @@
               </a14:hiddenLine>
             </a:ext>
             <a:ext uri="{AF507438-7753-43e0-B8FC-AC1667EBCBE1}">
-              <a14:hiddenEffects xmlns="" xmlns:a14="http://schemas.microsoft.com/office/drawing/2010/main">
+              <a14:hiddenEffects xmlns:a14="http://schemas.microsoft.com/office/drawing/2010/main" xmlns="">
                 <a:effectLst>
                   <a:outerShdw blurRad="63500" dist="38099" dir="2700000" algn="ctr" rotWithShape="0">
                     <a:srgbClr val="000000">
@@ -8768,7 +8768,7 @@
           <a:effectLst/>
           <a:extLst>
             <a:ext uri="{AF507438-7753-43e0-B8FC-AC1667EBCBE1}">
-              <a14:hiddenEffects xmlns="" xmlns:a14="http://schemas.microsoft.com/office/drawing/2010/main">
+              <a14:hiddenEffects xmlns:a14="http://schemas.microsoft.com/office/drawing/2010/main" xmlns="">
                 <a:effectLst>
                   <a:outerShdw blurRad="63500" dist="38099" dir="2700000" algn="ctr" rotWithShape="0">
                     <a:srgbClr val="000000">
@@ -8818,7 +8818,7 @@
           <a:effectLst/>
           <a:extLst>
             <a:ext uri="{AF507438-7753-43e0-B8FC-AC1667EBCBE1}">
-              <a14:hiddenEffects xmlns="" xmlns:a14="http://schemas.microsoft.com/office/drawing/2010/main">
+              <a14:hiddenEffects xmlns:a14="http://schemas.microsoft.com/office/drawing/2010/main" xmlns="">
                 <a:effectLst>
                   <a:outerShdw blurRad="63500" dist="38099" dir="2700000" algn="ctr" rotWithShape="0">
                     <a:srgbClr val="000000">
@@ -8861,14 +8861,14 @@
           <a:effectLst/>
           <a:extLst>
             <a:ext uri="{909E8E84-426E-40dd-AFC4-6F175D3DCCD1}">
-              <a14:hiddenFill xmlns="" xmlns:a14="http://schemas.microsoft.com/office/drawing/2010/main">
+              <a14:hiddenFill xmlns:a14="http://schemas.microsoft.com/office/drawing/2010/main" xmlns="">
                 <a:solidFill>
                   <a:srgbClr val="FFFFFF"/>
                 </a:solidFill>
               </a14:hiddenFill>
             </a:ext>
             <a:ext uri="{91240B29-F687-4f45-9708-019B960494DF}">
-              <a14:hiddenLine xmlns="" xmlns:a14="http://schemas.microsoft.com/office/drawing/2010/main" w="9525" cap="flat">
+              <a14:hiddenLine xmlns:a14="http://schemas.microsoft.com/office/drawing/2010/main" xmlns="" w="9525" cap="flat">
                 <a:solidFill>
                   <a:srgbClr val="000000"/>
                 </a:solidFill>
@@ -8878,7 +8878,7 @@
               </a14:hiddenLine>
             </a:ext>
             <a:ext uri="{AF507438-7753-43e0-B8FC-AC1667EBCBE1}">
-              <a14:hiddenEffects xmlns="" xmlns:a14="http://schemas.microsoft.com/office/drawing/2010/main">
+              <a14:hiddenEffects xmlns:a14="http://schemas.microsoft.com/office/drawing/2010/main" xmlns="">
                 <a:effectLst>
                   <a:outerShdw blurRad="63500" dist="38099" dir="2700000" algn="ctr" rotWithShape="0">
                     <a:srgbClr val="000000">
@@ -9114,7 +9114,7 @@
           <a:effectLst/>
           <a:extLst>
             <a:ext uri="{AF507438-7753-43e0-B8FC-AC1667EBCBE1}">
-              <a14:hiddenEffects xmlns="" xmlns:a14="http://schemas.microsoft.com/office/drawing/2010/main">
+              <a14:hiddenEffects xmlns:a14="http://schemas.microsoft.com/office/drawing/2010/main" xmlns="">
                 <a:effectLst>
                   <a:outerShdw blurRad="63500" dist="38099" dir="2700000" algn="ctr" rotWithShape="0">
                     <a:srgbClr val="000000">
@@ -9164,7 +9164,7 @@
           <a:effectLst/>
           <a:extLst>
             <a:ext uri="{AF507438-7753-43e0-B8FC-AC1667EBCBE1}">
-              <a14:hiddenEffects xmlns="" xmlns:a14="http://schemas.microsoft.com/office/drawing/2010/main">
+              <a14:hiddenEffects xmlns:a14="http://schemas.microsoft.com/office/drawing/2010/main" xmlns="">
                 <a:effectLst>
                   <a:outerShdw blurRad="63500" dist="38099" dir="2700000" algn="ctr" rotWithShape="0">
                     <a:srgbClr val="000000">
@@ -9214,7 +9214,7 @@
           <a:effectLst/>
           <a:extLst>
             <a:ext uri="{AF507438-7753-43e0-B8FC-AC1667EBCBE1}">
-              <a14:hiddenEffects xmlns="" xmlns:a14="http://schemas.microsoft.com/office/drawing/2010/main">
+              <a14:hiddenEffects xmlns:a14="http://schemas.microsoft.com/office/drawing/2010/main" xmlns="">
                 <a:effectLst>
                   <a:outerShdw blurRad="63500" dist="38099" dir="2700000" algn="ctr" rotWithShape="0">
                     <a:srgbClr val="000000">
@@ -9264,7 +9264,7 @@
           <a:effectLst/>
           <a:extLst>
             <a:ext uri="{AF507438-7753-43e0-B8FC-AC1667EBCBE1}">
-              <a14:hiddenEffects xmlns="" xmlns:a14="http://schemas.microsoft.com/office/drawing/2010/main">
+              <a14:hiddenEffects xmlns:a14="http://schemas.microsoft.com/office/drawing/2010/main" xmlns="">
                 <a:effectLst>
                   <a:outerShdw blurRad="63500" dist="38099" dir="2700000" algn="ctr" rotWithShape="0">
                     <a:srgbClr val="000000">
@@ -9314,7 +9314,7 @@
           <a:effectLst/>
           <a:extLst>
             <a:ext uri="{AF507438-7753-43e0-B8FC-AC1667EBCBE1}">
-              <a14:hiddenEffects xmlns="" xmlns:a14="http://schemas.microsoft.com/office/drawing/2010/main">
+              <a14:hiddenEffects xmlns:a14="http://schemas.microsoft.com/office/drawing/2010/main" xmlns="">
                 <a:effectLst>
                   <a:outerShdw blurRad="63500" dist="38099" dir="2700000" algn="ctr" rotWithShape="0">
                     <a:srgbClr val="000000">
@@ -9364,7 +9364,7 @@
           <a:effectLst/>
           <a:extLst>
             <a:ext uri="{AF507438-7753-43e0-B8FC-AC1667EBCBE1}">
-              <a14:hiddenEffects xmlns="" xmlns:a14="http://schemas.microsoft.com/office/drawing/2010/main">
+              <a14:hiddenEffects xmlns:a14="http://schemas.microsoft.com/office/drawing/2010/main" xmlns="">
                 <a:effectLst>
                   <a:outerShdw blurRad="63500" dist="38099" dir="2700000" algn="ctr" rotWithShape="0">
                     <a:srgbClr val="000000">
@@ -9414,7 +9414,7 @@
           <a:effectLst/>
           <a:extLst>
             <a:ext uri="{AF507438-7753-43e0-B8FC-AC1667EBCBE1}">
-              <a14:hiddenEffects xmlns="" xmlns:a14="http://schemas.microsoft.com/office/drawing/2010/main">
+              <a14:hiddenEffects xmlns:a14="http://schemas.microsoft.com/office/drawing/2010/main" xmlns="">
                 <a:effectLst>
                   <a:outerShdw blurRad="63500" dist="38099" dir="2700000" algn="ctr" rotWithShape="0">
                     <a:srgbClr val="000000">
@@ -9464,7 +9464,7 @@
           <a:effectLst/>
           <a:extLst>
             <a:ext uri="{AF507438-7753-43e0-B8FC-AC1667EBCBE1}">
-              <a14:hiddenEffects xmlns="" xmlns:a14="http://schemas.microsoft.com/office/drawing/2010/main">
+              <a14:hiddenEffects xmlns:a14="http://schemas.microsoft.com/office/drawing/2010/main" xmlns="">
                 <a:effectLst>
                   <a:outerShdw blurRad="63500" dist="38099" dir="2700000" algn="ctr" rotWithShape="0">
                     <a:srgbClr val="000000">
@@ -9514,7 +9514,7 @@
           <a:effectLst/>
           <a:extLst>
             <a:ext uri="{AF507438-7753-43e0-B8FC-AC1667EBCBE1}">
-              <a14:hiddenEffects xmlns="" xmlns:a14="http://schemas.microsoft.com/office/drawing/2010/main">
+              <a14:hiddenEffects xmlns:a14="http://schemas.microsoft.com/office/drawing/2010/main" xmlns="">
                 <a:effectLst>
                   <a:outerShdw blurRad="63500" dist="38099" dir="2700000" algn="ctr" rotWithShape="0">
                     <a:srgbClr val="000000">
@@ -9564,7 +9564,7 @@
           <a:effectLst/>
           <a:extLst>
             <a:ext uri="{AF507438-7753-43e0-B8FC-AC1667EBCBE1}">
-              <a14:hiddenEffects xmlns="" xmlns:a14="http://schemas.microsoft.com/office/drawing/2010/main">
+              <a14:hiddenEffects xmlns:a14="http://schemas.microsoft.com/office/drawing/2010/main" xmlns="">
                 <a:effectLst>
                   <a:outerShdw blurRad="63500" dist="38099" dir="2700000" algn="ctr" rotWithShape="0">
                     <a:srgbClr val="000000">
@@ -9614,7 +9614,7 @@
           <a:effectLst/>
           <a:extLst>
             <a:ext uri="{AF507438-7753-43e0-B8FC-AC1667EBCBE1}">
-              <a14:hiddenEffects xmlns="" xmlns:a14="http://schemas.microsoft.com/office/drawing/2010/main">
+              <a14:hiddenEffects xmlns:a14="http://schemas.microsoft.com/office/drawing/2010/main" xmlns="">
                 <a:effectLst>
                   <a:outerShdw blurRad="63500" dist="38099" dir="2700000" algn="ctr" rotWithShape="0">
                     <a:srgbClr val="000000">
@@ -9662,12 +9662,12 @@
           <a:effectLst/>
           <a:extLst>
             <a:ext uri="{909E8E84-426E-40dd-AFC4-6F175D3DCCD1}">
-              <a14:hiddenFill xmlns="" xmlns:a14="http://schemas.microsoft.com/office/drawing/2010/main">
+              <a14:hiddenFill xmlns:a14="http://schemas.microsoft.com/office/drawing/2010/main" xmlns="">
                 <a:noFill/>
               </a14:hiddenFill>
             </a:ext>
             <a:ext uri="{AF507438-7753-43e0-B8FC-AC1667EBCBE1}">
-              <a14:hiddenEffects xmlns="" xmlns:a14="http://schemas.microsoft.com/office/drawing/2010/main">
+              <a14:hiddenEffects xmlns:a14="http://schemas.microsoft.com/office/drawing/2010/main" xmlns="">
                 <a:effectLst>
                   <a:outerShdw blurRad="63500" dist="38099" dir="2700000" algn="ctr" rotWithShape="0">
                     <a:srgbClr val="000000">
@@ -9710,14 +9710,14 @@
           <a:effectLst/>
           <a:extLst>
             <a:ext uri="{909E8E84-426E-40dd-AFC4-6F175D3DCCD1}">
-              <a14:hiddenFill xmlns="" xmlns:a14="http://schemas.microsoft.com/office/drawing/2010/main">
+              <a14:hiddenFill xmlns:a14="http://schemas.microsoft.com/office/drawing/2010/main" xmlns="">
                 <a:solidFill>
                   <a:srgbClr val="FFFFFF"/>
                 </a:solidFill>
               </a14:hiddenFill>
             </a:ext>
             <a:ext uri="{91240B29-F687-4f45-9708-019B960494DF}">
-              <a14:hiddenLine xmlns="" xmlns:a14="http://schemas.microsoft.com/office/drawing/2010/main" w="9525" cap="flat">
+              <a14:hiddenLine xmlns:a14="http://schemas.microsoft.com/office/drawing/2010/main" xmlns="" w="9525" cap="flat">
                 <a:solidFill>
                   <a:srgbClr val="000000"/>
                 </a:solidFill>
@@ -9727,7 +9727,7 @@
               </a14:hiddenLine>
             </a:ext>
             <a:ext uri="{AF507438-7753-43e0-B8FC-AC1667EBCBE1}">
-              <a14:hiddenEffects xmlns="" xmlns:a14="http://schemas.microsoft.com/office/drawing/2010/main">
+              <a14:hiddenEffects xmlns:a14="http://schemas.microsoft.com/office/drawing/2010/main" xmlns="">
                 <a:effectLst>
                   <a:outerShdw blurRad="63500" dist="38099" dir="2700000" algn="ctr" rotWithShape="0">
                     <a:srgbClr val="000000">
@@ -9961,12 +9961,12 @@
           <a:effectLst/>
           <a:extLst>
             <a:ext uri="{909E8E84-426E-40dd-AFC4-6F175D3DCCD1}">
-              <a14:hiddenFill xmlns="" xmlns:a14="http://schemas.microsoft.com/office/drawing/2010/main">
+              <a14:hiddenFill xmlns:a14="http://schemas.microsoft.com/office/drawing/2010/main" xmlns="">
                 <a:noFill/>
               </a14:hiddenFill>
             </a:ext>
             <a:ext uri="{AF507438-7753-43e0-B8FC-AC1667EBCBE1}">
-              <a14:hiddenEffects xmlns="" xmlns:a14="http://schemas.microsoft.com/office/drawing/2010/main">
+              <a14:hiddenEffects xmlns:a14="http://schemas.microsoft.com/office/drawing/2010/main" xmlns="">
                 <a:effectLst>
                   <a:outerShdw blurRad="63500" dist="38099" dir="2700000" algn="ctr" rotWithShape="0">
                     <a:srgbClr val="000000">
@@ -10014,12 +10014,12 @@
           <a:effectLst/>
           <a:extLst>
             <a:ext uri="{909E8E84-426E-40dd-AFC4-6F175D3DCCD1}">
-              <a14:hiddenFill xmlns="" xmlns:a14="http://schemas.microsoft.com/office/drawing/2010/main">
+              <a14:hiddenFill xmlns:a14="http://schemas.microsoft.com/office/drawing/2010/main" xmlns="">
                 <a:noFill/>
               </a14:hiddenFill>
             </a:ext>
             <a:ext uri="{AF507438-7753-43e0-B8FC-AC1667EBCBE1}">
-              <a14:hiddenEffects xmlns="" xmlns:a14="http://schemas.microsoft.com/office/drawing/2010/main">
+              <a14:hiddenEffects xmlns:a14="http://schemas.microsoft.com/office/drawing/2010/main" xmlns="">
                 <a:effectLst>
                   <a:outerShdw blurRad="63500" dist="38099" dir="2700000" algn="ctr" rotWithShape="0">
                     <a:srgbClr val="000000">
@@ -10062,14 +10062,14 @@
           <a:effectLst/>
           <a:extLst>
             <a:ext uri="{909E8E84-426E-40dd-AFC4-6F175D3DCCD1}">
-              <a14:hiddenFill xmlns="" xmlns:a14="http://schemas.microsoft.com/office/drawing/2010/main">
+              <a14:hiddenFill xmlns:a14="http://schemas.microsoft.com/office/drawing/2010/main" xmlns="">
                 <a:solidFill>
                   <a:srgbClr val="FFFFFF"/>
                 </a:solidFill>
               </a14:hiddenFill>
             </a:ext>
             <a:ext uri="{91240B29-F687-4f45-9708-019B960494DF}">
-              <a14:hiddenLine xmlns="" xmlns:a14="http://schemas.microsoft.com/office/drawing/2010/main" w="9525" cap="flat">
+              <a14:hiddenLine xmlns:a14="http://schemas.microsoft.com/office/drawing/2010/main" xmlns="" w="9525" cap="flat">
                 <a:solidFill>
                   <a:srgbClr val="000000"/>
                 </a:solidFill>
@@ -10079,7 +10079,7 @@
               </a14:hiddenLine>
             </a:ext>
             <a:ext uri="{AF507438-7753-43e0-B8FC-AC1667EBCBE1}">
-              <a14:hiddenEffects xmlns="" xmlns:a14="http://schemas.microsoft.com/office/drawing/2010/main">
+              <a14:hiddenEffects xmlns:a14="http://schemas.microsoft.com/office/drawing/2010/main" xmlns="">
                 <a:effectLst>
                   <a:outerShdw blurRad="63500" dist="38099" dir="2700000" algn="ctr" rotWithShape="0">
                     <a:srgbClr val="000000">
@@ -10317,14 +10317,14 @@
           <a:effectLst/>
           <a:extLst>
             <a:ext uri="{909E8E84-426E-40dd-AFC4-6F175D3DCCD1}">
-              <a14:hiddenFill xmlns="" xmlns:a14="http://schemas.microsoft.com/office/drawing/2010/main">
+              <a14:hiddenFill xmlns:a14="http://schemas.microsoft.com/office/drawing/2010/main" xmlns="">
                 <a:solidFill>
                   <a:srgbClr val="FFFFFF"/>
                 </a:solidFill>
               </a14:hiddenFill>
             </a:ext>
             <a:ext uri="{91240B29-F687-4f45-9708-019B960494DF}">
-              <a14:hiddenLine xmlns="" xmlns:a14="http://schemas.microsoft.com/office/drawing/2010/main" w="9525" cap="flat">
+              <a14:hiddenLine xmlns:a14="http://schemas.microsoft.com/office/drawing/2010/main" xmlns="" w="9525" cap="flat">
                 <a:solidFill>
                   <a:srgbClr val="000000"/>
                 </a:solidFill>
@@ -10334,7 +10334,7 @@
               </a14:hiddenLine>
             </a:ext>
             <a:ext uri="{AF507438-7753-43e0-B8FC-AC1667EBCBE1}">
-              <a14:hiddenEffects xmlns="" xmlns:a14="http://schemas.microsoft.com/office/drawing/2010/main">
+              <a14:hiddenEffects xmlns:a14="http://schemas.microsoft.com/office/drawing/2010/main" xmlns="">
                 <a:effectLst>
                   <a:outerShdw blurRad="63500" dist="38099" dir="2700000" algn="ctr" rotWithShape="0">
                     <a:srgbClr val="000000">
@@ -10566,14 +10566,14 @@
           <a:effectLst/>
           <a:extLst>
             <a:ext uri="{909E8E84-426E-40dd-AFC4-6F175D3DCCD1}">
-              <a14:hiddenFill xmlns="" xmlns:a14="http://schemas.microsoft.com/office/drawing/2010/main">
+              <a14:hiddenFill xmlns:a14="http://schemas.microsoft.com/office/drawing/2010/main" xmlns="">
                 <a:solidFill>
                   <a:srgbClr val="FFFFFF"/>
                 </a:solidFill>
               </a14:hiddenFill>
             </a:ext>
             <a:ext uri="{91240B29-F687-4f45-9708-019B960494DF}">
-              <a14:hiddenLine xmlns="" xmlns:a14="http://schemas.microsoft.com/office/drawing/2010/main" w="9525" cap="flat">
+              <a14:hiddenLine xmlns:a14="http://schemas.microsoft.com/office/drawing/2010/main" xmlns="" w="9525" cap="flat">
                 <a:solidFill>
                   <a:srgbClr val="000000"/>
                 </a:solidFill>
@@ -10583,7 +10583,7 @@
               </a14:hiddenLine>
             </a:ext>
             <a:ext uri="{AF507438-7753-43e0-B8FC-AC1667EBCBE1}">
-              <a14:hiddenEffects xmlns="" xmlns:a14="http://schemas.microsoft.com/office/drawing/2010/main">
+              <a14:hiddenEffects xmlns:a14="http://schemas.microsoft.com/office/drawing/2010/main" xmlns="">
                 <a:effectLst>
                   <a:outerShdw blurRad="63500" dist="38099" dir="2700000" algn="ctr" rotWithShape="0">
                     <a:srgbClr val="000000">
@@ -10808,12 +10808,12 @@
           <a:effectLst/>
           <a:extLst>
             <a:ext uri="{909E8E84-426E-40dd-AFC4-6F175D3DCCD1}">
-              <a14:hiddenFill xmlns="" xmlns:a14="http://schemas.microsoft.com/office/drawing/2010/main">
+              <a14:hiddenFill xmlns:a14="http://schemas.microsoft.com/office/drawing/2010/main" xmlns="">
                 <a:noFill/>
               </a14:hiddenFill>
             </a:ext>
             <a:ext uri="{AF507438-7753-43e0-B8FC-AC1667EBCBE1}">
-              <a14:hiddenEffects xmlns="" xmlns:a14="http://schemas.microsoft.com/office/drawing/2010/main">
+              <a14:hiddenEffects xmlns:a14="http://schemas.microsoft.com/office/drawing/2010/main" xmlns="">
                 <a:effectLst>
                   <a:outerShdw blurRad="63500" dist="38099" dir="2700000" algn="ctr" rotWithShape="0">
                     <a:srgbClr val="000000">
@@ -10856,14 +10856,14 @@
           <a:effectLst/>
           <a:extLst>
             <a:ext uri="{909E8E84-426E-40dd-AFC4-6F175D3DCCD1}">
-              <a14:hiddenFill xmlns="" xmlns:a14="http://schemas.microsoft.com/office/drawing/2010/main">
+              <a14:hiddenFill xmlns:a14="http://schemas.microsoft.com/office/drawing/2010/main" xmlns="">
                 <a:solidFill>
                   <a:srgbClr val="FFFFFF"/>
                 </a:solidFill>
               </a14:hiddenFill>
             </a:ext>
             <a:ext uri="{91240B29-F687-4f45-9708-019B960494DF}">
-              <a14:hiddenLine xmlns="" xmlns:a14="http://schemas.microsoft.com/office/drawing/2010/main" w="9525" cap="flat">
+              <a14:hiddenLine xmlns:a14="http://schemas.microsoft.com/office/drawing/2010/main" xmlns="" w="9525" cap="flat">
                 <a:solidFill>
                   <a:srgbClr val="000000"/>
                 </a:solidFill>
@@ -10873,7 +10873,7 @@
               </a14:hiddenLine>
             </a:ext>
             <a:ext uri="{AF507438-7753-43e0-B8FC-AC1667EBCBE1}">
-              <a14:hiddenEffects xmlns="" xmlns:a14="http://schemas.microsoft.com/office/drawing/2010/main">
+              <a14:hiddenEffects xmlns:a14="http://schemas.microsoft.com/office/drawing/2010/main" xmlns="">
                 <a:effectLst>
                   <a:outerShdw blurRad="63500" dist="38099" dir="2700000" algn="ctr" rotWithShape="0">
                     <a:srgbClr val="000000">
@@ -10923,14 +10923,14 @@
           <a:effectLst/>
           <a:extLst>
             <a:ext uri="{909E8E84-426E-40dd-AFC4-6F175D3DCCD1}">
-              <a14:hiddenFill xmlns="" xmlns:a14="http://schemas.microsoft.com/office/drawing/2010/main">
+              <a14:hiddenFill xmlns:a14="http://schemas.microsoft.com/office/drawing/2010/main" xmlns="">
                 <a:solidFill>
                   <a:srgbClr val="FFFFFF"/>
                 </a:solidFill>
               </a14:hiddenFill>
             </a:ext>
             <a:ext uri="{91240B29-F687-4f45-9708-019B960494DF}">
-              <a14:hiddenLine xmlns="" xmlns:a14="http://schemas.microsoft.com/office/drawing/2010/main" w="9525" cap="flat">
+              <a14:hiddenLine xmlns:a14="http://schemas.microsoft.com/office/drawing/2010/main" xmlns="" w="9525" cap="flat">
                 <a:solidFill>
                   <a:srgbClr val="000000"/>
                 </a:solidFill>
@@ -10940,7 +10940,7 @@
               </a14:hiddenLine>
             </a:ext>
             <a:ext uri="{AF507438-7753-43e0-B8FC-AC1667EBCBE1}">
-              <a14:hiddenEffects xmlns="" xmlns:a14="http://schemas.microsoft.com/office/drawing/2010/main">
+              <a14:hiddenEffects xmlns:a14="http://schemas.microsoft.com/office/drawing/2010/main" xmlns="">
                 <a:effectLst>
                   <a:outerShdw blurRad="63500" dist="38099" dir="2700000" algn="ctr" rotWithShape="0">
                     <a:srgbClr val="000000">
@@ -11160,14 +11160,14 @@
           <a:effectLst/>
           <a:extLst>
             <a:ext uri="{909E8E84-426E-40dd-AFC4-6F175D3DCCD1}">
-              <a14:hiddenFill xmlns="" xmlns:a14="http://schemas.microsoft.com/office/drawing/2010/main">
+              <a14:hiddenFill xmlns:a14="http://schemas.microsoft.com/office/drawing/2010/main" xmlns="">
                 <a:solidFill>
                   <a:srgbClr val="FFFFFF"/>
                 </a:solidFill>
               </a14:hiddenFill>
             </a:ext>
             <a:ext uri="{91240B29-F687-4f45-9708-019B960494DF}">
-              <a14:hiddenLine xmlns="" xmlns:a14="http://schemas.microsoft.com/office/drawing/2010/main" w="9525" cap="flat">
+              <a14:hiddenLine xmlns:a14="http://schemas.microsoft.com/office/drawing/2010/main" xmlns="" w="9525" cap="flat">
                 <a:solidFill>
                   <a:srgbClr val="000000"/>
                 </a:solidFill>
@@ -11177,7 +11177,7 @@
               </a14:hiddenLine>
             </a:ext>
             <a:ext uri="{AF507438-7753-43e0-B8FC-AC1667EBCBE1}">
-              <a14:hiddenEffects xmlns="" xmlns:a14="http://schemas.microsoft.com/office/drawing/2010/main">
+              <a14:hiddenEffects xmlns:a14="http://schemas.microsoft.com/office/drawing/2010/main" xmlns="">
                 <a:effectLst>
                   <a:outerShdw blurRad="63500" dist="38099" dir="2700000" algn="ctr" rotWithShape="0">
                     <a:srgbClr val="000000">
@@ -11397,14 +11397,14 @@
           <a:effectLst/>
           <a:extLst>
             <a:ext uri="{909E8E84-426E-40dd-AFC4-6F175D3DCCD1}">
-              <a14:hiddenFill xmlns="" xmlns:a14="http://schemas.microsoft.com/office/drawing/2010/main">
+              <a14:hiddenFill xmlns:a14="http://schemas.microsoft.com/office/drawing/2010/main" xmlns="">
                 <a:solidFill>
                   <a:srgbClr val="FFFFFF"/>
                 </a:solidFill>
               </a14:hiddenFill>
             </a:ext>
             <a:ext uri="{91240B29-F687-4f45-9708-019B960494DF}">
-              <a14:hiddenLine xmlns="" xmlns:a14="http://schemas.microsoft.com/office/drawing/2010/main" w="9525" cap="flat">
+              <a14:hiddenLine xmlns:a14="http://schemas.microsoft.com/office/drawing/2010/main" xmlns="" w="9525" cap="flat">
                 <a:solidFill>
                   <a:srgbClr val="000000"/>
                 </a:solidFill>
@@ -11414,7 +11414,7 @@
               </a14:hiddenLine>
             </a:ext>
             <a:ext uri="{AF507438-7753-43e0-B8FC-AC1667EBCBE1}">
-              <a14:hiddenEffects xmlns="" xmlns:a14="http://schemas.microsoft.com/office/drawing/2010/main">
+              <a14:hiddenEffects xmlns:a14="http://schemas.microsoft.com/office/drawing/2010/main" xmlns="">
                 <a:effectLst>
                   <a:outerShdw blurRad="63500" dist="38099" dir="2700000" algn="ctr" rotWithShape="0">
                     <a:srgbClr val="000000">
@@ -11464,14 +11464,14 @@
           <a:effectLst/>
           <a:extLst>
             <a:ext uri="{909E8E84-426E-40dd-AFC4-6F175D3DCCD1}">
-              <a14:hiddenFill xmlns="" xmlns:a14="http://schemas.microsoft.com/office/drawing/2010/main">
+              <a14:hiddenFill xmlns:a14="http://schemas.microsoft.com/office/drawing/2010/main" xmlns="">
                 <a:solidFill>
                   <a:srgbClr val="FFFFFF"/>
                 </a:solidFill>
               </a14:hiddenFill>
             </a:ext>
             <a:ext uri="{91240B29-F687-4f45-9708-019B960494DF}">
-              <a14:hiddenLine xmlns="" xmlns:a14="http://schemas.microsoft.com/office/drawing/2010/main" w="9525" cap="flat">
+              <a14:hiddenLine xmlns:a14="http://schemas.microsoft.com/office/drawing/2010/main" xmlns="" w="9525" cap="flat">
                 <a:solidFill>
                   <a:srgbClr val="000000"/>
                 </a:solidFill>
@@ -11481,7 +11481,7 @@
               </a14:hiddenLine>
             </a:ext>
             <a:ext uri="{AF507438-7753-43e0-B8FC-AC1667EBCBE1}">
-              <a14:hiddenEffects xmlns="" xmlns:a14="http://schemas.microsoft.com/office/drawing/2010/main">
+              <a14:hiddenEffects xmlns:a14="http://schemas.microsoft.com/office/drawing/2010/main" xmlns="">
                 <a:effectLst>
                   <a:outerShdw blurRad="63500" dist="38099" dir="2700000" algn="ctr" rotWithShape="0">
                     <a:srgbClr val="000000">
@@ -11531,14 +11531,14 @@
           <a:effectLst/>
           <a:extLst>
             <a:ext uri="{909E8E84-426E-40dd-AFC4-6F175D3DCCD1}">
-              <a14:hiddenFill xmlns="" xmlns:a14="http://schemas.microsoft.com/office/drawing/2010/main">
+              <a14:hiddenFill xmlns:a14="http://schemas.microsoft.com/office/drawing/2010/main" xmlns="">
                 <a:solidFill>
                   <a:srgbClr val="FFFFFF"/>
                 </a:solidFill>
               </a14:hiddenFill>
             </a:ext>
             <a:ext uri="{91240B29-F687-4f45-9708-019B960494DF}">
-              <a14:hiddenLine xmlns="" xmlns:a14="http://schemas.microsoft.com/office/drawing/2010/main" w="9525" cap="flat">
+              <a14:hiddenLine xmlns:a14="http://schemas.microsoft.com/office/drawing/2010/main" xmlns="" w="9525" cap="flat">
                 <a:solidFill>
                   <a:srgbClr val="000000"/>
                 </a:solidFill>
@@ -11548,7 +11548,7 @@
               </a14:hiddenLine>
             </a:ext>
             <a:ext uri="{AF507438-7753-43e0-B8FC-AC1667EBCBE1}">
-              <a14:hiddenEffects xmlns="" xmlns:a14="http://schemas.microsoft.com/office/drawing/2010/main">
+              <a14:hiddenEffects xmlns:a14="http://schemas.microsoft.com/office/drawing/2010/main" xmlns="">
                 <a:effectLst>
                   <a:outerShdw blurRad="63500" dist="38099" dir="2700000" algn="ctr" rotWithShape="0">
                     <a:srgbClr val="000000">
@@ -11598,14 +11598,14 @@
           <a:effectLst/>
           <a:extLst>
             <a:ext uri="{909E8E84-426E-40dd-AFC4-6F175D3DCCD1}">
-              <a14:hiddenFill xmlns="" xmlns:a14="http://schemas.microsoft.com/office/drawing/2010/main">
+              <a14:hiddenFill xmlns:a14="http://schemas.microsoft.com/office/drawing/2010/main" xmlns="">
                 <a:solidFill>
                   <a:srgbClr val="FFFFFF"/>
                 </a:solidFill>
               </a14:hiddenFill>
             </a:ext>
             <a:ext uri="{91240B29-F687-4f45-9708-019B960494DF}">
-              <a14:hiddenLine xmlns="" xmlns:a14="http://schemas.microsoft.com/office/drawing/2010/main" w="9525" cap="flat">
+              <a14:hiddenLine xmlns:a14="http://schemas.microsoft.com/office/drawing/2010/main" xmlns="" w="9525" cap="flat">
                 <a:solidFill>
                   <a:srgbClr val="000000"/>
                 </a:solidFill>
@@ -11615,7 +11615,7 @@
               </a14:hiddenLine>
             </a:ext>
             <a:ext uri="{AF507438-7753-43e0-B8FC-AC1667EBCBE1}">
-              <a14:hiddenEffects xmlns="" xmlns:a14="http://schemas.microsoft.com/office/drawing/2010/main">
+              <a14:hiddenEffects xmlns:a14="http://schemas.microsoft.com/office/drawing/2010/main" xmlns="">
                 <a:effectLst>
                   <a:outerShdw blurRad="63500" dist="38099" dir="2700000" algn="ctr" rotWithShape="0">
                     <a:srgbClr val="000000">
@@ -11665,14 +11665,14 @@
           <a:effectLst/>
           <a:extLst>
             <a:ext uri="{909E8E84-426E-40dd-AFC4-6F175D3DCCD1}">
-              <a14:hiddenFill xmlns="" xmlns:a14="http://schemas.microsoft.com/office/drawing/2010/main">
+              <a14:hiddenFill xmlns:a14="http://schemas.microsoft.com/office/drawing/2010/main" xmlns="">
                 <a:solidFill>
                   <a:srgbClr val="FFFFFF"/>
                 </a:solidFill>
               </a14:hiddenFill>
             </a:ext>
             <a:ext uri="{91240B29-F687-4f45-9708-019B960494DF}">
-              <a14:hiddenLine xmlns="" xmlns:a14="http://schemas.microsoft.com/office/drawing/2010/main" w="9525" cap="flat">
+              <a14:hiddenLine xmlns:a14="http://schemas.microsoft.com/office/drawing/2010/main" xmlns="" w="9525" cap="flat">
                 <a:solidFill>
                   <a:srgbClr val="000000"/>
                 </a:solidFill>
@@ -11682,7 +11682,7 @@
               </a14:hiddenLine>
             </a:ext>
             <a:ext uri="{AF507438-7753-43e0-B8FC-AC1667EBCBE1}">
-              <a14:hiddenEffects xmlns="" xmlns:a14="http://schemas.microsoft.com/office/drawing/2010/main">
+              <a14:hiddenEffects xmlns:a14="http://schemas.microsoft.com/office/drawing/2010/main" xmlns="">
                 <a:effectLst>
                   <a:outerShdw blurRad="63500" dist="38099" dir="2700000" algn="ctr" rotWithShape="0">
                     <a:srgbClr val="000000">
@@ -11902,14 +11902,14 @@
           <a:effectLst/>
           <a:extLst>
             <a:ext uri="{909E8E84-426E-40dd-AFC4-6F175D3DCCD1}">
-              <a14:hiddenFill xmlns="" xmlns:a14="http://schemas.microsoft.com/office/drawing/2010/main">
+              <a14:hiddenFill xmlns:a14="http://schemas.microsoft.com/office/drawing/2010/main" xmlns="">
                 <a:solidFill>
                   <a:srgbClr val="FFFFFF"/>
                 </a:solidFill>
               </a14:hiddenFill>
             </a:ext>
             <a:ext uri="{91240B29-F687-4f45-9708-019B960494DF}">
-              <a14:hiddenLine xmlns="" xmlns:a14="http://schemas.microsoft.com/office/drawing/2010/main" w="9525" cap="flat">
+              <a14:hiddenLine xmlns:a14="http://schemas.microsoft.com/office/drawing/2010/main" xmlns="" w="9525" cap="flat">
                 <a:solidFill>
                   <a:srgbClr val="000000"/>
                 </a:solidFill>
@@ -11919,7 +11919,7 @@
               </a14:hiddenLine>
             </a:ext>
             <a:ext uri="{AF507438-7753-43e0-B8FC-AC1667EBCBE1}">
-              <a14:hiddenEffects xmlns="" xmlns:a14="http://schemas.microsoft.com/office/drawing/2010/main">
+              <a14:hiddenEffects xmlns:a14="http://schemas.microsoft.com/office/drawing/2010/main" xmlns="">
                 <a:effectLst>
                   <a:outerShdw blurRad="63500" dist="38099" dir="2700000" algn="ctr" rotWithShape="0">
                     <a:srgbClr val="000000">
@@ -11969,14 +11969,14 @@
           <a:effectLst/>
           <a:extLst>
             <a:ext uri="{909E8E84-426E-40dd-AFC4-6F175D3DCCD1}">
-              <a14:hiddenFill xmlns="" xmlns:a14="http://schemas.microsoft.com/office/drawing/2010/main">
+              <a14:hiddenFill xmlns:a14="http://schemas.microsoft.com/office/drawing/2010/main" xmlns="">
                 <a:solidFill>
                   <a:srgbClr val="FFFFFF"/>
                 </a:solidFill>
               </a14:hiddenFill>
             </a:ext>
             <a:ext uri="{91240B29-F687-4f45-9708-019B960494DF}">
-              <a14:hiddenLine xmlns="" xmlns:a14="http://schemas.microsoft.com/office/drawing/2010/main" w="9525" cap="flat">
+              <a14:hiddenLine xmlns:a14="http://schemas.microsoft.com/office/drawing/2010/main" xmlns="" w="9525" cap="flat">
                 <a:solidFill>
                   <a:srgbClr val="000000"/>
                 </a:solidFill>
@@ -11986,7 +11986,7 @@
               </a14:hiddenLine>
             </a:ext>
             <a:ext uri="{AF507438-7753-43e0-B8FC-AC1667EBCBE1}">
-              <a14:hiddenEffects xmlns="" xmlns:a14="http://schemas.microsoft.com/office/drawing/2010/main">
+              <a14:hiddenEffects xmlns:a14="http://schemas.microsoft.com/office/drawing/2010/main" xmlns="">
                 <a:effectLst>
                   <a:outerShdw blurRad="63500" dist="38099" dir="2700000" algn="ctr" rotWithShape="0">
                     <a:srgbClr val="000000">
@@ -12206,14 +12206,14 @@
           <a:effectLst/>
           <a:extLst>
             <a:ext uri="{909E8E84-426E-40dd-AFC4-6F175D3DCCD1}">
-              <a14:hiddenFill xmlns="" xmlns:a14="http://schemas.microsoft.com/office/drawing/2010/main">
+              <a14:hiddenFill xmlns:a14="http://schemas.microsoft.com/office/drawing/2010/main" xmlns="">
                 <a:solidFill>
                   <a:srgbClr val="FFFFFF"/>
                 </a:solidFill>
               </a14:hiddenFill>
             </a:ext>
             <a:ext uri="{91240B29-F687-4f45-9708-019B960494DF}">
-              <a14:hiddenLine xmlns="" xmlns:a14="http://schemas.microsoft.com/office/drawing/2010/main" w="9525" cap="flat">
+              <a14:hiddenLine xmlns:a14="http://schemas.microsoft.com/office/drawing/2010/main" xmlns="" w="9525" cap="flat">
                 <a:solidFill>
                   <a:srgbClr val="000000"/>
                 </a:solidFill>
@@ -12223,7 +12223,7 @@
               </a14:hiddenLine>
             </a:ext>
             <a:ext uri="{AF507438-7753-43e0-B8FC-AC1667EBCBE1}">
-              <a14:hiddenEffects xmlns="" xmlns:a14="http://schemas.microsoft.com/office/drawing/2010/main">
+              <a14:hiddenEffects xmlns:a14="http://schemas.microsoft.com/office/drawing/2010/main" xmlns="">
                 <a:effectLst>
                   <a:outerShdw blurRad="63500" dist="38099" dir="2700000" algn="ctr" rotWithShape="0">
                     <a:srgbClr val="000000">
@@ -12443,14 +12443,14 @@
           <a:effectLst/>
           <a:extLst>
             <a:ext uri="{909E8E84-426E-40dd-AFC4-6F175D3DCCD1}">
-              <a14:hiddenFill xmlns="" xmlns:a14="http://schemas.microsoft.com/office/drawing/2010/main">
+              <a14:hiddenFill xmlns:a14="http://schemas.microsoft.com/office/drawing/2010/main" xmlns="">
                 <a:solidFill>
                   <a:srgbClr val="FFFFFF"/>
                 </a:solidFill>
               </a14:hiddenFill>
             </a:ext>
             <a:ext uri="{91240B29-F687-4f45-9708-019B960494DF}">
-              <a14:hiddenLine xmlns="" xmlns:a14="http://schemas.microsoft.com/office/drawing/2010/main" w="9525" cap="flat">
+              <a14:hiddenLine xmlns:a14="http://schemas.microsoft.com/office/drawing/2010/main" xmlns="" w="9525" cap="flat">
                 <a:solidFill>
                   <a:srgbClr val="000000"/>
                 </a:solidFill>
@@ -12460,7 +12460,7 @@
               </a14:hiddenLine>
             </a:ext>
             <a:ext uri="{AF507438-7753-43e0-B8FC-AC1667EBCBE1}">
-              <a14:hiddenEffects xmlns="" xmlns:a14="http://schemas.microsoft.com/office/drawing/2010/main">
+              <a14:hiddenEffects xmlns:a14="http://schemas.microsoft.com/office/drawing/2010/main" xmlns="">
                 <a:effectLst>
                   <a:outerShdw blurRad="63500" dist="38099" dir="2700000" algn="ctr" rotWithShape="0">
                     <a:srgbClr val="000000">
@@ -12680,14 +12680,14 @@
           <a:effectLst/>
           <a:extLst>
             <a:ext uri="{909E8E84-426E-40dd-AFC4-6F175D3DCCD1}">
-              <a14:hiddenFill xmlns="" xmlns:a14="http://schemas.microsoft.com/office/drawing/2010/main">
+              <a14:hiddenFill xmlns:a14="http://schemas.microsoft.com/office/drawing/2010/main" xmlns="">
                 <a:solidFill>
                   <a:srgbClr val="FFFFFF"/>
                 </a:solidFill>
               </a14:hiddenFill>
             </a:ext>
             <a:ext uri="{91240B29-F687-4f45-9708-019B960494DF}">
-              <a14:hiddenLine xmlns="" xmlns:a14="http://schemas.microsoft.com/office/drawing/2010/main" w="9525" cap="flat">
+              <a14:hiddenLine xmlns:a14="http://schemas.microsoft.com/office/drawing/2010/main" xmlns="" w="9525" cap="flat">
                 <a:solidFill>
                   <a:srgbClr val="000000"/>
                 </a:solidFill>
@@ -12697,7 +12697,7 @@
               </a14:hiddenLine>
             </a:ext>
             <a:ext uri="{AF507438-7753-43e0-B8FC-AC1667EBCBE1}">
-              <a14:hiddenEffects xmlns="" xmlns:a14="http://schemas.microsoft.com/office/drawing/2010/main">
+              <a14:hiddenEffects xmlns:a14="http://schemas.microsoft.com/office/drawing/2010/main" xmlns="">
                 <a:effectLst>
                   <a:outerShdw blurRad="63500" dist="38099" dir="2700000" algn="ctr" rotWithShape="0">
                     <a:srgbClr val="000000">
@@ -12917,14 +12917,14 @@
           <a:effectLst/>
           <a:extLst>
             <a:ext uri="{909E8E84-426E-40dd-AFC4-6F175D3DCCD1}">
-              <a14:hiddenFill xmlns="" xmlns:a14="http://schemas.microsoft.com/office/drawing/2010/main">
+              <a14:hiddenFill xmlns:a14="http://schemas.microsoft.com/office/drawing/2010/main" xmlns="">
                 <a:solidFill>
                   <a:srgbClr val="FFFFFF"/>
                 </a:solidFill>
               </a14:hiddenFill>
             </a:ext>
             <a:ext uri="{91240B29-F687-4f45-9708-019B960494DF}">
-              <a14:hiddenLine xmlns="" xmlns:a14="http://schemas.microsoft.com/office/drawing/2010/main" w="9525" cap="flat">
+              <a14:hiddenLine xmlns:a14="http://schemas.microsoft.com/office/drawing/2010/main" xmlns="" w="9525" cap="flat">
                 <a:solidFill>
                   <a:srgbClr val="000000"/>
                 </a:solidFill>
@@ -12934,7 +12934,7 @@
               </a14:hiddenLine>
             </a:ext>
             <a:ext uri="{AF507438-7753-43e0-B8FC-AC1667EBCBE1}">
-              <a14:hiddenEffects xmlns="" xmlns:a14="http://schemas.microsoft.com/office/drawing/2010/main">
+              <a14:hiddenEffects xmlns:a14="http://schemas.microsoft.com/office/drawing/2010/main" xmlns="">
                 <a:effectLst>
                   <a:outerShdw blurRad="63500" dist="38099" dir="2700000" algn="ctr" rotWithShape="0">
                     <a:srgbClr val="000000">
@@ -13154,14 +13154,14 @@
           <a:effectLst/>
           <a:extLst>
             <a:ext uri="{909E8E84-426E-40dd-AFC4-6F175D3DCCD1}">
-              <a14:hiddenFill xmlns="" xmlns:a14="http://schemas.microsoft.com/office/drawing/2010/main">
+              <a14:hiddenFill xmlns:a14="http://schemas.microsoft.com/office/drawing/2010/main" xmlns="">
                 <a:solidFill>
                   <a:srgbClr val="FFFFFF"/>
                 </a:solidFill>
               </a14:hiddenFill>
             </a:ext>
             <a:ext uri="{91240B29-F687-4f45-9708-019B960494DF}">
-              <a14:hiddenLine xmlns="" xmlns:a14="http://schemas.microsoft.com/office/drawing/2010/main" w="9525" cap="flat">
+              <a14:hiddenLine xmlns:a14="http://schemas.microsoft.com/office/drawing/2010/main" xmlns="" w="9525" cap="flat">
                 <a:solidFill>
                   <a:srgbClr val="000000"/>
                 </a:solidFill>
@@ -13171,7 +13171,7 @@
               </a14:hiddenLine>
             </a:ext>
             <a:ext uri="{AF507438-7753-43e0-B8FC-AC1667EBCBE1}">
-              <a14:hiddenEffects xmlns="" xmlns:a14="http://schemas.microsoft.com/office/drawing/2010/main">
+              <a14:hiddenEffects xmlns:a14="http://schemas.microsoft.com/office/drawing/2010/main" xmlns="">
                 <a:effectLst>
                   <a:outerShdw blurRad="63500" dist="38099" dir="2700000" algn="ctr" rotWithShape="0">
                     <a:srgbClr val="000000">
@@ -13221,14 +13221,14 @@
           <a:effectLst/>
           <a:extLst>
             <a:ext uri="{909E8E84-426E-40dd-AFC4-6F175D3DCCD1}">
-              <a14:hiddenFill xmlns="" xmlns:a14="http://schemas.microsoft.com/office/drawing/2010/main">
+              <a14:hiddenFill xmlns:a14="http://schemas.microsoft.com/office/drawing/2010/main" xmlns="">
                 <a:solidFill>
                   <a:srgbClr val="FFFFFF"/>
                 </a:solidFill>
               </a14:hiddenFill>
             </a:ext>
             <a:ext uri="{91240B29-F687-4f45-9708-019B960494DF}">
-              <a14:hiddenLine xmlns="" xmlns:a14="http://schemas.microsoft.com/office/drawing/2010/main" w="9525" cap="flat">
+              <a14:hiddenLine xmlns:a14="http://schemas.microsoft.com/office/drawing/2010/main" xmlns="" w="9525" cap="flat">
                 <a:solidFill>
                   <a:srgbClr val="000000"/>
                 </a:solidFill>
@@ -13238,7 +13238,7 @@
               </a14:hiddenLine>
             </a:ext>
             <a:ext uri="{AF507438-7753-43e0-B8FC-AC1667EBCBE1}">
-              <a14:hiddenEffects xmlns="" xmlns:a14="http://schemas.microsoft.com/office/drawing/2010/main">
+              <a14:hiddenEffects xmlns:a14="http://schemas.microsoft.com/office/drawing/2010/main" xmlns="">
                 <a:effectLst>
                   <a:outerShdw blurRad="63500" dist="38099" dir="2700000" algn="ctr" rotWithShape="0">
                     <a:srgbClr val="000000">
@@ -13288,14 +13288,14 @@
           <a:effectLst/>
           <a:extLst>
             <a:ext uri="{909E8E84-426E-40dd-AFC4-6F175D3DCCD1}">
-              <a14:hiddenFill xmlns="" xmlns:a14="http://schemas.microsoft.com/office/drawing/2010/main">
+              <a14:hiddenFill xmlns:a14="http://schemas.microsoft.com/office/drawing/2010/main" xmlns="">
                 <a:solidFill>
                   <a:srgbClr val="FFFFFF"/>
                 </a:solidFill>
               </a14:hiddenFill>
             </a:ext>
             <a:ext uri="{91240B29-F687-4f45-9708-019B960494DF}">
-              <a14:hiddenLine xmlns="" xmlns:a14="http://schemas.microsoft.com/office/drawing/2010/main" w="9525" cap="flat">
+              <a14:hiddenLine xmlns:a14="http://schemas.microsoft.com/office/drawing/2010/main" xmlns="" w="9525" cap="flat">
                 <a:solidFill>
                   <a:srgbClr val="000000"/>
                 </a:solidFill>
@@ -13305,7 +13305,7 @@
               </a14:hiddenLine>
             </a:ext>
             <a:ext uri="{AF507438-7753-43e0-B8FC-AC1667EBCBE1}">
-              <a14:hiddenEffects xmlns="" xmlns:a14="http://schemas.microsoft.com/office/drawing/2010/main">
+              <a14:hiddenEffects xmlns:a14="http://schemas.microsoft.com/office/drawing/2010/main" xmlns="">
                 <a:effectLst>
                   <a:outerShdw blurRad="63500" dist="38099" dir="2700000" algn="ctr" rotWithShape="0">
                     <a:srgbClr val="000000">
@@ -13525,14 +13525,14 @@
           <a:effectLst/>
           <a:extLst>
             <a:ext uri="{909E8E84-426E-40dd-AFC4-6F175D3DCCD1}">
-              <a14:hiddenFill xmlns="" xmlns:a14="http://schemas.microsoft.com/office/drawing/2010/main">
+              <a14:hiddenFill xmlns:a14="http://schemas.microsoft.com/office/drawing/2010/main" xmlns="">
                 <a:solidFill>
                   <a:srgbClr val="FFFFFF"/>
                 </a:solidFill>
               </a14:hiddenFill>
             </a:ext>
             <a:ext uri="{91240B29-F687-4f45-9708-019B960494DF}">
-              <a14:hiddenLine xmlns="" xmlns:a14="http://schemas.microsoft.com/office/drawing/2010/main" w="9525" cap="flat">
+              <a14:hiddenLine xmlns:a14="http://schemas.microsoft.com/office/drawing/2010/main" xmlns="" w="9525" cap="flat">
                 <a:solidFill>
                   <a:srgbClr val="000000"/>
                 </a:solidFill>
@@ -13542,7 +13542,7 @@
               </a14:hiddenLine>
             </a:ext>
             <a:ext uri="{AF507438-7753-43e0-B8FC-AC1667EBCBE1}">
-              <a14:hiddenEffects xmlns="" xmlns:a14="http://schemas.microsoft.com/office/drawing/2010/main">
+              <a14:hiddenEffects xmlns:a14="http://schemas.microsoft.com/office/drawing/2010/main" xmlns="">
                 <a:effectLst>
                   <a:outerShdw blurRad="63500" dist="38099" dir="2700000" algn="ctr" rotWithShape="0">
                     <a:srgbClr val="000000">
@@ -13592,14 +13592,14 @@
           <a:effectLst/>
           <a:extLst>
             <a:ext uri="{909E8E84-426E-40dd-AFC4-6F175D3DCCD1}">
-              <a14:hiddenFill xmlns="" xmlns:a14="http://schemas.microsoft.com/office/drawing/2010/main">
+              <a14:hiddenFill xmlns:a14="http://schemas.microsoft.com/office/drawing/2010/main" xmlns="">
                 <a:solidFill>
                   <a:srgbClr val="FFFFFF"/>
                 </a:solidFill>
               </a14:hiddenFill>
             </a:ext>
             <a:ext uri="{91240B29-F687-4f45-9708-019B960494DF}">
-              <a14:hiddenLine xmlns="" xmlns:a14="http://schemas.microsoft.com/office/drawing/2010/main" w="9525" cap="flat">
+              <a14:hiddenLine xmlns:a14="http://schemas.microsoft.com/office/drawing/2010/main" xmlns="" w="9525" cap="flat">
                 <a:solidFill>
                   <a:srgbClr val="000000"/>
                 </a:solidFill>
@@ -13609,7 +13609,7 @@
               </a14:hiddenLine>
             </a:ext>
             <a:ext uri="{AF507438-7753-43e0-B8FC-AC1667EBCBE1}">
-              <a14:hiddenEffects xmlns="" xmlns:a14="http://schemas.microsoft.com/office/drawing/2010/main">
+              <a14:hiddenEffects xmlns:a14="http://schemas.microsoft.com/office/drawing/2010/main" xmlns="">
                 <a:effectLst>
                   <a:outerShdw blurRad="63500" dist="38099" dir="2700000" algn="ctr" rotWithShape="0">
                     <a:srgbClr val="000000">
@@ -13829,14 +13829,14 @@
           <a:effectLst/>
           <a:extLst>
             <a:ext uri="{909E8E84-426E-40dd-AFC4-6F175D3DCCD1}">
-              <a14:hiddenFill xmlns="" xmlns:a14="http://schemas.microsoft.com/office/drawing/2010/main">
+              <a14:hiddenFill xmlns:a14="http://schemas.microsoft.com/office/drawing/2010/main" xmlns="">
                 <a:solidFill>
                   <a:srgbClr val="FFFFFF"/>
                 </a:solidFill>
               </a14:hiddenFill>
             </a:ext>
             <a:ext uri="{91240B29-F687-4f45-9708-019B960494DF}">
-              <a14:hiddenLine xmlns="" xmlns:a14="http://schemas.microsoft.com/office/drawing/2010/main" w="9525" cap="flat">
+              <a14:hiddenLine xmlns:a14="http://schemas.microsoft.com/office/drawing/2010/main" xmlns="" w="9525" cap="flat">
                 <a:solidFill>
                   <a:srgbClr val="000000"/>
                 </a:solidFill>
@@ -13846,7 +13846,7 @@
               </a14:hiddenLine>
             </a:ext>
             <a:ext uri="{AF507438-7753-43e0-B8FC-AC1667EBCBE1}">
-              <a14:hiddenEffects xmlns="" xmlns:a14="http://schemas.microsoft.com/office/drawing/2010/main">
+              <a14:hiddenEffects xmlns:a14="http://schemas.microsoft.com/office/drawing/2010/main" xmlns="">
                 <a:effectLst>
                   <a:outerShdw blurRad="63500" dist="38099" dir="2700000" algn="ctr" rotWithShape="0">
                     <a:srgbClr val="000000">
@@ -14066,14 +14066,14 @@
           <a:effectLst/>
           <a:extLst>
             <a:ext uri="{909E8E84-426E-40dd-AFC4-6F175D3DCCD1}">
-              <a14:hiddenFill xmlns="" xmlns:a14="http://schemas.microsoft.com/office/drawing/2010/main">
+              <a14:hiddenFill xmlns:a14="http://schemas.microsoft.com/office/drawing/2010/main" xmlns="">
                 <a:solidFill>
                   <a:srgbClr val="FFFFFF"/>
                 </a:solidFill>
               </a14:hiddenFill>
             </a:ext>
             <a:ext uri="{91240B29-F687-4f45-9708-019B960494DF}">
-              <a14:hiddenLine xmlns="" xmlns:a14="http://schemas.microsoft.com/office/drawing/2010/main" w="9525" cap="flat">
+              <a14:hiddenLine xmlns:a14="http://schemas.microsoft.com/office/drawing/2010/main" xmlns="" w="9525" cap="flat">
                 <a:solidFill>
                   <a:srgbClr val="000000"/>
                 </a:solidFill>
@@ -14083,7 +14083,7 @@
               </a14:hiddenLine>
             </a:ext>
             <a:ext uri="{AF507438-7753-43e0-B8FC-AC1667EBCBE1}">
-              <a14:hiddenEffects xmlns="" xmlns:a14="http://schemas.microsoft.com/office/drawing/2010/main">
+              <a14:hiddenEffects xmlns:a14="http://schemas.microsoft.com/office/drawing/2010/main" xmlns="">
                 <a:effectLst>
                   <a:outerShdw blurRad="63500" dist="38099" dir="2700000" algn="ctr" rotWithShape="0">
                     <a:srgbClr val="000000">
@@ -14303,14 +14303,14 @@
           <a:effectLst/>
           <a:extLst>
             <a:ext uri="{909E8E84-426E-40dd-AFC4-6F175D3DCCD1}">
-              <a14:hiddenFill xmlns="" xmlns:a14="http://schemas.microsoft.com/office/drawing/2010/main">
+              <a14:hiddenFill xmlns:a14="http://schemas.microsoft.com/office/drawing/2010/main" xmlns="">
                 <a:solidFill>
                   <a:srgbClr val="FFFFFF"/>
                 </a:solidFill>
               </a14:hiddenFill>
             </a:ext>
             <a:ext uri="{91240B29-F687-4f45-9708-019B960494DF}">
-              <a14:hiddenLine xmlns="" xmlns:a14="http://schemas.microsoft.com/office/drawing/2010/main" w="9525" cap="flat">
+              <a14:hiddenLine xmlns:a14="http://schemas.microsoft.com/office/drawing/2010/main" xmlns="" w="9525" cap="flat">
                 <a:solidFill>
                   <a:srgbClr val="000000"/>
                 </a:solidFill>
@@ -14320,7 +14320,7 @@
               </a14:hiddenLine>
             </a:ext>
             <a:ext uri="{AF507438-7753-43e0-B8FC-AC1667EBCBE1}">
-              <a14:hiddenEffects xmlns="" xmlns:a14="http://schemas.microsoft.com/office/drawing/2010/main">
+              <a14:hiddenEffects xmlns:a14="http://schemas.microsoft.com/office/drawing/2010/main" xmlns="">
                 <a:effectLst>
                   <a:outerShdw blurRad="63500" dist="38099" dir="2700000" algn="ctr" rotWithShape="0">
                     <a:srgbClr val="000000">
@@ -14540,14 +14540,14 @@
           <a:effectLst/>
           <a:extLst>
             <a:ext uri="{909E8E84-426E-40dd-AFC4-6F175D3DCCD1}">
-              <a14:hiddenFill xmlns="" xmlns:a14="http://schemas.microsoft.com/office/drawing/2010/main">
+              <a14:hiddenFill xmlns:a14="http://schemas.microsoft.com/office/drawing/2010/main" xmlns="">
                 <a:solidFill>
                   <a:srgbClr val="FFFFFF"/>
                 </a:solidFill>
               </a14:hiddenFill>
             </a:ext>
             <a:ext uri="{91240B29-F687-4f45-9708-019B960494DF}">
-              <a14:hiddenLine xmlns="" xmlns:a14="http://schemas.microsoft.com/office/drawing/2010/main" w="9525" cap="flat">
+              <a14:hiddenLine xmlns:a14="http://schemas.microsoft.com/office/drawing/2010/main" xmlns="" w="9525" cap="flat">
                 <a:solidFill>
                   <a:srgbClr val="000000"/>
                 </a:solidFill>
@@ -14557,7 +14557,7 @@
               </a14:hiddenLine>
             </a:ext>
             <a:ext uri="{AF507438-7753-43e0-B8FC-AC1667EBCBE1}">
-              <a14:hiddenEffects xmlns="" xmlns:a14="http://schemas.microsoft.com/office/drawing/2010/main">
+              <a14:hiddenEffects xmlns:a14="http://schemas.microsoft.com/office/drawing/2010/main" xmlns="">
                 <a:effectLst>
                   <a:outerShdw blurRad="63500" dist="38099" dir="2700000" algn="ctr" rotWithShape="0">
                     <a:srgbClr val="000000">
@@ -14607,14 +14607,14 @@
           <a:effectLst/>
           <a:extLst>
             <a:ext uri="{909E8E84-426E-40dd-AFC4-6F175D3DCCD1}">
-              <a14:hiddenFill xmlns="" xmlns:a14="http://schemas.microsoft.com/office/drawing/2010/main">
+              <a14:hiddenFill xmlns:a14="http://schemas.microsoft.com/office/drawing/2010/main" xmlns="">
                 <a:solidFill>
                   <a:srgbClr val="FFFFFF"/>
                 </a:solidFill>
               </a14:hiddenFill>
             </a:ext>
             <a:ext uri="{91240B29-F687-4f45-9708-019B960494DF}">
-              <a14:hiddenLine xmlns="" xmlns:a14="http://schemas.microsoft.com/office/drawing/2010/main" w="9525" cap="flat">
+              <a14:hiddenLine xmlns:a14="http://schemas.microsoft.com/office/drawing/2010/main" xmlns="" w="9525" cap="flat">
                 <a:solidFill>
                   <a:srgbClr val="000000"/>
                 </a:solidFill>
@@ -14624,7 +14624,7 @@
               </a14:hiddenLine>
             </a:ext>
             <a:ext uri="{AF507438-7753-43e0-B8FC-AC1667EBCBE1}">
-              <a14:hiddenEffects xmlns="" xmlns:a14="http://schemas.microsoft.com/office/drawing/2010/main">
+              <a14:hiddenEffects xmlns:a14="http://schemas.microsoft.com/office/drawing/2010/main" xmlns="">
                 <a:effectLst>
                   <a:outerShdw blurRad="63500" dist="38099" dir="2700000" algn="ctr" rotWithShape="0">
                     <a:srgbClr val="000000">
@@ -14674,14 +14674,14 @@
           <a:effectLst/>
           <a:extLst>
             <a:ext uri="{909E8E84-426E-40dd-AFC4-6F175D3DCCD1}">
-              <a14:hiddenFill xmlns="" xmlns:a14="http://schemas.microsoft.com/office/drawing/2010/main">
+              <a14:hiddenFill xmlns:a14="http://schemas.microsoft.com/office/drawing/2010/main" xmlns="">
                 <a:solidFill>
                   <a:srgbClr val="FFFFFF"/>
                 </a:solidFill>
               </a14:hiddenFill>
             </a:ext>
             <a:ext uri="{91240B29-F687-4f45-9708-019B960494DF}">
-              <a14:hiddenLine xmlns="" xmlns:a14="http://schemas.microsoft.com/office/drawing/2010/main" w="9525" cap="flat">
+              <a14:hiddenLine xmlns:a14="http://schemas.microsoft.com/office/drawing/2010/main" xmlns="" w="9525" cap="flat">
                 <a:solidFill>
                   <a:srgbClr val="000000"/>
                 </a:solidFill>
@@ -14691,7 +14691,7 @@
               </a14:hiddenLine>
             </a:ext>
             <a:ext uri="{AF507438-7753-43e0-B8FC-AC1667EBCBE1}">
-              <a14:hiddenEffects xmlns="" xmlns:a14="http://schemas.microsoft.com/office/drawing/2010/main">
+              <a14:hiddenEffects xmlns:a14="http://schemas.microsoft.com/office/drawing/2010/main" xmlns="">
                 <a:effectLst>
                   <a:outerShdw blurRad="63500" dist="38099" dir="2700000" algn="ctr" rotWithShape="0">
                     <a:srgbClr val="000000">
@@ -14741,14 +14741,14 @@
           <a:effectLst/>
           <a:extLst>
             <a:ext uri="{909E8E84-426E-40dd-AFC4-6F175D3DCCD1}">
-              <a14:hiddenFill xmlns="" xmlns:a14="http://schemas.microsoft.com/office/drawing/2010/main">
+              <a14:hiddenFill xmlns:a14="http://schemas.microsoft.com/office/drawing/2010/main" xmlns="">
                 <a:solidFill>
                   <a:srgbClr val="FFFFFF"/>
                 </a:solidFill>
               </a14:hiddenFill>
             </a:ext>
             <a:ext uri="{91240B29-F687-4f45-9708-019B960494DF}">
-              <a14:hiddenLine xmlns="" xmlns:a14="http://schemas.microsoft.com/office/drawing/2010/main" w="9525" cap="flat">
+              <a14:hiddenLine xmlns:a14="http://schemas.microsoft.com/office/drawing/2010/main" xmlns="" w="9525" cap="flat">
                 <a:solidFill>
                   <a:srgbClr val="000000"/>
                 </a:solidFill>
@@ -14758,7 +14758,7 @@
               </a14:hiddenLine>
             </a:ext>
             <a:ext uri="{AF507438-7753-43e0-B8FC-AC1667EBCBE1}">
-              <a14:hiddenEffects xmlns="" xmlns:a14="http://schemas.microsoft.com/office/drawing/2010/main">
+              <a14:hiddenEffects xmlns:a14="http://schemas.microsoft.com/office/drawing/2010/main" xmlns="">
                 <a:effectLst>
                   <a:outerShdw blurRad="63500" dist="38099" dir="2700000" algn="ctr" rotWithShape="0">
                     <a:srgbClr val="000000">
@@ -14808,14 +14808,14 @@
           <a:effectLst/>
           <a:extLst>
             <a:ext uri="{909E8E84-426E-40dd-AFC4-6F175D3DCCD1}">
-              <a14:hiddenFill xmlns="" xmlns:a14="http://schemas.microsoft.com/office/drawing/2010/main">
+              <a14:hiddenFill xmlns:a14="http://schemas.microsoft.com/office/drawing/2010/main" xmlns="">
                 <a:solidFill>
                   <a:srgbClr val="FFFFFF"/>
                 </a:solidFill>
               </a14:hiddenFill>
             </a:ext>
             <a:ext uri="{91240B29-F687-4f45-9708-019B960494DF}">
-              <a14:hiddenLine xmlns="" xmlns:a14="http://schemas.microsoft.com/office/drawing/2010/main" w="9525" cap="flat">
+              <a14:hiddenLine xmlns:a14="http://schemas.microsoft.com/office/drawing/2010/main" xmlns="" w="9525" cap="flat">
                 <a:solidFill>
                   <a:srgbClr val="000000"/>
                 </a:solidFill>
@@ -14825,7 +14825,7 @@
               </a14:hiddenLine>
             </a:ext>
             <a:ext uri="{AF507438-7753-43e0-B8FC-AC1667EBCBE1}">
-              <a14:hiddenEffects xmlns="" xmlns:a14="http://schemas.microsoft.com/office/drawing/2010/main">
+              <a14:hiddenEffects xmlns:a14="http://schemas.microsoft.com/office/drawing/2010/main" xmlns="">
                 <a:effectLst>
                   <a:outerShdw blurRad="63500" dist="38099" dir="2700000" algn="ctr" rotWithShape="0">
                     <a:srgbClr val="000000">
@@ -14875,14 +14875,14 @@
           <a:effectLst/>
           <a:extLst>
             <a:ext uri="{909E8E84-426E-40dd-AFC4-6F175D3DCCD1}">
-              <a14:hiddenFill xmlns="" xmlns:a14="http://schemas.microsoft.com/office/drawing/2010/main">
+              <a14:hiddenFill xmlns:a14="http://schemas.microsoft.com/office/drawing/2010/main" xmlns="">
                 <a:solidFill>
                   <a:srgbClr val="FFFFFF"/>
                 </a:solidFill>
               </a14:hiddenFill>
             </a:ext>
             <a:ext uri="{91240B29-F687-4f45-9708-019B960494DF}">
-              <a14:hiddenLine xmlns="" xmlns:a14="http://schemas.microsoft.com/office/drawing/2010/main" w="9525" cap="flat">
+              <a14:hiddenLine xmlns:a14="http://schemas.microsoft.com/office/drawing/2010/main" xmlns="" w="9525" cap="flat">
                 <a:solidFill>
                   <a:srgbClr val="000000"/>
                 </a:solidFill>
@@ -14892,7 +14892,7 @@
               </a14:hiddenLine>
             </a:ext>
             <a:ext uri="{AF507438-7753-43e0-B8FC-AC1667EBCBE1}">
-              <a14:hiddenEffects xmlns="" xmlns:a14="http://schemas.microsoft.com/office/drawing/2010/main">
+              <a14:hiddenEffects xmlns:a14="http://schemas.microsoft.com/office/drawing/2010/main" xmlns="">
                 <a:effectLst>
                   <a:outerShdw blurRad="63500" dist="38099" dir="2700000" algn="ctr" rotWithShape="0">
                     <a:srgbClr val="000000">
@@ -14942,14 +14942,14 @@
           <a:effectLst/>
           <a:extLst>
             <a:ext uri="{909E8E84-426E-40dd-AFC4-6F175D3DCCD1}">
-              <a14:hiddenFill xmlns="" xmlns:a14="http://schemas.microsoft.com/office/drawing/2010/main">
+              <a14:hiddenFill xmlns:a14="http://schemas.microsoft.com/office/drawing/2010/main" xmlns="">
                 <a:solidFill>
                   <a:srgbClr val="FFFFFF"/>
                 </a:solidFill>
               </a14:hiddenFill>
             </a:ext>
             <a:ext uri="{91240B29-F687-4f45-9708-019B960494DF}">
-              <a14:hiddenLine xmlns="" xmlns:a14="http://schemas.microsoft.com/office/drawing/2010/main" w="9525" cap="flat">
+              <a14:hiddenLine xmlns:a14="http://schemas.microsoft.com/office/drawing/2010/main" xmlns="" w="9525" cap="flat">
                 <a:solidFill>
                   <a:srgbClr val="000000"/>
                 </a:solidFill>
@@ -14959,7 +14959,7 @@
               </a14:hiddenLine>
             </a:ext>
             <a:ext uri="{AF507438-7753-43e0-B8FC-AC1667EBCBE1}">
-              <a14:hiddenEffects xmlns="" xmlns:a14="http://schemas.microsoft.com/office/drawing/2010/main">
+              <a14:hiddenEffects xmlns:a14="http://schemas.microsoft.com/office/drawing/2010/main" xmlns="">
                 <a:effectLst>
                   <a:outerShdw blurRad="63500" dist="38099" dir="2700000" algn="ctr" rotWithShape="0">
                     <a:srgbClr val="000000">
@@ -15009,14 +15009,14 @@
           <a:effectLst/>
           <a:extLst>
             <a:ext uri="{909E8E84-426E-40dd-AFC4-6F175D3DCCD1}">
-              <a14:hiddenFill xmlns="" xmlns:a14="http://schemas.microsoft.com/office/drawing/2010/main">
+              <a14:hiddenFill xmlns:a14="http://schemas.microsoft.com/office/drawing/2010/main" xmlns="">
                 <a:solidFill>
                   <a:srgbClr val="FFFFFF"/>
                 </a:solidFill>
               </a14:hiddenFill>
             </a:ext>
             <a:ext uri="{91240B29-F687-4f45-9708-019B960494DF}">
-              <a14:hiddenLine xmlns="" xmlns:a14="http://schemas.microsoft.com/office/drawing/2010/main" w="9525" cap="flat">
+              <a14:hiddenLine xmlns:a14="http://schemas.microsoft.com/office/drawing/2010/main" xmlns="" w="9525" cap="flat">
                 <a:solidFill>
                   <a:srgbClr val="000000"/>
                 </a:solidFill>
@@ -15026,7 +15026,7 @@
               </a14:hiddenLine>
             </a:ext>
             <a:ext uri="{AF507438-7753-43e0-B8FC-AC1667EBCBE1}">
-              <a14:hiddenEffects xmlns="" xmlns:a14="http://schemas.microsoft.com/office/drawing/2010/main">
+              <a14:hiddenEffects xmlns:a14="http://schemas.microsoft.com/office/drawing/2010/main" xmlns="">
                 <a:effectLst>
                   <a:outerShdw blurRad="63500" dist="38099" dir="2700000" algn="ctr" rotWithShape="0">
                     <a:srgbClr val="000000">
@@ -15076,14 +15076,14 @@
           <a:effectLst/>
           <a:extLst>
             <a:ext uri="{909E8E84-426E-40dd-AFC4-6F175D3DCCD1}">
-              <a14:hiddenFill xmlns="" xmlns:a14="http://schemas.microsoft.com/office/drawing/2010/main">
+              <a14:hiddenFill xmlns:a14="http://schemas.microsoft.com/office/drawing/2010/main" xmlns="">
                 <a:solidFill>
                   <a:srgbClr val="FFFFFF"/>
                 </a:solidFill>
               </a14:hiddenFill>
             </a:ext>
             <a:ext uri="{91240B29-F687-4f45-9708-019B960494DF}">
-              <a14:hiddenLine xmlns="" xmlns:a14="http://schemas.microsoft.com/office/drawing/2010/main" w="9525" cap="flat">
+              <a14:hiddenLine xmlns:a14="http://schemas.microsoft.com/office/drawing/2010/main" xmlns="" w="9525" cap="flat">
                 <a:solidFill>
                   <a:srgbClr val="000000"/>
                 </a:solidFill>
@@ -15093,7 +15093,7 @@
               </a14:hiddenLine>
             </a:ext>
             <a:ext uri="{AF507438-7753-43e0-B8FC-AC1667EBCBE1}">
-              <a14:hiddenEffects xmlns="" xmlns:a14="http://schemas.microsoft.com/office/drawing/2010/main">
+              <a14:hiddenEffects xmlns:a14="http://schemas.microsoft.com/office/drawing/2010/main" xmlns="">
                 <a:effectLst>
                   <a:outerShdw blurRad="63500" dist="38099" dir="2700000" algn="ctr" rotWithShape="0">
                     <a:srgbClr val="000000">
@@ -15150,7 +15150,7 @@
           <a:effectLst/>
           <a:extLst>
             <a:ext uri="{AF507438-7753-43e0-B8FC-AC1667EBCBE1}">
-              <a14:hiddenEffects xmlns="" xmlns:a14="http://schemas.microsoft.com/office/drawing/2010/main">
+              <a14:hiddenEffects xmlns:a14="http://schemas.microsoft.com/office/drawing/2010/main" xmlns="">
                 <a:effectLst>
                   <a:outerShdw blurRad="63500" dist="38099" dir="2700000" algn="ctr" rotWithShape="0">
                     <a:srgbClr val="000000">
@@ -15193,14 +15193,14 @@
           <a:effectLst/>
           <a:extLst>
             <a:ext uri="{909E8E84-426E-40dd-AFC4-6F175D3DCCD1}">
-              <a14:hiddenFill xmlns="" xmlns:a14="http://schemas.microsoft.com/office/drawing/2010/main">
+              <a14:hiddenFill xmlns:a14="http://schemas.microsoft.com/office/drawing/2010/main" xmlns="">
                 <a:solidFill>
                   <a:srgbClr val="FFFFFF"/>
                 </a:solidFill>
               </a14:hiddenFill>
             </a:ext>
             <a:ext uri="{91240B29-F687-4f45-9708-019B960494DF}">
-              <a14:hiddenLine xmlns="" xmlns:a14="http://schemas.microsoft.com/office/drawing/2010/main" w="9525" cap="flat">
+              <a14:hiddenLine xmlns:a14="http://schemas.microsoft.com/office/drawing/2010/main" xmlns="" w="9525" cap="flat">
                 <a:solidFill>
                   <a:srgbClr val="000000"/>
                 </a:solidFill>
@@ -15210,7 +15210,7 @@
               </a14:hiddenLine>
             </a:ext>
             <a:ext uri="{AF507438-7753-43e0-B8FC-AC1667EBCBE1}">
-              <a14:hiddenEffects xmlns="" xmlns:a14="http://schemas.microsoft.com/office/drawing/2010/main">
+              <a14:hiddenEffects xmlns:a14="http://schemas.microsoft.com/office/drawing/2010/main" xmlns="">
                 <a:effectLst>
                   <a:outerShdw blurRad="63500" dist="38099" dir="2700000" algn="ctr" rotWithShape="0">
                     <a:srgbClr val="000000">
@@ -15267,7 +15267,7 @@
           <a:effectLst/>
           <a:extLst>
             <a:ext uri="{AF507438-7753-43e0-B8FC-AC1667EBCBE1}">
-              <a14:hiddenEffects xmlns="" xmlns:a14="http://schemas.microsoft.com/office/drawing/2010/main">
+              <a14:hiddenEffects xmlns:a14="http://schemas.microsoft.com/office/drawing/2010/main" xmlns="">
                 <a:effectLst>
                   <a:outerShdw blurRad="63500" dist="38099" dir="2700000" algn="ctr" rotWithShape="0">
                     <a:srgbClr val="000000">
@@ -15310,14 +15310,14 @@
           <a:effectLst/>
           <a:extLst>
             <a:ext uri="{909E8E84-426E-40dd-AFC4-6F175D3DCCD1}">
-              <a14:hiddenFill xmlns="" xmlns:a14="http://schemas.microsoft.com/office/drawing/2010/main">
+              <a14:hiddenFill xmlns:a14="http://schemas.microsoft.com/office/drawing/2010/main" xmlns="">
                 <a:solidFill>
                   <a:srgbClr val="FFFFFF"/>
                 </a:solidFill>
               </a14:hiddenFill>
             </a:ext>
             <a:ext uri="{91240B29-F687-4f45-9708-019B960494DF}">
-              <a14:hiddenLine xmlns="" xmlns:a14="http://schemas.microsoft.com/office/drawing/2010/main" w="9525" cap="flat">
+              <a14:hiddenLine xmlns:a14="http://schemas.microsoft.com/office/drawing/2010/main" xmlns="" w="9525" cap="flat">
                 <a:solidFill>
                   <a:srgbClr val="000000"/>
                 </a:solidFill>
@@ -15327,7 +15327,7 @@
               </a14:hiddenLine>
             </a:ext>
             <a:ext uri="{AF507438-7753-43e0-B8FC-AC1667EBCBE1}">
-              <a14:hiddenEffects xmlns="" xmlns:a14="http://schemas.microsoft.com/office/drawing/2010/main">
+              <a14:hiddenEffects xmlns:a14="http://schemas.microsoft.com/office/drawing/2010/main" xmlns="">
                 <a:effectLst>
                   <a:outerShdw blurRad="63500" dist="38099" dir="2700000" algn="ctr" rotWithShape="0">
                     <a:srgbClr val="000000">
@@ -15377,14 +15377,14 @@
           <a:effectLst/>
           <a:extLst>
             <a:ext uri="{909E8E84-426E-40dd-AFC4-6F175D3DCCD1}">
-              <a14:hiddenFill xmlns="" xmlns:a14="http://schemas.microsoft.com/office/drawing/2010/main">
+              <a14:hiddenFill xmlns:a14="http://schemas.microsoft.com/office/drawing/2010/main" xmlns="">
                 <a:solidFill>
                   <a:srgbClr val="FFFFFF"/>
                 </a:solidFill>
               </a14:hiddenFill>
             </a:ext>
             <a:ext uri="{91240B29-F687-4f45-9708-019B960494DF}">
-              <a14:hiddenLine xmlns="" xmlns:a14="http://schemas.microsoft.com/office/drawing/2010/main" w="9525" cap="flat">
+              <a14:hiddenLine xmlns:a14="http://schemas.microsoft.com/office/drawing/2010/main" xmlns="" w="9525" cap="flat">
                 <a:solidFill>
                   <a:srgbClr val="000000"/>
                 </a:solidFill>
@@ -15394,7 +15394,7 @@
               </a14:hiddenLine>
             </a:ext>
             <a:ext uri="{AF507438-7753-43e0-B8FC-AC1667EBCBE1}">
-              <a14:hiddenEffects xmlns="" xmlns:a14="http://schemas.microsoft.com/office/drawing/2010/main">
+              <a14:hiddenEffects xmlns:a14="http://schemas.microsoft.com/office/drawing/2010/main" xmlns="">
                 <a:effectLst>
                   <a:outerShdw blurRad="63500" dist="38099" dir="2700000" algn="ctr" rotWithShape="0">
                     <a:srgbClr val="000000">
@@ -15614,14 +15614,14 @@
           <a:effectLst/>
           <a:extLst>
             <a:ext uri="{909E8E84-426E-40dd-AFC4-6F175D3DCCD1}">
-              <a14:hiddenFill xmlns="" xmlns:a14="http://schemas.microsoft.com/office/drawing/2010/main">
+              <a14:hiddenFill xmlns:a14="http://schemas.microsoft.com/office/drawing/2010/main" xmlns="">
                 <a:solidFill>
                   <a:srgbClr val="FFFFFF"/>
                 </a:solidFill>
               </a14:hiddenFill>
             </a:ext>
             <a:ext uri="{91240B29-F687-4f45-9708-019B960494DF}">
-              <a14:hiddenLine xmlns="" xmlns:a14="http://schemas.microsoft.com/office/drawing/2010/main" w="9525" cap="flat">
+              <a14:hiddenLine xmlns:a14="http://schemas.microsoft.com/office/drawing/2010/main" xmlns="" w="9525" cap="flat">
                 <a:solidFill>
                   <a:srgbClr val="000000"/>
                 </a:solidFill>
@@ -15631,7 +15631,7 @@
               </a14:hiddenLine>
             </a:ext>
             <a:ext uri="{AF507438-7753-43e0-B8FC-AC1667EBCBE1}">
-              <a14:hiddenEffects xmlns="" xmlns:a14="http://schemas.microsoft.com/office/drawing/2010/main">
+              <a14:hiddenEffects xmlns:a14="http://schemas.microsoft.com/office/drawing/2010/main" xmlns="">
                 <a:effectLst>
                   <a:outerShdw blurRad="63500" dist="38099" dir="2700000" algn="ctr" rotWithShape="0">
                     <a:srgbClr val="000000">
@@ -15681,14 +15681,14 @@
           <a:effectLst/>
           <a:extLst>
             <a:ext uri="{909E8E84-426E-40dd-AFC4-6F175D3DCCD1}">
-              <a14:hiddenFill xmlns="" xmlns:a14="http://schemas.microsoft.com/office/drawing/2010/main">
+              <a14:hiddenFill xmlns:a14="http://schemas.microsoft.com/office/drawing/2010/main" xmlns="">
                 <a:solidFill>
                   <a:srgbClr val="FFFFFF"/>
                 </a:solidFill>
               </a14:hiddenFill>
             </a:ext>
             <a:ext uri="{91240B29-F687-4f45-9708-019B960494DF}">
-              <a14:hiddenLine xmlns="" xmlns:a14="http://schemas.microsoft.com/office/drawing/2010/main" w="9525" cap="flat">
+              <a14:hiddenLine xmlns:a14="http://schemas.microsoft.com/office/drawing/2010/main" xmlns="" w="9525" cap="flat">
                 <a:solidFill>
                   <a:srgbClr val="000000"/>
                 </a:solidFill>
@@ -15698,7 +15698,7 @@
               </a14:hiddenLine>
             </a:ext>
             <a:ext uri="{AF507438-7753-43e0-B8FC-AC1667EBCBE1}">
-              <a14:hiddenEffects xmlns="" xmlns:a14="http://schemas.microsoft.com/office/drawing/2010/main">
+              <a14:hiddenEffects xmlns:a14="http://schemas.microsoft.com/office/drawing/2010/main" xmlns="">
                 <a:effectLst>
                   <a:outerShdw blurRad="63500" dist="38099" dir="2700000" algn="ctr" rotWithShape="0">
                     <a:srgbClr val="000000">
@@ -15748,14 +15748,14 @@
           <a:effectLst/>
           <a:extLst>
             <a:ext uri="{909E8E84-426E-40dd-AFC4-6F175D3DCCD1}">
-              <a14:hiddenFill xmlns="" xmlns:a14="http://schemas.microsoft.com/office/drawing/2010/main">
+              <a14:hiddenFill xmlns:a14="http://schemas.microsoft.com/office/drawing/2010/main" xmlns="">
                 <a:solidFill>
                   <a:srgbClr val="FFFFFF"/>
                 </a:solidFill>
               </a14:hiddenFill>
             </a:ext>
             <a:ext uri="{91240B29-F687-4f45-9708-019B960494DF}">
-              <a14:hiddenLine xmlns="" xmlns:a14="http://schemas.microsoft.com/office/drawing/2010/main" w="9525" cap="flat">
+              <a14:hiddenLine xmlns:a14="http://schemas.microsoft.com/office/drawing/2010/main" xmlns="" w="9525" cap="flat">
                 <a:solidFill>
                   <a:srgbClr val="000000"/>
                 </a:solidFill>
@@ -15765,7 +15765,7 @@
               </a14:hiddenLine>
             </a:ext>
             <a:ext uri="{AF507438-7753-43e0-B8FC-AC1667EBCBE1}">
-              <a14:hiddenEffects xmlns="" xmlns:a14="http://schemas.microsoft.com/office/drawing/2010/main">
+              <a14:hiddenEffects xmlns:a14="http://schemas.microsoft.com/office/drawing/2010/main" xmlns="">
                 <a:effectLst>
                   <a:outerShdw blurRad="63500" dist="38099" dir="2700000" algn="ctr" rotWithShape="0">
                     <a:srgbClr val="000000">
@@ -15985,14 +15985,14 @@
           <a:effectLst/>
           <a:extLst>
             <a:ext uri="{909E8E84-426E-40dd-AFC4-6F175D3DCCD1}">
-              <a14:hiddenFill xmlns="" xmlns:a14="http://schemas.microsoft.com/office/drawing/2010/main">
+              <a14:hiddenFill xmlns:a14="http://schemas.microsoft.com/office/drawing/2010/main" xmlns="">
                 <a:solidFill>
                   <a:srgbClr val="FFFFFF"/>
                 </a:solidFill>
               </a14:hiddenFill>
             </a:ext>
             <a:ext uri="{91240B29-F687-4f45-9708-019B960494DF}">
-              <a14:hiddenLine xmlns="" xmlns:a14="http://schemas.microsoft.com/office/drawing/2010/main" w="9525" cap="flat">
+              <a14:hiddenLine xmlns:a14="http://schemas.microsoft.com/office/drawing/2010/main" xmlns="" w="9525" cap="flat">
                 <a:solidFill>
                   <a:srgbClr val="000000"/>
                 </a:solidFill>
@@ -16002,7 +16002,7 @@
               </a14:hiddenLine>
             </a:ext>
             <a:ext uri="{AF507438-7753-43e0-B8FC-AC1667EBCBE1}">
-              <a14:hiddenEffects xmlns="" xmlns:a14="http://schemas.microsoft.com/office/drawing/2010/main">
+              <a14:hiddenEffects xmlns:a14="http://schemas.microsoft.com/office/drawing/2010/main" xmlns="">
                 <a:effectLst>
                   <a:outerShdw blurRad="63500" dist="38099" dir="2700000" algn="ctr" rotWithShape="0">
                     <a:srgbClr val="000000">
@@ -16222,14 +16222,14 @@
           <a:effectLst/>
           <a:extLst>
             <a:ext uri="{909E8E84-426E-40dd-AFC4-6F175D3DCCD1}">
-              <a14:hiddenFill xmlns="" xmlns:a14="http://schemas.microsoft.com/office/drawing/2010/main">
+              <a14:hiddenFill xmlns:a14="http://schemas.microsoft.com/office/drawing/2010/main" xmlns="">
                 <a:solidFill>
                   <a:srgbClr val="FFFFFF"/>
                 </a:solidFill>
               </a14:hiddenFill>
             </a:ext>
             <a:ext uri="{91240B29-F687-4f45-9708-019B960494DF}">
-              <a14:hiddenLine xmlns="" xmlns:a14="http://schemas.microsoft.com/office/drawing/2010/main" w="9525" cap="flat">
+              <a14:hiddenLine xmlns:a14="http://schemas.microsoft.com/office/drawing/2010/main" xmlns="" w="9525" cap="flat">
                 <a:solidFill>
                   <a:srgbClr val="000000"/>
                 </a:solidFill>
@@ -16239,7 +16239,7 @@
               </a14:hiddenLine>
             </a:ext>
             <a:ext uri="{AF507438-7753-43e0-B8FC-AC1667EBCBE1}">
-              <a14:hiddenEffects xmlns="" xmlns:a14="http://schemas.microsoft.com/office/drawing/2010/main">
+              <a14:hiddenEffects xmlns:a14="http://schemas.microsoft.com/office/drawing/2010/main" xmlns="">
                 <a:effectLst>
                   <a:outerShdw blurRad="63500" dist="38099" dir="2700000" algn="ctr" rotWithShape="0">
                     <a:srgbClr val="000000">
@@ -16459,14 +16459,14 @@
           <a:effectLst/>
           <a:extLst>
             <a:ext uri="{909E8E84-426E-40dd-AFC4-6F175D3DCCD1}">
-              <a14:hiddenFill xmlns="" xmlns:a14="http://schemas.microsoft.com/office/drawing/2010/main">
+              <a14:hiddenFill xmlns:a14="http://schemas.microsoft.com/office/drawing/2010/main" xmlns="">
                 <a:solidFill>
                   <a:srgbClr val="FFFFFF"/>
                 </a:solidFill>
               </a14:hiddenFill>
             </a:ext>
             <a:ext uri="{91240B29-F687-4f45-9708-019B960494DF}">
-              <a14:hiddenLine xmlns="" xmlns:a14="http://schemas.microsoft.com/office/drawing/2010/main" w="9525" cap="flat">
+              <a14:hiddenLine xmlns:a14="http://schemas.microsoft.com/office/drawing/2010/main" xmlns="" w="9525" cap="flat">
                 <a:solidFill>
                   <a:srgbClr val="000000"/>
                 </a:solidFill>
@@ -16476,7 +16476,7 @@
               </a14:hiddenLine>
             </a:ext>
             <a:ext uri="{AF507438-7753-43e0-B8FC-AC1667EBCBE1}">
-              <a14:hiddenEffects xmlns="" xmlns:a14="http://schemas.microsoft.com/office/drawing/2010/main">
+              <a14:hiddenEffects xmlns:a14="http://schemas.microsoft.com/office/drawing/2010/main" xmlns="">
                 <a:effectLst>
                   <a:outerShdw blurRad="63500" dist="38099" dir="2700000" algn="ctr" rotWithShape="0">
                     <a:srgbClr val="000000">
@@ -16696,14 +16696,14 @@
           <a:effectLst/>
           <a:extLst>
             <a:ext uri="{909E8E84-426E-40dd-AFC4-6F175D3DCCD1}">
-              <a14:hiddenFill xmlns="" xmlns:a14="http://schemas.microsoft.com/office/drawing/2010/main">
+              <a14:hiddenFill xmlns:a14="http://schemas.microsoft.com/office/drawing/2010/main" xmlns="">
                 <a:solidFill>
                   <a:srgbClr val="FFFFFF"/>
                 </a:solidFill>
               </a14:hiddenFill>
             </a:ext>
             <a:ext uri="{91240B29-F687-4f45-9708-019B960494DF}">
-              <a14:hiddenLine xmlns="" xmlns:a14="http://schemas.microsoft.com/office/drawing/2010/main" w="9525" cap="flat">
+              <a14:hiddenLine xmlns:a14="http://schemas.microsoft.com/office/drawing/2010/main" xmlns="" w="9525" cap="flat">
                 <a:solidFill>
                   <a:srgbClr val="000000"/>
                 </a:solidFill>
@@ -16713,7 +16713,7 @@
               </a14:hiddenLine>
             </a:ext>
             <a:ext uri="{AF507438-7753-43e0-B8FC-AC1667EBCBE1}">
-              <a14:hiddenEffects xmlns="" xmlns:a14="http://schemas.microsoft.com/office/drawing/2010/main">
+              <a14:hiddenEffects xmlns:a14="http://schemas.microsoft.com/office/drawing/2010/main" xmlns="">
                 <a:effectLst>
                   <a:outerShdw blurRad="63500" dist="38099" dir="2700000" algn="ctr" rotWithShape="0">
                     <a:srgbClr val="000000">
@@ -16940,7 +16940,7 @@
           <a:effectLst/>
           <a:extLst>
             <a:ext uri="{AF507438-7753-43e0-B8FC-AC1667EBCBE1}">
-              <a14:hiddenEffects xmlns="" xmlns:a14="http://schemas.microsoft.com/office/drawing/2010/main">
+              <a14:hiddenEffects xmlns:a14="http://schemas.microsoft.com/office/drawing/2010/main" xmlns="">
                 <a:effectLst>
                   <a:outerShdw blurRad="63500" dist="38099" dir="2700000" algn="ctr" rotWithShape="0">
                     <a:srgbClr val="000000">
@@ -16983,14 +16983,14 @@
           <a:effectLst/>
           <a:extLst>
             <a:ext uri="{909E8E84-426E-40dd-AFC4-6F175D3DCCD1}">
-              <a14:hiddenFill xmlns="" xmlns:a14="http://schemas.microsoft.com/office/drawing/2010/main">
+              <a14:hiddenFill xmlns:a14="http://schemas.microsoft.com/office/drawing/2010/main" xmlns="">
                 <a:solidFill>
                   <a:srgbClr val="FFFFFF"/>
                 </a:solidFill>
               </a14:hiddenFill>
             </a:ext>
             <a:ext uri="{91240B29-F687-4f45-9708-019B960494DF}">
-              <a14:hiddenLine xmlns="" xmlns:a14="http://schemas.microsoft.com/office/drawing/2010/main" w="9525" cap="flat">
+              <a14:hiddenLine xmlns:a14="http://schemas.microsoft.com/office/drawing/2010/main" xmlns="" w="9525" cap="flat">
                 <a:solidFill>
                   <a:srgbClr val="000000"/>
                 </a:solidFill>
@@ -17000,7 +17000,7 @@
               </a14:hiddenLine>
             </a:ext>
             <a:ext uri="{AF507438-7753-43e0-B8FC-AC1667EBCBE1}">
-              <a14:hiddenEffects xmlns="" xmlns:a14="http://schemas.microsoft.com/office/drawing/2010/main">
+              <a14:hiddenEffects xmlns:a14="http://schemas.microsoft.com/office/drawing/2010/main" xmlns="">
                 <a:effectLst>
                   <a:outerShdw blurRad="63500" dist="38099" dir="2700000" algn="ctr" rotWithShape="0">
                     <a:srgbClr val="000000">
@@ -17055,12 +17055,12 @@
           <a:effectLst/>
           <a:extLst>
             <a:ext uri="{909E8E84-426E-40dd-AFC4-6F175D3DCCD1}">
-              <a14:hiddenFill xmlns="" xmlns:a14="http://schemas.microsoft.com/office/drawing/2010/main">
+              <a14:hiddenFill xmlns:a14="http://schemas.microsoft.com/office/drawing/2010/main" xmlns="">
                 <a:noFill/>
               </a14:hiddenFill>
             </a:ext>
             <a:ext uri="{AF507438-7753-43e0-B8FC-AC1667EBCBE1}">
-              <a14:hiddenEffects xmlns="" xmlns:a14="http://schemas.microsoft.com/office/drawing/2010/main">
+              <a14:hiddenEffects xmlns:a14="http://schemas.microsoft.com/office/drawing/2010/main" xmlns="">
                 <a:effectLst>
                   <a:outerShdw blurRad="63500" dist="38099" dir="2700000" algn="ctr" rotWithShape="0">
                     <a:srgbClr val="000000">
@@ -17108,12 +17108,12 @@
           <a:effectLst/>
           <a:extLst>
             <a:ext uri="{909E8E84-426E-40dd-AFC4-6F175D3DCCD1}">
-              <a14:hiddenFill xmlns="" xmlns:a14="http://schemas.microsoft.com/office/drawing/2010/main">
+              <a14:hiddenFill xmlns:a14="http://schemas.microsoft.com/office/drawing/2010/main" xmlns="">
                 <a:noFill/>
               </a14:hiddenFill>
             </a:ext>
             <a:ext uri="{AF507438-7753-43e0-B8FC-AC1667EBCBE1}">
-              <a14:hiddenEffects xmlns="" xmlns:a14="http://schemas.microsoft.com/office/drawing/2010/main">
+              <a14:hiddenEffects xmlns:a14="http://schemas.microsoft.com/office/drawing/2010/main" xmlns="">
                 <a:effectLst>
                   <a:outerShdw blurRad="63500" dist="38099" dir="2700000" algn="ctr" rotWithShape="0">
                     <a:srgbClr val="000000">
@@ -17166,7 +17166,7 @@
           <a:effectLst/>
           <a:extLst>
             <a:ext uri="{AF507438-7753-43e0-B8FC-AC1667EBCBE1}">
-              <a14:hiddenEffects xmlns="" xmlns:a14="http://schemas.microsoft.com/office/drawing/2010/main">
+              <a14:hiddenEffects xmlns:a14="http://schemas.microsoft.com/office/drawing/2010/main" xmlns="">
                 <a:effectLst>
                   <a:outerShdw blurRad="63500" dist="38099" dir="2700000" algn="ctr" rotWithShape="0">
                     <a:srgbClr val="000000">
@@ -17209,14 +17209,14 @@
           <a:effectLst/>
           <a:extLst>
             <a:ext uri="{909E8E84-426E-40dd-AFC4-6F175D3DCCD1}">
-              <a14:hiddenFill xmlns="" xmlns:a14="http://schemas.microsoft.com/office/drawing/2010/main">
+              <a14:hiddenFill xmlns:a14="http://schemas.microsoft.com/office/drawing/2010/main" xmlns="">
                 <a:solidFill>
                   <a:srgbClr val="FFFFFF"/>
                 </a:solidFill>
               </a14:hiddenFill>
             </a:ext>
             <a:ext uri="{91240B29-F687-4f45-9708-019B960494DF}">
-              <a14:hiddenLine xmlns="" xmlns:a14="http://schemas.microsoft.com/office/drawing/2010/main" w="9525" cap="flat">
+              <a14:hiddenLine xmlns:a14="http://schemas.microsoft.com/office/drawing/2010/main" xmlns="" w="9525" cap="flat">
                 <a:solidFill>
                   <a:srgbClr val="000000"/>
                 </a:solidFill>
@@ -17226,7 +17226,7 @@
               </a14:hiddenLine>
             </a:ext>
             <a:ext uri="{AF507438-7753-43e0-B8FC-AC1667EBCBE1}">
-              <a14:hiddenEffects xmlns="" xmlns:a14="http://schemas.microsoft.com/office/drawing/2010/main">
+              <a14:hiddenEffects xmlns:a14="http://schemas.microsoft.com/office/drawing/2010/main" xmlns="">
                 <a:effectLst>
                   <a:outerShdw blurRad="63500" dist="38099" dir="2700000" algn="ctr" rotWithShape="0">
                     <a:srgbClr val="000000">
@@ -17483,7 +17483,7 @@
           <a:effectLst/>
           <a:extLst>
             <a:ext uri="{AF507438-7753-43e0-B8FC-AC1667EBCBE1}">
-              <a14:hiddenEffects xmlns="" xmlns:a14="http://schemas.microsoft.com/office/drawing/2010/main">
+              <a14:hiddenEffects xmlns:a14="http://schemas.microsoft.com/office/drawing/2010/main" xmlns="">
                 <a:effectLst>
                   <a:outerShdw blurRad="63500" dist="38099" dir="2700000" algn="ctr" rotWithShape="0">
                     <a:srgbClr val="000000">
@@ -17526,14 +17526,14 @@
           <a:effectLst/>
           <a:extLst>
             <a:ext uri="{909E8E84-426E-40dd-AFC4-6F175D3DCCD1}">
-              <a14:hiddenFill xmlns="" xmlns:a14="http://schemas.microsoft.com/office/drawing/2010/main">
+              <a14:hiddenFill xmlns:a14="http://schemas.microsoft.com/office/drawing/2010/main" xmlns="">
                 <a:solidFill>
                   <a:srgbClr val="FFFFFF"/>
                 </a:solidFill>
               </a14:hiddenFill>
             </a:ext>
             <a:ext uri="{91240B29-F687-4f45-9708-019B960494DF}">
-              <a14:hiddenLine xmlns="" xmlns:a14="http://schemas.microsoft.com/office/drawing/2010/main" w="9525" cap="flat">
+              <a14:hiddenLine xmlns:a14="http://schemas.microsoft.com/office/drawing/2010/main" xmlns="" w="9525" cap="flat">
                 <a:solidFill>
                   <a:srgbClr val="000000"/>
                 </a:solidFill>
@@ -17543,7 +17543,7 @@
               </a14:hiddenLine>
             </a:ext>
             <a:ext uri="{AF507438-7753-43e0-B8FC-AC1667EBCBE1}">
-              <a14:hiddenEffects xmlns="" xmlns:a14="http://schemas.microsoft.com/office/drawing/2010/main">
+              <a14:hiddenEffects xmlns:a14="http://schemas.microsoft.com/office/drawing/2010/main" xmlns="">
                 <a:effectLst>
                   <a:outerShdw blurRad="63500" dist="38099" dir="2700000" algn="ctr" rotWithShape="0">
                     <a:srgbClr val="000000">
@@ -17786,12 +17786,12 @@
           <a:effectLst/>
           <a:extLst>
             <a:ext uri="{909E8E84-426E-40dd-AFC4-6F175D3DCCD1}">
-              <a14:hiddenFill xmlns="" xmlns:a14="http://schemas.microsoft.com/office/drawing/2010/main">
+              <a14:hiddenFill xmlns:a14="http://schemas.microsoft.com/office/drawing/2010/main" xmlns="">
                 <a:noFill/>
               </a14:hiddenFill>
             </a:ext>
             <a:ext uri="{AF507438-7753-43e0-B8FC-AC1667EBCBE1}">
-              <a14:hiddenEffects xmlns="" xmlns:a14="http://schemas.microsoft.com/office/drawing/2010/main">
+              <a14:hiddenEffects xmlns:a14="http://schemas.microsoft.com/office/drawing/2010/main" xmlns="">
                 <a:effectLst>
                   <a:outerShdw blurRad="63500" dist="38099" dir="2700000" algn="ctr" rotWithShape="0">
                     <a:srgbClr val="000000">
@@ -17834,14 +17834,14 @@
           <a:effectLst/>
           <a:extLst>
             <a:ext uri="{909E8E84-426E-40dd-AFC4-6F175D3DCCD1}">
-              <a14:hiddenFill xmlns="" xmlns:a14="http://schemas.microsoft.com/office/drawing/2010/main">
+              <a14:hiddenFill xmlns:a14="http://schemas.microsoft.com/office/drawing/2010/main" xmlns="">
                 <a:solidFill>
                   <a:srgbClr val="FFFFFF"/>
                 </a:solidFill>
               </a14:hiddenFill>
             </a:ext>
             <a:ext uri="{91240B29-F687-4f45-9708-019B960494DF}">
-              <a14:hiddenLine xmlns="" xmlns:a14="http://schemas.microsoft.com/office/drawing/2010/main" w="9525" cap="flat">
+              <a14:hiddenLine xmlns:a14="http://schemas.microsoft.com/office/drawing/2010/main" xmlns="" w="9525" cap="flat">
                 <a:solidFill>
                   <a:srgbClr val="000000"/>
                 </a:solidFill>
@@ -17851,7 +17851,7 @@
               </a14:hiddenLine>
             </a:ext>
             <a:ext uri="{AF507438-7753-43e0-B8FC-AC1667EBCBE1}">
-              <a14:hiddenEffects xmlns="" xmlns:a14="http://schemas.microsoft.com/office/drawing/2010/main">
+              <a14:hiddenEffects xmlns:a14="http://schemas.microsoft.com/office/drawing/2010/main" xmlns="">
                 <a:effectLst>
                   <a:outerShdw blurRad="63500" dist="38099" dir="2700000" algn="ctr" rotWithShape="0">
                     <a:srgbClr val="000000">
@@ -18071,14 +18071,14 @@
           <a:effectLst/>
           <a:extLst>
             <a:ext uri="{909E8E84-426E-40dd-AFC4-6F175D3DCCD1}">
-              <a14:hiddenFill xmlns="" xmlns:a14="http://schemas.microsoft.com/office/drawing/2010/main">
+              <a14:hiddenFill xmlns:a14="http://schemas.microsoft.com/office/drawing/2010/main" xmlns="">
                 <a:solidFill>
                   <a:srgbClr val="FFFFFF"/>
                 </a:solidFill>
               </a14:hiddenFill>
             </a:ext>
             <a:ext uri="{91240B29-F687-4f45-9708-019B960494DF}">
-              <a14:hiddenLine xmlns="" xmlns:a14="http://schemas.microsoft.com/office/drawing/2010/main" w="9525" cap="flat">
+              <a14:hiddenLine xmlns:a14="http://schemas.microsoft.com/office/drawing/2010/main" xmlns="" w="9525" cap="flat">
                 <a:solidFill>
                   <a:srgbClr val="000000"/>
                 </a:solidFill>
@@ -18088,7 +18088,7 @@
               </a14:hiddenLine>
             </a:ext>
             <a:ext uri="{AF507438-7753-43e0-B8FC-AC1667EBCBE1}">
-              <a14:hiddenEffects xmlns="" xmlns:a14="http://schemas.microsoft.com/office/drawing/2010/main">
+              <a14:hiddenEffects xmlns:a14="http://schemas.microsoft.com/office/drawing/2010/main" xmlns="">
                 <a:effectLst>
                   <a:outerShdw blurRad="63500" dist="38099" dir="2700000" algn="ctr" rotWithShape="0">
                     <a:srgbClr val="000000">
@@ -18315,7 +18315,7 @@
           <a:effectLst/>
           <a:extLst>
             <a:ext uri="{AF507438-7753-43e0-B8FC-AC1667EBCBE1}">
-              <a14:hiddenEffects xmlns="" xmlns:a14="http://schemas.microsoft.com/office/drawing/2010/main">
+              <a14:hiddenEffects xmlns:a14="http://schemas.microsoft.com/office/drawing/2010/main" xmlns="">
                 <a:effectLst>
                   <a:outerShdw blurRad="63500" dist="38099" dir="2700000" algn="ctr" rotWithShape="0">
                     <a:srgbClr val="000000">
@@ -18358,14 +18358,14 @@
           <a:effectLst/>
           <a:extLst>
             <a:ext uri="{909E8E84-426E-40dd-AFC4-6F175D3DCCD1}">
-              <a14:hiddenFill xmlns="" xmlns:a14="http://schemas.microsoft.com/office/drawing/2010/main">
+              <a14:hiddenFill xmlns:a14="http://schemas.microsoft.com/office/drawing/2010/main" xmlns="">
                 <a:solidFill>
                   <a:srgbClr val="FFFFFF"/>
                 </a:solidFill>
               </a14:hiddenFill>
             </a:ext>
             <a:ext uri="{91240B29-F687-4f45-9708-019B960494DF}">
-              <a14:hiddenLine xmlns="" xmlns:a14="http://schemas.microsoft.com/office/drawing/2010/main" w="9525" cap="flat">
+              <a14:hiddenLine xmlns:a14="http://schemas.microsoft.com/office/drawing/2010/main" xmlns="" w="9525" cap="flat">
                 <a:solidFill>
                   <a:srgbClr val="000000"/>
                 </a:solidFill>
@@ -18375,7 +18375,7 @@
               </a14:hiddenLine>
             </a:ext>
             <a:ext uri="{AF507438-7753-43e0-B8FC-AC1667EBCBE1}">
-              <a14:hiddenEffects xmlns="" xmlns:a14="http://schemas.microsoft.com/office/drawing/2010/main">
+              <a14:hiddenEffects xmlns:a14="http://schemas.microsoft.com/office/drawing/2010/main" xmlns="">
                 <a:effectLst>
                   <a:outerShdw blurRad="63500" dist="38099" dir="2700000" algn="ctr" rotWithShape="0">
                     <a:srgbClr val="000000">
@@ -18602,7 +18602,7 @@
           <a:effectLst/>
           <a:extLst>
             <a:ext uri="{AF507438-7753-43e0-B8FC-AC1667EBCBE1}">
-              <a14:hiddenEffects xmlns="" xmlns:a14="http://schemas.microsoft.com/office/drawing/2010/main">
+              <a14:hiddenEffects xmlns:a14="http://schemas.microsoft.com/office/drawing/2010/main" xmlns="">
                 <a:effectLst>
                   <a:outerShdw blurRad="63500" dist="38099" dir="2700000" algn="ctr" rotWithShape="0">
                     <a:srgbClr val="000000">
@@ -18645,14 +18645,14 @@
           <a:effectLst/>
           <a:extLst>
             <a:ext uri="{909E8E84-426E-40dd-AFC4-6F175D3DCCD1}">
-              <a14:hiddenFill xmlns="" xmlns:a14="http://schemas.microsoft.com/office/drawing/2010/main">
+              <a14:hiddenFill xmlns:a14="http://schemas.microsoft.com/office/drawing/2010/main" xmlns="">
                 <a:solidFill>
                   <a:srgbClr val="FFFFFF"/>
                 </a:solidFill>
               </a14:hiddenFill>
             </a:ext>
             <a:ext uri="{91240B29-F687-4f45-9708-019B960494DF}">
-              <a14:hiddenLine xmlns="" xmlns:a14="http://schemas.microsoft.com/office/drawing/2010/main" w="9525" cap="flat">
+              <a14:hiddenLine xmlns:a14="http://schemas.microsoft.com/office/drawing/2010/main" xmlns="" w="9525" cap="flat">
                 <a:solidFill>
                   <a:srgbClr val="000000"/>
                 </a:solidFill>
@@ -18662,7 +18662,7 @@
               </a14:hiddenLine>
             </a:ext>
             <a:ext uri="{AF507438-7753-43e0-B8FC-AC1667EBCBE1}">
-              <a14:hiddenEffects xmlns="" xmlns:a14="http://schemas.microsoft.com/office/drawing/2010/main">
+              <a14:hiddenEffects xmlns:a14="http://schemas.microsoft.com/office/drawing/2010/main" xmlns="">
                 <a:effectLst>
                   <a:outerShdw blurRad="63500" dist="38099" dir="2700000" algn="ctr" rotWithShape="0">
                     <a:srgbClr val="000000">
@@ -18889,7 +18889,7 @@
           <a:effectLst/>
           <a:extLst>
             <a:ext uri="{AF507438-7753-43e0-B8FC-AC1667EBCBE1}">
-              <a14:hiddenEffects xmlns="" xmlns:a14="http://schemas.microsoft.com/office/drawing/2010/main">
+              <a14:hiddenEffects xmlns:a14="http://schemas.microsoft.com/office/drawing/2010/main" xmlns="">
                 <a:effectLst>
                   <a:outerShdw blurRad="63500" dist="38099" dir="2700000" algn="ctr" rotWithShape="0">
                     <a:srgbClr val="000000">
@@ -18932,14 +18932,14 @@
           <a:effectLst/>
           <a:extLst>
             <a:ext uri="{909E8E84-426E-40dd-AFC4-6F175D3DCCD1}">
-              <a14:hiddenFill xmlns="" xmlns:a14="http://schemas.microsoft.com/office/drawing/2010/main">
+              <a14:hiddenFill xmlns:a14="http://schemas.microsoft.com/office/drawing/2010/main" xmlns="">
                 <a:solidFill>
                   <a:srgbClr val="FFFFFF"/>
                 </a:solidFill>
               </a14:hiddenFill>
             </a:ext>
             <a:ext uri="{91240B29-F687-4f45-9708-019B960494DF}">
-              <a14:hiddenLine xmlns="" xmlns:a14="http://schemas.microsoft.com/office/drawing/2010/main" w="9525" cap="flat">
+              <a14:hiddenLine xmlns:a14="http://schemas.microsoft.com/office/drawing/2010/main" xmlns="" w="9525" cap="flat">
                 <a:solidFill>
                   <a:srgbClr val="000000"/>
                 </a:solidFill>
@@ -18949,7 +18949,7 @@
               </a14:hiddenLine>
             </a:ext>
             <a:ext uri="{AF507438-7753-43e0-B8FC-AC1667EBCBE1}">
-              <a14:hiddenEffects xmlns="" xmlns:a14="http://schemas.microsoft.com/office/drawing/2010/main">
+              <a14:hiddenEffects xmlns:a14="http://schemas.microsoft.com/office/drawing/2010/main" xmlns="">
                 <a:effectLst>
                   <a:outerShdw blurRad="63500" dist="38099" dir="2700000" algn="ctr" rotWithShape="0">
                     <a:srgbClr val="000000">
@@ -19176,7 +19176,7 @@
           <a:effectLst/>
           <a:extLst>
             <a:ext uri="{AF507438-7753-43e0-B8FC-AC1667EBCBE1}">
-              <a14:hiddenEffects xmlns="" xmlns:a14="http://schemas.microsoft.com/office/drawing/2010/main">
+              <a14:hiddenEffects xmlns:a14="http://schemas.microsoft.com/office/drawing/2010/main" xmlns="">
                 <a:effectLst>
                   <a:outerShdw blurRad="63500" dist="38099" dir="2700000" algn="ctr" rotWithShape="0">
                     <a:srgbClr val="000000">
@@ -19219,14 +19219,14 @@
           <a:effectLst/>
           <a:extLst>
             <a:ext uri="{909E8E84-426E-40dd-AFC4-6F175D3DCCD1}">
-              <a14:hiddenFill xmlns="" xmlns:a14="http://schemas.microsoft.com/office/drawing/2010/main">
+              <a14:hiddenFill xmlns:a14="http://schemas.microsoft.com/office/drawing/2010/main" xmlns="">
                 <a:solidFill>
                   <a:srgbClr val="FFFFFF"/>
                 </a:solidFill>
               </a14:hiddenFill>
             </a:ext>
             <a:ext uri="{91240B29-F687-4f45-9708-019B960494DF}">
-              <a14:hiddenLine xmlns="" xmlns:a14="http://schemas.microsoft.com/office/drawing/2010/main" w="9525" cap="flat">
+              <a14:hiddenLine xmlns:a14="http://schemas.microsoft.com/office/drawing/2010/main" xmlns="" w="9525" cap="flat">
                 <a:solidFill>
                   <a:srgbClr val="000000"/>
                 </a:solidFill>
@@ -19236,7 +19236,7 @@
               </a14:hiddenLine>
             </a:ext>
             <a:ext uri="{AF507438-7753-43e0-B8FC-AC1667EBCBE1}">
-              <a14:hiddenEffects xmlns="" xmlns:a14="http://schemas.microsoft.com/office/drawing/2010/main">
+              <a14:hiddenEffects xmlns:a14="http://schemas.microsoft.com/office/drawing/2010/main" xmlns="">
                 <a:effectLst>
                   <a:outerShdw blurRad="63500" dist="38099" dir="2700000" algn="ctr" rotWithShape="0">
                     <a:srgbClr val="000000">
@@ -19463,7 +19463,7 @@
           <a:effectLst/>
           <a:extLst>
             <a:ext uri="{AF507438-7753-43e0-B8FC-AC1667EBCBE1}">
-              <a14:hiddenEffects xmlns="" xmlns:a14="http://schemas.microsoft.com/office/drawing/2010/main">
+              <a14:hiddenEffects xmlns:a14="http://schemas.microsoft.com/office/drawing/2010/main" xmlns="">
                 <a:effectLst>
                   <a:outerShdw blurRad="63500" dist="38099" dir="2700000" algn="ctr" rotWithShape="0">
                     <a:srgbClr val="000000">
@@ -19506,14 +19506,14 @@
           <a:effectLst/>
           <a:extLst>
             <a:ext uri="{909E8E84-426E-40dd-AFC4-6F175D3DCCD1}">
-              <a14:hiddenFill xmlns="" xmlns:a14="http://schemas.microsoft.com/office/drawing/2010/main">
+              <a14:hiddenFill xmlns:a14="http://schemas.microsoft.com/office/drawing/2010/main" xmlns="">
                 <a:solidFill>
                   <a:srgbClr val="FFFFFF"/>
                 </a:solidFill>
               </a14:hiddenFill>
             </a:ext>
             <a:ext uri="{91240B29-F687-4f45-9708-019B960494DF}">
-              <a14:hiddenLine xmlns="" xmlns:a14="http://schemas.microsoft.com/office/drawing/2010/main" w="9525" cap="flat">
+              <a14:hiddenLine xmlns:a14="http://schemas.microsoft.com/office/drawing/2010/main" xmlns="" w="9525" cap="flat">
                 <a:solidFill>
                   <a:srgbClr val="000000"/>
                 </a:solidFill>
@@ -19523,7 +19523,7 @@
               </a14:hiddenLine>
             </a:ext>
             <a:ext uri="{AF507438-7753-43e0-B8FC-AC1667EBCBE1}">
-              <a14:hiddenEffects xmlns="" xmlns:a14="http://schemas.microsoft.com/office/drawing/2010/main">
+              <a14:hiddenEffects xmlns:a14="http://schemas.microsoft.com/office/drawing/2010/main" xmlns="">
                 <a:effectLst>
                   <a:outerShdw blurRad="63500" dist="38099" dir="2700000" algn="ctr" rotWithShape="0">
                     <a:srgbClr val="000000">
@@ -19750,7 +19750,7 @@
           <a:effectLst/>
           <a:extLst>
             <a:ext uri="{AF507438-7753-43e0-B8FC-AC1667EBCBE1}">
-              <a14:hiddenEffects xmlns="" xmlns:a14="http://schemas.microsoft.com/office/drawing/2010/main">
+              <a14:hiddenEffects xmlns:a14="http://schemas.microsoft.com/office/drawing/2010/main" xmlns="">
                 <a:effectLst>
                   <a:outerShdw blurRad="63500" dist="38099" dir="2700000" algn="ctr" rotWithShape="0">
                     <a:srgbClr val="000000">
@@ -19793,14 +19793,14 @@
           <a:effectLst/>
           <a:extLst>
             <a:ext uri="{909E8E84-426E-40dd-AFC4-6F175D3DCCD1}">
-              <a14:hiddenFill xmlns="" xmlns:a14="http://schemas.microsoft.com/office/drawing/2010/main">
+              <a14:hiddenFill xmlns:a14="http://schemas.microsoft.com/office/drawing/2010/main" xmlns="">
                 <a:solidFill>
                   <a:srgbClr val="FFFFFF"/>
                 </a:solidFill>
               </a14:hiddenFill>
             </a:ext>
             <a:ext uri="{91240B29-F687-4f45-9708-019B960494DF}">
-              <a14:hiddenLine xmlns="" xmlns:a14="http://schemas.microsoft.com/office/drawing/2010/main" w="9525" cap="flat">
+              <a14:hiddenLine xmlns:a14="http://schemas.microsoft.com/office/drawing/2010/main" xmlns="" w="9525" cap="flat">
                 <a:solidFill>
                   <a:srgbClr val="000000"/>
                 </a:solidFill>
@@ -19810,7 +19810,7 @@
               </a14:hiddenLine>
             </a:ext>
             <a:ext uri="{AF507438-7753-43e0-B8FC-AC1667EBCBE1}">
-              <a14:hiddenEffects xmlns="" xmlns:a14="http://schemas.microsoft.com/office/drawing/2010/main">
+              <a14:hiddenEffects xmlns:a14="http://schemas.microsoft.com/office/drawing/2010/main" xmlns="">
                 <a:effectLst>
                   <a:outerShdw blurRad="63500" dist="38099" dir="2700000" algn="ctr" rotWithShape="0">
                     <a:srgbClr val="000000">
@@ -20037,7 +20037,7 @@
           <a:effectLst/>
           <a:extLst>
             <a:ext uri="{AF507438-7753-43e0-B8FC-AC1667EBCBE1}">
-              <a14:hiddenEffects xmlns="" xmlns:a14="http://schemas.microsoft.com/office/drawing/2010/main">
+              <a14:hiddenEffects xmlns:a14="http://schemas.microsoft.com/office/drawing/2010/main" xmlns="">
                 <a:effectLst>
                   <a:outerShdw blurRad="63500" dist="38099" dir="2700000" algn="ctr" rotWithShape="0">
                     <a:srgbClr val="000000">
@@ -20080,14 +20080,14 @@
           <a:effectLst/>
           <a:extLst>
             <a:ext uri="{909E8E84-426E-40dd-AFC4-6F175D3DCCD1}">
-              <a14:hiddenFill xmlns="" xmlns:a14="http://schemas.microsoft.com/office/drawing/2010/main">
+              <a14:hiddenFill xmlns:a14="http://schemas.microsoft.com/office/drawing/2010/main" xmlns="">
                 <a:solidFill>
                   <a:srgbClr val="FFFFFF"/>
                 </a:solidFill>
               </a14:hiddenFill>
             </a:ext>
             <a:ext uri="{91240B29-F687-4f45-9708-019B960494DF}">
-              <a14:hiddenLine xmlns="" xmlns:a14="http://schemas.microsoft.com/office/drawing/2010/main" w="9525" cap="flat">
+              <a14:hiddenLine xmlns:a14="http://schemas.microsoft.com/office/drawing/2010/main" xmlns="" w="9525" cap="flat">
                 <a:solidFill>
                   <a:srgbClr val="000000"/>
                 </a:solidFill>
@@ -20097,7 +20097,7 @@
               </a14:hiddenLine>
             </a:ext>
             <a:ext uri="{AF507438-7753-43e0-B8FC-AC1667EBCBE1}">
-              <a14:hiddenEffects xmlns="" xmlns:a14="http://schemas.microsoft.com/office/drawing/2010/main">
+              <a14:hiddenEffects xmlns:a14="http://schemas.microsoft.com/office/drawing/2010/main" xmlns="">
                 <a:effectLst>
                   <a:outerShdw blurRad="63500" dist="38099" dir="2700000" algn="ctr" rotWithShape="0">
                     <a:srgbClr val="000000">
@@ -20324,7 +20324,7 @@
           <a:effectLst/>
           <a:extLst>
             <a:ext uri="{AF507438-7753-43e0-B8FC-AC1667EBCBE1}">
-              <a14:hiddenEffects xmlns="" xmlns:a14="http://schemas.microsoft.com/office/drawing/2010/main">
+              <a14:hiddenEffects xmlns:a14="http://schemas.microsoft.com/office/drawing/2010/main" xmlns="">
                 <a:effectLst>
                   <a:outerShdw blurRad="63500" dist="38099" dir="2700000" algn="ctr" rotWithShape="0">
                     <a:srgbClr val="000000">
@@ -20367,14 +20367,14 @@
           <a:effectLst/>
           <a:extLst>
             <a:ext uri="{909E8E84-426E-40dd-AFC4-6F175D3DCCD1}">
-              <a14:hiddenFill xmlns="" xmlns:a14="http://schemas.microsoft.com/office/drawing/2010/main">
+              <a14:hiddenFill xmlns:a14="http://schemas.microsoft.com/office/drawing/2010/main" xmlns="">
                 <a:solidFill>
                   <a:srgbClr val="FFFFFF"/>
                 </a:solidFill>
               </a14:hiddenFill>
             </a:ext>
             <a:ext uri="{91240B29-F687-4f45-9708-019B960494DF}">
-              <a14:hiddenLine xmlns="" xmlns:a14="http://schemas.microsoft.com/office/drawing/2010/main" w="9525" cap="flat">
+              <a14:hiddenLine xmlns:a14="http://schemas.microsoft.com/office/drawing/2010/main" xmlns="" w="9525" cap="flat">
                 <a:solidFill>
                   <a:srgbClr val="000000"/>
                 </a:solidFill>
@@ -20384,7 +20384,7 @@
               </a14:hiddenLine>
             </a:ext>
             <a:ext uri="{AF507438-7753-43e0-B8FC-AC1667EBCBE1}">
-              <a14:hiddenEffects xmlns="" xmlns:a14="http://schemas.microsoft.com/office/drawing/2010/main">
+              <a14:hiddenEffects xmlns:a14="http://schemas.microsoft.com/office/drawing/2010/main" xmlns="">
                 <a:effectLst>
                   <a:outerShdw blurRad="63500" dist="38099" dir="2700000" algn="ctr" rotWithShape="0">
                     <a:srgbClr val="000000">
@@ -20609,12 +20609,12 @@
           <a:effectLst/>
           <a:extLst>
             <a:ext uri="{909E8E84-426E-40dd-AFC4-6F175D3DCCD1}">
-              <a14:hiddenFill xmlns="" xmlns:a14="http://schemas.microsoft.com/office/drawing/2010/main">
+              <a14:hiddenFill xmlns:a14="http://schemas.microsoft.com/office/drawing/2010/main" xmlns="">
                 <a:noFill/>
               </a14:hiddenFill>
             </a:ext>
             <a:ext uri="{AF507438-7753-43e0-B8FC-AC1667EBCBE1}">
-              <a14:hiddenEffects xmlns="" xmlns:a14="http://schemas.microsoft.com/office/drawing/2010/main">
+              <a14:hiddenEffects xmlns:a14="http://schemas.microsoft.com/office/drawing/2010/main" xmlns="">
                 <a:effectLst>
                   <a:outerShdw blurRad="63500" dist="38099" dir="2700000" algn="ctr" rotWithShape="0">
                     <a:srgbClr val="000000">
@@ -20657,14 +20657,14 @@
           <a:effectLst/>
           <a:extLst>
             <a:ext uri="{909E8E84-426E-40dd-AFC4-6F175D3DCCD1}">
-              <a14:hiddenFill xmlns="" xmlns:a14="http://schemas.microsoft.com/office/drawing/2010/main">
+              <a14:hiddenFill xmlns:a14="http://schemas.microsoft.com/office/drawing/2010/main" xmlns="">
                 <a:solidFill>
                   <a:srgbClr val="FFFFFF"/>
                 </a:solidFill>
               </a14:hiddenFill>
             </a:ext>
             <a:ext uri="{91240B29-F687-4f45-9708-019B960494DF}">
-              <a14:hiddenLine xmlns="" xmlns:a14="http://schemas.microsoft.com/office/drawing/2010/main" w="9525" cap="flat">
+              <a14:hiddenLine xmlns:a14="http://schemas.microsoft.com/office/drawing/2010/main" xmlns="" w="9525" cap="flat">
                 <a:solidFill>
                   <a:srgbClr val="000000"/>
                 </a:solidFill>
@@ -20674,7 +20674,7 @@
               </a14:hiddenLine>
             </a:ext>
             <a:ext uri="{AF507438-7753-43e0-B8FC-AC1667EBCBE1}">
-              <a14:hiddenEffects xmlns="" xmlns:a14="http://schemas.microsoft.com/office/drawing/2010/main">
+              <a14:hiddenEffects xmlns:a14="http://schemas.microsoft.com/office/drawing/2010/main" xmlns="">
                 <a:effectLst>
                   <a:outerShdw blurRad="63500" dist="38099" dir="2700000" algn="ctr" rotWithShape="0">
                     <a:srgbClr val="000000">
@@ -20724,14 +20724,14 @@
           <a:effectLst/>
           <a:extLst>
             <a:ext uri="{909E8E84-426E-40dd-AFC4-6F175D3DCCD1}">
-              <a14:hiddenFill xmlns="" xmlns:a14="http://schemas.microsoft.com/office/drawing/2010/main">
+              <a14:hiddenFill xmlns:a14="http://schemas.microsoft.com/office/drawing/2010/main" xmlns="">
                 <a:solidFill>
                   <a:srgbClr val="FFFFFF"/>
                 </a:solidFill>
               </a14:hiddenFill>
             </a:ext>
             <a:ext uri="{91240B29-F687-4f45-9708-019B960494DF}">
-              <a14:hiddenLine xmlns="" xmlns:a14="http://schemas.microsoft.com/office/drawing/2010/main" w="9525" cap="flat">
+              <a14:hiddenLine xmlns:a14="http://schemas.microsoft.com/office/drawing/2010/main" xmlns="" w="9525" cap="flat">
                 <a:solidFill>
                   <a:srgbClr val="000000"/>
                 </a:solidFill>
@@ -20741,7 +20741,7 @@
               </a14:hiddenLine>
             </a:ext>
             <a:ext uri="{AF507438-7753-43e0-B8FC-AC1667EBCBE1}">
-              <a14:hiddenEffects xmlns="" xmlns:a14="http://schemas.microsoft.com/office/drawing/2010/main">
+              <a14:hiddenEffects xmlns:a14="http://schemas.microsoft.com/office/drawing/2010/main" xmlns="">
                 <a:effectLst>
                   <a:outerShdw blurRad="63500" dist="38099" dir="2700000" algn="ctr" rotWithShape="0">
                     <a:srgbClr val="000000">
@@ -20965,14 +20965,14 @@
           <a:effectLst/>
           <a:extLst>
             <a:ext uri="{909E8E84-426E-40dd-AFC4-6F175D3DCCD1}">
-              <a14:hiddenFill xmlns="" xmlns:a14="http://schemas.microsoft.com/office/drawing/2010/main">
+              <a14:hiddenFill xmlns:a14="http://schemas.microsoft.com/office/drawing/2010/main" xmlns="">
                 <a:solidFill>
                   <a:srgbClr val="FFFFFF"/>
                 </a:solidFill>
               </a14:hiddenFill>
             </a:ext>
             <a:ext uri="{91240B29-F687-4f45-9708-019B960494DF}">
-              <a14:hiddenLine xmlns="" xmlns:a14="http://schemas.microsoft.com/office/drawing/2010/main" w="9525" cap="flat">
+              <a14:hiddenLine xmlns:a14="http://schemas.microsoft.com/office/drawing/2010/main" xmlns="" w="9525" cap="flat">
                 <a:solidFill>
                   <a:srgbClr val="000000"/>
                 </a:solidFill>
@@ -20982,7 +20982,7 @@
               </a14:hiddenLine>
             </a:ext>
             <a:ext uri="{AF507438-7753-43e0-B8FC-AC1667EBCBE1}">
-              <a14:hiddenEffects xmlns="" xmlns:a14="http://schemas.microsoft.com/office/drawing/2010/main">
+              <a14:hiddenEffects xmlns:a14="http://schemas.microsoft.com/office/drawing/2010/main" xmlns="">
                 <a:effectLst>
                   <a:outerShdw blurRad="63500" dist="38099" dir="2700000" algn="ctr" rotWithShape="0">
                     <a:srgbClr val="000000">
@@ -21032,14 +21032,14 @@
           <a:effectLst/>
           <a:extLst>
             <a:ext uri="{909E8E84-426E-40dd-AFC4-6F175D3DCCD1}">
-              <a14:hiddenFill xmlns="" xmlns:a14="http://schemas.microsoft.com/office/drawing/2010/main">
+              <a14:hiddenFill xmlns:a14="http://schemas.microsoft.com/office/drawing/2010/main" xmlns="">
                 <a:solidFill>
                   <a:srgbClr val="FFFFFF"/>
                 </a:solidFill>
               </a14:hiddenFill>
             </a:ext>
             <a:ext uri="{91240B29-F687-4f45-9708-019B960494DF}">
-              <a14:hiddenLine xmlns="" xmlns:a14="http://schemas.microsoft.com/office/drawing/2010/main" w="9525" cap="flat">
+              <a14:hiddenLine xmlns:a14="http://schemas.microsoft.com/office/drawing/2010/main" xmlns="" w="9525" cap="flat">
                 <a:solidFill>
                   <a:srgbClr val="000000"/>
                 </a:solidFill>
@@ -21049,7 +21049,7 @@
               </a14:hiddenLine>
             </a:ext>
             <a:ext uri="{AF507438-7753-43e0-B8FC-AC1667EBCBE1}">
-              <a14:hiddenEffects xmlns="" xmlns:a14="http://schemas.microsoft.com/office/drawing/2010/main">
+              <a14:hiddenEffects xmlns:a14="http://schemas.microsoft.com/office/drawing/2010/main" xmlns="">
                 <a:effectLst>
                   <a:outerShdw blurRad="63500" dist="38099" dir="2700000" algn="ctr" rotWithShape="0">
                     <a:srgbClr val="000000">
@@ -21099,14 +21099,14 @@
           <a:effectLst/>
           <a:extLst>
             <a:ext uri="{909E8E84-426E-40dd-AFC4-6F175D3DCCD1}">
-              <a14:hiddenFill xmlns="" xmlns:a14="http://schemas.microsoft.com/office/drawing/2010/main">
+              <a14:hiddenFill xmlns:a14="http://schemas.microsoft.com/office/drawing/2010/main" xmlns="">
                 <a:solidFill>
                   <a:srgbClr val="FFFFFF"/>
                 </a:solidFill>
               </a14:hiddenFill>
             </a:ext>
             <a:ext uri="{91240B29-F687-4f45-9708-019B960494DF}">
-              <a14:hiddenLine xmlns="" xmlns:a14="http://schemas.microsoft.com/office/drawing/2010/main" w="9525" cap="flat">
+              <a14:hiddenLine xmlns:a14="http://schemas.microsoft.com/office/drawing/2010/main" xmlns="" w="9525" cap="flat">
                 <a:solidFill>
                   <a:srgbClr val="000000"/>
                 </a:solidFill>
@@ -21116,7 +21116,7 @@
               </a14:hiddenLine>
             </a:ext>
             <a:ext uri="{AF507438-7753-43e0-B8FC-AC1667EBCBE1}">
-              <a14:hiddenEffects xmlns="" xmlns:a14="http://schemas.microsoft.com/office/drawing/2010/main">
+              <a14:hiddenEffects xmlns:a14="http://schemas.microsoft.com/office/drawing/2010/main" xmlns="">
                 <a:effectLst>
                   <a:outerShdw blurRad="63500" dist="38099" dir="2700000" algn="ctr" rotWithShape="0">
                     <a:srgbClr val="000000">
@@ -21166,14 +21166,14 @@
           <a:effectLst/>
           <a:extLst>
             <a:ext uri="{909E8E84-426E-40dd-AFC4-6F175D3DCCD1}">
-              <a14:hiddenFill xmlns="" xmlns:a14="http://schemas.microsoft.com/office/drawing/2010/main">
+              <a14:hiddenFill xmlns:a14="http://schemas.microsoft.com/office/drawing/2010/main" xmlns="">
                 <a:solidFill>
                   <a:srgbClr val="FFFFFF"/>
                 </a:solidFill>
               </a14:hiddenFill>
             </a:ext>
             <a:ext uri="{91240B29-F687-4f45-9708-019B960494DF}">
-              <a14:hiddenLine xmlns="" xmlns:a14="http://schemas.microsoft.com/office/drawing/2010/main" w="9525" cap="flat">
+              <a14:hiddenLine xmlns:a14="http://schemas.microsoft.com/office/drawing/2010/main" xmlns="" w="9525" cap="flat">
                 <a:solidFill>
                   <a:srgbClr val="000000"/>
                 </a:solidFill>
@@ -21183,7 +21183,7 @@
               </a14:hiddenLine>
             </a:ext>
             <a:ext uri="{AF507438-7753-43e0-B8FC-AC1667EBCBE1}">
-              <a14:hiddenEffects xmlns="" xmlns:a14="http://schemas.microsoft.com/office/drawing/2010/main">
+              <a14:hiddenEffects xmlns:a14="http://schemas.microsoft.com/office/drawing/2010/main" xmlns="">
                 <a:effectLst>
                   <a:outerShdw blurRad="63500" dist="38099" dir="2700000" algn="ctr" rotWithShape="0">
                     <a:srgbClr val="000000">
@@ -21233,14 +21233,14 @@
           <a:effectLst/>
           <a:extLst>
             <a:ext uri="{909E8E84-426E-40dd-AFC4-6F175D3DCCD1}">
-              <a14:hiddenFill xmlns="" xmlns:a14="http://schemas.microsoft.com/office/drawing/2010/main">
+              <a14:hiddenFill xmlns:a14="http://schemas.microsoft.com/office/drawing/2010/main" xmlns="">
                 <a:solidFill>
                   <a:srgbClr val="FFFFFF"/>
                 </a:solidFill>
               </a14:hiddenFill>
             </a:ext>
             <a:ext uri="{91240B29-F687-4f45-9708-019B960494DF}">
-              <a14:hiddenLine xmlns="" xmlns:a14="http://schemas.microsoft.com/office/drawing/2010/main" w="9525" cap="flat">
+              <a14:hiddenLine xmlns:a14="http://schemas.microsoft.com/office/drawing/2010/main" xmlns="" w="9525" cap="flat">
                 <a:solidFill>
                   <a:srgbClr val="000000"/>
                 </a:solidFill>
@@ -21250,7 +21250,7 @@
               </a14:hiddenLine>
             </a:ext>
             <a:ext uri="{AF507438-7753-43e0-B8FC-AC1667EBCBE1}">
-              <a14:hiddenEffects xmlns="" xmlns:a14="http://schemas.microsoft.com/office/drawing/2010/main">
+              <a14:hiddenEffects xmlns:a14="http://schemas.microsoft.com/office/drawing/2010/main" xmlns="">
                 <a:effectLst>
                   <a:outerShdw blurRad="63500" dist="38099" dir="2700000" algn="ctr" rotWithShape="0">
                     <a:srgbClr val="000000">
@@ -21300,14 +21300,14 @@
           <a:effectLst/>
           <a:extLst>
             <a:ext uri="{909E8E84-426E-40dd-AFC4-6F175D3DCCD1}">
-              <a14:hiddenFill xmlns="" xmlns:a14="http://schemas.microsoft.com/office/drawing/2010/main">
+              <a14:hiddenFill xmlns:a14="http://schemas.microsoft.com/office/drawing/2010/main" xmlns="">
                 <a:solidFill>
                   <a:srgbClr val="FFFFFF"/>
                 </a:solidFill>
               </a14:hiddenFill>
             </a:ext>
             <a:ext uri="{91240B29-F687-4f45-9708-019B960494DF}">
-              <a14:hiddenLine xmlns="" xmlns:a14="http://schemas.microsoft.com/office/drawing/2010/main" w="9525" cap="flat">
+              <a14:hiddenLine xmlns:a14="http://schemas.microsoft.com/office/drawing/2010/main" xmlns="" w="9525" cap="flat">
                 <a:solidFill>
                   <a:srgbClr val="000000"/>
                 </a:solidFill>
@@ -21317,7 +21317,7 @@
               </a14:hiddenLine>
             </a:ext>
             <a:ext uri="{AF507438-7753-43e0-B8FC-AC1667EBCBE1}">
-              <a14:hiddenEffects xmlns="" xmlns:a14="http://schemas.microsoft.com/office/drawing/2010/main">
+              <a14:hiddenEffects xmlns:a14="http://schemas.microsoft.com/office/drawing/2010/main" xmlns="">
                 <a:effectLst>
                   <a:outerShdw blurRad="63500" dist="38099" dir="2700000" algn="ctr" rotWithShape="0">
                     <a:srgbClr val="000000">
@@ -21367,14 +21367,14 @@
           <a:effectLst/>
           <a:extLst>
             <a:ext uri="{909E8E84-426E-40dd-AFC4-6F175D3DCCD1}">
-              <a14:hiddenFill xmlns="" xmlns:a14="http://schemas.microsoft.com/office/drawing/2010/main">
+              <a14:hiddenFill xmlns:a14="http://schemas.microsoft.com/office/drawing/2010/main" xmlns="">
                 <a:solidFill>
                   <a:srgbClr val="FFFFFF"/>
                 </a:solidFill>
               </a14:hiddenFill>
             </a:ext>
             <a:ext uri="{91240B29-F687-4f45-9708-019B960494DF}">
-              <a14:hiddenLine xmlns="" xmlns:a14="http://schemas.microsoft.com/office/drawing/2010/main" w="9525" cap="flat">
+              <a14:hiddenLine xmlns:a14="http://schemas.microsoft.com/office/drawing/2010/main" xmlns="" w="9525" cap="flat">
                 <a:solidFill>
                   <a:srgbClr val="000000"/>
                 </a:solidFill>
@@ -21384,7 +21384,7 @@
               </a14:hiddenLine>
             </a:ext>
             <a:ext uri="{AF507438-7753-43e0-B8FC-AC1667EBCBE1}">
-              <a14:hiddenEffects xmlns="" xmlns:a14="http://schemas.microsoft.com/office/drawing/2010/main">
+              <a14:hiddenEffects xmlns:a14="http://schemas.microsoft.com/office/drawing/2010/main" xmlns="">
                 <a:effectLst>
                   <a:outerShdw blurRad="63500" dist="38099" dir="2700000" algn="ctr" rotWithShape="0">
                     <a:srgbClr val="000000">
@@ -21434,14 +21434,14 @@
           <a:effectLst/>
           <a:extLst>
             <a:ext uri="{909E8E84-426E-40dd-AFC4-6F175D3DCCD1}">
-              <a14:hiddenFill xmlns="" xmlns:a14="http://schemas.microsoft.com/office/drawing/2010/main">
+              <a14:hiddenFill xmlns:a14="http://schemas.microsoft.com/office/drawing/2010/main" xmlns="">
                 <a:solidFill>
                   <a:srgbClr val="FFFFFF"/>
                 </a:solidFill>
               </a14:hiddenFill>
             </a:ext>
             <a:ext uri="{91240B29-F687-4f45-9708-019B960494DF}">
-              <a14:hiddenLine xmlns="" xmlns:a14="http://schemas.microsoft.com/office/drawing/2010/main" w="9525" cap="flat">
+              <a14:hiddenLine xmlns:a14="http://schemas.microsoft.com/office/drawing/2010/main" xmlns="" w="9525" cap="flat">
                 <a:solidFill>
                   <a:srgbClr val="000000"/>
                 </a:solidFill>
@@ -21451,7 +21451,7 @@
               </a14:hiddenLine>
             </a:ext>
             <a:ext uri="{AF507438-7753-43e0-B8FC-AC1667EBCBE1}">
-              <a14:hiddenEffects xmlns="" xmlns:a14="http://schemas.microsoft.com/office/drawing/2010/main">
+              <a14:hiddenEffects xmlns:a14="http://schemas.microsoft.com/office/drawing/2010/main" xmlns="">
                 <a:effectLst>
                   <a:outerShdw blurRad="63500" dist="38099" dir="2700000" algn="ctr" rotWithShape="0">
                     <a:srgbClr val="000000">
@@ -21501,14 +21501,14 @@
           <a:effectLst/>
           <a:extLst>
             <a:ext uri="{909E8E84-426E-40dd-AFC4-6F175D3DCCD1}">
-              <a14:hiddenFill xmlns="" xmlns:a14="http://schemas.microsoft.com/office/drawing/2010/main">
+              <a14:hiddenFill xmlns:a14="http://schemas.microsoft.com/office/drawing/2010/main" xmlns="">
                 <a:solidFill>
                   <a:srgbClr val="FFFFFF"/>
                 </a:solidFill>
               </a14:hiddenFill>
             </a:ext>
             <a:ext uri="{91240B29-F687-4f45-9708-019B960494DF}">
-              <a14:hiddenLine xmlns="" xmlns:a14="http://schemas.microsoft.com/office/drawing/2010/main" w="9525" cap="flat">
+              <a14:hiddenLine xmlns:a14="http://schemas.microsoft.com/office/drawing/2010/main" xmlns="" w="9525" cap="flat">
                 <a:solidFill>
                   <a:srgbClr val="000000"/>
                 </a:solidFill>
@@ -21518,7 +21518,7 @@
               </a14:hiddenLine>
             </a:ext>
             <a:ext uri="{AF507438-7753-43e0-B8FC-AC1667EBCBE1}">
-              <a14:hiddenEffects xmlns="" xmlns:a14="http://schemas.microsoft.com/office/drawing/2010/main">
+              <a14:hiddenEffects xmlns:a14="http://schemas.microsoft.com/office/drawing/2010/main" xmlns="">
                 <a:effectLst>
                   <a:outerShdw blurRad="63500" dist="38099" dir="2700000" algn="ctr" rotWithShape="0">
                     <a:srgbClr val="000000">
@@ -21568,14 +21568,14 @@
           <a:effectLst/>
           <a:extLst>
             <a:ext uri="{909E8E84-426E-40dd-AFC4-6F175D3DCCD1}">
-              <a14:hiddenFill xmlns="" xmlns:a14="http://schemas.microsoft.com/office/drawing/2010/main">
+              <a14:hiddenFill xmlns:a14="http://schemas.microsoft.com/office/drawing/2010/main" xmlns="">
                 <a:solidFill>
                   <a:srgbClr val="FFFFFF"/>
                 </a:solidFill>
               </a14:hiddenFill>
             </a:ext>
             <a:ext uri="{91240B29-F687-4f45-9708-019B960494DF}">
-              <a14:hiddenLine xmlns="" xmlns:a14="http://schemas.microsoft.com/office/drawing/2010/main" w="9525" cap="flat">
+              <a14:hiddenLine xmlns:a14="http://schemas.microsoft.com/office/drawing/2010/main" xmlns="" w="9525" cap="flat">
                 <a:solidFill>
                   <a:srgbClr val="000000"/>
                 </a:solidFill>
@@ -21585,7 +21585,7 @@
               </a14:hiddenLine>
             </a:ext>
             <a:ext uri="{AF507438-7753-43e0-B8FC-AC1667EBCBE1}">
-              <a14:hiddenEffects xmlns="" xmlns:a14="http://schemas.microsoft.com/office/drawing/2010/main">
+              <a14:hiddenEffects xmlns:a14="http://schemas.microsoft.com/office/drawing/2010/main" xmlns="">
                 <a:effectLst>
                   <a:outerShdw blurRad="63500" dist="38099" dir="2700000" algn="ctr" rotWithShape="0">
                     <a:srgbClr val="000000">
@@ -21635,14 +21635,14 @@
           <a:effectLst/>
           <a:extLst>
             <a:ext uri="{909E8E84-426E-40dd-AFC4-6F175D3DCCD1}">
-              <a14:hiddenFill xmlns="" xmlns:a14="http://schemas.microsoft.com/office/drawing/2010/main">
+              <a14:hiddenFill xmlns:a14="http://schemas.microsoft.com/office/drawing/2010/main" xmlns="">
                 <a:solidFill>
                   <a:srgbClr val="FFFFFF"/>
                 </a:solidFill>
               </a14:hiddenFill>
             </a:ext>
             <a:ext uri="{91240B29-F687-4f45-9708-019B960494DF}">
-              <a14:hiddenLine xmlns="" xmlns:a14="http://schemas.microsoft.com/office/drawing/2010/main" w="9525" cap="flat">
+              <a14:hiddenLine xmlns:a14="http://schemas.microsoft.com/office/drawing/2010/main" xmlns="" w="9525" cap="flat">
                 <a:solidFill>
                   <a:srgbClr val="000000"/>
                 </a:solidFill>
@@ -21652,7 +21652,7 @@
               </a14:hiddenLine>
             </a:ext>
             <a:ext uri="{AF507438-7753-43e0-B8FC-AC1667EBCBE1}">
-              <a14:hiddenEffects xmlns="" xmlns:a14="http://schemas.microsoft.com/office/drawing/2010/main">
+              <a14:hiddenEffects xmlns:a14="http://schemas.microsoft.com/office/drawing/2010/main" xmlns="">
                 <a:effectLst>
                   <a:outerShdw blurRad="63500" dist="38099" dir="2700000" algn="ctr" rotWithShape="0">
                     <a:srgbClr val="000000">
@@ -21702,14 +21702,14 @@
           <a:effectLst/>
           <a:extLst>
             <a:ext uri="{909E8E84-426E-40dd-AFC4-6F175D3DCCD1}">
-              <a14:hiddenFill xmlns="" xmlns:a14="http://schemas.microsoft.com/office/drawing/2010/main">
+              <a14:hiddenFill xmlns:a14="http://schemas.microsoft.com/office/drawing/2010/main" xmlns="">
                 <a:solidFill>
                   <a:srgbClr val="FFFFFF"/>
                 </a:solidFill>
               </a14:hiddenFill>
             </a:ext>
             <a:ext uri="{91240B29-F687-4f45-9708-019B960494DF}">
-              <a14:hiddenLine xmlns="" xmlns:a14="http://schemas.microsoft.com/office/drawing/2010/main" w="9525" cap="flat">
+              <a14:hiddenLine xmlns:a14="http://schemas.microsoft.com/office/drawing/2010/main" xmlns="" w="9525" cap="flat">
                 <a:solidFill>
                   <a:srgbClr val="000000"/>
                 </a:solidFill>
@@ -21719,7 +21719,7 @@
               </a14:hiddenLine>
             </a:ext>
             <a:ext uri="{AF507438-7753-43e0-B8FC-AC1667EBCBE1}">
-              <a14:hiddenEffects xmlns="" xmlns:a14="http://schemas.microsoft.com/office/drawing/2010/main">
+              <a14:hiddenEffects xmlns:a14="http://schemas.microsoft.com/office/drawing/2010/main" xmlns="">
                 <a:effectLst>
                   <a:outerShdw blurRad="63500" dist="38099" dir="2700000" algn="ctr" rotWithShape="0">
                     <a:srgbClr val="000000">
@@ -21769,14 +21769,14 @@
           <a:effectLst/>
           <a:extLst>
             <a:ext uri="{909E8E84-426E-40dd-AFC4-6F175D3DCCD1}">
-              <a14:hiddenFill xmlns="" xmlns:a14="http://schemas.microsoft.com/office/drawing/2010/main">
+              <a14:hiddenFill xmlns:a14="http://schemas.microsoft.com/office/drawing/2010/main" xmlns="">
                 <a:solidFill>
                   <a:srgbClr val="FFFFFF"/>
                 </a:solidFill>
               </a14:hiddenFill>
             </a:ext>
             <a:ext uri="{91240B29-F687-4f45-9708-019B960494DF}">
-              <a14:hiddenLine xmlns="" xmlns:a14="http://schemas.microsoft.com/office/drawing/2010/main" w="9525" cap="flat">
+              <a14:hiddenLine xmlns:a14="http://schemas.microsoft.com/office/drawing/2010/main" xmlns="" w="9525" cap="flat">
                 <a:solidFill>
                   <a:srgbClr val="000000"/>
                 </a:solidFill>
@@ -21786,7 +21786,7 @@
               </a14:hiddenLine>
             </a:ext>
             <a:ext uri="{AF507438-7753-43e0-B8FC-AC1667EBCBE1}">
-              <a14:hiddenEffects xmlns="" xmlns:a14="http://schemas.microsoft.com/office/drawing/2010/main">
+              <a14:hiddenEffects xmlns:a14="http://schemas.microsoft.com/office/drawing/2010/main" xmlns="">
                 <a:effectLst>
                   <a:outerShdw blurRad="63500" dist="38099" dir="2700000" algn="ctr" rotWithShape="0">
                     <a:srgbClr val="000000">
@@ -21836,14 +21836,14 @@
           <a:effectLst/>
           <a:extLst>
             <a:ext uri="{909E8E84-426E-40dd-AFC4-6F175D3DCCD1}">
-              <a14:hiddenFill xmlns="" xmlns:a14="http://schemas.microsoft.com/office/drawing/2010/main">
+              <a14:hiddenFill xmlns:a14="http://schemas.microsoft.com/office/drawing/2010/main" xmlns="">
                 <a:solidFill>
                   <a:srgbClr val="FFFFFF"/>
                 </a:solidFill>
               </a14:hiddenFill>
             </a:ext>
             <a:ext uri="{91240B29-F687-4f45-9708-019B960494DF}">
-              <a14:hiddenLine xmlns="" xmlns:a14="http://schemas.microsoft.com/office/drawing/2010/main" w="9525" cap="flat">
+              <a14:hiddenLine xmlns:a14="http://schemas.microsoft.com/office/drawing/2010/main" xmlns="" w="9525" cap="flat">
                 <a:solidFill>
                   <a:srgbClr val="000000"/>
                 </a:solidFill>
@@ -21853,7 +21853,7 @@
               </a14:hiddenLine>
             </a:ext>
             <a:ext uri="{AF507438-7753-43e0-B8FC-AC1667EBCBE1}">
-              <a14:hiddenEffects xmlns="" xmlns:a14="http://schemas.microsoft.com/office/drawing/2010/main">
+              <a14:hiddenEffects xmlns:a14="http://schemas.microsoft.com/office/drawing/2010/main" xmlns="">
                 <a:effectLst>
                   <a:outerShdw blurRad="63500" dist="38099" dir="2700000" algn="ctr" rotWithShape="0">
                     <a:srgbClr val="000000">
@@ -21903,14 +21903,14 @@
           <a:effectLst/>
           <a:extLst>
             <a:ext uri="{909E8E84-426E-40dd-AFC4-6F175D3DCCD1}">
-              <a14:hiddenFill xmlns="" xmlns:a14="http://schemas.microsoft.com/office/drawing/2010/main">
+              <a14:hiddenFill xmlns:a14="http://schemas.microsoft.com/office/drawing/2010/main" xmlns="">
                 <a:solidFill>
                   <a:srgbClr val="FFFFFF"/>
                 </a:solidFill>
               </a14:hiddenFill>
             </a:ext>
             <a:ext uri="{91240B29-F687-4f45-9708-019B960494DF}">
-              <a14:hiddenLine xmlns="" xmlns:a14="http://schemas.microsoft.com/office/drawing/2010/main" w="9525" cap="flat">
+              <a14:hiddenLine xmlns:a14="http://schemas.microsoft.com/office/drawing/2010/main" xmlns="" w="9525" cap="flat">
                 <a:solidFill>
                   <a:srgbClr val="000000"/>
                 </a:solidFill>
@@ -21920,7 +21920,7 @@
               </a14:hiddenLine>
             </a:ext>
             <a:ext uri="{AF507438-7753-43e0-B8FC-AC1667EBCBE1}">
-              <a14:hiddenEffects xmlns="" xmlns:a14="http://schemas.microsoft.com/office/drawing/2010/main">
+              <a14:hiddenEffects xmlns:a14="http://schemas.microsoft.com/office/drawing/2010/main" xmlns="">
                 <a:effectLst>
                   <a:outerShdw blurRad="63500" dist="38099" dir="2700000" algn="ctr" rotWithShape="0">
                     <a:srgbClr val="000000">
@@ -21970,14 +21970,14 @@
           <a:effectLst/>
           <a:extLst>
             <a:ext uri="{909E8E84-426E-40dd-AFC4-6F175D3DCCD1}">
-              <a14:hiddenFill xmlns="" xmlns:a14="http://schemas.microsoft.com/office/drawing/2010/main">
+              <a14:hiddenFill xmlns:a14="http://schemas.microsoft.com/office/drawing/2010/main" xmlns="">
                 <a:solidFill>
                   <a:srgbClr val="FFFFFF"/>
                 </a:solidFill>
               </a14:hiddenFill>
             </a:ext>
             <a:ext uri="{91240B29-F687-4f45-9708-019B960494DF}">
-              <a14:hiddenLine xmlns="" xmlns:a14="http://schemas.microsoft.com/office/drawing/2010/main" w="9525" cap="flat">
+              <a14:hiddenLine xmlns:a14="http://schemas.microsoft.com/office/drawing/2010/main" xmlns="" w="9525" cap="flat">
                 <a:solidFill>
                   <a:srgbClr val="000000"/>
                 </a:solidFill>
@@ -21987,7 +21987,7 @@
               </a14:hiddenLine>
             </a:ext>
             <a:ext uri="{AF507438-7753-43e0-B8FC-AC1667EBCBE1}">
-              <a14:hiddenEffects xmlns="" xmlns:a14="http://schemas.microsoft.com/office/drawing/2010/main">
+              <a14:hiddenEffects xmlns:a14="http://schemas.microsoft.com/office/drawing/2010/main" xmlns="">
                 <a:effectLst>
                   <a:outerShdw blurRad="63500" dist="38099" dir="2700000" algn="ctr" rotWithShape="0">
                     <a:srgbClr val="000000">
@@ -22037,14 +22037,14 @@
           <a:effectLst/>
           <a:extLst>
             <a:ext uri="{909E8E84-426E-40dd-AFC4-6F175D3DCCD1}">
-              <a14:hiddenFill xmlns="" xmlns:a14="http://schemas.microsoft.com/office/drawing/2010/main">
+              <a14:hiddenFill xmlns:a14="http://schemas.microsoft.com/office/drawing/2010/main" xmlns="">
                 <a:solidFill>
                   <a:srgbClr val="FFFFFF"/>
                 </a:solidFill>
               </a14:hiddenFill>
             </a:ext>
             <a:ext uri="{91240B29-F687-4f45-9708-019B960494DF}">
-              <a14:hiddenLine xmlns="" xmlns:a14="http://schemas.microsoft.com/office/drawing/2010/main" w="9525" cap="flat">
+              <a14:hiddenLine xmlns:a14="http://schemas.microsoft.com/office/drawing/2010/main" xmlns="" w="9525" cap="flat">
                 <a:solidFill>
                   <a:srgbClr val="000000"/>
                 </a:solidFill>
@@ -22054,7 +22054,7 @@
               </a14:hiddenLine>
             </a:ext>
             <a:ext uri="{AF507438-7753-43e0-B8FC-AC1667EBCBE1}">
-              <a14:hiddenEffects xmlns="" xmlns:a14="http://schemas.microsoft.com/office/drawing/2010/main">
+              <a14:hiddenEffects xmlns:a14="http://schemas.microsoft.com/office/drawing/2010/main" xmlns="">
                 <a:effectLst>
                   <a:outerShdw blurRad="63500" dist="38099" dir="2700000" algn="ctr" rotWithShape="0">
                     <a:srgbClr val="000000">
@@ -22104,14 +22104,14 @@
           <a:effectLst/>
           <a:extLst>
             <a:ext uri="{909E8E84-426E-40dd-AFC4-6F175D3DCCD1}">
-              <a14:hiddenFill xmlns="" xmlns:a14="http://schemas.microsoft.com/office/drawing/2010/main">
+              <a14:hiddenFill xmlns:a14="http://schemas.microsoft.com/office/drawing/2010/main" xmlns="">
                 <a:solidFill>
                   <a:srgbClr val="FFFFFF"/>
                 </a:solidFill>
               </a14:hiddenFill>
             </a:ext>
             <a:ext uri="{91240B29-F687-4f45-9708-019B960494DF}">
-              <a14:hiddenLine xmlns="" xmlns:a14="http://schemas.microsoft.com/office/drawing/2010/main" w="9525" cap="flat">
+              <a14:hiddenLine xmlns:a14="http://schemas.microsoft.com/office/drawing/2010/main" xmlns="" w="9525" cap="flat">
                 <a:solidFill>
                   <a:srgbClr val="000000"/>
                 </a:solidFill>
@@ -22121,7 +22121,7 @@
               </a14:hiddenLine>
             </a:ext>
             <a:ext uri="{AF507438-7753-43e0-B8FC-AC1667EBCBE1}">
-              <a14:hiddenEffects xmlns="" xmlns:a14="http://schemas.microsoft.com/office/drawing/2010/main">
+              <a14:hiddenEffects xmlns:a14="http://schemas.microsoft.com/office/drawing/2010/main" xmlns="">
                 <a:effectLst>
                   <a:outerShdw blurRad="63500" dist="38099" dir="2700000" algn="ctr" rotWithShape="0">
                     <a:srgbClr val="000000">
@@ -22366,7 +22366,7 @@
           <a:effectLst/>
           <a:extLst>
             <a:ext uri="{AF507438-7753-43e0-B8FC-AC1667EBCBE1}">
-              <a14:hiddenEffects xmlns="" xmlns:a14="http://schemas.microsoft.com/office/drawing/2010/main">
+              <a14:hiddenEffects xmlns:a14="http://schemas.microsoft.com/office/drawing/2010/main" xmlns="">
                 <a:effectLst>
                   <a:outerShdw blurRad="63500" dist="38099" dir="2700000" algn="ctr" rotWithShape="0">
                     <a:srgbClr val="000000">
@@ -22452,7 +22452,7 @@
           <a:effectLst/>
           <a:extLst>
             <a:ext uri="{AF507438-7753-43e0-B8FC-AC1667EBCBE1}">
-              <a14:hiddenEffects xmlns="" xmlns:a14="http://schemas.microsoft.com/office/drawing/2010/main">
+              <a14:hiddenEffects xmlns:a14="http://schemas.microsoft.com/office/drawing/2010/main" xmlns="">
                 <a:effectLst>
                   <a:outerShdw blurRad="63500" dist="38099" dir="2700000" algn="ctr" rotWithShape="0">
                     <a:srgbClr val="000000">
@@ -22508,7 +22508,7 @@
           <a:effectLst/>
           <a:extLst>
             <a:ext uri="{AF507438-7753-43e0-B8FC-AC1667EBCBE1}">
-              <a14:hiddenEffects xmlns="" xmlns:a14="http://schemas.microsoft.com/office/drawing/2010/main">
+              <a14:hiddenEffects xmlns:a14="http://schemas.microsoft.com/office/drawing/2010/main" xmlns="">
                 <a:effectLst>
                   <a:outerShdw blurRad="63500" dist="38099" dir="2700000" algn="ctr" rotWithShape="0">
                     <a:srgbClr val="000000">
@@ -22564,7 +22564,7 @@
           <a:effectLst/>
           <a:extLst>
             <a:ext uri="{AF507438-7753-43e0-B8FC-AC1667EBCBE1}">
-              <a14:hiddenEffects xmlns="" xmlns:a14="http://schemas.microsoft.com/office/drawing/2010/main">
+              <a14:hiddenEffects xmlns:a14="http://schemas.microsoft.com/office/drawing/2010/main" xmlns="">
                 <a:effectLst>
                   <a:outerShdw blurRad="63500" dist="38099" dir="2700000" algn="ctr" rotWithShape="0">
                     <a:srgbClr val="000000">
@@ -22620,7 +22620,7 @@
           <a:effectLst/>
           <a:extLst>
             <a:ext uri="{AF507438-7753-43e0-B8FC-AC1667EBCBE1}">
-              <a14:hiddenEffects xmlns="" xmlns:a14="http://schemas.microsoft.com/office/drawing/2010/main">
+              <a14:hiddenEffects xmlns:a14="http://schemas.microsoft.com/office/drawing/2010/main" xmlns="">
                 <a:effectLst>
                   <a:outerShdw blurRad="63500" dist="38099" dir="2700000" algn="ctr" rotWithShape="0">
                     <a:srgbClr val="000000">
@@ -22676,7 +22676,7 @@
           <a:effectLst/>
           <a:extLst>
             <a:ext uri="{AF507438-7753-43e0-B8FC-AC1667EBCBE1}">
-              <a14:hiddenEffects xmlns="" xmlns:a14="http://schemas.microsoft.com/office/drawing/2010/main">
+              <a14:hiddenEffects xmlns:a14="http://schemas.microsoft.com/office/drawing/2010/main" xmlns="">
                 <a:effectLst>
                   <a:outerShdw blurRad="63500" dist="38099" dir="2700000" algn="ctr" rotWithShape="0">
                     <a:srgbClr val="000000">
@@ -22732,7 +22732,7 @@
           <a:effectLst/>
           <a:extLst>
             <a:ext uri="{AF507438-7753-43e0-B8FC-AC1667EBCBE1}">
-              <a14:hiddenEffects xmlns="" xmlns:a14="http://schemas.microsoft.com/office/drawing/2010/main">
+              <a14:hiddenEffects xmlns:a14="http://schemas.microsoft.com/office/drawing/2010/main" xmlns="">
                 <a:effectLst>
                   <a:outerShdw blurRad="63500" dist="38099" dir="2700000" algn="ctr" rotWithShape="0">
                     <a:srgbClr val="000000">
@@ -22788,7 +22788,7 @@
           <a:effectLst/>
           <a:extLst>
             <a:ext uri="{AF507438-7753-43e0-B8FC-AC1667EBCBE1}">
-              <a14:hiddenEffects xmlns="" xmlns:a14="http://schemas.microsoft.com/office/drawing/2010/main">
+              <a14:hiddenEffects xmlns:a14="http://schemas.microsoft.com/office/drawing/2010/main" xmlns="">
                 <a:effectLst>
                   <a:outerShdw blurRad="63500" dist="38099" dir="2700000" algn="ctr" rotWithShape="0">
                     <a:srgbClr val="000000">
@@ -22844,7 +22844,7 @@
           <a:effectLst/>
           <a:extLst>
             <a:ext uri="{AF507438-7753-43e0-B8FC-AC1667EBCBE1}">
-              <a14:hiddenEffects xmlns="" xmlns:a14="http://schemas.microsoft.com/office/drawing/2010/main">
+              <a14:hiddenEffects xmlns:a14="http://schemas.microsoft.com/office/drawing/2010/main" xmlns="">
                 <a:effectLst>
                   <a:outerShdw blurRad="63500" dist="38099" dir="2700000" algn="ctr" rotWithShape="0">
                     <a:srgbClr val="000000">
@@ -22900,7 +22900,7 @@
           <a:effectLst/>
           <a:extLst>
             <a:ext uri="{AF507438-7753-43e0-B8FC-AC1667EBCBE1}">
-              <a14:hiddenEffects xmlns="" xmlns:a14="http://schemas.microsoft.com/office/drawing/2010/main">
+              <a14:hiddenEffects xmlns:a14="http://schemas.microsoft.com/office/drawing/2010/main" xmlns="">
                 <a:effectLst>
                   <a:outerShdw blurRad="63500" dist="38099" dir="2700000" algn="ctr" rotWithShape="0">
                     <a:srgbClr val="000000">
@@ -22956,7 +22956,7 @@
           <a:effectLst/>
           <a:extLst>
             <a:ext uri="{AF507438-7753-43e0-B8FC-AC1667EBCBE1}">
-              <a14:hiddenEffects xmlns="" xmlns:a14="http://schemas.microsoft.com/office/drawing/2010/main">
+              <a14:hiddenEffects xmlns:a14="http://schemas.microsoft.com/office/drawing/2010/main" xmlns="">
                 <a:effectLst>
                   <a:outerShdw blurRad="63500" dist="38099" dir="2700000" algn="ctr" rotWithShape="0">
                     <a:srgbClr val="000000">
@@ -23012,7 +23012,7 @@
           <a:effectLst/>
           <a:extLst>
             <a:ext uri="{AF507438-7753-43e0-B8FC-AC1667EBCBE1}">
-              <a14:hiddenEffects xmlns="" xmlns:a14="http://schemas.microsoft.com/office/drawing/2010/main">
+              <a14:hiddenEffects xmlns:a14="http://schemas.microsoft.com/office/drawing/2010/main" xmlns="">
                 <a:effectLst>
                   <a:outerShdw blurRad="63500" dist="38099" dir="2700000" algn="ctr" rotWithShape="0">
                     <a:srgbClr val="000000">
@@ -23068,7 +23068,7 @@
           <a:effectLst/>
           <a:extLst>
             <a:ext uri="{AF507438-7753-43e0-B8FC-AC1667EBCBE1}">
-              <a14:hiddenEffects xmlns="" xmlns:a14="http://schemas.microsoft.com/office/drawing/2010/main">
+              <a14:hiddenEffects xmlns:a14="http://schemas.microsoft.com/office/drawing/2010/main" xmlns="">
                 <a:effectLst>
                   <a:outerShdw blurRad="63500" dist="38099" dir="2700000" algn="ctr" rotWithShape="0">
                     <a:srgbClr val="000000">
@@ -23124,7 +23124,7 @@
           <a:effectLst/>
           <a:extLst>
             <a:ext uri="{AF507438-7753-43e0-B8FC-AC1667EBCBE1}">
-              <a14:hiddenEffects xmlns="" xmlns:a14="http://schemas.microsoft.com/office/drawing/2010/main">
+              <a14:hiddenEffects xmlns:a14="http://schemas.microsoft.com/office/drawing/2010/main" xmlns="">
                 <a:effectLst>
                   <a:outerShdw blurRad="63500" dist="38099" dir="2700000" algn="ctr" rotWithShape="0">
                     <a:srgbClr val="000000">
@@ -23180,7 +23180,7 @@
           <a:effectLst/>
           <a:extLst>
             <a:ext uri="{AF507438-7753-43e0-B8FC-AC1667EBCBE1}">
-              <a14:hiddenEffects xmlns="" xmlns:a14="http://schemas.microsoft.com/office/drawing/2010/main">
+              <a14:hiddenEffects xmlns:a14="http://schemas.microsoft.com/office/drawing/2010/main" xmlns="">
                 <a:effectLst>
                   <a:outerShdw blurRad="63500" dist="38099" dir="2700000" algn="ctr" rotWithShape="0">
                     <a:srgbClr val="000000">
@@ -23236,7 +23236,7 @@
           <a:effectLst/>
           <a:extLst>
             <a:ext uri="{AF507438-7753-43e0-B8FC-AC1667EBCBE1}">
-              <a14:hiddenEffects xmlns="" xmlns:a14="http://schemas.microsoft.com/office/drawing/2010/main">
+              <a14:hiddenEffects xmlns:a14="http://schemas.microsoft.com/office/drawing/2010/main" xmlns="">
                 <a:effectLst>
                   <a:outerShdw blurRad="63500" dist="38099" dir="2700000" algn="ctr" rotWithShape="0">
                     <a:srgbClr val="000000">
@@ -23292,7 +23292,7 @@
           <a:effectLst/>
           <a:extLst>
             <a:ext uri="{AF507438-7753-43e0-B8FC-AC1667EBCBE1}">
-              <a14:hiddenEffects xmlns="" xmlns:a14="http://schemas.microsoft.com/office/drawing/2010/main">
+              <a14:hiddenEffects xmlns:a14="http://schemas.microsoft.com/office/drawing/2010/main" xmlns="">
                 <a:effectLst>
                   <a:outerShdw blurRad="63500" dist="38099" dir="2700000" algn="ctr" rotWithShape="0">
                     <a:srgbClr val="000000">
@@ -23348,7 +23348,7 @@
           <a:effectLst/>
           <a:extLst>
             <a:ext uri="{AF507438-7753-43e0-B8FC-AC1667EBCBE1}">
-              <a14:hiddenEffects xmlns="" xmlns:a14="http://schemas.microsoft.com/office/drawing/2010/main">
+              <a14:hiddenEffects xmlns:a14="http://schemas.microsoft.com/office/drawing/2010/main" xmlns="">
                 <a:effectLst>
                   <a:outerShdw blurRad="63500" dist="38099" dir="2700000" algn="ctr" rotWithShape="0">
                     <a:srgbClr val="000000">
@@ -23404,7 +23404,7 @@
           <a:effectLst/>
           <a:extLst>
             <a:ext uri="{AF507438-7753-43e0-B8FC-AC1667EBCBE1}">
-              <a14:hiddenEffects xmlns="" xmlns:a14="http://schemas.microsoft.com/office/drawing/2010/main">
+              <a14:hiddenEffects xmlns:a14="http://schemas.microsoft.com/office/drawing/2010/main" xmlns="">
                 <a:effectLst>
                   <a:outerShdw blurRad="63500" dist="38099" dir="2700000" algn="ctr" rotWithShape="0">
                     <a:srgbClr val="000000">
@@ -23460,7 +23460,7 @@
           <a:effectLst/>
           <a:extLst>
             <a:ext uri="{AF507438-7753-43e0-B8FC-AC1667EBCBE1}">
-              <a14:hiddenEffects xmlns="" xmlns:a14="http://schemas.microsoft.com/office/drawing/2010/main">
+              <a14:hiddenEffects xmlns:a14="http://schemas.microsoft.com/office/drawing/2010/main" xmlns="">
                 <a:effectLst>
                   <a:outerShdw blurRad="63500" dist="38099" dir="2700000" algn="ctr" rotWithShape="0">
                     <a:srgbClr val="000000">
@@ -23556,14 +23556,14 @@
           <a:effectLst/>
           <a:extLst>
             <a:ext uri="{909E8E84-426E-40dd-AFC4-6F175D3DCCD1}">
-              <a14:hiddenFill xmlns="" xmlns:a14="http://schemas.microsoft.com/office/drawing/2010/main">
+              <a14:hiddenFill xmlns:a14="http://schemas.microsoft.com/office/drawing/2010/main" xmlns="">
                 <a:solidFill>
                   <a:srgbClr val="FFFFFF"/>
                 </a:solidFill>
               </a14:hiddenFill>
             </a:ext>
             <a:ext uri="{91240B29-F687-4f45-9708-019B960494DF}">
-              <a14:hiddenLine xmlns="" xmlns:a14="http://schemas.microsoft.com/office/drawing/2010/main" w="9525" cap="flat">
+              <a14:hiddenLine xmlns:a14="http://schemas.microsoft.com/office/drawing/2010/main" xmlns="" w="9525" cap="flat">
                 <a:solidFill>
                   <a:srgbClr val="000000"/>
                 </a:solidFill>
@@ -23573,7 +23573,7 @@
               </a14:hiddenLine>
             </a:ext>
             <a:ext uri="{AF507438-7753-43e0-B8FC-AC1667EBCBE1}">
-              <a14:hiddenEffects xmlns="" xmlns:a14="http://schemas.microsoft.com/office/drawing/2010/main">
+              <a14:hiddenEffects xmlns:a14="http://schemas.microsoft.com/office/drawing/2010/main" xmlns="">
                 <a:effectLst>
                   <a:outerShdw blurRad="63500" dist="38099" dir="2700000" algn="ctr" rotWithShape="0">
                     <a:srgbClr val="000000">
@@ -23802,14 +23802,14 @@
           <a:effectLst/>
           <a:extLst>
             <a:ext uri="{909E8E84-426E-40dd-AFC4-6F175D3DCCD1}">
-              <a14:hiddenFill xmlns="" xmlns:a14="http://schemas.microsoft.com/office/drawing/2010/main">
+              <a14:hiddenFill xmlns:a14="http://schemas.microsoft.com/office/drawing/2010/main" xmlns="">
                 <a:solidFill>
                   <a:srgbClr val="FFFFFF"/>
                 </a:solidFill>
               </a14:hiddenFill>
             </a:ext>
             <a:ext uri="{91240B29-F687-4f45-9708-019B960494DF}">
-              <a14:hiddenLine xmlns="" xmlns:a14="http://schemas.microsoft.com/office/drawing/2010/main" w="9525" cap="flat">
+              <a14:hiddenLine xmlns:a14="http://schemas.microsoft.com/office/drawing/2010/main" xmlns="" w="9525" cap="flat">
                 <a:solidFill>
                   <a:srgbClr val="000000"/>
                 </a:solidFill>
@@ -23819,7 +23819,7 @@
               </a14:hiddenLine>
             </a:ext>
             <a:ext uri="{AF507438-7753-43e0-B8FC-AC1667EBCBE1}">
-              <a14:hiddenEffects xmlns="" xmlns:a14="http://schemas.microsoft.com/office/drawing/2010/main">
+              <a14:hiddenEffects xmlns:a14="http://schemas.microsoft.com/office/drawing/2010/main" xmlns="">
                 <a:effectLst>
                   <a:outerShdw blurRad="63500" dist="38099" dir="2700000" algn="ctr" rotWithShape="0">
                     <a:srgbClr val="000000">
@@ -23869,14 +23869,14 @@
           <a:effectLst/>
           <a:extLst>
             <a:ext uri="{909E8E84-426E-40dd-AFC4-6F175D3DCCD1}">
-              <a14:hiddenFill xmlns="" xmlns:a14="http://schemas.microsoft.com/office/drawing/2010/main">
+              <a14:hiddenFill xmlns:a14="http://schemas.microsoft.com/office/drawing/2010/main" xmlns="">
                 <a:solidFill>
                   <a:srgbClr val="FFFFFF"/>
                 </a:solidFill>
               </a14:hiddenFill>
             </a:ext>
             <a:ext uri="{91240B29-F687-4f45-9708-019B960494DF}">
-              <a14:hiddenLine xmlns="" xmlns:a14="http://schemas.microsoft.com/office/drawing/2010/main" w="9525" cap="flat">
+              <a14:hiddenLine xmlns:a14="http://schemas.microsoft.com/office/drawing/2010/main" xmlns="" w="9525" cap="flat">
                 <a:solidFill>
                   <a:srgbClr val="000000"/>
                 </a:solidFill>
@@ -23886,7 +23886,7 @@
               </a14:hiddenLine>
             </a:ext>
             <a:ext uri="{AF507438-7753-43e0-B8FC-AC1667EBCBE1}">
-              <a14:hiddenEffects xmlns="" xmlns:a14="http://schemas.microsoft.com/office/drawing/2010/main">
+              <a14:hiddenEffects xmlns:a14="http://schemas.microsoft.com/office/drawing/2010/main" xmlns="">
                 <a:effectLst>
                   <a:outerShdw blurRad="63500" dist="38099" dir="2700000" algn="ctr" rotWithShape="0">
                     <a:srgbClr val="000000">
@@ -23943,7 +23943,7 @@
           <a:effectLst/>
           <a:extLst>
             <a:ext uri="{AF507438-7753-43e0-B8FC-AC1667EBCBE1}">
-              <a14:hiddenEffects xmlns="" xmlns:a14="http://schemas.microsoft.com/office/drawing/2010/main">
+              <a14:hiddenEffects xmlns:a14="http://schemas.microsoft.com/office/drawing/2010/main" xmlns="">
                 <a:effectLst>
                   <a:outerShdw blurRad="63500" dist="38099" dir="2700000" algn="ctr" rotWithShape="0">
                     <a:srgbClr val="000000">
@@ -23993,7 +23993,7 @@
           <a:effectLst/>
           <a:extLst>
             <a:ext uri="{AF507438-7753-43e0-B8FC-AC1667EBCBE1}">
-              <a14:hiddenEffects xmlns="" xmlns:a14="http://schemas.microsoft.com/office/drawing/2010/main">
+              <a14:hiddenEffects xmlns:a14="http://schemas.microsoft.com/office/drawing/2010/main" xmlns="">
                 <a:effectLst>
                   <a:outerShdw blurRad="63500" dist="38099" dir="2700000" algn="ctr" rotWithShape="0">
                     <a:srgbClr val="000000">
@@ -24036,14 +24036,14 @@
           <a:effectLst/>
           <a:extLst>
             <a:ext uri="{909E8E84-426E-40dd-AFC4-6F175D3DCCD1}">
-              <a14:hiddenFill xmlns="" xmlns:a14="http://schemas.microsoft.com/office/drawing/2010/main">
+              <a14:hiddenFill xmlns:a14="http://schemas.microsoft.com/office/drawing/2010/main" xmlns="">
                 <a:solidFill>
                   <a:srgbClr val="FFFFFF"/>
                 </a:solidFill>
               </a14:hiddenFill>
             </a:ext>
             <a:ext uri="{91240B29-F687-4f45-9708-019B960494DF}">
-              <a14:hiddenLine xmlns="" xmlns:a14="http://schemas.microsoft.com/office/drawing/2010/main" w="9525" cap="flat">
+              <a14:hiddenLine xmlns:a14="http://schemas.microsoft.com/office/drawing/2010/main" xmlns="" w="9525" cap="flat">
                 <a:solidFill>
                   <a:srgbClr val="000000"/>
                 </a:solidFill>
@@ -24053,7 +24053,7 @@
               </a14:hiddenLine>
             </a:ext>
             <a:ext uri="{AF507438-7753-43e0-B8FC-AC1667EBCBE1}">
-              <a14:hiddenEffects xmlns="" xmlns:a14="http://schemas.microsoft.com/office/drawing/2010/main">
+              <a14:hiddenEffects xmlns:a14="http://schemas.microsoft.com/office/drawing/2010/main" xmlns="">
                 <a:effectLst>
                   <a:outerShdw blurRad="63500" dist="38099" dir="2700000" algn="ctr" rotWithShape="0">
                     <a:srgbClr val="000000">
@@ -24110,7 +24110,7 @@
           <a:effectLst/>
           <a:extLst>
             <a:ext uri="{AF507438-7753-43e0-B8FC-AC1667EBCBE1}">
-              <a14:hiddenEffects xmlns="" xmlns:a14="http://schemas.microsoft.com/office/drawing/2010/main">
+              <a14:hiddenEffects xmlns:a14="http://schemas.microsoft.com/office/drawing/2010/main" xmlns="">
                 <a:effectLst>
                   <a:outerShdw blurRad="63500" dist="38099" dir="2700000" algn="ctr" rotWithShape="0">
                     <a:srgbClr val="000000">
@@ -24153,14 +24153,14 @@
           <a:effectLst/>
           <a:extLst>
             <a:ext uri="{909E8E84-426E-40dd-AFC4-6F175D3DCCD1}">
-              <a14:hiddenFill xmlns="" xmlns:a14="http://schemas.microsoft.com/office/drawing/2010/main">
+              <a14:hiddenFill xmlns:a14="http://schemas.microsoft.com/office/drawing/2010/main" xmlns="">
                 <a:solidFill>
                   <a:srgbClr val="FFFFFF"/>
                 </a:solidFill>
               </a14:hiddenFill>
             </a:ext>
             <a:ext uri="{91240B29-F687-4f45-9708-019B960494DF}">
-              <a14:hiddenLine xmlns="" xmlns:a14="http://schemas.microsoft.com/office/drawing/2010/main" w="9525" cap="flat">
+              <a14:hiddenLine xmlns:a14="http://schemas.microsoft.com/office/drawing/2010/main" xmlns="" w="9525" cap="flat">
                 <a:solidFill>
                   <a:srgbClr val="000000"/>
                 </a:solidFill>
@@ -24170,7 +24170,7 @@
               </a14:hiddenLine>
             </a:ext>
             <a:ext uri="{AF507438-7753-43e0-B8FC-AC1667EBCBE1}">
-              <a14:hiddenEffects xmlns="" xmlns:a14="http://schemas.microsoft.com/office/drawing/2010/main">
+              <a14:hiddenEffects xmlns:a14="http://schemas.microsoft.com/office/drawing/2010/main" xmlns="">
                 <a:effectLst>
                   <a:outerShdw blurRad="63500" dist="38099" dir="2700000" algn="ctr" rotWithShape="0">
                     <a:srgbClr val="000000">
@@ -24229,7 +24229,7 @@
           <a:effectLst/>
           <a:extLst>
             <a:ext uri="{AF507438-7753-43e0-B8FC-AC1667EBCBE1}">
-              <a14:hiddenEffects xmlns="" xmlns:a14="http://schemas.microsoft.com/office/drawing/2010/main">
+              <a14:hiddenEffects xmlns:a14="http://schemas.microsoft.com/office/drawing/2010/main" xmlns="">
                 <a:effectLst>
                   <a:outerShdw blurRad="63500" dist="38099" dir="2700000" algn="ctr" rotWithShape="0">
                     <a:srgbClr val="000000">
@@ -24281,7 +24281,7 @@
           <a:effectLst/>
           <a:extLst>
             <a:ext uri="{AF507438-7753-43e0-B8FC-AC1667EBCBE1}">
-              <a14:hiddenEffects xmlns="" xmlns:a14="http://schemas.microsoft.com/office/drawing/2010/main">
+              <a14:hiddenEffects xmlns:a14="http://schemas.microsoft.com/office/drawing/2010/main" xmlns="">
                 <a:effectLst>
                   <a:outerShdw blurRad="63500" dist="38099" dir="2700000" algn="ctr" rotWithShape="0">
                     <a:srgbClr val="000000">
@@ -24331,14 +24331,14 @@
           <a:effectLst/>
           <a:extLst>
             <a:ext uri="{909E8E84-426E-40dd-AFC4-6F175D3DCCD1}">
-              <a14:hiddenFill xmlns="" xmlns:a14="http://schemas.microsoft.com/office/drawing/2010/main">
+              <a14:hiddenFill xmlns:a14="http://schemas.microsoft.com/office/drawing/2010/main" xmlns="">
                 <a:solidFill>
                   <a:srgbClr val="FFFFFF"/>
                 </a:solidFill>
               </a14:hiddenFill>
             </a:ext>
             <a:ext uri="{AF507438-7753-43e0-B8FC-AC1667EBCBE1}">
-              <a14:hiddenEffects xmlns="" xmlns:a14="http://schemas.microsoft.com/office/drawing/2010/main">
+              <a14:hiddenEffects xmlns:a14="http://schemas.microsoft.com/office/drawing/2010/main" xmlns="">
                 <a:effectLst>
                   <a:outerShdw blurRad="63500" dist="38099" dir="2700000" algn="ctr" rotWithShape="0">
                     <a:srgbClr val="000000">
@@ -24390,7 +24390,7 @@
           <a:effectLst/>
           <a:extLst>
             <a:ext uri="{AF507438-7753-43e0-B8FC-AC1667EBCBE1}">
-              <a14:hiddenEffects xmlns="" xmlns:a14="http://schemas.microsoft.com/office/drawing/2010/main">
+              <a14:hiddenEffects xmlns:a14="http://schemas.microsoft.com/office/drawing/2010/main" xmlns="">
                 <a:effectLst>
                   <a:outerShdw blurRad="63500" dist="38099" dir="2700000" algn="ctr" rotWithShape="0">
                     <a:srgbClr val="000000">
@@ -24433,14 +24433,14 @@
           <a:effectLst/>
           <a:extLst>
             <a:ext uri="{909E8E84-426E-40dd-AFC4-6F175D3DCCD1}">
-              <a14:hiddenFill xmlns="" xmlns:a14="http://schemas.microsoft.com/office/drawing/2010/main">
+              <a14:hiddenFill xmlns:a14="http://schemas.microsoft.com/office/drawing/2010/main" xmlns="">
                 <a:solidFill>
                   <a:srgbClr val="FFFFFF"/>
                 </a:solidFill>
               </a14:hiddenFill>
             </a:ext>
             <a:ext uri="{91240B29-F687-4f45-9708-019B960494DF}">
-              <a14:hiddenLine xmlns="" xmlns:a14="http://schemas.microsoft.com/office/drawing/2010/main" w="9525" cap="flat">
+              <a14:hiddenLine xmlns:a14="http://schemas.microsoft.com/office/drawing/2010/main" xmlns="" w="9525" cap="flat">
                 <a:solidFill>
                   <a:srgbClr val="000000"/>
                 </a:solidFill>
@@ -24450,7 +24450,7 @@
               </a14:hiddenLine>
             </a:ext>
             <a:ext uri="{AF507438-7753-43e0-B8FC-AC1667EBCBE1}">
-              <a14:hiddenEffects xmlns="" xmlns:a14="http://schemas.microsoft.com/office/drawing/2010/main">
+              <a14:hiddenEffects xmlns:a14="http://schemas.microsoft.com/office/drawing/2010/main" xmlns="">
                 <a:effectLst>
                   <a:outerShdw blurRad="63500" dist="38099" dir="2700000" algn="ctr" rotWithShape="0">
                     <a:srgbClr val="000000">
@@ -24679,7 +24679,7 @@
           <a:effectLst/>
           <a:extLst>
             <a:ext uri="{AF507438-7753-43e0-B8FC-AC1667EBCBE1}">
-              <a14:hiddenEffects xmlns="" xmlns:a14="http://schemas.microsoft.com/office/drawing/2010/main">
+              <a14:hiddenEffects xmlns:a14="http://schemas.microsoft.com/office/drawing/2010/main" xmlns="">
                 <a:effectLst>
                   <a:outerShdw blurRad="63500" dist="38099" dir="2700000" algn="ctr" rotWithShape="0">
                     <a:srgbClr val="000000">
@@ -24722,14 +24722,14 @@
           <a:effectLst/>
           <a:extLst>
             <a:ext uri="{909E8E84-426E-40dd-AFC4-6F175D3DCCD1}">
-              <a14:hiddenFill xmlns="" xmlns:a14="http://schemas.microsoft.com/office/drawing/2010/main">
+              <a14:hiddenFill xmlns:a14="http://schemas.microsoft.com/office/drawing/2010/main" xmlns="">
                 <a:solidFill>
                   <a:srgbClr val="FFFFFF"/>
                 </a:solidFill>
               </a14:hiddenFill>
             </a:ext>
             <a:ext uri="{91240B29-F687-4f45-9708-019B960494DF}">
-              <a14:hiddenLine xmlns="" xmlns:a14="http://schemas.microsoft.com/office/drawing/2010/main" w="9525" cap="flat">
+              <a14:hiddenLine xmlns:a14="http://schemas.microsoft.com/office/drawing/2010/main" xmlns="" w="9525" cap="flat">
                 <a:solidFill>
                   <a:srgbClr val="000000"/>
                 </a:solidFill>
@@ -24739,7 +24739,7 @@
               </a14:hiddenLine>
             </a:ext>
             <a:ext uri="{AF507438-7753-43e0-B8FC-AC1667EBCBE1}">
-              <a14:hiddenEffects xmlns="" xmlns:a14="http://schemas.microsoft.com/office/drawing/2010/main">
+              <a14:hiddenEffects xmlns:a14="http://schemas.microsoft.com/office/drawing/2010/main" xmlns="">
                 <a:effectLst>
                   <a:outerShdw blurRad="63500" dist="38099" dir="2700000" algn="ctr" rotWithShape="0">
                     <a:srgbClr val="000000">
@@ -24973,12 +24973,12 @@
           <a:effectLst/>
           <a:extLst>
             <a:ext uri="{909E8E84-426E-40dd-AFC4-6F175D3DCCD1}">
-              <a14:hiddenFill xmlns="" xmlns:a14="http://schemas.microsoft.com/office/drawing/2010/main">
+              <a14:hiddenFill xmlns:a14="http://schemas.microsoft.com/office/drawing/2010/main" xmlns="">
                 <a:noFill/>
               </a14:hiddenFill>
             </a:ext>
             <a:ext uri="{AF507438-7753-43e0-B8FC-AC1667EBCBE1}">
-              <a14:hiddenEffects xmlns="" xmlns:a14="http://schemas.microsoft.com/office/drawing/2010/main">
+              <a14:hiddenEffects xmlns:a14="http://schemas.microsoft.com/office/drawing/2010/main" xmlns="">
                 <a:effectLst>
                   <a:outerShdw blurRad="63500" dist="38099" dir="2700000" algn="ctr" rotWithShape="0">
                     <a:srgbClr val="000000">
@@ -25021,14 +25021,14 @@
           <a:effectLst/>
           <a:extLst>
             <a:ext uri="{909E8E84-426E-40dd-AFC4-6F175D3DCCD1}">
-              <a14:hiddenFill xmlns="" xmlns:a14="http://schemas.microsoft.com/office/drawing/2010/main">
+              <a14:hiddenFill xmlns:a14="http://schemas.microsoft.com/office/drawing/2010/main" xmlns="">
                 <a:solidFill>
                   <a:srgbClr val="FFFFFF"/>
                 </a:solidFill>
               </a14:hiddenFill>
             </a:ext>
             <a:ext uri="{91240B29-F687-4f45-9708-019B960494DF}">
-              <a14:hiddenLine xmlns="" xmlns:a14="http://schemas.microsoft.com/office/drawing/2010/main" w="9525" cap="flat">
+              <a14:hiddenLine xmlns:a14="http://schemas.microsoft.com/office/drawing/2010/main" xmlns="" w="9525" cap="flat">
                 <a:solidFill>
                   <a:srgbClr val="000000"/>
                 </a:solidFill>
@@ -25038,7 +25038,7 @@
               </a14:hiddenLine>
             </a:ext>
             <a:ext uri="{AF507438-7753-43e0-B8FC-AC1667EBCBE1}">
-              <a14:hiddenEffects xmlns="" xmlns:a14="http://schemas.microsoft.com/office/drawing/2010/main">
+              <a14:hiddenEffects xmlns:a14="http://schemas.microsoft.com/office/drawing/2010/main" xmlns="">
                 <a:effectLst>
                   <a:outerShdw blurRad="63500" dist="38099" dir="2700000" algn="ctr" rotWithShape="0">
                     <a:srgbClr val="000000">
@@ -25229,9 +25229,10 @@
           </a:lstStyle>
           <a:p>
             <a:r>
-              <a:rPr lang="fr-FR" sz="800" dirty="0"/>
-              <a:t>bissas Xtra</a:t>
+              <a:rPr lang="fr-FR" sz="800"/>
+              <a:t>Sas XTRA</a:t>
             </a:r>
+            <a:endParaRPr lang="fr-FR" sz="800" dirty="0"/>
           </a:p>
         </p:txBody>
       </p:sp>
@@ -25265,7 +25266,7 @@
           <a:effectLst/>
           <a:extLst>
             <a:ext uri="{AF507438-7753-43e0-B8FC-AC1667EBCBE1}">
-              <a14:hiddenEffects xmlns="" xmlns:a14="http://schemas.microsoft.com/office/drawing/2010/main">
+              <a14:hiddenEffects xmlns:a14="http://schemas.microsoft.com/office/drawing/2010/main" xmlns="">
                 <a:effectLst>
                   <a:outerShdw blurRad="63500" dist="38099" dir="2700000" algn="ctr" rotWithShape="0">
                     <a:srgbClr val="000000">
@@ -25317,7 +25318,7 @@
           <a:effectLst/>
           <a:extLst>
             <a:ext uri="{AF507438-7753-43e0-B8FC-AC1667EBCBE1}">
-              <a14:hiddenEffects xmlns="" xmlns:a14="http://schemas.microsoft.com/office/drawing/2010/main">
+              <a14:hiddenEffects xmlns:a14="http://schemas.microsoft.com/office/drawing/2010/main" xmlns="">
                 <a:effectLst>
                   <a:outerShdw blurRad="63500" dist="38099" dir="2700000" algn="ctr" rotWithShape="0">
                     <a:srgbClr val="000000">
@@ -25369,7 +25370,7 @@
           <a:effectLst/>
           <a:extLst>
             <a:ext uri="{AF507438-7753-43e0-B8FC-AC1667EBCBE1}">
-              <a14:hiddenEffects xmlns="" xmlns:a14="http://schemas.microsoft.com/office/drawing/2010/main">
+              <a14:hiddenEffects xmlns:a14="http://schemas.microsoft.com/office/drawing/2010/main" xmlns="">
                 <a:effectLst>
                   <a:outerShdw blurRad="63500" dist="38099" dir="2700000" algn="ctr" rotWithShape="0">
                     <a:srgbClr val="000000">
@@ -25412,14 +25413,14 @@
           <a:effectLst/>
           <a:extLst>
             <a:ext uri="{909E8E84-426E-40dd-AFC4-6F175D3DCCD1}">
-              <a14:hiddenFill xmlns="" xmlns:a14="http://schemas.microsoft.com/office/drawing/2010/main">
+              <a14:hiddenFill xmlns:a14="http://schemas.microsoft.com/office/drawing/2010/main" xmlns="">
                 <a:solidFill>
                   <a:srgbClr val="FFFFFF"/>
                 </a:solidFill>
               </a14:hiddenFill>
             </a:ext>
             <a:ext uri="{91240B29-F687-4f45-9708-019B960494DF}">
-              <a14:hiddenLine xmlns="" xmlns:a14="http://schemas.microsoft.com/office/drawing/2010/main" w="9525" cap="flat">
+              <a14:hiddenLine xmlns:a14="http://schemas.microsoft.com/office/drawing/2010/main" xmlns="" w="9525" cap="flat">
                 <a:solidFill>
                   <a:srgbClr val="000000"/>
                 </a:solidFill>
@@ -25429,7 +25430,7 @@
               </a14:hiddenLine>
             </a:ext>
             <a:ext uri="{AF507438-7753-43e0-B8FC-AC1667EBCBE1}">
-              <a14:hiddenEffects xmlns="" xmlns:a14="http://schemas.microsoft.com/office/drawing/2010/main">
+              <a14:hiddenEffects xmlns:a14="http://schemas.microsoft.com/office/drawing/2010/main" xmlns="">
                 <a:effectLst>
                   <a:outerShdw blurRad="63500" dist="38099" dir="2700000" algn="ctr" rotWithShape="0">
                     <a:srgbClr val="000000">
@@ -25479,14 +25480,14 @@
           <a:effectLst/>
           <a:extLst>
             <a:ext uri="{909E8E84-426E-40dd-AFC4-6F175D3DCCD1}">
-              <a14:hiddenFill xmlns="" xmlns:a14="http://schemas.microsoft.com/office/drawing/2010/main">
+              <a14:hiddenFill xmlns:a14="http://schemas.microsoft.com/office/drawing/2010/main" xmlns="">
                 <a:solidFill>
                   <a:srgbClr val="FFFFFF"/>
                 </a:solidFill>
               </a14:hiddenFill>
             </a:ext>
             <a:ext uri="{91240B29-F687-4f45-9708-019B960494DF}">
-              <a14:hiddenLine xmlns="" xmlns:a14="http://schemas.microsoft.com/office/drawing/2010/main" w="9525" cap="flat">
+              <a14:hiddenLine xmlns:a14="http://schemas.microsoft.com/office/drawing/2010/main" xmlns="" w="9525" cap="flat">
                 <a:solidFill>
                   <a:srgbClr val="000000"/>
                 </a:solidFill>
@@ -25496,7 +25497,7 @@
               </a14:hiddenLine>
             </a:ext>
             <a:ext uri="{AF507438-7753-43e0-B8FC-AC1667EBCBE1}">
-              <a14:hiddenEffects xmlns="" xmlns:a14="http://schemas.microsoft.com/office/drawing/2010/main">
+              <a14:hiddenEffects xmlns:a14="http://schemas.microsoft.com/office/drawing/2010/main" xmlns="">
                 <a:effectLst>
                   <a:outerShdw blurRad="63500" dist="38099" dir="2700000" algn="ctr" rotWithShape="0">
                     <a:srgbClr val="000000">
@@ -25551,12 +25552,12 @@
           <a:effectLst/>
           <a:extLst>
             <a:ext uri="{909E8E84-426E-40dd-AFC4-6F175D3DCCD1}">
-              <a14:hiddenFill xmlns="" xmlns:a14="http://schemas.microsoft.com/office/drawing/2010/main">
+              <a14:hiddenFill xmlns:a14="http://schemas.microsoft.com/office/drawing/2010/main" xmlns="">
                 <a:noFill/>
               </a14:hiddenFill>
             </a:ext>
             <a:ext uri="{AF507438-7753-43e0-B8FC-AC1667EBCBE1}">
-              <a14:hiddenEffects xmlns="" xmlns:a14="http://schemas.microsoft.com/office/drawing/2010/main">
+              <a14:hiddenEffects xmlns:a14="http://schemas.microsoft.com/office/drawing/2010/main" xmlns="">
                 <a:effectLst>
                   <a:outerShdw blurRad="63500" dist="38099" dir="2700000" algn="ctr" rotWithShape="0">
                     <a:srgbClr val="000000">
@@ -25599,14 +25600,14 @@
           <a:effectLst/>
           <a:extLst>
             <a:ext uri="{909E8E84-426E-40dd-AFC4-6F175D3DCCD1}">
-              <a14:hiddenFill xmlns="" xmlns:a14="http://schemas.microsoft.com/office/drawing/2010/main">
+              <a14:hiddenFill xmlns:a14="http://schemas.microsoft.com/office/drawing/2010/main" xmlns="">
                 <a:solidFill>
                   <a:srgbClr val="FFFFFF"/>
                 </a:solidFill>
               </a14:hiddenFill>
             </a:ext>
             <a:ext uri="{91240B29-F687-4f45-9708-019B960494DF}">
-              <a14:hiddenLine xmlns="" xmlns:a14="http://schemas.microsoft.com/office/drawing/2010/main" w="9525" cap="flat">
+              <a14:hiddenLine xmlns:a14="http://schemas.microsoft.com/office/drawing/2010/main" xmlns="" w="9525" cap="flat">
                 <a:solidFill>
                   <a:srgbClr val="000000"/>
                 </a:solidFill>
@@ -25616,7 +25617,7 @@
               </a14:hiddenLine>
             </a:ext>
             <a:ext uri="{AF507438-7753-43e0-B8FC-AC1667EBCBE1}">
-              <a14:hiddenEffects xmlns="" xmlns:a14="http://schemas.microsoft.com/office/drawing/2010/main">
+              <a14:hiddenEffects xmlns:a14="http://schemas.microsoft.com/office/drawing/2010/main" xmlns="">
                 <a:effectLst>
                   <a:outerShdw blurRad="63500" dist="38099" dir="2700000" algn="ctr" rotWithShape="0">
                     <a:srgbClr val="000000">
@@ -25675,7 +25676,7 @@
           <a:effectLst/>
           <a:extLst>
             <a:ext uri="{AF507438-7753-43e0-B8FC-AC1667EBCBE1}">
-              <a14:hiddenEffects xmlns="" xmlns:a14="http://schemas.microsoft.com/office/drawing/2010/main">
+              <a14:hiddenEffects xmlns:a14="http://schemas.microsoft.com/office/drawing/2010/main" xmlns="">
                 <a:effectLst>
                   <a:outerShdw blurRad="63500" dist="38099" dir="2700000" algn="ctr" rotWithShape="0">
                     <a:srgbClr val="000000">
@@ -25718,14 +25719,14 @@
           <a:effectLst/>
           <a:extLst>
             <a:ext uri="{909E8E84-426E-40dd-AFC4-6F175D3DCCD1}">
-              <a14:hiddenFill xmlns="" xmlns:a14="http://schemas.microsoft.com/office/drawing/2010/main">
+              <a14:hiddenFill xmlns:a14="http://schemas.microsoft.com/office/drawing/2010/main" xmlns="">
                 <a:solidFill>
                   <a:srgbClr val="FFFFFF"/>
                 </a:solidFill>
               </a14:hiddenFill>
             </a:ext>
             <a:ext uri="{91240B29-F687-4f45-9708-019B960494DF}">
-              <a14:hiddenLine xmlns="" xmlns:a14="http://schemas.microsoft.com/office/drawing/2010/main" w="9525" cap="flat">
+              <a14:hiddenLine xmlns:a14="http://schemas.microsoft.com/office/drawing/2010/main" xmlns="" w="9525" cap="flat">
                 <a:solidFill>
                   <a:srgbClr val="000000"/>
                 </a:solidFill>
@@ -25735,7 +25736,7 @@
               </a14:hiddenLine>
             </a:ext>
             <a:ext uri="{AF507438-7753-43e0-B8FC-AC1667EBCBE1}">
-              <a14:hiddenEffects xmlns="" xmlns:a14="http://schemas.microsoft.com/office/drawing/2010/main">
+              <a14:hiddenEffects xmlns:a14="http://schemas.microsoft.com/office/drawing/2010/main" xmlns="">
                 <a:effectLst>
                   <a:outerShdw blurRad="63500" dist="38099" dir="2700000" algn="ctr" rotWithShape="0">
                     <a:srgbClr val="000000">
@@ -25971,7 +25972,7 @@
           <a:effectLst/>
           <a:extLst>
             <a:ext uri="{AF507438-7753-43e0-B8FC-AC1667EBCBE1}">
-              <a14:hiddenEffects xmlns="" xmlns:a14="http://schemas.microsoft.com/office/drawing/2010/main">
+              <a14:hiddenEffects xmlns:a14="http://schemas.microsoft.com/office/drawing/2010/main" xmlns="">
                 <a:effectLst>
                   <a:outerShdw blurRad="63500" dist="38099" dir="2700000" algn="ctr" rotWithShape="0">
                     <a:srgbClr val="000000">
@@ -26019,12 +26020,12 @@
           <a:effectLst/>
           <a:extLst>
             <a:ext uri="{909E8E84-426E-40dd-AFC4-6F175D3DCCD1}">
-              <a14:hiddenFill xmlns="" xmlns:a14="http://schemas.microsoft.com/office/drawing/2010/main">
+              <a14:hiddenFill xmlns:a14="http://schemas.microsoft.com/office/drawing/2010/main" xmlns="">
                 <a:noFill/>
               </a14:hiddenFill>
             </a:ext>
             <a:ext uri="{AF507438-7753-43e0-B8FC-AC1667EBCBE1}">
-              <a14:hiddenEffects xmlns="" xmlns:a14="http://schemas.microsoft.com/office/drawing/2010/main">
+              <a14:hiddenEffects xmlns:a14="http://schemas.microsoft.com/office/drawing/2010/main" xmlns="">
                 <a:effectLst>
                   <a:outerShdw blurRad="63500" dist="38099" dir="2700000" algn="ctr" rotWithShape="0">
                     <a:srgbClr val="000000">
@@ -26076,7 +26077,7 @@
           <a:effectLst/>
           <a:extLst>
             <a:ext uri="{AF507438-7753-43e0-B8FC-AC1667EBCBE1}">
-              <a14:hiddenEffects xmlns="" xmlns:a14="http://schemas.microsoft.com/office/drawing/2010/main">
+              <a14:hiddenEffects xmlns:a14="http://schemas.microsoft.com/office/drawing/2010/main" xmlns="">
                 <a:effectLst>
                   <a:outerShdw blurRad="63500" dist="38099" dir="2700000" algn="ctr" rotWithShape="0">
                     <a:srgbClr val="000000">
@@ -26128,7 +26129,7 @@
           <a:effectLst/>
           <a:extLst>
             <a:ext uri="{AF507438-7753-43e0-B8FC-AC1667EBCBE1}">
-              <a14:hiddenEffects xmlns="" xmlns:a14="http://schemas.microsoft.com/office/drawing/2010/main">
+              <a14:hiddenEffects xmlns:a14="http://schemas.microsoft.com/office/drawing/2010/main" xmlns="">
                 <a:effectLst>
                   <a:outerShdw blurRad="63500" dist="38099" dir="2700000" algn="ctr" rotWithShape="0">
                     <a:srgbClr val="000000">
@@ -26176,12 +26177,12 @@
           <a:effectLst/>
           <a:extLst>
             <a:ext uri="{909E8E84-426E-40dd-AFC4-6F175D3DCCD1}">
-              <a14:hiddenFill xmlns="" xmlns:a14="http://schemas.microsoft.com/office/drawing/2010/main">
+              <a14:hiddenFill xmlns:a14="http://schemas.microsoft.com/office/drawing/2010/main" xmlns="">
                 <a:noFill/>
               </a14:hiddenFill>
             </a:ext>
             <a:ext uri="{AF507438-7753-43e0-B8FC-AC1667EBCBE1}">
-              <a14:hiddenEffects xmlns="" xmlns:a14="http://schemas.microsoft.com/office/drawing/2010/main">
+              <a14:hiddenEffects xmlns:a14="http://schemas.microsoft.com/office/drawing/2010/main" xmlns="">
                 <a:effectLst>
                   <a:outerShdw blurRad="63500" dist="38099" dir="2700000" algn="ctr" rotWithShape="0">
                     <a:srgbClr val="000000">
@@ -26231,7 +26232,7 @@
           <a:effectLst/>
           <a:extLst>
             <a:ext uri="{AF507438-7753-43e0-B8FC-AC1667EBCBE1}">
-              <a14:hiddenEffects xmlns="" xmlns:a14="http://schemas.microsoft.com/office/drawing/2010/main">
+              <a14:hiddenEffects xmlns:a14="http://schemas.microsoft.com/office/drawing/2010/main" xmlns="">
                 <a:effectLst>
                   <a:outerShdw blurRad="63500" dist="38099" dir="2700000" algn="ctr" rotWithShape="0">
                     <a:srgbClr val="000000">
@@ -26281,7 +26282,7 @@
           <a:effectLst/>
           <a:extLst>
             <a:ext uri="{AF507438-7753-43e0-B8FC-AC1667EBCBE1}">
-              <a14:hiddenEffects xmlns="" xmlns:a14="http://schemas.microsoft.com/office/drawing/2010/main">
+              <a14:hiddenEffects xmlns:a14="http://schemas.microsoft.com/office/drawing/2010/main" xmlns="">
                 <a:effectLst>
                   <a:outerShdw blurRad="63500" dist="38099" dir="2700000" algn="ctr" rotWithShape="0">
                     <a:srgbClr val="000000">
@@ -26324,14 +26325,14 @@
           <a:effectLst/>
           <a:extLst>
             <a:ext uri="{909E8E84-426E-40dd-AFC4-6F175D3DCCD1}">
-              <a14:hiddenFill xmlns="" xmlns:a14="http://schemas.microsoft.com/office/drawing/2010/main">
+              <a14:hiddenFill xmlns:a14="http://schemas.microsoft.com/office/drawing/2010/main" xmlns="">
                 <a:solidFill>
                   <a:srgbClr val="FFFFFF"/>
                 </a:solidFill>
               </a14:hiddenFill>
             </a:ext>
             <a:ext uri="{91240B29-F687-4f45-9708-019B960494DF}">
-              <a14:hiddenLine xmlns="" xmlns:a14="http://schemas.microsoft.com/office/drawing/2010/main" w="9525" cap="flat">
+              <a14:hiddenLine xmlns:a14="http://schemas.microsoft.com/office/drawing/2010/main" xmlns="" w="9525" cap="flat">
                 <a:solidFill>
                   <a:srgbClr val="000000"/>
                 </a:solidFill>
@@ -26341,7 +26342,7 @@
               </a14:hiddenLine>
             </a:ext>
             <a:ext uri="{AF507438-7753-43e0-B8FC-AC1667EBCBE1}">
-              <a14:hiddenEffects xmlns="" xmlns:a14="http://schemas.microsoft.com/office/drawing/2010/main">
+              <a14:hiddenEffects xmlns:a14="http://schemas.microsoft.com/office/drawing/2010/main" xmlns="">
                 <a:effectLst>
                   <a:outerShdw blurRad="63500" dist="38099" dir="2700000" algn="ctr" rotWithShape="0">
                     <a:srgbClr val="000000">
@@ -26391,14 +26392,14 @@
           <a:effectLst/>
           <a:extLst>
             <a:ext uri="{909E8E84-426E-40dd-AFC4-6F175D3DCCD1}">
-              <a14:hiddenFill xmlns="" xmlns:a14="http://schemas.microsoft.com/office/drawing/2010/main">
+              <a14:hiddenFill xmlns:a14="http://schemas.microsoft.com/office/drawing/2010/main" xmlns="">
                 <a:solidFill>
                   <a:srgbClr val="FFFFFF"/>
                 </a:solidFill>
               </a14:hiddenFill>
             </a:ext>
             <a:ext uri="{91240B29-F687-4f45-9708-019B960494DF}">
-              <a14:hiddenLine xmlns="" xmlns:a14="http://schemas.microsoft.com/office/drawing/2010/main" w="9525" cap="flat">
+              <a14:hiddenLine xmlns:a14="http://schemas.microsoft.com/office/drawing/2010/main" xmlns="" w="9525" cap="flat">
                 <a:solidFill>
                   <a:srgbClr val="000000"/>
                 </a:solidFill>
@@ -26408,7 +26409,7 @@
               </a14:hiddenLine>
             </a:ext>
             <a:ext uri="{AF507438-7753-43e0-B8FC-AC1667EBCBE1}">
-              <a14:hiddenEffects xmlns="" xmlns:a14="http://schemas.microsoft.com/office/drawing/2010/main">
+              <a14:hiddenEffects xmlns:a14="http://schemas.microsoft.com/office/drawing/2010/main" xmlns="">
                 <a:effectLst>
                   <a:outerShdw blurRad="63500" dist="38099" dir="2700000" algn="ctr" rotWithShape="0">
                     <a:srgbClr val="000000">
@@ -26458,14 +26459,14 @@
           <a:effectLst/>
           <a:extLst>
             <a:ext uri="{909E8E84-426E-40dd-AFC4-6F175D3DCCD1}">
-              <a14:hiddenFill xmlns="" xmlns:a14="http://schemas.microsoft.com/office/drawing/2010/main">
+              <a14:hiddenFill xmlns:a14="http://schemas.microsoft.com/office/drawing/2010/main" xmlns="">
                 <a:solidFill>
                   <a:srgbClr val="FFFFFF"/>
                 </a:solidFill>
               </a14:hiddenFill>
             </a:ext>
             <a:ext uri="{91240B29-F687-4f45-9708-019B960494DF}">
-              <a14:hiddenLine xmlns="" xmlns:a14="http://schemas.microsoft.com/office/drawing/2010/main" w="9525" cap="flat">
+              <a14:hiddenLine xmlns:a14="http://schemas.microsoft.com/office/drawing/2010/main" xmlns="" w="9525" cap="flat">
                 <a:solidFill>
                   <a:srgbClr val="000000"/>
                 </a:solidFill>
@@ -26475,7 +26476,7 @@
               </a14:hiddenLine>
             </a:ext>
             <a:ext uri="{AF507438-7753-43e0-B8FC-AC1667EBCBE1}">
-              <a14:hiddenEffects xmlns="" xmlns:a14="http://schemas.microsoft.com/office/drawing/2010/main">
+              <a14:hiddenEffects xmlns:a14="http://schemas.microsoft.com/office/drawing/2010/main" xmlns="">
                 <a:effectLst>
                   <a:outerShdw blurRad="63500" dist="38099" dir="2700000" algn="ctr" rotWithShape="0">
                     <a:srgbClr val="000000">
@@ -26525,14 +26526,14 @@
           <a:effectLst/>
           <a:extLst>
             <a:ext uri="{909E8E84-426E-40dd-AFC4-6F175D3DCCD1}">
-              <a14:hiddenFill xmlns="" xmlns:a14="http://schemas.microsoft.com/office/drawing/2010/main">
+              <a14:hiddenFill xmlns:a14="http://schemas.microsoft.com/office/drawing/2010/main" xmlns="">
                 <a:solidFill>
                   <a:srgbClr val="FFFFFF"/>
                 </a:solidFill>
               </a14:hiddenFill>
             </a:ext>
             <a:ext uri="{91240B29-F687-4f45-9708-019B960494DF}">
-              <a14:hiddenLine xmlns="" xmlns:a14="http://schemas.microsoft.com/office/drawing/2010/main" w="9525" cap="flat">
+              <a14:hiddenLine xmlns:a14="http://schemas.microsoft.com/office/drawing/2010/main" xmlns="" w="9525" cap="flat">
                 <a:solidFill>
                   <a:srgbClr val="000000"/>
                 </a:solidFill>
@@ -26542,7 +26543,7 @@
               </a14:hiddenLine>
             </a:ext>
             <a:ext uri="{AF507438-7753-43e0-B8FC-AC1667EBCBE1}">
-              <a14:hiddenEffects xmlns="" xmlns:a14="http://schemas.microsoft.com/office/drawing/2010/main">
+              <a14:hiddenEffects xmlns:a14="http://schemas.microsoft.com/office/drawing/2010/main" xmlns="">
                 <a:effectLst>
                   <a:outerShdw blurRad="63500" dist="38099" dir="2700000" algn="ctr" rotWithShape="0">
                     <a:srgbClr val="000000">
@@ -26592,14 +26593,14 @@
           <a:effectLst/>
           <a:extLst>
             <a:ext uri="{909E8E84-426E-40dd-AFC4-6F175D3DCCD1}">
-              <a14:hiddenFill xmlns="" xmlns:a14="http://schemas.microsoft.com/office/drawing/2010/main">
+              <a14:hiddenFill xmlns:a14="http://schemas.microsoft.com/office/drawing/2010/main" xmlns="">
                 <a:solidFill>
                   <a:srgbClr val="FFFFFF"/>
                 </a:solidFill>
               </a14:hiddenFill>
             </a:ext>
             <a:ext uri="{91240B29-F687-4f45-9708-019B960494DF}">
-              <a14:hiddenLine xmlns="" xmlns:a14="http://schemas.microsoft.com/office/drawing/2010/main" w="9525" cap="flat">
+              <a14:hiddenLine xmlns:a14="http://schemas.microsoft.com/office/drawing/2010/main" xmlns="" w="9525" cap="flat">
                 <a:solidFill>
                   <a:srgbClr val="000000"/>
                 </a:solidFill>
@@ -26609,7 +26610,7 @@
               </a14:hiddenLine>
             </a:ext>
             <a:ext uri="{AF507438-7753-43e0-B8FC-AC1667EBCBE1}">
-              <a14:hiddenEffects xmlns="" xmlns:a14="http://schemas.microsoft.com/office/drawing/2010/main">
+              <a14:hiddenEffects xmlns:a14="http://schemas.microsoft.com/office/drawing/2010/main" xmlns="">
                 <a:effectLst>
                   <a:outerShdw blurRad="63500" dist="38099" dir="2700000" algn="ctr" rotWithShape="0">
                     <a:srgbClr val="000000">
@@ -26659,14 +26660,14 @@
           <a:effectLst/>
           <a:extLst>
             <a:ext uri="{909E8E84-426E-40dd-AFC4-6F175D3DCCD1}">
-              <a14:hiddenFill xmlns="" xmlns:a14="http://schemas.microsoft.com/office/drawing/2010/main">
+              <a14:hiddenFill xmlns:a14="http://schemas.microsoft.com/office/drawing/2010/main" xmlns="">
                 <a:solidFill>
                   <a:srgbClr val="FFFFFF"/>
                 </a:solidFill>
               </a14:hiddenFill>
             </a:ext>
             <a:ext uri="{91240B29-F687-4f45-9708-019B960494DF}">
-              <a14:hiddenLine xmlns="" xmlns:a14="http://schemas.microsoft.com/office/drawing/2010/main" w="9525" cap="flat">
+              <a14:hiddenLine xmlns:a14="http://schemas.microsoft.com/office/drawing/2010/main" xmlns="" w="9525" cap="flat">
                 <a:solidFill>
                   <a:srgbClr val="000000"/>
                 </a:solidFill>
@@ -26676,7 +26677,7 @@
               </a14:hiddenLine>
             </a:ext>
             <a:ext uri="{AF507438-7753-43e0-B8FC-AC1667EBCBE1}">
-              <a14:hiddenEffects xmlns="" xmlns:a14="http://schemas.microsoft.com/office/drawing/2010/main">
+              <a14:hiddenEffects xmlns:a14="http://schemas.microsoft.com/office/drawing/2010/main" xmlns="">
                 <a:effectLst>
                   <a:outerShdw blurRad="63500" dist="38099" dir="2700000" algn="ctr" rotWithShape="0">
                     <a:srgbClr val="000000">
@@ -26726,14 +26727,14 @@
           <a:effectLst/>
           <a:extLst>
             <a:ext uri="{909E8E84-426E-40dd-AFC4-6F175D3DCCD1}">
-              <a14:hiddenFill xmlns="" xmlns:a14="http://schemas.microsoft.com/office/drawing/2010/main">
+              <a14:hiddenFill xmlns:a14="http://schemas.microsoft.com/office/drawing/2010/main" xmlns="">
                 <a:solidFill>
                   <a:srgbClr val="FFFFFF"/>
                 </a:solidFill>
               </a14:hiddenFill>
             </a:ext>
             <a:ext uri="{91240B29-F687-4f45-9708-019B960494DF}">
-              <a14:hiddenLine xmlns="" xmlns:a14="http://schemas.microsoft.com/office/drawing/2010/main" w="9525" cap="flat">
+              <a14:hiddenLine xmlns:a14="http://schemas.microsoft.com/office/drawing/2010/main" xmlns="" w="9525" cap="flat">
                 <a:solidFill>
                   <a:srgbClr val="000000"/>
                 </a:solidFill>
@@ -26743,7 +26744,7 @@
               </a14:hiddenLine>
             </a:ext>
             <a:ext uri="{AF507438-7753-43e0-B8FC-AC1667EBCBE1}">
-              <a14:hiddenEffects xmlns="" xmlns:a14="http://schemas.microsoft.com/office/drawing/2010/main">
+              <a14:hiddenEffects xmlns:a14="http://schemas.microsoft.com/office/drawing/2010/main" xmlns="">
                 <a:effectLst>
                   <a:outerShdw blurRad="63500" dist="38099" dir="2700000" algn="ctr" rotWithShape="0">
                     <a:srgbClr val="000000">
@@ -26793,14 +26794,14 @@
           <a:effectLst/>
           <a:extLst>
             <a:ext uri="{909E8E84-426E-40dd-AFC4-6F175D3DCCD1}">
-              <a14:hiddenFill xmlns="" xmlns:a14="http://schemas.microsoft.com/office/drawing/2010/main">
+              <a14:hiddenFill xmlns:a14="http://schemas.microsoft.com/office/drawing/2010/main" xmlns="">
                 <a:solidFill>
                   <a:srgbClr val="FFFFFF"/>
                 </a:solidFill>
               </a14:hiddenFill>
             </a:ext>
             <a:ext uri="{91240B29-F687-4f45-9708-019B960494DF}">
-              <a14:hiddenLine xmlns="" xmlns:a14="http://schemas.microsoft.com/office/drawing/2010/main" w="9525" cap="flat">
+              <a14:hiddenLine xmlns:a14="http://schemas.microsoft.com/office/drawing/2010/main" xmlns="" w="9525" cap="flat">
                 <a:solidFill>
                   <a:srgbClr val="000000"/>
                 </a:solidFill>
@@ -26810,7 +26811,7 @@
               </a14:hiddenLine>
             </a:ext>
             <a:ext uri="{AF507438-7753-43e0-B8FC-AC1667EBCBE1}">
-              <a14:hiddenEffects xmlns="" xmlns:a14="http://schemas.microsoft.com/office/drawing/2010/main">
+              <a14:hiddenEffects xmlns:a14="http://schemas.microsoft.com/office/drawing/2010/main" xmlns="">
                 <a:effectLst>
                   <a:outerShdw blurRad="63500" dist="38099" dir="2700000" algn="ctr" rotWithShape="0">
                     <a:srgbClr val="000000">
@@ -26867,7 +26868,7 @@
           <a:effectLst/>
           <a:extLst>
             <a:ext uri="{AF507438-7753-43e0-B8FC-AC1667EBCBE1}">
-              <a14:hiddenEffects xmlns="" xmlns:a14="http://schemas.microsoft.com/office/drawing/2010/main">
+              <a14:hiddenEffects xmlns:a14="http://schemas.microsoft.com/office/drawing/2010/main" xmlns="">
                 <a:effectLst>
                   <a:outerShdw blurRad="63500" dist="38099" dir="2700000" algn="ctr" rotWithShape="0">
                     <a:srgbClr val="000000">
@@ -26910,14 +26911,14 @@
           <a:effectLst/>
           <a:extLst>
             <a:ext uri="{909E8E84-426E-40dd-AFC4-6F175D3DCCD1}">
-              <a14:hiddenFill xmlns="" xmlns:a14="http://schemas.microsoft.com/office/drawing/2010/main">
+              <a14:hiddenFill xmlns:a14="http://schemas.microsoft.com/office/drawing/2010/main" xmlns="">
                 <a:solidFill>
                   <a:srgbClr val="FFFFFF"/>
                 </a:solidFill>
               </a14:hiddenFill>
             </a:ext>
             <a:ext uri="{91240B29-F687-4f45-9708-019B960494DF}">
-              <a14:hiddenLine xmlns="" xmlns:a14="http://schemas.microsoft.com/office/drawing/2010/main" w="9525" cap="flat">
+              <a14:hiddenLine xmlns:a14="http://schemas.microsoft.com/office/drawing/2010/main" xmlns="" w="9525" cap="flat">
                 <a:solidFill>
                   <a:srgbClr val="000000"/>
                 </a:solidFill>
@@ -26927,7 +26928,7 @@
               </a14:hiddenLine>
             </a:ext>
             <a:ext uri="{AF507438-7753-43e0-B8FC-AC1667EBCBE1}">
-              <a14:hiddenEffects xmlns="" xmlns:a14="http://schemas.microsoft.com/office/drawing/2010/main">
+              <a14:hiddenEffects xmlns:a14="http://schemas.microsoft.com/office/drawing/2010/main" xmlns="">
                 <a:effectLst>
                   <a:outerShdw blurRad="63500" dist="38099" dir="2700000" algn="ctr" rotWithShape="0">
                     <a:srgbClr val="000000">
@@ -26984,7 +26985,7 @@
           <a:effectLst/>
           <a:extLst>
             <a:ext uri="{AF507438-7753-43e0-B8FC-AC1667EBCBE1}">
-              <a14:hiddenEffects xmlns="" xmlns:a14="http://schemas.microsoft.com/office/drawing/2010/main">
+              <a14:hiddenEffects xmlns:a14="http://schemas.microsoft.com/office/drawing/2010/main" xmlns="">
                 <a:effectLst>
                   <a:outerShdw blurRad="63500" dist="38099" dir="2700000" algn="ctr" rotWithShape="0">
                     <a:srgbClr val="000000">
@@ -27034,7 +27035,7 @@
           <a:effectLst/>
           <a:extLst>
             <a:ext uri="{AF507438-7753-43e0-B8FC-AC1667EBCBE1}">
-              <a14:hiddenEffects xmlns="" xmlns:a14="http://schemas.microsoft.com/office/drawing/2010/main">
+              <a14:hiddenEffects xmlns:a14="http://schemas.microsoft.com/office/drawing/2010/main" xmlns="">
                 <a:effectLst>
                   <a:outerShdw blurRad="63500" dist="38099" dir="2700000" algn="ctr" rotWithShape="0">
                     <a:srgbClr val="000000">
@@ -27077,14 +27078,14 @@
           <a:effectLst/>
           <a:extLst>
             <a:ext uri="{909E8E84-426E-40dd-AFC4-6F175D3DCCD1}">
-              <a14:hiddenFill xmlns="" xmlns:a14="http://schemas.microsoft.com/office/drawing/2010/main">
+              <a14:hiddenFill xmlns:a14="http://schemas.microsoft.com/office/drawing/2010/main" xmlns="">
                 <a:solidFill>
                   <a:srgbClr val="FFFFFF"/>
                 </a:solidFill>
               </a14:hiddenFill>
             </a:ext>
             <a:ext uri="{91240B29-F687-4f45-9708-019B960494DF}">
-              <a14:hiddenLine xmlns="" xmlns:a14="http://schemas.microsoft.com/office/drawing/2010/main" w="9525" cap="flat">
+              <a14:hiddenLine xmlns:a14="http://schemas.microsoft.com/office/drawing/2010/main" xmlns="" w="9525" cap="flat">
                 <a:solidFill>
                   <a:srgbClr val="000000"/>
                 </a:solidFill>
@@ -27094,7 +27095,7 @@
               </a14:hiddenLine>
             </a:ext>
             <a:ext uri="{AF507438-7753-43e0-B8FC-AC1667EBCBE1}">
-              <a14:hiddenEffects xmlns="" xmlns:a14="http://schemas.microsoft.com/office/drawing/2010/main">
+              <a14:hiddenEffects xmlns:a14="http://schemas.microsoft.com/office/drawing/2010/main" xmlns="">
                 <a:effectLst>
                   <a:outerShdw blurRad="63500" dist="38099" dir="2700000" algn="ctr" rotWithShape="0">
                     <a:srgbClr val="000000">
@@ -27151,7 +27152,7 @@
           <a:effectLst/>
           <a:extLst>
             <a:ext uri="{AF507438-7753-43e0-B8FC-AC1667EBCBE1}">
-              <a14:hiddenEffects xmlns="" xmlns:a14="http://schemas.microsoft.com/office/drawing/2010/main">
+              <a14:hiddenEffects xmlns:a14="http://schemas.microsoft.com/office/drawing/2010/main" xmlns="">
                 <a:effectLst>
                   <a:outerShdw blurRad="63500" dist="38099" dir="2700000" algn="ctr" rotWithShape="0">
                     <a:srgbClr val="000000">
@@ -27201,7 +27202,7 @@
           <a:effectLst/>
           <a:extLst>
             <a:ext uri="{AF507438-7753-43e0-B8FC-AC1667EBCBE1}">
-              <a14:hiddenEffects xmlns="" xmlns:a14="http://schemas.microsoft.com/office/drawing/2010/main">
+              <a14:hiddenEffects xmlns:a14="http://schemas.microsoft.com/office/drawing/2010/main" xmlns="">
                 <a:effectLst>
                   <a:outerShdw blurRad="63500" dist="38099" dir="2700000" algn="ctr" rotWithShape="0">
                     <a:srgbClr val="000000">
@@ -27244,14 +27245,14 @@
           <a:effectLst/>
           <a:extLst>
             <a:ext uri="{909E8E84-426E-40dd-AFC4-6F175D3DCCD1}">
-              <a14:hiddenFill xmlns="" xmlns:a14="http://schemas.microsoft.com/office/drawing/2010/main">
+              <a14:hiddenFill xmlns:a14="http://schemas.microsoft.com/office/drawing/2010/main" xmlns="">
                 <a:solidFill>
                   <a:srgbClr val="FFFFFF"/>
                 </a:solidFill>
               </a14:hiddenFill>
             </a:ext>
             <a:ext uri="{91240B29-F687-4f45-9708-019B960494DF}">
-              <a14:hiddenLine xmlns="" xmlns:a14="http://schemas.microsoft.com/office/drawing/2010/main" w="9525" cap="flat">
+              <a14:hiddenLine xmlns:a14="http://schemas.microsoft.com/office/drawing/2010/main" xmlns="" w="9525" cap="flat">
                 <a:solidFill>
                   <a:srgbClr val="000000"/>
                 </a:solidFill>
@@ -27261,7 +27262,7 @@
               </a14:hiddenLine>
             </a:ext>
             <a:ext uri="{AF507438-7753-43e0-B8FC-AC1667EBCBE1}">
-              <a14:hiddenEffects xmlns="" xmlns:a14="http://schemas.microsoft.com/office/drawing/2010/main">
+              <a14:hiddenEffects xmlns:a14="http://schemas.microsoft.com/office/drawing/2010/main" xmlns="">
                 <a:effectLst>
                   <a:outerShdw blurRad="63500" dist="38099" dir="2700000" algn="ctr" rotWithShape="0">
                     <a:srgbClr val="000000">
@@ -27318,7 +27319,7 @@
           <a:effectLst/>
           <a:extLst>
             <a:ext uri="{AF507438-7753-43e0-B8FC-AC1667EBCBE1}">
-              <a14:hiddenEffects xmlns="" xmlns:a14="http://schemas.microsoft.com/office/drawing/2010/main">
+              <a14:hiddenEffects xmlns:a14="http://schemas.microsoft.com/office/drawing/2010/main" xmlns="">
                 <a:effectLst>
                   <a:outerShdw blurRad="63500" dist="38099" dir="2700000" algn="ctr" rotWithShape="0">
                     <a:srgbClr val="000000">
@@ -27361,14 +27362,14 @@
           <a:effectLst/>
           <a:extLst>
             <a:ext uri="{909E8E84-426E-40dd-AFC4-6F175D3DCCD1}">
-              <a14:hiddenFill xmlns="" xmlns:a14="http://schemas.microsoft.com/office/drawing/2010/main">
+              <a14:hiddenFill xmlns:a14="http://schemas.microsoft.com/office/drawing/2010/main" xmlns="">
                 <a:solidFill>
                   <a:srgbClr val="FFFFFF"/>
                 </a:solidFill>
               </a14:hiddenFill>
             </a:ext>
             <a:ext uri="{91240B29-F687-4f45-9708-019B960494DF}">
-              <a14:hiddenLine xmlns="" xmlns:a14="http://schemas.microsoft.com/office/drawing/2010/main" w="9525" cap="flat">
+              <a14:hiddenLine xmlns:a14="http://schemas.microsoft.com/office/drawing/2010/main" xmlns="" w="9525" cap="flat">
                 <a:solidFill>
                   <a:srgbClr val="000000"/>
                 </a:solidFill>
@@ -27378,7 +27379,7 @@
               </a14:hiddenLine>
             </a:ext>
             <a:ext uri="{AF507438-7753-43e0-B8FC-AC1667EBCBE1}">
-              <a14:hiddenEffects xmlns="" xmlns:a14="http://schemas.microsoft.com/office/drawing/2010/main">
+              <a14:hiddenEffects xmlns:a14="http://schemas.microsoft.com/office/drawing/2010/main" xmlns="">
                 <a:effectLst>
                   <a:outerShdw blurRad="63500" dist="38099" dir="2700000" algn="ctr" rotWithShape="0">
                     <a:srgbClr val="000000">
@@ -27598,14 +27599,14 @@
           <a:effectLst/>
           <a:extLst>
             <a:ext uri="{909E8E84-426E-40dd-AFC4-6F175D3DCCD1}">
-              <a14:hiddenFill xmlns="" xmlns:a14="http://schemas.microsoft.com/office/drawing/2010/main">
+              <a14:hiddenFill xmlns:a14="http://schemas.microsoft.com/office/drawing/2010/main" xmlns="">
                 <a:solidFill>
                   <a:srgbClr val="FFFFFF"/>
                 </a:solidFill>
               </a14:hiddenFill>
             </a:ext>
             <a:ext uri="{91240B29-F687-4f45-9708-019B960494DF}">
-              <a14:hiddenLine xmlns="" xmlns:a14="http://schemas.microsoft.com/office/drawing/2010/main" w="9525" cap="flat">
+              <a14:hiddenLine xmlns:a14="http://schemas.microsoft.com/office/drawing/2010/main" xmlns="" w="9525" cap="flat">
                 <a:solidFill>
                   <a:srgbClr val="000000"/>
                 </a:solidFill>
@@ -27615,7 +27616,7 @@
               </a14:hiddenLine>
             </a:ext>
             <a:ext uri="{AF507438-7753-43e0-B8FC-AC1667EBCBE1}">
-              <a14:hiddenEffects xmlns="" xmlns:a14="http://schemas.microsoft.com/office/drawing/2010/main">
+              <a14:hiddenEffects xmlns:a14="http://schemas.microsoft.com/office/drawing/2010/main" xmlns="">
                 <a:effectLst>
                   <a:outerShdw blurRad="63500" dist="38099" dir="2700000" algn="ctr" rotWithShape="0">
                     <a:srgbClr val="000000">
@@ -27853,14 +27854,14 @@
           <a:effectLst/>
           <a:extLst>
             <a:ext uri="{909E8E84-426E-40dd-AFC4-6F175D3DCCD1}">
-              <a14:hiddenFill xmlns="" xmlns:a14="http://schemas.microsoft.com/office/drawing/2010/main">
+              <a14:hiddenFill xmlns:a14="http://schemas.microsoft.com/office/drawing/2010/main" xmlns="">
                 <a:solidFill>
                   <a:srgbClr val="FFFFFF"/>
                 </a:solidFill>
               </a14:hiddenFill>
             </a:ext>
             <a:ext uri="{91240B29-F687-4f45-9708-019B960494DF}">
-              <a14:hiddenLine xmlns="" xmlns:a14="http://schemas.microsoft.com/office/drawing/2010/main" w="9525" cap="flat">
+              <a14:hiddenLine xmlns:a14="http://schemas.microsoft.com/office/drawing/2010/main" xmlns="" w="9525" cap="flat">
                 <a:solidFill>
                   <a:srgbClr val="808080"/>
                 </a:solidFill>
@@ -27870,7 +27871,7 @@
               </a14:hiddenLine>
             </a:ext>
             <a:ext uri="{AF507438-7753-43e0-B8FC-AC1667EBCBE1}">
-              <a14:hiddenEffects xmlns="" xmlns:a14="http://schemas.microsoft.com/office/drawing/2010/main">
+              <a14:hiddenEffects xmlns:a14="http://schemas.microsoft.com/office/drawing/2010/main" xmlns="">
                 <a:effectLst>
                   <a:outerShdw blurRad="63500" dist="38099" dir="2700000" algn="ctr" rotWithShape="0">
                     <a:srgbClr val="000000">
@@ -28107,7 +28108,7 @@
           <a:effectLst/>
           <a:extLst>
             <a:ext uri="{AF507438-7753-43e0-B8FC-AC1667EBCBE1}">
-              <a14:hiddenEffects xmlns="" xmlns:a14="http://schemas.microsoft.com/office/drawing/2010/main">
+              <a14:hiddenEffects xmlns:a14="http://schemas.microsoft.com/office/drawing/2010/main" xmlns="">
                 <a:effectLst>
                   <a:outerShdw blurRad="63500" dist="38099" dir="2700000" algn="ctr" rotWithShape="0">
                     <a:srgbClr val="000000">
@@ -28150,14 +28151,14 @@
           <a:effectLst/>
           <a:extLst>
             <a:ext uri="{909E8E84-426E-40dd-AFC4-6F175D3DCCD1}">
-              <a14:hiddenFill xmlns="" xmlns:a14="http://schemas.microsoft.com/office/drawing/2010/main">
+              <a14:hiddenFill xmlns:a14="http://schemas.microsoft.com/office/drawing/2010/main" xmlns="">
                 <a:solidFill>
                   <a:srgbClr val="FFFFFF"/>
                 </a:solidFill>
               </a14:hiddenFill>
             </a:ext>
             <a:ext uri="{91240B29-F687-4f45-9708-019B960494DF}">
-              <a14:hiddenLine xmlns="" xmlns:a14="http://schemas.microsoft.com/office/drawing/2010/main" w="9525" cap="flat">
+              <a14:hiddenLine xmlns:a14="http://schemas.microsoft.com/office/drawing/2010/main" xmlns="" w="9525" cap="flat">
                 <a:solidFill>
                   <a:srgbClr val="000000"/>
                 </a:solidFill>
@@ -28167,7 +28168,7 @@
               </a14:hiddenLine>
             </a:ext>
             <a:ext uri="{AF507438-7753-43e0-B8FC-AC1667EBCBE1}">
-              <a14:hiddenEffects xmlns="" xmlns:a14="http://schemas.microsoft.com/office/drawing/2010/main">
+              <a14:hiddenEffects xmlns:a14="http://schemas.microsoft.com/office/drawing/2010/main" xmlns="">
                 <a:effectLst>
                   <a:outerShdw blurRad="63500" dist="38099" dir="2700000" algn="ctr" rotWithShape="0">
                     <a:srgbClr val="000000">
@@ -28217,14 +28218,14 @@
           <a:effectLst/>
           <a:extLst>
             <a:ext uri="{909E8E84-426E-40dd-AFC4-6F175D3DCCD1}">
-              <a14:hiddenFill xmlns="" xmlns:a14="http://schemas.microsoft.com/office/drawing/2010/main">
+              <a14:hiddenFill xmlns:a14="http://schemas.microsoft.com/office/drawing/2010/main" xmlns="">
                 <a:solidFill>
                   <a:srgbClr val="FFFFFF"/>
                 </a:solidFill>
               </a14:hiddenFill>
             </a:ext>
             <a:ext uri="{91240B29-F687-4f45-9708-019B960494DF}">
-              <a14:hiddenLine xmlns="" xmlns:a14="http://schemas.microsoft.com/office/drawing/2010/main" w="9525" cap="flat">
+              <a14:hiddenLine xmlns:a14="http://schemas.microsoft.com/office/drawing/2010/main" xmlns="" w="9525" cap="flat">
                 <a:solidFill>
                   <a:srgbClr val="000000"/>
                 </a:solidFill>
@@ -28234,7 +28235,7 @@
               </a14:hiddenLine>
             </a:ext>
             <a:ext uri="{AF507438-7753-43e0-B8FC-AC1667EBCBE1}">
-              <a14:hiddenEffects xmlns="" xmlns:a14="http://schemas.microsoft.com/office/drawing/2010/main">
+              <a14:hiddenEffects xmlns:a14="http://schemas.microsoft.com/office/drawing/2010/main" xmlns="">
                 <a:effectLst>
                   <a:outerShdw blurRad="63500" dist="38099" dir="2700000" algn="ctr" rotWithShape="0">
                     <a:srgbClr val="000000">
@@ -28284,14 +28285,14 @@
           <a:effectLst/>
           <a:extLst>
             <a:ext uri="{909E8E84-426E-40dd-AFC4-6F175D3DCCD1}">
-              <a14:hiddenFill xmlns="" xmlns:a14="http://schemas.microsoft.com/office/drawing/2010/main">
+              <a14:hiddenFill xmlns:a14="http://schemas.microsoft.com/office/drawing/2010/main" xmlns="">
                 <a:solidFill>
                   <a:srgbClr val="FFFFFF"/>
                 </a:solidFill>
               </a14:hiddenFill>
             </a:ext>
             <a:ext uri="{91240B29-F687-4f45-9708-019B960494DF}">
-              <a14:hiddenLine xmlns="" xmlns:a14="http://schemas.microsoft.com/office/drawing/2010/main" w="9525" cap="flat">
+              <a14:hiddenLine xmlns:a14="http://schemas.microsoft.com/office/drawing/2010/main" xmlns="" w="9525" cap="flat">
                 <a:solidFill>
                   <a:srgbClr val="000000"/>
                 </a:solidFill>
@@ -28301,7 +28302,7 @@
               </a14:hiddenLine>
             </a:ext>
             <a:ext uri="{AF507438-7753-43e0-B8FC-AC1667EBCBE1}">
-              <a14:hiddenEffects xmlns="" xmlns:a14="http://schemas.microsoft.com/office/drawing/2010/main">
+              <a14:hiddenEffects xmlns:a14="http://schemas.microsoft.com/office/drawing/2010/main" xmlns="">
                 <a:effectLst>
                   <a:outerShdw blurRad="63500" dist="38099" dir="2700000" algn="ctr" rotWithShape="0">
                     <a:srgbClr val="000000">
@@ -28351,14 +28352,14 @@
           <a:effectLst/>
           <a:extLst>
             <a:ext uri="{909E8E84-426E-40dd-AFC4-6F175D3DCCD1}">
-              <a14:hiddenFill xmlns="" xmlns:a14="http://schemas.microsoft.com/office/drawing/2010/main">
+              <a14:hiddenFill xmlns:a14="http://schemas.microsoft.com/office/drawing/2010/main" xmlns="">
                 <a:solidFill>
                   <a:srgbClr val="FFFFFF"/>
                 </a:solidFill>
               </a14:hiddenFill>
             </a:ext>
             <a:ext uri="{91240B29-F687-4f45-9708-019B960494DF}">
-              <a14:hiddenLine xmlns="" xmlns:a14="http://schemas.microsoft.com/office/drawing/2010/main" w="9525" cap="flat">
+              <a14:hiddenLine xmlns:a14="http://schemas.microsoft.com/office/drawing/2010/main" xmlns="" w="9525" cap="flat">
                 <a:solidFill>
                   <a:srgbClr val="000000"/>
                 </a:solidFill>
@@ -28368,7 +28369,7 @@
               </a14:hiddenLine>
             </a:ext>
             <a:ext uri="{AF507438-7753-43e0-B8FC-AC1667EBCBE1}">
-              <a14:hiddenEffects xmlns="" xmlns:a14="http://schemas.microsoft.com/office/drawing/2010/main">
+              <a14:hiddenEffects xmlns:a14="http://schemas.microsoft.com/office/drawing/2010/main" xmlns="">
                 <a:effectLst>
                   <a:outerShdw blurRad="63500" dist="38099" dir="2700000" algn="ctr" rotWithShape="0">
                     <a:srgbClr val="000000">
@@ -28418,14 +28419,14 @@
           <a:effectLst/>
           <a:extLst>
             <a:ext uri="{909E8E84-426E-40dd-AFC4-6F175D3DCCD1}">
-              <a14:hiddenFill xmlns="" xmlns:a14="http://schemas.microsoft.com/office/drawing/2010/main">
+              <a14:hiddenFill xmlns:a14="http://schemas.microsoft.com/office/drawing/2010/main" xmlns="">
                 <a:solidFill>
                   <a:srgbClr val="FFFFFF"/>
                 </a:solidFill>
               </a14:hiddenFill>
             </a:ext>
             <a:ext uri="{91240B29-F687-4f45-9708-019B960494DF}">
-              <a14:hiddenLine xmlns="" xmlns:a14="http://schemas.microsoft.com/office/drawing/2010/main" w="9525" cap="flat">
+              <a14:hiddenLine xmlns:a14="http://schemas.microsoft.com/office/drawing/2010/main" xmlns="" w="9525" cap="flat">
                 <a:solidFill>
                   <a:srgbClr val="000000"/>
                 </a:solidFill>
@@ -28435,7 +28436,7 @@
               </a14:hiddenLine>
             </a:ext>
             <a:ext uri="{AF507438-7753-43e0-B8FC-AC1667EBCBE1}">
-              <a14:hiddenEffects xmlns="" xmlns:a14="http://schemas.microsoft.com/office/drawing/2010/main">
+              <a14:hiddenEffects xmlns:a14="http://schemas.microsoft.com/office/drawing/2010/main" xmlns="">
                 <a:effectLst>
                   <a:outerShdw blurRad="63500" dist="38099" dir="2700000" algn="ctr" rotWithShape="0">
                     <a:srgbClr val="000000">
@@ -28485,14 +28486,14 @@
           <a:effectLst/>
           <a:extLst>
             <a:ext uri="{909E8E84-426E-40dd-AFC4-6F175D3DCCD1}">
-              <a14:hiddenFill xmlns="" xmlns:a14="http://schemas.microsoft.com/office/drawing/2010/main">
+              <a14:hiddenFill xmlns:a14="http://schemas.microsoft.com/office/drawing/2010/main" xmlns="">
                 <a:solidFill>
                   <a:srgbClr val="FFFFFF"/>
                 </a:solidFill>
               </a14:hiddenFill>
             </a:ext>
             <a:ext uri="{91240B29-F687-4f45-9708-019B960494DF}">
-              <a14:hiddenLine xmlns="" xmlns:a14="http://schemas.microsoft.com/office/drawing/2010/main" w="9525" cap="flat">
+              <a14:hiddenLine xmlns:a14="http://schemas.microsoft.com/office/drawing/2010/main" xmlns="" w="9525" cap="flat">
                 <a:solidFill>
                   <a:srgbClr val="000000"/>
                 </a:solidFill>
@@ -28502,7 +28503,7 @@
               </a14:hiddenLine>
             </a:ext>
             <a:ext uri="{AF507438-7753-43e0-B8FC-AC1667EBCBE1}">
-              <a14:hiddenEffects xmlns="" xmlns:a14="http://schemas.microsoft.com/office/drawing/2010/main">
+              <a14:hiddenEffects xmlns:a14="http://schemas.microsoft.com/office/drawing/2010/main" xmlns="">
                 <a:effectLst>
                   <a:outerShdw blurRad="63500" dist="38099" dir="2700000" algn="ctr" rotWithShape="0">
                     <a:srgbClr val="000000">
@@ -28722,14 +28723,14 @@
           <a:effectLst/>
           <a:extLst>
             <a:ext uri="{909E8E84-426E-40dd-AFC4-6F175D3DCCD1}">
-              <a14:hiddenFill xmlns="" xmlns:a14="http://schemas.microsoft.com/office/drawing/2010/main">
+              <a14:hiddenFill xmlns:a14="http://schemas.microsoft.com/office/drawing/2010/main" xmlns="">
                 <a:solidFill>
                   <a:srgbClr val="FFFFFF"/>
                 </a:solidFill>
               </a14:hiddenFill>
             </a:ext>
             <a:ext uri="{91240B29-F687-4f45-9708-019B960494DF}">
-              <a14:hiddenLine xmlns="" xmlns:a14="http://schemas.microsoft.com/office/drawing/2010/main" w="9525" cap="flat">
+              <a14:hiddenLine xmlns:a14="http://schemas.microsoft.com/office/drawing/2010/main" xmlns="" w="9525" cap="flat">
                 <a:solidFill>
                   <a:srgbClr val="000000"/>
                 </a:solidFill>
@@ -28739,7 +28740,7 @@
               </a14:hiddenLine>
             </a:ext>
             <a:ext uri="{AF507438-7753-43e0-B8FC-AC1667EBCBE1}">
-              <a14:hiddenEffects xmlns="" xmlns:a14="http://schemas.microsoft.com/office/drawing/2010/main">
+              <a14:hiddenEffects xmlns:a14="http://schemas.microsoft.com/office/drawing/2010/main" xmlns="">
                 <a:effectLst>
                   <a:outerShdw blurRad="63500" dist="38099" dir="2700000" algn="ctr" rotWithShape="0">
                     <a:srgbClr val="000000">
@@ -28789,14 +28790,14 @@
           <a:effectLst/>
           <a:extLst>
             <a:ext uri="{909E8E84-426E-40dd-AFC4-6F175D3DCCD1}">
-              <a14:hiddenFill xmlns="" xmlns:a14="http://schemas.microsoft.com/office/drawing/2010/main">
+              <a14:hiddenFill xmlns:a14="http://schemas.microsoft.com/office/drawing/2010/main" xmlns="">
                 <a:solidFill>
                   <a:srgbClr val="FFFFFF"/>
                 </a:solidFill>
               </a14:hiddenFill>
             </a:ext>
             <a:ext uri="{91240B29-F687-4f45-9708-019B960494DF}">
-              <a14:hiddenLine xmlns="" xmlns:a14="http://schemas.microsoft.com/office/drawing/2010/main" w="9525" cap="flat">
+              <a14:hiddenLine xmlns:a14="http://schemas.microsoft.com/office/drawing/2010/main" xmlns="" w="9525" cap="flat">
                 <a:solidFill>
                   <a:srgbClr val="000000"/>
                 </a:solidFill>
@@ -28806,7 +28807,7 @@
               </a14:hiddenLine>
             </a:ext>
             <a:ext uri="{AF507438-7753-43e0-B8FC-AC1667EBCBE1}">
-              <a14:hiddenEffects xmlns="" xmlns:a14="http://schemas.microsoft.com/office/drawing/2010/main">
+              <a14:hiddenEffects xmlns:a14="http://schemas.microsoft.com/office/drawing/2010/main" xmlns="">
                 <a:effectLst>
                   <a:outerShdw blurRad="63500" dist="38099" dir="2700000" algn="ctr" rotWithShape="0">
                     <a:srgbClr val="000000">
@@ -28856,14 +28857,14 @@
           <a:effectLst/>
           <a:extLst>
             <a:ext uri="{909E8E84-426E-40dd-AFC4-6F175D3DCCD1}">
-              <a14:hiddenFill xmlns="" xmlns:a14="http://schemas.microsoft.com/office/drawing/2010/main">
+              <a14:hiddenFill xmlns:a14="http://schemas.microsoft.com/office/drawing/2010/main" xmlns="">
                 <a:solidFill>
                   <a:srgbClr val="FFFFFF"/>
                 </a:solidFill>
               </a14:hiddenFill>
             </a:ext>
             <a:ext uri="{91240B29-F687-4f45-9708-019B960494DF}">
-              <a14:hiddenLine xmlns="" xmlns:a14="http://schemas.microsoft.com/office/drawing/2010/main" w="9525" cap="flat">
+              <a14:hiddenLine xmlns:a14="http://schemas.microsoft.com/office/drawing/2010/main" xmlns="" w="9525" cap="flat">
                 <a:solidFill>
                   <a:srgbClr val="000000"/>
                 </a:solidFill>
@@ -28873,7 +28874,7 @@
               </a14:hiddenLine>
             </a:ext>
             <a:ext uri="{AF507438-7753-43e0-B8FC-AC1667EBCBE1}">
-              <a14:hiddenEffects xmlns="" xmlns:a14="http://schemas.microsoft.com/office/drawing/2010/main">
+              <a14:hiddenEffects xmlns:a14="http://schemas.microsoft.com/office/drawing/2010/main" xmlns="">
                 <a:effectLst>
                   <a:outerShdw blurRad="63500" dist="38099" dir="2700000" algn="ctr" rotWithShape="0">
                     <a:srgbClr val="000000">
@@ -28923,14 +28924,14 @@
           <a:effectLst/>
           <a:extLst>
             <a:ext uri="{909E8E84-426E-40dd-AFC4-6F175D3DCCD1}">
-              <a14:hiddenFill xmlns="" xmlns:a14="http://schemas.microsoft.com/office/drawing/2010/main">
+              <a14:hiddenFill xmlns:a14="http://schemas.microsoft.com/office/drawing/2010/main" xmlns="">
                 <a:solidFill>
                   <a:srgbClr val="FFFFFF"/>
                 </a:solidFill>
               </a14:hiddenFill>
             </a:ext>
             <a:ext uri="{91240B29-F687-4f45-9708-019B960494DF}">
-              <a14:hiddenLine xmlns="" xmlns:a14="http://schemas.microsoft.com/office/drawing/2010/main" w="9525" cap="flat">
+              <a14:hiddenLine xmlns:a14="http://schemas.microsoft.com/office/drawing/2010/main" xmlns="" w="9525" cap="flat">
                 <a:solidFill>
                   <a:srgbClr val="000000"/>
                 </a:solidFill>
@@ -28940,7 +28941,7 @@
               </a14:hiddenLine>
             </a:ext>
             <a:ext uri="{AF507438-7753-43e0-B8FC-AC1667EBCBE1}">
-              <a14:hiddenEffects xmlns="" xmlns:a14="http://schemas.microsoft.com/office/drawing/2010/main">
+              <a14:hiddenEffects xmlns:a14="http://schemas.microsoft.com/office/drawing/2010/main" xmlns="">
                 <a:effectLst>
                   <a:outerShdw blurRad="63500" dist="38099" dir="2700000" algn="ctr" rotWithShape="0">
                     <a:srgbClr val="000000">
@@ -28990,14 +28991,14 @@
           <a:effectLst/>
           <a:extLst>
             <a:ext uri="{909E8E84-426E-40dd-AFC4-6F175D3DCCD1}">
-              <a14:hiddenFill xmlns="" xmlns:a14="http://schemas.microsoft.com/office/drawing/2010/main">
+              <a14:hiddenFill xmlns:a14="http://schemas.microsoft.com/office/drawing/2010/main" xmlns="">
                 <a:solidFill>
                   <a:srgbClr val="FFFFFF"/>
                 </a:solidFill>
               </a14:hiddenFill>
             </a:ext>
             <a:ext uri="{91240B29-F687-4f45-9708-019B960494DF}">
-              <a14:hiddenLine xmlns="" xmlns:a14="http://schemas.microsoft.com/office/drawing/2010/main" w="9525" cap="flat">
+              <a14:hiddenLine xmlns:a14="http://schemas.microsoft.com/office/drawing/2010/main" xmlns="" w="9525" cap="flat">
                 <a:solidFill>
                   <a:srgbClr val="FF6600"/>
                 </a:solidFill>
@@ -29007,7 +29008,7 @@
               </a14:hiddenLine>
             </a:ext>
             <a:ext uri="{AF507438-7753-43e0-B8FC-AC1667EBCBE1}">
-              <a14:hiddenEffects xmlns="" xmlns:a14="http://schemas.microsoft.com/office/drawing/2010/main">
+              <a14:hiddenEffects xmlns:a14="http://schemas.microsoft.com/office/drawing/2010/main" xmlns="">
                 <a:effectLst>
                   <a:outerShdw blurRad="63500" dist="38099" dir="2700000" algn="ctr" rotWithShape="0">
                     <a:srgbClr val="000000">
@@ -29057,14 +29058,14 @@
           <a:effectLst/>
           <a:extLst>
             <a:ext uri="{909E8E84-426E-40dd-AFC4-6F175D3DCCD1}">
-              <a14:hiddenFill xmlns="" xmlns:a14="http://schemas.microsoft.com/office/drawing/2010/main">
+              <a14:hiddenFill xmlns:a14="http://schemas.microsoft.com/office/drawing/2010/main" xmlns="">
                 <a:solidFill>
                   <a:srgbClr val="FFFFFF"/>
                 </a:solidFill>
               </a14:hiddenFill>
             </a:ext>
             <a:ext uri="{91240B29-F687-4f45-9708-019B960494DF}">
-              <a14:hiddenLine xmlns="" xmlns:a14="http://schemas.microsoft.com/office/drawing/2010/main" w="9525" cap="flat">
+              <a14:hiddenLine xmlns:a14="http://schemas.microsoft.com/office/drawing/2010/main" xmlns="" w="9525" cap="flat">
                 <a:solidFill>
                   <a:srgbClr val="FF6600"/>
                 </a:solidFill>
@@ -29074,7 +29075,7 @@
               </a14:hiddenLine>
             </a:ext>
             <a:ext uri="{AF507438-7753-43e0-B8FC-AC1667EBCBE1}">
-              <a14:hiddenEffects xmlns="" xmlns:a14="http://schemas.microsoft.com/office/drawing/2010/main">
+              <a14:hiddenEffects xmlns:a14="http://schemas.microsoft.com/office/drawing/2010/main" xmlns="">
                 <a:effectLst>
                   <a:outerShdw blurRad="63500" dist="38099" dir="2700000" algn="ctr" rotWithShape="0">
                     <a:srgbClr val="000000">
@@ -29124,14 +29125,14 @@
           <a:effectLst/>
           <a:extLst>
             <a:ext uri="{909E8E84-426E-40dd-AFC4-6F175D3DCCD1}">
-              <a14:hiddenFill xmlns="" xmlns:a14="http://schemas.microsoft.com/office/drawing/2010/main">
+              <a14:hiddenFill xmlns:a14="http://schemas.microsoft.com/office/drawing/2010/main" xmlns="">
                 <a:solidFill>
                   <a:srgbClr val="FFFFFF"/>
                 </a:solidFill>
               </a14:hiddenFill>
             </a:ext>
             <a:ext uri="{91240B29-F687-4f45-9708-019B960494DF}">
-              <a14:hiddenLine xmlns="" xmlns:a14="http://schemas.microsoft.com/office/drawing/2010/main" w="9525" cap="flat">
+              <a14:hiddenLine xmlns:a14="http://schemas.microsoft.com/office/drawing/2010/main" xmlns="" w="9525" cap="flat">
                 <a:solidFill>
                   <a:srgbClr val="FF6600"/>
                 </a:solidFill>
@@ -29141,7 +29142,7 @@
               </a14:hiddenLine>
             </a:ext>
             <a:ext uri="{AF507438-7753-43e0-B8FC-AC1667EBCBE1}">
-              <a14:hiddenEffects xmlns="" xmlns:a14="http://schemas.microsoft.com/office/drawing/2010/main">
+              <a14:hiddenEffects xmlns:a14="http://schemas.microsoft.com/office/drawing/2010/main" xmlns="">
                 <a:effectLst>
                   <a:outerShdw blurRad="63500" dist="38099" dir="2700000" algn="ctr" rotWithShape="0">
                     <a:srgbClr val="000000">
@@ -29191,14 +29192,14 @@
           <a:effectLst/>
           <a:extLst>
             <a:ext uri="{909E8E84-426E-40dd-AFC4-6F175D3DCCD1}">
-              <a14:hiddenFill xmlns="" xmlns:a14="http://schemas.microsoft.com/office/drawing/2010/main">
+              <a14:hiddenFill xmlns:a14="http://schemas.microsoft.com/office/drawing/2010/main" xmlns="">
                 <a:solidFill>
                   <a:srgbClr val="FFFFFF"/>
                 </a:solidFill>
               </a14:hiddenFill>
             </a:ext>
             <a:ext uri="{91240B29-F687-4f45-9708-019B960494DF}">
-              <a14:hiddenLine xmlns="" xmlns:a14="http://schemas.microsoft.com/office/drawing/2010/main" w="9525" cap="flat">
+              <a14:hiddenLine xmlns:a14="http://schemas.microsoft.com/office/drawing/2010/main" xmlns="" w="9525" cap="flat">
                 <a:solidFill>
                   <a:srgbClr val="FF6600"/>
                 </a:solidFill>
@@ -29208,7 +29209,7 @@
               </a14:hiddenLine>
             </a:ext>
             <a:ext uri="{AF507438-7753-43e0-B8FC-AC1667EBCBE1}">
-              <a14:hiddenEffects xmlns="" xmlns:a14="http://schemas.microsoft.com/office/drawing/2010/main">
+              <a14:hiddenEffects xmlns:a14="http://schemas.microsoft.com/office/drawing/2010/main" xmlns="">
                 <a:effectLst>
                   <a:outerShdw blurRad="63500" dist="38099" dir="2700000" algn="ctr" rotWithShape="0">
                     <a:srgbClr val="000000">
@@ -29258,14 +29259,14 @@
           <a:effectLst/>
           <a:extLst>
             <a:ext uri="{909E8E84-426E-40dd-AFC4-6F175D3DCCD1}">
-              <a14:hiddenFill xmlns="" xmlns:a14="http://schemas.microsoft.com/office/drawing/2010/main">
+              <a14:hiddenFill xmlns:a14="http://schemas.microsoft.com/office/drawing/2010/main" xmlns="">
                 <a:solidFill>
                   <a:srgbClr val="FFFFFF"/>
                 </a:solidFill>
               </a14:hiddenFill>
             </a:ext>
             <a:ext uri="{91240B29-F687-4f45-9708-019B960494DF}">
-              <a14:hiddenLine xmlns="" xmlns:a14="http://schemas.microsoft.com/office/drawing/2010/main" w="9525" cap="flat">
+              <a14:hiddenLine xmlns:a14="http://schemas.microsoft.com/office/drawing/2010/main" xmlns="" w="9525" cap="flat">
                 <a:solidFill>
                   <a:srgbClr val="000000"/>
                 </a:solidFill>
@@ -29275,7 +29276,7 @@
               </a14:hiddenLine>
             </a:ext>
             <a:ext uri="{AF507438-7753-43e0-B8FC-AC1667EBCBE1}">
-              <a14:hiddenEffects xmlns="" xmlns:a14="http://schemas.microsoft.com/office/drawing/2010/main">
+              <a14:hiddenEffects xmlns:a14="http://schemas.microsoft.com/office/drawing/2010/main" xmlns="">
                 <a:effectLst>
                   <a:outerShdw blurRad="63500" dist="38099" dir="2700000" algn="ctr" rotWithShape="0">
                     <a:srgbClr val="000000">
@@ -29538,7 +29539,7 @@
           <a:effectLst/>
           <a:extLst>
             <a:ext uri="{AF507438-7753-43e0-B8FC-AC1667EBCBE1}">
-              <a14:hiddenEffects xmlns="" xmlns:a14="http://schemas.microsoft.com/office/drawing/2010/main">
+              <a14:hiddenEffects xmlns:a14="http://schemas.microsoft.com/office/drawing/2010/main" xmlns="">
                 <a:effectLst>
                   <a:outerShdw blurRad="63500" dist="38099" dir="2700000" algn="ctr" rotWithShape="0">
                     <a:srgbClr val="000000">
@@ -29594,7 +29595,7 @@
           <a:effectLst/>
           <a:extLst>
             <a:ext uri="{AF507438-7753-43e0-B8FC-AC1667EBCBE1}">
-              <a14:hiddenEffects xmlns="" xmlns:a14="http://schemas.microsoft.com/office/drawing/2010/main">
+              <a14:hiddenEffects xmlns:a14="http://schemas.microsoft.com/office/drawing/2010/main" xmlns="">
                 <a:effectLst>
                   <a:outerShdw blurRad="63500" dist="38099" dir="2700000" algn="ctr" rotWithShape="0">
                     <a:srgbClr val="000000">
@@ -29650,7 +29651,7 @@
           <a:effectLst/>
           <a:extLst>
             <a:ext uri="{AF507438-7753-43e0-B8FC-AC1667EBCBE1}">
-              <a14:hiddenEffects xmlns="" xmlns:a14="http://schemas.microsoft.com/office/drawing/2010/main">
+              <a14:hiddenEffects xmlns:a14="http://schemas.microsoft.com/office/drawing/2010/main" xmlns="">
                 <a:effectLst>
                   <a:outerShdw blurRad="63500" dist="38099" dir="2700000" algn="ctr" rotWithShape="0">
                     <a:srgbClr val="000000">
@@ -29706,7 +29707,7 @@
           <a:effectLst/>
           <a:extLst>
             <a:ext uri="{AF507438-7753-43e0-B8FC-AC1667EBCBE1}">
-              <a14:hiddenEffects xmlns="" xmlns:a14="http://schemas.microsoft.com/office/drawing/2010/main">
+              <a14:hiddenEffects xmlns:a14="http://schemas.microsoft.com/office/drawing/2010/main" xmlns="">
                 <a:effectLst>
                   <a:outerShdw blurRad="63500" dist="38099" dir="2700000" algn="ctr" rotWithShape="0">
                     <a:srgbClr val="000000">
@@ -29762,7 +29763,7 @@
           <a:effectLst/>
           <a:extLst>
             <a:ext uri="{AF507438-7753-43e0-B8FC-AC1667EBCBE1}">
-              <a14:hiddenEffects xmlns="" xmlns:a14="http://schemas.microsoft.com/office/drawing/2010/main">
+              <a14:hiddenEffects xmlns:a14="http://schemas.microsoft.com/office/drawing/2010/main" xmlns="">
                 <a:effectLst>
                   <a:outerShdw blurRad="63500" dist="38099" dir="2700000" algn="ctr" rotWithShape="0">
                     <a:srgbClr val="000000">
@@ -29810,12 +29811,12 @@
           <a:effectLst/>
           <a:extLst>
             <a:ext uri="{909E8E84-426E-40dd-AFC4-6F175D3DCCD1}">
-              <a14:hiddenFill xmlns="" xmlns:a14="http://schemas.microsoft.com/office/drawing/2010/main">
+              <a14:hiddenFill xmlns:a14="http://schemas.microsoft.com/office/drawing/2010/main" xmlns="">
                 <a:noFill/>
               </a14:hiddenFill>
             </a:ext>
             <a:ext uri="{AF507438-7753-43e0-B8FC-AC1667EBCBE1}">
-              <a14:hiddenEffects xmlns="" xmlns:a14="http://schemas.microsoft.com/office/drawing/2010/main">
+              <a14:hiddenEffects xmlns:a14="http://schemas.microsoft.com/office/drawing/2010/main" xmlns="">
                 <a:effectLst>
                   <a:outerShdw blurRad="63500" dist="38099" dir="2700000" algn="ctr" rotWithShape="0">
                     <a:srgbClr val="000000">
@@ -29864,14 +29865,14 @@
           <a:effectLst/>
           <a:extLst>
             <a:ext uri="{909E8E84-426E-40dd-AFC4-6F175D3DCCD1}">
-              <a14:hiddenFill xmlns="" xmlns:a14="http://schemas.microsoft.com/office/drawing/2010/main">
+              <a14:hiddenFill xmlns:a14="http://schemas.microsoft.com/office/drawing/2010/main" xmlns="">
                 <a:solidFill>
                   <a:srgbClr val="FFFFFF"/>
                 </a:solidFill>
               </a14:hiddenFill>
             </a:ext>
             <a:ext uri="{91240B29-F687-4f45-9708-019B960494DF}">
-              <a14:hiddenLine xmlns="" xmlns:a14="http://schemas.microsoft.com/office/drawing/2010/main" w="9525" cap="flat">
+              <a14:hiddenLine xmlns:a14="http://schemas.microsoft.com/office/drawing/2010/main" xmlns="" w="9525" cap="flat">
                 <a:solidFill>
                   <a:srgbClr val="000000"/>
                 </a:solidFill>
@@ -29881,7 +29882,7 @@
               </a14:hiddenLine>
             </a:ext>
             <a:ext uri="{AF507438-7753-43e0-B8FC-AC1667EBCBE1}">
-              <a14:hiddenEffects xmlns="" xmlns:a14="http://schemas.microsoft.com/office/drawing/2010/main">
+              <a14:hiddenEffects xmlns:a14="http://schemas.microsoft.com/office/drawing/2010/main" xmlns="">
                 <a:effectLst>
                   <a:outerShdw blurRad="63500" dist="38099" dir="2700000" algn="ctr" rotWithShape="0">
                     <a:srgbClr val="000000">
@@ -29984,14 +29985,14 @@
           <a:effectLst/>
           <a:extLst>
             <a:ext uri="{909E8E84-426E-40dd-AFC4-6F175D3DCCD1}">
-              <a14:hiddenFill xmlns="" xmlns:a14="http://schemas.microsoft.com/office/drawing/2010/main">
+              <a14:hiddenFill xmlns:a14="http://schemas.microsoft.com/office/drawing/2010/main" xmlns="">
                 <a:solidFill>
                   <a:srgbClr val="FFFFFF"/>
                 </a:solidFill>
               </a14:hiddenFill>
             </a:ext>
             <a:ext uri="{91240B29-F687-4f45-9708-019B960494DF}">
-              <a14:hiddenLine xmlns="" xmlns:a14="http://schemas.microsoft.com/office/drawing/2010/main" w="9525" cap="flat">
+              <a14:hiddenLine xmlns:a14="http://schemas.microsoft.com/office/drawing/2010/main" xmlns="" w="9525" cap="flat">
                 <a:solidFill>
                   <a:srgbClr val="000000"/>
                 </a:solidFill>
@@ -30001,7 +30002,7 @@
               </a14:hiddenLine>
             </a:ext>
             <a:ext uri="{AF507438-7753-43e0-B8FC-AC1667EBCBE1}">
-              <a14:hiddenEffects xmlns="" xmlns:a14="http://schemas.microsoft.com/office/drawing/2010/main">
+              <a14:hiddenEffects xmlns:a14="http://schemas.microsoft.com/office/drawing/2010/main" xmlns="">
                 <a:effectLst>
                   <a:outerShdw blurRad="63500" dist="38099" dir="2700000" algn="ctr" rotWithShape="0">
                     <a:srgbClr val="000000">
@@ -30275,7 +30276,7 @@
             <a:effectLst/>
             <a:extLst>
               <a:ext uri="{909E8E84-426E-40dd-AFC4-6F175D3DCCD1}">
-                <a14:hiddenFill xmlns="" xmlns:a14="http://schemas.microsoft.com/office/drawing/2010/main">
+                <a14:hiddenFill xmlns:a14="http://schemas.microsoft.com/office/drawing/2010/main" xmlns="">
                   <a:blipFill dpi="0" rotWithShape="0">
                     <a:blip/>
                     <a:srcRect/>
@@ -30286,7 +30287,7 @@
                 </a14:hiddenFill>
               </a:ext>
               <a:ext uri="{91240B29-F687-4f45-9708-019B960494DF}">
-                <a14:hiddenLine xmlns="" xmlns:a14="http://schemas.microsoft.com/office/drawing/2010/main" w="9525" cap="flat">
+                <a14:hiddenLine xmlns:a14="http://schemas.microsoft.com/office/drawing/2010/main" xmlns="" w="9525" cap="flat">
                   <a:solidFill>
                     <a:srgbClr val="808080"/>
                   </a:solidFill>
@@ -30296,7 +30297,7 @@
                 </a14:hiddenLine>
               </a:ext>
               <a:ext uri="{AF507438-7753-43e0-B8FC-AC1667EBCBE1}">
-                <a14:hiddenEffects xmlns="" xmlns:a14="http://schemas.microsoft.com/office/drawing/2010/main">
+                <a14:hiddenEffects xmlns:a14="http://schemas.microsoft.com/office/drawing/2010/main" xmlns="">
                   <a:effectLst>
                     <a:outerShdw blurRad="63500" dist="38099" dir="2700000" algn="ctr" rotWithShape="0">
                       <a:srgbClr val="000000">
@@ -30345,7 +30346,7 @@
             <a:effectLst/>
             <a:extLst>
               <a:ext uri="{909E8E84-426E-40dd-AFC4-6F175D3DCCD1}">
-                <a14:hiddenFill xmlns="" xmlns:a14="http://schemas.microsoft.com/office/drawing/2010/main">
+                <a14:hiddenFill xmlns:a14="http://schemas.microsoft.com/office/drawing/2010/main" xmlns="">
                   <a:blipFill dpi="0" rotWithShape="0">
                     <a:blip/>
                     <a:srcRect/>
@@ -30356,7 +30357,7 @@
                 </a14:hiddenFill>
               </a:ext>
               <a:ext uri="{91240B29-F687-4f45-9708-019B960494DF}">
-                <a14:hiddenLine xmlns="" xmlns:a14="http://schemas.microsoft.com/office/drawing/2010/main" w="9525" cap="flat">
+                <a14:hiddenLine xmlns:a14="http://schemas.microsoft.com/office/drawing/2010/main" xmlns="" w="9525" cap="flat">
                   <a:solidFill>
                     <a:srgbClr val="808080"/>
                   </a:solidFill>
@@ -30366,7 +30367,7 @@
                 </a14:hiddenLine>
               </a:ext>
               <a:ext uri="{AF507438-7753-43e0-B8FC-AC1667EBCBE1}">
-                <a14:hiddenEffects xmlns="" xmlns:a14="http://schemas.microsoft.com/office/drawing/2010/main">
+                <a14:hiddenEffects xmlns:a14="http://schemas.microsoft.com/office/drawing/2010/main" xmlns="">
                   <a:effectLst>
                     <a:outerShdw blurRad="63500" dist="38099" dir="2700000" algn="ctr" rotWithShape="0">
                       <a:srgbClr val="000000">
@@ -30402,14 +30403,14 @@
             <a:effectLst/>
             <a:extLst>
               <a:ext uri="{909E8E84-426E-40dd-AFC4-6F175D3DCCD1}">
-                <a14:hiddenFill xmlns="" xmlns:a14="http://schemas.microsoft.com/office/drawing/2010/main">
+                <a14:hiddenFill xmlns:a14="http://schemas.microsoft.com/office/drawing/2010/main" xmlns="">
                   <a:solidFill>
                     <a:srgbClr val="FFFFFF"/>
                   </a:solidFill>
                 </a14:hiddenFill>
               </a:ext>
               <a:ext uri="{91240B29-F687-4f45-9708-019B960494DF}">
-                <a14:hiddenLine xmlns="" xmlns:a14="http://schemas.microsoft.com/office/drawing/2010/main" w="9525" cap="flat">
+                <a14:hiddenLine xmlns:a14="http://schemas.microsoft.com/office/drawing/2010/main" xmlns="" w="9525" cap="flat">
                   <a:solidFill>
                     <a:srgbClr val="000000"/>
                   </a:solidFill>
@@ -30419,7 +30420,7 @@
                 </a14:hiddenLine>
               </a:ext>
               <a:ext uri="{AF507438-7753-43e0-B8FC-AC1667EBCBE1}">
-                <a14:hiddenEffects xmlns="" xmlns:a14="http://schemas.microsoft.com/office/drawing/2010/main">
+                <a14:hiddenEffects xmlns:a14="http://schemas.microsoft.com/office/drawing/2010/main" xmlns="">
                   <a:effectLst>
                     <a:outerShdw blurRad="63500" dist="38099" dir="2700000" algn="ctr" rotWithShape="0">
                       <a:srgbClr val="000000">
@@ -30686,7 +30687,7 @@
             <a:effectLst/>
             <a:extLst>
               <a:ext uri="{91240B29-F687-4f45-9708-019B960494DF}">
-                <a14:hiddenLine xmlns="" xmlns:a14="http://schemas.microsoft.com/office/drawing/2010/main" w="9525" cap="flat">
+                <a14:hiddenLine xmlns:a14="http://schemas.microsoft.com/office/drawing/2010/main" xmlns="" w="9525" cap="flat">
                   <a:solidFill>
                     <a:srgbClr val="FFFFFF"/>
                   </a:solidFill>
@@ -30696,7 +30697,7 @@
                 </a14:hiddenLine>
               </a:ext>
               <a:ext uri="{AF507438-7753-43e0-B8FC-AC1667EBCBE1}">
-                <a14:hiddenEffects xmlns="" xmlns:a14="http://schemas.microsoft.com/office/drawing/2010/main">
+                <a14:hiddenEffects xmlns:a14="http://schemas.microsoft.com/office/drawing/2010/main" xmlns="">
                   <a:effectLst>
                     <a:outerShdw blurRad="63500" dist="38099" dir="2700000" algn="ctr" rotWithShape="0">
                       <a:srgbClr val="000000">
@@ -30962,14 +30963,14 @@
           <a:effectLst/>
           <a:extLst>
             <a:ext uri="{909E8E84-426E-40dd-AFC4-6F175D3DCCD1}">
-              <a14:hiddenFill xmlns="" xmlns:a14="http://schemas.microsoft.com/office/drawing/2010/main">
+              <a14:hiddenFill xmlns:a14="http://schemas.microsoft.com/office/drawing/2010/main" xmlns="">
                 <a:solidFill>
                   <a:srgbClr val="FFFFFF"/>
                 </a:solidFill>
               </a14:hiddenFill>
             </a:ext>
             <a:ext uri="{91240B29-F687-4f45-9708-019B960494DF}">
-              <a14:hiddenLine xmlns="" xmlns:a14="http://schemas.microsoft.com/office/drawing/2010/main" w="9525" cap="flat">
+              <a14:hiddenLine xmlns:a14="http://schemas.microsoft.com/office/drawing/2010/main" xmlns="" w="9525" cap="flat">
                 <a:solidFill>
                   <a:srgbClr val="808080"/>
                 </a:solidFill>
@@ -30979,7 +30980,7 @@
               </a14:hiddenLine>
             </a:ext>
             <a:ext uri="{AF507438-7753-43e0-B8FC-AC1667EBCBE1}">
-              <a14:hiddenEffects xmlns="" xmlns:a14="http://schemas.microsoft.com/office/drawing/2010/main">
+              <a14:hiddenEffects xmlns:a14="http://schemas.microsoft.com/office/drawing/2010/main" xmlns="">
                 <a:effectLst>
                   <a:outerShdw blurRad="63500" dist="38099" dir="2700000" algn="ctr" rotWithShape="0">
                     <a:srgbClr val="000000">
@@ -31217,14 +31218,14 @@
           <a:effectLst/>
           <a:extLst>
             <a:ext uri="{909E8E84-426E-40dd-AFC4-6F175D3DCCD1}">
-              <a14:hiddenFill xmlns="" xmlns:a14="http://schemas.microsoft.com/office/drawing/2010/main">
+              <a14:hiddenFill xmlns:a14="http://schemas.microsoft.com/office/drawing/2010/main" xmlns="">
                 <a:solidFill>
                   <a:srgbClr val="FFFFFF"/>
                 </a:solidFill>
               </a14:hiddenFill>
             </a:ext>
             <a:ext uri="{91240B29-F687-4f45-9708-019B960494DF}">
-              <a14:hiddenLine xmlns="" xmlns:a14="http://schemas.microsoft.com/office/drawing/2010/main" w="9525" cap="flat">
+              <a14:hiddenLine xmlns:a14="http://schemas.microsoft.com/office/drawing/2010/main" xmlns="" w="9525" cap="flat">
                 <a:solidFill>
                   <a:srgbClr val="000000"/>
                 </a:solidFill>
@@ -31234,7 +31235,7 @@
               </a14:hiddenLine>
             </a:ext>
             <a:ext uri="{AF507438-7753-43e0-B8FC-AC1667EBCBE1}">
-              <a14:hiddenEffects xmlns="" xmlns:a14="http://schemas.microsoft.com/office/drawing/2010/main">
+              <a14:hiddenEffects xmlns:a14="http://schemas.microsoft.com/office/drawing/2010/main" xmlns="">
                 <a:effectLst>
                   <a:outerShdw blurRad="63500" dist="38099" dir="2700000" algn="ctr" rotWithShape="0">
                     <a:srgbClr val="000000">
@@ -31761,7 +31762,7 @@
           <a:effectLst/>
           <a:extLst>
             <a:ext uri="{909E8E84-426E-40dd-AFC4-6F175D3DCCD1}">
-              <a14:hiddenFill xmlns="" xmlns:a14="http://schemas.microsoft.com/office/drawing/2010/main">
+              <a14:hiddenFill xmlns:a14="http://schemas.microsoft.com/office/drawing/2010/main" xmlns="">
                 <a:blipFill dpi="0" rotWithShape="0">
                   <a:blip/>
                   <a:srcRect/>
@@ -31772,7 +31773,7 @@
               </a14:hiddenFill>
             </a:ext>
             <a:ext uri="{91240B29-F687-4f45-9708-019B960494DF}">
-              <a14:hiddenLine xmlns="" xmlns:a14="http://schemas.microsoft.com/office/drawing/2010/main" w="9525" cap="flat">
+              <a14:hiddenLine xmlns:a14="http://schemas.microsoft.com/office/drawing/2010/main" xmlns="" w="9525" cap="flat">
                 <a:solidFill>
                   <a:srgbClr val="808080"/>
                 </a:solidFill>
@@ -31782,7 +31783,7 @@
               </a14:hiddenLine>
             </a:ext>
             <a:ext uri="{AF507438-7753-43e0-B8FC-AC1667EBCBE1}">
-              <a14:hiddenEffects xmlns="" xmlns:a14="http://schemas.microsoft.com/office/drawing/2010/main">
+              <a14:hiddenEffects xmlns:a14="http://schemas.microsoft.com/office/drawing/2010/main" xmlns="">
                 <a:effectLst>
                   <a:outerShdw blurRad="63500" dist="38099" dir="2700000" algn="ctr" rotWithShape="0">
                     <a:srgbClr val="000000">
@@ -31818,14 +31819,14 @@
           <a:effectLst/>
           <a:extLst>
             <a:ext uri="{909E8E84-426E-40dd-AFC4-6F175D3DCCD1}">
-              <a14:hiddenFill xmlns="" xmlns:a14="http://schemas.microsoft.com/office/drawing/2010/main">
+              <a14:hiddenFill xmlns:a14="http://schemas.microsoft.com/office/drawing/2010/main" xmlns="">
                 <a:solidFill>
                   <a:srgbClr val="FFFFFF"/>
                 </a:solidFill>
               </a14:hiddenFill>
             </a:ext>
             <a:ext uri="{91240B29-F687-4f45-9708-019B960494DF}">
-              <a14:hiddenLine xmlns="" xmlns:a14="http://schemas.microsoft.com/office/drawing/2010/main" w="9525" cap="flat">
+              <a14:hiddenLine xmlns:a14="http://schemas.microsoft.com/office/drawing/2010/main" xmlns="" w="9525" cap="flat">
                 <a:solidFill>
                   <a:srgbClr val="808080"/>
                 </a:solidFill>
@@ -31835,7 +31836,7 @@
               </a14:hiddenLine>
             </a:ext>
             <a:ext uri="{AF507438-7753-43e0-B8FC-AC1667EBCBE1}">
-              <a14:hiddenEffects xmlns="" xmlns:a14="http://schemas.microsoft.com/office/drawing/2010/main">
+              <a14:hiddenEffects xmlns:a14="http://schemas.microsoft.com/office/drawing/2010/main" xmlns="">
                 <a:effectLst>
                   <a:outerShdw blurRad="63500" dist="38099" dir="2700000" algn="ctr" rotWithShape="0">
                     <a:srgbClr val="000000">
@@ -32191,7 +32192,7 @@
           <a:effectLst/>
           <a:extLst>
             <a:ext uri="{909E8E84-426E-40dd-AFC4-6F175D3DCCD1}">
-              <a14:hiddenFill xmlns="" xmlns:a14="http://schemas.microsoft.com/office/drawing/2010/main">
+              <a14:hiddenFill xmlns:a14="http://schemas.microsoft.com/office/drawing/2010/main" xmlns="">
                 <a:blipFill dpi="0" rotWithShape="0">
                   <a:blip/>
                   <a:srcRect l="14014" t="4515" r="7593" b="32079"/>
@@ -32202,7 +32203,7 @@
               </a14:hiddenFill>
             </a:ext>
             <a:ext uri="{91240B29-F687-4f45-9708-019B960494DF}">
-              <a14:hiddenLine xmlns="" xmlns:a14="http://schemas.microsoft.com/office/drawing/2010/main" w="9525" cap="flat">
+              <a14:hiddenLine xmlns:a14="http://schemas.microsoft.com/office/drawing/2010/main" xmlns="" w="9525" cap="flat">
                 <a:solidFill>
                   <a:srgbClr val="808080"/>
                 </a:solidFill>
@@ -32212,7 +32213,7 @@
               </a14:hiddenLine>
             </a:ext>
             <a:ext uri="{AF507438-7753-43e0-B8FC-AC1667EBCBE1}">
-              <a14:hiddenEffects xmlns="" xmlns:a14="http://schemas.microsoft.com/office/drawing/2010/main">
+              <a14:hiddenEffects xmlns:a14="http://schemas.microsoft.com/office/drawing/2010/main" xmlns="">
                 <a:effectLst>
                   <a:outerShdw blurRad="63500" dist="38099" dir="2700000" algn="ctr" rotWithShape="0">
                     <a:srgbClr val="000000">
@@ -32248,14 +32249,14 @@
           <a:effectLst/>
           <a:extLst>
             <a:ext uri="{909E8E84-426E-40dd-AFC4-6F175D3DCCD1}">
-              <a14:hiddenFill xmlns="" xmlns:a14="http://schemas.microsoft.com/office/drawing/2010/main">
+              <a14:hiddenFill xmlns:a14="http://schemas.microsoft.com/office/drawing/2010/main" xmlns="">
                 <a:solidFill>
                   <a:srgbClr val="FFFFFF"/>
                 </a:solidFill>
               </a14:hiddenFill>
             </a:ext>
             <a:ext uri="{91240B29-F687-4f45-9708-019B960494DF}">
-              <a14:hiddenLine xmlns="" xmlns:a14="http://schemas.microsoft.com/office/drawing/2010/main" w="9525" cap="flat">
+              <a14:hiddenLine xmlns:a14="http://schemas.microsoft.com/office/drawing/2010/main" xmlns="" w="9525" cap="flat">
                 <a:solidFill>
                   <a:srgbClr val="808080"/>
                 </a:solidFill>
@@ -32265,7 +32266,7 @@
               </a14:hiddenLine>
             </a:ext>
             <a:ext uri="{AF507438-7753-43e0-B8FC-AC1667EBCBE1}">
-              <a14:hiddenEffects xmlns="" xmlns:a14="http://schemas.microsoft.com/office/drawing/2010/main">
+              <a14:hiddenEffects xmlns:a14="http://schemas.microsoft.com/office/drawing/2010/main" xmlns="">
                 <a:effectLst>
                   <a:outerShdw blurRad="63500" dist="38099" dir="2700000" algn="ctr" rotWithShape="0">
                     <a:srgbClr val="000000">
@@ -32870,7 +32871,7 @@
         <a:effectLst/>
         <a:extLst>
           <a:ext uri="{AF507438-7753-43e0-B8FC-AC1667EBCBE1}">
-            <a14:hiddenEffects xmlns="" xmlns:a14="http://schemas.microsoft.com/office/drawing/2010/main">
+            <a14:hiddenEffects xmlns:a14="http://schemas.microsoft.com/office/drawing/2010/main" xmlns="">
               <a:effectLst>
                 <a:outerShdw blurRad="63500" dist="38099" dir="2700000" algn="ctr" rotWithShape="0">
                   <a:schemeClr val="bg2">
@@ -32946,7 +32947,7 @@
         <a:effectLst/>
         <a:extLst>
           <a:ext uri="{AF507438-7753-43e0-B8FC-AC1667EBCBE1}">
-            <a14:hiddenEffects xmlns="" xmlns:a14="http://schemas.microsoft.com/office/drawing/2010/main">
+            <a14:hiddenEffects xmlns:a14="http://schemas.microsoft.com/office/drawing/2010/main" xmlns="">
               <a:effectLst>
                 <a:outerShdw blurRad="63500" dist="38099" dir="2700000" algn="ctr" rotWithShape="0">
                   <a:schemeClr val="bg2">

--- a/docs/res/media/sources images iAccess.pptx
+++ b/docs/res/media/sources images iAccess.pptx
@@ -262,17 +262,17 @@
           <a:effectLst/>
           <a:extLst>
             <a:ext uri="{FAA26D3D-D897-4be2-8F04-BA451C77F1D7}">
-              <ma14:placeholderFlag xmlns:ma14="http://schemas.microsoft.com/office/mac/drawingml/2011/main" xmlns="" val="1"/>
+              <ma14:placeholderFlag xmlns="" xmlns:ma14="http://schemas.microsoft.com/office/mac/drawingml/2011/main" val="1"/>
             </a:ext>
             <a:ext uri="{909E8E84-426E-40dd-AFC4-6F175D3DCCD1}">
-              <a14:hiddenFill xmlns:a14="http://schemas.microsoft.com/office/drawing/2010/main" xmlns="">
+              <a14:hiddenFill xmlns="" xmlns:a14="http://schemas.microsoft.com/office/drawing/2010/main">
                 <a:solidFill>
                   <a:srgbClr val="FFFFFF"/>
                 </a:solidFill>
               </a14:hiddenFill>
             </a:ext>
             <a:ext uri="{91240B29-F687-4f45-9708-019B960494DF}">
-              <a14:hiddenLine xmlns:a14="http://schemas.microsoft.com/office/drawing/2010/main" xmlns="" w="9525" cap="flat">
+              <a14:hiddenLine xmlns="" xmlns:a14="http://schemas.microsoft.com/office/drawing/2010/main" w="9525" cap="flat">
                 <a:solidFill>
                   <a:srgbClr val="000000"/>
                 </a:solidFill>
@@ -282,7 +282,7 @@
               </a14:hiddenLine>
             </a:ext>
             <a:ext uri="{AF507438-7753-43e0-B8FC-AC1667EBCBE1}">
-              <a14:hiddenEffects xmlns:a14="http://schemas.microsoft.com/office/drawing/2010/main" xmlns="">
+              <a14:hiddenEffects xmlns="" xmlns:a14="http://schemas.microsoft.com/office/drawing/2010/main">
                 <a:effectLst>
                   <a:outerShdw blurRad="63500" dist="38099" dir="2700000" algn="ctr" rotWithShape="0">
                     <a:schemeClr val="bg2">
@@ -320,17 +320,17 @@
           <a:effectLst/>
           <a:extLst>
             <a:ext uri="{FAA26D3D-D897-4be2-8F04-BA451C77F1D7}">
-              <ma14:placeholderFlag xmlns:ma14="http://schemas.microsoft.com/office/mac/drawingml/2011/main" xmlns="" val="1"/>
+              <ma14:placeholderFlag xmlns="" xmlns:ma14="http://schemas.microsoft.com/office/mac/drawingml/2011/main" val="1"/>
             </a:ext>
             <a:ext uri="{909E8E84-426E-40dd-AFC4-6F175D3DCCD1}">
-              <a14:hiddenFill xmlns:a14="http://schemas.microsoft.com/office/drawing/2010/main" xmlns="">
+              <a14:hiddenFill xmlns="" xmlns:a14="http://schemas.microsoft.com/office/drawing/2010/main">
                 <a:solidFill>
                   <a:srgbClr val="FFFFFF"/>
                 </a:solidFill>
               </a14:hiddenFill>
             </a:ext>
             <a:ext uri="{91240B29-F687-4f45-9708-019B960494DF}">
-              <a14:hiddenLine xmlns:a14="http://schemas.microsoft.com/office/drawing/2010/main" xmlns="" w="9525" cap="flat">
+              <a14:hiddenLine xmlns="" xmlns:a14="http://schemas.microsoft.com/office/drawing/2010/main" w="9525" cap="flat">
                 <a:solidFill>
                   <a:srgbClr val="000000"/>
                 </a:solidFill>
@@ -340,7 +340,7 @@
               </a14:hiddenLine>
             </a:ext>
             <a:ext uri="{AF507438-7753-43e0-B8FC-AC1667EBCBE1}">
-              <a14:hiddenEffects xmlns:a14="http://schemas.microsoft.com/office/drawing/2010/main" xmlns="">
+              <a14:hiddenEffects xmlns="" xmlns:a14="http://schemas.microsoft.com/office/drawing/2010/main">
                 <a:effectLst>
                   <a:outerShdw blurRad="63500" dist="38099" dir="2700000" algn="ctr" rotWithShape="0">
                     <a:schemeClr val="bg2">
@@ -390,17 +390,17 @@
           <a:effectLst/>
           <a:extLst>
             <a:ext uri="{FAA26D3D-D897-4be2-8F04-BA451C77F1D7}">
-              <ma14:placeholderFlag xmlns:ma14="http://schemas.microsoft.com/office/mac/drawingml/2011/main" xmlns="" val="1"/>
+              <ma14:placeholderFlag xmlns="" xmlns:ma14="http://schemas.microsoft.com/office/mac/drawingml/2011/main" val="1"/>
             </a:ext>
             <a:ext uri="{909E8E84-426E-40dd-AFC4-6F175D3DCCD1}">
-              <a14:hiddenFill xmlns:a14="http://schemas.microsoft.com/office/drawing/2010/main" xmlns="">
+              <a14:hiddenFill xmlns="" xmlns:a14="http://schemas.microsoft.com/office/drawing/2010/main">
                 <a:solidFill>
                   <a:srgbClr val="FFFFFF"/>
                 </a:solidFill>
               </a14:hiddenFill>
             </a:ext>
             <a:ext uri="{91240B29-F687-4f45-9708-019B960494DF}">
-              <a14:hiddenLine xmlns:a14="http://schemas.microsoft.com/office/drawing/2010/main" xmlns="" w="9525" cap="flat">
+              <a14:hiddenLine xmlns="" xmlns:a14="http://schemas.microsoft.com/office/drawing/2010/main" w="9525" cap="flat">
                 <a:solidFill>
                   <a:srgbClr val="000000"/>
                 </a:solidFill>
@@ -410,7 +410,7 @@
               </a14:hiddenLine>
             </a:ext>
             <a:ext uri="{AF507438-7753-43e0-B8FC-AC1667EBCBE1}">
-              <a14:hiddenEffects xmlns:a14="http://schemas.microsoft.com/office/drawing/2010/main" xmlns="">
+              <a14:hiddenEffects xmlns="" xmlns:a14="http://schemas.microsoft.com/office/drawing/2010/main">
                 <a:effectLst>
                   <a:outerShdw blurRad="63500" dist="38099" dir="2700000" algn="ctr" rotWithShape="0">
                     <a:schemeClr val="bg2">
@@ -481,17 +481,17 @@
           <a:effectLst/>
           <a:extLst>
             <a:ext uri="{FAA26D3D-D897-4be2-8F04-BA451C77F1D7}">
-              <ma14:placeholderFlag xmlns:ma14="http://schemas.microsoft.com/office/mac/drawingml/2011/main" xmlns="" val="1"/>
+              <ma14:placeholderFlag xmlns="" xmlns:ma14="http://schemas.microsoft.com/office/mac/drawingml/2011/main" val="1"/>
             </a:ext>
             <a:ext uri="{909E8E84-426E-40dd-AFC4-6F175D3DCCD1}">
-              <a14:hiddenFill xmlns:a14="http://schemas.microsoft.com/office/drawing/2010/main" xmlns="">
+              <a14:hiddenFill xmlns="" xmlns:a14="http://schemas.microsoft.com/office/drawing/2010/main">
                 <a:solidFill>
                   <a:srgbClr val="FFFFFF"/>
                 </a:solidFill>
               </a14:hiddenFill>
             </a:ext>
             <a:ext uri="{91240B29-F687-4f45-9708-019B960494DF}">
-              <a14:hiddenLine xmlns:a14="http://schemas.microsoft.com/office/drawing/2010/main" xmlns="" w="9525" cap="flat">
+              <a14:hiddenLine xmlns="" xmlns:a14="http://schemas.microsoft.com/office/drawing/2010/main" w="9525" cap="flat">
                 <a:solidFill>
                   <a:srgbClr val="000000"/>
                 </a:solidFill>
@@ -501,7 +501,7 @@
               </a14:hiddenLine>
             </a:ext>
             <a:ext uri="{AF507438-7753-43e0-B8FC-AC1667EBCBE1}">
-              <a14:hiddenEffects xmlns:a14="http://schemas.microsoft.com/office/drawing/2010/main" xmlns="">
+              <a14:hiddenEffects xmlns="" xmlns:a14="http://schemas.microsoft.com/office/drawing/2010/main">
                 <a:effectLst>
                   <a:outerShdw blurRad="63500" dist="38099" dir="2700000" algn="ctr" rotWithShape="0">
                     <a:schemeClr val="bg2">
@@ -572,17 +572,17 @@
           <a:effectLst/>
           <a:extLst>
             <a:ext uri="{FAA26D3D-D897-4be2-8F04-BA451C77F1D7}">
-              <ma14:placeholderFlag xmlns:ma14="http://schemas.microsoft.com/office/mac/drawingml/2011/main" xmlns="" val="1"/>
+              <ma14:placeholderFlag xmlns="" xmlns:ma14="http://schemas.microsoft.com/office/mac/drawingml/2011/main" val="1"/>
             </a:ext>
             <a:ext uri="{909E8E84-426E-40dd-AFC4-6F175D3DCCD1}">
-              <a14:hiddenFill xmlns:a14="http://schemas.microsoft.com/office/drawing/2010/main" xmlns="">
+              <a14:hiddenFill xmlns="" xmlns:a14="http://schemas.microsoft.com/office/drawing/2010/main">
                 <a:solidFill>
                   <a:srgbClr val="FFFFFF"/>
                 </a:solidFill>
               </a14:hiddenFill>
             </a:ext>
             <a:ext uri="{91240B29-F687-4f45-9708-019B960494DF}">
-              <a14:hiddenLine xmlns:a14="http://schemas.microsoft.com/office/drawing/2010/main" xmlns="" w="9525" cap="flat">
+              <a14:hiddenLine xmlns="" xmlns:a14="http://schemas.microsoft.com/office/drawing/2010/main" w="9525" cap="flat">
                 <a:solidFill>
                   <a:srgbClr val="000000"/>
                 </a:solidFill>
@@ -592,7 +592,7 @@
               </a14:hiddenLine>
             </a:ext>
             <a:ext uri="{AF507438-7753-43e0-B8FC-AC1667EBCBE1}">
-              <a14:hiddenEffects xmlns:a14="http://schemas.microsoft.com/office/drawing/2010/main" xmlns="">
+              <a14:hiddenEffects xmlns="" xmlns:a14="http://schemas.microsoft.com/office/drawing/2010/main">
                 <a:effectLst>
                   <a:outerShdw blurRad="63500" dist="38099" dir="2700000" algn="ctr" rotWithShape="0">
                     <a:schemeClr val="bg2">
@@ -663,17 +663,17 @@
           <a:effectLst/>
           <a:extLst>
             <a:ext uri="{FAA26D3D-D897-4be2-8F04-BA451C77F1D7}">
-              <ma14:placeholderFlag xmlns:ma14="http://schemas.microsoft.com/office/mac/drawingml/2011/main" xmlns="" val="1"/>
+              <ma14:placeholderFlag xmlns="" xmlns:ma14="http://schemas.microsoft.com/office/mac/drawingml/2011/main" val="1"/>
             </a:ext>
             <a:ext uri="{909E8E84-426E-40dd-AFC4-6F175D3DCCD1}">
-              <a14:hiddenFill xmlns:a14="http://schemas.microsoft.com/office/drawing/2010/main" xmlns="">
+              <a14:hiddenFill xmlns="" xmlns:a14="http://schemas.microsoft.com/office/drawing/2010/main">
                 <a:solidFill>
                   <a:srgbClr val="FFFFFF"/>
                 </a:solidFill>
               </a14:hiddenFill>
             </a:ext>
             <a:ext uri="{91240B29-F687-4f45-9708-019B960494DF}">
-              <a14:hiddenLine xmlns:a14="http://schemas.microsoft.com/office/drawing/2010/main" xmlns="" w="9525" cap="flat">
+              <a14:hiddenLine xmlns="" xmlns:a14="http://schemas.microsoft.com/office/drawing/2010/main" w="9525" cap="flat">
                 <a:solidFill>
                   <a:srgbClr val="000000"/>
                 </a:solidFill>
@@ -683,7 +683,7 @@
               </a14:hiddenLine>
             </a:ext>
             <a:ext uri="{AF507438-7753-43e0-B8FC-AC1667EBCBE1}">
-              <a14:hiddenEffects xmlns:a14="http://schemas.microsoft.com/office/drawing/2010/main" xmlns="">
+              <a14:hiddenEffects xmlns="" xmlns:a14="http://schemas.microsoft.com/office/drawing/2010/main">
                 <a:effectLst>
                   <a:outerShdw blurRad="63500" dist="38099" dir="2700000" algn="ctr" rotWithShape="0">
                     <a:schemeClr val="bg2">
@@ -974,7 +974,7 @@
           </a:ln>
           <a:extLst>
             <a:ext uri="{AF507438-7753-43e0-B8FC-AC1667EBCBE1}">
-              <a14:hiddenEffects xmlns:a14="http://schemas.microsoft.com/office/drawing/2010/main" xmlns="">
+              <a14:hiddenEffects xmlns="" xmlns:a14="http://schemas.microsoft.com/office/drawing/2010/main">
                 <a:effectLst>
                   <a:outerShdw blurRad="63500" dist="38099" dir="2700000" algn="ctr" rotWithShape="0">
                     <a:srgbClr val="000000">
@@ -1009,14 +1009,14 @@
           <a:ln/>
           <a:extLst>
             <a:ext uri="{909E8E84-426E-40dd-AFC4-6F175D3DCCD1}">
-              <a14:hiddenFill xmlns:a14="http://schemas.microsoft.com/office/drawing/2010/main" xmlns="">
+              <a14:hiddenFill xmlns="" xmlns:a14="http://schemas.microsoft.com/office/drawing/2010/main">
                 <a:solidFill>
                   <a:srgbClr val="FFFFFF"/>
                 </a:solidFill>
               </a14:hiddenFill>
             </a:ext>
             <a:ext uri="{91240B29-F687-4f45-9708-019B960494DF}">
-              <a14:hiddenLine xmlns:a14="http://schemas.microsoft.com/office/drawing/2010/main" xmlns="" w="9525" cap="flat">
+              <a14:hiddenLine xmlns="" xmlns:a14="http://schemas.microsoft.com/office/drawing/2010/main" w="9525" cap="flat">
                 <a:solidFill>
                   <a:srgbClr val="000000"/>
                 </a:solidFill>
@@ -1026,7 +1026,7 @@
               </a14:hiddenLine>
             </a:ext>
             <a:ext uri="{AF507438-7753-43e0-B8FC-AC1667EBCBE1}">
-              <a14:hiddenEffects xmlns:a14="http://schemas.microsoft.com/office/drawing/2010/main" xmlns="">
+              <a14:hiddenEffects xmlns="" xmlns:a14="http://schemas.microsoft.com/office/drawing/2010/main">
                 <a:effectLst>
                   <a:outerShdw blurRad="63500" dist="38099" dir="2700000" algn="ctr" rotWithShape="0">
                     <a:srgbClr val="000000">
@@ -1136,7 +1136,7 @@
           </a:ln>
           <a:extLst>
             <a:ext uri="{AF507438-7753-43e0-B8FC-AC1667EBCBE1}">
-              <a14:hiddenEffects xmlns:a14="http://schemas.microsoft.com/office/drawing/2010/main" xmlns="">
+              <a14:hiddenEffects xmlns="" xmlns:a14="http://schemas.microsoft.com/office/drawing/2010/main">
                 <a:effectLst>
                   <a:outerShdw blurRad="63500" dist="38099" dir="2700000" algn="ctr" rotWithShape="0">
                     <a:srgbClr val="000000">
@@ -1171,14 +1171,14 @@
           <a:ln/>
           <a:extLst>
             <a:ext uri="{909E8E84-426E-40dd-AFC4-6F175D3DCCD1}">
-              <a14:hiddenFill xmlns:a14="http://schemas.microsoft.com/office/drawing/2010/main" xmlns="">
+              <a14:hiddenFill xmlns="" xmlns:a14="http://schemas.microsoft.com/office/drawing/2010/main">
                 <a:solidFill>
                   <a:srgbClr val="FFFFFF"/>
                 </a:solidFill>
               </a14:hiddenFill>
             </a:ext>
             <a:ext uri="{91240B29-F687-4f45-9708-019B960494DF}">
-              <a14:hiddenLine xmlns:a14="http://schemas.microsoft.com/office/drawing/2010/main" xmlns="" w="9525" cap="flat">
+              <a14:hiddenLine xmlns="" xmlns:a14="http://schemas.microsoft.com/office/drawing/2010/main" w="9525" cap="flat">
                 <a:solidFill>
                   <a:srgbClr val="000000"/>
                 </a:solidFill>
@@ -1188,7 +1188,7 @@
               </a14:hiddenLine>
             </a:ext>
             <a:ext uri="{AF507438-7753-43e0-B8FC-AC1667EBCBE1}">
-              <a14:hiddenEffects xmlns:a14="http://schemas.microsoft.com/office/drawing/2010/main" xmlns="">
+              <a14:hiddenEffects xmlns="" xmlns:a14="http://schemas.microsoft.com/office/drawing/2010/main">
                 <a:effectLst>
                   <a:outerShdw blurRad="63500" dist="38099" dir="2700000" algn="ctr" rotWithShape="0">
                     <a:srgbClr val="000000">
@@ -1298,7 +1298,7 @@
           </a:ln>
           <a:extLst>
             <a:ext uri="{AF507438-7753-43e0-B8FC-AC1667EBCBE1}">
-              <a14:hiddenEffects xmlns:a14="http://schemas.microsoft.com/office/drawing/2010/main" xmlns="">
+              <a14:hiddenEffects xmlns="" xmlns:a14="http://schemas.microsoft.com/office/drawing/2010/main">
                 <a:effectLst>
                   <a:outerShdw blurRad="63500" dist="38099" dir="2700000" algn="ctr" rotWithShape="0">
                     <a:srgbClr val="000000">
@@ -1333,14 +1333,14 @@
           <a:ln/>
           <a:extLst>
             <a:ext uri="{909E8E84-426E-40dd-AFC4-6F175D3DCCD1}">
-              <a14:hiddenFill xmlns:a14="http://schemas.microsoft.com/office/drawing/2010/main" xmlns="">
+              <a14:hiddenFill xmlns="" xmlns:a14="http://schemas.microsoft.com/office/drawing/2010/main">
                 <a:solidFill>
                   <a:srgbClr val="FFFFFF"/>
                 </a:solidFill>
               </a14:hiddenFill>
             </a:ext>
             <a:ext uri="{91240B29-F687-4f45-9708-019B960494DF}">
-              <a14:hiddenLine xmlns:a14="http://schemas.microsoft.com/office/drawing/2010/main" xmlns="" w="9525" cap="flat">
+              <a14:hiddenLine xmlns="" xmlns:a14="http://schemas.microsoft.com/office/drawing/2010/main" w="9525" cap="flat">
                 <a:solidFill>
                   <a:srgbClr val="000000"/>
                 </a:solidFill>
@@ -1350,7 +1350,7 @@
               </a14:hiddenLine>
             </a:ext>
             <a:ext uri="{AF507438-7753-43e0-B8FC-AC1667EBCBE1}">
-              <a14:hiddenEffects xmlns:a14="http://schemas.microsoft.com/office/drawing/2010/main" xmlns="">
+              <a14:hiddenEffects xmlns="" xmlns:a14="http://schemas.microsoft.com/office/drawing/2010/main">
                 <a:effectLst>
                   <a:outerShdw blurRad="63500" dist="38099" dir="2700000" algn="ctr" rotWithShape="0">
                     <a:srgbClr val="000000">
@@ -4015,17 +4015,17 @@
           <a:effectLst/>
           <a:extLst>
             <a:ext uri="{FAA26D3D-D897-4be2-8F04-BA451C77F1D7}">
-              <ma14:placeholderFlag xmlns:ma14="http://schemas.microsoft.com/office/mac/drawingml/2011/main" xmlns="" val="1"/>
+              <ma14:placeholderFlag xmlns="" xmlns:ma14="http://schemas.microsoft.com/office/mac/drawingml/2011/main" val="1"/>
             </a:ext>
             <a:ext uri="{909E8E84-426E-40dd-AFC4-6F175D3DCCD1}">
-              <a14:hiddenFill xmlns:a14="http://schemas.microsoft.com/office/drawing/2010/main" xmlns="">
+              <a14:hiddenFill xmlns="" xmlns:a14="http://schemas.microsoft.com/office/drawing/2010/main">
                 <a:solidFill>
                   <a:srgbClr val="FFFFFF"/>
                 </a:solidFill>
               </a14:hiddenFill>
             </a:ext>
             <a:ext uri="{91240B29-F687-4f45-9708-019B960494DF}">
-              <a14:hiddenLine xmlns:a14="http://schemas.microsoft.com/office/drawing/2010/main" xmlns="" w="9525" cap="flat">
+              <a14:hiddenLine xmlns="" xmlns:a14="http://schemas.microsoft.com/office/drawing/2010/main" w="9525" cap="flat">
                 <a:solidFill>
                   <a:srgbClr val="000000"/>
                 </a:solidFill>
@@ -4035,7 +4035,7 @@
               </a14:hiddenLine>
             </a:ext>
             <a:ext uri="{AF507438-7753-43e0-B8FC-AC1667EBCBE1}">
-              <a14:hiddenEffects xmlns:a14="http://schemas.microsoft.com/office/drawing/2010/main" xmlns="">
+              <a14:hiddenEffects xmlns="" xmlns:a14="http://schemas.microsoft.com/office/drawing/2010/main">
                 <a:effectLst>
                   <a:outerShdw blurRad="63500" dist="38099" dir="2700000" algn="ctr" rotWithShape="0">
                     <a:schemeClr val="bg2">
@@ -4088,17 +4088,17 @@
           <a:effectLst/>
           <a:extLst>
             <a:ext uri="{FAA26D3D-D897-4be2-8F04-BA451C77F1D7}">
-              <ma14:placeholderFlag xmlns:ma14="http://schemas.microsoft.com/office/mac/drawingml/2011/main" xmlns="" val="1"/>
+              <ma14:placeholderFlag xmlns="" xmlns:ma14="http://schemas.microsoft.com/office/mac/drawingml/2011/main" val="1"/>
             </a:ext>
             <a:ext uri="{909E8E84-426E-40dd-AFC4-6F175D3DCCD1}">
-              <a14:hiddenFill xmlns:a14="http://schemas.microsoft.com/office/drawing/2010/main" xmlns="">
+              <a14:hiddenFill xmlns="" xmlns:a14="http://schemas.microsoft.com/office/drawing/2010/main">
                 <a:solidFill>
                   <a:srgbClr val="FFFFFF"/>
                 </a:solidFill>
               </a14:hiddenFill>
             </a:ext>
             <a:ext uri="{91240B29-F687-4f45-9708-019B960494DF}">
-              <a14:hiddenLine xmlns:a14="http://schemas.microsoft.com/office/drawing/2010/main" xmlns="" w="9525" cap="flat">
+              <a14:hiddenLine xmlns="" xmlns:a14="http://schemas.microsoft.com/office/drawing/2010/main" w="9525" cap="flat">
                 <a:solidFill>
                   <a:srgbClr val="000000"/>
                 </a:solidFill>
@@ -4108,7 +4108,7 @@
               </a14:hiddenLine>
             </a:ext>
             <a:ext uri="{AF507438-7753-43e0-B8FC-AC1667EBCBE1}">
-              <a14:hiddenEffects xmlns:a14="http://schemas.microsoft.com/office/drawing/2010/main" xmlns="">
+              <a14:hiddenEffects xmlns="" xmlns:a14="http://schemas.microsoft.com/office/drawing/2010/main">
                 <a:effectLst>
                   <a:outerShdw blurRad="63500" dist="38099" dir="2700000" algn="ctr" rotWithShape="0">
                     <a:schemeClr val="bg2">
@@ -4203,17 +4203,17 @@
           <a:effectLst/>
           <a:extLst>
             <a:ext uri="{FAA26D3D-D897-4be2-8F04-BA451C77F1D7}">
-              <ma14:placeholderFlag xmlns:ma14="http://schemas.microsoft.com/office/mac/drawingml/2011/main" xmlns="" val="1"/>
+              <ma14:placeholderFlag xmlns="" xmlns:ma14="http://schemas.microsoft.com/office/mac/drawingml/2011/main" val="1"/>
             </a:ext>
             <a:ext uri="{909E8E84-426E-40dd-AFC4-6F175D3DCCD1}">
-              <a14:hiddenFill xmlns:a14="http://schemas.microsoft.com/office/drawing/2010/main" xmlns="">
+              <a14:hiddenFill xmlns="" xmlns:a14="http://schemas.microsoft.com/office/drawing/2010/main">
                 <a:solidFill>
                   <a:srgbClr val="FFFFFF"/>
                 </a:solidFill>
               </a14:hiddenFill>
             </a:ext>
             <a:ext uri="{91240B29-F687-4f45-9708-019B960494DF}">
-              <a14:hiddenLine xmlns:a14="http://schemas.microsoft.com/office/drawing/2010/main" xmlns="" w="9525" cap="flat">
+              <a14:hiddenLine xmlns="" xmlns:a14="http://schemas.microsoft.com/office/drawing/2010/main" w="9525" cap="flat">
                 <a:solidFill>
                   <a:srgbClr val="000000"/>
                 </a:solidFill>
@@ -4223,7 +4223,7 @@
               </a14:hiddenLine>
             </a:ext>
             <a:ext uri="{AF507438-7753-43e0-B8FC-AC1667EBCBE1}">
-              <a14:hiddenEffects xmlns:a14="http://schemas.microsoft.com/office/drawing/2010/main" xmlns="">
+              <a14:hiddenEffects xmlns="" xmlns:a14="http://schemas.microsoft.com/office/drawing/2010/main">
                 <a:effectLst>
                   <a:outerShdw blurRad="63500" dist="38099" dir="2700000" algn="ctr" rotWithShape="0">
                     <a:schemeClr val="bg2">
@@ -4292,17 +4292,17 @@
           <a:effectLst/>
           <a:extLst>
             <a:ext uri="{FAA26D3D-D897-4be2-8F04-BA451C77F1D7}">
-              <ma14:placeholderFlag xmlns:ma14="http://schemas.microsoft.com/office/mac/drawingml/2011/main" xmlns="" val="1"/>
+              <ma14:placeholderFlag xmlns="" xmlns:ma14="http://schemas.microsoft.com/office/mac/drawingml/2011/main" val="1"/>
             </a:ext>
             <a:ext uri="{909E8E84-426E-40dd-AFC4-6F175D3DCCD1}">
-              <a14:hiddenFill xmlns:a14="http://schemas.microsoft.com/office/drawing/2010/main" xmlns="">
+              <a14:hiddenFill xmlns="" xmlns:a14="http://schemas.microsoft.com/office/drawing/2010/main">
                 <a:solidFill>
                   <a:srgbClr val="FFFFFF"/>
                 </a:solidFill>
               </a14:hiddenFill>
             </a:ext>
             <a:ext uri="{91240B29-F687-4f45-9708-019B960494DF}">
-              <a14:hiddenLine xmlns:a14="http://schemas.microsoft.com/office/drawing/2010/main" xmlns="" w="9525" cap="flat">
+              <a14:hiddenLine xmlns="" xmlns:a14="http://schemas.microsoft.com/office/drawing/2010/main" w="9525" cap="flat">
                 <a:solidFill>
                   <a:srgbClr val="000000"/>
                 </a:solidFill>
@@ -4312,7 +4312,7 @@
               </a14:hiddenLine>
             </a:ext>
             <a:ext uri="{AF507438-7753-43e0-B8FC-AC1667EBCBE1}">
-              <a14:hiddenEffects xmlns:a14="http://schemas.microsoft.com/office/drawing/2010/main" xmlns="">
+              <a14:hiddenEffects xmlns="" xmlns:a14="http://schemas.microsoft.com/office/drawing/2010/main">
                 <a:effectLst>
                   <a:outerShdw blurRad="63500" dist="38099" dir="2700000" algn="ctr" rotWithShape="0">
                     <a:schemeClr val="bg2">
@@ -4383,17 +4383,17 @@
           <a:effectLst/>
           <a:extLst>
             <a:ext uri="{FAA26D3D-D897-4be2-8F04-BA451C77F1D7}">
-              <ma14:placeholderFlag xmlns:ma14="http://schemas.microsoft.com/office/mac/drawingml/2011/main" xmlns="" val="1"/>
+              <ma14:placeholderFlag xmlns="" xmlns:ma14="http://schemas.microsoft.com/office/mac/drawingml/2011/main" val="1"/>
             </a:ext>
             <a:ext uri="{909E8E84-426E-40dd-AFC4-6F175D3DCCD1}">
-              <a14:hiddenFill xmlns:a14="http://schemas.microsoft.com/office/drawing/2010/main" xmlns="">
+              <a14:hiddenFill xmlns="" xmlns:a14="http://schemas.microsoft.com/office/drawing/2010/main">
                 <a:solidFill>
                   <a:srgbClr val="FFFFFF"/>
                 </a:solidFill>
               </a14:hiddenFill>
             </a:ext>
             <a:ext uri="{91240B29-F687-4f45-9708-019B960494DF}">
-              <a14:hiddenLine xmlns:a14="http://schemas.microsoft.com/office/drawing/2010/main" xmlns="" w="9525" cap="flat">
+              <a14:hiddenLine xmlns="" xmlns:a14="http://schemas.microsoft.com/office/drawing/2010/main" w="9525" cap="flat">
                 <a:solidFill>
                   <a:srgbClr val="000000"/>
                 </a:solidFill>
@@ -4403,7 +4403,7 @@
               </a14:hiddenLine>
             </a:ext>
             <a:ext uri="{AF507438-7753-43e0-B8FC-AC1667EBCBE1}">
-              <a14:hiddenEffects xmlns:a14="http://schemas.microsoft.com/office/drawing/2010/main" xmlns="">
+              <a14:hiddenEffects xmlns="" xmlns:a14="http://schemas.microsoft.com/office/drawing/2010/main">
                 <a:effectLst>
                   <a:outerShdw blurRad="63500" dist="38099" dir="2700000" algn="ctr" rotWithShape="0">
                     <a:schemeClr val="bg2">
@@ -5054,7 +5054,7 @@
           <a:effectLst/>
           <a:extLst>
             <a:ext uri="{AF507438-7753-43e0-B8FC-AC1667EBCBE1}">
-              <a14:hiddenEffects xmlns:a14="http://schemas.microsoft.com/office/drawing/2010/main" xmlns="">
+              <a14:hiddenEffects xmlns="" xmlns:a14="http://schemas.microsoft.com/office/drawing/2010/main">
                 <a:effectLst>
                   <a:outerShdw blurRad="63500" dist="38099" dir="2700000" algn="ctr" rotWithShape="0">
                     <a:srgbClr val="000000">
@@ -5106,7 +5106,7 @@
           <a:effectLst/>
           <a:extLst>
             <a:ext uri="{AF507438-7753-43e0-B8FC-AC1667EBCBE1}">
-              <a14:hiddenEffects xmlns:a14="http://schemas.microsoft.com/office/drawing/2010/main" xmlns="">
+              <a14:hiddenEffects xmlns="" xmlns:a14="http://schemas.microsoft.com/office/drawing/2010/main">
                 <a:effectLst>
                   <a:outerShdw blurRad="63500" dist="38099" dir="2700000" algn="ctr" rotWithShape="0">
                     <a:srgbClr val="000000">
@@ -5158,7 +5158,7 @@
           <a:effectLst/>
           <a:extLst>
             <a:ext uri="{AF507438-7753-43e0-B8FC-AC1667EBCBE1}">
-              <a14:hiddenEffects xmlns:a14="http://schemas.microsoft.com/office/drawing/2010/main" xmlns="">
+              <a14:hiddenEffects xmlns="" xmlns:a14="http://schemas.microsoft.com/office/drawing/2010/main">
                 <a:effectLst>
                   <a:outerShdw blurRad="63500" dist="38099" dir="2700000" algn="ctr" rotWithShape="0">
                     <a:srgbClr val="000000">
@@ -5210,7 +5210,7 @@
           <a:effectLst/>
           <a:extLst>
             <a:ext uri="{AF507438-7753-43e0-B8FC-AC1667EBCBE1}">
-              <a14:hiddenEffects xmlns:a14="http://schemas.microsoft.com/office/drawing/2010/main" xmlns="">
+              <a14:hiddenEffects xmlns="" xmlns:a14="http://schemas.microsoft.com/office/drawing/2010/main">
                 <a:effectLst>
                   <a:outerShdw blurRad="63500" dist="38099" dir="2700000" algn="ctr" rotWithShape="0">
                     <a:srgbClr val="000000">
@@ -5260,7 +5260,7 @@
           <a:effectLst/>
           <a:extLst>
             <a:ext uri="{AF507438-7753-43e0-B8FC-AC1667EBCBE1}">
-              <a14:hiddenEffects xmlns:a14="http://schemas.microsoft.com/office/drawing/2010/main" xmlns="">
+              <a14:hiddenEffects xmlns="" xmlns:a14="http://schemas.microsoft.com/office/drawing/2010/main">
                 <a:effectLst>
                   <a:outerShdw blurRad="63500" dist="38099" dir="2700000" algn="ctr" rotWithShape="0">
                     <a:srgbClr val="000000">
@@ -5312,7 +5312,7 @@
           <a:effectLst/>
           <a:extLst>
             <a:ext uri="{AF507438-7753-43e0-B8FC-AC1667EBCBE1}">
-              <a14:hiddenEffects xmlns:a14="http://schemas.microsoft.com/office/drawing/2010/main" xmlns="">
+              <a14:hiddenEffects xmlns="" xmlns:a14="http://schemas.microsoft.com/office/drawing/2010/main">
                 <a:effectLst>
                   <a:outerShdw blurRad="63500" dist="38099" dir="2700000" algn="ctr" rotWithShape="0">
                     <a:srgbClr val="000000">
@@ -5364,7 +5364,7 @@
           <a:effectLst/>
           <a:extLst>
             <a:ext uri="{AF507438-7753-43e0-B8FC-AC1667EBCBE1}">
-              <a14:hiddenEffects xmlns:a14="http://schemas.microsoft.com/office/drawing/2010/main" xmlns="">
+              <a14:hiddenEffects xmlns="" xmlns:a14="http://schemas.microsoft.com/office/drawing/2010/main">
                 <a:effectLst>
                   <a:outerShdw blurRad="63500" dist="38099" dir="2700000" algn="ctr" rotWithShape="0">
                     <a:srgbClr val="000000">
@@ -5416,7 +5416,7 @@
           <a:effectLst/>
           <a:extLst>
             <a:ext uri="{AF507438-7753-43e0-B8FC-AC1667EBCBE1}">
-              <a14:hiddenEffects xmlns:a14="http://schemas.microsoft.com/office/drawing/2010/main" xmlns="">
+              <a14:hiddenEffects xmlns="" xmlns:a14="http://schemas.microsoft.com/office/drawing/2010/main">
                 <a:effectLst>
                   <a:outerShdw blurRad="63500" dist="38099" dir="2700000" algn="ctr" rotWithShape="0">
                     <a:srgbClr val="000000">
@@ -5468,7 +5468,7 @@
           <a:effectLst/>
           <a:extLst>
             <a:ext uri="{AF507438-7753-43e0-B8FC-AC1667EBCBE1}">
-              <a14:hiddenEffects xmlns:a14="http://schemas.microsoft.com/office/drawing/2010/main" xmlns="">
+              <a14:hiddenEffects xmlns="" xmlns:a14="http://schemas.microsoft.com/office/drawing/2010/main">
                 <a:effectLst>
                   <a:outerShdw blurRad="63500" dist="38099" dir="2700000" algn="ctr" rotWithShape="0">
                     <a:srgbClr val="000000">
@@ -5520,7 +5520,7 @@
           <a:effectLst/>
           <a:extLst>
             <a:ext uri="{AF507438-7753-43e0-B8FC-AC1667EBCBE1}">
-              <a14:hiddenEffects xmlns:a14="http://schemas.microsoft.com/office/drawing/2010/main" xmlns="">
+              <a14:hiddenEffects xmlns="" xmlns:a14="http://schemas.microsoft.com/office/drawing/2010/main">
                 <a:effectLst>
                   <a:outerShdw blurRad="63500" dist="38099" dir="2700000" algn="ctr" rotWithShape="0">
                     <a:srgbClr val="000000">
@@ -5573,7 +5573,7 @@
           <a:effectLst/>
           <a:extLst>
             <a:ext uri="{AF507438-7753-43e0-B8FC-AC1667EBCBE1}">
-              <a14:hiddenEffects xmlns:a14="http://schemas.microsoft.com/office/drawing/2010/main" xmlns="">
+              <a14:hiddenEffects xmlns="" xmlns:a14="http://schemas.microsoft.com/office/drawing/2010/main">
                 <a:effectLst>
                   <a:outerShdw blurRad="63500" dist="38099" dir="2700000" algn="ctr" rotWithShape="0">
                     <a:srgbClr val="000000">
@@ -5623,7 +5623,7 @@
           <a:effectLst/>
           <a:extLst>
             <a:ext uri="{AF507438-7753-43e0-B8FC-AC1667EBCBE1}">
-              <a14:hiddenEffects xmlns:a14="http://schemas.microsoft.com/office/drawing/2010/main" xmlns="">
+              <a14:hiddenEffects xmlns="" xmlns:a14="http://schemas.microsoft.com/office/drawing/2010/main">
                 <a:effectLst>
                   <a:outerShdw blurRad="63500" dist="38099" dir="2700000" algn="ctr" rotWithShape="0">
                     <a:srgbClr val="000000">
@@ -5673,7 +5673,7 @@
           <a:effectLst/>
           <a:extLst>
             <a:ext uri="{AF507438-7753-43e0-B8FC-AC1667EBCBE1}">
-              <a14:hiddenEffects xmlns:a14="http://schemas.microsoft.com/office/drawing/2010/main" xmlns="">
+              <a14:hiddenEffects xmlns="" xmlns:a14="http://schemas.microsoft.com/office/drawing/2010/main">
                 <a:effectLst>
                   <a:outerShdw blurRad="63500" dist="38099" dir="2700000" algn="ctr" rotWithShape="0">
                     <a:srgbClr val="000000">
@@ -5723,7 +5723,7 @@
           <a:effectLst/>
           <a:extLst>
             <a:ext uri="{AF507438-7753-43e0-B8FC-AC1667EBCBE1}">
-              <a14:hiddenEffects xmlns:a14="http://schemas.microsoft.com/office/drawing/2010/main" xmlns="">
+              <a14:hiddenEffects xmlns="" xmlns:a14="http://schemas.microsoft.com/office/drawing/2010/main">
                 <a:effectLst>
                   <a:outerShdw blurRad="63500" dist="38099" dir="2700000" algn="ctr" rotWithShape="0">
                     <a:srgbClr val="000000">
@@ -5771,12 +5771,12 @@
           <a:effectLst/>
           <a:extLst>
             <a:ext uri="{909E8E84-426E-40dd-AFC4-6F175D3DCCD1}">
-              <a14:hiddenFill xmlns:a14="http://schemas.microsoft.com/office/drawing/2010/main" xmlns="">
+              <a14:hiddenFill xmlns="" xmlns:a14="http://schemas.microsoft.com/office/drawing/2010/main">
                 <a:noFill/>
               </a14:hiddenFill>
             </a:ext>
             <a:ext uri="{AF507438-7753-43e0-B8FC-AC1667EBCBE1}">
-              <a14:hiddenEffects xmlns:a14="http://schemas.microsoft.com/office/drawing/2010/main" xmlns="">
+              <a14:hiddenEffects xmlns="" xmlns:a14="http://schemas.microsoft.com/office/drawing/2010/main">
                 <a:effectLst>
                   <a:outerShdw blurRad="63500" dist="38099" dir="2700000" algn="ctr" rotWithShape="0">
                     <a:srgbClr val="000000">
@@ -5824,12 +5824,12 @@
           <a:effectLst/>
           <a:extLst>
             <a:ext uri="{909E8E84-426E-40dd-AFC4-6F175D3DCCD1}">
-              <a14:hiddenFill xmlns:a14="http://schemas.microsoft.com/office/drawing/2010/main" xmlns="">
+              <a14:hiddenFill xmlns="" xmlns:a14="http://schemas.microsoft.com/office/drawing/2010/main">
                 <a:noFill/>
               </a14:hiddenFill>
             </a:ext>
             <a:ext uri="{AF507438-7753-43e0-B8FC-AC1667EBCBE1}">
-              <a14:hiddenEffects xmlns:a14="http://schemas.microsoft.com/office/drawing/2010/main" xmlns="">
+              <a14:hiddenEffects xmlns="" xmlns:a14="http://schemas.microsoft.com/office/drawing/2010/main">
                 <a:effectLst>
                   <a:outerShdw blurRad="63500" dist="38099" dir="2700000" algn="ctr" rotWithShape="0">
                     <a:srgbClr val="000000">
@@ -5877,12 +5877,12 @@
           <a:effectLst/>
           <a:extLst>
             <a:ext uri="{909E8E84-426E-40dd-AFC4-6F175D3DCCD1}">
-              <a14:hiddenFill xmlns:a14="http://schemas.microsoft.com/office/drawing/2010/main" xmlns="">
+              <a14:hiddenFill xmlns="" xmlns:a14="http://schemas.microsoft.com/office/drawing/2010/main">
                 <a:noFill/>
               </a14:hiddenFill>
             </a:ext>
             <a:ext uri="{AF507438-7753-43e0-B8FC-AC1667EBCBE1}">
-              <a14:hiddenEffects xmlns:a14="http://schemas.microsoft.com/office/drawing/2010/main" xmlns="">
+              <a14:hiddenEffects xmlns="" xmlns:a14="http://schemas.microsoft.com/office/drawing/2010/main">
                 <a:effectLst>
                   <a:outerShdw blurRad="63500" dist="38099" dir="2700000" algn="ctr" rotWithShape="0">
                     <a:srgbClr val="000000">
@@ -5930,12 +5930,12 @@
           <a:effectLst/>
           <a:extLst>
             <a:ext uri="{909E8E84-426E-40dd-AFC4-6F175D3DCCD1}">
-              <a14:hiddenFill xmlns:a14="http://schemas.microsoft.com/office/drawing/2010/main" xmlns="">
+              <a14:hiddenFill xmlns="" xmlns:a14="http://schemas.microsoft.com/office/drawing/2010/main">
                 <a:noFill/>
               </a14:hiddenFill>
             </a:ext>
             <a:ext uri="{AF507438-7753-43e0-B8FC-AC1667EBCBE1}">
-              <a14:hiddenEffects xmlns:a14="http://schemas.microsoft.com/office/drawing/2010/main" xmlns="">
+              <a14:hiddenEffects xmlns="" xmlns:a14="http://schemas.microsoft.com/office/drawing/2010/main">
                 <a:effectLst>
                   <a:outerShdw blurRad="63500" dist="38099" dir="2700000" algn="ctr" rotWithShape="0">
                     <a:srgbClr val="000000">
@@ -5983,12 +5983,12 @@
           <a:effectLst/>
           <a:extLst>
             <a:ext uri="{909E8E84-426E-40dd-AFC4-6F175D3DCCD1}">
-              <a14:hiddenFill xmlns:a14="http://schemas.microsoft.com/office/drawing/2010/main" xmlns="">
+              <a14:hiddenFill xmlns="" xmlns:a14="http://schemas.microsoft.com/office/drawing/2010/main">
                 <a:noFill/>
               </a14:hiddenFill>
             </a:ext>
             <a:ext uri="{AF507438-7753-43e0-B8FC-AC1667EBCBE1}">
-              <a14:hiddenEffects xmlns:a14="http://schemas.microsoft.com/office/drawing/2010/main" xmlns="">
+              <a14:hiddenEffects xmlns="" xmlns:a14="http://schemas.microsoft.com/office/drawing/2010/main">
                 <a:effectLst>
                   <a:outerShdw blurRad="63500" dist="38099" dir="2700000" algn="ctr" rotWithShape="0">
                     <a:srgbClr val="000000">
@@ -6038,7 +6038,7 @@
           <a:effectLst/>
           <a:extLst>
             <a:ext uri="{AF507438-7753-43e0-B8FC-AC1667EBCBE1}">
-              <a14:hiddenEffects xmlns:a14="http://schemas.microsoft.com/office/drawing/2010/main" xmlns="">
+              <a14:hiddenEffects xmlns="" xmlns:a14="http://schemas.microsoft.com/office/drawing/2010/main">
                 <a:effectLst>
                   <a:outerShdw blurRad="63500" dist="38099" dir="2700000" algn="ctr" rotWithShape="0">
                     <a:srgbClr val="000000">
@@ -6088,7 +6088,7 @@
           <a:effectLst/>
           <a:extLst>
             <a:ext uri="{AF507438-7753-43e0-B8FC-AC1667EBCBE1}">
-              <a14:hiddenEffects xmlns:a14="http://schemas.microsoft.com/office/drawing/2010/main" xmlns="">
+              <a14:hiddenEffects xmlns="" xmlns:a14="http://schemas.microsoft.com/office/drawing/2010/main">
                 <a:effectLst>
                   <a:outerShdw blurRad="63500" dist="38099" dir="2700000" algn="ctr" rotWithShape="0">
                     <a:srgbClr val="000000">
@@ -6136,12 +6136,12 @@
           <a:effectLst/>
           <a:extLst>
             <a:ext uri="{909E8E84-426E-40dd-AFC4-6F175D3DCCD1}">
-              <a14:hiddenFill xmlns:a14="http://schemas.microsoft.com/office/drawing/2010/main" xmlns="">
+              <a14:hiddenFill xmlns="" xmlns:a14="http://schemas.microsoft.com/office/drawing/2010/main">
                 <a:noFill/>
               </a14:hiddenFill>
             </a:ext>
             <a:ext uri="{AF507438-7753-43e0-B8FC-AC1667EBCBE1}">
-              <a14:hiddenEffects xmlns:a14="http://schemas.microsoft.com/office/drawing/2010/main" xmlns="">
+              <a14:hiddenEffects xmlns="" xmlns:a14="http://schemas.microsoft.com/office/drawing/2010/main">
                 <a:effectLst>
                   <a:outerShdw blurRad="63500" dist="38099" dir="2700000" algn="ctr" rotWithShape="0">
                     <a:srgbClr val="000000">
@@ -6189,12 +6189,12 @@
           <a:effectLst/>
           <a:extLst>
             <a:ext uri="{909E8E84-426E-40dd-AFC4-6F175D3DCCD1}">
-              <a14:hiddenFill xmlns:a14="http://schemas.microsoft.com/office/drawing/2010/main" xmlns="">
+              <a14:hiddenFill xmlns="" xmlns:a14="http://schemas.microsoft.com/office/drawing/2010/main">
                 <a:noFill/>
               </a14:hiddenFill>
             </a:ext>
             <a:ext uri="{AF507438-7753-43e0-B8FC-AC1667EBCBE1}">
-              <a14:hiddenEffects xmlns:a14="http://schemas.microsoft.com/office/drawing/2010/main" xmlns="">
+              <a14:hiddenEffects xmlns="" xmlns:a14="http://schemas.microsoft.com/office/drawing/2010/main">
                 <a:effectLst>
                   <a:outerShdw blurRad="63500" dist="38099" dir="2700000" algn="ctr" rotWithShape="0">
                     <a:srgbClr val="000000">
@@ -6242,12 +6242,12 @@
           <a:effectLst/>
           <a:extLst>
             <a:ext uri="{909E8E84-426E-40dd-AFC4-6F175D3DCCD1}">
-              <a14:hiddenFill xmlns:a14="http://schemas.microsoft.com/office/drawing/2010/main" xmlns="">
+              <a14:hiddenFill xmlns="" xmlns:a14="http://schemas.microsoft.com/office/drawing/2010/main">
                 <a:noFill/>
               </a14:hiddenFill>
             </a:ext>
             <a:ext uri="{AF507438-7753-43e0-B8FC-AC1667EBCBE1}">
-              <a14:hiddenEffects xmlns:a14="http://schemas.microsoft.com/office/drawing/2010/main" xmlns="">
+              <a14:hiddenEffects xmlns="" xmlns:a14="http://schemas.microsoft.com/office/drawing/2010/main">
                 <a:effectLst>
                   <a:outerShdw blurRad="63500" dist="38099" dir="2700000" algn="ctr" rotWithShape="0">
                     <a:srgbClr val="000000">
@@ -6299,7 +6299,7 @@
           <a:effectLst/>
           <a:extLst>
             <a:ext uri="{AF507438-7753-43e0-B8FC-AC1667EBCBE1}">
-              <a14:hiddenEffects xmlns:a14="http://schemas.microsoft.com/office/drawing/2010/main" xmlns="">
+              <a14:hiddenEffects xmlns="" xmlns:a14="http://schemas.microsoft.com/office/drawing/2010/main">
                 <a:effectLst>
                   <a:outerShdw blurRad="63500" dist="38099" dir="2700000" algn="ctr" rotWithShape="0">
                     <a:srgbClr val="000000">
@@ -6349,7 +6349,7 @@
           <a:effectLst/>
           <a:extLst>
             <a:ext uri="{AF507438-7753-43e0-B8FC-AC1667EBCBE1}">
-              <a14:hiddenEffects xmlns:a14="http://schemas.microsoft.com/office/drawing/2010/main" xmlns="">
+              <a14:hiddenEffects xmlns="" xmlns:a14="http://schemas.microsoft.com/office/drawing/2010/main">
                 <a:effectLst>
                   <a:outerShdw blurRad="63500" dist="38099" dir="2700000" algn="ctr" rotWithShape="0">
                     <a:srgbClr val="000000">
@@ -6401,7 +6401,7 @@
           <a:effectLst/>
           <a:extLst>
             <a:ext uri="{AF507438-7753-43e0-B8FC-AC1667EBCBE1}">
-              <a14:hiddenEffects xmlns:a14="http://schemas.microsoft.com/office/drawing/2010/main" xmlns="">
+              <a14:hiddenEffects xmlns="" xmlns:a14="http://schemas.microsoft.com/office/drawing/2010/main">
                 <a:effectLst>
                   <a:outerShdw blurRad="63500" dist="38099" dir="2700000" algn="ctr" rotWithShape="0">
                     <a:srgbClr val="000000">
@@ -6444,14 +6444,14 @@
           <a:effectLst/>
           <a:extLst>
             <a:ext uri="{909E8E84-426E-40dd-AFC4-6F175D3DCCD1}">
-              <a14:hiddenFill xmlns:a14="http://schemas.microsoft.com/office/drawing/2010/main" xmlns="">
+              <a14:hiddenFill xmlns="" xmlns:a14="http://schemas.microsoft.com/office/drawing/2010/main">
                 <a:solidFill>
                   <a:srgbClr val="FFFFFF"/>
                 </a:solidFill>
               </a14:hiddenFill>
             </a:ext>
             <a:ext uri="{91240B29-F687-4f45-9708-019B960494DF}">
-              <a14:hiddenLine xmlns:a14="http://schemas.microsoft.com/office/drawing/2010/main" xmlns="" w="9525" cap="flat">
+              <a14:hiddenLine xmlns="" xmlns:a14="http://schemas.microsoft.com/office/drawing/2010/main" w="9525" cap="flat">
                 <a:solidFill>
                   <a:srgbClr val="000000"/>
                 </a:solidFill>
@@ -6461,7 +6461,7 @@
               </a14:hiddenLine>
             </a:ext>
             <a:ext uri="{AF507438-7753-43e0-B8FC-AC1667EBCBE1}">
-              <a14:hiddenEffects xmlns:a14="http://schemas.microsoft.com/office/drawing/2010/main" xmlns="">
+              <a14:hiddenEffects xmlns="" xmlns:a14="http://schemas.microsoft.com/office/drawing/2010/main">
                 <a:effectLst>
                   <a:outerShdw blurRad="63500" dist="38099" dir="2700000" algn="ctr" rotWithShape="0">
                     <a:srgbClr val="000000">
@@ -6695,12 +6695,12 @@
           <a:effectLst/>
           <a:extLst>
             <a:ext uri="{909E8E84-426E-40dd-AFC4-6F175D3DCCD1}">
-              <a14:hiddenFill xmlns:a14="http://schemas.microsoft.com/office/drawing/2010/main" xmlns="">
+              <a14:hiddenFill xmlns="" xmlns:a14="http://schemas.microsoft.com/office/drawing/2010/main">
                 <a:noFill/>
               </a14:hiddenFill>
             </a:ext>
             <a:ext uri="{AF507438-7753-43e0-B8FC-AC1667EBCBE1}">
-              <a14:hiddenEffects xmlns:a14="http://schemas.microsoft.com/office/drawing/2010/main" xmlns="">
+              <a14:hiddenEffects xmlns="" xmlns:a14="http://schemas.microsoft.com/office/drawing/2010/main">
                 <a:effectLst>
                   <a:outerShdw blurRad="63500" dist="38099" dir="2700000" algn="ctr" rotWithShape="0">
                     <a:srgbClr val="000000">
@@ -6748,12 +6748,12 @@
           <a:effectLst/>
           <a:extLst>
             <a:ext uri="{909E8E84-426E-40dd-AFC4-6F175D3DCCD1}">
-              <a14:hiddenFill xmlns:a14="http://schemas.microsoft.com/office/drawing/2010/main" xmlns="">
+              <a14:hiddenFill xmlns="" xmlns:a14="http://schemas.microsoft.com/office/drawing/2010/main">
                 <a:noFill/>
               </a14:hiddenFill>
             </a:ext>
             <a:ext uri="{AF507438-7753-43e0-B8FC-AC1667EBCBE1}">
-              <a14:hiddenEffects xmlns:a14="http://schemas.microsoft.com/office/drawing/2010/main" xmlns="">
+              <a14:hiddenEffects xmlns="" xmlns:a14="http://schemas.microsoft.com/office/drawing/2010/main">
                 <a:effectLst>
                   <a:outerShdw blurRad="63500" dist="38099" dir="2700000" algn="ctr" rotWithShape="0">
                     <a:srgbClr val="000000">
@@ -6796,14 +6796,14 @@
           <a:effectLst/>
           <a:extLst>
             <a:ext uri="{909E8E84-426E-40dd-AFC4-6F175D3DCCD1}">
-              <a14:hiddenFill xmlns:a14="http://schemas.microsoft.com/office/drawing/2010/main" xmlns="">
+              <a14:hiddenFill xmlns="" xmlns:a14="http://schemas.microsoft.com/office/drawing/2010/main">
                 <a:solidFill>
                   <a:srgbClr val="FFFFFF"/>
                 </a:solidFill>
               </a14:hiddenFill>
             </a:ext>
             <a:ext uri="{91240B29-F687-4f45-9708-019B960494DF}">
-              <a14:hiddenLine xmlns:a14="http://schemas.microsoft.com/office/drawing/2010/main" xmlns="" w="9525" cap="flat">
+              <a14:hiddenLine xmlns="" xmlns:a14="http://schemas.microsoft.com/office/drawing/2010/main" w="9525" cap="flat">
                 <a:solidFill>
                   <a:srgbClr val="000000"/>
                 </a:solidFill>
@@ -6813,7 +6813,7 @@
               </a14:hiddenLine>
             </a:ext>
             <a:ext uri="{AF507438-7753-43e0-B8FC-AC1667EBCBE1}">
-              <a14:hiddenEffects xmlns:a14="http://schemas.microsoft.com/office/drawing/2010/main" xmlns="">
+              <a14:hiddenEffects xmlns="" xmlns:a14="http://schemas.microsoft.com/office/drawing/2010/main">
                 <a:effectLst>
                   <a:outerShdw blurRad="63500" dist="38099" dir="2700000" algn="ctr" rotWithShape="0">
                     <a:srgbClr val="000000">
@@ -7051,14 +7051,14 @@
           <a:effectLst/>
           <a:extLst>
             <a:ext uri="{909E8E84-426E-40dd-AFC4-6F175D3DCCD1}">
-              <a14:hiddenFill xmlns:a14="http://schemas.microsoft.com/office/drawing/2010/main" xmlns="">
+              <a14:hiddenFill xmlns="" xmlns:a14="http://schemas.microsoft.com/office/drawing/2010/main">
                 <a:solidFill>
                   <a:srgbClr val="FFFFFF"/>
                 </a:solidFill>
               </a14:hiddenFill>
             </a:ext>
             <a:ext uri="{91240B29-F687-4f45-9708-019B960494DF}">
-              <a14:hiddenLine xmlns:a14="http://schemas.microsoft.com/office/drawing/2010/main" xmlns="" w="9525" cap="flat">
+              <a14:hiddenLine xmlns="" xmlns:a14="http://schemas.microsoft.com/office/drawing/2010/main" w="9525" cap="flat">
                 <a:solidFill>
                   <a:srgbClr val="000000"/>
                 </a:solidFill>
@@ -7068,7 +7068,7 @@
               </a14:hiddenLine>
             </a:ext>
             <a:ext uri="{AF507438-7753-43e0-B8FC-AC1667EBCBE1}">
-              <a14:hiddenEffects xmlns:a14="http://schemas.microsoft.com/office/drawing/2010/main" xmlns="">
+              <a14:hiddenEffects xmlns="" xmlns:a14="http://schemas.microsoft.com/office/drawing/2010/main">
                 <a:effectLst>
                   <a:outerShdw blurRad="63500" dist="38099" dir="2700000" algn="ctr" rotWithShape="0">
                     <a:srgbClr val="000000">
@@ -7288,14 +7288,14 @@
           <a:effectLst/>
           <a:extLst>
             <a:ext uri="{909E8E84-426E-40dd-AFC4-6F175D3DCCD1}">
-              <a14:hiddenFill xmlns:a14="http://schemas.microsoft.com/office/drawing/2010/main" xmlns="">
+              <a14:hiddenFill xmlns="" xmlns:a14="http://schemas.microsoft.com/office/drawing/2010/main">
                 <a:solidFill>
                   <a:srgbClr val="FFFFFF"/>
                 </a:solidFill>
               </a14:hiddenFill>
             </a:ext>
             <a:ext uri="{91240B29-F687-4f45-9708-019B960494DF}">
-              <a14:hiddenLine xmlns:a14="http://schemas.microsoft.com/office/drawing/2010/main" xmlns="" w="9525" cap="flat">
+              <a14:hiddenLine xmlns="" xmlns:a14="http://schemas.microsoft.com/office/drawing/2010/main" w="9525" cap="flat">
                 <a:solidFill>
                   <a:srgbClr val="000000"/>
                 </a:solidFill>
@@ -7305,7 +7305,7 @@
               </a14:hiddenLine>
             </a:ext>
             <a:ext uri="{AF507438-7753-43e0-B8FC-AC1667EBCBE1}">
-              <a14:hiddenEffects xmlns:a14="http://schemas.microsoft.com/office/drawing/2010/main" xmlns="">
+              <a14:hiddenEffects xmlns="" xmlns:a14="http://schemas.microsoft.com/office/drawing/2010/main">
                 <a:effectLst>
                   <a:outerShdw blurRad="63500" dist="38099" dir="2700000" algn="ctr" rotWithShape="0">
                     <a:srgbClr val="000000">
@@ -7534,14 +7534,14 @@
           <a:effectLst/>
           <a:extLst>
             <a:ext uri="{909E8E84-426E-40dd-AFC4-6F175D3DCCD1}">
-              <a14:hiddenFill xmlns:a14="http://schemas.microsoft.com/office/drawing/2010/main" xmlns="">
+              <a14:hiddenFill xmlns="" xmlns:a14="http://schemas.microsoft.com/office/drawing/2010/main">
                 <a:solidFill>
                   <a:srgbClr val="FFFFFF"/>
                 </a:solidFill>
               </a14:hiddenFill>
             </a:ext>
             <a:ext uri="{91240B29-F687-4f45-9708-019B960494DF}">
-              <a14:hiddenLine xmlns:a14="http://schemas.microsoft.com/office/drawing/2010/main" xmlns="" w="9525" cap="flat">
+              <a14:hiddenLine xmlns="" xmlns:a14="http://schemas.microsoft.com/office/drawing/2010/main" w="9525" cap="flat">
                 <a:solidFill>
                   <a:srgbClr val="000000"/>
                 </a:solidFill>
@@ -7551,7 +7551,7 @@
               </a14:hiddenLine>
             </a:ext>
             <a:ext uri="{AF507438-7753-43e0-B8FC-AC1667EBCBE1}">
-              <a14:hiddenEffects xmlns:a14="http://schemas.microsoft.com/office/drawing/2010/main" xmlns="">
+              <a14:hiddenEffects xmlns="" xmlns:a14="http://schemas.microsoft.com/office/drawing/2010/main">
                 <a:effectLst>
                   <a:outerShdw blurRad="63500" dist="38099" dir="2700000" algn="ctr" rotWithShape="0">
                     <a:srgbClr val="000000">
@@ -7780,14 +7780,14 @@
           <a:effectLst/>
           <a:extLst>
             <a:ext uri="{909E8E84-426E-40dd-AFC4-6F175D3DCCD1}">
-              <a14:hiddenFill xmlns:a14="http://schemas.microsoft.com/office/drawing/2010/main" xmlns="">
+              <a14:hiddenFill xmlns="" xmlns:a14="http://schemas.microsoft.com/office/drawing/2010/main">
                 <a:solidFill>
                   <a:srgbClr val="FFFFFF"/>
                 </a:solidFill>
               </a14:hiddenFill>
             </a:ext>
             <a:ext uri="{91240B29-F687-4f45-9708-019B960494DF}">
-              <a14:hiddenLine xmlns:a14="http://schemas.microsoft.com/office/drawing/2010/main" xmlns="" w="9525" cap="flat">
+              <a14:hiddenLine xmlns="" xmlns:a14="http://schemas.microsoft.com/office/drawing/2010/main" w="9525" cap="flat">
                 <a:solidFill>
                   <a:srgbClr val="000000"/>
                 </a:solidFill>
@@ -7797,7 +7797,7 @@
               </a14:hiddenLine>
             </a:ext>
             <a:ext uri="{AF507438-7753-43e0-B8FC-AC1667EBCBE1}">
-              <a14:hiddenEffects xmlns:a14="http://schemas.microsoft.com/office/drawing/2010/main" xmlns="">
+              <a14:hiddenEffects xmlns="" xmlns:a14="http://schemas.microsoft.com/office/drawing/2010/main">
                 <a:effectLst>
                   <a:outerShdw blurRad="63500" dist="38099" dir="2700000" algn="ctr" rotWithShape="0">
                     <a:srgbClr val="000000">
@@ -8023,14 +8023,14 @@
           <a:effectLst/>
           <a:extLst>
             <a:ext uri="{909E8E84-426E-40dd-AFC4-6F175D3DCCD1}">
-              <a14:hiddenFill xmlns:a14="http://schemas.microsoft.com/office/drawing/2010/main" xmlns="">
+              <a14:hiddenFill xmlns="" xmlns:a14="http://schemas.microsoft.com/office/drawing/2010/main">
                 <a:solidFill>
                   <a:srgbClr val="FFFFFF"/>
                 </a:solidFill>
               </a14:hiddenFill>
             </a:ext>
             <a:ext uri="{91240B29-F687-4f45-9708-019B960494DF}">
-              <a14:hiddenLine xmlns:a14="http://schemas.microsoft.com/office/drawing/2010/main" xmlns="" w="9525" cap="flat">
+              <a14:hiddenLine xmlns="" xmlns:a14="http://schemas.microsoft.com/office/drawing/2010/main" w="9525" cap="flat">
                 <a:solidFill>
                   <a:srgbClr val="000000"/>
                 </a:solidFill>
@@ -8040,7 +8040,7 @@
               </a14:hiddenLine>
             </a:ext>
             <a:ext uri="{AF507438-7753-43e0-B8FC-AC1667EBCBE1}">
-              <a14:hiddenEffects xmlns:a14="http://schemas.microsoft.com/office/drawing/2010/main" xmlns="">
+              <a14:hiddenEffects xmlns="" xmlns:a14="http://schemas.microsoft.com/office/drawing/2010/main">
                 <a:effectLst>
                   <a:outerShdw blurRad="63500" dist="38099" dir="2700000" algn="ctr" rotWithShape="0">
                     <a:srgbClr val="000000">
@@ -8267,14 +8267,14 @@
           <a:effectLst/>
           <a:extLst>
             <a:ext uri="{909E8E84-426E-40dd-AFC4-6F175D3DCCD1}">
-              <a14:hiddenFill xmlns:a14="http://schemas.microsoft.com/office/drawing/2010/main" xmlns="">
+              <a14:hiddenFill xmlns="" xmlns:a14="http://schemas.microsoft.com/office/drawing/2010/main">
                 <a:solidFill>
                   <a:srgbClr val="FFFFFF"/>
                 </a:solidFill>
               </a14:hiddenFill>
             </a:ext>
             <a:ext uri="{91240B29-F687-4f45-9708-019B960494DF}">
-              <a14:hiddenLine xmlns:a14="http://schemas.microsoft.com/office/drawing/2010/main" xmlns="" w="9525" cap="flat">
+              <a14:hiddenLine xmlns="" xmlns:a14="http://schemas.microsoft.com/office/drawing/2010/main" w="9525" cap="flat">
                 <a:solidFill>
                   <a:srgbClr val="000000"/>
                 </a:solidFill>
@@ -8284,7 +8284,7 @@
               </a14:hiddenLine>
             </a:ext>
             <a:ext uri="{AF507438-7753-43e0-B8FC-AC1667EBCBE1}">
-              <a14:hiddenEffects xmlns:a14="http://schemas.microsoft.com/office/drawing/2010/main" xmlns="">
+              <a14:hiddenEffects xmlns="" xmlns:a14="http://schemas.microsoft.com/office/drawing/2010/main">
                 <a:effectLst>
                   <a:outerShdw blurRad="63500" dist="38099" dir="2700000" algn="ctr" rotWithShape="0">
                     <a:srgbClr val="000000">
@@ -8513,14 +8513,14 @@
           <a:effectLst/>
           <a:extLst>
             <a:ext uri="{909E8E84-426E-40dd-AFC4-6F175D3DCCD1}">
-              <a14:hiddenFill xmlns:a14="http://schemas.microsoft.com/office/drawing/2010/main" xmlns="">
+              <a14:hiddenFill xmlns="" xmlns:a14="http://schemas.microsoft.com/office/drawing/2010/main">
                 <a:solidFill>
                   <a:srgbClr val="FFFFFF"/>
                 </a:solidFill>
               </a14:hiddenFill>
             </a:ext>
             <a:ext uri="{91240B29-F687-4f45-9708-019B960494DF}">
-              <a14:hiddenLine xmlns:a14="http://schemas.microsoft.com/office/drawing/2010/main" xmlns="" w="9525" cap="flat">
+              <a14:hiddenLine xmlns="" xmlns:a14="http://schemas.microsoft.com/office/drawing/2010/main" w="9525" cap="flat">
                 <a:solidFill>
                   <a:srgbClr val="000000"/>
                 </a:solidFill>
@@ -8530,7 +8530,7 @@
               </a14:hiddenLine>
             </a:ext>
             <a:ext uri="{AF507438-7753-43e0-B8FC-AC1667EBCBE1}">
-              <a14:hiddenEffects xmlns:a14="http://schemas.microsoft.com/office/drawing/2010/main" xmlns="">
+              <a14:hiddenEffects xmlns="" xmlns:a14="http://schemas.microsoft.com/office/drawing/2010/main">
                 <a:effectLst>
                   <a:outerShdw blurRad="63500" dist="38099" dir="2700000" algn="ctr" rotWithShape="0">
                     <a:srgbClr val="000000">
@@ -8768,7 +8768,7 @@
           <a:effectLst/>
           <a:extLst>
             <a:ext uri="{AF507438-7753-43e0-B8FC-AC1667EBCBE1}">
-              <a14:hiddenEffects xmlns:a14="http://schemas.microsoft.com/office/drawing/2010/main" xmlns="">
+              <a14:hiddenEffects xmlns="" xmlns:a14="http://schemas.microsoft.com/office/drawing/2010/main">
                 <a:effectLst>
                   <a:outerShdw blurRad="63500" dist="38099" dir="2700000" algn="ctr" rotWithShape="0">
                     <a:srgbClr val="000000">
@@ -8818,7 +8818,7 @@
           <a:effectLst/>
           <a:extLst>
             <a:ext uri="{AF507438-7753-43e0-B8FC-AC1667EBCBE1}">
-              <a14:hiddenEffects xmlns:a14="http://schemas.microsoft.com/office/drawing/2010/main" xmlns="">
+              <a14:hiddenEffects xmlns="" xmlns:a14="http://schemas.microsoft.com/office/drawing/2010/main">
                 <a:effectLst>
                   <a:outerShdw blurRad="63500" dist="38099" dir="2700000" algn="ctr" rotWithShape="0">
                     <a:srgbClr val="000000">
@@ -8861,14 +8861,14 @@
           <a:effectLst/>
           <a:extLst>
             <a:ext uri="{909E8E84-426E-40dd-AFC4-6F175D3DCCD1}">
-              <a14:hiddenFill xmlns:a14="http://schemas.microsoft.com/office/drawing/2010/main" xmlns="">
+              <a14:hiddenFill xmlns="" xmlns:a14="http://schemas.microsoft.com/office/drawing/2010/main">
                 <a:solidFill>
                   <a:srgbClr val="FFFFFF"/>
                 </a:solidFill>
               </a14:hiddenFill>
             </a:ext>
             <a:ext uri="{91240B29-F687-4f45-9708-019B960494DF}">
-              <a14:hiddenLine xmlns:a14="http://schemas.microsoft.com/office/drawing/2010/main" xmlns="" w="9525" cap="flat">
+              <a14:hiddenLine xmlns="" xmlns:a14="http://schemas.microsoft.com/office/drawing/2010/main" w="9525" cap="flat">
                 <a:solidFill>
                   <a:srgbClr val="000000"/>
                 </a:solidFill>
@@ -8878,7 +8878,7 @@
               </a14:hiddenLine>
             </a:ext>
             <a:ext uri="{AF507438-7753-43e0-B8FC-AC1667EBCBE1}">
-              <a14:hiddenEffects xmlns:a14="http://schemas.microsoft.com/office/drawing/2010/main" xmlns="">
+              <a14:hiddenEffects xmlns="" xmlns:a14="http://schemas.microsoft.com/office/drawing/2010/main">
                 <a:effectLst>
                   <a:outerShdw blurRad="63500" dist="38099" dir="2700000" algn="ctr" rotWithShape="0">
                     <a:srgbClr val="000000">
@@ -9114,7 +9114,7 @@
           <a:effectLst/>
           <a:extLst>
             <a:ext uri="{AF507438-7753-43e0-B8FC-AC1667EBCBE1}">
-              <a14:hiddenEffects xmlns:a14="http://schemas.microsoft.com/office/drawing/2010/main" xmlns="">
+              <a14:hiddenEffects xmlns="" xmlns:a14="http://schemas.microsoft.com/office/drawing/2010/main">
                 <a:effectLst>
                   <a:outerShdw blurRad="63500" dist="38099" dir="2700000" algn="ctr" rotWithShape="0">
                     <a:srgbClr val="000000">
@@ -9164,7 +9164,7 @@
           <a:effectLst/>
           <a:extLst>
             <a:ext uri="{AF507438-7753-43e0-B8FC-AC1667EBCBE1}">
-              <a14:hiddenEffects xmlns:a14="http://schemas.microsoft.com/office/drawing/2010/main" xmlns="">
+              <a14:hiddenEffects xmlns="" xmlns:a14="http://schemas.microsoft.com/office/drawing/2010/main">
                 <a:effectLst>
                   <a:outerShdw blurRad="63500" dist="38099" dir="2700000" algn="ctr" rotWithShape="0">
                     <a:srgbClr val="000000">
@@ -9214,7 +9214,7 @@
           <a:effectLst/>
           <a:extLst>
             <a:ext uri="{AF507438-7753-43e0-B8FC-AC1667EBCBE1}">
-              <a14:hiddenEffects xmlns:a14="http://schemas.microsoft.com/office/drawing/2010/main" xmlns="">
+              <a14:hiddenEffects xmlns="" xmlns:a14="http://schemas.microsoft.com/office/drawing/2010/main">
                 <a:effectLst>
                   <a:outerShdw blurRad="63500" dist="38099" dir="2700000" algn="ctr" rotWithShape="0">
                     <a:srgbClr val="000000">
@@ -9264,7 +9264,7 @@
           <a:effectLst/>
           <a:extLst>
             <a:ext uri="{AF507438-7753-43e0-B8FC-AC1667EBCBE1}">
-              <a14:hiddenEffects xmlns:a14="http://schemas.microsoft.com/office/drawing/2010/main" xmlns="">
+              <a14:hiddenEffects xmlns="" xmlns:a14="http://schemas.microsoft.com/office/drawing/2010/main">
                 <a:effectLst>
                   <a:outerShdw blurRad="63500" dist="38099" dir="2700000" algn="ctr" rotWithShape="0">
                     <a:srgbClr val="000000">
@@ -9314,7 +9314,7 @@
           <a:effectLst/>
           <a:extLst>
             <a:ext uri="{AF507438-7753-43e0-B8FC-AC1667EBCBE1}">
-              <a14:hiddenEffects xmlns:a14="http://schemas.microsoft.com/office/drawing/2010/main" xmlns="">
+              <a14:hiddenEffects xmlns="" xmlns:a14="http://schemas.microsoft.com/office/drawing/2010/main">
                 <a:effectLst>
                   <a:outerShdw blurRad="63500" dist="38099" dir="2700000" algn="ctr" rotWithShape="0">
                     <a:srgbClr val="000000">
@@ -9364,7 +9364,7 @@
           <a:effectLst/>
           <a:extLst>
             <a:ext uri="{AF507438-7753-43e0-B8FC-AC1667EBCBE1}">
-              <a14:hiddenEffects xmlns:a14="http://schemas.microsoft.com/office/drawing/2010/main" xmlns="">
+              <a14:hiddenEffects xmlns="" xmlns:a14="http://schemas.microsoft.com/office/drawing/2010/main">
                 <a:effectLst>
                   <a:outerShdw blurRad="63500" dist="38099" dir="2700000" algn="ctr" rotWithShape="0">
                     <a:srgbClr val="000000">
@@ -9414,7 +9414,7 @@
           <a:effectLst/>
           <a:extLst>
             <a:ext uri="{AF507438-7753-43e0-B8FC-AC1667EBCBE1}">
-              <a14:hiddenEffects xmlns:a14="http://schemas.microsoft.com/office/drawing/2010/main" xmlns="">
+              <a14:hiddenEffects xmlns="" xmlns:a14="http://schemas.microsoft.com/office/drawing/2010/main">
                 <a:effectLst>
                   <a:outerShdw blurRad="63500" dist="38099" dir="2700000" algn="ctr" rotWithShape="0">
                     <a:srgbClr val="000000">
@@ -9464,7 +9464,7 @@
           <a:effectLst/>
           <a:extLst>
             <a:ext uri="{AF507438-7753-43e0-B8FC-AC1667EBCBE1}">
-              <a14:hiddenEffects xmlns:a14="http://schemas.microsoft.com/office/drawing/2010/main" xmlns="">
+              <a14:hiddenEffects xmlns="" xmlns:a14="http://schemas.microsoft.com/office/drawing/2010/main">
                 <a:effectLst>
                   <a:outerShdw blurRad="63500" dist="38099" dir="2700000" algn="ctr" rotWithShape="0">
                     <a:srgbClr val="000000">
@@ -9514,7 +9514,7 @@
           <a:effectLst/>
           <a:extLst>
             <a:ext uri="{AF507438-7753-43e0-B8FC-AC1667EBCBE1}">
-              <a14:hiddenEffects xmlns:a14="http://schemas.microsoft.com/office/drawing/2010/main" xmlns="">
+              <a14:hiddenEffects xmlns="" xmlns:a14="http://schemas.microsoft.com/office/drawing/2010/main">
                 <a:effectLst>
                   <a:outerShdw blurRad="63500" dist="38099" dir="2700000" algn="ctr" rotWithShape="0">
                     <a:srgbClr val="000000">
@@ -9564,7 +9564,7 @@
           <a:effectLst/>
           <a:extLst>
             <a:ext uri="{AF507438-7753-43e0-B8FC-AC1667EBCBE1}">
-              <a14:hiddenEffects xmlns:a14="http://schemas.microsoft.com/office/drawing/2010/main" xmlns="">
+              <a14:hiddenEffects xmlns="" xmlns:a14="http://schemas.microsoft.com/office/drawing/2010/main">
                 <a:effectLst>
                   <a:outerShdw blurRad="63500" dist="38099" dir="2700000" algn="ctr" rotWithShape="0">
                     <a:srgbClr val="000000">
@@ -9614,7 +9614,7 @@
           <a:effectLst/>
           <a:extLst>
             <a:ext uri="{AF507438-7753-43e0-B8FC-AC1667EBCBE1}">
-              <a14:hiddenEffects xmlns:a14="http://schemas.microsoft.com/office/drawing/2010/main" xmlns="">
+              <a14:hiddenEffects xmlns="" xmlns:a14="http://schemas.microsoft.com/office/drawing/2010/main">
                 <a:effectLst>
                   <a:outerShdw blurRad="63500" dist="38099" dir="2700000" algn="ctr" rotWithShape="0">
                     <a:srgbClr val="000000">
@@ -9662,12 +9662,12 @@
           <a:effectLst/>
           <a:extLst>
             <a:ext uri="{909E8E84-426E-40dd-AFC4-6F175D3DCCD1}">
-              <a14:hiddenFill xmlns:a14="http://schemas.microsoft.com/office/drawing/2010/main" xmlns="">
+              <a14:hiddenFill xmlns="" xmlns:a14="http://schemas.microsoft.com/office/drawing/2010/main">
                 <a:noFill/>
               </a14:hiddenFill>
             </a:ext>
             <a:ext uri="{AF507438-7753-43e0-B8FC-AC1667EBCBE1}">
-              <a14:hiddenEffects xmlns:a14="http://schemas.microsoft.com/office/drawing/2010/main" xmlns="">
+              <a14:hiddenEffects xmlns="" xmlns:a14="http://schemas.microsoft.com/office/drawing/2010/main">
                 <a:effectLst>
                   <a:outerShdw blurRad="63500" dist="38099" dir="2700000" algn="ctr" rotWithShape="0">
                     <a:srgbClr val="000000">
@@ -9710,14 +9710,14 @@
           <a:effectLst/>
           <a:extLst>
             <a:ext uri="{909E8E84-426E-40dd-AFC4-6F175D3DCCD1}">
-              <a14:hiddenFill xmlns:a14="http://schemas.microsoft.com/office/drawing/2010/main" xmlns="">
+              <a14:hiddenFill xmlns="" xmlns:a14="http://schemas.microsoft.com/office/drawing/2010/main">
                 <a:solidFill>
                   <a:srgbClr val="FFFFFF"/>
                 </a:solidFill>
               </a14:hiddenFill>
             </a:ext>
             <a:ext uri="{91240B29-F687-4f45-9708-019B960494DF}">
-              <a14:hiddenLine xmlns:a14="http://schemas.microsoft.com/office/drawing/2010/main" xmlns="" w="9525" cap="flat">
+              <a14:hiddenLine xmlns="" xmlns:a14="http://schemas.microsoft.com/office/drawing/2010/main" w="9525" cap="flat">
                 <a:solidFill>
                   <a:srgbClr val="000000"/>
                 </a:solidFill>
@@ -9727,7 +9727,7 @@
               </a14:hiddenLine>
             </a:ext>
             <a:ext uri="{AF507438-7753-43e0-B8FC-AC1667EBCBE1}">
-              <a14:hiddenEffects xmlns:a14="http://schemas.microsoft.com/office/drawing/2010/main" xmlns="">
+              <a14:hiddenEffects xmlns="" xmlns:a14="http://schemas.microsoft.com/office/drawing/2010/main">
                 <a:effectLst>
                   <a:outerShdw blurRad="63500" dist="38099" dir="2700000" algn="ctr" rotWithShape="0">
                     <a:srgbClr val="000000">
@@ -9961,12 +9961,12 @@
           <a:effectLst/>
           <a:extLst>
             <a:ext uri="{909E8E84-426E-40dd-AFC4-6F175D3DCCD1}">
-              <a14:hiddenFill xmlns:a14="http://schemas.microsoft.com/office/drawing/2010/main" xmlns="">
+              <a14:hiddenFill xmlns="" xmlns:a14="http://schemas.microsoft.com/office/drawing/2010/main">
                 <a:noFill/>
               </a14:hiddenFill>
             </a:ext>
             <a:ext uri="{AF507438-7753-43e0-B8FC-AC1667EBCBE1}">
-              <a14:hiddenEffects xmlns:a14="http://schemas.microsoft.com/office/drawing/2010/main" xmlns="">
+              <a14:hiddenEffects xmlns="" xmlns:a14="http://schemas.microsoft.com/office/drawing/2010/main">
                 <a:effectLst>
                   <a:outerShdw blurRad="63500" dist="38099" dir="2700000" algn="ctr" rotWithShape="0">
                     <a:srgbClr val="000000">
@@ -10014,12 +10014,12 @@
           <a:effectLst/>
           <a:extLst>
             <a:ext uri="{909E8E84-426E-40dd-AFC4-6F175D3DCCD1}">
-              <a14:hiddenFill xmlns:a14="http://schemas.microsoft.com/office/drawing/2010/main" xmlns="">
+              <a14:hiddenFill xmlns="" xmlns:a14="http://schemas.microsoft.com/office/drawing/2010/main">
                 <a:noFill/>
               </a14:hiddenFill>
             </a:ext>
             <a:ext uri="{AF507438-7753-43e0-B8FC-AC1667EBCBE1}">
-              <a14:hiddenEffects xmlns:a14="http://schemas.microsoft.com/office/drawing/2010/main" xmlns="">
+              <a14:hiddenEffects xmlns="" xmlns:a14="http://schemas.microsoft.com/office/drawing/2010/main">
                 <a:effectLst>
                   <a:outerShdw blurRad="63500" dist="38099" dir="2700000" algn="ctr" rotWithShape="0">
                     <a:srgbClr val="000000">
@@ -10062,14 +10062,14 @@
           <a:effectLst/>
           <a:extLst>
             <a:ext uri="{909E8E84-426E-40dd-AFC4-6F175D3DCCD1}">
-              <a14:hiddenFill xmlns:a14="http://schemas.microsoft.com/office/drawing/2010/main" xmlns="">
+              <a14:hiddenFill xmlns="" xmlns:a14="http://schemas.microsoft.com/office/drawing/2010/main">
                 <a:solidFill>
                   <a:srgbClr val="FFFFFF"/>
                 </a:solidFill>
               </a14:hiddenFill>
             </a:ext>
             <a:ext uri="{91240B29-F687-4f45-9708-019B960494DF}">
-              <a14:hiddenLine xmlns:a14="http://schemas.microsoft.com/office/drawing/2010/main" xmlns="" w="9525" cap="flat">
+              <a14:hiddenLine xmlns="" xmlns:a14="http://schemas.microsoft.com/office/drawing/2010/main" w="9525" cap="flat">
                 <a:solidFill>
                   <a:srgbClr val="000000"/>
                 </a:solidFill>
@@ -10079,7 +10079,7 @@
               </a14:hiddenLine>
             </a:ext>
             <a:ext uri="{AF507438-7753-43e0-B8FC-AC1667EBCBE1}">
-              <a14:hiddenEffects xmlns:a14="http://schemas.microsoft.com/office/drawing/2010/main" xmlns="">
+              <a14:hiddenEffects xmlns="" xmlns:a14="http://schemas.microsoft.com/office/drawing/2010/main">
                 <a:effectLst>
                   <a:outerShdw blurRad="63500" dist="38099" dir="2700000" algn="ctr" rotWithShape="0">
                     <a:srgbClr val="000000">
@@ -10317,14 +10317,14 @@
           <a:effectLst/>
           <a:extLst>
             <a:ext uri="{909E8E84-426E-40dd-AFC4-6F175D3DCCD1}">
-              <a14:hiddenFill xmlns:a14="http://schemas.microsoft.com/office/drawing/2010/main" xmlns="">
+              <a14:hiddenFill xmlns="" xmlns:a14="http://schemas.microsoft.com/office/drawing/2010/main">
                 <a:solidFill>
                   <a:srgbClr val="FFFFFF"/>
                 </a:solidFill>
               </a14:hiddenFill>
             </a:ext>
             <a:ext uri="{91240B29-F687-4f45-9708-019B960494DF}">
-              <a14:hiddenLine xmlns:a14="http://schemas.microsoft.com/office/drawing/2010/main" xmlns="" w="9525" cap="flat">
+              <a14:hiddenLine xmlns="" xmlns:a14="http://schemas.microsoft.com/office/drawing/2010/main" w="9525" cap="flat">
                 <a:solidFill>
                   <a:srgbClr val="000000"/>
                 </a:solidFill>
@@ -10334,7 +10334,7 @@
               </a14:hiddenLine>
             </a:ext>
             <a:ext uri="{AF507438-7753-43e0-B8FC-AC1667EBCBE1}">
-              <a14:hiddenEffects xmlns:a14="http://schemas.microsoft.com/office/drawing/2010/main" xmlns="">
+              <a14:hiddenEffects xmlns="" xmlns:a14="http://schemas.microsoft.com/office/drawing/2010/main">
                 <a:effectLst>
                   <a:outerShdw blurRad="63500" dist="38099" dir="2700000" algn="ctr" rotWithShape="0">
                     <a:srgbClr val="000000">
@@ -10566,14 +10566,14 @@
           <a:effectLst/>
           <a:extLst>
             <a:ext uri="{909E8E84-426E-40dd-AFC4-6F175D3DCCD1}">
-              <a14:hiddenFill xmlns:a14="http://schemas.microsoft.com/office/drawing/2010/main" xmlns="">
+              <a14:hiddenFill xmlns="" xmlns:a14="http://schemas.microsoft.com/office/drawing/2010/main">
                 <a:solidFill>
                   <a:srgbClr val="FFFFFF"/>
                 </a:solidFill>
               </a14:hiddenFill>
             </a:ext>
             <a:ext uri="{91240B29-F687-4f45-9708-019B960494DF}">
-              <a14:hiddenLine xmlns:a14="http://schemas.microsoft.com/office/drawing/2010/main" xmlns="" w="9525" cap="flat">
+              <a14:hiddenLine xmlns="" xmlns:a14="http://schemas.microsoft.com/office/drawing/2010/main" w="9525" cap="flat">
                 <a:solidFill>
                   <a:srgbClr val="000000"/>
                 </a:solidFill>
@@ -10583,7 +10583,7 @@
               </a14:hiddenLine>
             </a:ext>
             <a:ext uri="{AF507438-7753-43e0-B8FC-AC1667EBCBE1}">
-              <a14:hiddenEffects xmlns:a14="http://schemas.microsoft.com/office/drawing/2010/main" xmlns="">
+              <a14:hiddenEffects xmlns="" xmlns:a14="http://schemas.microsoft.com/office/drawing/2010/main">
                 <a:effectLst>
                   <a:outerShdw blurRad="63500" dist="38099" dir="2700000" algn="ctr" rotWithShape="0">
                     <a:srgbClr val="000000">
@@ -10808,12 +10808,12 @@
           <a:effectLst/>
           <a:extLst>
             <a:ext uri="{909E8E84-426E-40dd-AFC4-6F175D3DCCD1}">
-              <a14:hiddenFill xmlns:a14="http://schemas.microsoft.com/office/drawing/2010/main" xmlns="">
+              <a14:hiddenFill xmlns="" xmlns:a14="http://schemas.microsoft.com/office/drawing/2010/main">
                 <a:noFill/>
               </a14:hiddenFill>
             </a:ext>
             <a:ext uri="{AF507438-7753-43e0-B8FC-AC1667EBCBE1}">
-              <a14:hiddenEffects xmlns:a14="http://schemas.microsoft.com/office/drawing/2010/main" xmlns="">
+              <a14:hiddenEffects xmlns="" xmlns:a14="http://schemas.microsoft.com/office/drawing/2010/main">
                 <a:effectLst>
                   <a:outerShdw blurRad="63500" dist="38099" dir="2700000" algn="ctr" rotWithShape="0">
                     <a:srgbClr val="000000">
@@ -10856,14 +10856,14 @@
           <a:effectLst/>
           <a:extLst>
             <a:ext uri="{909E8E84-426E-40dd-AFC4-6F175D3DCCD1}">
-              <a14:hiddenFill xmlns:a14="http://schemas.microsoft.com/office/drawing/2010/main" xmlns="">
+              <a14:hiddenFill xmlns="" xmlns:a14="http://schemas.microsoft.com/office/drawing/2010/main">
                 <a:solidFill>
                   <a:srgbClr val="FFFFFF"/>
                 </a:solidFill>
               </a14:hiddenFill>
             </a:ext>
             <a:ext uri="{91240B29-F687-4f45-9708-019B960494DF}">
-              <a14:hiddenLine xmlns:a14="http://schemas.microsoft.com/office/drawing/2010/main" xmlns="" w="9525" cap="flat">
+              <a14:hiddenLine xmlns="" xmlns:a14="http://schemas.microsoft.com/office/drawing/2010/main" w="9525" cap="flat">
                 <a:solidFill>
                   <a:srgbClr val="000000"/>
                 </a:solidFill>
@@ -10873,7 +10873,7 @@
               </a14:hiddenLine>
             </a:ext>
             <a:ext uri="{AF507438-7753-43e0-B8FC-AC1667EBCBE1}">
-              <a14:hiddenEffects xmlns:a14="http://schemas.microsoft.com/office/drawing/2010/main" xmlns="">
+              <a14:hiddenEffects xmlns="" xmlns:a14="http://schemas.microsoft.com/office/drawing/2010/main">
                 <a:effectLst>
                   <a:outerShdw blurRad="63500" dist="38099" dir="2700000" algn="ctr" rotWithShape="0">
                     <a:srgbClr val="000000">
@@ -10923,14 +10923,14 @@
           <a:effectLst/>
           <a:extLst>
             <a:ext uri="{909E8E84-426E-40dd-AFC4-6F175D3DCCD1}">
-              <a14:hiddenFill xmlns:a14="http://schemas.microsoft.com/office/drawing/2010/main" xmlns="">
+              <a14:hiddenFill xmlns="" xmlns:a14="http://schemas.microsoft.com/office/drawing/2010/main">
                 <a:solidFill>
                   <a:srgbClr val="FFFFFF"/>
                 </a:solidFill>
               </a14:hiddenFill>
             </a:ext>
             <a:ext uri="{91240B29-F687-4f45-9708-019B960494DF}">
-              <a14:hiddenLine xmlns:a14="http://schemas.microsoft.com/office/drawing/2010/main" xmlns="" w="9525" cap="flat">
+              <a14:hiddenLine xmlns="" xmlns:a14="http://schemas.microsoft.com/office/drawing/2010/main" w="9525" cap="flat">
                 <a:solidFill>
                   <a:srgbClr val="000000"/>
                 </a:solidFill>
@@ -10940,7 +10940,7 @@
               </a14:hiddenLine>
             </a:ext>
             <a:ext uri="{AF507438-7753-43e0-B8FC-AC1667EBCBE1}">
-              <a14:hiddenEffects xmlns:a14="http://schemas.microsoft.com/office/drawing/2010/main" xmlns="">
+              <a14:hiddenEffects xmlns="" xmlns:a14="http://schemas.microsoft.com/office/drawing/2010/main">
                 <a:effectLst>
                   <a:outerShdw blurRad="63500" dist="38099" dir="2700000" algn="ctr" rotWithShape="0">
                     <a:srgbClr val="000000">
@@ -11160,14 +11160,14 @@
           <a:effectLst/>
           <a:extLst>
             <a:ext uri="{909E8E84-426E-40dd-AFC4-6F175D3DCCD1}">
-              <a14:hiddenFill xmlns:a14="http://schemas.microsoft.com/office/drawing/2010/main" xmlns="">
+              <a14:hiddenFill xmlns="" xmlns:a14="http://schemas.microsoft.com/office/drawing/2010/main">
                 <a:solidFill>
                   <a:srgbClr val="FFFFFF"/>
                 </a:solidFill>
               </a14:hiddenFill>
             </a:ext>
             <a:ext uri="{91240B29-F687-4f45-9708-019B960494DF}">
-              <a14:hiddenLine xmlns:a14="http://schemas.microsoft.com/office/drawing/2010/main" xmlns="" w="9525" cap="flat">
+              <a14:hiddenLine xmlns="" xmlns:a14="http://schemas.microsoft.com/office/drawing/2010/main" w="9525" cap="flat">
                 <a:solidFill>
                   <a:srgbClr val="000000"/>
                 </a:solidFill>
@@ -11177,7 +11177,7 @@
               </a14:hiddenLine>
             </a:ext>
             <a:ext uri="{AF507438-7753-43e0-B8FC-AC1667EBCBE1}">
-              <a14:hiddenEffects xmlns:a14="http://schemas.microsoft.com/office/drawing/2010/main" xmlns="">
+              <a14:hiddenEffects xmlns="" xmlns:a14="http://schemas.microsoft.com/office/drawing/2010/main">
                 <a:effectLst>
                   <a:outerShdw blurRad="63500" dist="38099" dir="2700000" algn="ctr" rotWithShape="0">
                     <a:srgbClr val="000000">
@@ -11397,14 +11397,14 @@
           <a:effectLst/>
           <a:extLst>
             <a:ext uri="{909E8E84-426E-40dd-AFC4-6F175D3DCCD1}">
-              <a14:hiddenFill xmlns:a14="http://schemas.microsoft.com/office/drawing/2010/main" xmlns="">
+              <a14:hiddenFill xmlns="" xmlns:a14="http://schemas.microsoft.com/office/drawing/2010/main">
                 <a:solidFill>
                   <a:srgbClr val="FFFFFF"/>
                 </a:solidFill>
               </a14:hiddenFill>
             </a:ext>
             <a:ext uri="{91240B29-F687-4f45-9708-019B960494DF}">
-              <a14:hiddenLine xmlns:a14="http://schemas.microsoft.com/office/drawing/2010/main" xmlns="" w="9525" cap="flat">
+              <a14:hiddenLine xmlns="" xmlns:a14="http://schemas.microsoft.com/office/drawing/2010/main" w="9525" cap="flat">
                 <a:solidFill>
                   <a:srgbClr val="000000"/>
                 </a:solidFill>
@@ -11414,7 +11414,7 @@
               </a14:hiddenLine>
             </a:ext>
             <a:ext uri="{AF507438-7753-43e0-B8FC-AC1667EBCBE1}">
-              <a14:hiddenEffects xmlns:a14="http://schemas.microsoft.com/office/drawing/2010/main" xmlns="">
+              <a14:hiddenEffects xmlns="" xmlns:a14="http://schemas.microsoft.com/office/drawing/2010/main">
                 <a:effectLst>
                   <a:outerShdw blurRad="63500" dist="38099" dir="2700000" algn="ctr" rotWithShape="0">
                     <a:srgbClr val="000000">
@@ -11464,14 +11464,14 @@
           <a:effectLst/>
           <a:extLst>
             <a:ext uri="{909E8E84-426E-40dd-AFC4-6F175D3DCCD1}">
-              <a14:hiddenFill xmlns:a14="http://schemas.microsoft.com/office/drawing/2010/main" xmlns="">
+              <a14:hiddenFill xmlns="" xmlns:a14="http://schemas.microsoft.com/office/drawing/2010/main">
                 <a:solidFill>
                   <a:srgbClr val="FFFFFF"/>
                 </a:solidFill>
               </a14:hiddenFill>
             </a:ext>
             <a:ext uri="{91240B29-F687-4f45-9708-019B960494DF}">
-              <a14:hiddenLine xmlns:a14="http://schemas.microsoft.com/office/drawing/2010/main" xmlns="" w="9525" cap="flat">
+              <a14:hiddenLine xmlns="" xmlns:a14="http://schemas.microsoft.com/office/drawing/2010/main" w="9525" cap="flat">
                 <a:solidFill>
                   <a:srgbClr val="000000"/>
                 </a:solidFill>
@@ -11481,7 +11481,7 @@
               </a14:hiddenLine>
             </a:ext>
             <a:ext uri="{AF507438-7753-43e0-B8FC-AC1667EBCBE1}">
-              <a14:hiddenEffects xmlns:a14="http://schemas.microsoft.com/office/drawing/2010/main" xmlns="">
+              <a14:hiddenEffects xmlns="" xmlns:a14="http://schemas.microsoft.com/office/drawing/2010/main">
                 <a:effectLst>
                   <a:outerShdw blurRad="63500" dist="38099" dir="2700000" algn="ctr" rotWithShape="0">
                     <a:srgbClr val="000000">
@@ -11531,14 +11531,14 @@
           <a:effectLst/>
           <a:extLst>
             <a:ext uri="{909E8E84-426E-40dd-AFC4-6F175D3DCCD1}">
-              <a14:hiddenFill xmlns:a14="http://schemas.microsoft.com/office/drawing/2010/main" xmlns="">
+              <a14:hiddenFill xmlns="" xmlns:a14="http://schemas.microsoft.com/office/drawing/2010/main">
                 <a:solidFill>
                   <a:srgbClr val="FFFFFF"/>
                 </a:solidFill>
               </a14:hiddenFill>
             </a:ext>
             <a:ext uri="{91240B29-F687-4f45-9708-019B960494DF}">
-              <a14:hiddenLine xmlns:a14="http://schemas.microsoft.com/office/drawing/2010/main" xmlns="" w="9525" cap="flat">
+              <a14:hiddenLine xmlns="" xmlns:a14="http://schemas.microsoft.com/office/drawing/2010/main" w="9525" cap="flat">
                 <a:solidFill>
                   <a:srgbClr val="000000"/>
                 </a:solidFill>
@@ -11548,7 +11548,7 @@
               </a14:hiddenLine>
             </a:ext>
             <a:ext uri="{AF507438-7753-43e0-B8FC-AC1667EBCBE1}">
-              <a14:hiddenEffects xmlns:a14="http://schemas.microsoft.com/office/drawing/2010/main" xmlns="">
+              <a14:hiddenEffects xmlns="" xmlns:a14="http://schemas.microsoft.com/office/drawing/2010/main">
                 <a:effectLst>
                   <a:outerShdw blurRad="63500" dist="38099" dir="2700000" algn="ctr" rotWithShape="0">
                     <a:srgbClr val="000000">
@@ -11598,14 +11598,14 @@
           <a:effectLst/>
           <a:extLst>
             <a:ext uri="{909E8E84-426E-40dd-AFC4-6F175D3DCCD1}">
-              <a14:hiddenFill xmlns:a14="http://schemas.microsoft.com/office/drawing/2010/main" xmlns="">
+              <a14:hiddenFill xmlns="" xmlns:a14="http://schemas.microsoft.com/office/drawing/2010/main">
                 <a:solidFill>
                   <a:srgbClr val="FFFFFF"/>
                 </a:solidFill>
               </a14:hiddenFill>
             </a:ext>
             <a:ext uri="{91240B29-F687-4f45-9708-019B960494DF}">
-              <a14:hiddenLine xmlns:a14="http://schemas.microsoft.com/office/drawing/2010/main" xmlns="" w="9525" cap="flat">
+              <a14:hiddenLine xmlns="" xmlns:a14="http://schemas.microsoft.com/office/drawing/2010/main" w="9525" cap="flat">
                 <a:solidFill>
                   <a:srgbClr val="000000"/>
                 </a:solidFill>
@@ -11615,7 +11615,7 @@
               </a14:hiddenLine>
             </a:ext>
             <a:ext uri="{AF507438-7753-43e0-B8FC-AC1667EBCBE1}">
-              <a14:hiddenEffects xmlns:a14="http://schemas.microsoft.com/office/drawing/2010/main" xmlns="">
+              <a14:hiddenEffects xmlns="" xmlns:a14="http://schemas.microsoft.com/office/drawing/2010/main">
                 <a:effectLst>
                   <a:outerShdw blurRad="63500" dist="38099" dir="2700000" algn="ctr" rotWithShape="0">
                     <a:srgbClr val="000000">
@@ -11665,14 +11665,14 @@
           <a:effectLst/>
           <a:extLst>
             <a:ext uri="{909E8E84-426E-40dd-AFC4-6F175D3DCCD1}">
-              <a14:hiddenFill xmlns:a14="http://schemas.microsoft.com/office/drawing/2010/main" xmlns="">
+              <a14:hiddenFill xmlns="" xmlns:a14="http://schemas.microsoft.com/office/drawing/2010/main">
                 <a:solidFill>
                   <a:srgbClr val="FFFFFF"/>
                 </a:solidFill>
               </a14:hiddenFill>
             </a:ext>
             <a:ext uri="{91240B29-F687-4f45-9708-019B960494DF}">
-              <a14:hiddenLine xmlns:a14="http://schemas.microsoft.com/office/drawing/2010/main" xmlns="" w="9525" cap="flat">
+              <a14:hiddenLine xmlns="" xmlns:a14="http://schemas.microsoft.com/office/drawing/2010/main" w="9525" cap="flat">
                 <a:solidFill>
                   <a:srgbClr val="000000"/>
                 </a:solidFill>
@@ -11682,7 +11682,7 @@
               </a14:hiddenLine>
             </a:ext>
             <a:ext uri="{AF507438-7753-43e0-B8FC-AC1667EBCBE1}">
-              <a14:hiddenEffects xmlns:a14="http://schemas.microsoft.com/office/drawing/2010/main" xmlns="">
+              <a14:hiddenEffects xmlns="" xmlns:a14="http://schemas.microsoft.com/office/drawing/2010/main">
                 <a:effectLst>
                   <a:outerShdw blurRad="63500" dist="38099" dir="2700000" algn="ctr" rotWithShape="0">
                     <a:srgbClr val="000000">
@@ -11902,14 +11902,14 @@
           <a:effectLst/>
           <a:extLst>
             <a:ext uri="{909E8E84-426E-40dd-AFC4-6F175D3DCCD1}">
-              <a14:hiddenFill xmlns:a14="http://schemas.microsoft.com/office/drawing/2010/main" xmlns="">
+              <a14:hiddenFill xmlns="" xmlns:a14="http://schemas.microsoft.com/office/drawing/2010/main">
                 <a:solidFill>
                   <a:srgbClr val="FFFFFF"/>
                 </a:solidFill>
               </a14:hiddenFill>
             </a:ext>
             <a:ext uri="{91240B29-F687-4f45-9708-019B960494DF}">
-              <a14:hiddenLine xmlns:a14="http://schemas.microsoft.com/office/drawing/2010/main" xmlns="" w="9525" cap="flat">
+              <a14:hiddenLine xmlns="" xmlns:a14="http://schemas.microsoft.com/office/drawing/2010/main" w="9525" cap="flat">
                 <a:solidFill>
                   <a:srgbClr val="000000"/>
                 </a:solidFill>
@@ -11919,7 +11919,7 @@
               </a14:hiddenLine>
             </a:ext>
             <a:ext uri="{AF507438-7753-43e0-B8FC-AC1667EBCBE1}">
-              <a14:hiddenEffects xmlns:a14="http://schemas.microsoft.com/office/drawing/2010/main" xmlns="">
+              <a14:hiddenEffects xmlns="" xmlns:a14="http://schemas.microsoft.com/office/drawing/2010/main">
                 <a:effectLst>
                   <a:outerShdw blurRad="63500" dist="38099" dir="2700000" algn="ctr" rotWithShape="0">
                     <a:srgbClr val="000000">
@@ -11969,14 +11969,14 @@
           <a:effectLst/>
           <a:extLst>
             <a:ext uri="{909E8E84-426E-40dd-AFC4-6F175D3DCCD1}">
-              <a14:hiddenFill xmlns:a14="http://schemas.microsoft.com/office/drawing/2010/main" xmlns="">
+              <a14:hiddenFill xmlns="" xmlns:a14="http://schemas.microsoft.com/office/drawing/2010/main">
                 <a:solidFill>
                   <a:srgbClr val="FFFFFF"/>
                 </a:solidFill>
               </a14:hiddenFill>
             </a:ext>
             <a:ext uri="{91240B29-F687-4f45-9708-019B960494DF}">
-              <a14:hiddenLine xmlns:a14="http://schemas.microsoft.com/office/drawing/2010/main" xmlns="" w="9525" cap="flat">
+              <a14:hiddenLine xmlns="" xmlns:a14="http://schemas.microsoft.com/office/drawing/2010/main" w="9525" cap="flat">
                 <a:solidFill>
                   <a:srgbClr val="000000"/>
                 </a:solidFill>
@@ -11986,7 +11986,7 @@
               </a14:hiddenLine>
             </a:ext>
             <a:ext uri="{AF507438-7753-43e0-B8FC-AC1667EBCBE1}">
-              <a14:hiddenEffects xmlns:a14="http://schemas.microsoft.com/office/drawing/2010/main" xmlns="">
+              <a14:hiddenEffects xmlns="" xmlns:a14="http://schemas.microsoft.com/office/drawing/2010/main">
                 <a:effectLst>
                   <a:outerShdw blurRad="63500" dist="38099" dir="2700000" algn="ctr" rotWithShape="0">
                     <a:srgbClr val="000000">
@@ -12206,14 +12206,14 @@
           <a:effectLst/>
           <a:extLst>
             <a:ext uri="{909E8E84-426E-40dd-AFC4-6F175D3DCCD1}">
-              <a14:hiddenFill xmlns:a14="http://schemas.microsoft.com/office/drawing/2010/main" xmlns="">
+              <a14:hiddenFill xmlns="" xmlns:a14="http://schemas.microsoft.com/office/drawing/2010/main">
                 <a:solidFill>
                   <a:srgbClr val="FFFFFF"/>
                 </a:solidFill>
               </a14:hiddenFill>
             </a:ext>
             <a:ext uri="{91240B29-F687-4f45-9708-019B960494DF}">
-              <a14:hiddenLine xmlns:a14="http://schemas.microsoft.com/office/drawing/2010/main" xmlns="" w="9525" cap="flat">
+              <a14:hiddenLine xmlns="" xmlns:a14="http://schemas.microsoft.com/office/drawing/2010/main" w="9525" cap="flat">
                 <a:solidFill>
                   <a:srgbClr val="000000"/>
                 </a:solidFill>
@@ -12223,7 +12223,7 @@
               </a14:hiddenLine>
             </a:ext>
             <a:ext uri="{AF507438-7753-43e0-B8FC-AC1667EBCBE1}">
-              <a14:hiddenEffects xmlns:a14="http://schemas.microsoft.com/office/drawing/2010/main" xmlns="">
+              <a14:hiddenEffects xmlns="" xmlns:a14="http://schemas.microsoft.com/office/drawing/2010/main">
                 <a:effectLst>
                   <a:outerShdw blurRad="63500" dist="38099" dir="2700000" algn="ctr" rotWithShape="0">
                     <a:srgbClr val="000000">
@@ -12443,14 +12443,14 @@
           <a:effectLst/>
           <a:extLst>
             <a:ext uri="{909E8E84-426E-40dd-AFC4-6F175D3DCCD1}">
-              <a14:hiddenFill xmlns:a14="http://schemas.microsoft.com/office/drawing/2010/main" xmlns="">
+              <a14:hiddenFill xmlns="" xmlns:a14="http://schemas.microsoft.com/office/drawing/2010/main">
                 <a:solidFill>
                   <a:srgbClr val="FFFFFF"/>
                 </a:solidFill>
               </a14:hiddenFill>
             </a:ext>
             <a:ext uri="{91240B29-F687-4f45-9708-019B960494DF}">
-              <a14:hiddenLine xmlns:a14="http://schemas.microsoft.com/office/drawing/2010/main" xmlns="" w="9525" cap="flat">
+              <a14:hiddenLine xmlns="" xmlns:a14="http://schemas.microsoft.com/office/drawing/2010/main" w="9525" cap="flat">
                 <a:solidFill>
                   <a:srgbClr val="000000"/>
                 </a:solidFill>
@@ -12460,7 +12460,7 @@
               </a14:hiddenLine>
             </a:ext>
             <a:ext uri="{AF507438-7753-43e0-B8FC-AC1667EBCBE1}">
-              <a14:hiddenEffects xmlns:a14="http://schemas.microsoft.com/office/drawing/2010/main" xmlns="">
+              <a14:hiddenEffects xmlns="" xmlns:a14="http://schemas.microsoft.com/office/drawing/2010/main">
                 <a:effectLst>
                   <a:outerShdw blurRad="63500" dist="38099" dir="2700000" algn="ctr" rotWithShape="0">
                     <a:srgbClr val="000000">
@@ -12680,14 +12680,14 @@
           <a:effectLst/>
           <a:extLst>
             <a:ext uri="{909E8E84-426E-40dd-AFC4-6F175D3DCCD1}">
-              <a14:hiddenFill xmlns:a14="http://schemas.microsoft.com/office/drawing/2010/main" xmlns="">
+              <a14:hiddenFill xmlns="" xmlns:a14="http://schemas.microsoft.com/office/drawing/2010/main">
                 <a:solidFill>
                   <a:srgbClr val="FFFFFF"/>
                 </a:solidFill>
               </a14:hiddenFill>
             </a:ext>
             <a:ext uri="{91240B29-F687-4f45-9708-019B960494DF}">
-              <a14:hiddenLine xmlns:a14="http://schemas.microsoft.com/office/drawing/2010/main" xmlns="" w="9525" cap="flat">
+              <a14:hiddenLine xmlns="" xmlns:a14="http://schemas.microsoft.com/office/drawing/2010/main" w="9525" cap="flat">
                 <a:solidFill>
                   <a:srgbClr val="000000"/>
                 </a:solidFill>
@@ -12697,7 +12697,7 @@
               </a14:hiddenLine>
             </a:ext>
             <a:ext uri="{AF507438-7753-43e0-B8FC-AC1667EBCBE1}">
-              <a14:hiddenEffects xmlns:a14="http://schemas.microsoft.com/office/drawing/2010/main" xmlns="">
+              <a14:hiddenEffects xmlns="" xmlns:a14="http://schemas.microsoft.com/office/drawing/2010/main">
                 <a:effectLst>
                   <a:outerShdw blurRad="63500" dist="38099" dir="2700000" algn="ctr" rotWithShape="0">
                     <a:srgbClr val="000000">
@@ -12917,14 +12917,14 @@
           <a:effectLst/>
           <a:extLst>
             <a:ext uri="{909E8E84-426E-40dd-AFC4-6F175D3DCCD1}">
-              <a14:hiddenFill xmlns:a14="http://schemas.microsoft.com/office/drawing/2010/main" xmlns="">
+              <a14:hiddenFill xmlns="" xmlns:a14="http://schemas.microsoft.com/office/drawing/2010/main">
                 <a:solidFill>
                   <a:srgbClr val="FFFFFF"/>
                 </a:solidFill>
               </a14:hiddenFill>
             </a:ext>
             <a:ext uri="{91240B29-F687-4f45-9708-019B960494DF}">
-              <a14:hiddenLine xmlns:a14="http://schemas.microsoft.com/office/drawing/2010/main" xmlns="" w="9525" cap="flat">
+              <a14:hiddenLine xmlns="" xmlns:a14="http://schemas.microsoft.com/office/drawing/2010/main" w="9525" cap="flat">
                 <a:solidFill>
                   <a:srgbClr val="000000"/>
                 </a:solidFill>
@@ -12934,7 +12934,7 @@
               </a14:hiddenLine>
             </a:ext>
             <a:ext uri="{AF507438-7753-43e0-B8FC-AC1667EBCBE1}">
-              <a14:hiddenEffects xmlns:a14="http://schemas.microsoft.com/office/drawing/2010/main" xmlns="">
+              <a14:hiddenEffects xmlns="" xmlns:a14="http://schemas.microsoft.com/office/drawing/2010/main">
                 <a:effectLst>
                   <a:outerShdw blurRad="63500" dist="38099" dir="2700000" algn="ctr" rotWithShape="0">
                     <a:srgbClr val="000000">
@@ -13154,14 +13154,14 @@
           <a:effectLst/>
           <a:extLst>
             <a:ext uri="{909E8E84-426E-40dd-AFC4-6F175D3DCCD1}">
-              <a14:hiddenFill xmlns:a14="http://schemas.microsoft.com/office/drawing/2010/main" xmlns="">
+              <a14:hiddenFill xmlns="" xmlns:a14="http://schemas.microsoft.com/office/drawing/2010/main">
                 <a:solidFill>
                   <a:srgbClr val="FFFFFF"/>
                 </a:solidFill>
               </a14:hiddenFill>
             </a:ext>
             <a:ext uri="{91240B29-F687-4f45-9708-019B960494DF}">
-              <a14:hiddenLine xmlns:a14="http://schemas.microsoft.com/office/drawing/2010/main" xmlns="" w="9525" cap="flat">
+              <a14:hiddenLine xmlns="" xmlns:a14="http://schemas.microsoft.com/office/drawing/2010/main" w="9525" cap="flat">
                 <a:solidFill>
                   <a:srgbClr val="000000"/>
                 </a:solidFill>
@@ -13171,7 +13171,7 @@
               </a14:hiddenLine>
             </a:ext>
             <a:ext uri="{AF507438-7753-43e0-B8FC-AC1667EBCBE1}">
-              <a14:hiddenEffects xmlns:a14="http://schemas.microsoft.com/office/drawing/2010/main" xmlns="">
+              <a14:hiddenEffects xmlns="" xmlns:a14="http://schemas.microsoft.com/office/drawing/2010/main">
                 <a:effectLst>
                   <a:outerShdw blurRad="63500" dist="38099" dir="2700000" algn="ctr" rotWithShape="0">
                     <a:srgbClr val="000000">
@@ -13221,14 +13221,14 @@
           <a:effectLst/>
           <a:extLst>
             <a:ext uri="{909E8E84-426E-40dd-AFC4-6F175D3DCCD1}">
-              <a14:hiddenFill xmlns:a14="http://schemas.microsoft.com/office/drawing/2010/main" xmlns="">
+              <a14:hiddenFill xmlns="" xmlns:a14="http://schemas.microsoft.com/office/drawing/2010/main">
                 <a:solidFill>
                   <a:srgbClr val="FFFFFF"/>
                 </a:solidFill>
               </a14:hiddenFill>
             </a:ext>
             <a:ext uri="{91240B29-F687-4f45-9708-019B960494DF}">
-              <a14:hiddenLine xmlns:a14="http://schemas.microsoft.com/office/drawing/2010/main" xmlns="" w="9525" cap="flat">
+              <a14:hiddenLine xmlns="" xmlns:a14="http://schemas.microsoft.com/office/drawing/2010/main" w="9525" cap="flat">
                 <a:solidFill>
                   <a:srgbClr val="000000"/>
                 </a:solidFill>
@@ -13238,7 +13238,7 @@
               </a14:hiddenLine>
             </a:ext>
             <a:ext uri="{AF507438-7753-43e0-B8FC-AC1667EBCBE1}">
-              <a14:hiddenEffects xmlns:a14="http://schemas.microsoft.com/office/drawing/2010/main" xmlns="">
+              <a14:hiddenEffects xmlns="" xmlns:a14="http://schemas.microsoft.com/office/drawing/2010/main">
                 <a:effectLst>
                   <a:outerShdw blurRad="63500" dist="38099" dir="2700000" algn="ctr" rotWithShape="0">
                     <a:srgbClr val="000000">
@@ -13288,14 +13288,14 @@
           <a:effectLst/>
           <a:extLst>
             <a:ext uri="{909E8E84-426E-40dd-AFC4-6F175D3DCCD1}">
-              <a14:hiddenFill xmlns:a14="http://schemas.microsoft.com/office/drawing/2010/main" xmlns="">
+              <a14:hiddenFill xmlns="" xmlns:a14="http://schemas.microsoft.com/office/drawing/2010/main">
                 <a:solidFill>
                   <a:srgbClr val="FFFFFF"/>
                 </a:solidFill>
               </a14:hiddenFill>
             </a:ext>
             <a:ext uri="{91240B29-F687-4f45-9708-019B960494DF}">
-              <a14:hiddenLine xmlns:a14="http://schemas.microsoft.com/office/drawing/2010/main" xmlns="" w="9525" cap="flat">
+              <a14:hiddenLine xmlns="" xmlns:a14="http://schemas.microsoft.com/office/drawing/2010/main" w="9525" cap="flat">
                 <a:solidFill>
                   <a:srgbClr val="000000"/>
                 </a:solidFill>
@@ -13305,7 +13305,7 @@
               </a14:hiddenLine>
             </a:ext>
             <a:ext uri="{AF507438-7753-43e0-B8FC-AC1667EBCBE1}">
-              <a14:hiddenEffects xmlns:a14="http://schemas.microsoft.com/office/drawing/2010/main" xmlns="">
+              <a14:hiddenEffects xmlns="" xmlns:a14="http://schemas.microsoft.com/office/drawing/2010/main">
                 <a:effectLst>
                   <a:outerShdw blurRad="63500" dist="38099" dir="2700000" algn="ctr" rotWithShape="0">
                     <a:srgbClr val="000000">
@@ -13525,14 +13525,14 @@
           <a:effectLst/>
           <a:extLst>
             <a:ext uri="{909E8E84-426E-40dd-AFC4-6F175D3DCCD1}">
-              <a14:hiddenFill xmlns:a14="http://schemas.microsoft.com/office/drawing/2010/main" xmlns="">
+              <a14:hiddenFill xmlns="" xmlns:a14="http://schemas.microsoft.com/office/drawing/2010/main">
                 <a:solidFill>
                   <a:srgbClr val="FFFFFF"/>
                 </a:solidFill>
               </a14:hiddenFill>
             </a:ext>
             <a:ext uri="{91240B29-F687-4f45-9708-019B960494DF}">
-              <a14:hiddenLine xmlns:a14="http://schemas.microsoft.com/office/drawing/2010/main" xmlns="" w="9525" cap="flat">
+              <a14:hiddenLine xmlns="" xmlns:a14="http://schemas.microsoft.com/office/drawing/2010/main" w="9525" cap="flat">
                 <a:solidFill>
                   <a:srgbClr val="000000"/>
                 </a:solidFill>
@@ -13542,7 +13542,7 @@
               </a14:hiddenLine>
             </a:ext>
             <a:ext uri="{AF507438-7753-43e0-B8FC-AC1667EBCBE1}">
-              <a14:hiddenEffects xmlns:a14="http://schemas.microsoft.com/office/drawing/2010/main" xmlns="">
+              <a14:hiddenEffects xmlns="" xmlns:a14="http://schemas.microsoft.com/office/drawing/2010/main">
                 <a:effectLst>
                   <a:outerShdw blurRad="63500" dist="38099" dir="2700000" algn="ctr" rotWithShape="0">
                     <a:srgbClr val="000000">
@@ -13592,14 +13592,14 @@
           <a:effectLst/>
           <a:extLst>
             <a:ext uri="{909E8E84-426E-40dd-AFC4-6F175D3DCCD1}">
-              <a14:hiddenFill xmlns:a14="http://schemas.microsoft.com/office/drawing/2010/main" xmlns="">
+              <a14:hiddenFill xmlns="" xmlns:a14="http://schemas.microsoft.com/office/drawing/2010/main">
                 <a:solidFill>
                   <a:srgbClr val="FFFFFF"/>
                 </a:solidFill>
               </a14:hiddenFill>
             </a:ext>
             <a:ext uri="{91240B29-F687-4f45-9708-019B960494DF}">
-              <a14:hiddenLine xmlns:a14="http://schemas.microsoft.com/office/drawing/2010/main" xmlns="" w="9525" cap="flat">
+              <a14:hiddenLine xmlns="" xmlns:a14="http://schemas.microsoft.com/office/drawing/2010/main" w="9525" cap="flat">
                 <a:solidFill>
                   <a:srgbClr val="000000"/>
                 </a:solidFill>
@@ -13609,7 +13609,7 @@
               </a14:hiddenLine>
             </a:ext>
             <a:ext uri="{AF507438-7753-43e0-B8FC-AC1667EBCBE1}">
-              <a14:hiddenEffects xmlns:a14="http://schemas.microsoft.com/office/drawing/2010/main" xmlns="">
+              <a14:hiddenEffects xmlns="" xmlns:a14="http://schemas.microsoft.com/office/drawing/2010/main">
                 <a:effectLst>
                   <a:outerShdw blurRad="63500" dist="38099" dir="2700000" algn="ctr" rotWithShape="0">
                     <a:srgbClr val="000000">
@@ -13829,14 +13829,14 @@
           <a:effectLst/>
           <a:extLst>
             <a:ext uri="{909E8E84-426E-40dd-AFC4-6F175D3DCCD1}">
-              <a14:hiddenFill xmlns:a14="http://schemas.microsoft.com/office/drawing/2010/main" xmlns="">
+              <a14:hiddenFill xmlns="" xmlns:a14="http://schemas.microsoft.com/office/drawing/2010/main">
                 <a:solidFill>
                   <a:srgbClr val="FFFFFF"/>
                 </a:solidFill>
               </a14:hiddenFill>
             </a:ext>
             <a:ext uri="{91240B29-F687-4f45-9708-019B960494DF}">
-              <a14:hiddenLine xmlns:a14="http://schemas.microsoft.com/office/drawing/2010/main" xmlns="" w="9525" cap="flat">
+              <a14:hiddenLine xmlns="" xmlns:a14="http://schemas.microsoft.com/office/drawing/2010/main" w="9525" cap="flat">
                 <a:solidFill>
                   <a:srgbClr val="000000"/>
                 </a:solidFill>
@@ -13846,7 +13846,7 @@
               </a14:hiddenLine>
             </a:ext>
             <a:ext uri="{AF507438-7753-43e0-B8FC-AC1667EBCBE1}">
-              <a14:hiddenEffects xmlns:a14="http://schemas.microsoft.com/office/drawing/2010/main" xmlns="">
+              <a14:hiddenEffects xmlns="" xmlns:a14="http://schemas.microsoft.com/office/drawing/2010/main">
                 <a:effectLst>
                   <a:outerShdw blurRad="63500" dist="38099" dir="2700000" algn="ctr" rotWithShape="0">
                     <a:srgbClr val="000000">
@@ -14066,14 +14066,14 @@
           <a:effectLst/>
           <a:extLst>
             <a:ext uri="{909E8E84-426E-40dd-AFC4-6F175D3DCCD1}">
-              <a14:hiddenFill xmlns:a14="http://schemas.microsoft.com/office/drawing/2010/main" xmlns="">
+              <a14:hiddenFill xmlns="" xmlns:a14="http://schemas.microsoft.com/office/drawing/2010/main">
                 <a:solidFill>
                   <a:srgbClr val="FFFFFF"/>
                 </a:solidFill>
               </a14:hiddenFill>
             </a:ext>
             <a:ext uri="{91240B29-F687-4f45-9708-019B960494DF}">
-              <a14:hiddenLine xmlns:a14="http://schemas.microsoft.com/office/drawing/2010/main" xmlns="" w="9525" cap="flat">
+              <a14:hiddenLine xmlns="" xmlns:a14="http://schemas.microsoft.com/office/drawing/2010/main" w="9525" cap="flat">
                 <a:solidFill>
                   <a:srgbClr val="000000"/>
                 </a:solidFill>
@@ -14083,7 +14083,7 @@
               </a14:hiddenLine>
             </a:ext>
             <a:ext uri="{AF507438-7753-43e0-B8FC-AC1667EBCBE1}">
-              <a14:hiddenEffects xmlns:a14="http://schemas.microsoft.com/office/drawing/2010/main" xmlns="">
+              <a14:hiddenEffects xmlns="" xmlns:a14="http://schemas.microsoft.com/office/drawing/2010/main">
                 <a:effectLst>
                   <a:outerShdw blurRad="63500" dist="38099" dir="2700000" algn="ctr" rotWithShape="0">
                     <a:srgbClr val="000000">
@@ -14303,14 +14303,14 @@
           <a:effectLst/>
           <a:extLst>
             <a:ext uri="{909E8E84-426E-40dd-AFC4-6F175D3DCCD1}">
-              <a14:hiddenFill xmlns:a14="http://schemas.microsoft.com/office/drawing/2010/main" xmlns="">
+              <a14:hiddenFill xmlns="" xmlns:a14="http://schemas.microsoft.com/office/drawing/2010/main">
                 <a:solidFill>
                   <a:srgbClr val="FFFFFF"/>
                 </a:solidFill>
               </a14:hiddenFill>
             </a:ext>
             <a:ext uri="{91240B29-F687-4f45-9708-019B960494DF}">
-              <a14:hiddenLine xmlns:a14="http://schemas.microsoft.com/office/drawing/2010/main" xmlns="" w="9525" cap="flat">
+              <a14:hiddenLine xmlns="" xmlns:a14="http://schemas.microsoft.com/office/drawing/2010/main" w="9525" cap="flat">
                 <a:solidFill>
                   <a:srgbClr val="000000"/>
                 </a:solidFill>
@@ -14320,7 +14320,7 @@
               </a14:hiddenLine>
             </a:ext>
             <a:ext uri="{AF507438-7753-43e0-B8FC-AC1667EBCBE1}">
-              <a14:hiddenEffects xmlns:a14="http://schemas.microsoft.com/office/drawing/2010/main" xmlns="">
+              <a14:hiddenEffects xmlns="" xmlns:a14="http://schemas.microsoft.com/office/drawing/2010/main">
                 <a:effectLst>
                   <a:outerShdw blurRad="63500" dist="38099" dir="2700000" algn="ctr" rotWithShape="0">
                     <a:srgbClr val="000000">
@@ -14540,14 +14540,14 @@
           <a:effectLst/>
           <a:extLst>
             <a:ext uri="{909E8E84-426E-40dd-AFC4-6F175D3DCCD1}">
-              <a14:hiddenFill xmlns:a14="http://schemas.microsoft.com/office/drawing/2010/main" xmlns="">
+              <a14:hiddenFill xmlns="" xmlns:a14="http://schemas.microsoft.com/office/drawing/2010/main">
                 <a:solidFill>
                   <a:srgbClr val="FFFFFF"/>
                 </a:solidFill>
               </a14:hiddenFill>
             </a:ext>
             <a:ext uri="{91240B29-F687-4f45-9708-019B960494DF}">
-              <a14:hiddenLine xmlns:a14="http://schemas.microsoft.com/office/drawing/2010/main" xmlns="" w="9525" cap="flat">
+              <a14:hiddenLine xmlns="" xmlns:a14="http://schemas.microsoft.com/office/drawing/2010/main" w="9525" cap="flat">
                 <a:solidFill>
                   <a:srgbClr val="000000"/>
                 </a:solidFill>
@@ -14557,7 +14557,7 @@
               </a14:hiddenLine>
             </a:ext>
             <a:ext uri="{AF507438-7753-43e0-B8FC-AC1667EBCBE1}">
-              <a14:hiddenEffects xmlns:a14="http://schemas.microsoft.com/office/drawing/2010/main" xmlns="">
+              <a14:hiddenEffects xmlns="" xmlns:a14="http://schemas.microsoft.com/office/drawing/2010/main">
                 <a:effectLst>
                   <a:outerShdw blurRad="63500" dist="38099" dir="2700000" algn="ctr" rotWithShape="0">
                     <a:srgbClr val="000000">
@@ -14607,14 +14607,14 @@
           <a:effectLst/>
           <a:extLst>
             <a:ext uri="{909E8E84-426E-40dd-AFC4-6F175D3DCCD1}">
-              <a14:hiddenFill xmlns:a14="http://schemas.microsoft.com/office/drawing/2010/main" xmlns="">
+              <a14:hiddenFill xmlns="" xmlns:a14="http://schemas.microsoft.com/office/drawing/2010/main">
                 <a:solidFill>
                   <a:srgbClr val="FFFFFF"/>
                 </a:solidFill>
               </a14:hiddenFill>
             </a:ext>
             <a:ext uri="{91240B29-F687-4f45-9708-019B960494DF}">
-              <a14:hiddenLine xmlns:a14="http://schemas.microsoft.com/office/drawing/2010/main" xmlns="" w="9525" cap="flat">
+              <a14:hiddenLine xmlns="" xmlns:a14="http://schemas.microsoft.com/office/drawing/2010/main" w="9525" cap="flat">
                 <a:solidFill>
                   <a:srgbClr val="000000"/>
                 </a:solidFill>
@@ -14624,7 +14624,7 @@
               </a14:hiddenLine>
             </a:ext>
             <a:ext uri="{AF507438-7753-43e0-B8FC-AC1667EBCBE1}">
-              <a14:hiddenEffects xmlns:a14="http://schemas.microsoft.com/office/drawing/2010/main" xmlns="">
+              <a14:hiddenEffects xmlns="" xmlns:a14="http://schemas.microsoft.com/office/drawing/2010/main">
                 <a:effectLst>
                   <a:outerShdw blurRad="63500" dist="38099" dir="2700000" algn="ctr" rotWithShape="0">
                     <a:srgbClr val="000000">
@@ -14674,14 +14674,14 @@
           <a:effectLst/>
           <a:extLst>
             <a:ext uri="{909E8E84-426E-40dd-AFC4-6F175D3DCCD1}">
-              <a14:hiddenFill xmlns:a14="http://schemas.microsoft.com/office/drawing/2010/main" xmlns="">
+              <a14:hiddenFill xmlns="" xmlns:a14="http://schemas.microsoft.com/office/drawing/2010/main">
                 <a:solidFill>
                   <a:srgbClr val="FFFFFF"/>
                 </a:solidFill>
               </a14:hiddenFill>
             </a:ext>
             <a:ext uri="{91240B29-F687-4f45-9708-019B960494DF}">
-              <a14:hiddenLine xmlns:a14="http://schemas.microsoft.com/office/drawing/2010/main" xmlns="" w="9525" cap="flat">
+              <a14:hiddenLine xmlns="" xmlns:a14="http://schemas.microsoft.com/office/drawing/2010/main" w="9525" cap="flat">
                 <a:solidFill>
                   <a:srgbClr val="000000"/>
                 </a:solidFill>
@@ -14691,7 +14691,7 @@
               </a14:hiddenLine>
             </a:ext>
             <a:ext uri="{AF507438-7753-43e0-B8FC-AC1667EBCBE1}">
-              <a14:hiddenEffects xmlns:a14="http://schemas.microsoft.com/office/drawing/2010/main" xmlns="">
+              <a14:hiddenEffects xmlns="" xmlns:a14="http://schemas.microsoft.com/office/drawing/2010/main">
                 <a:effectLst>
                   <a:outerShdw blurRad="63500" dist="38099" dir="2700000" algn="ctr" rotWithShape="0">
                     <a:srgbClr val="000000">
@@ -14741,14 +14741,14 @@
           <a:effectLst/>
           <a:extLst>
             <a:ext uri="{909E8E84-426E-40dd-AFC4-6F175D3DCCD1}">
-              <a14:hiddenFill xmlns:a14="http://schemas.microsoft.com/office/drawing/2010/main" xmlns="">
+              <a14:hiddenFill xmlns="" xmlns:a14="http://schemas.microsoft.com/office/drawing/2010/main">
                 <a:solidFill>
                   <a:srgbClr val="FFFFFF"/>
                 </a:solidFill>
               </a14:hiddenFill>
             </a:ext>
             <a:ext uri="{91240B29-F687-4f45-9708-019B960494DF}">
-              <a14:hiddenLine xmlns:a14="http://schemas.microsoft.com/office/drawing/2010/main" xmlns="" w="9525" cap="flat">
+              <a14:hiddenLine xmlns="" xmlns:a14="http://schemas.microsoft.com/office/drawing/2010/main" w="9525" cap="flat">
                 <a:solidFill>
                   <a:srgbClr val="000000"/>
                 </a:solidFill>
@@ -14758,7 +14758,7 @@
               </a14:hiddenLine>
             </a:ext>
             <a:ext uri="{AF507438-7753-43e0-B8FC-AC1667EBCBE1}">
-              <a14:hiddenEffects xmlns:a14="http://schemas.microsoft.com/office/drawing/2010/main" xmlns="">
+              <a14:hiddenEffects xmlns="" xmlns:a14="http://schemas.microsoft.com/office/drawing/2010/main">
                 <a:effectLst>
                   <a:outerShdw blurRad="63500" dist="38099" dir="2700000" algn="ctr" rotWithShape="0">
                     <a:srgbClr val="000000">
@@ -14808,14 +14808,14 @@
           <a:effectLst/>
           <a:extLst>
             <a:ext uri="{909E8E84-426E-40dd-AFC4-6F175D3DCCD1}">
-              <a14:hiddenFill xmlns:a14="http://schemas.microsoft.com/office/drawing/2010/main" xmlns="">
+              <a14:hiddenFill xmlns="" xmlns:a14="http://schemas.microsoft.com/office/drawing/2010/main">
                 <a:solidFill>
                   <a:srgbClr val="FFFFFF"/>
                 </a:solidFill>
               </a14:hiddenFill>
             </a:ext>
             <a:ext uri="{91240B29-F687-4f45-9708-019B960494DF}">
-              <a14:hiddenLine xmlns:a14="http://schemas.microsoft.com/office/drawing/2010/main" xmlns="" w="9525" cap="flat">
+              <a14:hiddenLine xmlns="" xmlns:a14="http://schemas.microsoft.com/office/drawing/2010/main" w="9525" cap="flat">
                 <a:solidFill>
                   <a:srgbClr val="000000"/>
                 </a:solidFill>
@@ -14825,7 +14825,7 @@
               </a14:hiddenLine>
             </a:ext>
             <a:ext uri="{AF507438-7753-43e0-B8FC-AC1667EBCBE1}">
-              <a14:hiddenEffects xmlns:a14="http://schemas.microsoft.com/office/drawing/2010/main" xmlns="">
+              <a14:hiddenEffects xmlns="" xmlns:a14="http://schemas.microsoft.com/office/drawing/2010/main">
                 <a:effectLst>
                   <a:outerShdw blurRad="63500" dist="38099" dir="2700000" algn="ctr" rotWithShape="0">
                     <a:srgbClr val="000000">
@@ -14875,14 +14875,14 @@
           <a:effectLst/>
           <a:extLst>
             <a:ext uri="{909E8E84-426E-40dd-AFC4-6F175D3DCCD1}">
-              <a14:hiddenFill xmlns:a14="http://schemas.microsoft.com/office/drawing/2010/main" xmlns="">
+              <a14:hiddenFill xmlns="" xmlns:a14="http://schemas.microsoft.com/office/drawing/2010/main">
                 <a:solidFill>
                   <a:srgbClr val="FFFFFF"/>
                 </a:solidFill>
               </a14:hiddenFill>
             </a:ext>
             <a:ext uri="{91240B29-F687-4f45-9708-019B960494DF}">
-              <a14:hiddenLine xmlns:a14="http://schemas.microsoft.com/office/drawing/2010/main" xmlns="" w="9525" cap="flat">
+              <a14:hiddenLine xmlns="" xmlns:a14="http://schemas.microsoft.com/office/drawing/2010/main" w="9525" cap="flat">
                 <a:solidFill>
                   <a:srgbClr val="000000"/>
                 </a:solidFill>
@@ -14892,7 +14892,7 @@
               </a14:hiddenLine>
             </a:ext>
             <a:ext uri="{AF507438-7753-43e0-B8FC-AC1667EBCBE1}">
-              <a14:hiddenEffects xmlns:a14="http://schemas.microsoft.com/office/drawing/2010/main" xmlns="">
+              <a14:hiddenEffects xmlns="" xmlns:a14="http://schemas.microsoft.com/office/drawing/2010/main">
                 <a:effectLst>
                   <a:outerShdw blurRad="63500" dist="38099" dir="2700000" algn="ctr" rotWithShape="0">
                     <a:srgbClr val="000000">
@@ -14942,14 +14942,14 @@
           <a:effectLst/>
           <a:extLst>
             <a:ext uri="{909E8E84-426E-40dd-AFC4-6F175D3DCCD1}">
-              <a14:hiddenFill xmlns:a14="http://schemas.microsoft.com/office/drawing/2010/main" xmlns="">
+              <a14:hiddenFill xmlns="" xmlns:a14="http://schemas.microsoft.com/office/drawing/2010/main">
                 <a:solidFill>
                   <a:srgbClr val="FFFFFF"/>
                 </a:solidFill>
               </a14:hiddenFill>
             </a:ext>
             <a:ext uri="{91240B29-F687-4f45-9708-019B960494DF}">
-              <a14:hiddenLine xmlns:a14="http://schemas.microsoft.com/office/drawing/2010/main" xmlns="" w="9525" cap="flat">
+              <a14:hiddenLine xmlns="" xmlns:a14="http://schemas.microsoft.com/office/drawing/2010/main" w="9525" cap="flat">
                 <a:solidFill>
                   <a:srgbClr val="000000"/>
                 </a:solidFill>
@@ -14959,7 +14959,7 @@
               </a14:hiddenLine>
             </a:ext>
             <a:ext uri="{AF507438-7753-43e0-B8FC-AC1667EBCBE1}">
-              <a14:hiddenEffects xmlns:a14="http://schemas.microsoft.com/office/drawing/2010/main" xmlns="">
+              <a14:hiddenEffects xmlns="" xmlns:a14="http://schemas.microsoft.com/office/drawing/2010/main">
                 <a:effectLst>
                   <a:outerShdw blurRad="63500" dist="38099" dir="2700000" algn="ctr" rotWithShape="0">
                     <a:srgbClr val="000000">
@@ -15009,14 +15009,14 @@
           <a:effectLst/>
           <a:extLst>
             <a:ext uri="{909E8E84-426E-40dd-AFC4-6F175D3DCCD1}">
-              <a14:hiddenFill xmlns:a14="http://schemas.microsoft.com/office/drawing/2010/main" xmlns="">
+              <a14:hiddenFill xmlns="" xmlns:a14="http://schemas.microsoft.com/office/drawing/2010/main">
                 <a:solidFill>
                   <a:srgbClr val="FFFFFF"/>
                 </a:solidFill>
               </a14:hiddenFill>
             </a:ext>
             <a:ext uri="{91240B29-F687-4f45-9708-019B960494DF}">
-              <a14:hiddenLine xmlns:a14="http://schemas.microsoft.com/office/drawing/2010/main" xmlns="" w="9525" cap="flat">
+              <a14:hiddenLine xmlns="" xmlns:a14="http://schemas.microsoft.com/office/drawing/2010/main" w="9525" cap="flat">
                 <a:solidFill>
                   <a:srgbClr val="000000"/>
                 </a:solidFill>
@@ -15026,7 +15026,7 @@
               </a14:hiddenLine>
             </a:ext>
             <a:ext uri="{AF507438-7753-43e0-B8FC-AC1667EBCBE1}">
-              <a14:hiddenEffects xmlns:a14="http://schemas.microsoft.com/office/drawing/2010/main" xmlns="">
+              <a14:hiddenEffects xmlns="" xmlns:a14="http://schemas.microsoft.com/office/drawing/2010/main">
                 <a:effectLst>
                   <a:outerShdw blurRad="63500" dist="38099" dir="2700000" algn="ctr" rotWithShape="0">
                     <a:srgbClr val="000000">
@@ -15076,14 +15076,14 @@
           <a:effectLst/>
           <a:extLst>
             <a:ext uri="{909E8E84-426E-40dd-AFC4-6F175D3DCCD1}">
-              <a14:hiddenFill xmlns:a14="http://schemas.microsoft.com/office/drawing/2010/main" xmlns="">
+              <a14:hiddenFill xmlns="" xmlns:a14="http://schemas.microsoft.com/office/drawing/2010/main">
                 <a:solidFill>
                   <a:srgbClr val="FFFFFF"/>
                 </a:solidFill>
               </a14:hiddenFill>
             </a:ext>
             <a:ext uri="{91240B29-F687-4f45-9708-019B960494DF}">
-              <a14:hiddenLine xmlns:a14="http://schemas.microsoft.com/office/drawing/2010/main" xmlns="" w="9525" cap="flat">
+              <a14:hiddenLine xmlns="" xmlns:a14="http://schemas.microsoft.com/office/drawing/2010/main" w="9525" cap="flat">
                 <a:solidFill>
                   <a:srgbClr val="000000"/>
                 </a:solidFill>
@@ -15093,7 +15093,7 @@
               </a14:hiddenLine>
             </a:ext>
             <a:ext uri="{AF507438-7753-43e0-B8FC-AC1667EBCBE1}">
-              <a14:hiddenEffects xmlns:a14="http://schemas.microsoft.com/office/drawing/2010/main" xmlns="">
+              <a14:hiddenEffects xmlns="" xmlns:a14="http://schemas.microsoft.com/office/drawing/2010/main">
                 <a:effectLst>
                   <a:outerShdw blurRad="63500" dist="38099" dir="2700000" algn="ctr" rotWithShape="0">
                     <a:srgbClr val="000000">
@@ -15150,7 +15150,7 @@
           <a:effectLst/>
           <a:extLst>
             <a:ext uri="{AF507438-7753-43e0-B8FC-AC1667EBCBE1}">
-              <a14:hiddenEffects xmlns:a14="http://schemas.microsoft.com/office/drawing/2010/main" xmlns="">
+              <a14:hiddenEffects xmlns="" xmlns:a14="http://schemas.microsoft.com/office/drawing/2010/main">
                 <a:effectLst>
                   <a:outerShdw blurRad="63500" dist="38099" dir="2700000" algn="ctr" rotWithShape="0">
                     <a:srgbClr val="000000">
@@ -15193,14 +15193,14 @@
           <a:effectLst/>
           <a:extLst>
             <a:ext uri="{909E8E84-426E-40dd-AFC4-6F175D3DCCD1}">
-              <a14:hiddenFill xmlns:a14="http://schemas.microsoft.com/office/drawing/2010/main" xmlns="">
+              <a14:hiddenFill xmlns="" xmlns:a14="http://schemas.microsoft.com/office/drawing/2010/main">
                 <a:solidFill>
                   <a:srgbClr val="FFFFFF"/>
                 </a:solidFill>
               </a14:hiddenFill>
             </a:ext>
             <a:ext uri="{91240B29-F687-4f45-9708-019B960494DF}">
-              <a14:hiddenLine xmlns:a14="http://schemas.microsoft.com/office/drawing/2010/main" xmlns="" w="9525" cap="flat">
+              <a14:hiddenLine xmlns="" xmlns:a14="http://schemas.microsoft.com/office/drawing/2010/main" w="9525" cap="flat">
                 <a:solidFill>
                   <a:srgbClr val="000000"/>
                 </a:solidFill>
@@ -15210,7 +15210,7 @@
               </a14:hiddenLine>
             </a:ext>
             <a:ext uri="{AF507438-7753-43e0-B8FC-AC1667EBCBE1}">
-              <a14:hiddenEffects xmlns:a14="http://schemas.microsoft.com/office/drawing/2010/main" xmlns="">
+              <a14:hiddenEffects xmlns="" xmlns:a14="http://schemas.microsoft.com/office/drawing/2010/main">
                 <a:effectLst>
                   <a:outerShdw blurRad="63500" dist="38099" dir="2700000" algn="ctr" rotWithShape="0">
                     <a:srgbClr val="000000">
@@ -15267,7 +15267,7 @@
           <a:effectLst/>
           <a:extLst>
             <a:ext uri="{AF507438-7753-43e0-B8FC-AC1667EBCBE1}">
-              <a14:hiddenEffects xmlns:a14="http://schemas.microsoft.com/office/drawing/2010/main" xmlns="">
+              <a14:hiddenEffects xmlns="" xmlns:a14="http://schemas.microsoft.com/office/drawing/2010/main">
                 <a:effectLst>
                   <a:outerShdw blurRad="63500" dist="38099" dir="2700000" algn="ctr" rotWithShape="0">
                     <a:srgbClr val="000000">
@@ -15310,14 +15310,14 @@
           <a:effectLst/>
           <a:extLst>
             <a:ext uri="{909E8E84-426E-40dd-AFC4-6F175D3DCCD1}">
-              <a14:hiddenFill xmlns:a14="http://schemas.microsoft.com/office/drawing/2010/main" xmlns="">
+              <a14:hiddenFill xmlns="" xmlns:a14="http://schemas.microsoft.com/office/drawing/2010/main">
                 <a:solidFill>
                   <a:srgbClr val="FFFFFF"/>
                 </a:solidFill>
               </a14:hiddenFill>
             </a:ext>
             <a:ext uri="{91240B29-F687-4f45-9708-019B960494DF}">
-              <a14:hiddenLine xmlns:a14="http://schemas.microsoft.com/office/drawing/2010/main" xmlns="" w="9525" cap="flat">
+              <a14:hiddenLine xmlns="" xmlns:a14="http://schemas.microsoft.com/office/drawing/2010/main" w="9525" cap="flat">
                 <a:solidFill>
                   <a:srgbClr val="000000"/>
                 </a:solidFill>
@@ -15327,7 +15327,7 @@
               </a14:hiddenLine>
             </a:ext>
             <a:ext uri="{AF507438-7753-43e0-B8FC-AC1667EBCBE1}">
-              <a14:hiddenEffects xmlns:a14="http://schemas.microsoft.com/office/drawing/2010/main" xmlns="">
+              <a14:hiddenEffects xmlns="" xmlns:a14="http://schemas.microsoft.com/office/drawing/2010/main">
                 <a:effectLst>
                   <a:outerShdw blurRad="63500" dist="38099" dir="2700000" algn="ctr" rotWithShape="0">
                     <a:srgbClr val="000000">
@@ -15377,14 +15377,14 @@
           <a:effectLst/>
           <a:extLst>
             <a:ext uri="{909E8E84-426E-40dd-AFC4-6F175D3DCCD1}">
-              <a14:hiddenFill xmlns:a14="http://schemas.microsoft.com/office/drawing/2010/main" xmlns="">
+              <a14:hiddenFill xmlns="" xmlns:a14="http://schemas.microsoft.com/office/drawing/2010/main">
                 <a:solidFill>
                   <a:srgbClr val="FFFFFF"/>
                 </a:solidFill>
               </a14:hiddenFill>
             </a:ext>
             <a:ext uri="{91240B29-F687-4f45-9708-019B960494DF}">
-              <a14:hiddenLine xmlns:a14="http://schemas.microsoft.com/office/drawing/2010/main" xmlns="" w="9525" cap="flat">
+              <a14:hiddenLine xmlns="" xmlns:a14="http://schemas.microsoft.com/office/drawing/2010/main" w="9525" cap="flat">
                 <a:solidFill>
                   <a:srgbClr val="000000"/>
                 </a:solidFill>
@@ -15394,7 +15394,7 @@
               </a14:hiddenLine>
             </a:ext>
             <a:ext uri="{AF507438-7753-43e0-B8FC-AC1667EBCBE1}">
-              <a14:hiddenEffects xmlns:a14="http://schemas.microsoft.com/office/drawing/2010/main" xmlns="">
+              <a14:hiddenEffects xmlns="" xmlns:a14="http://schemas.microsoft.com/office/drawing/2010/main">
                 <a:effectLst>
                   <a:outerShdw blurRad="63500" dist="38099" dir="2700000" algn="ctr" rotWithShape="0">
                     <a:srgbClr val="000000">
@@ -15614,14 +15614,14 @@
           <a:effectLst/>
           <a:extLst>
             <a:ext uri="{909E8E84-426E-40dd-AFC4-6F175D3DCCD1}">
-              <a14:hiddenFill xmlns:a14="http://schemas.microsoft.com/office/drawing/2010/main" xmlns="">
+              <a14:hiddenFill xmlns="" xmlns:a14="http://schemas.microsoft.com/office/drawing/2010/main">
                 <a:solidFill>
                   <a:srgbClr val="FFFFFF"/>
                 </a:solidFill>
               </a14:hiddenFill>
             </a:ext>
             <a:ext uri="{91240B29-F687-4f45-9708-019B960494DF}">
-              <a14:hiddenLine xmlns:a14="http://schemas.microsoft.com/office/drawing/2010/main" xmlns="" w="9525" cap="flat">
+              <a14:hiddenLine xmlns="" xmlns:a14="http://schemas.microsoft.com/office/drawing/2010/main" w="9525" cap="flat">
                 <a:solidFill>
                   <a:srgbClr val="000000"/>
                 </a:solidFill>
@@ -15631,7 +15631,7 @@
               </a14:hiddenLine>
             </a:ext>
             <a:ext uri="{AF507438-7753-43e0-B8FC-AC1667EBCBE1}">
-              <a14:hiddenEffects xmlns:a14="http://schemas.microsoft.com/office/drawing/2010/main" xmlns="">
+              <a14:hiddenEffects xmlns="" xmlns:a14="http://schemas.microsoft.com/office/drawing/2010/main">
                 <a:effectLst>
                   <a:outerShdw blurRad="63500" dist="38099" dir="2700000" algn="ctr" rotWithShape="0">
                     <a:srgbClr val="000000">
@@ -15681,14 +15681,14 @@
           <a:effectLst/>
           <a:extLst>
             <a:ext uri="{909E8E84-426E-40dd-AFC4-6F175D3DCCD1}">
-              <a14:hiddenFill xmlns:a14="http://schemas.microsoft.com/office/drawing/2010/main" xmlns="">
+              <a14:hiddenFill xmlns="" xmlns:a14="http://schemas.microsoft.com/office/drawing/2010/main">
                 <a:solidFill>
                   <a:srgbClr val="FFFFFF"/>
                 </a:solidFill>
               </a14:hiddenFill>
             </a:ext>
             <a:ext uri="{91240B29-F687-4f45-9708-019B960494DF}">
-              <a14:hiddenLine xmlns:a14="http://schemas.microsoft.com/office/drawing/2010/main" xmlns="" w="9525" cap="flat">
+              <a14:hiddenLine xmlns="" xmlns:a14="http://schemas.microsoft.com/office/drawing/2010/main" w="9525" cap="flat">
                 <a:solidFill>
                   <a:srgbClr val="000000"/>
                 </a:solidFill>
@@ -15698,7 +15698,7 @@
               </a14:hiddenLine>
             </a:ext>
             <a:ext uri="{AF507438-7753-43e0-B8FC-AC1667EBCBE1}">
-              <a14:hiddenEffects xmlns:a14="http://schemas.microsoft.com/office/drawing/2010/main" xmlns="">
+              <a14:hiddenEffects xmlns="" xmlns:a14="http://schemas.microsoft.com/office/drawing/2010/main">
                 <a:effectLst>
                   <a:outerShdw blurRad="63500" dist="38099" dir="2700000" algn="ctr" rotWithShape="0">
                     <a:srgbClr val="000000">
@@ -15748,14 +15748,14 @@
           <a:effectLst/>
           <a:extLst>
             <a:ext uri="{909E8E84-426E-40dd-AFC4-6F175D3DCCD1}">
-              <a14:hiddenFill xmlns:a14="http://schemas.microsoft.com/office/drawing/2010/main" xmlns="">
+              <a14:hiddenFill xmlns="" xmlns:a14="http://schemas.microsoft.com/office/drawing/2010/main">
                 <a:solidFill>
                   <a:srgbClr val="FFFFFF"/>
                 </a:solidFill>
               </a14:hiddenFill>
             </a:ext>
             <a:ext uri="{91240B29-F687-4f45-9708-019B960494DF}">
-              <a14:hiddenLine xmlns:a14="http://schemas.microsoft.com/office/drawing/2010/main" xmlns="" w="9525" cap="flat">
+              <a14:hiddenLine xmlns="" xmlns:a14="http://schemas.microsoft.com/office/drawing/2010/main" w="9525" cap="flat">
                 <a:solidFill>
                   <a:srgbClr val="000000"/>
                 </a:solidFill>
@@ -15765,7 +15765,7 @@
               </a14:hiddenLine>
             </a:ext>
             <a:ext uri="{AF507438-7753-43e0-B8FC-AC1667EBCBE1}">
-              <a14:hiddenEffects xmlns:a14="http://schemas.microsoft.com/office/drawing/2010/main" xmlns="">
+              <a14:hiddenEffects xmlns="" xmlns:a14="http://schemas.microsoft.com/office/drawing/2010/main">
                 <a:effectLst>
                   <a:outerShdw blurRad="63500" dist="38099" dir="2700000" algn="ctr" rotWithShape="0">
                     <a:srgbClr val="000000">
@@ -15985,14 +15985,14 @@
           <a:effectLst/>
           <a:extLst>
             <a:ext uri="{909E8E84-426E-40dd-AFC4-6F175D3DCCD1}">
-              <a14:hiddenFill xmlns:a14="http://schemas.microsoft.com/office/drawing/2010/main" xmlns="">
+              <a14:hiddenFill xmlns="" xmlns:a14="http://schemas.microsoft.com/office/drawing/2010/main">
                 <a:solidFill>
                   <a:srgbClr val="FFFFFF"/>
                 </a:solidFill>
               </a14:hiddenFill>
             </a:ext>
             <a:ext uri="{91240B29-F687-4f45-9708-019B960494DF}">
-              <a14:hiddenLine xmlns:a14="http://schemas.microsoft.com/office/drawing/2010/main" xmlns="" w="9525" cap="flat">
+              <a14:hiddenLine xmlns="" xmlns:a14="http://schemas.microsoft.com/office/drawing/2010/main" w="9525" cap="flat">
                 <a:solidFill>
                   <a:srgbClr val="000000"/>
                 </a:solidFill>
@@ -16002,7 +16002,7 @@
               </a14:hiddenLine>
             </a:ext>
             <a:ext uri="{AF507438-7753-43e0-B8FC-AC1667EBCBE1}">
-              <a14:hiddenEffects xmlns:a14="http://schemas.microsoft.com/office/drawing/2010/main" xmlns="">
+              <a14:hiddenEffects xmlns="" xmlns:a14="http://schemas.microsoft.com/office/drawing/2010/main">
                 <a:effectLst>
                   <a:outerShdw blurRad="63500" dist="38099" dir="2700000" algn="ctr" rotWithShape="0">
                     <a:srgbClr val="000000">
@@ -16222,14 +16222,14 @@
           <a:effectLst/>
           <a:extLst>
             <a:ext uri="{909E8E84-426E-40dd-AFC4-6F175D3DCCD1}">
-              <a14:hiddenFill xmlns:a14="http://schemas.microsoft.com/office/drawing/2010/main" xmlns="">
+              <a14:hiddenFill xmlns="" xmlns:a14="http://schemas.microsoft.com/office/drawing/2010/main">
                 <a:solidFill>
                   <a:srgbClr val="FFFFFF"/>
                 </a:solidFill>
               </a14:hiddenFill>
             </a:ext>
             <a:ext uri="{91240B29-F687-4f45-9708-019B960494DF}">
-              <a14:hiddenLine xmlns:a14="http://schemas.microsoft.com/office/drawing/2010/main" xmlns="" w="9525" cap="flat">
+              <a14:hiddenLine xmlns="" xmlns:a14="http://schemas.microsoft.com/office/drawing/2010/main" w="9525" cap="flat">
                 <a:solidFill>
                   <a:srgbClr val="000000"/>
                 </a:solidFill>
@@ -16239,7 +16239,7 @@
               </a14:hiddenLine>
             </a:ext>
             <a:ext uri="{AF507438-7753-43e0-B8FC-AC1667EBCBE1}">
-              <a14:hiddenEffects xmlns:a14="http://schemas.microsoft.com/office/drawing/2010/main" xmlns="">
+              <a14:hiddenEffects xmlns="" xmlns:a14="http://schemas.microsoft.com/office/drawing/2010/main">
                 <a:effectLst>
                   <a:outerShdw blurRad="63500" dist="38099" dir="2700000" algn="ctr" rotWithShape="0">
                     <a:srgbClr val="000000">
@@ -16459,14 +16459,14 @@
           <a:effectLst/>
           <a:extLst>
             <a:ext uri="{909E8E84-426E-40dd-AFC4-6F175D3DCCD1}">
-              <a14:hiddenFill xmlns:a14="http://schemas.microsoft.com/office/drawing/2010/main" xmlns="">
+              <a14:hiddenFill xmlns="" xmlns:a14="http://schemas.microsoft.com/office/drawing/2010/main">
                 <a:solidFill>
                   <a:srgbClr val="FFFFFF"/>
                 </a:solidFill>
               </a14:hiddenFill>
             </a:ext>
             <a:ext uri="{91240B29-F687-4f45-9708-019B960494DF}">
-              <a14:hiddenLine xmlns:a14="http://schemas.microsoft.com/office/drawing/2010/main" xmlns="" w="9525" cap="flat">
+              <a14:hiddenLine xmlns="" xmlns:a14="http://schemas.microsoft.com/office/drawing/2010/main" w="9525" cap="flat">
                 <a:solidFill>
                   <a:srgbClr val="000000"/>
                 </a:solidFill>
@@ -16476,7 +16476,7 @@
               </a14:hiddenLine>
             </a:ext>
             <a:ext uri="{AF507438-7753-43e0-B8FC-AC1667EBCBE1}">
-              <a14:hiddenEffects xmlns:a14="http://schemas.microsoft.com/office/drawing/2010/main" xmlns="">
+              <a14:hiddenEffects xmlns="" xmlns:a14="http://schemas.microsoft.com/office/drawing/2010/main">
                 <a:effectLst>
                   <a:outerShdw blurRad="63500" dist="38099" dir="2700000" algn="ctr" rotWithShape="0">
                     <a:srgbClr val="000000">
@@ -16696,14 +16696,14 @@
           <a:effectLst/>
           <a:extLst>
             <a:ext uri="{909E8E84-426E-40dd-AFC4-6F175D3DCCD1}">
-              <a14:hiddenFill xmlns:a14="http://schemas.microsoft.com/office/drawing/2010/main" xmlns="">
+              <a14:hiddenFill xmlns="" xmlns:a14="http://schemas.microsoft.com/office/drawing/2010/main">
                 <a:solidFill>
                   <a:srgbClr val="FFFFFF"/>
                 </a:solidFill>
               </a14:hiddenFill>
             </a:ext>
             <a:ext uri="{91240B29-F687-4f45-9708-019B960494DF}">
-              <a14:hiddenLine xmlns:a14="http://schemas.microsoft.com/office/drawing/2010/main" xmlns="" w="9525" cap="flat">
+              <a14:hiddenLine xmlns="" xmlns:a14="http://schemas.microsoft.com/office/drawing/2010/main" w="9525" cap="flat">
                 <a:solidFill>
                   <a:srgbClr val="000000"/>
                 </a:solidFill>
@@ -16713,7 +16713,7 @@
               </a14:hiddenLine>
             </a:ext>
             <a:ext uri="{AF507438-7753-43e0-B8FC-AC1667EBCBE1}">
-              <a14:hiddenEffects xmlns:a14="http://schemas.microsoft.com/office/drawing/2010/main" xmlns="">
+              <a14:hiddenEffects xmlns="" xmlns:a14="http://schemas.microsoft.com/office/drawing/2010/main">
                 <a:effectLst>
                   <a:outerShdw blurRad="63500" dist="38099" dir="2700000" algn="ctr" rotWithShape="0">
                     <a:srgbClr val="000000">
@@ -16940,7 +16940,7 @@
           <a:effectLst/>
           <a:extLst>
             <a:ext uri="{AF507438-7753-43e0-B8FC-AC1667EBCBE1}">
-              <a14:hiddenEffects xmlns:a14="http://schemas.microsoft.com/office/drawing/2010/main" xmlns="">
+              <a14:hiddenEffects xmlns="" xmlns:a14="http://schemas.microsoft.com/office/drawing/2010/main">
                 <a:effectLst>
                   <a:outerShdw blurRad="63500" dist="38099" dir="2700000" algn="ctr" rotWithShape="0">
                     <a:srgbClr val="000000">
@@ -16983,14 +16983,14 @@
           <a:effectLst/>
           <a:extLst>
             <a:ext uri="{909E8E84-426E-40dd-AFC4-6F175D3DCCD1}">
-              <a14:hiddenFill xmlns:a14="http://schemas.microsoft.com/office/drawing/2010/main" xmlns="">
+              <a14:hiddenFill xmlns="" xmlns:a14="http://schemas.microsoft.com/office/drawing/2010/main">
                 <a:solidFill>
                   <a:srgbClr val="FFFFFF"/>
                 </a:solidFill>
               </a14:hiddenFill>
             </a:ext>
             <a:ext uri="{91240B29-F687-4f45-9708-019B960494DF}">
-              <a14:hiddenLine xmlns:a14="http://schemas.microsoft.com/office/drawing/2010/main" xmlns="" w="9525" cap="flat">
+              <a14:hiddenLine xmlns="" xmlns:a14="http://schemas.microsoft.com/office/drawing/2010/main" w="9525" cap="flat">
                 <a:solidFill>
                   <a:srgbClr val="000000"/>
                 </a:solidFill>
@@ -17000,7 +17000,7 @@
               </a14:hiddenLine>
             </a:ext>
             <a:ext uri="{AF507438-7753-43e0-B8FC-AC1667EBCBE1}">
-              <a14:hiddenEffects xmlns:a14="http://schemas.microsoft.com/office/drawing/2010/main" xmlns="">
+              <a14:hiddenEffects xmlns="" xmlns:a14="http://schemas.microsoft.com/office/drawing/2010/main">
                 <a:effectLst>
                   <a:outerShdw blurRad="63500" dist="38099" dir="2700000" algn="ctr" rotWithShape="0">
                     <a:srgbClr val="000000">
@@ -17055,12 +17055,12 @@
           <a:effectLst/>
           <a:extLst>
             <a:ext uri="{909E8E84-426E-40dd-AFC4-6F175D3DCCD1}">
-              <a14:hiddenFill xmlns:a14="http://schemas.microsoft.com/office/drawing/2010/main" xmlns="">
+              <a14:hiddenFill xmlns="" xmlns:a14="http://schemas.microsoft.com/office/drawing/2010/main">
                 <a:noFill/>
               </a14:hiddenFill>
             </a:ext>
             <a:ext uri="{AF507438-7753-43e0-B8FC-AC1667EBCBE1}">
-              <a14:hiddenEffects xmlns:a14="http://schemas.microsoft.com/office/drawing/2010/main" xmlns="">
+              <a14:hiddenEffects xmlns="" xmlns:a14="http://schemas.microsoft.com/office/drawing/2010/main">
                 <a:effectLst>
                   <a:outerShdw blurRad="63500" dist="38099" dir="2700000" algn="ctr" rotWithShape="0">
                     <a:srgbClr val="000000">
@@ -17108,12 +17108,12 @@
           <a:effectLst/>
           <a:extLst>
             <a:ext uri="{909E8E84-426E-40dd-AFC4-6F175D3DCCD1}">
-              <a14:hiddenFill xmlns:a14="http://schemas.microsoft.com/office/drawing/2010/main" xmlns="">
+              <a14:hiddenFill xmlns="" xmlns:a14="http://schemas.microsoft.com/office/drawing/2010/main">
                 <a:noFill/>
               </a14:hiddenFill>
             </a:ext>
             <a:ext uri="{AF507438-7753-43e0-B8FC-AC1667EBCBE1}">
-              <a14:hiddenEffects xmlns:a14="http://schemas.microsoft.com/office/drawing/2010/main" xmlns="">
+              <a14:hiddenEffects xmlns="" xmlns:a14="http://schemas.microsoft.com/office/drawing/2010/main">
                 <a:effectLst>
                   <a:outerShdw blurRad="63500" dist="38099" dir="2700000" algn="ctr" rotWithShape="0">
                     <a:srgbClr val="000000">
@@ -17166,7 +17166,7 @@
           <a:effectLst/>
           <a:extLst>
             <a:ext uri="{AF507438-7753-43e0-B8FC-AC1667EBCBE1}">
-              <a14:hiddenEffects xmlns:a14="http://schemas.microsoft.com/office/drawing/2010/main" xmlns="">
+              <a14:hiddenEffects xmlns="" xmlns:a14="http://schemas.microsoft.com/office/drawing/2010/main">
                 <a:effectLst>
                   <a:outerShdw blurRad="63500" dist="38099" dir="2700000" algn="ctr" rotWithShape="0">
                     <a:srgbClr val="000000">
@@ -17209,14 +17209,14 @@
           <a:effectLst/>
           <a:extLst>
             <a:ext uri="{909E8E84-426E-40dd-AFC4-6F175D3DCCD1}">
-              <a14:hiddenFill xmlns:a14="http://schemas.microsoft.com/office/drawing/2010/main" xmlns="">
+              <a14:hiddenFill xmlns="" xmlns:a14="http://schemas.microsoft.com/office/drawing/2010/main">
                 <a:solidFill>
                   <a:srgbClr val="FFFFFF"/>
                 </a:solidFill>
               </a14:hiddenFill>
             </a:ext>
             <a:ext uri="{91240B29-F687-4f45-9708-019B960494DF}">
-              <a14:hiddenLine xmlns:a14="http://schemas.microsoft.com/office/drawing/2010/main" xmlns="" w="9525" cap="flat">
+              <a14:hiddenLine xmlns="" xmlns:a14="http://schemas.microsoft.com/office/drawing/2010/main" w="9525" cap="flat">
                 <a:solidFill>
                   <a:srgbClr val="000000"/>
                 </a:solidFill>
@@ -17226,7 +17226,7 @@
               </a14:hiddenLine>
             </a:ext>
             <a:ext uri="{AF507438-7753-43e0-B8FC-AC1667EBCBE1}">
-              <a14:hiddenEffects xmlns:a14="http://schemas.microsoft.com/office/drawing/2010/main" xmlns="">
+              <a14:hiddenEffects xmlns="" xmlns:a14="http://schemas.microsoft.com/office/drawing/2010/main">
                 <a:effectLst>
                   <a:outerShdw blurRad="63500" dist="38099" dir="2700000" algn="ctr" rotWithShape="0">
                     <a:srgbClr val="000000">
@@ -17483,7 +17483,7 @@
           <a:effectLst/>
           <a:extLst>
             <a:ext uri="{AF507438-7753-43e0-B8FC-AC1667EBCBE1}">
-              <a14:hiddenEffects xmlns:a14="http://schemas.microsoft.com/office/drawing/2010/main" xmlns="">
+              <a14:hiddenEffects xmlns="" xmlns:a14="http://schemas.microsoft.com/office/drawing/2010/main">
                 <a:effectLst>
                   <a:outerShdw blurRad="63500" dist="38099" dir="2700000" algn="ctr" rotWithShape="0">
                     <a:srgbClr val="000000">
@@ -17526,14 +17526,14 @@
           <a:effectLst/>
           <a:extLst>
             <a:ext uri="{909E8E84-426E-40dd-AFC4-6F175D3DCCD1}">
-              <a14:hiddenFill xmlns:a14="http://schemas.microsoft.com/office/drawing/2010/main" xmlns="">
+              <a14:hiddenFill xmlns="" xmlns:a14="http://schemas.microsoft.com/office/drawing/2010/main">
                 <a:solidFill>
                   <a:srgbClr val="FFFFFF"/>
                 </a:solidFill>
               </a14:hiddenFill>
             </a:ext>
             <a:ext uri="{91240B29-F687-4f45-9708-019B960494DF}">
-              <a14:hiddenLine xmlns:a14="http://schemas.microsoft.com/office/drawing/2010/main" xmlns="" w="9525" cap="flat">
+              <a14:hiddenLine xmlns="" xmlns:a14="http://schemas.microsoft.com/office/drawing/2010/main" w="9525" cap="flat">
                 <a:solidFill>
                   <a:srgbClr val="000000"/>
                 </a:solidFill>
@@ -17543,7 +17543,7 @@
               </a14:hiddenLine>
             </a:ext>
             <a:ext uri="{AF507438-7753-43e0-B8FC-AC1667EBCBE1}">
-              <a14:hiddenEffects xmlns:a14="http://schemas.microsoft.com/office/drawing/2010/main" xmlns="">
+              <a14:hiddenEffects xmlns="" xmlns:a14="http://schemas.microsoft.com/office/drawing/2010/main">
                 <a:effectLst>
                   <a:outerShdw blurRad="63500" dist="38099" dir="2700000" algn="ctr" rotWithShape="0">
                     <a:srgbClr val="000000">
@@ -17786,12 +17786,12 @@
           <a:effectLst/>
           <a:extLst>
             <a:ext uri="{909E8E84-426E-40dd-AFC4-6F175D3DCCD1}">
-              <a14:hiddenFill xmlns:a14="http://schemas.microsoft.com/office/drawing/2010/main" xmlns="">
+              <a14:hiddenFill xmlns="" xmlns:a14="http://schemas.microsoft.com/office/drawing/2010/main">
                 <a:noFill/>
               </a14:hiddenFill>
             </a:ext>
             <a:ext uri="{AF507438-7753-43e0-B8FC-AC1667EBCBE1}">
-              <a14:hiddenEffects xmlns:a14="http://schemas.microsoft.com/office/drawing/2010/main" xmlns="">
+              <a14:hiddenEffects xmlns="" xmlns:a14="http://schemas.microsoft.com/office/drawing/2010/main">
                 <a:effectLst>
                   <a:outerShdw blurRad="63500" dist="38099" dir="2700000" algn="ctr" rotWithShape="0">
                     <a:srgbClr val="000000">
@@ -17834,14 +17834,14 @@
           <a:effectLst/>
           <a:extLst>
             <a:ext uri="{909E8E84-426E-40dd-AFC4-6F175D3DCCD1}">
-              <a14:hiddenFill xmlns:a14="http://schemas.microsoft.com/office/drawing/2010/main" xmlns="">
+              <a14:hiddenFill xmlns="" xmlns:a14="http://schemas.microsoft.com/office/drawing/2010/main">
                 <a:solidFill>
                   <a:srgbClr val="FFFFFF"/>
                 </a:solidFill>
               </a14:hiddenFill>
             </a:ext>
             <a:ext uri="{91240B29-F687-4f45-9708-019B960494DF}">
-              <a14:hiddenLine xmlns:a14="http://schemas.microsoft.com/office/drawing/2010/main" xmlns="" w="9525" cap="flat">
+              <a14:hiddenLine xmlns="" xmlns:a14="http://schemas.microsoft.com/office/drawing/2010/main" w="9525" cap="flat">
                 <a:solidFill>
                   <a:srgbClr val="000000"/>
                 </a:solidFill>
@@ -17851,7 +17851,7 @@
               </a14:hiddenLine>
             </a:ext>
             <a:ext uri="{AF507438-7753-43e0-B8FC-AC1667EBCBE1}">
-              <a14:hiddenEffects xmlns:a14="http://schemas.microsoft.com/office/drawing/2010/main" xmlns="">
+              <a14:hiddenEffects xmlns="" xmlns:a14="http://schemas.microsoft.com/office/drawing/2010/main">
                 <a:effectLst>
                   <a:outerShdw blurRad="63500" dist="38099" dir="2700000" algn="ctr" rotWithShape="0">
                     <a:srgbClr val="000000">
@@ -18071,14 +18071,14 @@
           <a:effectLst/>
           <a:extLst>
             <a:ext uri="{909E8E84-426E-40dd-AFC4-6F175D3DCCD1}">
-              <a14:hiddenFill xmlns:a14="http://schemas.microsoft.com/office/drawing/2010/main" xmlns="">
+              <a14:hiddenFill xmlns="" xmlns:a14="http://schemas.microsoft.com/office/drawing/2010/main">
                 <a:solidFill>
                   <a:srgbClr val="FFFFFF"/>
                 </a:solidFill>
               </a14:hiddenFill>
             </a:ext>
             <a:ext uri="{91240B29-F687-4f45-9708-019B960494DF}">
-              <a14:hiddenLine xmlns:a14="http://schemas.microsoft.com/office/drawing/2010/main" xmlns="" w="9525" cap="flat">
+              <a14:hiddenLine xmlns="" xmlns:a14="http://schemas.microsoft.com/office/drawing/2010/main" w="9525" cap="flat">
                 <a:solidFill>
                   <a:srgbClr val="000000"/>
                 </a:solidFill>
@@ -18088,7 +18088,7 @@
               </a14:hiddenLine>
             </a:ext>
             <a:ext uri="{AF507438-7753-43e0-B8FC-AC1667EBCBE1}">
-              <a14:hiddenEffects xmlns:a14="http://schemas.microsoft.com/office/drawing/2010/main" xmlns="">
+              <a14:hiddenEffects xmlns="" xmlns:a14="http://schemas.microsoft.com/office/drawing/2010/main">
                 <a:effectLst>
                   <a:outerShdw blurRad="63500" dist="38099" dir="2700000" algn="ctr" rotWithShape="0">
                     <a:srgbClr val="000000">
@@ -18315,7 +18315,7 @@
           <a:effectLst/>
           <a:extLst>
             <a:ext uri="{AF507438-7753-43e0-B8FC-AC1667EBCBE1}">
-              <a14:hiddenEffects xmlns:a14="http://schemas.microsoft.com/office/drawing/2010/main" xmlns="">
+              <a14:hiddenEffects xmlns="" xmlns:a14="http://schemas.microsoft.com/office/drawing/2010/main">
                 <a:effectLst>
                   <a:outerShdw blurRad="63500" dist="38099" dir="2700000" algn="ctr" rotWithShape="0">
                     <a:srgbClr val="000000">
@@ -18358,14 +18358,14 @@
           <a:effectLst/>
           <a:extLst>
             <a:ext uri="{909E8E84-426E-40dd-AFC4-6F175D3DCCD1}">
-              <a14:hiddenFill xmlns:a14="http://schemas.microsoft.com/office/drawing/2010/main" xmlns="">
+              <a14:hiddenFill xmlns="" xmlns:a14="http://schemas.microsoft.com/office/drawing/2010/main">
                 <a:solidFill>
                   <a:srgbClr val="FFFFFF"/>
                 </a:solidFill>
               </a14:hiddenFill>
             </a:ext>
             <a:ext uri="{91240B29-F687-4f45-9708-019B960494DF}">
-              <a14:hiddenLine xmlns:a14="http://schemas.microsoft.com/office/drawing/2010/main" xmlns="" w="9525" cap="flat">
+              <a14:hiddenLine xmlns="" xmlns:a14="http://schemas.microsoft.com/office/drawing/2010/main" w="9525" cap="flat">
                 <a:solidFill>
                   <a:srgbClr val="000000"/>
                 </a:solidFill>
@@ -18375,7 +18375,7 @@
               </a14:hiddenLine>
             </a:ext>
             <a:ext uri="{AF507438-7753-43e0-B8FC-AC1667EBCBE1}">
-              <a14:hiddenEffects xmlns:a14="http://schemas.microsoft.com/office/drawing/2010/main" xmlns="">
+              <a14:hiddenEffects xmlns="" xmlns:a14="http://schemas.microsoft.com/office/drawing/2010/main">
                 <a:effectLst>
                   <a:outerShdw blurRad="63500" dist="38099" dir="2700000" algn="ctr" rotWithShape="0">
                     <a:srgbClr val="000000">
@@ -18602,7 +18602,7 @@
           <a:effectLst/>
           <a:extLst>
             <a:ext uri="{AF507438-7753-43e0-B8FC-AC1667EBCBE1}">
-              <a14:hiddenEffects xmlns:a14="http://schemas.microsoft.com/office/drawing/2010/main" xmlns="">
+              <a14:hiddenEffects xmlns="" xmlns:a14="http://schemas.microsoft.com/office/drawing/2010/main">
                 <a:effectLst>
                   <a:outerShdw blurRad="63500" dist="38099" dir="2700000" algn="ctr" rotWithShape="0">
                     <a:srgbClr val="000000">
@@ -18645,14 +18645,14 @@
           <a:effectLst/>
           <a:extLst>
             <a:ext uri="{909E8E84-426E-40dd-AFC4-6F175D3DCCD1}">
-              <a14:hiddenFill xmlns:a14="http://schemas.microsoft.com/office/drawing/2010/main" xmlns="">
+              <a14:hiddenFill xmlns="" xmlns:a14="http://schemas.microsoft.com/office/drawing/2010/main">
                 <a:solidFill>
                   <a:srgbClr val="FFFFFF"/>
                 </a:solidFill>
               </a14:hiddenFill>
             </a:ext>
             <a:ext uri="{91240B29-F687-4f45-9708-019B960494DF}">
-              <a14:hiddenLine xmlns:a14="http://schemas.microsoft.com/office/drawing/2010/main" xmlns="" w="9525" cap="flat">
+              <a14:hiddenLine xmlns="" xmlns:a14="http://schemas.microsoft.com/office/drawing/2010/main" w="9525" cap="flat">
                 <a:solidFill>
                   <a:srgbClr val="000000"/>
                 </a:solidFill>
@@ -18662,7 +18662,7 @@
               </a14:hiddenLine>
             </a:ext>
             <a:ext uri="{AF507438-7753-43e0-B8FC-AC1667EBCBE1}">
-              <a14:hiddenEffects xmlns:a14="http://schemas.microsoft.com/office/drawing/2010/main" xmlns="">
+              <a14:hiddenEffects xmlns="" xmlns:a14="http://schemas.microsoft.com/office/drawing/2010/main">
                 <a:effectLst>
                   <a:outerShdw blurRad="63500" dist="38099" dir="2700000" algn="ctr" rotWithShape="0">
                     <a:srgbClr val="000000">
@@ -18889,7 +18889,7 @@
           <a:effectLst/>
           <a:extLst>
             <a:ext uri="{AF507438-7753-43e0-B8FC-AC1667EBCBE1}">
-              <a14:hiddenEffects xmlns:a14="http://schemas.microsoft.com/office/drawing/2010/main" xmlns="">
+              <a14:hiddenEffects xmlns="" xmlns:a14="http://schemas.microsoft.com/office/drawing/2010/main">
                 <a:effectLst>
                   <a:outerShdw blurRad="63500" dist="38099" dir="2700000" algn="ctr" rotWithShape="0">
                     <a:srgbClr val="000000">
@@ -18932,14 +18932,14 @@
           <a:effectLst/>
           <a:extLst>
             <a:ext uri="{909E8E84-426E-40dd-AFC4-6F175D3DCCD1}">
-              <a14:hiddenFill xmlns:a14="http://schemas.microsoft.com/office/drawing/2010/main" xmlns="">
+              <a14:hiddenFill xmlns="" xmlns:a14="http://schemas.microsoft.com/office/drawing/2010/main">
                 <a:solidFill>
                   <a:srgbClr val="FFFFFF"/>
                 </a:solidFill>
               </a14:hiddenFill>
             </a:ext>
             <a:ext uri="{91240B29-F687-4f45-9708-019B960494DF}">
-              <a14:hiddenLine xmlns:a14="http://schemas.microsoft.com/office/drawing/2010/main" xmlns="" w="9525" cap="flat">
+              <a14:hiddenLine xmlns="" xmlns:a14="http://schemas.microsoft.com/office/drawing/2010/main" w="9525" cap="flat">
                 <a:solidFill>
                   <a:srgbClr val="000000"/>
                 </a:solidFill>
@@ -18949,7 +18949,7 @@
               </a14:hiddenLine>
             </a:ext>
             <a:ext uri="{AF507438-7753-43e0-B8FC-AC1667EBCBE1}">
-              <a14:hiddenEffects xmlns:a14="http://schemas.microsoft.com/office/drawing/2010/main" xmlns="">
+              <a14:hiddenEffects xmlns="" xmlns:a14="http://schemas.microsoft.com/office/drawing/2010/main">
                 <a:effectLst>
                   <a:outerShdw blurRad="63500" dist="38099" dir="2700000" algn="ctr" rotWithShape="0">
                     <a:srgbClr val="000000">
@@ -19176,7 +19176,7 @@
           <a:effectLst/>
           <a:extLst>
             <a:ext uri="{AF507438-7753-43e0-B8FC-AC1667EBCBE1}">
-              <a14:hiddenEffects xmlns:a14="http://schemas.microsoft.com/office/drawing/2010/main" xmlns="">
+              <a14:hiddenEffects xmlns="" xmlns:a14="http://schemas.microsoft.com/office/drawing/2010/main">
                 <a:effectLst>
                   <a:outerShdw blurRad="63500" dist="38099" dir="2700000" algn="ctr" rotWithShape="0">
                     <a:srgbClr val="000000">
@@ -19219,14 +19219,14 @@
           <a:effectLst/>
           <a:extLst>
             <a:ext uri="{909E8E84-426E-40dd-AFC4-6F175D3DCCD1}">
-              <a14:hiddenFill xmlns:a14="http://schemas.microsoft.com/office/drawing/2010/main" xmlns="">
+              <a14:hiddenFill xmlns="" xmlns:a14="http://schemas.microsoft.com/office/drawing/2010/main">
                 <a:solidFill>
                   <a:srgbClr val="FFFFFF"/>
                 </a:solidFill>
               </a14:hiddenFill>
             </a:ext>
             <a:ext uri="{91240B29-F687-4f45-9708-019B960494DF}">
-              <a14:hiddenLine xmlns:a14="http://schemas.microsoft.com/office/drawing/2010/main" xmlns="" w="9525" cap="flat">
+              <a14:hiddenLine xmlns="" xmlns:a14="http://schemas.microsoft.com/office/drawing/2010/main" w="9525" cap="flat">
                 <a:solidFill>
                   <a:srgbClr val="000000"/>
                 </a:solidFill>
@@ -19236,7 +19236,7 @@
               </a14:hiddenLine>
             </a:ext>
             <a:ext uri="{AF507438-7753-43e0-B8FC-AC1667EBCBE1}">
-              <a14:hiddenEffects xmlns:a14="http://schemas.microsoft.com/office/drawing/2010/main" xmlns="">
+              <a14:hiddenEffects xmlns="" xmlns:a14="http://schemas.microsoft.com/office/drawing/2010/main">
                 <a:effectLst>
                   <a:outerShdw blurRad="63500" dist="38099" dir="2700000" algn="ctr" rotWithShape="0">
                     <a:srgbClr val="000000">
@@ -19463,7 +19463,7 @@
           <a:effectLst/>
           <a:extLst>
             <a:ext uri="{AF507438-7753-43e0-B8FC-AC1667EBCBE1}">
-              <a14:hiddenEffects xmlns:a14="http://schemas.microsoft.com/office/drawing/2010/main" xmlns="">
+              <a14:hiddenEffects xmlns="" xmlns:a14="http://schemas.microsoft.com/office/drawing/2010/main">
                 <a:effectLst>
                   <a:outerShdw blurRad="63500" dist="38099" dir="2700000" algn="ctr" rotWithShape="0">
                     <a:srgbClr val="000000">
@@ -19506,14 +19506,14 @@
           <a:effectLst/>
           <a:extLst>
             <a:ext uri="{909E8E84-426E-40dd-AFC4-6F175D3DCCD1}">
-              <a14:hiddenFill xmlns:a14="http://schemas.microsoft.com/office/drawing/2010/main" xmlns="">
+              <a14:hiddenFill xmlns="" xmlns:a14="http://schemas.microsoft.com/office/drawing/2010/main">
                 <a:solidFill>
                   <a:srgbClr val="FFFFFF"/>
                 </a:solidFill>
               </a14:hiddenFill>
             </a:ext>
             <a:ext uri="{91240B29-F687-4f45-9708-019B960494DF}">
-              <a14:hiddenLine xmlns:a14="http://schemas.microsoft.com/office/drawing/2010/main" xmlns="" w="9525" cap="flat">
+              <a14:hiddenLine xmlns="" xmlns:a14="http://schemas.microsoft.com/office/drawing/2010/main" w="9525" cap="flat">
                 <a:solidFill>
                   <a:srgbClr val="000000"/>
                 </a:solidFill>
@@ -19523,7 +19523,7 @@
               </a14:hiddenLine>
             </a:ext>
             <a:ext uri="{AF507438-7753-43e0-B8FC-AC1667EBCBE1}">
-              <a14:hiddenEffects xmlns:a14="http://schemas.microsoft.com/office/drawing/2010/main" xmlns="">
+              <a14:hiddenEffects xmlns="" xmlns:a14="http://schemas.microsoft.com/office/drawing/2010/main">
                 <a:effectLst>
                   <a:outerShdw blurRad="63500" dist="38099" dir="2700000" algn="ctr" rotWithShape="0">
                     <a:srgbClr val="000000">
@@ -19750,7 +19750,7 @@
           <a:effectLst/>
           <a:extLst>
             <a:ext uri="{AF507438-7753-43e0-B8FC-AC1667EBCBE1}">
-              <a14:hiddenEffects xmlns:a14="http://schemas.microsoft.com/office/drawing/2010/main" xmlns="">
+              <a14:hiddenEffects xmlns="" xmlns:a14="http://schemas.microsoft.com/office/drawing/2010/main">
                 <a:effectLst>
                   <a:outerShdw blurRad="63500" dist="38099" dir="2700000" algn="ctr" rotWithShape="0">
                     <a:srgbClr val="000000">
@@ -19793,14 +19793,14 @@
           <a:effectLst/>
           <a:extLst>
             <a:ext uri="{909E8E84-426E-40dd-AFC4-6F175D3DCCD1}">
-              <a14:hiddenFill xmlns:a14="http://schemas.microsoft.com/office/drawing/2010/main" xmlns="">
+              <a14:hiddenFill xmlns="" xmlns:a14="http://schemas.microsoft.com/office/drawing/2010/main">
                 <a:solidFill>
                   <a:srgbClr val="FFFFFF"/>
                 </a:solidFill>
               </a14:hiddenFill>
             </a:ext>
             <a:ext uri="{91240B29-F687-4f45-9708-019B960494DF}">
-              <a14:hiddenLine xmlns:a14="http://schemas.microsoft.com/office/drawing/2010/main" xmlns="" w="9525" cap="flat">
+              <a14:hiddenLine xmlns="" xmlns:a14="http://schemas.microsoft.com/office/drawing/2010/main" w="9525" cap="flat">
                 <a:solidFill>
                   <a:srgbClr val="000000"/>
                 </a:solidFill>
@@ -19810,7 +19810,7 @@
               </a14:hiddenLine>
             </a:ext>
             <a:ext uri="{AF507438-7753-43e0-B8FC-AC1667EBCBE1}">
-              <a14:hiddenEffects xmlns:a14="http://schemas.microsoft.com/office/drawing/2010/main" xmlns="">
+              <a14:hiddenEffects xmlns="" xmlns:a14="http://schemas.microsoft.com/office/drawing/2010/main">
                 <a:effectLst>
                   <a:outerShdw blurRad="63500" dist="38099" dir="2700000" algn="ctr" rotWithShape="0">
                     <a:srgbClr val="000000">
@@ -20037,7 +20037,7 @@
           <a:effectLst/>
           <a:extLst>
             <a:ext uri="{AF507438-7753-43e0-B8FC-AC1667EBCBE1}">
-              <a14:hiddenEffects xmlns:a14="http://schemas.microsoft.com/office/drawing/2010/main" xmlns="">
+              <a14:hiddenEffects xmlns="" xmlns:a14="http://schemas.microsoft.com/office/drawing/2010/main">
                 <a:effectLst>
                   <a:outerShdw blurRad="63500" dist="38099" dir="2700000" algn="ctr" rotWithShape="0">
                     <a:srgbClr val="000000">
@@ -20080,14 +20080,14 @@
           <a:effectLst/>
           <a:extLst>
             <a:ext uri="{909E8E84-426E-40dd-AFC4-6F175D3DCCD1}">
-              <a14:hiddenFill xmlns:a14="http://schemas.microsoft.com/office/drawing/2010/main" xmlns="">
+              <a14:hiddenFill xmlns="" xmlns:a14="http://schemas.microsoft.com/office/drawing/2010/main">
                 <a:solidFill>
                   <a:srgbClr val="FFFFFF"/>
                 </a:solidFill>
               </a14:hiddenFill>
             </a:ext>
             <a:ext uri="{91240B29-F687-4f45-9708-019B960494DF}">
-              <a14:hiddenLine xmlns:a14="http://schemas.microsoft.com/office/drawing/2010/main" xmlns="" w="9525" cap="flat">
+              <a14:hiddenLine xmlns="" xmlns:a14="http://schemas.microsoft.com/office/drawing/2010/main" w="9525" cap="flat">
                 <a:solidFill>
                   <a:srgbClr val="000000"/>
                 </a:solidFill>
@@ -20097,7 +20097,7 @@
               </a14:hiddenLine>
             </a:ext>
             <a:ext uri="{AF507438-7753-43e0-B8FC-AC1667EBCBE1}">
-              <a14:hiddenEffects xmlns:a14="http://schemas.microsoft.com/office/drawing/2010/main" xmlns="">
+              <a14:hiddenEffects xmlns="" xmlns:a14="http://schemas.microsoft.com/office/drawing/2010/main">
                 <a:effectLst>
                   <a:outerShdw blurRad="63500" dist="38099" dir="2700000" algn="ctr" rotWithShape="0">
                     <a:srgbClr val="000000">
@@ -20289,7 +20289,7 @@
           <a:p>
             <a:r>
               <a:rPr lang="fr-FR" sz="800" dirty="0"/>
-              <a:t>30 bissas Astra</a:t>
+              <a:t>Point d’accès</a:t>
             </a:r>
           </a:p>
         </p:txBody>
@@ -20324,7 +20324,7 @@
           <a:effectLst/>
           <a:extLst>
             <a:ext uri="{AF507438-7753-43e0-B8FC-AC1667EBCBE1}">
-              <a14:hiddenEffects xmlns:a14="http://schemas.microsoft.com/office/drawing/2010/main" xmlns="">
+              <a14:hiddenEffects xmlns="" xmlns:a14="http://schemas.microsoft.com/office/drawing/2010/main">
                 <a:effectLst>
                   <a:outerShdw blurRad="63500" dist="38099" dir="2700000" algn="ctr" rotWithShape="0">
                     <a:srgbClr val="000000">
@@ -20367,14 +20367,14 @@
           <a:effectLst/>
           <a:extLst>
             <a:ext uri="{909E8E84-426E-40dd-AFC4-6F175D3DCCD1}">
-              <a14:hiddenFill xmlns:a14="http://schemas.microsoft.com/office/drawing/2010/main" xmlns="">
+              <a14:hiddenFill xmlns="" xmlns:a14="http://schemas.microsoft.com/office/drawing/2010/main">
                 <a:solidFill>
                   <a:srgbClr val="FFFFFF"/>
                 </a:solidFill>
               </a14:hiddenFill>
             </a:ext>
             <a:ext uri="{91240B29-F687-4f45-9708-019B960494DF}">
-              <a14:hiddenLine xmlns:a14="http://schemas.microsoft.com/office/drawing/2010/main" xmlns="" w="9525" cap="flat">
+              <a14:hiddenLine xmlns="" xmlns:a14="http://schemas.microsoft.com/office/drawing/2010/main" w="9525" cap="flat">
                 <a:solidFill>
                   <a:srgbClr val="000000"/>
                 </a:solidFill>
@@ -20384,7 +20384,7 @@
               </a14:hiddenLine>
             </a:ext>
             <a:ext uri="{AF507438-7753-43e0-B8FC-AC1667EBCBE1}">
-              <a14:hiddenEffects xmlns:a14="http://schemas.microsoft.com/office/drawing/2010/main" xmlns="">
+              <a14:hiddenEffects xmlns="" xmlns:a14="http://schemas.microsoft.com/office/drawing/2010/main">
                 <a:effectLst>
                   <a:outerShdw blurRad="63500" dist="38099" dir="2700000" algn="ctr" rotWithShape="0">
                     <a:srgbClr val="000000">
@@ -20609,12 +20609,12 @@
           <a:effectLst/>
           <a:extLst>
             <a:ext uri="{909E8E84-426E-40dd-AFC4-6F175D3DCCD1}">
-              <a14:hiddenFill xmlns:a14="http://schemas.microsoft.com/office/drawing/2010/main" xmlns="">
+              <a14:hiddenFill xmlns="" xmlns:a14="http://schemas.microsoft.com/office/drawing/2010/main">
                 <a:noFill/>
               </a14:hiddenFill>
             </a:ext>
             <a:ext uri="{AF507438-7753-43e0-B8FC-AC1667EBCBE1}">
-              <a14:hiddenEffects xmlns:a14="http://schemas.microsoft.com/office/drawing/2010/main" xmlns="">
+              <a14:hiddenEffects xmlns="" xmlns:a14="http://schemas.microsoft.com/office/drawing/2010/main">
                 <a:effectLst>
                   <a:outerShdw blurRad="63500" dist="38099" dir="2700000" algn="ctr" rotWithShape="0">
                     <a:srgbClr val="000000">
@@ -20657,14 +20657,14 @@
           <a:effectLst/>
           <a:extLst>
             <a:ext uri="{909E8E84-426E-40dd-AFC4-6F175D3DCCD1}">
-              <a14:hiddenFill xmlns:a14="http://schemas.microsoft.com/office/drawing/2010/main" xmlns="">
+              <a14:hiddenFill xmlns="" xmlns:a14="http://schemas.microsoft.com/office/drawing/2010/main">
                 <a:solidFill>
                   <a:srgbClr val="FFFFFF"/>
                 </a:solidFill>
               </a14:hiddenFill>
             </a:ext>
             <a:ext uri="{91240B29-F687-4f45-9708-019B960494DF}">
-              <a14:hiddenLine xmlns:a14="http://schemas.microsoft.com/office/drawing/2010/main" xmlns="" w="9525" cap="flat">
+              <a14:hiddenLine xmlns="" xmlns:a14="http://schemas.microsoft.com/office/drawing/2010/main" w="9525" cap="flat">
                 <a:solidFill>
                   <a:srgbClr val="000000"/>
                 </a:solidFill>
@@ -20674,7 +20674,7 @@
               </a14:hiddenLine>
             </a:ext>
             <a:ext uri="{AF507438-7753-43e0-B8FC-AC1667EBCBE1}">
-              <a14:hiddenEffects xmlns:a14="http://schemas.microsoft.com/office/drawing/2010/main" xmlns="">
+              <a14:hiddenEffects xmlns="" xmlns:a14="http://schemas.microsoft.com/office/drawing/2010/main">
                 <a:effectLst>
                   <a:outerShdw blurRad="63500" dist="38099" dir="2700000" algn="ctr" rotWithShape="0">
                     <a:srgbClr val="000000">
@@ -20724,14 +20724,14 @@
           <a:effectLst/>
           <a:extLst>
             <a:ext uri="{909E8E84-426E-40dd-AFC4-6F175D3DCCD1}">
-              <a14:hiddenFill xmlns:a14="http://schemas.microsoft.com/office/drawing/2010/main" xmlns="">
+              <a14:hiddenFill xmlns="" xmlns:a14="http://schemas.microsoft.com/office/drawing/2010/main">
                 <a:solidFill>
                   <a:srgbClr val="FFFFFF"/>
                 </a:solidFill>
               </a14:hiddenFill>
             </a:ext>
             <a:ext uri="{91240B29-F687-4f45-9708-019B960494DF}">
-              <a14:hiddenLine xmlns:a14="http://schemas.microsoft.com/office/drawing/2010/main" xmlns="" w="9525" cap="flat">
+              <a14:hiddenLine xmlns="" xmlns:a14="http://schemas.microsoft.com/office/drawing/2010/main" w="9525" cap="flat">
                 <a:solidFill>
                   <a:srgbClr val="000000"/>
                 </a:solidFill>
@@ -20741,7 +20741,7 @@
               </a14:hiddenLine>
             </a:ext>
             <a:ext uri="{AF507438-7753-43e0-B8FC-AC1667EBCBE1}">
-              <a14:hiddenEffects xmlns:a14="http://schemas.microsoft.com/office/drawing/2010/main" xmlns="">
+              <a14:hiddenEffects xmlns="" xmlns:a14="http://schemas.microsoft.com/office/drawing/2010/main">
                 <a:effectLst>
                   <a:outerShdw blurRad="63500" dist="38099" dir="2700000" algn="ctr" rotWithShape="0">
                     <a:srgbClr val="000000">
@@ -20965,14 +20965,14 @@
           <a:effectLst/>
           <a:extLst>
             <a:ext uri="{909E8E84-426E-40dd-AFC4-6F175D3DCCD1}">
-              <a14:hiddenFill xmlns:a14="http://schemas.microsoft.com/office/drawing/2010/main" xmlns="">
+              <a14:hiddenFill xmlns="" xmlns:a14="http://schemas.microsoft.com/office/drawing/2010/main">
                 <a:solidFill>
                   <a:srgbClr val="FFFFFF"/>
                 </a:solidFill>
               </a14:hiddenFill>
             </a:ext>
             <a:ext uri="{91240B29-F687-4f45-9708-019B960494DF}">
-              <a14:hiddenLine xmlns:a14="http://schemas.microsoft.com/office/drawing/2010/main" xmlns="" w="9525" cap="flat">
+              <a14:hiddenLine xmlns="" xmlns:a14="http://schemas.microsoft.com/office/drawing/2010/main" w="9525" cap="flat">
                 <a:solidFill>
                   <a:srgbClr val="000000"/>
                 </a:solidFill>
@@ -20982,7 +20982,7 @@
               </a14:hiddenLine>
             </a:ext>
             <a:ext uri="{AF507438-7753-43e0-B8FC-AC1667EBCBE1}">
-              <a14:hiddenEffects xmlns:a14="http://schemas.microsoft.com/office/drawing/2010/main" xmlns="">
+              <a14:hiddenEffects xmlns="" xmlns:a14="http://schemas.microsoft.com/office/drawing/2010/main">
                 <a:effectLst>
                   <a:outerShdw blurRad="63500" dist="38099" dir="2700000" algn="ctr" rotWithShape="0">
                     <a:srgbClr val="000000">
@@ -21032,14 +21032,14 @@
           <a:effectLst/>
           <a:extLst>
             <a:ext uri="{909E8E84-426E-40dd-AFC4-6F175D3DCCD1}">
-              <a14:hiddenFill xmlns:a14="http://schemas.microsoft.com/office/drawing/2010/main" xmlns="">
+              <a14:hiddenFill xmlns="" xmlns:a14="http://schemas.microsoft.com/office/drawing/2010/main">
                 <a:solidFill>
                   <a:srgbClr val="FFFFFF"/>
                 </a:solidFill>
               </a14:hiddenFill>
             </a:ext>
             <a:ext uri="{91240B29-F687-4f45-9708-019B960494DF}">
-              <a14:hiddenLine xmlns:a14="http://schemas.microsoft.com/office/drawing/2010/main" xmlns="" w="9525" cap="flat">
+              <a14:hiddenLine xmlns="" xmlns:a14="http://schemas.microsoft.com/office/drawing/2010/main" w="9525" cap="flat">
                 <a:solidFill>
                   <a:srgbClr val="000000"/>
                 </a:solidFill>
@@ -21049,7 +21049,7 @@
               </a14:hiddenLine>
             </a:ext>
             <a:ext uri="{AF507438-7753-43e0-B8FC-AC1667EBCBE1}">
-              <a14:hiddenEffects xmlns:a14="http://schemas.microsoft.com/office/drawing/2010/main" xmlns="">
+              <a14:hiddenEffects xmlns="" xmlns:a14="http://schemas.microsoft.com/office/drawing/2010/main">
                 <a:effectLst>
                   <a:outerShdw blurRad="63500" dist="38099" dir="2700000" algn="ctr" rotWithShape="0">
                     <a:srgbClr val="000000">
@@ -21099,14 +21099,14 @@
           <a:effectLst/>
           <a:extLst>
             <a:ext uri="{909E8E84-426E-40dd-AFC4-6F175D3DCCD1}">
-              <a14:hiddenFill xmlns:a14="http://schemas.microsoft.com/office/drawing/2010/main" xmlns="">
+              <a14:hiddenFill xmlns="" xmlns:a14="http://schemas.microsoft.com/office/drawing/2010/main">
                 <a:solidFill>
                   <a:srgbClr val="FFFFFF"/>
                 </a:solidFill>
               </a14:hiddenFill>
             </a:ext>
             <a:ext uri="{91240B29-F687-4f45-9708-019B960494DF}">
-              <a14:hiddenLine xmlns:a14="http://schemas.microsoft.com/office/drawing/2010/main" xmlns="" w="9525" cap="flat">
+              <a14:hiddenLine xmlns="" xmlns:a14="http://schemas.microsoft.com/office/drawing/2010/main" w="9525" cap="flat">
                 <a:solidFill>
                   <a:srgbClr val="000000"/>
                 </a:solidFill>
@@ -21116,7 +21116,7 @@
               </a14:hiddenLine>
             </a:ext>
             <a:ext uri="{AF507438-7753-43e0-B8FC-AC1667EBCBE1}">
-              <a14:hiddenEffects xmlns:a14="http://schemas.microsoft.com/office/drawing/2010/main" xmlns="">
+              <a14:hiddenEffects xmlns="" xmlns:a14="http://schemas.microsoft.com/office/drawing/2010/main">
                 <a:effectLst>
                   <a:outerShdw blurRad="63500" dist="38099" dir="2700000" algn="ctr" rotWithShape="0">
                     <a:srgbClr val="000000">
@@ -21166,14 +21166,14 @@
           <a:effectLst/>
           <a:extLst>
             <a:ext uri="{909E8E84-426E-40dd-AFC4-6F175D3DCCD1}">
-              <a14:hiddenFill xmlns:a14="http://schemas.microsoft.com/office/drawing/2010/main" xmlns="">
+              <a14:hiddenFill xmlns="" xmlns:a14="http://schemas.microsoft.com/office/drawing/2010/main">
                 <a:solidFill>
                   <a:srgbClr val="FFFFFF"/>
                 </a:solidFill>
               </a14:hiddenFill>
             </a:ext>
             <a:ext uri="{91240B29-F687-4f45-9708-019B960494DF}">
-              <a14:hiddenLine xmlns:a14="http://schemas.microsoft.com/office/drawing/2010/main" xmlns="" w="9525" cap="flat">
+              <a14:hiddenLine xmlns="" xmlns:a14="http://schemas.microsoft.com/office/drawing/2010/main" w="9525" cap="flat">
                 <a:solidFill>
                   <a:srgbClr val="000000"/>
                 </a:solidFill>
@@ -21183,7 +21183,7 @@
               </a14:hiddenLine>
             </a:ext>
             <a:ext uri="{AF507438-7753-43e0-B8FC-AC1667EBCBE1}">
-              <a14:hiddenEffects xmlns:a14="http://schemas.microsoft.com/office/drawing/2010/main" xmlns="">
+              <a14:hiddenEffects xmlns="" xmlns:a14="http://schemas.microsoft.com/office/drawing/2010/main">
                 <a:effectLst>
                   <a:outerShdw blurRad="63500" dist="38099" dir="2700000" algn="ctr" rotWithShape="0">
                     <a:srgbClr val="000000">
@@ -21233,14 +21233,14 @@
           <a:effectLst/>
           <a:extLst>
             <a:ext uri="{909E8E84-426E-40dd-AFC4-6F175D3DCCD1}">
-              <a14:hiddenFill xmlns:a14="http://schemas.microsoft.com/office/drawing/2010/main" xmlns="">
+              <a14:hiddenFill xmlns="" xmlns:a14="http://schemas.microsoft.com/office/drawing/2010/main">
                 <a:solidFill>
                   <a:srgbClr val="FFFFFF"/>
                 </a:solidFill>
               </a14:hiddenFill>
             </a:ext>
             <a:ext uri="{91240B29-F687-4f45-9708-019B960494DF}">
-              <a14:hiddenLine xmlns:a14="http://schemas.microsoft.com/office/drawing/2010/main" xmlns="" w="9525" cap="flat">
+              <a14:hiddenLine xmlns="" xmlns:a14="http://schemas.microsoft.com/office/drawing/2010/main" w="9525" cap="flat">
                 <a:solidFill>
                   <a:srgbClr val="000000"/>
                 </a:solidFill>
@@ -21250,7 +21250,7 @@
               </a14:hiddenLine>
             </a:ext>
             <a:ext uri="{AF507438-7753-43e0-B8FC-AC1667EBCBE1}">
-              <a14:hiddenEffects xmlns:a14="http://schemas.microsoft.com/office/drawing/2010/main" xmlns="">
+              <a14:hiddenEffects xmlns="" xmlns:a14="http://schemas.microsoft.com/office/drawing/2010/main">
                 <a:effectLst>
                   <a:outerShdw blurRad="63500" dist="38099" dir="2700000" algn="ctr" rotWithShape="0">
                     <a:srgbClr val="000000">
@@ -21300,14 +21300,14 @@
           <a:effectLst/>
           <a:extLst>
             <a:ext uri="{909E8E84-426E-40dd-AFC4-6F175D3DCCD1}">
-              <a14:hiddenFill xmlns:a14="http://schemas.microsoft.com/office/drawing/2010/main" xmlns="">
+              <a14:hiddenFill xmlns="" xmlns:a14="http://schemas.microsoft.com/office/drawing/2010/main">
                 <a:solidFill>
                   <a:srgbClr val="FFFFFF"/>
                 </a:solidFill>
               </a14:hiddenFill>
             </a:ext>
             <a:ext uri="{91240B29-F687-4f45-9708-019B960494DF}">
-              <a14:hiddenLine xmlns:a14="http://schemas.microsoft.com/office/drawing/2010/main" xmlns="" w="9525" cap="flat">
+              <a14:hiddenLine xmlns="" xmlns:a14="http://schemas.microsoft.com/office/drawing/2010/main" w="9525" cap="flat">
                 <a:solidFill>
                   <a:srgbClr val="000000"/>
                 </a:solidFill>
@@ -21317,7 +21317,7 @@
               </a14:hiddenLine>
             </a:ext>
             <a:ext uri="{AF507438-7753-43e0-B8FC-AC1667EBCBE1}">
-              <a14:hiddenEffects xmlns:a14="http://schemas.microsoft.com/office/drawing/2010/main" xmlns="">
+              <a14:hiddenEffects xmlns="" xmlns:a14="http://schemas.microsoft.com/office/drawing/2010/main">
                 <a:effectLst>
                   <a:outerShdw blurRad="63500" dist="38099" dir="2700000" algn="ctr" rotWithShape="0">
                     <a:srgbClr val="000000">
@@ -21367,14 +21367,14 @@
           <a:effectLst/>
           <a:extLst>
             <a:ext uri="{909E8E84-426E-40dd-AFC4-6F175D3DCCD1}">
-              <a14:hiddenFill xmlns:a14="http://schemas.microsoft.com/office/drawing/2010/main" xmlns="">
+              <a14:hiddenFill xmlns="" xmlns:a14="http://schemas.microsoft.com/office/drawing/2010/main">
                 <a:solidFill>
                   <a:srgbClr val="FFFFFF"/>
                 </a:solidFill>
               </a14:hiddenFill>
             </a:ext>
             <a:ext uri="{91240B29-F687-4f45-9708-019B960494DF}">
-              <a14:hiddenLine xmlns:a14="http://schemas.microsoft.com/office/drawing/2010/main" xmlns="" w="9525" cap="flat">
+              <a14:hiddenLine xmlns="" xmlns:a14="http://schemas.microsoft.com/office/drawing/2010/main" w="9525" cap="flat">
                 <a:solidFill>
                   <a:srgbClr val="000000"/>
                 </a:solidFill>
@@ -21384,7 +21384,7 @@
               </a14:hiddenLine>
             </a:ext>
             <a:ext uri="{AF507438-7753-43e0-B8FC-AC1667EBCBE1}">
-              <a14:hiddenEffects xmlns:a14="http://schemas.microsoft.com/office/drawing/2010/main" xmlns="">
+              <a14:hiddenEffects xmlns="" xmlns:a14="http://schemas.microsoft.com/office/drawing/2010/main">
                 <a:effectLst>
                   <a:outerShdw blurRad="63500" dist="38099" dir="2700000" algn="ctr" rotWithShape="0">
                     <a:srgbClr val="000000">
@@ -21434,14 +21434,14 @@
           <a:effectLst/>
           <a:extLst>
             <a:ext uri="{909E8E84-426E-40dd-AFC4-6F175D3DCCD1}">
-              <a14:hiddenFill xmlns:a14="http://schemas.microsoft.com/office/drawing/2010/main" xmlns="">
+              <a14:hiddenFill xmlns="" xmlns:a14="http://schemas.microsoft.com/office/drawing/2010/main">
                 <a:solidFill>
                   <a:srgbClr val="FFFFFF"/>
                 </a:solidFill>
               </a14:hiddenFill>
             </a:ext>
             <a:ext uri="{91240B29-F687-4f45-9708-019B960494DF}">
-              <a14:hiddenLine xmlns:a14="http://schemas.microsoft.com/office/drawing/2010/main" xmlns="" w="9525" cap="flat">
+              <a14:hiddenLine xmlns="" xmlns:a14="http://schemas.microsoft.com/office/drawing/2010/main" w="9525" cap="flat">
                 <a:solidFill>
                   <a:srgbClr val="000000"/>
                 </a:solidFill>
@@ -21451,7 +21451,7 @@
               </a14:hiddenLine>
             </a:ext>
             <a:ext uri="{AF507438-7753-43e0-B8FC-AC1667EBCBE1}">
-              <a14:hiddenEffects xmlns:a14="http://schemas.microsoft.com/office/drawing/2010/main" xmlns="">
+              <a14:hiddenEffects xmlns="" xmlns:a14="http://schemas.microsoft.com/office/drawing/2010/main">
                 <a:effectLst>
                   <a:outerShdw blurRad="63500" dist="38099" dir="2700000" algn="ctr" rotWithShape="0">
                     <a:srgbClr val="000000">
@@ -21501,14 +21501,14 @@
           <a:effectLst/>
           <a:extLst>
             <a:ext uri="{909E8E84-426E-40dd-AFC4-6F175D3DCCD1}">
-              <a14:hiddenFill xmlns:a14="http://schemas.microsoft.com/office/drawing/2010/main" xmlns="">
+              <a14:hiddenFill xmlns="" xmlns:a14="http://schemas.microsoft.com/office/drawing/2010/main">
                 <a:solidFill>
                   <a:srgbClr val="FFFFFF"/>
                 </a:solidFill>
               </a14:hiddenFill>
             </a:ext>
             <a:ext uri="{91240B29-F687-4f45-9708-019B960494DF}">
-              <a14:hiddenLine xmlns:a14="http://schemas.microsoft.com/office/drawing/2010/main" xmlns="" w="9525" cap="flat">
+              <a14:hiddenLine xmlns="" xmlns:a14="http://schemas.microsoft.com/office/drawing/2010/main" w="9525" cap="flat">
                 <a:solidFill>
                   <a:srgbClr val="000000"/>
                 </a:solidFill>
@@ -21518,7 +21518,7 @@
               </a14:hiddenLine>
             </a:ext>
             <a:ext uri="{AF507438-7753-43e0-B8FC-AC1667EBCBE1}">
-              <a14:hiddenEffects xmlns:a14="http://schemas.microsoft.com/office/drawing/2010/main" xmlns="">
+              <a14:hiddenEffects xmlns="" xmlns:a14="http://schemas.microsoft.com/office/drawing/2010/main">
                 <a:effectLst>
                   <a:outerShdw blurRad="63500" dist="38099" dir="2700000" algn="ctr" rotWithShape="0">
                     <a:srgbClr val="000000">
@@ -21568,14 +21568,14 @@
           <a:effectLst/>
           <a:extLst>
             <a:ext uri="{909E8E84-426E-40dd-AFC4-6F175D3DCCD1}">
-              <a14:hiddenFill xmlns:a14="http://schemas.microsoft.com/office/drawing/2010/main" xmlns="">
+              <a14:hiddenFill xmlns="" xmlns:a14="http://schemas.microsoft.com/office/drawing/2010/main">
                 <a:solidFill>
                   <a:srgbClr val="FFFFFF"/>
                 </a:solidFill>
               </a14:hiddenFill>
             </a:ext>
             <a:ext uri="{91240B29-F687-4f45-9708-019B960494DF}">
-              <a14:hiddenLine xmlns:a14="http://schemas.microsoft.com/office/drawing/2010/main" xmlns="" w="9525" cap="flat">
+              <a14:hiddenLine xmlns="" xmlns:a14="http://schemas.microsoft.com/office/drawing/2010/main" w="9525" cap="flat">
                 <a:solidFill>
                   <a:srgbClr val="000000"/>
                 </a:solidFill>
@@ -21585,7 +21585,7 @@
               </a14:hiddenLine>
             </a:ext>
             <a:ext uri="{AF507438-7753-43e0-B8FC-AC1667EBCBE1}">
-              <a14:hiddenEffects xmlns:a14="http://schemas.microsoft.com/office/drawing/2010/main" xmlns="">
+              <a14:hiddenEffects xmlns="" xmlns:a14="http://schemas.microsoft.com/office/drawing/2010/main">
                 <a:effectLst>
                   <a:outerShdw blurRad="63500" dist="38099" dir="2700000" algn="ctr" rotWithShape="0">
                     <a:srgbClr val="000000">
@@ -21635,14 +21635,14 @@
           <a:effectLst/>
           <a:extLst>
             <a:ext uri="{909E8E84-426E-40dd-AFC4-6F175D3DCCD1}">
-              <a14:hiddenFill xmlns:a14="http://schemas.microsoft.com/office/drawing/2010/main" xmlns="">
+              <a14:hiddenFill xmlns="" xmlns:a14="http://schemas.microsoft.com/office/drawing/2010/main">
                 <a:solidFill>
                   <a:srgbClr val="FFFFFF"/>
                 </a:solidFill>
               </a14:hiddenFill>
             </a:ext>
             <a:ext uri="{91240B29-F687-4f45-9708-019B960494DF}">
-              <a14:hiddenLine xmlns:a14="http://schemas.microsoft.com/office/drawing/2010/main" xmlns="" w="9525" cap="flat">
+              <a14:hiddenLine xmlns="" xmlns:a14="http://schemas.microsoft.com/office/drawing/2010/main" w="9525" cap="flat">
                 <a:solidFill>
                   <a:srgbClr val="000000"/>
                 </a:solidFill>
@@ -21652,7 +21652,7 @@
               </a14:hiddenLine>
             </a:ext>
             <a:ext uri="{AF507438-7753-43e0-B8FC-AC1667EBCBE1}">
-              <a14:hiddenEffects xmlns:a14="http://schemas.microsoft.com/office/drawing/2010/main" xmlns="">
+              <a14:hiddenEffects xmlns="" xmlns:a14="http://schemas.microsoft.com/office/drawing/2010/main">
                 <a:effectLst>
                   <a:outerShdw blurRad="63500" dist="38099" dir="2700000" algn="ctr" rotWithShape="0">
                     <a:srgbClr val="000000">
@@ -21702,14 +21702,14 @@
           <a:effectLst/>
           <a:extLst>
             <a:ext uri="{909E8E84-426E-40dd-AFC4-6F175D3DCCD1}">
-              <a14:hiddenFill xmlns:a14="http://schemas.microsoft.com/office/drawing/2010/main" xmlns="">
+              <a14:hiddenFill xmlns="" xmlns:a14="http://schemas.microsoft.com/office/drawing/2010/main">
                 <a:solidFill>
                   <a:srgbClr val="FFFFFF"/>
                 </a:solidFill>
               </a14:hiddenFill>
             </a:ext>
             <a:ext uri="{91240B29-F687-4f45-9708-019B960494DF}">
-              <a14:hiddenLine xmlns:a14="http://schemas.microsoft.com/office/drawing/2010/main" xmlns="" w="9525" cap="flat">
+              <a14:hiddenLine xmlns="" xmlns:a14="http://schemas.microsoft.com/office/drawing/2010/main" w="9525" cap="flat">
                 <a:solidFill>
                   <a:srgbClr val="000000"/>
                 </a:solidFill>
@@ -21719,7 +21719,7 @@
               </a14:hiddenLine>
             </a:ext>
             <a:ext uri="{AF507438-7753-43e0-B8FC-AC1667EBCBE1}">
-              <a14:hiddenEffects xmlns:a14="http://schemas.microsoft.com/office/drawing/2010/main" xmlns="">
+              <a14:hiddenEffects xmlns="" xmlns:a14="http://schemas.microsoft.com/office/drawing/2010/main">
                 <a:effectLst>
                   <a:outerShdw blurRad="63500" dist="38099" dir="2700000" algn="ctr" rotWithShape="0">
                     <a:srgbClr val="000000">
@@ -21769,14 +21769,14 @@
           <a:effectLst/>
           <a:extLst>
             <a:ext uri="{909E8E84-426E-40dd-AFC4-6F175D3DCCD1}">
-              <a14:hiddenFill xmlns:a14="http://schemas.microsoft.com/office/drawing/2010/main" xmlns="">
+              <a14:hiddenFill xmlns="" xmlns:a14="http://schemas.microsoft.com/office/drawing/2010/main">
                 <a:solidFill>
                   <a:srgbClr val="FFFFFF"/>
                 </a:solidFill>
               </a14:hiddenFill>
             </a:ext>
             <a:ext uri="{91240B29-F687-4f45-9708-019B960494DF}">
-              <a14:hiddenLine xmlns:a14="http://schemas.microsoft.com/office/drawing/2010/main" xmlns="" w="9525" cap="flat">
+              <a14:hiddenLine xmlns="" xmlns:a14="http://schemas.microsoft.com/office/drawing/2010/main" w="9525" cap="flat">
                 <a:solidFill>
                   <a:srgbClr val="000000"/>
                 </a:solidFill>
@@ -21786,7 +21786,7 @@
               </a14:hiddenLine>
             </a:ext>
             <a:ext uri="{AF507438-7753-43e0-B8FC-AC1667EBCBE1}">
-              <a14:hiddenEffects xmlns:a14="http://schemas.microsoft.com/office/drawing/2010/main" xmlns="">
+              <a14:hiddenEffects xmlns="" xmlns:a14="http://schemas.microsoft.com/office/drawing/2010/main">
                 <a:effectLst>
                   <a:outerShdw blurRad="63500" dist="38099" dir="2700000" algn="ctr" rotWithShape="0">
                     <a:srgbClr val="000000">
@@ -21836,14 +21836,14 @@
           <a:effectLst/>
           <a:extLst>
             <a:ext uri="{909E8E84-426E-40dd-AFC4-6F175D3DCCD1}">
-              <a14:hiddenFill xmlns:a14="http://schemas.microsoft.com/office/drawing/2010/main" xmlns="">
+              <a14:hiddenFill xmlns="" xmlns:a14="http://schemas.microsoft.com/office/drawing/2010/main">
                 <a:solidFill>
                   <a:srgbClr val="FFFFFF"/>
                 </a:solidFill>
               </a14:hiddenFill>
             </a:ext>
             <a:ext uri="{91240B29-F687-4f45-9708-019B960494DF}">
-              <a14:hiddenLine xmlns:a14="http://schemas.microsoft.com/office/drawing/2010/main" xmlns="" w="9525" cap="flat">
+              <a14:hiddenLine xmlns="" xmlns:a14="http://schemas.microsoft.com/office/drawing/2010/main" w="9525" cap="flat">
                 <a:solidFill>
                   <a:srgbClr val="000000"/>
                 </a:solidFill>
@@ -21853,7 +21853,7 @@
               </a14:hiddenLine>
             </a:ext>
             <a:ext uri="{AF507438-7753-43e0-B8FC-AC1667EBCBE1}">
-              <a14:hiddenEffects xmlns:a14="http://schemas.microsoft.com/office/drawing/2010/main" xmlns="">
+              <a14:hiddenEffects xmlns="" xmlns:a14="http://schemas.microsoft.com/office/drawing/2010/main">
                 <a:effectLst>
                   <a:outerShdw blurRad="63500" dist="38099" dir="2700000" algn="ctr" rotWithShape="0">
                     <a:srgbClr val="000000">
@@ -21903,14 +21903,14 @@
           <a:effectLst/>
           <a:extLst>
             <a:ext uri="{909E8E84-426E-40dd-AFC4-6F175D3DCCD1}">
-              <a14:hiddenFill xmlns:a14="http://schemas.microsoft.com/office/drawing/2010/main" xmlns="">
+              <a14:hiddenFill xmlns="" xmlns:a14="http://schemas.microsoft.com/office/drawing/2010/main">
                 <a:solidFill>
                   <a:srgbClr val="FFFFFF"/>
                 </a:solidFill>
               </a14:hiddenFill>
             </a:ext>
             <a:ext uri="{91240B29-F687-4f45-9708-019B960494DF}">
-              <a14:hiddenLine xmlns:a14="http://schemas.microsoft.com/office/drawing/2010/main" xmlns="" w="9525" cap="flat">
+              <a14:hiddenLine xmlns="" xmlns:a14="http://schemas.microsoft.com/office/drawing/2010/main" w="9525" cap="flat">
                 <a:solidFill>
                   <a:srgbClr val="000000"/>
                 </a:solidFill>
@@ -21920,7 +21920,7 @@
               </a14:hiddenLine>
             </a:ext>
             <a:ext uri="{AF507438-7753-43e0-B8FC-AC1667EBCBE1}">
-              <a14:hiddenEffects xmlns:a14="http://schemas.microsoft.com/office/drawing/2010/main" xmlns="">
+              <a14:hiddenEffects xmlns="" xmlns:a14="http://schemas.microsoft.com/office/drawing/2010/main">
                 <a:effectLst>
                   <a:outerShdw blurRad="63500" dist="38099" dir="2700000" algn="ctr" rotWithShape="0">
                     <a:srgbClr val="000000">
@@ -21970,14 +21970,14 @@
           <a:effectLst/>
           <a:extLst>
             <a:ext uri="{909E8E84-426E-40dd-AFC4-6F175D3DCCD1}">
-              <a14:hiddenFill xmlns:a14="http://schemas.microsoft.com/office/drawing/2010/main" xmlns="">
+              <a14:hiddenFill xmlns="" xmlns:a14="http://schemas.microsoft.com/office/drawing/2010/main">
                 <a:solidFill>
                   <a:srgbClr val="FFFFFF"/>
                 </a:solidFill>
               </a14:hiddenFill>
             </a:ext>
             <a:ext uri="{91240B29-F687-4f45-9708-019B960494DF}">
-              <a14:hiddenLine xmlns:a14="http://schemas.microsoft.com/office/drawing/2010/main" xmlns="" w="9525" cap="flat">
+              <a14:hiddenLine xmlns="" xmlns:a14="http://schemas.microsoft.com/office/drawing/2010/main" w="9525" cap="flat">
                 <a:solidFill>
                   <a:srgbClr val="000000"/>
                 </a:solidFill>
@@ -21987,7 +21987,7 @@
               </a14:hiddenLine>
             </a:ext>
             <a:ext uri="{AF507438-7753-43e0-B8FC-AC1667EBCBE1}">
-              <a14:hiddenEffects xmlns:a14="http://schemas.microsoft.com/office/drawing/2010/main" xmlns="">
+              <a14:hiddenEffects xmlns="" xmlns:a14="http://schemas.microsoft.com/office/drawing/2010/main">
                 <a:effectLst>
                   <a:outerShdw blurRad="63500" dist="38099" dir="2700000" algn="ctr" rotWithShape="0">
                     <a:srgbClr val="000000">
@@ -22037,14 +22037,14 @@
           <a:effectLst/>
           <a:extLst>
             <a:ext uri="{909E8E84-426E-40dd-AFC4-6F175D3DCCD1}">
-              <a14:hiddenFill xmlns:a14="http://schemas.microsoft.com/office/drawing/2010/main" xmlns="">
+              <a14:hiddenFill xmlns="" xmlns:a14="http://schemas.microsoft.com/office/drawing/2010/main">
                 <a:solidFill>
                   <a:srgbClr val="FFFFFF"/>
                 </a:solidFill>
               </a14:hiddenFill>
             </a:ext>
             <a:ext uri="{91240B29-F687-4f45-9708-019B960494DF}">
-              <a14:hiddenLine xmlns:a14="http://schemas.microsoft.com/office/drawing/2010/main" xmlns="" w="9525" cap="flat">
+              <a14:hiddenLine xmlns="" xmlns:a14="http://schemas.microsoft.com/office/drawing/2010/main" w="9525" cap="flat">
                 <a:solidFill>
                   <a:srgbClr val="000000"/>
                 </a:solidFill>
@@ -22054,7 +22054,7 @@
               </a14:hiddenLine>
             </a:ext>
             <a:ext uri="{AF507438-7753-43e0-B8FC-AC1667EBCBE1}">
-              <a14:hiddenEffects xmlns:a14="http://schemas.microsoft.com/office/drawing/2010/main" xmlns="">
+              <a14:hiddenEffects xmlns="" xmlns:a14="http://schemas.microsoft.com/office/drawing/2010/main">
                 <a:effectLst>
                   <a:outerShdw blurRad="63500" dist="38099" dir="2700000" algn="ctr" rotWithShape="0">
                     <a:srgbClr val="000000">
@@ -22104,14 +22104,14 @@
           <a:effectLst/>
           <a:extLst>
             <a:ext uri="{909E8E84-426E-40dd-AFC4-6F175D3DCCD1}">
-              <a14:hiddenFill xmlns:a14="http://schemas.microsoft.com/office/drawing/2010/main" xmlns="">
+              <a14:hiddenFill xmlns="" xmlns:a14="http://schemas.microsoft.com/office/drawing/2010/main">
                 <a:solidFill>
                   <a:srgbClr val="FFFFFF"/>
                 </a:solidFill>
               </a14:hiddenFill>
             </a:ext>
             <a:ext uri="{91240B29-F687-4f45-9708-019B960494DF}">
-              <a14:hiddenLine xmlns:a14="http://schemas.microsoft.com/office/drawing/2010/main" xmlns="" w="9525" cap="flat">
+              <a14:hiddenLine xmlns="" xmlns:a14="http://schemas.microsoft.com/office/drawing/2010/main" w="9525" cap="flat">
                 <a:solidFill>
                   <a:srgbClr val="000000"/>
                 </a:solidFill>
@@ -22121,7 +22121,7 @@
               </a14:hiddenLine>
             </a:ext>
             <a:ext uri="{AF507438-7753-43e0-B8FC-AC1667EBCBE1}">
-              <a14:hiddenEffects xmlns:a14="http://schemas.microsoft.com/office/drawing/2010/main" xmlns="">
+              <a14:hiddenEffects xmlns="" xmlns:a14="http://schemas.microsoft.com/office/drawing/2010/main">
                 <a:effectLst>
                   <a:outerShdw blurRad="63500" dist="38099" dir="2700000" algn="ctr" rotWithShape="0">
                     <a:srgbClr val="000000">
@@ -22366,7 +22366,7 @@
           <a:effectLst/>
           <a:extLst>
             <a:ext uri="{AF507438-7753-43e0-B8FC-AC1667EBCBE1}">
-              <a14:hiddenEffects xmlns:a14="http://schemas.microsoft.com/office/drawing/2010/main" xmlns="">
+              <a14:hiddenEffects xmlns="" xmlns:a14="http://schemas.microsoft.com/office/drawing/2010/main">
                 <a:effectLst>
                   <a:outerShdw blurRad="63500" dist="38099" dir="2700000" algn="ctr" rotWithShape="0">
                     <a:srgbClr val="000000">
@@ -22452,7 +22452,7 @@
           <a:effectLst/>
           <a:extLst>
             <a:ext uri="{AF507438-7753-43e0-B8FC-AC1667EBCBE1}">
-              <a14:hiddenEffects xmlns:a14="http://schemas.microsoft.com/office/drawing/2010/main" xmlns="">
+              <a14:hiddenEffects xmlns="" xmlns:a14="http://schemas.microsoft.com/office/drawing/2010/main">
                 <a:effectLst>
                   <a:outerShdw blurRad="63500" dist="38099" dir="2700000" algn="ctr" rotWithShape="0">
                     <a:srgbClr val="000000">
@@ -22508,7 +22508,7 @@
           <a:effectLst/>
           <a:extLst>
             <a:ext uri="{AF507438-7753-43e0-B8FC-AC1667EBCBE1}">
-              <a14:hiddenEffects xmlns:a14="http://schemas.microsoft.com/office/drawing/2010/main" xmlns="">
+              <a14:hiddenEffects xmlns="" xmlns:a14="http://schemas.microsoft.com/office/drawing/2010/main">
                 <a:effectLst>
                   <a:outerShdw blurRad="63500" dist="38099" dir="2700000" algn="ctr" rotWithShape="0">
                     <a:srgbClr val="000000">
@@ -22564,7 +22564,7 @@
           <a:effectLst/>
           <a:extLst>
             <a:ext uri="{AF507438-7753-43e0-B8FC-AC1667EBCBE1}">
-              <a14:hiddenEffects xmlns:a14="http://schemas.microsoft.com/office/drawing/2010/main" xmlns="">
+              <a14:hiddenEffects xmlns="" xmlns:a14="http://schemas.microsoft.com/office/drawing/2010/main">
                 <a:effectLst>
                   <a:outerShdw blurRad="63500" dist="38099" dir="2700000" algn="ctr" rotWithShape="0">
                     <a:srgbClr val="000000">
@@ -22620,7 +22620,7 @@
           <a:effectLst/>
           <a:extLst>
             <a:ext uri="{AF507438-7753-43e0-B8FC-AC1667EBCBE1}">
-              <a14:hiddenEffects xmlns:a14="http://schemas.microsoft.com/office/drawing/2010/main" xmlns="">
+              <a14:hiddenEffects xmlns="" xmlns:a14="http://schemas.microsoft.com/office/drawing/2010/main">
                 <a:effectLst>
                   <a:outerShdw blurRad="63500" dist="38099" dir="2700000" algn="ctr" rotWithShape="0">
                     <a:srgbClr val="000000">
@@ -22676,7 +22676,7 @@
           <a:effectLst/>
           <a:extLst>
             <a:ext uri="{AF507438-7753-43e0-B8FC-AC1667EBCBE1}">
-              <a14:hiddenEffects xmlns:a14="http://schemas.microsoft.com/office/drawing/2010/main" xmlns="">
+              <a14:hiddenEffects xmlns="" xmlns:a14="http://schemas.microsoft.com/office/drawing/2010/main">
                 <a:effectLst>
                   <a:outerShdw blurRad="63500" dist="38099" dir="2700000" algn="ctr" rotWithShape="0">
                     <a:srgbClr val="000000">
@@ -22732,7 +22732,7 @@
           <a:effectLst/>
           <a:extLst>
             <a:ext uri="{AF507438-7753-43e0-B8FC-AC1667EBCBE1}">
-              <a14:hiddenEffects xmlns:a14="http://schemas.microsoft.com/office/drawing/2010/main" xmlns="">
+              <a14:hiddenEffects xmlns="" xmlns:a14="http://schemas.microsoft.com/office/drawing/2010/main">
                 <a:effectLst>
                   <a:outerShdw blurRad="63500" dist="38099" dir="2700000" algn="ctr" rotWithShape="0">
                     <a:srgbClr val="000000">
@@ -22788,7 +22788,7 @@
           <a:effectLst/>
           <a:extLst>
             <a:ext uri="{AF507438-7753-43e0-B8FC-AC1667EBCBE1}">
-              <a14:hiddenEffects xmlns:a14="http://schemas.microsoft.com/office/drawing/2010/main" xmlns="">
+              <a14:hiddenEffects xmlns="" xmlns:a14="http://schemas.microsoft.com/office/drawing/2010/main">
                 <a:effectLst>
                   <a:outerShdw blurRad="63500" dist="38099" dir="2700000" algn="ctr" rotWithShape="0">
                     <a:srgbClr val="000000">
@@ -22844,7 +22844,7 @@
           <a:effectLst/>
           <a:extLst>
             <a:ext uri="{AF507438-7753-43e0-B8FC-AC1667EBCBE1}">
-              <a14:hiddenEffects xmlns:a14="http://schemas.microsoft.com/office/drawing/2010/main" xmlns="">
+              <a14:hiddenEffects xmlns="" xmlns:a14="http://schemas.microsoft.com/office/drawing/2010/main">
                 <a:effectLst>
                   <a:outerShdw blurRad="63500" dist="38099" dir="2700000" algn="ctr" rotWithShape="0">
                     <a:srgbClr val="000000">
@@ -22900,7 +22900,7 @@
           <a:effectLst/>
           <a:extLst>
             <a:ext uri="{AF507438-7753-43e0-B8FC-AC1667EBCBE1}">
-              <a14:hiddenEffects xmlns:a14="http://schemas.microsoft.com/office/drawing/2010/main" xmlns="">
+              <a14:hiddenEffects xmlns="" xmlns:a14="http://schemas.microsoft.com/office/drawing/2010/main">
                 <a:effectLst>
                   <a:outerShdw blurRad="63500" dist="38099" dir="2700000" algn="ctr" rotWithShape="0">
                     <a:srgbClr val="000000">
@@ -22956,7 +22956,7 @@
           <a:effectLst/>
           <a:extLst>
             <a:ext uri="{AF507438-7753-43e0-B8FC-AC1667EBCBE1}">
-              <a14:hiddenEffects xmlns:a14="http://schemas.microsoft.com/office/drawing/2010/main" xmlns="">
+              <a14:hiddenEffects xmlns="" xmlns:a14="http://schemas.microsoft.com/office/drawing/2010/main">
                 <a:effectLst>
                   <a:outerShdw blurRad="63500" dist="38099" dir="2700000" algn="ctr" rotWithShape="0">
                     <a:srgbClr val="000000">
@@ -23012,7 +23012,7 @@
           <a:effectLst/>
           <a:extLst>
             <a:ext uri="{AF507438-7753-43e0-B8FC-AC1667EBCBE1}">
-              <a14:hiddenEffects xmlns:a14="http://schemas.microsoft.com/office/drawing/2010/main" xmlns="">
+              <a14:hiddenEffects xmlns="" xmlns:a14="http://schemas.microsoft.com/office/drawing/2010/main">
                 <a:effectLst>
                   <a:outerShdw blurRad="63500" dist="38099" dir="2700000" algn="ctr" rotWithShape="0">
                     <a:srgbClr val="000000">
@@ -23068,7 +23068,7 @@
           <a:effectLst/>
           <a:extLst>
             <a:ext uri="{AF507438-7753-43e0-B8FC-AC1667EBCBE1}">
-              <a14:hiddenEffects xmlns:a14="http://schemas.microsoft.com/office/drawing/2010/main" xmlns="">
+              <a14:hiddenEffects xmlns="" xmlns:a14="http://schemas.microsoft.com/office/drawing/2010/main">
                 <a:effectLst>
                   <a:outerShdw blurRad="63500" dist="38099" dir="2700000" algn="ctr" rotWithShape="0">
                     <a:srgbClr val="000000">
@@ -23124,7 +23124,7 @@
           <a:effectLst/>
           <a:extLst>
             <a:ext uri="{AF507438-7753-43e0-B8FC-AC1667EBCBE1}">
-              <a14:hiddenEffects xmlns:a14="http://schemas.microsoft.com/office/drawing/2010/main" xmlns="">
+              <a14:hiddenEffects xmlns="" xmlns:a14="http://schemas.microsoft.com/office/drawing/2010/main">
                 <a:effectLst>
                   <a:outerShdw blurRad="63500" dist="38099" dir="2700000" algn="ctr" rotWithShape="0">
                     <a:srgbClr val="000000">
@@ -23180,7 +23180,7 @@
           <a:effectLst/>
           <a:extLst>
             <a:ext uri="{AF507438-7753-43e0-B8FC-AC1667EBCBE1}">
-              <a14:hiddenEffects xmlns:a14="http://schemas.microsoft.com/office/drawing/2010/main" xmlns="">
+              <a14:hiddenEffects xmlns="" xmlns:a14="http://schemas.microsoft.com/office/drawing/2010/main">
                 <a:effectLst>
                   <a:outerShdw blurRad="63500" dist="38099" dir="2700000" algn="ctr" rotWithShape="0">
                     <a:srgbClr val="000000">
@@ -23236,7 +23236,7 @@
           <a:effectLst/>
           <a:extLst>
             <a:ext uri="{AF507438-7753-43e0-B8FC-AC1667EBCBE1}">
-              <a14:hiddenEffects xmlns:a14="http://schemas.microsoft.com/office/drawing/2010/main" xmlns="">
+              <a14:hiddenEffects xmlns="" xmlns:a14="http://schemas.microsoft.com/office/drawing/2010/main">
                 <a:effectLst>
                   <a:outerShdw blurRad="63500" dist="38099" dir="2700000" algn="ctr" rotWithShape="0">
                     <a:srgbClr val="000000">
@@ -23292,7 +23292,7 @@
           <a:effectLst/>
           <a:extLst>
             <a:ext uri="{AF507438-7753-43e0-B8FC-AC1667EBCBE1}">
-              <a14:hiddenEffects xmlns:a14="http://schemas.microsoft.com/office/drawing/2010/main" xmlns="">
+              <a14:hiddenEffects xmlns="" xmlns:a14="http://schemas.microsoft.com/office/drawing/2010/main">
                 <a:effectLst>
                   <a:outerShdw blurRad="63500" dist="38099" dir="2700000" algn="ctr" rotWithShape="0">
                     <a:srgbClr val="000000">
@@ -23348,7 +23348,7 @@
           <a:effectLst/>
           <a:extLst>
             <a:ext uri="{AF507438-7753-43e0-B8FC-AC1667EBCBE1}">
-              <a14:hiddenEffects xmlns:a14="http://schemas.microsoft.com/office/drawing/2010/main" xmlns="">
+              <a14:hiddenEffects xmlns="" xmlns:a14="http://schemas.microsoft.com/office/drawing/2010/main">
                 <a:effectLst>
                   <a:outerShdw blurRad="63500" dist="38099" dir="2700000" algn="ctr" rotWithShape="0">
                     <a:srgbClr val="000000">
@@ -23404,7 +23404,7 @@
           <a:effectLst/>
           <a:extLst>
             <a:ext uri="{AF507438-7753-43e0-B8FC-AC1667EBCBE1}">
-              <a14:hiddenEffects xmlns:a14="http://schemas.microsoft.com/office/drawing/2010/main" xmlns="">
+              <a14:hiddenEffects xmlns="" xmlns:a14="http://schemas.microsoft.com/office/drawing/2010/main">
                 <a:effectLst>
                   <a:outerShdw blurRad="63500" dist="38099" dir="2700000" algn="ctr" rotWithShape="0">
                     <a:srgbClr val="000000">
@@ -23460,7 +23460,7 @@
           <a:effectLst/>
           <a:extLst>
             <a:ext uri="{AF507438-7753-43e0-B8FC-AC1667EBCBE1}">
-              <a14:hiddenEffects xmlns:a14="http://schemas.microsoft.com/office/drawing/2010/main" xmlns="">
+              <a14:hiddenEffects xmlns="" xmlns:a14="http://schemas.microsoft.com/office/drawing/2010/main">
                 <a:effectLst>
                   <a:outerShdw blurRad="63500" dist="38099" dir="2700000" algn="ctr" rotWithShape="0">
                     <a:srgbClr val="000000">
@@ -23556,14 +23556,14 @@
           <a:effectLst/>
           <a:extLst>
             <a:ext uri="{909E8E84-426E-40dd-AFC4-6F175D3DCCD1}">
-              <a14:hiddenFill xmlns:a14="http://schemas.microsoft.com/office/drawing/2010/main" xmlns="">
+              <a14:hiddenFill xmlns="" xmlns:a14="http://schemas.microsoft.com/office/drawing/2010/main">
                 <a:solidFill>
                   <a:srgbClr val="FFFFFF"/>
                 </a:solidFill>
               </a14:hiddenFill>
             </a:ext>
             <a:ext uri="{91240B29-F687-4f45-9708-019B960494DF}">
-              <a14:hiddenLine xmlns:a14="http://schemas.microsoft.com/office/drawing/2010/main" xmlns="" w="9525" cap="flat">
+              <a14:hiddenLine xmlns="" xmlns:a14="http://schemas.microsoft.com/office/drawing/2010/main" w="9525" cap="flat">
                 <a:solidFill>
                   <a:srgbClr val="000000"/>
                 </a:solidFill>
@@ -23573,7 +23573,7 @@
               </a14:hiddenLine>
             </a:ext>
             <a:ext uri="{AF507438-7753-43e0-B8FC-AC1667EBCBE1}">
-              <a14:hiddenEffects xmlns:a14="http://schemas.microsoft.com/office/drawing/2010/main" xmlns="">
+              <a14:hiddenEffects xmlns="" xmlns:a14="http://schemas.microsoft.com/office/drawing/2010/main">
                 <a:effectLst>
                   <a:outerShdw blurRad="63500" dist="38099" dir="2700000" algn="ctr" rotWithShape="0">
                     <a:srgbClr val="000000">
@@ -23802,14 +23802,14 @@
           <a:effectLst/>
           <a:extLst>
             <a:ext uri="{909E8E84-426E-40dd-AFC4-6F175D3DCCD1}">
-              <a14:hiddenFill xmlns:a14="http://schemas.microsoft.com/office/drawing/2010/main" xmlns="">
+              <a14:hiddenFill xmlns="" xmlns:a14="http://schemas.microsoft.com/office/drawing/2010/main">
                 <a:solidFill>
                   <a:srgbClr val="FFFFFF"/>
                 </a:solidFill>
               </a14:hiddenFill>
             </a:ext>
             <a:ext uri="{91240B29-F687-4f45-9708-019B960494DF}">
-              <a14:hiddenLine xmlns:a14="http://schemas.microsoft.com/office/drawing/2010/main" xmlns="" w="9525" cap="flat">
+              <a14:hiddenLine xmlns="" xmlns:a14="http://schemas.microsoft.com/office/drawing/2010/main" w="9525" cap="flat">
                 <a:solidFill>
                   <a:srgbClr val="000000"/>
                 </a:solidFill>
@@ -23819,7 +23819,7 @@
               </a14:hiddenLine>
             </a:ext>
             <a:ext uri="{AF507438-7753-43e0-B8FC-AC1667EBCBE1}">
-              <a14:hiddenEffects xmlns:a14="http://schemas.microsoft.com/office/drawing/2010/main" xmlns="">
+              <a14:hiddenEffects xmlns="" xmlns:a14="http://schemas.microsoft.com/office/drawing/2010/main">
                 <a:effectLst>
                   <a:outerShdw blurRad="63500" dist="38099" dir="2700000" algn="ctr" rotWithShape="0">
                     <a:srgbClr val="000000">
@@ -23869,14 +23869,14 @@
           <a:effectLst/>
           <a:extLst>
             <a:ext uri="{909E8E84-426E-40dd-AFC4-6F175D3DCCD1}">
-              <a14:hiddenFill xmlns:a14="http://schemas.microsoft.com/office/drawing/2010/main" xmlns="">
+              <a14:hiddenFill xmlns="" xmlns:a14="http://schemas.microsoft.com/office/drawing/2010/main">
                 <a:solidFill>
                   <a:srgbClr val="FFFFFF"/>
                 </a:solidFill>
               </a14:hiddenFill>
             </a:ext>
             <a:ext uri="{91240B29-F687-4f45-9708-019B960494DF}">
-              <a14:hiddenLine xmlns:a14="http://schemas.microsoft.com/office/drawing/2010/main" xmlns="" w="9525" cap="flat">
+              <a14:hiddenLine xmlns="" xmlns:a14="http://schemas.microsoft.com/office/drawing/2010/main" w="9525" cap="flat">
                 <a:solidFill>
                   <a:srgbClr val="000000"/>
                 </a:solidFill>
@@ -23886,7 +23886,7 @@
               </a14:hiddenLine>
             </a:ext>
             <a:ext uri="{AF507438-7753-43e0-B8FC-AC1667EBCBE1}">
-              <a14:hiddenEffects xmlns:a14="http://schemas.microsoft.com/office/drawing/2010/main" xmlns="">
+              <a14:hiddenEffects xmlns="" xmlns:a14="http://schemas.microsoft.com/office/drawing/2010/main">
                 <a:effectLst>
                   <a:outerShdw blurRad="63500" dist="38099" dir="2700000" algn="ctr" rotWithShape="0">
                     <a:srgbClr val="000000">
@@ -23943,7 +23943,7 @@
           <a:effectLst/>
           <a:extLst>
             <a:ext uri="{AF507438-7753-43e0-B8FC-AC1667EBCBE1}">
-              <a14:hiddenEffects xmlns:a14="http://schemas.microsoft.com/office/drawing/2010/main" xmlns="">
+              <a14:hiddenEffects xmlns="" xmlns:a14="http://schemas.microsoft.com/office/drawing/2010/main">
                 <a:effectLst>
                   <a:outerShdw blurRad="63500" dist="38099" dir="2700000" algn="ctr" rotWithShape="0">
                     <a:srgbClr val="000000">
@@ -23993,7 +23993,7 @@
           <a:effectLst/>
           <a:extLst>
             <a:ext uri="{AF507438-7753-43e0-B8FC-AC1667EBCBE1}">
-              <a14:hiddenEffects xmlns:a14="http://schemas.microsoft.com/office/drawing/2010/main" xmlns="">
+              <a14:hiddenEffects xmlns="" xmlns:a14="http://schemas.microsoft.com/office/drawing/2010/main">
                 <a:effectLst>
                   <a:outerShdw blurRad="63500" dist="38099" dir="2700000" algn="ctr" rotWithShape="0">
                     <a:srgbClr val="000000">
@@ -24036,14 +24036,14 @@
           <a:effectLst/>
           <a:extLst>
             <a:ext uri="{909E8E84-426E-40dd-AFC4-6F175D3DCCD1}">
-              <a14:hiddenFill xmlns:a14="http://schemas.microsoft.com/office/drawing/2010/main" xmlns="">
+              <a14:hiddenFill xmlns="" xmlns:a14="http://schemas.microsoft.com/office/drawing/2010/main">
                 <a:solidFill>
                   <a:srgbClr val="FFFFFF"/>
                 </a:solidFill>
               </a14:hiddenFill>
             </a:ext>
             <a:ext uri="{91240B29-F687-4f45-9708-019B960494DF}">
-              <a14:hiddenLine xmlns:a14="http://schemas.microsoft.com/office/drawing/2010/main" xmlns="" w="9525" cap="flat">
+              <a14:hiddenLine xmlns="" xmlns:a14="http://schemas.microsoft.com/office/drawing/2010/main" w="9525" cap="flat">
                 <a:solidFill>
                   <a:srgbClr val="000000"/>
                 </a:solidFill>
@@ -24053,7 +24053,7 @@
               </a14:hiddenLine>
             </a:ext>
             <a:ext uri="{AF507438-7753-43e0-B8FC-AC1667EBCBE1}">
-              <a14:hiddenEffects xmlns:a14="http://schemas.microsoft.com/office/drawing/2010/main" xmlns="">
+              <a14:hiddenEffects xmlns="" xmlns:a14="http://schemas.microsoft.com/office/drawing/2010/main">
                 <a:effectLst>
                   <a:outerShdw blurRad="63500" dist="38099" dir="2700000" algn="ctr" rotWithShape="0">
                     <a:srgbClr val="000000">
@@ -24110,7 +24110,7 @@
           <a:effectLst/>
           <a:extLst>
             <a:ext uri="{AF507438-7753-43e0-B8FC-AC1667EBCBE1}">
-              <a14:hiddenEffects xmlns:a14="http://schemas.microsoft.com/office/drawing/2010/main" xmlns="">
+              <a14:hiddenEffects xmlns="" xmlns:a14="http://schemas.microsoft.com/office/drawing/2010/main">
                 <a:effectLst>
                   <a:outerShdw blurRad="63500" dist="38099" dir="2700000" algn="ctr" rotWithShape="0">
                     <a:srgbClr val="000000">
@@ -24153,14 +24153,14 @@
           <a:effectLst/>
           <a:extLst>
             <a:ext uri="{909E8E84-426E-40dd-AFC4-6F175D3DCCD1}">
-              <a14:hiddenFill xmlns:a14="http://schemas.microsoft.com/office/drawing/2010/main" xmlns="">
+              <a14:hiddenFill xmlns="" xmlns:a14="http://schemas.microsoft.com/office/drawing/2010/main">
                 <a:solidFill>
                   <a:srgbClr val="FFFFFF"/>
                 </a:solidFill>
               </a14:hiddenFill>
             </a:ext>
             <a:ext uri="{91240B29-F687-4f45-9708-019B960494DF}">
-              <a14:hiddenLine xmlns:a14="http://schemas.microsoft.com/office/drawing/2010/main" xmlns="" w="9525" cap="flat">
+              <a14:hiddenLine xmlns="" xmlns:a14="http://schemas.microsoft.com/office/drawing/2010/main" w="9525" cap="flat">
                 <a:solidFill>
                   <a:srgbClr val="000000"/>
                 </a:solidFill>
@@ -24170,7 +24170,7 @@
               </a14:hiddenLine>
             </a:ext>
             <a:ext uri="{AF507438-7753-43e0-B8FC-AC1667EBCBE1}">
-              <a14:hiddenEffects xmlns:a14="http://schemas.microsoft.com/office/drawing/2010/main" xmlns="">
+              <a14:hiddenEffects xmlns="" xmlns:a14="http://schemas.microsoft.com/office/drawing/2010/main">
                 <a:effectLst>
                   <a:outerShdw blurRad="63500" dist="38099" dir="2700000" algn="ctr" rotWithShape="0">
                     <a:srgbClr val="000000">
@@ -24229,7 +24229,7 @@
           <a:effectLst/>
           <a:extLst>
             <a:ext uri="{AF507438-7753-43e0-B8FC-AC1667EBCBE1}">
-              <a14:hiddenEffects xmlns:a14="http://schemas.microsoft.com/office/drawing/2010/main" xmlns="">
+              <a14:hiddenEffects xmlns="" xmlns:a14="http://schemas.microsoft.com/office/drawing/2010/main">
                 <a:effectLst>
                   <a:outerShdw blurRad="63500" dist="38099" dir="2700000" algn="ctr" rotWithShape="0">
                     <a:srgbClr val="000000">
@@ -24281,7 +24281,7 @@
           <a:effectLst/>
           <a:extLst>
             <a:ext uri="{AF507438-7753-43e0-B8FC-AC1667EBCBE1}">
-              <a14:hiddenEffects xmlns:a14="http://schemas.microsoft.com/office/drawing/2010/main" xmlns="">
+              <a14:hiddenEffects xmlns="" xmlns:a14="http://schemas.microsoft.com/office/drawing/2010/main">
                 <a:effectLst>
                   <a:outerShdw blurRad="63500" dist="38099" dir="2700000" algn="ctr" rotWithShape="0">
                     <a:srgbClr val="000000">
@@ -24331,14 +24331,14 @@
           <a:effectLst/>
           <a:extLst>
             <a:ext uri="{909E8E84-426E-40dd-AFC4-6F175D3DCCD1}">
-              <a14:hiddenFill xmlns:a14="http://schemas.microsoft.com/office/drawing/2010/main" xmlns="">
+              <a14:hiddenFill xmlns="" xmlns:a14="http://schemas.microsoft.com/office/drawing/2010/main">
                 <a:solidFill>
                   <a:srgbClr val="FFFFFF"/>
                 </a:solidFill>
               </a14:hiddenFill>
             </a:ext>
             <a:ext uri="{AF507438-7753-43e0-B8FC-AC1667EBCBE1}">
-              <a14:hiddenEffects xmlns:a14="http://schemas.microsoft.com/office/drawing/2010/main" xmlns="">
+              <a14:hiddenEffects xmlns="" xmlns:a14="http://schemas.microsoft.com/office/drawing/2010/main">
                 <a:effectLst>
                   <a:outerShdw blurRad="63500" dist="38099" dir="2700000" algn="ctr" rotWithShape="0">
                     <a:srgbClr val="000000">
@@ -24390,7 +24390,7 @@
           <a:effectLst/>
           <a:extLst>
             <a:ext uri="{AF507438-7753-43e0-B8FC-AC1667EBCBE1}">
-              <a14:hiddenEffects xmlns:a14="http://schemas.microsoft.com/office/drawing/2010/main" xmlns="">
+              <a14:hiddenEffects xmlns="" xmlns:a14="http://schemas.microsoft.com/office/drawing/2010/main">
                 <a:effectLst>
                   <a:outerShdw blurRad="63500" dist="38099" dir="2700000" algn="ctr" rotWithShape="0">
                     <a:srgbClr val="000000">
@@ -24433,14 +24433,14 @@
           <a:effectLst/>
           <a:extLst>
             <a:ext uri="{909E8E84-426E-40dd-AFC4-6F175D3DCCD1}">
-              <a14:hiddenFill xmlns:a14="http://schemas.microsoft.com/office/drawing/2010/main" xmlns="">
+              <a14:hiddenFill xmlns="" xmlns:a14="http://schemas.microsoft.com/office/drawing/2010/main">
                 <a:solidFill>
                   <a:srgbClr val="FFFFFF"/>
                 </a:solidFill>
               </a14:hiddenFill>
             </a:ext>
             <a:ext uri="{91240B29-F687-4f45-9708-019B960494DF}">
-              <a14:hiddenLine xmlns:a14="http://schemas.microsoft.com/office/drawing/2010/main" xmlns="" w="9525" cap="flat">
+              <a14:hiddenLine xmlns="" xmlns:a14="http://schemas.microsoft.com/office/drawing/2010/main" w="9525" cap="flat">
                 <a:solidFill>
                   <a:srgbClr val="000000"/>
                 </a:solidFill>
@@ -24450,7 +24450,7 @@
               </a14:hiddenLine>
             </a:ext>
             <a:ext uri="{AF507438-7753-43e0-B8FC-AC1667EBCBE1}">
-              <a14:hiddenEffects xmlns:a14="http://schemas.microsoft.com/office/drawing/2010/main" xmlns="">
+              <a14:hiddenEffects xmlns="" xmlns:a14="http://schemas.microsoft.com/office/drawing/2010/main">
                 <a:effectLst>
                   <a:outerShdw blurRad="63500" dist="38099" dir="2700000" algn="ctr" rotWithShape="0">
                     <a:srgbClr val="000000">
@@ -24679,7 +24679,7 @@
           <a:effectLst/>
           <a:extLst>
             <a:ext uri="{AF507438-7753-43e0-B8FC-AC1667EBCBE1}">
-              <a14:hiddenEffects xmlns:a14="http://schemas.microsoft.com/office/drawing/2010/main" xmlns="">
+              <a14:hiddenEffects xmlns="" xmlns:a14="http://schemas.microsoft.com/office/drawing/2010/main">
                 <a:effectLst>
                   <a:outerShdw blurRad="63500" dist="38099" dir="2700000" algn="ctr" rotWithShape="0">
                     <a:srgbClr val="000000">
@@ -24722,14 +24722,14 @@
           <a:effectLst/>
           <a:extLst>
             <a:ext uri="{909E8E84-426E-40dd-AFC4-6F175D3DCCD1}">
-              <a14:hiddenFill xmlns:a14="http://schemas.microsoft.com/office/drawing/2010/main" xmlns="">
+              <a14:hiddenFill xmlns="" xmlns:a14="http://schemas.microsoft.com/office/drawing/2010/main">
                 <a:solidFill>
                   <a:srgbClr val="FFFFFF"/>
                 </a:solidFill>
               </a14:hiddenFill>
             </a:ext>
             <a:ext uri="{91240B29-F687-4f45-9708-019B960494DF}">
-              <a14:hiddenLine xmlns:a14="http://schemas.microsoft.com/office/drawing/2010/main" xmlns="" w="9525" cap="flat">
+              <a14:hiddenLine xmlns="" xmlns:a14="http://schemas.microsoft.com/office/drawing/2010/main" w="9525" cap="flat">
                 <a:solidFill>
                   <a:srgbClr val="000000"/>
                 </a:solidFill>
@@ -24739,7 +24739,7 @@
               </a14:hiddenLine>
             </a:ext>
             <a:ext uri="{AF507438-7753-43e0-B8FC-AC1667EBCBE1}">
-              <a14:hiddenEffects xmlns:a14="http://schemas.microsoft.com/office/drawing/2010/main" xmlns="">
+              <a14:hiddenEffects xmlns="" xmlns:a14="http://schemas.microsoft.com/office/drawing/2010/main">
                 <a:effectLst>
                   <a:outerShdw blurRad="63500" dist="38099" dir="2700000" algn="ctr" rotWithShape="0">
                     <a:srgbClr val="000000">
@@ -24973,12 +24973,12 @@
           <a:effectLst/>
           <a:extLst>
             <a:ext uri="{909E8E84-426E-40dd-AFC4-6F175D3DCCD1}">
-              <a14:hiddenFill xmlns:a14="http://schemas.microsoft.com/office/drawing/2010/main" xmlns="">
+              <a14:hiddenFill xmlns="" xmlns:a14="http://schemas.microsoft.com/office/drawing/2010/main">
                 <a:noFill/>
               </a14:hiddenFill>
             </a:ext>
             <a:ext uri="{AF507438-7753-43e0-B8FC-AC1667EBCBE1}">
-              <a14:hiddenEffects xmlns:a14="http://schemas.microsoft.com/office/drawing/2010/main" xmlns="">
+              <a14:hiddenEffects xmlns="" xmlns:a14="http://schemas.microsoft.com/office/drawing/2010/main">
                 <a:effectLst>
                   <a:outerShdw blurRad="63500" dist="38099" dir="2700000" algn="ctr" rotWithShape="0">
                     <a:srgbClr val="000000">
@@ -25021,14 +25021,14 @@
           <a:effectLst/>
           <a:extLst>
             <a:ext uri="{909E8E84-426E-40dd-AFC4-6F175D3DCCD1}">
-              <a14:hiddenFill xmlns:a14="http://schemas.microsoft.com/office/drawing/2010/main" xmlns="">
+              <a14:hiddenFill xmlns="" xmlns:a14="http://schemas.microsoft.com/office/drawing/2010/main">
                 <a:solidFill>
                   <a:srgbClr val="FFFFFF"/>
                 </a:solidFill>
               </a14:hiddenFill>
             </a:ext>
             <a:ext uri="{91240B29-F687-4f45-9708-019B960494DF}">
-              <a14:hiddenLine xmlns:a14="http://schemas.microsoft.com/office/drawing/2010/main" xmlns="" w="9525" cap="flat">
+              <a14:hiddenLine xmlns="" xmlns:a14="http://schemas.microsoft.com/office/drawing/2010/main" w="9525" cap="flat">
                 <a:solidFill>
                   <a:srgbClr val="000000"/>
                 </a:solidFill>
@@ -25038,7 +25038,7 @@
               </a14:hiddenLine>
             </a:ext>
             <a:ext uri="{AF507438-7753-43e0-B8FC-AC1667EBCBE1}">
-              <a14:hiddenEffects xmlns:a14="http://schemas.microsoft.com/office/drawing/2010/main" xmlns="">
+              <a14:hiddenEffects xmlns="" xmlns:a14="http://schemas.microsoft.com/office/drawing/2010/main">
                 <a:effectLst>
                   <a:outerShdw blurRad="63500" dist="38099" dir="2700000" algn="ctr" rotWithShape="0">
                     <a:srgbClr val="000000">
@@ -25266,7 +25266,7 @@
           <a:effectLst/>
           <a:extLst>
             <a:ext uri="{AF507438-7753-43e0-B8FC-AC1667EBCBE1}">
-              <a14:hiddenEffects xmlns:a14="http://schemas.microsoft.com/office/drawing/2010/main" xmlns="">
+              <a14:hiddenEffects xmlns="" xmlns:a14="http://schemas.microsoft.com/office/drawing/2010/main">
                 <a:effectLst>
                   <a:outerShdw blurRad="63500" dist="38099" dir="2700000" algn="ctr" rotWithShape="0">
                     <a:srgbClr val="000000">
@@ -25318,7 +25318,7 @@
           <a:effectLst/>
           <a:extLst>
             <a:ext uri="{AF507438-7753-43e0-B8FC-AC1667EBCBE1}">
-              <a14:hiddenEffects xmlns:a14="http://schemas.microsoft.com/office/drawing/2010/main" xmlns="">
+              <a14:hiddenEffects xmlns="" xmlns:a14="http://schemas.microsoft.com/office/drawing/2010/main">
                 <a:effectLst>
                   <a:outerShdw blurRad="63500" dist="38099" dir="2700000" algn="ctr" rotWithShape="0">
                     <a:srgbClr val="000000">
@@ -25370,7 +25370,7 @@
           <a:effectLst/>
           <a:extLst>
             <a:ext uri="{AF507438-7753-43e0-B8FC-AC1667EBCBE1}">
-              <a14:hiddenEffects xmlns:a14="http://schemas.microsoft.com/office/drawing/2010/main" xmlns="">
+              <a14:hiddenEffects xmlns="" xmlns:a14="http://schemas.microsoft.com/office/drawing/2010/main">
                 <a:effectLst>
                   <a:outerShdw blurRad="63500" dist="38099" dir="2700000" algn="ctr" rotWithShape="0">
                     <a:srgbClr val="000000">
@@ -25413,14 +25413,14 @@
           <a:effectLst/>
           <a:extLst>
             <a:ext uri="{909E8E84-426E-40dd-AFC4-6F175D3DCCD1}">
-              <a14:hiddenFill xmlns:a14="http://schemas.microsoft.com/office/drawing/2010/main" xmlns="">
+              <a14:hiddenFill xmlns="" xmlns:a14="http://schemas.microsoft.com/office/drawing/2010/main">
                 <a:solidFill>
                   <a:srgbClr val="FFFFFF"/>
                 </a:solidFill>
               </a14:hiddenFill>
             </a:ext>
             <a:ext uri="{91240B29-F687-4f45-9708-019B960494DF}">
-              <a14:hiddenLine xmlns:a14="http://schemas.microsoft.com/office/drawing/2010/main" xmlns="" w="9525" cap="flat">
+              <a14:hiddenLine xmlns="" xmlns:a14="http://schemas.microsoft.com/office/drawing/2010/main" w="9525" cap="flat">
                 <a:solidFill>
                   <a:srgbClr val="000000"/>
                 </a:solidFill>
@@ -25430,7 +25430,7 @@
               </a14:hiddenLine>
             </a:ext>
             <a:ext uri="{AF507438-7753-43e0-B8FC-AC1667EBCBE1}">
-              <a14:hiddenEffects xmlns:a14="http://schemas.microsoft.com/office/drawing/2010/main" xmlns="">
+              <a14:hiddenEffects xmlns="" xmlns:a14="http://schemas.microsoft.com/office/drawing/2010/main">
                 <a:effectLst>
                   <a:outerShdw blurRad="63500" dist="38099" dir="2700000" algn="ctr" rotWithShape="0">
                     <a:srgbClr val="000000">
@@ -25480,14 +25480,14 @@
           <a:effectLst/>
           <a:extLst>
             <a:ext uri="{909E8E84-426E-40dd-AFC4-6F175D3DCCD1}">
-              <a14:hiddenFill xmlns:a14="http://schemas.microsoft.com/office/drawing/2010/main" xmlns="">
+              <a14:hiddenFill xmlns="" xmlns:a14="http://schemas.microsoft.com/office/drawing/2010/main">
                 <a:solidFill>
                   <a:srgbClr val="FFFFFF"/>
                 </a:solidFill>
               </a14:hiddenFill>
             </a:ext>
             <a:ext uri="{91240B29-F687-4f45-9708-019B960494DF}">
-              <a14:hiddenLine xmlns:a14="http://schemas.microsoft.com/office/drawing/2010/main" xmlns="" w="9525" cap="flat">
+              <a14:hiddenLine xmlns="" xmlns:a14="http://schemas.microsoft.com/office/drawing/2010/main" w="9525" cap="flat">
                 <a:solidFill>
                   <a:srgbClr val="000000"/>
                 </a:solidFill>
@@ -25497,7 +25497,7 @@
               </a14:hiddenLine>
             </a:ext>
             <a:ext uri="{AF507438-7753-43e0-B8FC-AC1667EBCBE1}">
-              <a14:hiddenEffects xmlns:a14="http://schemas.microsoft.com/office/drawing/2010/main" xmlns="">
+              <a14:hiddenEffects xmlns="" xmlns:a14="http://schemas.microsoft.com/office/drawing/2010/main">
                 <a:effectLst>
                   <a:outerShdw blurRad="63500" dist="38099" dir="2700000" algn="ctr" rotWithShape="0">
                     <a:srgbClr val="000000">
@@ -25552,12 +25552,12 @@
           <a:effectLst/>
           <a:extLst>
             <a:ext uri="{909E8E84-426E-40dd-AFC4-6F175D3DCCD1}">
-              <a14:hiddenFill xmlns:a14="http://schemas.microsoft.com/office/drawing/2010/main" xmlns="">
+              <a14:hiddenFill xmlns="" xmlns:a14="http://schemas.microsoft.com/office/drawing/2010/main">
                 <a:noFill/>
               </a14:hiddenFill>
             </a:ext>
             <a:ext uri="{AF507438-7753-43e0-B8FC-AC1667EBCBE1}">
-              <a14:hiddenEffects xmlns:a14="http://schemas.microsoft.com/office/drawing/2010/main" xmlns="">
+              <a14:hiddenEffects xmlns="" xmlns:a14="http://schemas.microsoft.com/office/drawing/2010/main">
                 <a:effectLst>
                   <a:outerShdw blurRad="63500" dist="38099" dir="2700000" algn="ctr" rotWithShape="0">
                     <a:srgbClr val="000000">
@@ -25600,14 +25600,14 @@
           <a:effectLst/>
           <a:extLst>
             <a:ext uri="{909E8E84-426E-40dd-AFC4-6F175D3DCCD1}">
-              <a14:hiddenFill xmlns:a14="http://schemas.microsoft.com/office/drawing/2010/main" xmlns="">
+              <a14:hiddenFill xmlns="" xmlns:a14="http://schemas.microsoft.com/office/drawing/2010/main">
                 <a:solidFill>
                   <a:srgbClr val="FFFFFF"/>
                 </a:solidFill>
               </a14:hiddenFill>
             </a:ext>
             <a:ext uri="{91240B29-F687-4f45-9708-019B960494DF}">
-              <a14:hiddenLine xmlns:a14="http://schemas.microsoft.com/office/drawing/2010/main" xmlns="" w="9525" cap="flat">
+              <a14:hiddenLine xmlns="" xmlns:a14="http://schemas.microsoft.com/office/drawing/2010/main" w="9525" cap="flat">
                 <a:solidFill>
                   <a:srgbClr val="000000"/>
                 </a:solidFill>
@@ -25617,7 +25617,7 @@
               </a14:hiddenLine>
             </a:ext>
             <a:ext uri="{AF507438-7753-43e0-B8FC-AC1667EBCBE1}">
-              <a14:hiddenEffects xmlns:a14="http://schemas.microsoft.com/office/drawing/2010/main" xmlns="">
+              <a14:hiddenEffects xmlns="" xmlns:a14="http://schemas.microsoft.com/office/drawing/2010/main">
                 <a:effectLst>
                   <a:outerShdw blurRad="63500" dist="38099" dir="2700000" algn="ctr" rotWithShape="0">
                     <a:srgbClr val="000000">
@@ -25676,7 +25676,7 @@
           <a:effectLst/>
           <a:extLst>
             <a:ext uri="{AF507438-7753-43e0-B8FC-AC1667EBCBE1}">
-              <a14:hiddenEffects xmlns:a14="http://schemas.microsoft.com/office/drawing/2010/main" xmlns="">
+              <a14:hiddenEffects xmlns="" xmlns:a14="http://schemas.microsoft.com/office/drawing/2010/main">
                 <a:effectLst>
                   <a:outerShdw blurRad="63500" dist="38099" dir="2700000" algn="ctr" rotWithShape="0">
                     <a:srgbClr val="000000">
@@ -25719,14 +25719,14 @@
           <a:effectLst/>
           <a:extLst>
             <a:ext uri="{909E8E84-426E-40dd-AFC4-6F175D3DCCD1}">
-              <a14:hiddenFill xmlns:a14="http://schemas.microsoft.com/office/drawing/2010/main" xmlns="">
+              <a14:hiddenFill xmlns="" xmlns:a14="http://schemas.microsoft.com/office/drawing/2010/main">
                 <a:solidFill>
                   <a:srgbClr val="FFFFFF"/>
                 </a:solidFill>
               </a14:hiddenFill>
             </a:ext>
             <a:ext uri="{91240B29-F687-4f45-9708-019B960494DF}">
-              <a14:hiddenLine xmlns:a14="http://schemas.microsoft.com/office/drawing/2010/main" xmlns="" w="9525" cap="flat">
+              <a14:hiddenLine xmlns="" xmlns:a14="http://schemas.microsoft.com/office/drawing/2010/main" w="9525" cap="flat">
                 <a:solidFill>
                   <a:srgbClr val="000000"/>
                 </a:solidFill>
@@ -25736,7 +25736,7 @@
               </a14:hiddenLine>
             </a:ext>
             <a:ext uri="{AF507438-7753-43e0-B8FC-AC1667EBCBE1}">
-              <a14:hiddenEffects xmlns:a14="http://schemas.microsoft.com/office/drawing/2010/main" xmlns="">
+              <a14:hiddenEffects xmlns="" xmlns:a14="http://schemas.microsoft.com/office/drawing/2010/main">
                 <a:effectLst>
                   <a:outerShdw blurRad="63500" dist="38099" dir="2700000" algn="ctr" rotWithShape="0">
                     <a:srgbClr val="000000">
@@ -25972,7 +25972,7 @@
           <a:effectLst/>
           <a:extLst>
             <a:ext uri="{AF507438-7753-43e0-B8FC-AC1667EBCBE1}">
-              <a14:hiddenEffects xmlns:a14="http://schemas.microsoft.com/office/drawing/2010/main" xmlns="">
+              <a14:hiddenEffects xmlns="" xmlns:a14="http://schemas.microsoft.com/office/drawing/2010/main">
                 <a:effectLst>
                   <a:outerShdw blurRad="63500" dist="38099" dir="2700000" algn="ctr" rotWithShape="0">
                     <a:srgbClr val="000000">
@@ -26020,12 +26020,12 @@
           <a:effectLst/>
           <a:extLst>
             <a:ext uri="{909E8E84-426E-40dd-AFC4-6F175D3DCCD1}">
-              <a14:hiddenFill xmlns:a14="http://schemas.microsoft.com/office/drawing/2010/main" xmlns="">
+              <a14:hiddenFill xmlns="" xmlns:a14="http://schemas.microsoft.com/office/drawing/2010/main">
                 <a:noFill/>
               </a14:hiddenFill>
             </a:ext>
             <a:ext uri="{AF507438-7753-43e0-B8FC-AC1667EBCBE1}">
-              <a14:hiddenEffects xmlns:a14="http://schemas.microsoft.com/office/drawing/2010/main" xmlns="">
+              <a14:hiddenEffects xmlns="" xmlns:a14="http://schemas.microsoft.com/office/drawing/2010/main">
                 <a:effectLst>
                   <a:outerShdw blurRad="63500" dist="38099" dir="2700000" algn="ctr" rotWithShape="0">
                     <a:srgbClr val="000000">
@@ -26077,7 +26077,7 @@
           <a:effectLst/>
           <a:extLst>
             <a:ext uri="{AF507438-7753-43e0-B8FC-AC1667EBCBE1}">
-              <a14:hiddenEffects xmlns:a14="http://schemas.microsoft.com/office/drawing/2010/main" xmlns="">
+              <a14:hiddenEffects xmlns="" xmlns:a14="http://schemas.microsoft.com/office/drawing/2010/main">
                 <a:effectLst>
                   <a:outerShdw blurRad="63500" dist="38099" dir="2700000" algn="ctr" rotWithShape="0">
                     <a:srgbClr val="000000">
@@ -26129,7 +26129,7 @@
           <a:effectLst/>
           <a:extLst>
             <a:ext uri="{AF507438-7753-43e0-B8FC-AC1667EBCBE1}">
-              <a14:hiddenEffects xmlns:a14="http://schemas.microsoft.com/office/drawing/2010/main" xmlns="">
+              <a14:hiddenEffects xmlns="" xmlns:a14="http://schemas.microsoft.com/office/drawing/2010/main">
                 <a:effectLst>
                   <a:outerShdw blurRad="63500" dist="38099" dir="2700000" algn="ctr" rotWithShape="0">
                     <a:srgbClr val="000000">
@@ -26177,12 +26177,12 @@
           <a:effectLst/>
           <a:extLst>
             <a:ext uri="{909E8E84-426E-40dd-AFC4-6F175D3DCCD1}">
-              <a14:hiddenFill xmlns:a14="http://schemas.microsoft.com/office/drawing/2010/main" xmlns="">
+              <a14:hiddenFill xmlns="" xmlns:a14="http://schemas.microsoft.com/office/drawing/2010/main">
                 <a:noFill/>
               </a14:hiddenFill>
             </a:ext>
             <a:ext uri="{AF507438-7753-43e0-B8FC-AC1667EBCBE1}">
-              <a14:hiddenEffects xmlns:a14="http://schemas.microsoft.com/office/drawing/2010/main" xmlns="">
+              <a14:hiddenEffects xmlns="" xmlns:a14="http://schemas.microsoft.com/office/drawing/2010/main">
                 <a:effectLst>
                   <a:outerShdw blurRad="63500" dist="38099" dir="2700000" algn="ctr" rotWithShape="0">
                     <a:srgbClr val="000000">
@@ -26232,7 +26232,7 @@
           <a:effectLst/>
           <a:extLst>
             <a:ext uri="{AF507438-7753-43e0-B8FC-AC1667EBCBE1}">
-              <a14:hiddenEffects xmlns:a14="http://schemas.microsoft.com/office/drawing/2010/main" xmlns="">
+              <a14:hiddenEffects xmlns="" xmlns:a14="http://schemas.microsoft.com/office/drawing/2010/main">
                 <a:effectLst>
                   <a:outerShdw blurRad="63500" dist="38099" dir="2700000" algn="ctr" rotWithShape="0">
                     <a:srgbClr val="000000">
@@ -26282,7 +26282,7 @@
           <a:effectLst/>
           <a:extLst>
             <a:ext uri="{AF507438-7753-43e0-B8FC-AC1667EBCBE1}">
-              <a14:hiddenEffects xmlns:a14="http://schemas.microsoft.com/office/drawing/2010/main" xmlns="">
+              <a14:hiddenEffects xmlns="" xmlns:a14="http://schemas.microsoft.com/office/drawing/2010/main">
                 <a:effectLst>
                   <a:outerShdw blurRad="63500" dist="38099" dir="2700000" algn="ctr" rotWithShape="0">
                     <a:srgbClr val="000000">
@@ -26325,14 +26325,14 @@
           <a:effectLst/>
           <a:extLst>
             <a:ext uri="{909E8E84-426E-40dd-AFC4-6F175D3DCCD1}">
-              <a14:hiddenFill xmlns:a14="http://schemas.microsoft.com/office/drawing/2010/main" xmlns="">
+              <a14:hiddenFill xmlns="" xmlns:a14="http://schemas.microsoft.com/office/drawing/2010/main">
                 <a:solidFill>
                   <a:srgbClr val="FFFFFF"/>
                 </a:solidFill>
               </a14:hiddenFill>
             </a:ext>
             <a:ext uri="{91240B29-F687-4f45-9708-019B960494DF}">
-              <a14:hiddenLine xmlns:a14="http://schemas.microsoft.com/office/drawing/2010/main" xmlns="" w="9525" cap="flat">
+              <a14:hiddenLine xmlns="" xmlns:a14="http://schemas.microsoft.com/office/drawing/2010/main" w="9525" cap="flat">
                 <a:solidFill>
                   <a:srgbClr val="000000"/>
                 </a:solidFill>
@@ -26342,7 +26342,7 @@
               </a14:hiddenLine>
             </a:ext>
             <a:ext uri="{AF507438-7753-43e0-B8FC-AC1667EBCBE1}">
-              <a14:hiddenEffects xmlns:a14="http://schemas.microsoft.com/office/drawing/2010/main" xmlns="">
+              <a14:hiddenEffects xmlns="" xmlns:a14="http://schemas.microsoft.com/office/drawing/2010/main">
                 <a:effectLst>
                   <a:outerShdw blurRad="63500" dist="38099" dir="2700000" algn="ctr" rotWithShape="0">
                     <a:srgbClr val="000000">
@@ -26392,14 +26392,14 @@
           <a:effectLst/>
           <a:extLst>
             <a:ext uri="{909E8E84-426E-40dd-AFC4-6F175D3DCCD1}">
-              <a14:hiddenFill xmlns:a14="http://schemas.microsoft.com/office/drawing/2010/main" xmlns="">
+              <a14:hiddenFill xmlns="" xmlns:a14="http://schemas.microsoft.com/office/drawing/2010/main">
                 <a:solidFill>
                   <a:srgbClr val="FFFFFF"/>
                 </a:solidFill>
               </a14:hiddenFill>
             </a:ext>
             <a:ext uri="{91240B29-F687-4f45-9708-019B960494DF}">
-              <a14:hiddenLine xmlns:a14="http://schemas.microsoft.com/office/drawing/2010/main" xmlns="" w="9525" cap="flat">
+              <a14:hiddenLine xmlns="" xmlns:a14="http://schemas.microsoft.com/office/drawing/2010/main" w="9525" cap="flat">
                 <a:solidFill>
                   <a:srgbClr val="000000"/>
                 </a:solidFill>
@@ -26409,7 +26409,7 @@
               </a14:hiddenLine>
             </a:ext>
             <a:ext uri="{AF507438-7753-43e0-B8FC-AC1667EBCBE1}">
-              <a14:hiddenEffects xmlns:a14="http://schemas.microsoft.com/office/drawing/2010/main" xmlns="">
+              <a14:hiddenEffects xmlns="" xmlns:a14="http://schemas.microsoft.com/office/drawing/2010/main">
                 <a:effectLst>
                   <a:outerShdw blurRad="63500" dist="38099" dir="2700000" algn="ctr" rotWithShape="0">
                     <a:srgbClr val="000000">
@@ -26459,14 +26459,14 @@
           <a:effectLst/>
           <a:extLst>
             <a:ext uri="{909E8E84-426E-40dd-AFC4-6F175D3DCCD1}">
-              <a14:hiddenFill xmlns:a14="http://schemas.microsoft.com/office/drawing/2010/main" xmlns="">
+              <a14:hiddenFill xmlns="" xmlns:a14="http://schemas.microsoft.com/office/drawing/2010/main">
                 <a:solidFill>
                   <a:srgbClr val="FFFFFF"/>
                 </a:solidFill>
               </a14:hiddenFill>
             </a:ext>
             <a:ext uri="{91240B29-F687-4f45-9708-019B960494DF}">
-              <a14:hiddenLine xmlns:a14="http://schemas.microsoft.com/office/drawing/2010/main" xmlns="" w="9525" cap="flat">
+              <a14:hiddenLine xmlns="" xmlns:a14="http://schemas.microsoft.com/office/drawing/2010/main" w="9525" cap="flat">
                 <a:solidFill>
                   <a:srgbClr val="000000"/>
                 </a:solidFill>
@@ -26476,7 +26476,7 @@
               </a14:hiddenLine>
             </a:ext>
             <a:ext uri="{AF507438-7753-43e0-B8FC-AC1667EBCBE1}">
-              <a14:hiddenEffects xmlns:a14="http://schemas.microsoft.com/office/drawing/2010/main" xmlns="">
+              <a14:hiddenEffects xmlns="" xmlns:a14="http://schemas.microsoft.com/office/drawing/2010/main">
                 <a:effectLst>
                   <a:outerShdw blurRad="63500" dist="38099" dir="2700000" algn="ctr" rotWithShape="0">
                     <a:srgbClr val="000000">
@@ -26526,14 +26526,14 @@
           <a:effectLst/>
           <a:extLst>
             <a:ext uri="{909E8E84-426E-40dd-AFC4-6F175D3DCCD1}">
-              <a14:hiddenFill xmlns:a14="http://schemas.microsoft.com/office/drawing/2010/main" xmlns="">
+              <a14:hiddenFill xmlns="" xmlns:a14="http://schemas.microsoft.com/office/drawing/2010/main">
                 <a:solidFill>
                   <a:srgbClr val="FFFFFF"/>
                 </a:solidFill>
               </a14:hiddenFill>
             </a:ext>
             <a:ext uri="{91240B29-F687-4f45-9708-019B960494DF}">
-              <a14:hiddenLine xmlns:a14="http://schemas.microsoft.com/office/drawing/2010/main" xmlns="" w="9525" cap="flat">
+              <a14:hiddenLine xmlns="" xmlns:a14="http://schemas.microsoft.com/office/drawing/2010/main" w="9525" cap="flat">
                 <a:solidFill>
                   <a:srgbClr val="000000"/>
                 </a:solidFill>
@@ -26543,7 +26543,7 @@
               </a14:hiddenLine>
             </a:ext>
             <a:ext uri="{AF507438-7753-43e0-B8FC-AC1667EBCBE1}">
-              <a14:hiddenEffects xmlns:a14="http://schemas.microsoft.com/office/drawing/2010/main" xmlns="">
+              <a14:hiddenEffects xmlns="" xmlns:a14="http://schemas.microsoft.com/office/drawing/2010/main">
                 <a:effectLst>
                   <a:outerShdw blurRad="63500" dist="38099" dir="2700000" algn="ctr" rotWithShape="0">
                     <a:srgbClr val="000000">
@@ -26593,14 +26593,14 @@
           <a:effectLst/>
           <a:extLst>
             <a:ext uri="{909E8E84-426E-40dd-AFC4-6F175D3DCCD1}">
-              <a14:hiddenFill xmlns:a14="http://schemas.microsoft.com/office/drawing/2010/main" xmlns="">
+              <a14:hiddenFill xmlns="" xmlns:a14="http://schemas.microsoft.com/office/drawing/2010/main">
                 <a:solidFill>
                   <a:srgbClr val="FFFFFF"/>
                 </a:solidFill>
               </a14:hiddenFill>
             </a:ext>
             <a:ext uri="{91240B29-F687-4f45-9708-019B960494DF}">
-              <a14:hiddenLine xmlns:a14="http://schemas.microsoft.com/office/drawing/2010/main" xmlns="" w="9525" cap="flat">
+              <a14:hiddenLine xmlns="" xmlns:a14="http://schemas.microsoft.com/office/drawing/2010/main" w="9525" cap="flat">
                 <a:solidFill>
                   <a:srgbClr val="000000"/>
                 </a:solidFill>
@@ -26610,7 +26610,7 @@
               </a14:hiddenLine>
             </a:ext>
             <a:ext uri="{AF507438-7753-43e0-B8FC-AC1667EBCBE1}">
-              <a14:hiddenEffects xmlns:a14="http://schemas.microsoft.com/office/drawing/2010/main" xmlns="">
+              <a14:hiddenEffects xmlns="" xmlns:a14="http://schemas.microsoft.com/office/drawing/2010/main">
                 <a:effectLst>
                   <a:outerShdw blurRad="63500" dist="38099" dir="2700000" algn="ctr" rotWithShape="0">
                     <a:srgbClr val="000000">
@@ -26660,14 +26660,14 @@
           <a:effectLst/>
           <a:extLst>
             <a:ext uri="{909E8E84-426E-40dd-AFC4-6F175D3DCCD1}">
-              <a14:hiddenFill xmlns:a14="http://schemas.microsoft.com/office/drawing/2010/main" xmlns="">
+              <a14:hiddenFill xmlns="" xmlns:a14="http://schemas.microsoft.com/office/drawing/2010/main">
                 <a:solidFill>
                   <a:srgbClr val="FFFFFF"/>
                 </a:solidFill>
               </a14:hiddenFill>
             </a:ext>
             <a:ext uri="{91240B29-F687-4f45-9708-019B960494DF}">
-              <a14:hiddenLine xmlns:a14="http://schemas.microsoft.com/office/drawing/2010/main" xmlns="" w="9525" cap="flat">
+              <a14:hiddenLine xmlns="" xmlns:a14="http://schemas.microsoft.com/office/drawing/2010/main" w="9525" cap="flat">
                 <a:solidFill>
                   <a:srgbClr val="000000"/>
                 </a:solidFill>
@@ -26677,7 +26677,7 @@
               </a14:hiddenLine>
             </a:ext>
             <a:ext uri="{AF507438-7753-43e0-B8FC-AC1667EBCBE1}">
-              <a14:hiddenEffects xmlns:a14="http://schemas.microsoft.com/office/drawing/2010/main" xmlns="">
+              <a14:hiddenEffects xmlns="" xmlns:a14="http://schemas.microsoft.com/office/drawing/2010/main">
                 <a:effectLst>
                   <a:outerShdw blurRad="63500" dist="38099" dir="2700000" algn="ctr" rotWithShape="0">
                     <a:srgbClr val="000000">
@@ -26727,14 +26727,14 @@
           <a:effectLst/>
           <a:extLst>
             <a:ext uri="{909E8E84-426E-40dd-AFC4-6F175D3DCCD1}">
-              <a14:hiddenFill xmlns:a14="http://schemas.microsoft.com/office/drawing/2010/main" xmlns="">
+              <a14:hiddenFill xmlns="" xmlns:a14="http://schemas.microsoft.com/office/drawing/2010/main">
                 <a:solidFill>
                   <a:srgbClr val="FFFFFF"/>
                 </a:solidFill>
               </a14:hiddenFill>
             </a:ext>
             <a:ext uri="{91240B29-F687-4f45-9708-019B960494DF}">
-              <a14:hiddenLine xmlns:a14="http://schemas.microsoft.com/office/drawing/2010/main" xmlns="" w="9525" cap="flat">
+              <a14:hiddenLine xmlns="" xmlns:a14="http://schemas.microsoft.com/office/drawing/2010/main" w="9525" cap="flat">
                 <a:solidFill>
                   <a:srgbClr val="000000"/>
                 </a:solidFill>
@@ -26744,7 +26744,7 @@
               </a14:hiddenLine>
             </a:ext>
             <a:ext uri="{AF507438-7753-43e0-B8FC-AC1667EBCBE1}">
-              <a14:hiddenEffects xmlns:a14="http://schemas.microsoft.com/office/drawing/2010/main" xmlns="">
+              <a14:hiddenEffects xmlns="" xmlns:a14="http://schemas.microsoft.com/office/drawing/2010/main">
                 <a:effectLst>
                   <a:outerShdw blurRad="63500" dist="38099" dir="2700000" algn="ctr" rotWithShape="0">
                     <a:srgbClr val="000000">
@@ -26794,14 +26794,14 @@
           <a:effectLst/>
           <a:extLst>
             <a:ext uri="{909E8E84-426E-40dd-AFC4-6F175D3DCCD1}">
-              <a14:hiddenFill xmlns:a14="http://schemas.microsoft.com/office/drawing/2010/main" xmlns="">
+              <a14:hiddenFill xmlns="" xmlns:a14="http://schemas.microsoft.com/office/drawing/2010/main">
                 <a:solidFill>
                   <a:srgbClr val="FFFFFF"/>
                 </a:solidFill>
               </a14:hiddenFill>
             </a:ext>
             <a:ext uri="{91240B29-F687-4f45-9708-019B960494DF}">
-              <a14:hiddenLine xmlns:a14="http://schemas.microsoft.com/office/drawing/2010/main" xmlns="" w="9525" cap="flat">
+              <a14:hiddenLine xmlns="" xmlns:a14="http://schemas.microsoft.com/office/drawing/2010/main" w="9525" cap="flat">
                 <a:solidFill>
                   <a:srgbClr val="000000"/>
                 </a:solidFill>
@@ -26811,7 +26811,7 @@
               </a14:hiddenLine>
             </a:ext>
             <a:ext uri="{AF507438-7753-43e0-B8FC-AC1667EBCBE1}">
-              <a14:hiddenEffects xmlns:a14="http://schemas.microsoft.com/office/drawing/2010/main" xmlns="">
+              <a14:hiddenEffects xmlns="" xmlns:a14="http://schemas.microsoft.com/office/drawing/2010/main">
                 <a:effectLst>
                   <a:outerShdw blurRad="63500" dist="38099" dir="2700000" algn="ctr" rotWithShape="0">
                     <a:srgbClr val="000000">
@@ -26868,7 +26868,7 @@
           <a:effectLst/>
           <a:extLst>
             <a:ext uri="{AF507438-7753-43e0-B8FC-AC1667EBCBE1}">
-              <a14:hiddenEffects xmlns:a14="http://schemas.microsoft.com/office/drawing/2010/main" xmlns="">
+              <a14:hiddenEffects xmlns="" xmlns:a14="http://schemas.microsoft.com/office/drawing/2010/main">
                 <a:effectLst>
                   <a:outerShdw blurRad="63500" dist="38099" dir="2700000" algn="ctr" rotWithShape="0">
                     <a:srgbClr val="000000">
@@ -26911,14 +26911,14 @@
           <a:effectLst/>
           <a:extLst>
             <a:ext uri="{909E8E84-426E-40dd-AFC4-6F175D3DCCD1}">
-              <a14:hiddenFill xmlns:a14="http://schemas.microsoft.com/office/drawing/2010/main" xmlns="">
+              <a14:hiddenFill xmlns="" xmlns:a14="http://schemas.microsoft.com/office/drawing/2010/main">
                 <a:solidFill>
                   <a:srgbClr val="FFFFFF"/>
                 </a:solidFill>
               </a14:hiddenFill>
             </a:ext>
             <a:ext uri="{91240B29-F687-4f45-9708-019B960494DF}">
-              <a14:hiddenLine xmlns:a14="http://schemas.microsoft.com/office/drawing/2010/main" xmlns="" w="9525" cap="flat">
+              <a14:hiddenLine xmlns="" xmlns:a14="http://schemas.microsoft.com/office/drawing/2010/main" w="9525" cap="flat">
                 <a:solidFill>
                   <a:srgbClr val="000000"/>
                 </a:solidFill>
@@ -26928,7 +26928,7 @@
               </a14:hiddenLine>
             </a:ext>
             <a:ext uri="{AF507438-7753-43e0-B8FC-AC1667EBCBE1}">
-              <a14:hiddenEffects xmlns:a14="http://schemas.microsoft.com/office/drawing/2010/main" xmlns="">
+              <a14:hiddenEffects xmlns="" xmlns:a14="http://schemas.microsoft.com/office/drawing/2010/main">
                 <a:effectLst>
                   <a:outerShdw blurRad="63500" dist="38099" dir="2700000" algn="ctr" rotWithShape="0">
                     <a:srgbClr val="000000">
@@ -26985,7 +26985,7 @@
           <a:effectLst/>
           <a:extLst>
             <a:ext uri="{AF507438-7753-43e0-B8FC-AC1667EBCBE1}">
-              <a14:hiddenEffects xmlns:a14="http://schemas.microsoft.com/office/drawing/2010/main" xmlns="">
+              <a14:hiddenEffects xmlns="" xmlns:a14="http://schemas.microsoft.com/office/drawing/2010/main">
                 <a:effectLst>
                   <a:outerShdw blurRad="63500" dist="38099" dir="2700000" algn="ctr" rotWithShape="0">
                     <a:srgbClr val="000000">
@@ -27035,7 +27035,7 @@
           <a:effectLst/>
           <a:extLst>
             <a:ext uri="{AF507438-7753-43e0-B8FC-AC1667EBCBE1}">
-              <a14:hiddenEffects xmlns:a14="http://schemas.microsoft.com/office/drawing/2010/main" xmlns="">
+              <a14:hiddenEffects xmlns="" xmlns:a14="http://schemas.microsoft.com/office/drawing/2010/main">
                 <a:effectLst>
                   <a:outerShdw blurRad="63500" dist="38099" dir="2700000" algn="ctr" rotWithShape="0">
                     <a:srgbClr val="000000">
@@ -27078,14 +27078,14 @@
           <a:effectLst/>
           <a:extLst>
             <a:ext uri="{909E8E84-426E-40dd-AFC4-6F175D3DCCD1}">
-              <a14:hiddenFill xmlns:a14="http://schemas.microsoft.com/office/drawing/2010/main" xmlns="">
+              <a14:hiddenFill xmlns="" xmlns:a14="http://schemas.microsoft.com/office/drawing/2010/main">
                 <a:solidFill>
                   <a:srgbClr val="FFFFFF"/>
                 </a:solidFill>
               </a14:hiddenFill>
             </a:ext>
             <a:ext uri="{91240B29-F687-4f45-9708-019B960494DF}">
-              <a14:hiddenLine xmlns:a14="http://schemas.microsoft.com/office/drawing/2010/main" xmlns="" w="9525" cap="flat">
+              <a14:hiddenLine xmlns="" xmlns:a14="http://schemas.microsoft.com/office/drawing/2010/main" w="9525" cap="flat">
                 <a:solidFill>
                   <a:srgbClr val="000000"/>
                 </a:solidFill>
@@ -27095,7 +27095,7 @@
               </a14:hiddenLine>
             </a:ext>
             <a:ext uri="{AF507438-7753-43e0-B8FC-AC1667EBCBE1}">
-              <a14:hiddenEffects xmlns:a14="http://schemas.microsoft.com/office/drawing/2010/main" xmlns="">
+              <a14:hiddenEffects xmlns="" xmlns:a14="http://schemas.microsoft.com/office/drawing/2010/main">
                 <a:effectLst>
                   <a:outerShdw blurRad="63500" dist="38099" dir="2700000" algn="ctr" rotWithShape="0">
                     <a:srgbClr val="000000">
@@ -27152,7 +27152,7 @@
           <a:effectLst/>
           <a:extLst>
             <a:ext uri="{AF507438-7753-43e0-B8FC-AC1667EBCBE1}">
-              <a14:hiddenEffects xmlns:a14="http://schemas.microsoft.com/office/drawing/2010/main" xmlns="">
+              <a14:hiddenEffects xmlns="" xmlns:a14="http://schemas.microsoft.com/office/drawing/2010/main">
                 <a:effectLst>
                   <a:outerShdw blurRad="63500" dist="38099" dir="2700000" algn="ctr" rotWithShape="0">
                     <a:srgbClr val="000000">
@@ -27202,7 +27202,7 @@
           <a:effectLst/>
           <a:extLst>
             <a:ext uri="{AF507438-7753-43e0-B8FC-AC1667EBCBE1}">
-              <a14:hiddenEffects xmlns:a14="http://schemas.microsoft.com/office/drawing/2010/main" xmlns="">
+              <a14:hiddenEffects xmlns="" xmlns:a14="http://schemas.microsoft.com/office/drawing/2010/main">
                 <a:effectLst>
                   <a:outerShdw blurRad="63500" dist="38099" dir="2700000" algn="ctr" rotWithShape="0">
                     <a:srgbClr val="000000">
@@ -27245,14 +27245,14 @@
           <a:effectLst/>
           <a:extLst>
             <a:ext uri="{909E8E84-426E-40dd-AFC4-6F175D3DCCD1}">
-              <a14:hiddenFill xmlns:a14="http://schemas.microsoft.com/office/drawing/2010/main" xmlns="">
+              <a14:hiddenFill xmlns="" xmlns:a14="http://schemas.microsoft.com/office/drawing/2010/main">
                 <a:solidFill>
                   <a:srgbClr val="FFFFFF"/>
                 </a:solidFill>
               </a14:hiddenFill>
             </a:ext>
             <a:ext uri="{91240B29-F687-4f45-9708-019B960494DF}">
-              <a14:hiddenLine xmlns:a14="http://schemas.microsoft.com/office/drawing/2010/main" xmlns="" w="9525" cap="flat">
+              <a14:hiddenLine xmlns="" xmlns:a14="http://schemas.microsoft.com/office/drawing/2010/main" w="9525" cap="flat">
                 <a:solidFill>
                   <a:srgbClr val="000000"/>
                 </a:solidFill>
@@ -27262,7 +27262,7 @@
               </a14:hiddenLine>
             </a:ext>
             <a:ext uri="{AF507438-7753-43e0-B8FC-AC1667EBCBE1}">
-              <a14:hiddenEffects xmlns:a14="http://schemas.microsoft.com/office/drawing/2010/main" xmlns="">
+              <a14:hiddenEffects xmlns="" xmlns:a14="http://schemas.microsoft.com/office/drawing/2010/main">
                 <a:effectLst>
                   <a:outerShdw blurRad="63500" dist="38099" dir="2700000" algn="ctr" rotWithShape="0">
                     <a:srgbClr val="000000">
@@ -27319,7 +27319,7 @@
           <a:effectLst/>
           <a:extLst>
             <a:ext uri="{AF507438-7753-43e0-B8FC-AC1667EBCBE1}">
-              <a14:hiddenEffects xmlns:a14="http://schemas.microsoft.com/office/drawing/2010/main" xmlns="">
+              <a14:hiddenEffects xmlns="" xmlns:a14="http://schemas.microsoft.com/office/drawing/2010/main">
                 <a:effectLst>
                   <a:outerShdw blurRad="63500" dist="38099" dir="2700000" algn="ctr" rotWithShape="0">
                     <a:srgbClr val="000000">
@@ -27362,14 +27362,14 @@
           <a:effectLst/>
           <a:extLst>
             <a:ext uri="{909E8E84-426E-40dd-AFC4-6F175D3DCCD1}">
-              <a14:hiddenFill xmlns:a14="http://schemas.microsoft.com/office/drawing/2010/main" xmlns="">
+              <a14:hiddenFill xmlns="" xmlns:a14="http://schemas.microsoft.com/office/drawing/2010/main">
                 <a:solidFill>
                   <a:srgbClr val="FFFFFF"/>
                 </a:solidFill>
               </a14:hiddenFill>
             </a:ext>
             <a:ext uri="{91240B29-F687-4f45-9708-019B960494DF}">
-              <a14:hiddenLine xmlns:a14="http://schemas.microsoft.com/office/drawing/2010/main" xmlns="" w="9525" cap="flat">
+              <a14:hiddenLine xmlns="" xmlns:a14="http://schemas.microsoft.com/office/drawing/2010/main" w="9525" cap="flat">
                 <a:solidFill>
                   <a:srgbClr val="000000"/>
                 </a:solidFill>
@@ -27379,7 +27379,7 @@
               </a14:hiddenLine>
             </a:ext>
             <a:ext uri="{AF507438-7753-43e0-B8FC-AC1667EBCBE1}">
-              <a14:hiddenEffects xmlns:a14="http://schemas.microsoft.com/office/drawing/2010/main" xmlns="">
+              <a14:hiddenEffects xmlns="" xmlns:a14="http://schemas.microsoft.com/office/drawing/2010/main">
                 <a:effectLst>
                   <a:outerShdw blurRad="63500" dist="38099" dir="2700000" algn="ctr" rotWithShape="0">
                     <a:srgbClr val="000000">
@@ -27599,14 +27599,14 @@
           <a:effectLst/>
           <a:extLst>
             <a:ext uri="{909E8E84-426E-40dd-AFC4-6F175D3DCCD1}">
-              <a14:hiddenFill xmlns:a14="http://schemas.microsoft.com/office/drawing/2010/main" xmlns="">
+              <a14:hiddenFill xmlns="" xmlns:a14="http://schemas.microsoft.com/office/drawing/2010/main">
                 <a:solidFill>
                   <a:srgbClr val="FFFFFF"/>
                 </a:solidFill>
               </a14:hiddenFill>
             </a:ext>
             <a:ext uri="{91240B29-F687-4f45-9708-019B960494DF}">
-              <a14:hiddenLine xmlns:a14="http://schemas.microsoft.com/office/drawing/2010/main" xmlns="" w="9525" cap="flat">
+              <a14:hiddenLine xmlns="" xmlns:a14="http://schemas.microsoft.com/office/drawing/2010/main" w="9525" cap="flat">
                 <a:solidFill>
                   <a:srgbClr val="000000"/>
                 </a:solidFill>
@@ -27616,7 +27616,7 @@
               </a14:hiddenLine>
             </a:ext>
             <a:ext uri="{AF507438-7753-43e0-B8FC-AC1667EBCBE1}">
-              <a14:hiddenEffects xmlns:a14="http://schemas.microsoft.com/office/drawing/2010/main" xmlns="">
+              <a14:hiddenEffects xmlns="" xmlns:a14="http://schemas.microsoft.com/office/drawing/2010/main">
                 <a:effectLst>
                   <a:outerShdw blurRad="63500" dist="38099" dir="2700000" algn="ctr" rotWithShape="0">
                     <a:srgbClr val="000000">
@@ -27854,14 +27854,14 @@
           <a:effectLst/>
           <a:extLst>
             <a:ext uri="{909E8E84-426E-40dd-AFC4-6F175D3DCCD1}">
-              <a14:hiddenFill xmlns:a14="http://schemas.microsoft.com/office/drawing/2010/main" xmlns="">
+              <a14:hiddenFill xmlns="" xmlns:a14="http://schemas.microsoft.com/office/drawing/2010/main">
                 <a:solidFill>
                   <a:srgbClr val="FFFFFF"/>
                 </a:solidFill>
               </a14:hiddenFill>
             </a:ext>
             <a:ext uri="{91240B29-F687-4f45-9708-019B960494DF}">
-              <a14:hiddenLine xmlns:a14="http://schemas.microsoft.com/office/drawing/2010/main" xmlns="" w="9525" cap="flat">
+              <a14:hiddenLine xmlns="" xmlns:a14="http://schemas.microsoft.com/office/drawing/2010/main" w="9525" cap="flat">
                 <a:solidFill>
                   <a:srgbClr val="808080"/>
                 </a:solidFill>
@@ -27871,7 +27871,7 @@
               </a14:hiddenLine>
             </a:ext>
             <a:ext uri="{AF507438-7753-43e0-B8FC-AC1667EBCBE1}">
-              <a14:hiddenEffects xmlns:a14="http://schemas.microsoft.com/office/drawing/2010/main" xmlns="">
+              <a14:hiddenEffects xmlns="" xmlns:a14="http://schemas.microsoft.com/office/drawing/2010/main">
                 <a:effectLst>
                   <a:outerShdw blurRad="63500" dist="38099" dir="2700000" algn="ctr" rotWithShape="0">
                     <a:srgbClr val="000000">
@@ -28108,7 +28108,7 @@
           <a:effectLst/>
           <a:extLst>
             <a:ext uri="{AF507438-7753-43e0-B8FC-AC1667EBCBE1}">
-              <a14:hiddenEffects xmlns:a14="http://schemas.microsoft.com/office/drawing/2010/main" xmlns="">
+              <a14:hiddenEffects xmlns="" xmlns:a14="http://schemas.microsoft.com/office/drawing/2010/main">
                 <a:effectLst>
                   <a:outerShdw blurRad="63500" dist="38099" dir="2700000" algn="ctr" rotWithShape="0">
                     <a:srgbClr val="000000">
@@ -28151,14 +28151,14 @@
           <a:effectLst/>
           <a:extLst>
             <a:ext uri="{909E8E84-426E-40dd-AFC4-6F175D3DCCD1}">
-              <a14:hiddenFill xmlns:a14="http://schemas.microsoft.com/office/drawing/2010/main" xmlns="">
+              <a14:hiddenFill xmlns="" xmlns:a14="http://schemas.microsoft.com/office/drawing/2010/main">
                 <a:solidFill>
                   <a:srgbClr val="FFFFFF"/>
                 </a:solidFill>
               </a14:hiddenFill>
             </a:ext>
             <a:ext uri="{91240B29-F687-4f45-9708-019B960494DF}">
-              <a14:hiddenLine xmlns:a14="http://schemas.microsoft.com/office/drawing/2010/main" xmlns="" w="9525" cap="flat">
+              <a14:hiddenLine xmlns="" xmlns:a14="http://schemas.microsoft.com/office/drawing/2010/main" w="9525" cap="flat">
                 <a:solidFill>
                   <a:srgbClr val="000000"/>
                 </a:solidFill>
@@ -28168,7 +28168,7 @@
               </a14:hiddenLine>
             </a:ext>
             <a:ext uri="{AF507438-7753-43e0-B8FC-AC1667EBCBE1}">
-              <a14:hiddenEffects xmlns:a14="http://schemas.microsoft.com/office/drawing/2010/main" xmlns="">
+              <a14:hiddenEffects xmlns="" xmlns:a14="http://schemas.microsoft.com/office/drawing/2010/main">
                 <a:effectLst>
                   <a:outerShdw blurRad="63500" dist="38099" dir="2700000" algn="ctr" rotWithShape="0">
                     <a:srgbClr val="000000">
@@ -28218,14 +28218,14 @@
           <a:effectLst/>
           <a:extLst>
             <a:ext uri="{909E8E84-426E-40dd-AFC4-6F175D3DCCD1}">
-              <a14:hiddenFill xmlns:a14="http://schemas.microsoft.com/office/drawing/2010/main" xmlns="">
+              <a14:hiddenFill xmlns="" xmlns:a14="http://schemas.microsoft.com/office/drawing/2010/main">
                 <a:solidFill>
                   <a:srgbClr val="FFFFFF"/>
                 </a:solidFill>
               </a14:hiddenFill>
             </a:ext>
             <a:ext uri="{91240B29-F687-4f45-9708-019B960494DF}">
-              <a14:hiddenLine xmlns:a14="http://schemas.microsoft.com/office/drawing/2010/main" xmlns="" w="9525" cap="flat">
+              <a14:hiddenLine xmlns="" xmlns:a14="http://schemas.microsoft.com/office/drawing/2010/main" w="9525" cap="flat">
                 <a:solidFill>
                   <a:srgbClr val="000000"/>
                 </a:solidFill>
@@ -28235,7 +28235,7 @@
               </a14:hiddenLine>
             </a:ext>
             <a:ext uri="{AF507438-7753-43e0-B8FC-AC1667EBCBE1}">
-              <a14:hiddenEffects xmlns:a14="http://schemas.microsoft.com/office/drawing/2010/main" xmlns="">
+              <a14:hiddenEffects xmlns="" xmlns:a14="http://schemas.microsoft.com/office/drawing/2010/main">
                 <a:effectLst>
                   <a:outerShdw blurRad="63500" dist="38099" dir="2700000" algn="ctr" rotWithShape="0">
                     <a:srgbClr val="000000">
@@ -28285,14 +28285,14 @@
           <a:effectLst/>
           <a:extLst>
             <a:ext uri="{909E8E84-426E-40dd-AFC4-6F175D3DCCD1}">
-              <a14:hiddenFill xmlns:a14="http://schemas.microsoft.com/office/drawing/2010/main" xmlns="">
+              <a14:hiddenFill xmlns="" xmlns:a14="http://schemas.microsoft.com/office/drawing/2010/main">
                 <a:solidFill>
                   <a:srgbClr val="FFFFFF"/>
                 </a:solidFill>
               </a14:hiddenFill>
             </a:ext>
             <a:ext uri="{91240B29-F687-4f45-9708-019B960494DF}">
-              <a14:hiddenLine xmlns:a14="http://schemas.microsoft.com/office/drawing/2010/main" xmlns="" w="9525" cap="flat">
+              <a14:hiddenLine xmlns="" xmlns:a14="http://schemas.microsoft.com/office/drawing/2010/main" w="9525" cap="flat">
                 <a:solidFill>
                   <a:srgbClr val="000000"/>
                 </a:solidFill>
@@ -28302,7 +28302,7 @@
               </a14:hiddenLine>
             </a:ext>
             <a:ext uri="{AF507438-7753-43e0-B8FC-AC1667EBCBE1}">
-              <a14:hiddenEffects xmlns:a14="http://schemas.microsoft.com/office/drawing/2010/main" xmlns="">
+              <a14:hiddenEffects xmlns="" xmlns:a14="http://schemas.microsoft.com/office/drawing/2010/main">
                 <a:effectLst>
                   <a:outerShdw blurRad="63500" dist="38099" dir="2700000" algn="ctr" rotWithShape="0">
                     <a:srgbClr val="000000">
@@ -28352,14 +28352,14 @@
           <a:effectLst/>
           <a:extLst>
             <a:ext uri="{909E8E84-426E-40dd-AFC4-6F175D3DCCD1}">
-              <a14:hiddenFill xmlns:a14="http://schemas.microsoft.com/office/drawing/2010/main" xmlns="">
+              <a14:hiddenFill xmlns="" xmlns:a14="http://schemas.microsoft.com/office/drawing/2010/main">
                 <a:solidFill>
                   <a:srgbClr val="FFFFFF"/>
                 </a:solidFill>
               </a14:hiddenFill>
             </a:ext>
             <a:ext uri="{91240B29-F687-4f45-9708-019B960494DF}">
-              <a14:hiddenLine xmlns:a14="http://schemas.microsoft.com/office/drawing/2010/main" xmlns="" w="9525" cap="flat">
+              <a14:hiddenLine xmlns="" xmlns:a14="http://schemas.microsoft.com/office/drawing/2010/main" w="9525" cap="flat">
                 <a:solidFill>
                   <a:srgbClr val="000000"/>
                 </a:solidFill>
@@ -28369,7 +28369,7 @@
               </a14:hiddenLine>
             </a:ext>
             <a:ext uri="{AF507438-7753-43e0-B8FC-AC1667EBCBE1}">
-              <a14:hiddenEffects xmlns:a14="http://schemas.microsoft.com/office/drawing/2010/main" xmlns="">
+              <a14:hiddenEffects xmlns="" xmlns:a14="http://schemas.microsoft.com/office/drawing/2010/main">
                 <a:effectLst>
                   <a:outerShdw blurRad="63500" dist="38099" dir="2700000" algn="ctr" rotWithShape="0">
                     <a:srgbClr val="000000">
@@ -28419,14 +28419,14 @@
           <a:effectLst/>
           <a:extLst>
             <a:ext uri="{909E8E84-426E-40dd-AFC4-6F175D3DCCD1}">
-              <a14:hiddenFill xmlns:a14="http://schemas.microsoft.com/office/drawing/2010/main" xmlns="">
+              <a14:hiddenFill xmlns="" xmlns:a14="http://schemas.microsoft.com/office/drawing/2010/main">
                 <a:solidFill>
                   <a:srgbClr val="FFFFFF"/>
                 </a:solidFill>
               </a14:hiddenFill>
             </a:ext>
             <a:ext uri="{91240B29-F687-4f45-9708-019B960494DF}">
-              <a14:hiddenLine xmlns:a14="http://schemas.microsoft.com/office/drawing/2010/main" xmlns="" w="9525" cap="flat">
+              <a14:hiddenLine xmlns="" xmlns:a14="http://schemas.microsoft.com/office/drawing/2010/main" w="9525" cap="flat">
                 <a:solidFill>
                   <a:srgbClr val="000000"/>
                 </a:solidFill>
@@ -28436,7 +28436,7 @@
               </a14:hiddenLine>
             </a:ext>
             <a:ext uri="{AF507438-7753-43e0-B8FC-AC1667EBCBE1}">
-              <a14:hiddenEffects xmlns:a14="http://schemas.microsoft.com/office/drawing/2010/main" xmlns="">
+              <a14:hiddenEffects xmlns="" xmlns:a14="http://schemas.microsoft.com/office/drawing/2010/main">
                 <a:effectLst>
                   <a:outerShdw blurRad="63500" dist="38099" dir="2700000" algn="ctr" rotWithShape="0">
                     <a:srgbClr val="000000">
@@ -28486,14 +28486,14 @@
           <a:effectLst/>
           <a:extLst>
             <a:ext uri="{909E8E84-426E-40dd-AFC4-6F175D3DCCD1}">
-              <a14:hiddenFill xmlns:a14="http://schemas.microsoft.com/office/drawing/2010/main" xmlns="">
+              <a14:hiddenFill xmlns="" xmlns:a14="http://schemas.microsoft.com/office/drawing/2010/main">
                 <a:solidFill>
                   <a:srgbClr val="FFFFFF"/>
                 </a:solidFill>
               </a14:hiddenFill>
             </a:ext>
             <a:ext uri="{91240B29-F687-4f45-9708-019B960494DF}">
-              <a14:hiddenLine xmlns:a14="http://schemas.microsoft.com/office/drawing/2010/main" xmlns="" w="9525" cap="flat">
+              <a14:hiddenLine xmlns="" xmlns:a14="http://schemas.microsoft.com/office/drawing/2010/main" w="9525" cap="flat">
                 <a:solidFill>
                   <a:srgbClr val="000000"/>
                 </a:solidFill>
@@ -28503,7 +28503,7 @@
               </a14:hiddenLine>
             </a:ext>
             <a:ext uri="{AF507438-7753-43e0-B8FC-AC1667EBCBE1}">
-              <a14:hiddenEffects xmlns:a14="http://schemas.microsoft.com/office/drawing/2010/main" xmlns="">
+              <a14:hiddenEffects xmlns="" xmlns:a14="http://schemas.microsoft.com/office/drawing/2010/main">
                 <a:effectLst>
                   <a:outerShdw blurRad="63500" dist="38099" dir="2700000" algn="ctr" rotWithShape="0">
                     <a:srgbClr val="000000">
@@ -28723,14 +28723,14 @@
           <a:effectLst/>
           <a:extLst>
             <a:ext uri="{909E8E84-426E-40dd-AFC4-6F175D3DCCD1}">
-              <a14:hiddenFill xmlns:a14="http://schemas.microsoft.com/office/drawing/2010/main" xmlns="">
+              <a14:hiddenFill xmlns="" xmlns:a14="http://schemas.microsoft.com/office/drawing/2010/main">
                 <a:solidFill>
                   <a:srgbClr val="FFFFFF"/>
                 </a:solidFill>
               </a14:hiddenFill>
             </a:ext>
             <a:ext uri="{91240B29-F687-4f45-9708-019B960494DF}">
-              <a14:hiddenLine xmlns:a14="http://schemas.microsoft.com/office/drawing/2010/main" xmlns="" w="9525" cap="flat">
+              <a14:hiddenLine xmlns="" xmlns:a14="http://schemas.microsoft.com/office/drawing/2010/main" w="9525" cap="flat">
                 <a:solidFill>
                   <a:srgbClr val="000000"/>
                 </a:solidFill>
@@ -28740,7 +28740,7 @@
               </a14:hiddenLine>
             </a:ext>
             <a:ext uri="{AF507438-7753-43e0-B8FC-AC1667EBCBE1}">
-              <a14:hiddenEffects xmlns:a14="http://schemas.microsoft.com/office/drawing/2010/main" xmlns="">
+              <a14:hiddenEffects xmlns="" xmlns:a14="http://schemas.microsoft.com/office/drawing/2010/main">
                 <a:effectLst>
                   <a:outerShdw blurRad="63500" dist="38099" dir="2700000" algn="ctr" rotWithShape="0">
                     <a:srgbClr val="000000">
@@ -28790,14 +28790,14 @@
           <a:effectLst/>
           <a:extLst>
             <a:ext uri="{909E8E84-426E-40dd-AFC4-6F175D3DCCD1}">
-              <a14:hiddenFill xmlns:a14="http://schemas.microsoft.com/office/drawing/2010/main" xmlns="">
+              <a14:hiddenFill xmlns="" xmlns:a14="http://schemas.microsoft.com/office/drawing/2010/main">
                 <a:solidFill>
                   <a:srgbClr val="FFFFFF"/>
                 </a:solidFill>
               </a14:hiddenFill>
             </a:ext>
             <a:ext uri="{91240B29-F687-4f45-9708-019B960494DF}">
-              <a14:hiddenLine xmlns:a14="http://schemas.microsoft.com/office/drawing/2010/main" xmlns="" w="9525" cap="flat">
+              <a14:hiddenLine xmlns="" xmlns:a14="http://schemas.microsoft.com/office/drawing/2010/main" w="9525" cap="flat">
                 <a:solidFill>
                   <a:srgbClr val="000000"/>
                 </a:solidFill>
@@ -28807,7 +28807,7 @@
               </a14:hiddenLine>
             </a:ext>
             <a:ext uri="{AF507438-7753-43e0-B8FC-AC1667EBCBE1}">
-              <a14:hiddenEffects xmlns:a14="http://schemas.microsoft.com/office/drawing/2010/main" xmlns="">
+              <a14:hiddenEffects xmlns="" xmlns:a14="http://schemas.microsoft.com/office/drawing/2010/main">
                 <a:effectLst>
                   <a:outerShdw blurRad="63500" dist="38099" dir="2700000" algn="ctr" rotWithShape="0">
                     <a:srgbClr val="000000">
@@ -28857,14 +28857,14 @@
           <a:effectLst/>
           <a:extLst>
             <a:ext uri="{909E8E84-426E-40dd-AFC4-6F175D3DCCD1}">
-              <a14:hiddenFill xmlns:a14="http://schemas.microsoft.com/office/drawing/2010/main" xmlns="">
+              <a14:hiddenFill xmlns="" xmlns:a14="http://schemas.microsoft.com/office/drawing/2010/main">
                 <a:solidFill>
                   <a:srgbClr val="FFFFFF"/>
                 </a:solidFill>
               </a14:hiddenFill>
             </a:ext>
             <a:ext uri="{91240B29-F687-4f45-9708-019B960494DF}">
-              <a14:hiddenLine xmlns:a14="http://schemas.microsoft.com/office/drawing/2010/main" xmlns="" w="9525" cap="flat">
+              <a14:hiddenLine xmlns="" xmlns:a14="http://schemas.microsoft.com/office/drawing/2010/main" w="9525" cap="flat">
                 <a:solidFill>
                   <a:srgbClr val="000000"/>
                 </a:solidFill>
@@ -28874,7 +28874,7 @@
               </a14:hiddenLine>
             </a:ext>
             <a:ext uri="{AF507438-7753-43e0-B8FC-AC1667EBCBE1}">
-              <a14:hiddenEffects xmlns:a14="http://schemas.microsoft.com/office/drawing/2010/main" xmlns="">
+              <a14:hiddenEffects xmlns="" xmlns:a14="http://schemas.microsoft.com/office/drawing/2010/main">
                 <a:effectLst>
                   <a:outerShdw blurRad="63500" dist="38099" dir="2700000" algn="ctr" rotWithShape="0">
                     <a:srgbClr val="000000">
@@ -28924,14 +28924,14 @@
           <a:effectLst/>
           <a:extLst>
             <a:ext uri="{909E8E84-426E-40dd-AFC4-6F175D3DCCD1}">
-              <a14:hiddenFill xmlns:a14="http://schemas.microsoft.com/office/drawing/2010/main" xmlns="">
+              <a14:hiddenFill xmlns="" xmlns:a14="http://schemas.microsoft.com/office/drawing/2010/main">
                 <a:solidFill>
                   <a:srgbClr val="FFFFFF"/>
                 </a:solidFill>
               </a14:hiddenFill>
             </a:ext>
             <a:ext uri="{91240B29-F687-4f45-9708-019B960494DF}">
-              <a14:hiddenLine xmlns:a14="http://schemas.microsoft.com/office/drawing/2010/main" xmlns="" w="9525" cap="flat">
+              <a14:hiddenLine xmlns="" xmlns:a14="http://schemas.microsoft.com/office/drawing/2010/main" w="9525" cap="flat">
                 <a:solidFill>
                   <a:srgbClr val="000000"/>
                 </a:solidFill>
@@ -28941,7 +28941,7 @@
               </a14:hiddenLine>
             </a:ext>
             <a:ext uri="{AF507438-7753-43e0-B8FC-AC1667EBCBE1}">
-              <a14:hiddenEffects xmlns:a14="http://schemas.microsoft.com/office/drawing/2010/main" xmlns="">
+              <a14:hiddenEffects xmlns="" xmlns:a14="http://schemas.microsoft.com/office/drawing/2010/main">
                 <a:effectLst>
                   <a:outerShdw blurRad="63500" dist="38099" dir="2700000" algn="ctr" rotWithShape="0">
                     <a:srgbClr val="000000">
@@ -28991,14 +28991,14 @@
           <a:effectLst/>
           <a:extLst>
             <a:ext uri="{909E8E84-426E-40dd-AFC4-6F175D3DCCD1}">
-              <a14:hiddenFill xmlns:a14="http://schemas.microsoft.com/office/drawing/2010/main" xmlns="">
+              <a14:hiddenFill xmlns="" xmlns:a14="http://schemas.microsoft.com/office/drawing/2010/main">
                 <a:solidFill>
                   <a:srgbClr val="FFFFFF"/>
                 </a:solidFill>
               </a14:hiddenFill>
             </a:ext>
             <a:ext uri="{91240B29-F687-4f45-9708-019B960494DF}">
-              <a14:hiddenLine xmlns:a14="http://schemas.microsoft.com/office/drawing/2010/main" xmlns="" w="9525" cap="flat">
+              <a14:hiddenLine xmlns="" xmlns:a14="http://schemas.microsoft.com/office/drawing/2010/main" w="9525" cap="flat">
                 <a:solidFill>
                   <a:srgbClr val="FF6600"/>
                 </a:solidFill>
@@ -29008,7 +29008,7 @@
               </a14:hiddenLine>
             </a:ext>
             <a:ext uri="{AF507438-7753-43e0-B8FC-AC1667EBCBE1}">
-              <a14:hiddenEffects xmlns:a14="http://schemas.microsoft.com/office/drawing/2010/main" xmlns="">
+              <a14:hiddenEffects xmlns="" xmlns:a14="http://schemas.microsoft.com/office/drawing/2010/main">
                 <a:effectLst>
                   <a:outerShdw blurRad="63500" dist="38099" dir="2700000" algn="ctr" rotWithShape="0">
                     <a:srgbClr val="000000">
@@ -29058,14 +29058,14 @@
           <a:effectLst/>
           <a:extLst>
             <a:ext uri="{909E8E84-426E-40dd-AFC4-6F175D3DCCD1}">
-              <a14:hiddenFill xmlns:a14="http://schemas.microsoft.com/office/drawing/2010/main" xmlns="">
+              <a14:hiddenFill xmlns="" xmlns:a14="http://schemas.microsoft.com/office/drawing/2010/main">
                 <a:solidFill>
                   <a:srgbClr val="FFFFFF"/>
                 </a:solidFill>
               </a14:hiddenFill>
             </a:ext>
             <a:ext uri="{91240B29-F687-4f45-9708-019B960494DF}">
-              <a14:hiddenLine xmlns:a14="http://schemas.microsoft.com/office/drawing/2010/main" xmlns="" w="9525" cap="flat">
+              <a14:hiddenLine xmlns="" xmlns:a14="http://schemas.microsoft.com/office/drawing/2010/main" w="9525" cap="flat">
                 <a:solidFill>
                   <a:srgbClr val="FF6600"/>
                 </a:solidFill>
@@ -29075,7 +29075,7 @@
               </a14:hiddenLine>
             </a:ext>
             <a:ext uri="{AF507438-7753-43e0-B8FC-AC1667EBCBE1}">
-              <a14:hiddenEffects xmlns:a14="http://schemas.microsoft.com/office/drawing/2010/main" xmlns="">
+              <a14:hiddenEffects xmlns="" xmlns:a14="http://schemas.microsoft.com/office/drawing/2010/main">
                 <a:effectLst>
                   <a:outerShdw blurRad="63500" dist="38099" dir="2700000" algn="ctr" rotWithShape="0">
                     <a:srgbClr val="000000">
@@ -29125,14 +29125,14 @@
           <a:effectLst/>
           <a:extLst>
             <a:ext uri="{909E8E84-426E-40dd-AFC4-6F175D3DCCD1}">
-              <a14:hiddenFill xmlns:a14="http://schemas.microsoft.com/office/drawing/2010/main" xmlns="">
+              <a14:hiddenFill xmlns="" xmlns:a14="http://schemas.microsoft.com/office/drawing/2010/main">
                 <a:solidFill>
                   <a:srgbClr val="FFFFFF"/>
                 </a:solidFill>
               </a14:hiddenFill>
             </a:ext>
             <a:ext uri="{91240B29-F687-4f45-9708-019B960494DF}">
-              <a14:hiddenLine xmlns:a14="http://schemas.microsoft.com/office/drawing/2010/main" xmlns="" w="9525" cap="flat">
+              <a14:hiddenLine xmlns="" xmlns:a14="http://schemas.microsoft.com/office/drawing/2010/main" w="9525" cap="flat">
                 <a:solidFill>
                   <a:srgbClr val="FF6600"/>
                 </a:solidFill>
@@ -29142,7 +29142,7 @@
               </a14:hiddenLine>
             </a:ext>
             <a:ext uri="{AF507438-7753-43e0-B8FC-AC1667EBCBE1}">
-              <a14:hiddenEffects xmlns:a14="http://schemas.microsoft.com/office/drawing/2010/main" xmlns="">
+              <a14:hiddenEffects xmlns="" xmlns:a14="http://schemas.microsoft.com/office/drawing/2010/main">
                 <a:effectLst>
                   <a:outerShdw blurRad="63500" dist="38099" dir="2700000" algn="ctr" rotWithShape="0">
                     <a:srgbClr val="000000">
@@ -29192,14 +29192,14 @@
           <a:effectLst/>
           <a:extLst>
             <a:ext uri="{909E8E84-426E-40dd-AFC4-6F175D3DCCD1}">
-              <a14:hiddenFill xmlns:a14="http://schemas.microsoft.com/office/drawing/2010/main" xmlns="">
+              <a14:hiddenFill xmlns="" xmlns:a14="http://schemas.microsoft.com/office/drawing/2010/main">
                 <a:solidFill>
                   <a:srgbClr val="FFFFFF"/>
                 </a:solidFill>
               </a14:hiddenFill>
             </a:ext>
             <a:ext uri="{91240B29-F687-4f45-9708-019B960494DF}">
-              <a14:hiddenLine xmlns:a14="http://schemas.microsoft.com/office/drawing/2010/main" xmlns="" w="9525" cap="flat">
+              <a14:hiddenLine xmlns="" xmlns:a14="http://schemas.microsoft.com/office/drawing/2010/main" w="9525" cap="flat">
                 <a:solidFill>
                   <a:srgbClr val="FF6600"/>
                 </a:solidFill>
@@ -29209,7 +29209,7 @@
               </a14:hiddenLine>
             </a:ext>
             <a:ext uri="{AF507438-7753-43e0-B8FC-AC1667EBCBE1}">
-              <a14:hiddenEffects xmlns:a14="http://schemas.microsoft.com/office/drawing/2010/main" xmlns="">
+              <a14:hiddenEffects xmlns="" xmlns:a14="http://schemas.microsoft.com/office/drawing/2010/main">
                 <a:effectLst>
                   <a:outerShdw blurRad="63500" dist="38099" dir="2700000" algn="ctr" rotWithShape="0">
                     <a:srgbClr val="000000">
@@ -29259,14 +29259,14 @@
           <a:effectLst/>
           <a:extLst>
             <a:ext uri="{909E8E84-426E-40dd-AFC4-6F175D3DCCD1}">
-              <a14:hiddenFill xmlns:a14="http://schemas.microsoft.com/office/drawing/2010/main" xmlns="">
+              <a14:hiddenFill xmlns="" xmlns:a14="http://schemas.microsoft.com/office/drawing/2010/main">
                 <a:solidFill>
                   <a:srgbClr val="FFFFFF"/>
                 </a:solidFill>
               </a14:hiddenFill>
             </a:ext>
             <a:ext uri="{91240B29-F687-4f45-9708-019B960494DF}">
-              <a14:hiddenLine xmlns:a14="http://schemas.microsoft.com/office/drawing/2010/main" xmlns="" w="9525" cap="flat">
+              <a14:hiddenLine xmlns="" xmlns:a14="http://schemas.microsoft.com/office/drawing/2010/main" w="9525" cap="flat">
                 <a:solidFill>
                   <a:srgbClr val="000000"/>
                 </a:solidFill>
@@ -29276,7 +29276,7 @@
               </a14:hiddenLine>
             </a:ext>
             <a:ext uri="{AF507438-7753-43e0-B8FC-AC1667EBCBE1}">
-              <a14:hiddenEffects xmlns:a14="http://schemas.microsoft.com/office/drawing/2010/main" xmlns="">
+              <a14:hiddenEffects xmlns="" xmlns:a14="http://schemas.microsoft.com/office/drawing/2010/main">
                 <a:effectLst>
                   <a:outerShdw blurRad="63500" dist="38099" dir="2700000" algn="ctr" rotWithShape="0">
                     <a:srgbClr val="000000">
@@ -29539,7 +29539,7 @@
           <a:effectLst/>
           <a:extLst>
             <a:ext uri="{AF507438-7753-43e0-B8FC-AC1667EBCBE1}">
-              <a14:hiddenEffects xmlns:a14="http://schemas.microsoft.com/office/drawing/2010/main" xmlns="">
+              <a14:hiddenEffects xmlns="" xmlns:a14="http://schemas.microsoft.com/office/drawing/2010/main">
                 <a:effectLst>
                   <a:outerShdw blurRad="63500" dist="38099" dir="2700000" algn="ctr" rotWithShape="0">
                     <a:srgbClr val="000000">
@@ -29595,7 +29595,7 @@
           <a:effectLst/>
           <a:extLst>
             <a:ext uri="{AF507438-7753-43e0-B8FC-AC1667EBCBE1}">
-              <a14:hiddenEffects xmlns:a14="http://schemas.microsoft.com/office/drawing/2010/main" xmlns="">
+              <a14:hiddenEffects xmlns="" xmlns:a14="http://schemas.microsoft.com/office/drawing/2010/main">
                 <a:effectLst>
                   <a:outerShdw blurRad="63500" dist="38099" dir="2700000" algn="ctr" rotWithShape="0">
                     <a:srgbClr val="000000">
@@ -29651,7 +29651,7 @@
           <a:effectLst/>
           <a:extLst>
             <a:ext uri="{AF507438-7753-43e0-B8FC-AC1667EBCBE1}">
-              <a14:hiddenEffects xmlns:a14="http://schemas.microsoft.com/office/drawing/2010/main" xmlns="">
+              <a14:hiddenEffects xmlns="" xmlns:a14="http://schemas.microsoft.com/office/drawing/2010/main">
                 <a:effectLst>
                   <a:outerShdw blurRad="63500" dist="38099" dir="2700000" algn="ctr" rotWithShape="0">
                     <a:srgbClr val="000000">
@@ -29707,7 +29707,7 @@
           <a:effectLst/>
           <a:extLst>
             <a:ext uri="{AF507438-7753-43e0-B8FC-AC1667EBCBE1}">
-              <a14:hiddenEffects xmlns:a14="http://schemas.microsoft.com/office/drawing/2010/main" xmlns="">
+              <a14:hiddenEffects xmlns="" xmlns:a14="http://schemas.microsoft.com/office/drawing/2010/main">
                 <a:effectLst>
                   <a:outerShdw blurRad="63500" dist="38099" dir="2700000" algn="ctr" rotWithShape="0">
                     <a:srgbClr val="000000">
@@ -29763,7 +29763,7 @@
           <a:effectLst/>
           <a:extLst>
             <a:ext uri="{AF507438-7753-43e0-B8FC-AC1667EBCBE1}">
-              <a14:hiddenEffects xmlns:a14="http://schemas.microsoft.com/office/drawing/2010/main" xmlns="">
+              <a14:hiddenEffects xmlns="" xmlns:a14="http://schemas.microsoft.com/office/drawing/2010/main">
                 <a:effectLst>
                   <a:outerShdw blurRad="63500" dist="38099" dir="2700000" algn="ctr" rotWithShape="0">
                     <a:srgbClr val="000000">
@@ -29811,12 +29811,12 @@
           <a:effectLst/>
           <a:extLst>
             <a:ext uri="{909E8E84-426E-40dd-AFC4-6F175D3DCCD1}">
-              <a14:hiddenFill xmlns:a14="http://schemas.microsoft.com/office/drawing/2010/main" xmlns="">
+              <a14:hiddenFill xmlns="" xmlns:a14="http://schemas.microsoft.com/office/drawing/2010/main">
                 <a:noFill/>
               </a14:hiddenFill>
             </a:ext>
             <a:ext uri="{AF507438-7753-43e0-B8FC-AC1667EBCBE1}">
-              <a14:hiddenEffects xmlns:a14="http://schemas.microsoft.com/office/drawing/2010/main" xmlns="">
+              <a14:hiddenEffects xmlns="" xmlns:a14="http://schemas.microsoft.com/office/drawing/2010/main">
                 <a:effectLst>
                   <a:outerShdw blurRad="63500" dist="38099" dir="2700000" algn="ctr" rotWithShape="0">
                     <a:srgbClr val="000000">
@@ -29865,14 +29865,14 @@
           <a:effectLst/>
           <a:extLst>
             <a:ext uri="{909E8E84-426E-40dd-AFC4-6F175D3DCCD1}">
-              <a14:hiddenFill xmlns:a14="http://schemas.microsoft.com/office/drawing/2010/main" xmlns="">
+              <a14:hiddenFill xmlns="" xmlns:a14="http://schemas.microsoft.com/office/drawing/2010/main">
                 <a:solidFill>
                   <a:srgbClr val="FFFFFF"/>
                 </a:solidFill>
               </a14:hiddenFill>
             </a:ext>
             <a:ext uri="{91240B29-F687-4f45-9708-019B960494DF}">
-              <a14:hiddenLine xmlns:a14="http://schemas.microsoft.com/office/drawing/2010/main" xmlns="" w="9525" cap="flat">
+              <a14:hiddenLine xmlns="" xmlns:a14="http://schemas.microsoft.com/office/drawing/2010/main" w="9525" cap="flat">
                 <a:solidFill>
                   <a:srgbClr val="000000"/>
                 </a:solidFill>
@@ -29882,7 +29882,7 @@
               </a14:hiddenLine>
             </a:ext>
             <a:ext uri="{AF507438-7753-43e0-B8FC-AC1667EBCBE1}">
-              <a14:hiddenEffects xmlns:a14="http://schemas.microsoft.com/office/drawing/2010/main" xmlns="">
+              <a14:hiddenEffects xmlns="" xmlns:a14="http://schemas.microsoft.com/office/drawing/2010/main">
                 <a:effectLst>
                   <a:outerShdw blurRad="63500" dist="38099" dir="2700000" algn="ctr" rotWithShape="0">
                     <a:srgbClr val="000000">
@@ -29985,14 +29985,14 @@
           <a:effectLst/>
           <a:extLst>
             <a:ext uri="{909E8E84-426E-40dd-AFC4-6F175D3DCCD1}">
-              <a14:hiddenFill xmlns:a14="http://schemas.microsoft.com/office/drawing/2010/main" xmlns="">
+              <a14:hiddenFill xmlns="" xmlns:a14="http://schemas.microsoft.com/office/drawing/2010/main">
                 <a:solidFill>
                   <a:srgbClr val="FFFFFF"/>
                 </a:solidFill>
               </a14:hiddenFill>
             </a:ext>
             <a:ext uri="{91240B29-F687-4f45-9708-019B960494DF}">
-              <a14:hiddenLine xmlns:a14="http://schemas.microsoft.com/office/drawing/2010/main" xmlns="" w="9525" cap="flat">
+              <a14:hiddenLine xmlns="" xmlns:a14="http://schemas.microsoft.com/office/drawing/2010/main" w="9525" cap="flat">
                 <a:solidFill>
                   <a:srgbClr val="000000"/>
                 </a:solidFill>
@@ -30002,7 +30002,7 @@
               </a14:hiddenLine>
             </a:ext>
             <a:ext uri="{AF507438-7753-43e0-B8FC-AC1667EBCBE1}">
-              <a14:hiddenEffects xmlns:a14="http://schemas.microsoft.com/office/drawing/2010/main" xmlns="">
+              <a14:hiddenEffects xmlns="" xmlns:a14="http://schemas.microsoft.com/office/drawing/2010/main">
                 <a:effectLst>
                   <a:outerShdw blurRad="63500" dist="38099" dir="2700000" algn="ctr" rotWithShape="0">
                     <a:srgbClr val="000000">
@@ -30276,7 +30276,7 @@
             <a:effectLst/>
             <a:extLst>
               <a:ext uri="{909E8E84-426E-40dd-AFC4-6F175D3DCCD1}">
-                <a14:hiddenFill xmlns:a14="http://schemas.microsoft.com/office/drawing/2010/main" xmlns="">
+                <a14:hiddenFill xmlns="" xmlns:a14="http://schemas.microsoft.com/office/drawing/2010/main">
                   <a:blipFill dpi="0" rotWithShape="0">
                     <a:blip/>
                     <a:srcRect/>
@@ -30287,7 +30287,7 @@
                 </a14:hiddenFill>
               </a:ext>
               <a:ext uri="{91240B29-F687-4f45-9708-019B960494DF}">
-                <a14:hiddenLine xmlns:a14="http://schemas.microsoft.com/office/drawing/2010/main" xmlns="" w="9525" cap="flat">
+                <a14:hiddenLine xmlns="" xmlns:a14="http://schemas.microsoft.com/office/drawing/2010/main" w="9525" cap="flat">
                   <a:solidFill>
                     <a:srgbClr val="808080"/>
                   </a:solidFill>
@@ -30297,7 +30297,7 @@
                 </a14:hiddenLine>
               </a:ext>
               <a:ext uri="{AF507438-7753-43e0-B8FC-AC1667EBCBE1}">
-                <a14:hiddenEffects xmlns:a14="http://schemas.microsoft.com/office/drawing/2010/main" xmlns="">
+                <a14:hiddenEffects xmlns="" xmlns:a14="http://schemas.microsoft.com/office/drawing/2010/main">
                   <a:effectLst>
                     <a:outerShdw blurRad="63500" dist="38099" dir="2700000" algn="ctr" rotWithShape="0">
                       <a:srgbClr val="000000">
@@ -30346,7 +30346,7 @@
             <a:effectLst/>
             <a:extLst>
               <a:ext uri="{909E8E84-426E-40dd-AFC4-6F175D3DCCD1}">
-                <a14:hiddenFill xmlns:a14="http://schemas.microsoft.com/office/drawing/2010/main" xmlns="">
+                <a14:hiddenFill xmlns="" xmlns:a14="http://schemas.microsoft.com/office/drawing/2010/main">
                   <a:blipFill dpi="0" rotWithShape="0">
                     <a:blip/>
                     <a:srcRect/>
@@ -30357,7 +30357,7 @@
                 </a14:hiddenFill>
               </a:ext>
               <a:ext uri="{91240B29-F687-4f45-9708-019B960494DF}">
-                <a14:hiddenLine xmlns:a14="http://schemas.microsoft.com/office/drawing/2010/main" xmlns="" w="9525" cap="flat">
+                <a14:hiddenLine xmlns="" xmlns:a14="http://schemas.microsoft.com/office/drawing/2010/main" w="9525" cap="flat">
                   <a:solidFill>
                     <a:srgbClr val="808080"/>
                   </a:solidFill>
@@ -30367,7 +30367,7 @@
                 </a14:hiddenLine>
               </a:ext>
               <a:ext uri="{AF507438-7753-43e0-B8FC-AC1667EBCBE1}">
-                <a14:hiddenEffects xmlns:a14="http://schemas.microsoft.com/office/drawing/2010/main" xmlns="">
+                <a14:hiddenEffects xmlns="" xmlns:a14="http://schemas.microsoft.com/office/drawing/2010/main">
                   <a:effectLst>
                     <a:outerShdw blurRad="63500" dist="38099" dir="2700000" algn="ctr" rotWithShape="0">
                       <a:srgbClr val="000000">
@@ -30403,14 +30403,14 @@
             <a:effectLst/>
             <a:extLst>
               <a:ext uri="{909E8E84-426E-40dd-AFC4-6F175D3DCCD1}">
-                <a14:hiddenFill xmlns:a14="http://schemas.microsoft.com/office/drawing/2010/main" xmlns="">
+                <a14:hiddenFill xmlns="" xmlns:a14="http://schemas.microsoft.com/office/drawing/2010/main">
                   <a:solidFill>
                     <a:srgbClr val="FFFFFF"/>
                   </a:solidFill>
                 </a14:hiddenFill>
               </a:ext>
               <a:ext uri="{91240B29-F687-4f45-9708-019B960494DF}">
-                <a14:hiddenLine xmlns:a14="http://schemas.microsoft.com/office/drawing/2010/main" xmlns="" w="9525" cap="flat">
+                <a14:hiddenLine xmlns="" xmlns:a14="http://schemas.microsoft.com/office/drawing/2010/main" w="9525" cap="flat">
                   <a:solidFill>
                     <a:srgbClr val="000000"/>
                   </a:solidFill>
@@ -30420,7 +30420,7 @@
                 </a14:hiddenLine>
               </a:ext>
               <a:ext uri="{AF507438-7753-43e0-B8FC-AC1667EBCBE1}">
-                <a14:hiddenEffects xmlns:a14="http://schemas.microsoft.com/office/drawing/2010/main" xmlns="">
+                <a14:hiddenEffects xmlns="" xmlns:a14="http://schemas.microsoft.com/office/drawing/2010/main">
                   <a:effectLst>
                     <a:outerShdw blurRad="63500" dist="38099" dir="2700000" algn="ctr" rotWithShape="0">
                       <a:srgbClr val="000000">
@@ -30687,7 +30687,7 @@
             <a:effectLst/>
             <a:extLst>
               <a:ext uri="{91240B29-F687-4f45-9708-019B960494DF}">
-                <a14:hiddenLine xmlns:a14="http://schemas.microsoft.com/office/drawing/2010/main" xmlns="" w="9525" cap="flat">
+                <a14:hiddenLine xmlns="" xmlns:a14="http://schemas.microsoft.com/office/drawing/2010/main" w="9525" cap="flat">
                   <a:solidFill>
                     <a:srgbClr val="FFFFFF"/>
                   </a:solidFill>
@@ -30697,7 +30697,7 @@
                 </a14:hiddenLine>
               </a:ext>
               <a:ext uri="{AF507438-7753-43e0-B8FC-AC1667EBCBE1}">
-                <a14:hiddenEffects xmlns:a14="http://schemas.microsoft.com/office/drawing/2010/main" xmlns="">
+                <a14:hiddenEffects xmlns="" xmlns:a14="http://schemas.microsoft.com/office/drawing/2010/main">
                   <a:effectLst>
                     <a:outerShdw blurRad="63500" dist="38099" dir="2700000" algn="ctr" rotWithShape="0">
                       <a:srgbClr val="000000">
@@ -30963,14 +30963,14 @@
           <a:effectLst/>
           <a:extLst>
             <a:ext uri="{909E8E84-426E-40dd-AFC4-6F175D3DCCD1}">
-              <a14:hiddenFill xmlns:a14="http://schemas.microsoft.com/office/drawing/2010/main" xmlns="">
+              <a14:hiddenFill xmlns="" xmlns:a14="http://schemas.microsoft.com/office/drawing/2010/main">
                 <a:solidFill>
                   <a:srgbClr val="FFFFFF"/>
                 </a:solidFill>
               </a14:hiddenFill>
             </a:ext>
             <a:ext uri="{91240B29-F687-4f45-9708-019B960494DF}">
-              <a14:hiddenLine xmlns:a14="http://schemas.microsoft.com/office/drawing/2010/main" xmlns="" w="9525" cap="flat">
+              <a14:hiddenLine xmlns="" xmlns:a14="http://schemas.microsoft.com/office/drawing/2010/main" w="9525" cap="flat">
                 <a:solidFill>
                   <a:srgbClr val="808080"/>
                 </a:solidFill>
@@ -30980,7 +30980,7 @@
               </a14:hiddenLine>
             </a:ext>
             <a:ext uri="{AF507438-7753-43e0-B8FC-AC1667EBCBE1}">
-              <a14:hiddenEffects xmlns:a14="http://schemas.microsoft.com/office/drawing/2010/main" xmlns="">
+              <a14:hiddenEffects xmlns="" xmlns:a14="http://schemas.microsoft.com/office/drawing/2010/main">
                 <a:effectLst>
                   <a:outerShdw blurRad="63500" dist="38099" dir="2700000" algn="ctr" rotWithShape="0">
                     <a:srgbClr val="000000">
@@ -31218,14 +31218,14 @@
           <a:effectLst/>
           <a:extLst>
             <a:ext uri="{909E8E84-426E-40dd-AFC4-6F175D3DCCD1}">
-              <a14:hiddenFill xmlns:a14="http://schemas.microsoft.com/office/drawing/2010/main" xmlns="">
+              <a14:hiddenFill xmlns="" xmlns:a14="http://schemas.microsoft.com/office/drawing/2010/main">
                 <a:solidFill>
                   <a:srgbClr val="FFFFFF"/>
                 </a:solidFill>
               </a14:hiddenFill>
             </a:ext>
             <a:ext uri="{91240B29-F687-4f45-9708-019B960494DF}">
-              <a14:hiddenLine xmlns:a14="http://schemas.microsoft.com/office/drawing/2010/main" xmlns="" w="9525" cap="flat">
+              <a14:hiddenLine xmlns="" xmlns:a14="http://schemas.microsoft.com/office/drawing/2010/main" w="9525" cap="flat">
                 <a:solidFill>
                   <a:srgbClr val="000000"/>
                 </a:solidFill>
@@ -31235,7 +31235,7 @@
               </a14:hiddenLine>
             </a:ext>
             <a:ext uri="{AF507438-7753-43e0-B8FC-AC1667EBCBE1}">
-              <a14:hiddenEffects xmlns:a14="http://schemas.microsoft.com/office/drawing/2010/main" xmlns="">
+              <a14:hiddenEffects xmlns="" xmlns:a14="http://schemas.microsoft.com/office/drawing/2010/main">
                 <a:effectLst>
                   <a:outerShdw blurRad="63500" dist="38099" dir="2700000" algn="ctr" rotWithShape="0">
                     <a:srgbClr val="000000">
@@ -31762,7 +31762,7 @@
           <a:effectLst/>
           <a:extLst>
             <a:ext uri="{909E8E84-426E-40dd-AFC4-6F175D3DCCD1}">
-              <a14:hiddenFill xmlns:a14="http://schemas.microsoft.com/office/drawing/2010/main" xmlns="">
+              <a14:hiddenFill xmlns="" xmlns:a14="http://schemas.microsoft.com/office/drawing/2010/main">
                 <a:blipFill dpi="0" rotWithShape="0">
                   <a:blip/>
                   <a:srcRect/>
@@ -31773,7 +31773,7 @@
               </a14:hiddenFill>
             </a:ext>
             <a:ext uri="{91240B29-F687-4f45-9708-019B960494DF}">
-              <a14:hiddenLine xmlns:a14="http://schemas.microsoft.com/office/drawing/2010/main" xmlns="" w="9525" cap="flat">
+              <a14:hiddenLine xmlns="" xmlns:a14="http://schemas.microsoft.com/office/drawing/2010/main" w="9525" cap="flat">
                 <a:solidFill>
                   <a:srgbClr val="808080"/>
                 </a:solidFill>
@@ -31783,7 +31783,7 @@
               </a14:hiddenLine>
             </a:ext>
             <a:ext uri="{AF507438-7753-43e0-B8FC-AC1667EBCBE1}">
-              <a14:hiddenEffects xmlns:a14="http://schemas.microsoft.com/office/drawing/2010/main" xmlns="">
+              <a14:hiddenEffects xmlns="" xmlns:a14="http://schemas.microsoft.com/office/drawing/2010/main">
                 <a:effectLst>
                   <a:outerShdw blurRad="63500" dist="38099" dir="2700000" algn="ctr" rotWithShape="0">
                     <a:srgbClr val="000000">
@@ -31819,14 +31819,14 @@
           <a:effectLst/>
           <a:extLst>
             <a:ext uri="{909E8E84-426E-40dd-AFC4-6F175D3DCCD1}">
-              <a14:hiddenFill xmlns:a14="http://schemas.microsoft.com/office/drawing/2010/main" xmlns="">
+              <a14:hiddenFill xmlns="" xmlns:a14="http://schemas.microsoft.com/office/drawing/2010/main">
                 <a:solidFill>
                   <a:srgbClr val="FFFFFF"/>
                 </a:solidFill>
               </a14:hiddenFill>
             </a:ext>
             <a:ext uri="{91240B29-F687-4f45-9708-019B960494DF}">
-              <a14:hiddenLine xmlns:a14="http://schemas.microsoft.com/office/drawing/2010/main" xmlns="" w="9525" cap="flat">
+              <a14:hiddenLine xmlns="" xmlns:a14="http://schemas.microsoft.com/office/drawing/2010/main" w="9525" cap="flat">
                 <a:solidFill>
                   <a:srgbClr val="808080"/>
                 </a:solidFill>
@@ -31836,7 +31836,7 @@
               </a14:hiddenLine>
             </a:ext>
             <a:ext uri="{AF507438-7753-43e0-B8FC-AC1667EBCBE1}">
-              <a14:hiddenEffects xmlns:a14="http://schemas.microsoft.com/office/drawing/2010/main" xmlns="">
+              <a14:hiddenEffects xmlns="" xmlns:a14="http://schemas.microsoft.com/office/drawing/2010/main">
                 <a:effectLst>
                   <a:outerShdw blurRad="63500" dist="38099" dir="2700000" algn="ctr" rotWithShape="0">
                     <a:srgbClr val="000000">
@@ -32192,7 +32192,7 @@
           <a:effectLst/>
           <a:extLst>
             <a:ext uri="{909E8E84-426E-40dd-AFC4-6F175D3DCCD1}">
-              <a14:hiddenFill xmlns:a14="http://schemas.microsoft.com/office/drawing/2010/main" xmlns="">
+              <a14:hiddenFill xmlns="" xmlns:a14="http://schemas.microsoft.com/office/drawing/2010/main">
                 <a:blipFill dpi="0" rotWithShape="0">
                   <a:blip/>
                   <a:srcRect l="14014" t="4515" r="7593" b="32079"/>
@@ -32203,7 +32203,7 @@
               </a14:hiddenFill>
             </a:ext>
             <a:ext uri="{91240B29-F687-4f45-9708-019B960494DF}">
-              <a14:hiddenLine xmlns:a14="http://schemas.microsoft.com/office/drawing/2010/main" xmlns="" w="9525" cap="flat">
+              <a14:hiddenLine xmlns="" xmlns:a14="http://schemas.microsoft.com/office/drawing/2010/main" w="9525" cap="flat">
                 <a:solidFill>
                   <a:srgbClr val="808080"/>
                 </a:solidFill>
@@ -32213,7 +32213,7 @@
               </a14:hiddenLine>
             </a:ext>
             <a:ext uri="{AF507438-7753-43e0-B8FC-AC1667EBCBE1}">
-              <a14:hiddenEffects xmlns:a14="http://schemas.microsoft.com/office/drawing/2010/main" xmlns="">
+              <a14:hiddenEffects xmlns="" xmlns:a14="http://schemas.microsoft.com/office/drawing/2010/main">
                 <a:effectLst>
                   <a:outerShdw blurRad="63500" dist="38099" dir="2700000" algn="ctr" rotWithShape="0">
                     <a:srgbClr val="000000">
@@ -32249,14 +32249,14 @@
           <a:effectLst/>
           <a:extLst>
             <a:ext uri="{909E8E84-426E-40dd-AFC4-6F175D3DCCD1}">
-              <a14:hiddenFill xmlns:a14="http://schemas.microsoft.com/office/drawing/2010/main" xmlns="">
+              <a14:hiddenFill xmlns="" xmlns:a14="http://schemas.microsoft.com/office/drawing/2010/main">
                 <a:solidFill>
                   <a:srgbClr val="FFFFFF"/>
                 </a:solidFill>
               </a14:hiddenFill>
             </a:ext>
             <a:ext uri="{91240B29-F687-4f45-9708-019B960494DF}">
-              <a14:hiddenLine xmlns:a14="http://schemas.microsoft.com/office/drawing/2010/main" xmlns="" w="9525" cap="flat">
+              <a14:hiddenLine xmlns="" xmlns:a14="http://schemas.microsoft.com/office/drawing/2010/main" w="9525" cap="flat">
                 <a:solidFill>
                   <a:srgbClr val="808080"/>
                 </a:solidFill>
@@ -32266,7 +32266,7 @@
               </a14:hiddenLine>
             </a:ext>
             <a:ext uri="{AF507438-7753-43e0-B8FC-AC1667EBCBE1}">
-              <a14:hiddenEffects xmlns:a14="http://schemas.microsoft.com/office/drawing/2010/main" xmlns="">
+              <a14:hiddenEffects xmlns="" xmlns:a14="http://schemas.microsoft.com/office/drawing/2010/main">
                 <a:effectLst>
                   <a:outerShdw blurRad="63500" dist="38099" dir="2700000" algn="ctr" rotWithShape="0">
                     <a:srgbClr val="000000">
@@ -32871,7 +32871,7 @@
         <a:effectLst/>
         <a:extLst>
           <a:ext uri="{AF507438-7753-43e0-B8FC-AC1667EBCBE1}">
-            <a14:hiddenEffects xmlns:a14="http://schemas.microsoft.com/office/drawing/2010/main" xmlns="">
+            <a14:hiddenEffects xmlns="" xmlns:a14="http://schemas.microsoft.com/office/drawing/2010/main">
               <a:effectLst>
                 <a:outerShdw blurRad="63500" dist="38099" dir="2700000" algn="ctr" rotWithShape="0">
                   <a:schemeClr val="bg2">
@@ -32947,7 +32947,7 @@
         <a:effectLst/>
         <a:extLst>
           <a:ext uri="{AF507438-7753-43e0-B8FC-AC1667EBCBE1}">
-            <a14:hiddenEffects xmlns:a14="http://schemas.microsoft.com/office/drawing/2010/main" xmlns="">
+            <a14:hiddenEffects xmlns="" xmlns:a14="http://schemas.microsoft.com/office/drawing/2010/main">
               <a:effectLst>
                 <a:outerShdw blurRad="63500" dist="38099" dir="2700000" algn="ctr" rotWithShape="0">
                   <a:schemeClr val="bg2">
